--- a/output/submission-2026-09-15/counsel-disposition-google-slides.pptx
+++ b/output/submission-2026-09-15/counsel-disposition-google-slides.pptx
@@ -2,40 +2,43 @@
 <file path=ppt/presentation.xml><?xml version="1.0" encoding="utf-8"?>
 <p:presentation xmlns:p="http://schemas.openxmlformats.org/presentationml/2006/main">
   <p:sldMasterIdLst>
-    <p:sldMasterId xmlns:r="http://schemas.openxmlformats.org/officeDocument/2006/relationships" id="2147483648" r:id="R98046a9b3adc457a"/>
+    <p:sldMasterId xmlns:r="http://schemas.openxmlformats.org/officeDocument/2006/relationships" id="2147483648" r:id="Rec7b589be50f4ed3"/>
   </p:sldMasterIdLst>
   <p:notesMasterIdLst>
-    <p:notesMasterId xmlns:r="http://schemas.openxmlformats.org/officeDocument/2006/relationships" r:id="R8761475fbfbe4a17"/>
+    <p:notesMasterId xmlns:r="http://schemas.openxmlformats.org/officeDocument/2006/relationships" r:id="R01a288a71e0a489e"/>
   </p:notesMasterIdLst>
   <p:sldIdLst>
-    <p:sldId xmlns:r="http://schemas.openxmlformats.org/officeDocument/2006/relationships" id="256" r:id="Ra2af882a21a242d0"/>
-    <p:sldId xmlns:r="http://schemas.openxmlformats.org/officeDocument/2006/relationships" id="257" r:id="R426eb5dbb41845e0"/>
-    <p:sldId xmlns:r="http://schemas.openxmlformats.org/officeDocument/2006/relationships" id="258" r:id="R46ff4f6970f34ce2"/>
-    <p:sldId xmlns:r="http://schemas.openxmlformats.org/officeDocument/2006/relationships" id="259" r:id="R3c56485d556c4a53"/>
-    <p:sldId xmlns:r="http://schemas.openxmlformats.org/officeDocument/2006/relationships" id="260" r:id="R0c1adc2b89e84ad3"/>
-    <p:sldId xmlns:r="http://schemas.openxmlformats.org/officeDocument/2006/relationships" id="261" r:id="R71570bb8dc094dc0"/>
-    <p:sldId xmlns:r="http://schemas.openxmlformats.org/officeDocument/2006/relationships" id="262" r:id="R2d8fd5ecc9454fb2"/>
-    <p:sldId xmlns:r="http://schemas.openxmlformats.org/officeDocument/2006/relationships" id="263" r:id="Rf209ab5aaa754006"/>
-    <p:sldId xmlns:r="http://schemas.openxmlformats.org/officeDocument/2006/relationships" id="264" r:id="Re000eba897024f79"/>
-    <p:sldId xmlns:r="http://schemas.openxmlformats.org/officeDocument/2006/relationships" id="265" r:id="R76a664ab4317487e"/>
-    <p:sldId xmlns:r="http://schemas.openxmlformats.org/officeDocument/2006/relationships" id="266" r:id="Rb3f9bcb7126c4792"/>
-    <p:sldId xmlns:r="http://schemas.openxmlformats.org/officeDocument/2006/relationships" id="267" r:id="R91627b95295749e5"/>
-    <p:sldId xmlns:r="http://schemas.openxmlformats.org/officeDocument/2006/relationships" id="268" r:id="R6c027fccdb0f40c7"/>
-    <p:sldId xmlns:r="http://schemas.openxmlformats.org/officeDocument/2006/relationships" id="269" r:id="R84a8fe7e73b441fb"/>
-    <p:sldId xmlns:r="http://schemas.openxmlformats.org/officeDocument/2006/relationships" id="270" r:id="R5d8a060d7c9c4304"/>
-    <p:sldId xmlns:r="http://schemas.openxmlformats.org/officeDocument/2006/relationships" id="271" r:id="R21717178cfc44dd6"/>
-    <p:sldId xmlns:r="http://schemas.openxmlformats.org/officeDocument/2006/relationships" id="272" r:id="Re892d379e7cb4c2e"/>
-    <p:sldId xmlns:r="http://schemas.openxmlformats.org/officeDocument/2006/relationships" id="273" r:id="R9dc9b08d56e34b64"/>
-    <p:sldId xmlns:r="http://schemas.openxmlformats.org/officeDocument/2006/relationships" id="274" r:id="R04c1a5f12cc744b2"/>
-    <p:sldId xmlns:r="http://schemas.openxmlformats.org/officeDocument/2006/relationships" id="275" r:id="R6493f050c5914db5"/>
-    <p:sldId xmlns:r="http://schemas.openxmlformats.org/officeDocument/2006/relationships" id="276" r:id="Rdb83ded89896445c"/>
-    <p:sldId xmlns:r="http://schemas.openxmlformats.org/officeDocument/2006/relationships" id="277" r:id="R8cce58c749df495d"/>
-    <p:sldId xmlns:r="http://schemas.openxmlformats.org/officeDocument/2006/relationships" id="278" r:id="Rc4cb660caecb44de"/>
-    <p:sldId xmlns:r="http://schemas.openxmlformats.org/officeDocument/2006/relationships" id="279" r:id="Rd45c70429ed24b09"/>
-    <p:sldId xmlns:r="http://schemas.openxmlformats.org/officeDocument/2006/relationships" id="280" r:id="R74bcfefc2cd44362"/>
-    <p:sldId xmlns:r="http://schemas.openxmlformats.org/officeDocument/2006/relationships" id="281" r:id="Rb2d271b33c104cc9"/>
-    <p:sldId xmlns:r="http://schemas.openxmlformats.org/officeDocument/2006/relationships" id="282" r:id="R5e58aa2cf1c34a5d"/>
-    <p:sldId xmlns:r="http://schemas.openxmlformats.org/officeDocument/2006/relationships" id="283" r:id="Ra5833b358a5a4145"/>
+    <p:sldId xmlns:r="http://schemas.openxmlformats.org/officeDocument/2006/relationships" id="256" r:id="R2bf2614f4bb844e3"/>
+    <p:sldId xmlns:r="http://schemas.openxmlformats.org/officeDocument/2006/relationships" id="257" r:id="R3167aa2c855a4a17"/>
+    <p:sldId xmlns:r="http://schemas.openxmlformats.org/officeDocument/2006/relationships" id="258" r:id="R3de173b467574b48"/>
+    <p:sldId xmlns:r="http://schemas.openxmlformats.org/officeDocument/2006/relationships" id="259" r:id="R5d7e4ac95c164057"/>
+    <p:sldId xmlns:r="http://schemas.openxmlformats.org/officeDocument/2006/relationships" id="260" r:id="R75418515c70c4dda"/>
+    <p:sldId xmlns:r="http://schemas.openxmlformats.org/officeDocument/2006/relationships" id="261" r:id="Rb612706e7fa8478b"/>
+    <p:sldId xmlns:r="http://schemas.openxmlformats.org/officeDocument/2006/relationships" id="262" r:id="Rfbecb33e8c1545e0"/>
+    <p:sldId xmlns:r="http://schemas.openxmlformats.org/officeDocument/2006/relationships" id="263" r:id="R7e884cfb60134bea"/>
+    <p:sldId xmlns:r="http://schemas.openxmlformats.org/officeDocument/2006/relationships" id="264" r:id="Rcbdcb0e61bc148c5"/>
+    <p:sldId xmlns:r="http://schemas.openxmlformats.org/officeDocument/2006/relationships" id="265" r:id="R247c0745546d467a"/>
+    <p:sldId xmlns:r="http://schemas.openxmlformats.org/officeDocument/2006/relationships" id="266" r:id="R97d1523c9eb24710"/>
+    <p:sldId xmlns:r="http://schemas.openxmlformats.org/officeDocument/2006/relationships" id="267" r:id="R435943b24d924f1a"/>
+    <p:sldId xmlns:r="http://schemas.openxmlformats.org/officeDocument/2006/relationships" id="268" r:id="Rc6a43e89fc634cc7"/>
+    <p:sldId xmlns:r="http://schemas.openxmlformats.org/officeDocument/2006/relationships" id="269" r:id="Rc73c3a0f15944868"/>
+    <p:sldId xmlns:r="http://schemas.openxmlformats.org/officeDocument/2006/relationships" id="270" r:id="R524e45a2c6c042fa"/>
+    <p:sldId xmlns:r="http://schemas.openxmlformats.org/officeDocument/2006/relationships" id="271" r:id="R133b173e025246a1"/>
+    <p:sldId xmlns:r="http://schemas.openxmlformats.org/officeDocument/2006/relationships" id="272" r:id="Rdb570b95dd4d4480"/>
+    <p:sldId xmlns:r="http://schemas.openxmlformats.org/officeDocument/2006/relationships" id="273" r:id="R3807e04ef3904840"/>
+    <p:sldId xmlns:r="http://schemas.openxmlformats.org/officeDocument/2006/relationships" id="274" r:id="Rd4cebe3f0f464849"/>
+    <p:sldId xmlns:r="http://schemas.openxmlformats.org/officeDocument/2006/relationships" id="275" r:id="R69b393c48d9c46da"/>
+    <p:sldId xmlns:r="http://schemas.openxmlformats.org/officeDocument/2006/relationships" id="276" r:id="R649a215210474a60"/>
+    <p:sldId xmlns:r="http://schemas.openxmlformats.org/officeDocument/2006/relationships" id="277" r:id="R3c7742a6ca814c97"/>
+    <p:sldId xmlns:r="http://schemas.openxmlformats.org/officeDocument/2006/relationships" id="278" r:id="R27e1167859a94dc1"/>
+    <p:sldId xmlns:r="http://schemas.openxmlformats.org/officeDocument/2006/relationships" id="279" r:id="R620732dcb4ad4321"/>
+    <p:sldId xmlns:r="http://schemas.openxmlformats.org/officeDocument/2006/relationships" id="280" r:id="R7d9eaf82217b481a"/>
+    <p:sldId xmlns:r="http://schemas.openxmlformats.org/officeDocument/2006/relationships" id="281" r:id="R544a1adf092440f0"/>
+    <p:sldId xmlns:r="http://schemas.openxmlformats.org/officeDocument/2006/relationships" id="282" r:id="Rcafa889813c743f1"/>
+    <p:sldId xmlns:r="http://schemas.openxmlformats.org/officeDocument/2006/relationships" id="283" r:id="R82bcf2c095e94d10"/>
+    <p:sldId xmlns:r="http://schemas.openxmlformats.org/officeDocument/2006/relationships" id="284" r:id="R68e7c627eba24127"/>
+    <p:sldId xmlns:r="http://schemas.openxmlformats.org/officeDocument/2006/relationships" id="285" r:id="R95d8d8a19cd84237"/>
+    <p:sldId xmlns:r="http://schemas.openxmlformats.org/officeDocument/2006/relationships" id="286" r:id="R3e7afe063d2d4dac"/>
   </p:sldIdLst>
   <p:sldSz cx="12192000" cy="6858000"/>
   <p:notesSz cx="6858000" cy="9144000"/>
@@ -824,7 +827,7 @@
           <a:lstStyle xmlns:a="http://schemas.openxmlformats.org/drawingml/2006/main"/>
           <a:p xmlns:a="http://schemas.openxmlformats.org/drawingml/2006/main">
             <a:r>
-              <a:t>Counsel’s published work motivates narrow clinician-defined criteria, review of disagreements, and explicit escalation endpoints. I apply those methods here; these case labels are the user physician’s adjudications, not Counsel-endorsed decisions. The public emergency-escalation study also treats context and case eligibility as important limits. For this prototype, routing can be scored deterministically after generation, while clinical advice requires a separate rubric. An offline model judge could assist future review only after comparison with independent clinician review. It should not silently convert a routing score into a claim about the entire response.</a:t>
+              <a:t>The positive endpoint for required clinician action combines ASYNC_PHYSICIAN and URGENT_ESCALATION. The revised physician reference requires action in 43 of 50 cases. The frozen Fable baseline assigns one of those action buckets to 41 of those 43 cases and misses C22 and C47. Of its nine SELF_CARE outputs, two require clinician review under that reference. This is a false-omission proportion of 2/9 among self-care decisions, a different denominator from the 2/43 missed-action proportion among reference-positive cases. The model routes all 25 reference-urgent cases to URGENT_ESCALATION. This merged bucket does not distinguish immediate emergency action from assessment today, and this small known set cannot establish the real-world rate of severe misses.</a:t>
             </a:r>
           </a:p>
           <a:p xmlns:a="http://schemas.openxmlformats.org/drawingml/2006/main">
@@ -834,42 +837,72 @@
           </a:p>
           <a:p xmlns:a="http://schemas.openxmlformats.org/drawingml/2006/main">
             <a:r>
+              <a:t>The reference reflects one physician reviewing known development cases after seeing model outputs. No patient outcome or observed harm was measured. These descriptive denominators accompany the retained 48/50 agreement and do not establish independent validation. C22 and C47 also contain unsupported reassuring negative findings, an observation about their saved rationales rather than a validated automatic rationale-quality metric. Correct routing does not establish safe medication advice or an appropriate care process.</a:t>
+            </a:r>
+          </a:p>
+          <a:p xmlns:a="http://schemas.openxmlformats.org/drawingml/2006/main">
+            <a:r>
+              <a:t/>
+            </a:r>
+          </a:p>
+          <a:p xmlns:a="http://schemas.openxmlformats.org/drawingml/2006/main">
+            <a:r>
+              <a:t>Counsel’s published quality-assurance work motivates narrow clinician-defined checks and explicit escalation endpoints. These case labels are the presenter physician’s adjudications, not Counsel-endorsed decisions. The new prompt experiment, authored challenge tests, and future independent clinical assessment are separate sources of evidence. No judge call enters the current prototype.</a:t>
+            </a:r>
+          </a:p>
+          <a:p xmlns:a="http://schemas.openxmlformats.org/drawingml/2006/main">
+            <a:r>
+              <a:t/>
+            </a:r>
+          </a:p>
+          <a:p xmlns:a="http://schemas.openxmlformats.org/drawingml/2006/main">
+            <a:r>
               <a:t>Sources</a:t>
             </a:r>
           </a:p>
           <a:p xmlns:a="http://schemas.openxmlformats.org/drawingml/2006/main">
             <a:r>
+              <a:t>data/evaluation/physician-adjudication-v3-2026-09-15.json</a:t>
+            </a:r>
+          </a:p>
+          <a:p xmlns:a="http://schemas.openxmlformats.org/drawingml/2006/main">
+            <a:r>
+              <a:t/>
+            </a:r>
+          </a:p>
+          <a:p xmlns:a="http://schemas.openxmlformats.org/drawingml/2006/main">
+            <a:r>
+              <a:t>outputs/stripped-3bucket-fable-2026-09-15/generation-complete.json</a:t>
+            </a:r>
+          </a:p>
+          <a:p xmlns:a="http://schemas.openxmlformats.org/drawingml/2006/main">
+            <a:r>
+              <a:t/>
+            </a:r>
+          </a:p>
+          <a:p xmlns:a="http://schemas.openxmlformats.org/drawingml/2006/main">
+            <a:r>
+              <a:t>outputs/physician-adjudication-v3-2026-09-15/comparison.json</a:t>
+            </a:r>
+          </a:p>
+          <a:p xmlns:a="http://schemas.openxmlformats.org/drawingml/2006/main">
+            <a:r>
+              <a:t/>
+            </a:r>
+          </a:p>
+          <a:p xmlns:a="http://schemas.openxmlformats.org/drawingml/2006/main">
+            <a:r>
+              <a:t>docs/FALSE_NEGATIVE_REDUCTION_PLAN_2026-09-16.md</a:t>
+            </a:r>
+          </a:p>
+          <a:p xmlns:a="http://schemas.openxmlformats.org/drawingml/2006/main">
+            <a:r>
+              <a:t/>
+            </a:r>
+          </a:p>
+          <a:p xmlns:a="http://schemas.openxmlformats.org/drawingml/2006/main">
+            <a:r>
               <a:t>https://www.counselhealth.com/blog/scaling-clinical-quality-assurance-with-ai-judges</a:t>
-            </a:r>
-          </a:p>
-          <a:p xmlns:a="http://schemas.openxmlformats.org/drawingml/2006/main">
-            <a:r>
-              <a:t/>
-            </a:r>
-          </a:p>
-          <a:p xmlns:a="http://schemas.openxmlformats.org/drawingml/2006/main">
-            <a:r>
-              <a:t>https://www.counselhealth.com/blog/how-counsel-leveraged-healthbench-to-assess-emergency-escalation</a:t>
-            </a:r>
-          </a:p>
-          <a:p xmlns:a="http://schemas.openxmlformats.org/drawingml/2006/main">
-            <a:r>
-              <a:t/>
-            </a:r>
-          </a:p>
-          <a:p xmlns:a="http://schemas.openxmlformats.org/drawingml/2006/main">
-            <a:r>
-              <a:t>Supplied llm-as-a-judge-framework.pdf, pages 4–8</a:t>
-            </a:r>
-          </a:p>
-          <a:p xmlns:a="http://schemas.openxmlformats.org/drawingml/2006/main">
-            <a:r>
-              <a:t/>
-            </a:r>
-          </a:p>
-          <a:p xmlns:a="http://schemas.openxmlformats.org/drawingml/2006/main">
-            <a:r>
-              <a:t>docs/PHYSICIAN_ADJUDICATION_V3_2026-09-15.md</a:t>
             </a:r>
           </a:p>
         </p:txBody>
@@ -1084,6 +1117,16 @@
           </a:p>
           <a:p xmlns:a="http://schemas.openxmlformats.org/drawingml/2006/main">
             <a:r>
+              <a:t>The September 16 false-negative reduction experiment is a separate development ablation of the proposed message-only policy. It includes known regression cases and an authored challenge set. Those cases do not fulfill the independent physician labeling, representative sampling, prespecified clinical acceptance limits or prospective evaluation requirements in this roadmap. An authored-test improvement cannot authorize clinical use or replace approval of the policy itself.</a:t>
+            </a:r>
+          </a:p>
+          <a:p xmlns:a="http://schemas.openxmlformats.org/drawingml/2006/main">
+            <a:r>
+              <a:t/>
+            </a:r>
+          </a:p>
+          <a:p xmlns:a="http://schemas.openxmlformats.org/drawingml/2006/main">
+            <a:r>
               <a:t>Sources</a:t>
             </a:r>
           </a:p>
@@ -1120,6 +1163,16 @@
           <a:p xmlns:a="http://schemas.openxmlformats.org/drawingml/2006/main">
             <a:r>
               <a:t>docs/SUBMISSION_RED_TEAM_2026-09-15.md</a:t>
+            </a:r>
+          </a:p>
+          <a:p xmlns:a="http://schemas.openxmlformats.org/drawingml/2006/main">
+            <a:r>
+              <a:t/>
+            </a:r>
+          </a:p>
+          <a:p xmlns:a="http://schemas.openxmlformats.org/drawingml/2006/main">
+            <a:r>
+              <a:t>docs/FALSE_NEGATIVE_REDUCTION_PLAN_2026-09-16.md</a:t>
             </a:r>
           </a:p>
         </p:txBody>
@@ -1794,6 +1847,16 @@
           </a:p>
           <a:p xmlns:a="http://schemas.openxmlformats.org/drawingml/2006/main">
             <a:r>
+              <a:t>This slide retains the original frozen baseline miss. The separate false-negative reduction experiment evaluates a new prompt and cannot rewrite this output or the selected GUI result. Its development results and pending independent validation are reported separately.</a:t>
+            </a:r>
+          </a:p>
+          <a:p xmlns:a="http://schemas.openxmlformats.org/drawingml/2006/main">
+            <a:r>
+              <a:t/>
+            </a:r>
+          </a:p>
+          <a:p xmlns:a="http://schemas.openxmlformats.org/drawingml/2006/main">
+            <a:r>
               <a:t>Sources</a:t>
             </a:r>
           </a:p>
@@ -2734,6 +2797,151 @@
 </p:notes>
 </file>
 
+<file path=ppt/notesSlides/notesSlide29.xml><?xml version="1.0" encoding="utf-8"?>
+<p:notes xmlns:p="http://schemas.openxmlformats.org/presentationml/2006/main">
+  <p:cSld>
+    <p:spTree>
+      <p:nvGrpSpPr>
+        <p:cNvPr id="1" name=""/>
+        <p:cNvGrpSpPr/>
+        <p:nvPr/>
+      </p:nvGrpSpPr>
+      <p:grpSpPr>
+        <a:xfrm xmlns:a="http://schemas.openxmlformats.org/drawingml/2006/main"/>
+      </p:grpSpPr>
+      <p:sp>
+        <p:nvSpPr>
+          <p:cNvPr id="2" name="Slide Image Placeholder 1"/>
+          <p:cNvSpPr>
+            <a:spLocks xmlns:a="http://schemas.openxmlformats.org/drawingml/2006/main" noGrp="1"/>
+          </p:cNvSpPr>
+          <p:nvPr>
+            <p:ph type="sldImg" idx="0"/>
+          </p:nvPr>
+        </p:nvSpPr>
+        <p:spPr/>
+      </p:sp>
+      <p:sp>
+        <p:nvSpPr>
+          <p:cNvPr id="3" name="Notes Placeholder 2"/>
+          <p:cNvSpPr>
+            <a:spLocks xmlns:a="http://schemas.openxmlformats.org/drawingml/2006/main" noGrp="1"/>
+          </p:cNvSpPr>
+          <p:nvPr>
+            <p:ph type="body" idx="1"/>
+          </p:nvPr>
+        </p:nvSpPr>
+        <p:spPr/>
+        <p:txBody>
+          <a:bodyPr xmlns:a="http://schemas.openxmlformats.org/drawingml/2006/main"/>
+          <a:lstStyle xmlns:a="http://schemas.openxmlformats.org/drawingml/2006/main"/>
+          <a:p xmlns:a="http://schemas.openxmlformats.org/drawingml/2006/main">
+            <a:r>
+              <a:t>This separate September 16 development experiment retains the Fable 5.1 low-effort model, adaptive thinking, 4096-token output limit, one provider call per case and the three original buckets. It adds one paragraph to the frozen system prompt: Use only findings stated in the message. An unreported finding is unknown, not absent. Choose SELF_CARE only when the supplied information supports no clinician assessment now. If missing information could materially change that decision, choose ASYNC_PHYSICIAN unless reported findings warrant URGENT_ESCALATION. Missing information alone does not establish an emergency. No reference, label, case ID, retrieval context or previous answer enters the user message.</a:t>
+            </a:r>
+          </a:p>
+          <a:p xmlns:a="http://schemas.openxmlformats.org/drawingml/2006/main">
+            <a:r>
+              <a:t/>
+            </a:r>
+          </a:p>
+          <a:p xmlns:a="http://schemas.openxmlformats.org/drawingml/2006/main">
+            <a:r>
+              <a:t>All 98 new calls completed with valid outputs: 50 known-case candidate calls and 24 calls in each authored-challenge arm. The known-case comparator is the previously frozen baseline, not a contemporaneous rerun. All references remained outside generation and scoring followed the completed output freeze. The known physician reference is still the unblinded, post-output v3 adjudication. The authored challenge labels are proposed policy expectations generated for development, with no independent physician approval. Its result must not be described as clinical validation.</a:t>
+            </a:r>
+          </a:p>
+          <a:p xmlns:a="http://schemas.openxmlformats.org/drawingml/2006/main">
+            <a:r>
+              <a:t/>
+            </a:r>
+          </a:p>
+          <a:p xmlns:a="http://schemas.openxmlformats.org/drawingml/2006/main">
+            <a:r>
+              <a:t>On the known set, C47 changes from self-care to the accepted async disposition, while C22 remains a missed review. C07 becomes a new self-care miss and C32 becomes an unnecessary async referral under the unchanged reference. C04, C43 and C49 change from accepted urgent escalation to async review. Their exact messages appear on slide 31. Thus the number of missed clinician-action cases stays at two, while missed urgent action increases from zero to three. The original frozen 48/50 result and the existing GUI remain unchanged.</a:t>
+            </a:r>
+          </a:p>
+          <a:p xmlns:a="http://schemas.openxmlformats.org/drawingml/2006/main">
+            <a:r>
+              <a:t/>
+            </a:r>
+          </a:p>
+          <a:p xmlns:a="http://schemas.openxmlformats.org/drawingml/2006/main">
+            <a:r>
+              <a:t>The new urgent errors are important because a generic instruction intended to prevent premature self-care can also shift the boundary between async review and urgent care. Several saved rationales focus on absence of emergency findings even though URGENT_ESCALATION includes same-day assessment. That is a hypothesis from these outputs, not an established causal mechanism. One run per arm does not isolate prompt effects from sampling variation, and related authored challenge cases are not independent samples of clinical prevalence. The authored challenge improvement cannot offset new urgent misses or establish safety. The candidate is not promoted. The next work requires approval of the clinical policy, independent reference labels and locked evaluation criteria before another clinical performance claim.</a:t>
+            </a:r>
+          </a:p>
+          <a:p xmlns:a="http://schemas.openxmlformats.org/drawingml/2006/main">
+            <a:r>
+              <a:t/>
+            </a:r>
+          </a:p>
+          <a:p xmlns:a="http://schemas.openxmlformats.org/drawingml/2006/main">
+            <a:r>
+              <a:t>Sources</a:t>
+            </a:r>
+          </a:p>
+          <a:p xmlns:a="http://schemas.openxmlformats.org/drawingml/2006/main">
+            <a:r>
+              <a:t>scripts/fn-reduction-protocol.mjs</a:t>
+            </a:r>
+          </a:p>
+          <a:p xmlns:a="http://schemas.openxmlformats.org/drawingml/2006/main">
+            <a:r>
+              <a:t/>
+            </a:r>
+          </a:p>
+          <a:p xmlns:a="http://schemas.openxmlformats.org/drawingml/2006/main">
+            <a:r>
+              <a:t>outputs/fn-reduction-2026-09-16/scorecard-known-development.json</a:t>
+            </a:r>
+          </a:p>
+          <a:p xmlns:a="http://schemas.openxmlformats.org/drawingml/2006/main">
+            <a:r>
+              <a:t/>
+            </a:r>
+          </a:p>
+          <a:p xmlns:a="http://schemas.openxmlformats.org/drawingml/2006/main">
+            <a:r>
+              <a:t>outputs/fn-reduction-2026-09-16/scorecard-authored-challenge.json</a:t>
+            </a:r>
+          </a:p>
+          <a:p xmlns:a="http://schemas.openxmlformats.org/drawingml/2006/main">
+            <a:r>
+              <a:t/>
+            </a:r>
+          </a:p>
+          <a:p xmlns:a="http://schemas.openxmlformats.org/drawingml/2006/main">
+            <a:r>
+              <a:t>docs/FALSE_NEGATIVE_REDUCTION_RESULTS_2026-09-16.md</a:t>
+            </a:r>
+          </a:p>
+        </p:txBody>
+      </p:sp>
+      <p:sp>
+        <p:nvSpPr>
+          <p:cNvPr id="4" name="Slide Number Placeholder 3"/>
+          <p:cNvSpPr>
+            <a:spLocks xmlns:a="http://schemas.openxmlformats.org/drawingml/2006/main" noGrp="1"/>
+          </p:cNvSpPr>
+          <p:nvPr>
+            <p:ph type="sldNum" idx="5"/>
+          </p:nvPr>
+        </p:nvSpPr>
+        <p:spPr/>
+        <p:txBody>
+          <a:bodyPr xmlns:a="http://schemas.openxmlformats.org/drawingml/2006/main"/>
+          <a:lstStyle xmlns:a="http://schemas.openxmlformats.org/drawingml/2006/main"/>
+          <a:p xmlns:a="http://schemas.openxmlformats.org/drawingml/2006/main"/>
+        </p:txBody>
+      </p:sp>
+    </p:spTree>
+  </p:cSld>
+  <p:clrMapOvr>
+    <a:masterClrMapping xmlns:a="http://schemas.openxmlformats.org/drawingml/2006/main"/>
+  </p:clrMapOvr>
+</p:notes>
+</file>
+
 <file path=ppt/notesSlides/notesSlide3.xml><?xml version="1.0" encoding="utf-8"?>
 <p:notes xmlns:p="http://schemas.openxmlformats.org/presentationml/2006/main">
   <p:cSld>
@@ -2794,6 +3002,16 @@
           </a:p>
           <a:p xmlns:a="http://schemas.openxmlformats.org/drawingml/2006/main">
             <a:r>
+              <a:t>This slide retains the original frozen baseline miss. The separate false-negative reduction experiment evaluates a new prompt and cannot rewrite this output or the selected GUI result. Its development results and pending independent validation are reported separately.</a:t>
+            </a:r>
+          </a:p>
+          <a:p xmlns:a="http://schemas.openxmlformats.org/drawingml/2006/main">
+            <a:r>
+              <a:t/>
+            </a:r>
+          </a:p>
+          <a:p xmlns:a="http://schemas.openxmlformats.org/drawingml/2006/main">
+            <a:r>
               <a:t>Sources</a:t>
             </a:r>
           </a:p>
@@ -2820,6 +3038,246 @@
           <a:p xmlns:a="http://schemas.openxmlformats.org/drawingml/2006/main">
             <a:r>
               <a:t>docs/PHYSICIAN_ADJUDICATION_V3_2026-09-15.md</a:t>
+            </a:r>
+          </a:p>
+        </p:txBody>
+      </p:sp>
+      <p:sp>
+        <p:nvSpPr>
+          <p:cNvPr id="4" name="Slide Number Placeholder 3"/>
+          <p:cNvSpPr>
+            <a:spLocks xmlns:a="http://schemas.openxmlformats.org/drawingml/2006/main" noGrp="1"/>
+          </p:cNvSpPr>
+          <p:nvPr>
+            <p:ph type="sldNum" idx="5"/>
+          </p:nvPr>
+        </p:nvSpPr>
+        <p:spPr/>
+        <p:txBody>
+          <a:bodyPr xmlns:a="http://schemas.openxmlformats.org/drawingml/2006/main"/>
+          <a:lstStyle xmlns:a="http://schemas.openxmlformats.org/drawingml/2006/main"/>
+          <a:p xmlns:a="http://schemas.openxmlformats.org/drawingml/2006/main"/>
+        </p:txBody>
+      </p:sp>
+    </p:spTree>
+  </p:cSld>
+  <p:clrMapOvr>
+    <a:masterClrMapping xmlns:a="http://schemas.openxmlformats.org/drawingml/2006/main"/>
+  </p:clrMapOvr>
+</p:notes>
+</file>
+
+<file path=ppt/notesSlides/notesSlide30.xml><?xml version="1.0" encoding="utf-8"?>
+<p:notes xmlns:p="http://schemas.openxmlformats.org/presentationml/2006/main">
+  <p:cSld>
+    <p:spTree>
+      <p:nvGrpSpPr>
+        <p:cNvPr id="1" name=""/>
+        <p:cNvGrpSpPr/>
+        <p:nvPr/>
+      </p:nvGrpSpPr>
+      <p:grpSpPr>
+        <a:xfrm xmlns:a="http://schemas.openxmlformats.org/drawingml/2006/main"/>
+      </p:grpSpPr>
+      <p:sp>
+        <p:nvSpPr>
+          <p:cNvPr id="2" name="Slide Image Placeholder 1"/>
+          <p:cNvSpPr>
+            <a:spLocks xmlns:a="http://schemas.openxmlformats.org/drawingml/2006/main" noGrp="1"/>
+          </p:cNvSpPr>
+          <p:nvPr>
+            <p:ph type="sldImg" idx="0"/>
+          </p:nvPr>
+        </p:nvSpPr>
+        <p:spPr/>
+      </p:sp>
+      <p:sp>
+        <p:nvSpPr>
+          <p:cNvPr id="3" name="Notes Placeholder 2"/>
+          <p:cNvSpPr>
+            <a:spLocks xmlns:a="http://schemas.openxmlformats.org/drawingml/2006/main" noGrp="1"/>
+          </p:cNvSpPr>
+          <p:nvPr>
+            <p:ph type="body" idx="1"/>
+          </p:nvPr>
+        </p:nvSpPr>
+        <p:spPr/>
+        <p:txBody>
+          <a:bodyPr xmlns:a="http://schemas.openxmlformats.org/drawingml/2006/main"/>
+          <a:lstStyle xmlns:a="http://schemas.openxmlformats.org/drawingml/2006/main"/>
+          <a:p xmlns:a="http://schemas.openxmlformats.org/drawingml/2006/main">
+            <a:r>
+              <a:t>The completed experiment implements a proposed policy as a development hypothesis. It does not establish that the policy is clinically approved, that the authored cases are an independent reference, or that any future workflow is safe for patient care. Those are separate accountable decisions. The prior general instruction did not reduce known-set missed clinician action and introduced urgent-routing disagreements. Avoid repeatedly tuning against these known misses while calling the same cases independent evidence. Preserve this negative result and freeze any future protocol before evaluation.</a:t>
+            </a:r>
+          </a:p>
+          <a:p xmlns:a="http://schemas.openxmlformats.org/drawingml/2006/main">
+            <a:r>
+              <a:t/>
+            </a:r>
+          </a:p>
+          <a:p xmlns:a="http://schemas.openxmlformats.org/drawingml/2006/main">
+            <a:r>
+              <a:t>The clinical lead must first define what evidence permits SELF_CARE, what information is material to that decision, and when urgent care means emergency action now versus in-person assessment today. Care operations must review whether the selected action can occur within the required interval. Missing information alone should not be treated as an emergency diagnosis. The operational policy needs a verified pathway when review is recommended.</a:t>
+            </a:r>
+          </a:p>
+          <a:p xmlns:a="http://schemas.openxmlformats.org/drawingml/2006/main">
+            <a:r>
+              <a:t/>
+            </a:r>
+          </a:p>
+          <a:p xmlns:a="http://schemas.openxmlformats.org/drawingml/2006/main">
+            <a:r>
+              <a:t>The clinical evaluation lead should obtain two independent clinician labels without showing model answers, with a third reviewer adjudicating disagreements. Freeze the reference and severity definitions before inference. Use a representative set for false reassurance and referral burden, plus a separately reported enriched set for rare or high-consequence misses. Neither a single aggregate agreement score nor zero misses in a small convenient sample establishes safety. Prespecify statistical uncertainty, relevant subgroup checks, run-to-run reliability and clinically approved acceptance limits. No numeric clinical threshold is asserted here.</a:t>
+            </a:r>
+          </a:p>
+          <a:p xmlns:a="http://schemas.openxmlformats.org/drawingml/2006/main">
+            <a:r>
+              <a:t/>
+            </a:r>
+          </a:p>
+          <a:p xmlns:a="http://schemas.openxmlformats.org/drawingml/2006/main">
+            <a:r>
+              <a:t>Only after offline evidence supports continuation should the team assess the suggestion alongside usual care, initially without changing patient decisions. Measure actual time to appropriate action, recommendation follow-through, overrides and workload. Clinical and safety owners should approve pause criteria for serious misses and verify rollback. The current take-home remains an independent synthetic demonstration. These future steps require authorized clinical participation, appropriate data permissions and organizational governance.</a:t>
+            </a:r>
+          </a:p>
+          <a:p xmlns:a="http://schemas.openxmlformats.org/drawingml/2006/main">
+            <a:r>
+              <a:t/>
+            </a:r>
+          </a:p>
+          <a:p xmlns:a="http://schemas.openxmlformats.org/drawingml/2006/main">
+            <a:r>
+              <a:t>Sources</a:t>
+            </a:r>
+          </a:p>
+          <a:p xmlns:a="http://schemas.openxmlformats.org/drawingml/2006/main">
+            <a:r>
+              <a:t>docs/FALSE_NEGATIVE_REDUCTION_PLAN_2026-09-16.md</a:t>
+            </a:r>
+          </a:p>
+          <a:p xmlns:a="http://schemas.openxmlformats.org/drawingml/2006/main">
+            <a:r>
+              <a:t/>
+            </a:r>
+          </a:p>
+          <a:p xmlns:a="http://schemas.openxmlformats.org/drawingml/2006/main">
+            <a:r>
+              <a:t>docs/FALSE_NEGATIVE_REDUCTION_RESULTS_2026-09-16.md</a:t>
+            </a:r>
+          </a:p>
+          <a:p xmlns:a="http://schemas.openxmlformats.org/drawingml/2006/main">
+            <a:r>
+              <a:t/>
+            </a:r>
+          </a:p>
+          <a:p xmlns:a="http://schemas.openxmlformats.org/drawingml/2006/main">
+            <a:r>
+              <a:t>https://www.imdrf.org/sites/default/files/2025-02/IMDRF_AIML%20WG_GMLP_N88%20Final.pdf</a:t>
+            </a:r>
+          </a:p>
+          <a:p xmlns:a="http://schemas.openxmlformats.org/drawingml/2006/main">
+            <a:r>
+              <a:t/>
+            </a:r>
+          </a:p>
+          <a:p xmlns:a="http://schemas.openxmlformats.org/drawingml/2006/main">
+            <a:r>
+              <a:t>https://www.nature.com/articles/s41591-022-01772-9</a:t>
+            </a:r>
+          </a:p>
+        </p:txBody>
+      </p:sp>
+      <p:sp>
+        <p:nvSpPr>
+          <p:cNvPr id="4" name="Slide Number Placeholder 3"/>
+          <p:cNvSpPr>
+            <a:spLocks xmlns:a="http://schemas.openxmlformats.org/drawingml/2006/main" noGrp="1"/>
+          </p:cNvSpPr>
+          <p:nvPr>
+            <p:ph type="sldNum" idx="5"/>
+          </p:nvPr>
+        </p:nvSpPr>
+        <p:spPr/>
+        <p:txBody>
+          <a:bodyPr xmlns:a="http://schemas.openxmlformats.org/drawingml/2006/main"/>
+          <a:lstStyle xmlns:a="http://schemas.openxmlformats.org/drawingml/2006/main"/>
+          <a:p xmlns:a="http://schemas.openxmlformats.org/drawingml/2006/main"/>
+        </p:txBody>
+      </p:sp>
+    </p:spTree>
+  </p:cSld>
+  <p:clrMapOvr>
+    <a:masterClrMapping xmlns:a="http://schemas.openxmlformats.org/drawingml/2006/main"/>
+  </p:clrMapOvr>
+</p:notes>
+</file>
+
+<file path=ppt/notesSlides/notesSlide31.xml><?xml version="1.0" encoding="utf-8"?>
+<p:notes xmlns:p="http://schemas.openxmlformats.org/presentationml/2006/main">
+  <p:cSld>
+    <p:spTree>
+      <p:nvGrpSpPr>
+        <p:cNvPr id="1" name=""/>
+        <p:cNvGrpSpPr/>
+        <p:nvPr/>
+      </p:nvGrpSpPr>
+      <p:grpSpPr>
+        <a:xfrm xmlns:a="http://schemas.openxmlformats.org/drawingml/2006/main"/>
+      </p:grpSpPr>
+      <p:sp>
+        <p:nvSpPr>
+          <p:cNvPr id="2" name="Slide Image Placeholder 1"/>
+          <p:cNvSpPr>
+            <a:spLocks xmlns:a="http://schemas.openxmlformats.org/drawingml/2006/main" noGrp="1"/>
+          </p:cNvSpPr>
+          <p:nvPr>
+            <p:ph type="sldImg" idx="0"/>
+          </p:nvPr>
+        </p:nvSpPr>
+        <p:spPr/>
+      </p:sp>
+      <p:sp>
+        <p:nvSpPr>
+          <p:cNvPr id="3" name="Notes Placeholder 2"/>
+          <p:cNvSpPr>
+            <a:spLocks xmlns:a="http://schemas.openxmlformats.org/drawingml/2006/main" noGrp="1"/>
+          </p:cNvSpPr>
+          <p:nvPr>
+            <p:ph type="body" idx="1"/>
+          </p:nvPr>
+        </p:nvSpPr>
+        <p:spPr/>
+        <p:txBody>
+          <a:bodyPr xmlns:a="http://schemas.openxmlformats.org/drawingml/2006/main"/>
+          <a:lstStyle xmlns:a="http://schemas.openxmlformats.org/drawingml/2006/main"/>
+          <a:p xmlns:a="http://schemas.openxmlformats.org/drawingml/2006/main">
+            <a:r>
+              <a:t>These are the exact synthetic assignment messages, reproduced from the labels-free input file verified against the frozen baseline requests. They entered the separate candidate generation without case IDs or reference labels. C04, C43 and C49 are three new urgent-action false negatives under the unchanged physician v3 reference: the candidate still requests clinician review but assigns async instead of urgent care. The table records a routing disagreement, not an observed patient outcome or a confirmed diagnosis. No case-specific runtime rule or label revision follows from this review. All three cases and rationales remain in the frozen development scorecard. No CSV label serves as a clinical target.</a:t>
+            </a:r>
+          </a:p>
+          <a:p xmlns:a="http://schemas.openxmlformats.org/drawingml/2006/main">
+            <a:r>
+              <a:t/>
+            </a:r>
+          </a:p>
+          <a:p xmlns:a="http://schemas.openxmlformats.org/drawingml/2006/main">
+            <a:r>
+              <a:t>Sources</a:t>
+            </a:r>
+          </a:p>
+          <a:p xmlns:a="http://schemas.openxmlformats.org/drawingml/2006/main">
+            <a:r>
+              <a:t>outputs/fn-reduction-2026-09-16/known-messages.json</a:t>
+            </a:r>
+          </a:p>
+          <a:p xmlns:a="http://schemas.openxmlformats.org/drawingml/2006/main">
+            <a:r>
+              <a:t/>
+            </a:r>
+          </a:p>
+          <a:p xmlns:a="http://schemas.openxmlformats.org/drawingml/2006/main">
+            <a:r>
+              <a:t>outputs/fn-reduction-2026-09-16/scorecard-known-development.json</a:t>
             </a:r>
           </a:p>
         </p:txBody>
@@ -3517,7 +3975,7 @@
   </p:cSld>
   <p:clrMap bg1="lt1" tx1="dk1" bg2="lt2" tx2="dk2" accent1="accent1" accent2="accent2" accent3="accent3" accent4="accent4" accent5="accent5" accent6="accent6" hlink="hlink" folHlink="folHlink"/>
   <p:sldLayoutIdLst>
-    <p:sldLayoutId xmlns:r="http://schemas.openxmlformats.org/officeDocument/2006/relationships" id="2147483649" r:id="Rbdfe5d67516b4d09"/>
+    <p:sldLayoutId xmlns:r="http://schemas.openxmlformats.org/officeDocument/2006/relationships" id="2147483649" r:id="Rdeee332b0a2243e9"/>
   </p:sldLayoutIdLst>
   <p:txStyles>
     <p:titleStyle>
@@ -4068,7 +4526,7 @@
           <p:cNvPr id="16" name="">
             <a:extLst>
               <a:ext uri="{FF2B5EF4-FFF2-40B4-BE49-F238E27FC236}">
-                <ns2:creationId id="{0579E67A-063F-4EF2-8DC1-CDD9D61E377D}"/>
+                <ns2:creationId id="{E1AFEE42-206F-4F05-B6E8-29A36C8568DA}"/>
               </a:ext>
             </a:extLst>
           </p:cNvPr>
@@ -4125,7 +4583,7 @@
           <p:cNvPr id="2" name="">
             <a:extLst>
               <a:ext uri="{FF2B5EF4-FFF2-40B4-BE49-F238E27FC236}">
-                <ns2:creationId id="{5CF8C036-D753-4BAE-83E7-61ADEBC99CA2}"/>
+                <ns2:creationId id="{CF2164FB-7344-4DF5-8A87-D97D62C1B85D}"/>
               </a:ext>
             </a:extLst>
           </p:cNvPr>
@@ -4186,7 +4644,7 @@
           <p:nvPr/>
         </p:nvPicPr>
         <p:blipFill>
-          <a:blip r:embed="R2d335d7e7a2f4f5b"/>
+          <a:blip r:embed="Rec8ef0f6b4df4340"/>
           <a:stretch/>
         </p:blipFill>
         <p:spPr>
@@ -4204,7 +4662,7 @@
           <p:cNvPr id="4" name="">
             <a:extLst>
               <a:ext uri="{FF2B5EF4-FFF2-40B4-BE49-F238E27FC236}">
-                <ns2:creationId id="{A787EBAE-CAA7-4C74-BFF4-F4FE7EB63B9C}"/>
+                <ns2:creationId id="{D0DA9419-C4FE-4C02-8E53-B4AA2B53A0D8}"/>
               </a:ext>
             </a:extLst>
           </p:cNvPr>
@@ -4261,7 +4719,7 @@
           <p:cNvPr id="5" name="">
             <a:extLst>
               <a:ext uri="{FF2B5EF4-FFF2-40B4-BE49-F238E27FC236}">
-                <ns2:creationId id="{F883B9C1-CEE5-456D-ABA4-3B2894AED7F1}"/>
+                <ns2:creationId id="{DF238197-91C0-4E28-8414-002843DF5EED}"/>
               </a:ext>
             </a:extLst>
           </p:cNvPr>
@@ -4318,7 +4776,7 @@
           <p:cNvPr id="6" name="">
             <a:extLst>
               <a:ext uri="{FF2B5EF4-FFF2-40B4-BE49-F238E27FC236}">
-                <ns2:creationId id="{5AC12C77-7D19-4955-BB79-5FA58A955C68}"/>
+                <ns2:creationId id="{8ED08D6D-7676-4515-80F3-84EBB7A8F643}"/>
               </a:ext>
             </a:extLst>
           </p:cNvPr>
@@ -4375,7 +4833,7 @@
           <p:cNvPr id="7" name="">
             <a:extLst>
               <a:ext uri="{FF2B5EF4-FFF2-40B4-BE49-F238E27FC236}">
-                <ns2:creationId id="{73924621-C5F4-45A0-80ED-0342D736660A}"/>
+                <ns2:creationId id="{AB234C04-6B4D-4115-9FE0-374323905D22}"/>
               </a:ext>
             </a:extLst>
           </p:cNvPr>
@@ -4432,7 +4890,7 @@
           <p:cNvPr id="8" name="">
             <a:extLst>
               <a:ext uri="{FF2B5EF4-FFF2-40B4-BE49-F238E27FC236}">
-                <ns2:creationId id="{B1F23241-0F58-4498-BECE-9DC8395EBC7F}"/>
+                <ns2:creationId id="{3C55C66A-E3F1-4B60-ABD1-FF3B09733700}"/>
               </a:ext>
             </a:extLst>
           </p:cNvPr>
@@ -4490,7 +4948,7 @@
           <p:cNvPr id="9" name="">
             <a:extLst>
               <a:ext uri="{FF2B5EF4-FFF2-40B4-BE49-F238E27FC236}">
-                <ns2:creationId id="{B72E36E2-B0B0-4F71-86FA-394905246888}"/>
+                <ns2:creationId id="{7D8CE243-B554-46BA-94BC-4541C71B609C}"/>
               </a:ext>
             </a:extLst>
           </p:cNvPr>
@@ -4547,7 +5005,7 @@
           <p:cNvPr id="10" name="">
             <a:extLst>
               <a:ext uri="{FF2B5EF4-FFF2-40B4-BE49-F238E27FC236}">
-                <ns2:creationId id="{63E4CC0E-FB68-4004-A68C-E0E0F748B9F5}"/>
+                <ns2:creationId id="{E5AFD7CC-087B-41B6-AA89-4801F43BBC24}"/>
               </a:ext>
             </a:extLst>
           </p:cNvPr>
@@ -4604,7 +5062,7 @@
           <p:cNvPr id="11" name="">
             <a:extLst>
               <a:ext uri="{FF2B5EF4-FFF2-40B4-BE49-F238E27FC236}">
-                <ns2:creationId id="{4489691D-F784-4BA0-8C22-2BEAD345F505}"/>
+                <ns2:creationId id="{73BECD1B-DD00-4E4E-9F08-966BD7C42BCB}"/>
               </a:ext>
             </a:extLst>
           </p:cNvPr>
@@ -4662,7 +5120,7 @@
           <p:cNvPr id="12" name="">
             <a:extLst>
               <a:ext uri="{FF2B5EF4-FFF2-40B4-BE49-F238E27FC236}">
-                <ns2:creationId id="{BAA1923E-14E3-41BD-856B-0B62DDB147FF}"/>
+                <ns2:creationId id="{206605D2-8598-4C77-B587-448F7B193A1B}"/>
               </a:ext>
             </a:extLst>
           </p:cNvPr>
@@ -4719,7 +5177,7 @@
           <p:cNvPr id="13" name="">
             <a:extLst>
               <a:ext uri="{FF2B5EF4-FFF2-40B4-BE49-F238E27FC236}">
-                <ns2:creationId id="{1577713D-44D8-43C3-9477-4831570DB6B0}"/>
+                <ns2:creationId id="{D5C61D7A-77EB-4AD2-9374-FE827C966B94}"/>
               </a:ext>
             </a:extLst>
           </p:cNvPr>
@@ -4776,7 +5234,7 @@
           <p:cNvPr id="14" name="">
             <a:extLst>
               <a:ext uri="{FF2B5EF4-FFF2-40B4-BE49-F238E27FC236}">
-                <ns2:creationId id="{2743287A-83F0-4812-B4E2-B0551CC27B3D}"/>
+                <ns2:creationId id="{FCC89A28-5B1C-4A37-AC49-9E19CF627601}"/>
               </a:ext>
             </a:extLst>
           </p:cNvPr>
@@ -4833,7 +5291,7 @@
           <p:cNvPr id="15" name="">
             <a:extLst>
               <a:ext uri="{FF2B5EF4-FFF2-40B4-BE49-F238E27FC236}">
-                <ns2:creationId id="{02494F5B-190E-4204-9016-CBB670E2C00B}"/>
+                <ns2:creationId id="{6D31EA88-0FFD-4FD7-BC40-CAEC4E48A97A}"/>
               </a:ext>
             </a:extLst>
           </p:cNvPr>
@@ -4888,7 +5346,7 @@
     </p:spTree>
     <p:extLst>
       <p:ext uri="{BB962C8B-B14F-4D97-AF65-F5344CB8AC3E}">
-        <ns4:creationId val="1039736999"/>
+        <ns4:creationId val="618866186"/>
       </p:ext>
     </p:extLst>
   </p:cSld>
@@ -4919,7 +5377,7 @@
           <p:cNvPr id="7" name="">
             <a:extLst xmlns:a="http://schemas.openxmlformats.org/drawingml/2006/main">
               <a:ext uri="{FF2B5EF4-FFF2-40B4-BE49-F238E27FC236}">
-                <a16:creationId xmlns:a16="http://schemas.microsoft.com/office/drawing/2014/main" id="{98FDA846-45A3-401C-B817-A4FA5DDD65B3}"/>
+                <a16:creationId xmlns:a16="http://schemas.microsoft.com/office/drawing/2014/main" id="{2A23B494-59E0-4EDB-AFE1-B050FAFCC7C5}"/>
               </a:ext>
             </a:extLst>
           </p:cNvPr>
@@ -5588,7 +6046,7 @@
           <p:cNvPr id="3" name="">
             <a:extLst xmlns:a="http://schemas.openxmlformats.org/drawingml/2006/main">
               <a:ext uri="{FF2B5EF4-FFF2-40B4-BE49-F238E27FC236}">
-                <a16:creationId xmlns:a16="http://schemas.microsoft.com/office/drawing/2014/main" id="{215F0F48-CE2B-4FBB-8723-C57D5C93E698}"/>
+                <a16:creationId xmlns:a16="http://schemas.microsoft.com/office/drawing/2014/main" id="{721F2854-8D98-4A80-8834-CC2561C9AEC2}"/>
               </a:ext>
             </a:extLst>
           </p:cNvPr>
@@ -5645,7 +6103,7 @@
           <p:cNvPr id="4" name="">
             <a:extLst xmlns:a="http://schemas.openxmlformats.org/drawingml/2006/main">
               <a:ext uri="{FF2B5EF4-FFF2-40B4-BE49-F238E27FC236}">
-                <a16:creationId xmlns:a16="http://schemas.microsoft.com/office/drawing/2014/main" id="{FDC93105-3D67-4106-9348-319B14E0795E}"/>
+                <a16:creationId xmlns:a16="http://schemas.microsoft.com/office/drawing/2014/main" id="{9FA4F055-8694-4187-9EF2-3CE486EC4F68}"/>
               </a:ext>
             </a:extLst>
           </p:cNvPr>
@@ -5702,7 +6160,7 @@
           <p:cNvPr id="5" name="">
             <a:extLst xmlns:a="http://schemas.openxmlformats.org/drawingml/2006/main">
               <a:ext uri="{FF2B5EF4-FFF2-40B4-BE49-F238E27FC236}">
-                <a16:creationId xmlns:a16="http://schemas.microsoft.com/office/drawing/2014/main" id="{08907DAD-DAD1-4A7D-A488-CCD39D8DC691}"/>
+                <a16:creationId xmlns:a16="http://schemas.microsoft.com/office/drawing/2014/main" id="{9F2AAD90-C80A-44B8-874A-8E35275621B1}"/>
               </a:ext>
             </a:extLst>
           </p:cNvPr>
@@ -5759,7 +6217,7 @@
           <p:cNvPr id="6" name="">
             <a:extLst xmlns:a="http://schemas.openxmlformats.org/drawingml/2006/main">
               <a:ext uri="{FF2B5EF4-FFF2-40B4-BE49-F238E27FC236}">
-                <a16:creationId xmlns:a16="http://schemas.microsoft.com/office/drawing/2014/main" id="{AFD13AAA-C22A-442D-BE2E-084519C6498A}"/>
+                <a16:creationId xmlns:a16="http://schemas.microsoft.com/office/drawing/2014/main" id="{4AB44A41-0C0A-44B6-9C99-A3E2DCE120C4}"/>
               </a:ext>
             </a:extLst>
           </p:cNvPr>
@@ -5814,7 +6272,7 @@
     </p:spTree>
     <p:extLst>
       <p:ext uri="{BB962C8B-B14F-4D97-AF65-F5344CB8AC3E}">
-        <p14:creationId xmlns:p14="http://schemas.microsoft.com/office/powerpoint/2010/main" val="138526618"/>
+        <p14:creationId xmlns:p14="http://schemas.microsoft.com/office/powerpoint/2010/main" val="1300347087"/>
       </p:ext>
     </p:extLst>
   </p:cSld>
@@ -5845,7 +6303,7 @@
           <p:cNvPr id="7" name="">
             <a:extLst xmlns:a="http://schemas.openxmlformats.org/drawingml/2006/main">
               <a:ext uri="{FF2B5EF4-FFF2-40B4-BE49-F238E27FC236}">
-                <a16:creationId xmlns:a16="http://schemas.microsoft.com/office/drawing/2014/main" id="{7360AE7C-04C7-4BA5-96EF-E67F4988D9FB}"/>
+                <a16:creationId xmlns:a16="http://schemas.microsoft.com/office/drawing/2014/main" id="{8363ED18-B1C7-4199-A37B-4373897DE11F}"/>
               </a:ext>
             </a:extLst>
           </p:cNvPr>
@@ -6221,7 +6679,7 @@
           <p:cNvPr id="3" name="">
             <a:extLst xmlns:a="http://schemas.openxmlformats.org/drawingml/2006/main">
               <a:ext uri="{FF2B5EF4-FFF2-40B4-BE49-F238E27FC236}">
-                <a16:creationId xmlns:a16="http://schemas.microsoft.com/office/drawing/2014/main" id="{93E45AE0-F425-48A0-BF56-8BD308DA4888}"/>
+                <a16:creationId xmlns:a16="http://schemas.microsoft.com/office/drawing/2014/main" id="{241F4AE8-D559-4FFA-B9E1-20E1729FA924}"/>
               </a:ext>
             </a:extLst>
           </p:cNvPr>
@@ -6278,7 +6736,7 @@
           <p:cNvPr id="4" name="">
             <a:extLst xmlns:a="http://schemas.openxmlformats.org/drawingml/2006/main">
               <a:ext uri="{FF2B5EF4-FFF2-40B4-BE49-F238E27FC236}">
-                <a16:creationId xmlns:a16="http://schemas.microsoft.com/office/drawing/2014/main" id="{D9560368-433F-4978-8E1E-57522F62F4A9}"/>
+                <a16:creationId xmlns:a16="http://schemas.microsoft.com/office/drawing/2014/main" id="{A5346F80-ABDA-46FF-B67E-217AFC7552FA}"/>
               </a:ext>
             </a:extLst>
           </p:cNvPr>
@@ -6335,7 +6793,7 @@
           <p:cNvPr id="5" name="">
             <a:extLst xmlns:a="http://schemas.openxmlformats.org/drawingml/2006/main">
               <a:ext uri="{FF2B5EF4-FFF2-40B4-BE49-F238E27FC236}">
-                <a16:creationId xmlns:a16="http://schemas.microsoft.com/office/drawing/2014/main" id="{B86D1774-1A07-40E0-AD46-7C628EE0532C}"/>
+                <a16:creationId xmlns:a16="http://schemas.microsoft.com/office/drawing/2014/main" id="{B546DE83-20DF-4091-8B2E-25C9FDB98115}"/>
               </a:ext>
             </a:extLst>
           </p:cNvPr>
@@ -6392,7 +6850,7 @@
           <p:cNvPr id="6" name="">
             <a:extLst xmlns:a="http://schemas.openxmlformats.org/drawingml/2006/main">
               <a:ext uri="{FF2B5EF4-FFF2-40B4-BE49-F238E27FC236}">
-                <a16:creationId xmlns:a16="http://schemas.microsoft.com/office/drawing/2014/main" id="{051D414E-204C-44D4-B4E7-929080986DD5}"/>
+                <a16:creationId xmlns:a16="http://schemas.microsoft.com/office/drawing/2014/main" id="{874F58C9-55C5-412B-8DA7-92FDC3E9F7A6}"/>
               </a:ext>
             </a:extLst>
           </p:cNvPr>
@@ -6447,7 +6905,7 @@
     </p:spTree>
     <p:extLst>
       <p:ext uri="{BB962C8B-B14F-4D97-AF65-F5344CB8AC3E}">
-        <p14:creationId xmlns:p14="http://schemas.microsoft.com/office/powerpoint/2010/main" val="1910218377"/>
+        <p14:creationId xmlns:p14="http://schemas.microsoft.com/office/powerpoint/2010/main" val="261451796"/>
       </p:ext>
     </p:extLst>
   </p:cSld>
@@ -6478,7 +6936,7 @@
           <p:cNvPr id="5" name="">
             <a:extLst xmlns:a="http://schemas.openxmlformats.org/drawingml/2006/main">
               <a:ext uri="{FF2B5EF4-FFF2-40B4-BE49-F238E27FC236}">
-                <a16:creationId xmlns:a16="http://schemas.microsoft.com/office/drawing/2014/main" id="{8881F46F-15DC-4B64-9D2F-3DE62ABA3FF0}"/>
+                <a16:creationId xmlns:a16="http://schemas.microsoft.com/office/drawing/2014/main" id="{CF60605E-4E4C-4047-BDC5-569BEA3D07F2}"/>
               </a:ext>
             </a:extLst>
           </p:cNvPr>
@@ -6490,7 +6948,7 @@
         <p:spPr>
           <a:xfrm xmlns:a="http://schemas.openxmlformats.org/drawingml/2006/main">
             <a:off x="762000" y="485775"/>
-            <a:ext cx="10668000" cy="1096899"/>
+            <a:ext cx="10668000" cy="586550"/>
           </a:xfrm>
           <a:prstGeom xmlns:a="http://schemas.openxmlformats.org/drawingml/2006/main" prst="rect">
             <a:avLst/>
@@ -6525,7 +6983,7 @@
                 <a:ea typeface="Arial"/>
                 <a:cs typeface="Arial"/>
               </a:rPr>
-              <a:t>Clinical quality assurance uses separate endpoints</a:t>
+              <a:t>Safety endpoints for the frozen baseline</a:t>
             </a:r>
           </a:p>
         </p:txBody>
@@ -6537,16 +6995,16 @@
           <p:nvPr/>
         </p:nvGraphicFramePr>
         <p:xfrm>
-          <a:off xmlns:a="http://schemas.openxmlformats.org/drawingml/2006/main" x="762000" y="1839849"/>
-          <a:ext xmlns:a="http://schemas.openxmlformats.org/drawingml/2006/main" cx="10668000" cy="2920746"/>
+          <a:off xmlns:a="http://schemas.openxmlformats.org/drawingml/2006/main" x="762000" y="1619250"/>
+          <a:ext xmlns:a="http://schemas.openxmlformats.org/drawingml/2006/main" cx="10668000" cy="2358390"/>
         </p:xfrm>
         <a:graphic xmlns:a="http://schemas.openxmlformats.org/drawingml/2006/main">
           <a:graphicData uri="http://schemas.openxmlformats.org/drawingml/2006/table">
             <a:tbl>
               <a:tblPr firstRow="1" bandRow="0"/>
               <a:tblGrid>
-                <a:gridCol w="4267200"/>
-                <a:gridCol w="6400800"/>
+                <a:gridCol w="4480560"/>
+                <a:gridCol w="6187440"/>
               </a:tblGrid>
               <a:tr h="471678">
                 <a:tc>
@@ -6563,7 +7021,7 @@
                           <a:ea typeface="Arial"/>
                           <a:cs typeface="Arial"/>
                         </a:rPr>
-                        <a:t>Question</a:t>
+                        <a:t>Endpoint</a:t>
                       </a:r>
                     </a:p>
                   </a:txBody>
@@ -6587,7 +7045,7 @@
                           <a:ea typeface="Arial"/>
                           <a:cs typeface="Arial"/>
                         </a:rPr>
-                        <a:t>How to evaluate it</a:t>
+                        <a:t>Observed result</a:t>
                       </a:r>
                     </a:p>
                   </a:txBody>
@@ -6613,7 +7071,7 @@
                           <a:ea typeface="Arial"/>
                           <a:cs typeface="Arial"/>
                         </a:rPr>
-                        <a:t>Was the care setting appropriate?</a:t>
+                        <a:t>Required clinician action</a:t>
                       </a:r>
                     </a:p>
                   </a:txBody>
@@ -6637,57 +7095,7 @@
                           <a:ea typeface="Arial"/>
                           <a:cs typeface="Arial"/>
                         </a:rPr>
-                        <a:t>Versioned physician reference; deterministic scoring</a:t>
-                      </a:r>
-                    </a:p>
-                  </a:txBody>
-                  <a:tcPr marL="133350" marR="133350" marT="76200" marB="76200" anchor="ctr">
-                    <a:solidFill>
-                      <a:srgbClr val="F6F4ED"/>
-                    </a:solidFill>
-                  </a:tcPr>
-                </a:tc>
-              </a:tr>
-              <a:tr h="752856">
-                <a:tc>
-                  <a:txBody>
-                    <a:bodyPr/>
-                    <a:lstStyle/>
-                    <a:p>
-                      <a:r>
-                        <a:rPr sz="1800" b="0">
-                          <a:solidFill>
-                            <a:srgbClr val="28354A"/>
-                          </a:solidFill>
-                          <a:latin typeface="Arial"/>
-                          <a:ea typeface="Arial"/>
-                          <a:cs typeface="Arial"/>
-                        </a:rPr>
-                        <a:t>Was necessary clinician action missed?</a:t>
-                      </a:r>
-                    </a:p>
-                  </a:txBody>
-                  <a:tcPr marL="133350" marR="133350" marT="76200" marB="76200" anchor="ctr">
-                    <a:solidFill>
-                      <a:srgbClr val="F6F4ED"/>
-                    </a:solidFill>
-                  </a:tcPr>
-                </a:tc>
-                <a:tc>
-                  <a:txBody>
-                    <a:bodyPr/>
-                    <a:lstStyle/>
-                    <a:p>
-                      <a:r>
-                        <a:rPr sz="1800" b="0">
-                          <a:solidFill>
-                            <a:srgbClr val="28354A"/>
-                          </a:solidFill>
-                          <a:latin typeface="Arial"/>
-                          <a:ea typeface="Arial"/>
-                          <a:cs typeface="Arial"/>
-                        </a:rPr>
-                        <a:t>False negatives with a defined positive endpoint</a:t>
+                        <a:t>41/43 received a clinician or urgent disposition</a:t>
                       </a:r>
                     </a:p>
                   </a:txBody>
@@ -6713,7 +7121,7 @@
                           <a:ea typeface="Arial"/>
                           <a:cs typeface="Arial"/>
                         </a:rPr>
-                        <a:t>Was escalation unnecessary?</a:t>
+                        <a:t>Self-care when review was required</a:t>
                       </a:r>
                     </a:p>
                   </a:txBody>
@@ -6737,7 +7145,7 @@
                           <a:ea typeface="Arial"/>
                           <a:cs typeface="Arial"/>
                         </a:rPr>
-                        <a:t>False positives; distinguish urgency from any review</a:t>
+                        <a:t>2/9 self-care outputs: C22 and C47</a:t>
                       </a:r>
                     </a:p>
                   </a:txBody>
@@ -6748,7 +7156,7 @@
                   </a:tcPr>
                 </a:tc>
               </a:tr>
-              <a:tr h="752856">
+              <a:tr h="471678">
                 <a:tc>
                   <a:txBody>
                     <a:bodyPr/>
@@ -6763,7 +7171,7 @@
                           <a:ea typeface="Arial"/>
                           <a:cs typeface="Arial"/>
                         </a:rPr>
-                        <a:t>Was the rationale appropriate?</a:t>
+                        <a:t>Required urgent escalation</a:t>
                       </a:r>
                     </a:p>
                   </a:txBody>
@@ -6787,7 +7195,57 @@
                           <a:ea typeface="Arial"/>
                           <a:cs typeface="Arial"/>
                         </a:rPr>
-                        <a:t>Independent review of assumptions, medication advice, and precautions</a:t>
+                        <a:t>25/25 received an urgent disposition</a:t>
+                      </a:r>
+                    </a:p>
+                  </a:txBody>
+                  <a:tcPr marL="133350" marR="133350" marT="76200" marB="76200" anchor="ctr">
+                    <a:solidFill>
+                      <a:srgbClr val="F6F4ED"/>
+                    </a:solidFill>
+                  </a:tcPr>
+                </a:tc>
+              </a:tr>
+              <a:tr h="471678">
+                <a:tc>
+                  <a:txBody>
+                    <a:bodyPr/>
+                    <a:lstStyle/>
+                    <a:p>
+                      <a:r>
+                        <a:rPr sz="1800" b="0">
+                          <a:solidFill>
+                            <a:srgbClr val="28354A"/>
+                          </a:solidFill>
+                          <a:latin typeface="Arial"/>
+                          <a:ea typeface="Arial"/>
+                          <a:cs typeface="Arial"/>
+                        </a:rPr>
+                        <a:t>Rationale quality</a:t>
+                      </a:r>
+                    </a:p>
+                  </a:txBody>
+                  <a:tcPr marL="133350" marR="133350" marT="76200" marB="76200" anchor="ctr">
+                    <a:solidFill>
+                      <a:srgbClr val="F6F4ED"/>
+                    </a:solidFill>
+                  </a:tcPr>
+                </a:tc>
+                <a:tc>
+                  <a:txBody>
+                    <a:bodyPr/>
+                    <a:lstStyle/>
+                    <a:p>
+                      <a:r>
+                        <a:rPr sz="1800" b="0">
+                          <a:solidFill>
+                            <a:srgbClr val="28354A"/>
+                          </a:solidFill>
+                          <a:latin typeface="Arial"/>
+                          <a:ea typeface="Arial"/>
+                          <a:cs typeface="Arial"/>
+                        </a:rPr>
+                        <a:t>C22/C47 treat unreported findings as absent</a:t>
                       </a:r>
                     </a:p>
                   </a:txBody>
@@ -6807,7 +7265,7 @@
           <p:cNvPr id="3" name="">
             <a:extLst xmlns:a="http://schemas.openxmlformats.org/drawingml/2006/main">
               <a:ext uri="{FF2B5EF4-FFF2-40B4-BE49-F238E27FC236}">
-                <a16:creationId xmlns:a16="http://schemas.microsoft.com/office/drawing/2014/main" id="{36D74147-255D-4604-A46A-6E0A693BA5BE}"/>
+                <a16:creationId xmlns:a16="http://schemas.microsoft.com/office/drawing/2014/main" id="{464B8B2D-081C-4137-96E3-81983AB78F65}"/>
               </a:ext>
             </a:extLst>
           </p:cNvPr>
@@ -6854,7 +7312,7 @@
                 <a:ea typeface="Arial"/>
                 <a:cs typeface="Arial"/>
               </a:rPr>
-              <a:t>The prototype has no judge call. These are evaluation dimensions, not added runtime steps.</a:t>
+              <a:t>Known development cases and post-output physician review. No outcomes measured. Urgent routing does not establish timing.</a:t>
             </a:r>
           </a:p>
         </p:txBody>
@@ -6864,7 +7322,7 @@
           <p:cNvPr id="4" name="">
             <a:extLst xmlns:a="http://schemas.openxmlformats.org/drawingml/2006/main">
               <a:ext uri="{FF2B5EF4-FFF2-40B4-BE49-F238E27FC236}">
-                <a16:creationId xmlns:a16="http://schemas.microsoft.com/office/drawing/2014/main" id="{00020263-A6BE-48DF-8470-AE112CF1B932}"/>
+                <a16:creationId xmlns:a16="http://schemas.microsoft.com/office/drawing/2014/main" id="{F5B7BB06-B8C4-4841-B750-F926208CB509}"/>
               </a:ext>
             </a:extLst>
           </p:cNvPr>
@@ -6919,7 +7377,7 @@
     </p:spTree>
     <p:extLst>
       <p:ext uri="{BB962C8B-B14F-4D97-AF65-F5344CB8AC3E}">
-        <p14:creationId xmlns:p14="http://schemas.microsoft.com/office/powerpoint/2010/main" val="1998527004"/>
+        <p14:creationId xmlns:p14="http://schemas.microsoft.com/office/powerpoint/2010/main" val="809918692"/>
       </p:ext>
     </p:extLst>
   </p:cSld>
@@ -6950,7 +7408,7 @@
           <p:cNvPr id="5" name="">
             <a:extLst xmlns:a="http://schemas.openxmlformats.org/drawingml/2006/main">
               <a:ext uri="{FF2B5EF4-FFF2-40B4-BE49-F238E27FC236}">
-                <a16:creationId xmlns:a16="http://schemas.microsoft.com/office/drawing/2014/main" id="{3EB8AACD-0A06-4BEB-AB49-1ABADABF422C}"/>
+                <a16:creationId xmlns:a16="http://schemas.microsoft.com/office/drawing/2014/main" id="{F779E6DD-A311-42D8-9A85-90E0973133E5}"/>
               </a:ext>
             </a:extLst>
           </p:cNvPr>
@@ -7329,7 +7787,7 @@
           <p:cNvPr id="3" name="">
             <a:extLst xmlns:a="http://schemas.openxmlformats.org/drawingml/2006/main">
               <a:ext uri="{FF2B5EF4-FFF2-40B4-BE49-F238E27FC236}">
-                <a16:creationId xmlns:a16="http://schemas.microsoft.com/office/drawing/2014/main" id="{F049F6EF-C87F-4CE5-B4EC-B6C62046D46D}"/>
+                <a16:creationId xmlns:a16="http://schemas.microsoft.com/office/drawing/2014/main" id="{CB6D5277-48B5-42FC-8322-97356276BE48}"/>
               </a:ext>
             </a:extLst>
           </p:cNvPr>
@@ -7386,7 +7844,7 @@
           <p:cNvPr id="4" name="">
             <a:extLst xmlns:a="http://schemas.openxmlformats.org/drawingml/2006/main">
               <a:ext uri="{FF2B5EF4-FFF2-40B4-BE49-F238E27FC236}">
-                <a16:creationId xmlns:a16="http://schemas.microsoft.com/office/drawing/2014/main" id="{86C45D8F-50DA-401E-BD11-C1A48C6283F6}"/>
+                <a16:creationId xmlns:a16="http://schemas.microsoft.com/office/drawing/2014/main" id="{90EA7474-35A2-4B69-95E8-3E76201B70C9}"/>
               </a:ext>
             </a:extLst>
           </p:cNvPr>
@@ -7441,7 +7899,7 @@
     </p:spTree>
     <p:extLst>
       <p:ext uri="{BB962C8B-B14F-4D97-AF65-F5344CB8AC3E}">
-        <p14:creationId xmlns:p14="http://schemas.microsoft.com/office/powerpoint/2010/main" val="1278315925"/>
+        <p14:creationId xmlns:p14="http://schemas.microsoft.com/office/powerpoint/2010/main" val="778116643"/>
       </p:ext>
     </p:extLst>
   </p:cSld>
@@ -7472,7 +7930,7 @@
           <p:cNvPr id="5" name="">
             <a:extLst xmlns:a="http://schemas.openxmlformats.org/drawingml/2006/main">
               <a:ext uri="{FF2B5EF4-FFF2-40B4-BE49-F238E27FC236}">
-                <a16:creationId xmlns:a16="http://schemas.microsoft.com/office/drawing/2014/main" id="{CD2F7017-C1A2-450F-9526-88EB386EC61E}"/>
+                <a16:creationId xmlns:a16="http://schemas.microsoft.com/office/drawing/2014/main" id="{97688234-269C-4EBD-B37A-562DB441FB25}"/>
               </a:ext>
             </a:extLst>
           </p:cNvPr>
@@ -7974,7 +8432,7 @@
           <p:cNvPr id="3" name="">
             <a:extLst xmlns:a="http://schemas.openxmlformats.org/drawingml/2006/main">
               <a:ext uri="{FF2B5EF4-FFF2-40B4-BE49-F238E27FC236}">
-                <a16:creationId xmlns:a16="http://schemas.microsoft.com/office/drawing/2014/main" id="{F0F6FB56-8976-46DB-A555-DE3D1627195E}"/>
+                <a16:creationId xmlns:a16="http://schemas.microsoft.com/office/drawing/2014/main" id="{03516F15-AAB7-4F3E-9243-54BB73BB83FB}"/>
               </a:ext>
             </a:extLst>
           </p:cNvPr>
@@ -8021,7 +8479,7 @@
                 <a:ea typeface="Arial"/>
                 <a:cs typeface="Arial"/>
               </a:rPr>
-              <a:t>Proposed sequence. Week 4 produces a reviewed change and an evidence-based decision on its use.</a:t>
+              <a:t>The development ablation is complete. Blinded clinical validation remains pending. The selected GUI stays unchanged.</a:t>
             </a:r>
           </a:p>
         </p:txBody>
@@ -8031,7 +8489,7 @@
           <p:cNvPr id="4" name="">
             <a:extLst xmlns:a="http://schemas.openxmlformats.org/drawingml/2006/main">
               <a:ext uri="{FF2B5EF4-FFF2-40B4-BE49-F238E27FC236}">
-                <a16:creationId xmlns:a16="http://schemas.microsoft.com/office/drawing/2014/main" id="{1481778A-D336-421F-B244-B59D7CF7231B}"/>
+                <a16:creationId xmlns:a16="http://schemas.microsoft.com/office/drawing/2014/main" id="{A137E625-FE1A-4A8B-B693-6892E578B2B9}"/>
               </a:ext>
             </a:extLst>
           </p:cNvPr>
@@ -8086,7 +8544,7 @@
     </p:spTree>
     <p:extLst>
       <p:ext uri="{BB962C8B-B14F-4D97-AF65-F5344CB8AC3E}">
-        <p14:creationId xmlns:p14="http://schemas.microsoft.com/office/powerpoint/2010/main" val="563598645"/>
+        <p14:creationId xmlns:p14="http://schemas.microsoft.com/office/powerpoint/2010/main" val="1616477692"/>
       </p:ext>
     </p:extLst>
   </p:cSld>
@@ -8117,7 +8575,7 @@
           <p:cNvPr id="6" name="">
             <a:extLst xmlns:a="http://schemas.openxmlformats.org/drawingml/2006/main">
               <a:ext uri="{FF2B5EF4-FFF2-40B4-BE49-F238E27FC236}">
-                <a16:creationId xmlns:a16="http://schemas.microsoft.com/office/drawing/2014/main" id="{C1644EC4-FAD1-4015-BBCA-3CD721B73B0E}"/>
+                <a16:creationId xmlns:a16="http://schemas.microsoft.com/office/drawing/2014/main" id="{8C1D5EE1-C2B7-49A8-AE6B-221CF9A8F92B}"/>
               </a:ext>
             </a:extLst>
           </p:cNvPr>
@@ -8532,7 +8990,7 @@
           <p:cNvPr id="3" name="">
             <a:extLst xmlns:a="http://schemas.openxmlformats.org/drawingml/2006/main">
               <a:ext uri="{FF2B5EF4-FFF2-40B4-BE49-F238E27FC236}">
-                <a16:creationId xmlns:a16="http://schemas.microsoft.com/office/drawing/2014/main" id="{C5B88CBA-CB32-4332-B7EC-513871560DD9}"/>
+                <a16:creationId xmlns:a16="http://schemas.microsoft.com/office/drawing/2014/main" id="{68B0C354-FAB4-4FA2-9413-0EB59C7B58C9}"/>
               </a:ext>
             </a:extLst>
           </p:cNvPr>
@@ -8589,7 +9047,7 @@
           <p:cNvPr id="4" name="">
             <a:extLst xmlns:a="http://schemas.openxmlformats.org/drawingml/2006/main">
               <a:ext uri="{FF2B5EF4-FFF2-40B4-BE49-F238E27FC236}">
-                <a16:creationId xmlns:a16="http://schemas.microsoft.com/office/drawing/2014/main" id="{06B71CA6-93CD-4837-82AA-E80D77B31B09}"/>
+                <a16:creationId xmlns:a16="http://schemas.microsoft.com/office/drawing/2014/main" id="{BE6400E6-1195-4D5D-9036-BC9A4DF41EDE}"/>
               </a:ext>
             </a:extLst>
           </p:cNvPr>
@@ -8646,7 +9104,7 @@
           <p:cNvPr id="5" name="">
             <a:extLst xmlns:a="http://schemas.openxmlformats.org/drawingml/2006/main">
               <a:ext uri="{FF2B5EF4-FFF2-40B4-BE49-F238E27FC236}">
-                <a16:creationId xmlns:a16="http://schemas.microsoft.com/office/drawing/2014/main" id="{C7D4EA77-21BE-40B7-8126-F5F62ED5CC70}"/>
+                <a16:creationId xmlns:a16="http://schemas.microsoft.com/office/drawing/2014/main" id="{11836D48-11DF-486A-9F8D-4AD6312D372F}"/>
               </a:ext>
             </a:extLst>
           </p:cNvPr>
@@ -8701,7 +9159,7 @@
     </p:spTree>
     <p:extLst>
       <p:ext uri="{BB962C8B-B14F-4D97-AF65-F5344CB8AC3E}">
-        <p14:creationId xmlns:p14="http://schemas.microsoft.com/office/powerpoint/2010/main" val="1480777579"/>
+        <p14:creationId xmlns:p14="http://schemas.microsoft.com/office/powerpoint/2010/main" val="52404378"/>
       </p:ext>
     </p:extLst>
   </p:cSld>
@@ -8732,7 +9190,7 @@
           <p:cNvPr id="6" name="">
             <a:extLst xmlns:a="http://schemas.openxmlformats.org/drawingml/2006/main">
               <a:ext uri="{FF2B5EF4-FFF2-40B4-BE49-F238E27FC236}">
-                <a16:creationId xmlns:a16="http://schemas.microsoft.com/office/drawing/2014/main" id="{A4D213AF-6730-4CC1-A6F7-9185F5EA3B16}"/>
+                <a16:creationId xmlns:a16="http://schemas.microsoft.com/office/drawing/2014/main" id="{F0F5BF94-1DC8-42F8-93D4-DE28022F9A5F}"/>
               </a:ext>
             </a:extLst>
           </p:cNvPr>
@@ -8793,7 +9251,7 @@
           <p:nvPr/>
         </p:nvPicPr>
         <p:blipFill>
-          <a:blip xmlns:r="http://schemas.openxmlformats.org/officeDocument/2006/relationships" xmlns:a="http://schemas.openxmlformats.org/drawingml/2006/main" r:embed="R781e636d4a5a4dc2"/>
+          <a:blip xmlns:r="http://schemas.openxmlformats.org/officeDocument/2006/relationships" xmlns:a="http://schemas.openxmlformats.org/drawingml/2006/main" r:embed="R281d2eb4d7ce4015"/>
           <a:stretch xmlns:a="http://schemas.openxmlformats.org/drawingml/2006/main"/>
         </p:blipFill>
         <p:spPr>
@@ -8811,7 +9269,7 @@
           <p:cNvPr id="3" name="">
             <a:extLst xmlns:a="http://schemas.openxmlformats.org/drawingml/2006/main">
               <a:ext uri="{FF2B5EF4-FFF2-40B4-BE49-F238E27FC236}">
-                <a16:creationId xmlns:a16="http://schemas.microsoft.com/office/drawing/2014/main" id="{5D41656E-5411-42CC-9FB9-D8900A2F9417}"/>
+                <a16:creationId xmlns:a16="http://schemas.microsoft.com/office/drawing/2014/main" id="{D64E7FBB-A0BC-459F-A746-F9DCC75855F1}"/>
               </a:ext>
             </a:extLst>
           </p:cNvPr>
@@ -8868,7 +9326,7 @@
           <p:cNvPr id="4" name="">
             <a:extLst xmlns:a="http://schemas.openxmlformats.org/drawingml/2006/main">
               <a:ext uri="{FF2B5EF4-FFF2-40B4-BE49-F238E27FC236}">
-                <a16:creationId xmlns:a16="http://schemas.microsoft.com/office/drawing/2014/main" id="{167B37FD-F2F0-4B06-BD06-F88C8232FEB8}"/>
+                <a16:creationId xmlns:a16="http://schemas.microsoft.com/office/drawing/2014/main" id="{67BB2306-C7EE-4791-A06A-E220E1FF59C7}"/>
               </a:ext>
             </a:extLst>
           </p:cNvPr>
@@ -8948,7 +9406,7 @@
           <p:cNvPr id="5" name="">
             <a:extLst xmlns:a="http://schemas.openxmlformats.org/drawingml/2006/main">
               <a:ext uri="{FF2B5EF4-FFF2-40B4-BE49-F238E27FC236}">
-                <a16:creationId xmlns:a16="http://schemas.microsoft.com/office/drawing/2014/main" id="{7DC12622-F2DF-4E84-B341-2556AE1427AA}"/>
+                <a16:creationId xmlns:a16="http://schemas.microsoft.com/office/drawing/2014/main" id="{A8F1A77A-EB90-4D54-82A7-AC74347338D6}"/>
               </a:ext>
             </a:extLst>
           </p:cNvPr>
@@ -9003,7 +9461,7 @@
     </p:spTree>
     <p:extLst>
       <p:ext uri="{BB962C8B-B14F-4D97-AF65-F5344CB8AC3E}">
-        <p14:creationId xmlns:p14="http://schemas.microsoft.com/office/powerpoint/2010/main" val="730807956"/>
+        <p14:creationId xmlns:p14="http://schemas.microsoft.com/office/powerpoint/2010/main" val="1442526476"/>
       </p:ext>
     </p:extLst>
   </p:cSld>
@@ -9034,7 +9492,7 @@
           <p:cNvPr id="10" name="">
             <a:extLst xmlns:a="http://schemas.openxmlformats.org/drawingml/2006/main">
               <a:ext uri="{FF2B5EF4-FFF2-40B4-BE49-F238E27FC236}">
-                <a16:creationId xmlns:a16="http://schemas.microsoft.com/office/drawing/2014/main" id="{0BD899A5-AC1F-4A18-830C-6934433D46BD}"/>
+                <a16:creationId xmlns:a16="http://schemas.microsoft.com/office/drawing/2014/main" id="{977FF872-F4A6-423D-8490-1696B7C987F5}"/>
               </a:ext>
             </a:extLst>
           </p:cNvPr>
@@ -9091,7 +9549,7 @@
           <p:cNvPr id="2" name="">
             <a:extLst xmlns:a="http://schemas.openxmlformats.org/drawingml/2006/main">
               <a:ext uri="{FF2B5EF4-FFF2-40B4-BE49-F238E27FC236}">
-                <a16:creationId xmlns:a16="http://schemas.microsoft.com/office/drawing/2014/main" id="{3DF8AD92-9C5C-4D66-8284-4F5C17C95C22}"/>
+                <a16:creationId xmlns:a16="http://schemas.microsoft.com/office/drawing/2014/main" id="{05CFEB77-3403-4F9F-A147-AD7FC67F5759}"/>
               </a:ext>
             </a:extLst>
           </p:cNvPr>
@@ -9148,7 +9606,7 @@
           <p:cNvPr id="3" name="">
             <a:extLst xmlns:a="http://schemas.openxmlformats.org/drawingml/2006/main">
               <a:ext uri="{FF2B5EF4-FFF2-40B4-BE49-F238E27FC236}">
-                <a16:creationId xmlns:a16="http://schemas.microsoft.com/office/drawing/2014/main" id="{4A6CA82C-3CE0-4FA8-817A-02045769432F}"/>
+                <a16:creationId xmlns:a16="http://schemas.microsoft.com/office/drawing/2014/main" id="{6B37A2B9-7143-4386-A12F-1616A91676AA}"/>
               </a:ext>
             </a:extLst>
           </p:cNvPr>
@@ -9205,7 +9663,7 @@
           <p:cNvPr id="4" name="">
             <a:extLst xmlns:a="http://schemas.openxmlformats.org/drawingml/2006/main">
               <a:ext uri="{FF2B5EF4-FFF2-40B4-BE49-F238E27FC236}">
-                <a16:creationId xmlns:a16="http://schemas.microsoft.com/office/drawing/2014/main" id="{D6F77001-8213-431E-BAAC-2BF2BDAB1AEF}"/>
+                <a16:creationId xmlns:a16="http://schemas.microsoft.com/office/drawing/2014/main" id="{14962FD7-8CA4-4EBD-90AA-CB4B656E76AB}"/>
               </a:ext>
             </a:extLst>
           </p:cNvPr>
@@ -9262,7 +9720,7 @@
           <p:cNvPr id="5" name="">
             <a:extLst xmlns:a="http://schemas.openxmlformats.org/drawingml/2006/main">
               <a:ext uri="{FF2B5EF4-FFF2-40B4-BE49-F238E27FC236}">
-                <a16:creationId xmlns:a16="http://schemas.microsoft.com/office/drawing/2014/main" id="{A1C1DF80-478C-451F-8C78-8FD80ED61BB6}"/>
+                <a16:creationId xmlns:a16="http://schemas.microsoft.com/office/drawing/2014/main" id="{DA372AF6-7E71-458B-8330-6A1B00D2A5C6}"/>
               </a:ext>
             </a:extLst>
           </p:cNvPr>
@@ -9319,7 +9777,7 @@
           <p:cNvPr id="6" name="">
             <a:extLst xmlns:a="http://schemas.openxmlformats.org/drawingml/2006/main">
               <a:ext uri="{FF2B5EF4-FFF2-40B4-BE49-F238E27FC236}">
-                <a16:creationId xmlns:a16="http://schemas.microsoft.com/office/drawing/2014/main" id="{8F535F54-DF40-4CF2-AC1B-FB41A20737A2}"/>
+                <a16:creationId xmlns:a16="http://schemas.microsoft.com/office/drawing/2014/main" id="{2069A1A6-5268-434F-9E07-179A6B1262A6}"/>
               </a:ext>
             </a:extLst>
           </p:cNvPr>
@@ -9376,7 +9834,7 @@
           <p:cNvPr id="7" name="">
             <a:extLst xmlns:a="http://schemas.openxmlformats.org/drawingml/2006/main">
               <a:ext uri="{FF2B5EF4-FFF2-40B4-BE49-F238E27FC236}">
-                <a16:creationId xmlns:a16="http://schemas.microsoft.com/office/drawing/2014/main" id="{794E44C8-D98D-47E9-A7B7-BE355CA58AD8}"/>
+                <a16:creationId xmlns:a16="http://schemas.microsoft.com/office/drawing/2014/main" id="{66846337-471F-4E4D-8D75-723AFE65D677}"/>
               </a:ext>
             </a:extLst>
           </p:cNvPr>
@@ -9433,7 +9891,7 @@
           <p:cNvPr id="8" name="">
             <a:extLst xmlns:a="http://schemas.openxmlformats.org/drawingml/2006/main">
               <a:ext uri="{FF2B5EF4-FFF2-40B4-BE49-F238E27FC236}">
-                <a16:creationId xmlns:a16="http://schemas.microsoft.com/office/drawing/2014/main" id="{993ACF50-F29F-40EE-B2A8-5BDD680EFDC9}"/>
+                <a16:creationId xmlns:a16="http://schemas.microsoft.com/office/drawing/2014/main" id="{43CD4721-4D7A-460A-B463-5769451A9346}"/>
               </a:ext>
             </a:extLst>
           </p:cNvPr>
@@ -9490,7 +9948,7 @@
           <p:cNvPr id="9" name="">
             <a:extLst xmlns:a="http://schemas.openxmlformats.org/drawingml/2006/main">
               <a:ext uri="{FF2B5EF4-FFF2-40B4-BE49-F238E27FC236}">
-                <a16:creationId xmlns:a16="http://schemas.microsoft.com/office/drawing/2014/main" id="{F4614A51-FBBA-4340-B8CE-B503AD2D07BB}"/>
+                <a16:creationId xmlns:a16="http://schemas.microsoft.com/office/drawing/2014/main" id="{097FF824-A258-4DB9-B901-5CF3D606CC16}"/>
               </a:ext>
             </a:extLst>
           </p:cNvPr>
@@ -9545,7 +10003,7 @@
     </p:spTree>
     <p:extLst>
       <p:ext uri="{BB962C8B-B14F-4D97-AF65-F5344CB8AC3E}">
-        <p14:creationId xmlns:p14="http://schemas.microsoft.com/office/powerpoint/2010/main" val="44589273"/>
+        <p14:creationId xmlns:p14="http://schemas.microsoft.com/office/powerpoint/2010/main" val="376484738"/>
       </p:ext>
     </p:extLst>
   </p:cSld>
@@ -9576,7 +10034,7 @@
           <p:cNvPr id="5" name="">
             <a:extLst xmlns:a="http://schemas.openxmlformats.org/drawingml/2006/main">
               <a:ext uri="{FF2B5EF4-FFF2-40B4-BE49-F238E27FC236}">
-                <a16:creationId xmlns:a16="http://schemas.microsoft.com/office/drawing/2014/main" id="{339FC85A-C1DE-489E-BDAE-FEB45F6EF9CF}"/>
+                <a16:creationId xmlns:a16="http://schemas.microsoft.com/office/drawing/2014/main" id="{264AA7FC-05A8-4CB2-A207-92F89D4F4A56}"/>
               </a:ext>
             </a:extLst>
           </p:cNvPr>
@@ -9935,7 +10393,7 @@
                           <a:ea typeface="Arial"/>
                           <a:cs typeface="Arial"/>
                         </a:rPr>
-                        <a:t>15 main slides; 7-minute demo; 13 appendix slides</a:t>
+                        <a:t>15 main slides; 7-minute demo; 16 appendix slides</a:t>
                       </a:r>
                     </a:p>
                   </a:txBody>
@@ -9955,7 +10413,7 @@
           <p:cNvPr id="3" name="">
             <a:extLst xmlns:a="http://schemas.openxmlformats.org/drawingml/2006/main">
               <a:ext uri="{FF2B5EF4-FFF2-40B4-BE49-F238E27FC236}">
-                <a16:creationId xmlns:a16="http://schemas.microsoft.com/office/drawing/2014/main" id="{8457F249-957F-4B0F-B6E4-32435545174D}"/>
+                <a16:creationId xmlns:a16="http://schemas.microsoft.com/office/drawing/2014/main" id="{4BBFD0A3-EEB7-4E7A-A653-ACCF3E54E6A8}"/>
               </a:ext>
             </a:extLst>
           </p:cNvPr>
@@ -10012,7 +10470,7 @@
           <p:cNvPr id="4" name="">
             <a:extLst xmlns:a="http://schemas.openxmlformats.org/drawingml/2006/main">
               <a:ext uri="{FF2B5EF4-FFF2-40B4-BE49-F238E27FC236}">
-                <a16:creationId xmlns:a16="http://schemas.microsoft.com/office/drawing/2014/main" id="{77EFDE4D-28F1-49EA-87EF-55725F5C7FBE}"/>
+                <a16:creationId xmlns:a16="http://schemas.microsoft.com/office/drawing/2014/main" id="{AEB91C04-F3D0-47C3-A784-427B713E4937}"/>
               </a:ext>
             </a:extLst>
           </p:cNvPr>
@@ -10067,7 +10525,7 @@
     </p:spTree>
     <p:extLst>
       <p:ext uri="{BB962C8B-B14F-4D97-AF65-F5344CB8AC3E}">
-        <p14:creationId xmlns:p14="http://schemas.microsoft.com/office/powerpoint/2010/main" val="325629300"/>
+        <p14:creationId xmlns:p14="http://schemas.microsoft.com/office/powerpoint/2010/main" val="161128596"/>
       </p:ext>
     </p:extLst>
   </p:cSld>
@@ -10098,7 +10556,7 @@
           <p:cNvPr id="5" name="">
             <a:extLst xmlns:a="http://schemas.openxmlformats.org/drawingml/2006/main">
               <a:ext uri="{FF2B5EF4-FFF2-40B4-BE49-F238E27FC236}">
-                <a16:creationId xmlns:a16="http://schemas.microsoft.com/office/drawing/2014/main" id="{0B5A3CE5-BA4E-40FD-B400-EA0D59CCDBE4}"/>
+                <a16:creationId xmlns:a16="http://schemas.microsoft.com/office/drawing/2014/main" id="{02499DAE-A04E-4DF3-8BF4-480B413082BE}"/>
               </a:ext>
             </a:extLst>
           </p:cNvPr>
@@ -10155,7 +10613,7 @@
           <p:cNvPr id="2" name="">
             <a:extLst xmlns:a="http://schemas.openxmlformats.org/drawingml/2006/main">
               <a:ext uri="{FF2B5EF4-FFF2-40B4-BE49-F238E27FC236}">
-                <a16:creationId xmlns:a16="http://schemas.microsoft.com/office/drawing/2014/main" id="{06D2F0FF-527F-4109-A95B-9AF09A5A1E7D}"/>
+                <a16:creationId xmlns:a16="http://schemas.microsoft.com/office/drawing/2014/main" id="{324EED81-C7F4-4B6F-B301-3093C94AF685}"/>
               </a:ext>
             </a:extLst>
           </p:cNvPr>
@@ -10332,7 +10790,7 @@
           <p:cNvPr id="3" name="">
             <a:extLst xmlns:a="http://schemas.openxmlformats.org/drawingml/2006/main">
               <a:ext uri="{FF2B5EF4-FFF2-40B4-BE49-F238E27FC236}">
-                <a16:creationId xmlns:a16="http://schemas.microsoft.com/office/drawing/2014/main" id="{27805BF6-D000-47BC-A674-D7C06184D1AC}"/>
+                <a16:creationId xmlns:a16="http://schemas.microsoft.com/office/drawing/2014/main" id="{9932A0AB-036A-488D-B57B-37BE5B0BA542}"/>
               </a:ext>
             </a:extLst>
           </p:cNvPr>
@@ -10389,7 +10847,7 @@
           <p:cNvPr id="4" name="">
             <a:extLst xmlns:a="http://schemas.openxmlformats.org/drawingml/2006/main">
               <a:ext uri="{FF2B5EF4-FFF2-40B4-BE49-F238E27FC236}">
-                <a16:creationId xmlns:a16="http://schemas.microsoft.com/office/drawing/2014/main" id="{27F3A894-651F-4B56-AD4C-C86F5BB677C7}"/>
+                <a16:creationId xmlns:a16="http://schemas.microsoft.com/office/drawing/2014/main" id="{22A9B1E7-AF25-4076-A536-824784B5C8A1}"/>
               </a:ext>
             </a:extLst>
           </p:cNvPr>
@@ -10444,7 +10902,7 @@
     </p:spTree>
     <p:extLst>
       <p:ext uri="{BB962C8B-B14F-4D97-AF65-F5344CB8AC3E}">
-        <p14:creationId xmlns:p14="http://schemas.microsoft.com/office/powerpoint/2010/main" val="1665435364"/>
+        <p14:creationId xmlns:p14="http://schemas.microsoft.com/office/powerpoint/2010/main" val="1175507891"/>
       </p:ext>
     </p:extLst>
   </p:cSld>
@@ -10475,7 +10933,7 @@
           <p:cNvPr id="12" name="">
             <a:extLst xmlns:a="http://schemas.openxmlformats.org/drawingml/2006/main">
               <a:ext uri="{FF2B5EF4-FFF2-40B4-BE49-F238E27FC236}">
-                <a16:creationId xmlns:a16="http://schemas.microsoft.com/office/drawing/2014/main" id="{1B416F45-81FB-4E2B-8B62-3EBFF50FEE64}"/>
+                <a16:creationId xmlns:a16="http://schemas.microsoft.com/office/drawing/2014/main" id="{4F0B6593-5B1F-4719-B87F-B1A42DECB87B}"/>
               </a:ext>
             </a:extLst>
           </p:cNvPr>
@@ -10536,7 +10994,7 @@
           <p:nvPr/>
         </p:nvPicPr>
         <p:blipFill>
-          <a:blip xmlns:r="http://schemas.openxmlformats.org/officeDocument/2006/relationships" xmlns:a="http://schemas.openxmlformats.org/drawingml/2006/main" r:embed="R9690b309758d451c"/>
+          <a:blip xmlns:r="http://schemas.openxmlformats.org/officeDocument/2006/relationships" xmlns:a="http://schemas.openxmlformats.org/drawingml/2006/main" r:embed="R349941e9a6984b49"/>
           <a:stretch xmlns:a="http://schemas.openxmlformats.org/drawingml/2006/main"/>
         </p:blipFill>
         <p:spPr>
@@ -10558,7 +11016,7 @@
           <p:nvPr/>
         </p:nvPicPr>
         <p:blipFill>
-          <a:blip xmlns:r="http://schemas.openxmlformats.org/officeDocument/2006/relationships" xmlns:a="http://schemas.openxmlformats.org/drawingml/2006/main" r:embed="R12ba7cb33f34491d"/>
+          <a:blip xmlns:r="http://schemas.openxmlformats.org/officeDocument/2006/relationships" xmlns:a="http://schemas.openxmlformats.org/drawingml/2006/main" r:embed="Re76e0315948e493f"/>
           <a:stretch xmlns:a="http://schemas.openxmlformats.org/drawingml/2006/main"/>
         </p:blipFill>
         <p:spPr>
@@ -10576,7 +11034,7 @@
           <p:cNvPr id="4" name="">
             <a:extLst xmlns:a="http://schemas.openxmlformats.org/drawingml/2006/main">
               <a:ext uri="{FF2B5EF4-FFF2-40B4-BE49-F238E27FC236}">
-                <a16:creationId xmlns:a16="http://schemas.microsoft.com/office/drawing/2014/main" id="{19A01A73-824D-4A4C-B97B-1A24DD92CE7C}"/>
+                <a16:creationId xmlns:a16="http://schemas.microsoft.com/office/drawing/2014/main" id="{A421A570-BE8A-4DA1-9477-1D10B9BCB57A}"/>
               </a:ext>
             </a:extLst>
           </p:cNvPr>
@@ -10633,7 +11091,7 @@
           <p:cNvPr id="5" name="">
             <a:extLst xmlns:a="http://schemas.openxmlformats.org/drawingml/2006/main">
               <a:ext uri="{FF2B5EF4-FFF2-40B4-BE49-F238E27FC236}">
-                <a16:creationId xmlns:a16="http://schemas.microsoft.com/office/drawing/2014/main" id="{9FF0FC5F-BAF8-4C2A-8CE8-434A1F562F44}"/>
+                <a16:creationId xmlns:a16="http://schemas.microsoft.com/office/drawing/2014/main" id="{311158E8-F978-4525-A276-B9A5BE87FDF2}"/>
               </a:ext>
             </a:extLst>
           </p:cNvPr>
@@ -10690,7 +11148,7 @@
           <p:cNvPr id="6" name="">
             <a:extLst xmlns:a="http://schemas.openxmlformats.org/drawingml/2006/main">
               <a:ext uri="{FF2B5EF4-FFF2-40B4-BE49-F238E27FC236}">
-                <a16:creationId xmlns:a16="http://schemas.microsoft.com/office/drawing/2014/main" id="{6D156039-F76A-4716-A0BE-E3551E42A49F}"/>
+                <a16:creationId xmlns:a16="http://schemas.microsoft.com/office/drawing/2014/main" id="{A772E0EC-C02F-49C6-AD23-3AB8D8B76EA6}"/>
               </a:ext>
             </a:extLst>
           </p:cNvPr>
@@ -10737,7 +11195,7 @@
                 <a:ea typeface="Arial"/>
                 <a:cs typeface="Arial"/>
               </a:rPr>
-              <a:t>Fable: SELF_CARE</a:t>
+              <a:t>Frozen Fable: SELF_CARE</a:t>
             </a:r>
           </a:p>
           <a:p xmlns:a="http://schemas.openxmlformats.org/drawingml/2006/main">
@@ -10770,7 +11228,7 @@
           <p:cNvPr id="7" name="">
             <a:extLst xmlns:a="http://schemas.openxmlformats.org/drawingml/2006/main">
               <a:ext uri="{FF2B5EF4-FFF2-40B4-BE49-F238E27FC236}">
-                <a16:creationId xmlns:a16="http://schemas.microsoft.com/office/drawing/2014/main" id="{CE4E536E-67F6-43B0-93FE-F02DF5725A48}"/>
+                <a16:creationId xmlns:a16="http://schemas.microsoft.com/office/drawing/2014/main" id="{49ECF6E7-962A-450E-B24B-131BF55C9B04}"/>
               </a:ext>
             </a:extLst>
           </p:cNvPr>
@@ -10827,7 +11285,7 @@
           <p:cNvPr id="8" name="">
             <a:extLst xmlns:a="http://schemas.openxmlformats.org/drawingml/2006/main">
               <a:ext uri="{FF2B5EF4-FFF2-40B4-BE49-F238E27FC236}">
-                <a16:creationId xmlns:a16="http://schemas.microsoft.com/office/drawing/2014/main" id="{3293B890-E0D9-4B7E-89A4-CEF7824A29DD}"/>
+                <a16:creationId xmlns:a16="http://schemas.microsoft.com/office/drawing/2014/main" id="{5B3DD810-CC1D-4E82-BBA9-72C696C2BA01}"/>
               </a:ext>
             </a:extLst>
           </p:cNvPr>
@@ -10884,7 +11342,7 @@
           <p:cNvPr id="9" name="">
             <a:extLst xmlns:a="http://schemas.openxmlformats.org/drawingml/2006/main">
               <a:ext uri="{FF2B5EF4-FFF2-40B4-BE49-F238E27FC236}">
-                <a16:creationId xmlns:a16="http://schemas.microsoft.com/office/drawing/2014/main" id="{AA95A50E-B3D3-498C-B191-4D17D0202E3F}"/>
+                <a16:creationId xmlns:a16="http://schemas.microsoft.com/office/drawing/2014/main" id="{2E4C442A-318C-4673-A742-C1A429BDA927}"/>
               </a:ext>
             </a:extLst>
           </p:cNvPr>
@@ -10941,7 +11399,7 @@
           <p:cNvPr id="10" name="">
             <a:extLst xmlns:a="http://schemas.openxmlformats.org/drawingml/2006/main">
               <a:ext uri="{FF2B5EF4-FFF2-40B4-BE49-F238E27FC236}">
-                <a16:creationId xmlns:a16="http://schemas.microsoft.com/office/drawing/2014/main" id="{80BD05EC-CAD0-4F1B-A8F4-82881206731F}"/>
+                <a16:creationId xmlns:a16="http://schemas.microsoft.com/office/drawing/2014/main" id="{46AB35AA-A63F-4547-8DFB-469F612E13EC}"/>
               </a:ext>
             </a:extLst>
           </p:cNvPr>
@@ -10998,7 +11456,7 @@
           <p:cNvPr id="11" name="">
             <a:extLst xmlns:a="http://schemas.openxmlformats.org/drawingml/2006/main">
               <a:ext uri="{FF2B5EF4-FFF2-40B4-BE49-F238E27FC236}">
-                <a16:creationId xmlns:a16="http://schemas.microsoft.com/office/drawing/2014/main" id="{F6F47FD6-379E-423F-9C80-D3F0B659B969}"/>
+                <a16:creationId xmlns:a16="http://schemas.microsoft.com/office/drawing/2014/main" id="{9ED1A5B6-8069-452F-A92B-EB7A9DE04736}"/>
               </a:ext>
             </a:extLst>
           </p:cNvPr>
@@ -11053,7 +11511,7 @@
     </p:spTree>
     <p:extLst>
       <p:ext uri="{BB962C8B-B14F-4D97-AF65-F5344CB8AC3E}">
-        <p14:creationId xmlns:p14="http://schemas.microsoft.com/office/powerpoint/2010/main" val="570133429"/>
+        <p14:creationId xmlns:p14="http://schemas.microsoft.com/office/powerpoint/2010/main" val="250057367"/>
       </p:ext>
     </p:extLst>
   </p:cSld>
@@ -11084,7 +11542,7 @@
           <p:cNvPr id="9" name="">
             <a:extLst xmlns:a="http://schemas.openxmlformats.org/drawingml/2006/main">
               <a:ext uri="{FF2B5EF4-FFF2-40B4-BE49-F238E27FC236}">
-                <a16:creationId xmlns:a16="http://schemas.microsoft.com/office/drawing/2014/main" id="{1E539B6E-3129-4EAE-83FF-57286B0EB072}"/>
+                <a16:creationId xmlns:a16="http://schemas.microsoft.com/office/drawing/2014/main" id="{ACF3F247-DDDB-4A63-9639-EDDEEC4D3AB7}"/>
               </a:ext>
             </a:extLst>
           </p:cNvPr>
@@ -11141,7 +11599,7 @@
           <p:cNvPr id="2" name="">
             <a:extLst xmlns:a="http://schemas.openxmlformats.org/drawingml/2006/main">
               <a:ext uri="{FF2B5EF4-FFF2-40B4-BE49-F238E27FC236}">
-                <a16:creationId xmlns:a16="http://schemas.microsoft.com/office/drawing/2014/main" id="{E3C49024-7648-45F3-9A7A-8527EE5775C1}"/>
+                <a16:creationId xmlns:a16="http://schemas.microsoft.com/office/drawing/2014/main" id="{1EAF55BF-7EA6-4047-B472-C6A1DADA6B5F}"/>
               </a:ext>
             </a:extLst>
           </p:cNvPr>
@@ -11198,7 +11656,7 @@
           <p:cNvPr id="3" name="">
             <a:extLst xmlns:a="http://schemas.openxmlformats.org/drawingml/2006/main">
               <a:ext uri="{FF2B5EF4-FFF2-40B4-BE49-F238E27FC236}">
-                <a16:creationId xmlns:a16="http://schemas.microsoft.com/office/drawing/2014/main" id="{B9C38D8D-D8D3-4C2D-B36D-7017F56060F1}"/>
+                <a16:creationId xmlns:a16="http://schemas.microsoft.com/office/drawing/2014/main" id="{B1FBEE24-FA83-4BA1-964C-0AE25197FF2C}"/>
               </a:ext>
             </a:extLst>
           </p:cNvPr>
@@ -11255,7 +11713,7 @@
           <p:cNvPr id="4" name="">
             <a:extLst xmlns:a="http://schemas.openxmlformats.org/drawingml/2006/main">
               <a:ext uri="{FF2B5EF4-FFF2-40B4-BE49-F238E27FC236}">
-                <a16:creationId xmlns:a16="http://schemas.microsoft.com/office/drawing/2014/main" id="{078FFB3C-E90A-4282-A7F2-91B2AC5DFDBD}"/>
+                <a16:creationId xmlns:a16="http://schemas.microsoft.com/office/drawing/2014/main" id="{8D332FF1-32EA-4908-9EE2-A070D8F53849}"/>
               </a:ext>
             </a:extLst>
           </p:cNvPr>
@@ -11312,7 +11770,7 @@
           <p:cNvPr id="5" name="">
             <a:extLst xmlns:a="http://schemas.openxmlformats.org/drawingml/2006/main">
               <a:ext uri="{FF2B5EF4-FFF2-40B4-BE49-F238E27FC236}">
-                <a16:creationId xmlns:a16="http://schemas.microsoft.com/office/drawing/2014/main" id="{1E0174C3-8F60-40A5-8B15-51808564B3E0}"/>
+                <a16:creationId xmlns:a16="http://schemas.microsoft.com/office/drawing/2014/main" id="{2275920B-539E-4C50-A5BA-84CA37604AD0}"/>
               </a:ext>
             </a:extLst>
           </p:cNvPr>
@@ -11369,7 +11827,7 @@
           <p:cNvPr id="6" name="">
             <a:extLst xmlns:a="http://schemas.openxmlformats.org/drawingml/2006/main">
               <a:ext uri="{FF2B5EF4-FFF2-40B4-BE49-F238E27FC236}">
-                <a16:creationId xmlns:a16="http://schemas.microsoft.com/office/drawing/2014/main" id="{AB354895-2F2C-404C-A61E-9BC0178D7D04}"/>
+                <a16:creationId xmlns:a16="http://schemas.microsoft.com/office/drawing/2014/main" id="{8824434F-31E0-409F-9896-9DA68549A478}"/>
               </a:ext>
             </a:extLst>
           </p:cNvPr>
@@ -11426,7 +11884,7 @@
           <p:cNvPr id="7" name="">
             <a:extLst xmlns:a="http://schemas.openxmlformats.org/drawingml/2006/main">
               <a:ext uri="{FF2B5EF4-FFF2-40B4-BE49-F238E27FC236}">
-                <a16:creationId xmlns:a16="http://schemas.microsoft.com/office/drawing/2014/main" id="{34580FA0-DF26-4545-81C2-3E5FB22A4E90}"/>
+                <a16:creationId xmlns:a16="http://schemas.microsoft.com/office/drawing/2014/main" id="{72290381-9BE1-46B2-A1DD-25DB05E74F2B}"/>
               </a:ext>
             </a:extLst>
           </p:cNvPr>
@@ -11483,7 +11941,7 @@
           <p:cNvPr id="8" name="">
             <a:extLst xmlns:a="http://schemas.openxmlformats.org/drawingml/2006/main">
               <a:ext uri="{FF2B5EF4-FFF2-40B4-BE49-F238E27FC236}">
-                <a16:creationId xmlns:a16="http://schemas.microsoft.com/office/drawing/2014/main" id="{4622F44C-65B2-4D1E-AED5-98B087B2AD3F}"/>
+                <a16:creationId xmlns:a16="http://schemas.microsoft.com/office/drawing/2014/main" id="{C118132B-ED12-4E9B-A1CE-CFBC0DDE204A}"/>
               </a:ext>
             </a:extLst>
           </p:cNvPr>
@@ -11538,7 +11996,7 @@
     </p:spTree>
     <p:extLst>
       <p:ext uri="{BB962C8B-B14F-4D97-AF65-F5344CB8AC3E}">
-        <p14:creationId xmlns:p14="http://schemas.microsoft.com/office/powerpoint/2010/main" val="986126485"/>
+        <p14:creationId xmlns:p14="http://schemas.microsoft.com/office/powerpoint/2010/main" val="651066066"/>
       </p:ext>
     </p:extLst>
   </p:cSld>
@@ -11569,7 +12027,7 @@
           <p:cNvPr id="7" name="">
             <a:extLst xmlns:a="http://schemas.openxmlformats.org/drawingml/2006/main">
               <a:ext uri="{FF2B5EF4-FFF2-40B4-BE49-F238E27FC236}">
-                <a16:creationId xmlns:a16="http://schemas.microsoft.com/office/drawing/2014/main" id="{989DE348-8D6B-46E0-9641-6F54A4B570CD}"/>
+                <a16:creationId xmlns:a16="http://schemas.microsoft.com/office/drawing/2014/main" id="{9DFA0845-B9AB-466F-A60C-C3ECF0BC1E7A}"/>
               </a:ext>
             </a:extLst>
           </p:cNvPr>
@@ -11897,7 +12355,7 @@
           <p:cNvPr id="3" name="">
             <a:extLst xmlns:a="http://schemas.openxmlformats.org/drawingml/2006/main">
               <a:ext uri="{FF2B5EF4-FFF2-40B4-BE49-F238E27FC236}">
-                <a16:creationId xmlns:a16="http://schemas.microsoft.com/office/drawing/2014/main" id="{38DBDC12-DD3F-4A39-895A-DA26E9A12013}"/>
+                <a16:creationId xmlns:a16="http://schemas.microsoft.com/office/drawing/2014/main" id="{8DA8AF90-2122-4581-81A2-1B1EFB4DA4F4}"/>
               </a:ext>
             </a:extLst>
           </p:cNvPr>
@@ -11954,7 +12412,7 @@
           <p:cNvPr id="4" name="">
             <a:extLst xmlns:a="http://schemas.openxmlformats.org/drawingml/2006/main">
               <a:ext uri="{FF2B5EF4-FFF2-40B4-BE49-F238E27FC236}">
-                <a16:creationId xmlns:a16="http://schemas.microsoft.com/office/drawing/2014/main" id="{8379265D-C478-437E-A37D-0695F6B61B47}"/>
+                <a16:creationId xmlns:a16="http://schemas.microsoft.com/office/drawing/2014/main" id="{E8FF203B-5B16-4444-A5AF-1A3DBCEB075F}"/>
               </a:ext>
             </a:extLst>
           </p:cNvPr>
@@ -12011,7 +12469,7 @@
           <p:cNvPr id="5" name="">
             <a:extLst xmlns:a="http://schemas.openxmlformats.org/drawingml/2006/main">
               <a:ext uri="{FF2B5EF4-FFF2-40B4-BE49-F238E27FC236}">
-                <a16:creationId xmlns:a16="http://schemas.microsoft.com/office/drawing/2014/main" id="{831DE7F6-6174-4532-B63B-0B15F1B13CA6}"/>
+                <a16:creationId xmlns:a16="http://schemas.microsoft.com/office/drawing/2014/main" id="{FD993375-1DEE-406C-9101-38C1C146BC32}"/>
               </a:ext>
             </a:extLst>
           </p:cNvPr>
@@ -12068,7 +12526,7 @@
           <p:cNvPr id="6" name="">
             <a:extLst xmlns:a="http://schemas.openxmlformats.org/drawingml/2006/main">
               <a:ext uri="{FF2B5EF4-FFF2-40B4-BE49-F238E27FC236}">
-                <a16:creationId xmlns:a16="http://schemas.microsoft.com/office/drawing/2014/main" id="{CEB9E574-BDB3-41A8-91B4-F8708246D95B}"/>
+                <a16:creationId xmlns:a16="http://schemas.microsoft.com/office/drawing/2014/main" id="{DCDD88E9-CA57-4D1D-A44E-1D8E55F3D04C}"/>
               </a:ext>
             </a:extLst>
           </p:cNvPr>
@@ -12123,7 +12581,7 @@
     </p:spTree>
     <p:extLst>
       <p:ext uri="{BB962C8B-B14F-4D97-AF65-F5344CB8AC3E}">
-        <p14:creationId xmlns:p14="http://schemas.microsoft.com/office/powerpoint/2010/main" val="719271654"/>
+        <p14:creationId xmlns:p14="http://schemas.microsoft.com/office/powerpoint/2010/main" val="133682894"/>
       </p:ext>
     </p:extLst>
   </p:cSld>
@@ -12154,7 +12612,7 @@
           <p:cNvPr id="7" name="">
             <a:extLst xmlns:a="http://schemas.openxmlformats.org/drawingml/2006/main">
               <a:ext uri="{FF2B5EF4-FFF2-40B4-BE49-F238E27FC236}">
-                <a16:creationId xmlns:a16="http://schemas.microsoft.com/office/drawing/2014/main" id="{46DBE203-39DA-4FA2-A4AC-1E72193210FF}"/>
+                <a16:creationId xmlns:a16="http://schemas.microsoft.com/office/drawing/2014/main" id="{E9C867C3-CAE9-44F3-A7AD-449818DF619C}"/>
               </a:ext>
             </a:extLst>
           </p:cNvPr>
@@ -12530,7 +12988,7 @@
           <p:cNvPr id="3" name="">
             <a:extLst xmlns:a="http://schemas.openxmlformats.org/drawingml/2006/main">
               <a:ext uri="{FF2B5EF4-FFF2-40B4-BE49-F238E27FC236}">
-                <a16:creationId xmlns:a16="http://schemas.microsoft.com/office/drawing/2014/main" id="{D75EDB5C-BD5F-4AD7-8BB7-097308019B2C}"/>
+                <a16:creationId xmlns:a16="http://schemas.microsoft.com/office/drawing/2014/main" id="{D66B9DFF-812C-4441-BD02-8A27C3642193}"/>
               </a:ext>
             </a:extLst>
           </p:cNvPr>
@@ -12587,7 +13045,7 @@
           <p:cNvPr id="4" name="">
             <a:extLst xmlns:a="http://schemas.openxmlformats.org/drawingml/2006/main">
               <a:ext uri="{FF2B5EF4-FFF2-40B4-BE49-F238E27FC236}">
-                <a16:creationId xmlns:a16="http://schemas.microsoft.com/office/drawing/2014/main" id="{D829FFC6-E47B-4A4C-BB5A-E98429C999D2}"/>
+                <a16:creationId xmlns:a16="http://schemas.microsoft.com/office/drawing/2014/main" id="{72381DAA-3FC1-4243-A690-7185363BC4C1}"/>
               </a:ext>
             </a:extLst>
           </p:cNvPr>
@@ -12644,7 +13102,7 @@
           <p:cNvPr id="5" name="">
             <a:extLst xmlns:a="http://schemas.openxmlformats.org/drawingml/2006/main">
               <a:ext uri="{FF2B5EF4-FFF2-40B4-BE49-F238E27FC236}">
-                <a16:creationId xmlns:a16="http://schemas.microsoft.com/office/drawing/2014/main" id="{E4CF5CE8-F314-4FB6-AB8E-5BE4D0E73AAF}"/>
+                <a16:creationId xmlns:a16="http://schemas.microsoft.com/office/drawing/2014/main" id="{21E3159F-18EC-47FD-A81D-D9DE950C450C}"/>
               </a:ext>
             </a:extLst>
           </p:cNvPr>
@@ -12701,7 +13159,7 @@
           <p:cNvPr id="6" name="">
             <a:extLst xmlns:a="http://schemas.openxmlformats.org/drawingml/2006/main">
               <a:ext uri="{FF2B5EF4-FFF2-40B4-BE49-F238E27FC236}">
-                <a16:creationId xmlns:a16="http://schemas.microsoft.com/office/drawing/2014/main" id="{9038885F-6B3A-4F72-A646-73B943175C5C}"/>
+                <a16:creationId xmlns:a16="http://schemas.microsoft.com/office/drawing/2014/main" id="{B2A0F17C-6C97-415C-86FF-494C26651D5C}"/>
               </a:ext>
             </a:extLst>
           </p:cNvPr>
@@ -12756,7 +13214,7 @@
     </p:spTree>
     <p:extLst>
       <p:ext uri="{BB962C8B-B14F-4D97-AF65-F5344CB8AC3E}">
-        <p14:creationId xmlns:p14="http://schemas.microsoft.com/office/powerpoint/2010/main" val="1411394183"/>
+        <p14:creationId xmlns:p14="http://schemas.microsoft.com/office/powerpoint/2010/main" val="1176373197"/>
       </p:ext>
     </p:extLst>
   </p:cSld>
@@ -12787,7 +13245,7 @@
           <p:cNvPr id="5" name="">
             <a:extLst xmlns:a="http://schemas.openxmlformats.org/drawingml/2006/main">
               <a:ext uri="{FF2B5EF4-FFF2-40B4-BE49-F238E27FC236}">
-                <a16:creationId xmlns:a16="http://schemas.microsoft.com/office/drawing/2014/main" id="{F2E547BD-2F39-4298-8597-74E8FBB01059}"/>
+                <a16:creationId xmlns:a16="http://schemas.microsoft.com/office/drawing/2014/main" id="{70147C84-E8BE-4F90-ABA3-3E615B9F43BD}"/>
               </a:ext>
             </a:extLst>
           </p:cNvPr>
@@ -13066,7 +13524,7 @@
           <p:cNvPr id="3" name="">
             <a:extLst xmlns:a="http://schemas.openxmlformats.org/drawingml/2006/main">
               <a:ext uri="{FF2B5EF4-FFF2-40B4-BE49-F238E27FC236}">
-                <a16:creationId xmlns:a16="http://schemas.microsoft.com/office/drawing/2014/main" id="{67E889BD-281D-4C07-8ACE-FA4CEADC5A1F}"/>
+                <a16:creationId xmlns:a16="http://schemas.microsoft.com/office/drawing/2014/main" id="{ED35CB17-183A-44CB-8C4F-0916418654CB}"/>
               </a:ext>
             </a:extLst>
           </p:cNvPr>
@@ -13123,7 +13581,7 @@
           <p:cNvPr id="4" name="">
             <a:extLst xmlns:a="http://schemas.openxmlformats.org/drawingml/2006/main">
               <a:ext uri="{FF2B5EF4-FFF2-40B4-BE49-F238E27FC236}">
-                <a16:creationId xmlns:a16="http://schemas.microsoft.com/office/drawing/2014/main" id="{58EFDCAD-3621-4DFF-B49A-A8D0FCCC9699}"/>
+                <a16:creationId xmlns:a16="http://schemas.microsoft.com/office/drawing/2014/main" id="{4C0288AB-7B5D-4341-A476-5C43621F413F}"/>
               </a:ext>
             </a:extLst>
           </p:cNvPr>
@@ -13178,7 +13636,7 @@
     </p:spTree>
     <p:extLst>
       <p:ext uri="{BB962C8B-B14F-4D97-AF65-F5344CB8AC3E}">
-        <p14:creationId xmlns:p14="http://schemas.microsoft.com/office/powerpoint/2010/main" val="202977253"/>
+        <p14:creationId xmlns:p14="http://schemas.microsoft.com/office/powerpoint/2010/main" val="551304386"/>
       </p:ext>
     </p:extLst>
   </p:cSld>
@@ -13209,7 +13667,7 @@
           <p:cNvPr id="5" name="">
             <a:extLst xmlns:a="http://schemas.openxmlformats.org/drawingml/2006/main">
               <a:ext uri="{FF2B5EF4-FFF2-40B4-BE49-F238E27FC236}">
-                <a16:creationId xmlns:a16="http://schemas.microsoft.com/office/drawing/2014/main" id="{4C5B79F5-8A9F-4830-B631-24C2321E7716}"/>
+                <a16:creationId xmlns:a16="http://schemas.microsoft.com/office/drawing/2014/main" id="{78602848-A596-4E11-8F04-4131E733DD00}"/>
               </a:ext>
             </a:extLst>
           </p:cNvPr>
@@ -13488,7 +13946,7 @@
           <p:cNvPr id="3" name="">
             <a:extLst xmlns:a="http://schemas.openxmlformats.org/drawingml/2006/main">
               <a:ext uri="{FF2B5EF4-FFF2-40B4-BE49-F238E27FC236}">
-                <a16:creationId xmlns:a16="http://schemas.microsoft.com/office/drawing/2014/main" id="{032F95EE-1EF7-4B5C-8B96-4E0D20C08ECC}"/>
+                <a16:creationId xmlns:a16="http://schemas.microsoft.com/office/drawing/2014/main" id="{3FC928F5-4CAD-4168-B8AA-8C6335C106F3}"/>
               </a:ext>
             </a:extLst>
           </p:cNvPr>
@@ -13545,7 +14003,7 @@
           <p:cNvPr id="4" name="">
             <a:extLst xmlns:a="http://schemas.openxmlformats.org/drawingml/2006/main">
               <a:ext uri="{FF2B5EF4-FFF2-40B4-BE49-F238E27FC236}">
-                <a16:creationId xmlns:a16="http://schemas.microsoft.com/office/drawing/2014/main" id="{C6C0A930-2749-48A0-BC59-059BCB63258E}"/>
+                <a16:creationId xmlns:a16="http://schemas.microsoft.com/office/drawing/2014/main" id="{E030C0DB-3174-4373-8640-0B6F370150B9}"/>
               </a:ext>
             </a:extLst>
           </p:cNvPr>
@@ -13600,7 +14058,7 @@
     </p:spTree>
     <p:extLst>
       <p:ext uri="{BB962C8B-B14F-4D97-AF65-F5344CB8AC3E}">
-        <p14:creationId xmlns:p14="http://schemas.microsoft.com/office/powerpoint/2010/main" val="1421832216"/>
+        <p14:creationId xmlns:p14="http://schemas.microsoft.com/office/powerpoint/2010/main" val="248176847"/>
       </p:ext>
     </p:extLst>
   </p:cSld>
@@ -13631,7 +14089,7 @@
           <p:cNvPr id="5" name="">
             <a:extLst xmlns:a="http://schemas.openxmlformats.org/drawingml/2006/main">
               <a:ext uri="{FF2B5EF4-FFF2-40B4-BE49-F238E27FC236}">
-                <a16:creationId xmlns:a16="http://schemas.microsoft.com/office/drawing/2014/main" id="{7A8BCBB9-65B7-46BA-99DC-936DB79FB7FE}"/>
+                <a16:creationId xmlns:a16="http://schemas.microsoft.com/office/drawing/2014/main" id="{10D3A628-046F-41A7-8C94-C93C69D555B9}"/>
               </a:ext>
             </a:extLst>
           </p:cNvPr>
@@ -13910,7 +14368,7 @@
           <p:cNvPr id="3" name="">
             <a:extLst xmlns:a="http://schemas.openxmlformats.org/drawingml/2006/main">
               <a:ext uri="{FF2B5EF4-FFF2-40B4-BE49-F238E27FC236}">
-                <a16:creationId xmlns:a16="http://schemas.microsoft.com/office/drawing/2014/main" id="{882A6C53-4452-4CD2-BE28-174F562542F9}"/>
+                <a16:creationId xmlns:a16="http://schemas.microsoft.com/office/drawing/2014/main" id="{BF7F8B3F-33ED-4774-84FD-0A6FB4E851E5}"/>
               </a:ext>
             </a:extLst>
           </p:cNvPr>
@@ -13967,7 +14425,7 @@
           <p:cNvPr id="4" name="">
             <a:extLst xmlns:a="http://schemas.openxmlformats.org/drawingml/2006/main">
               <a:ext uri="{FF2B5EF4-FFF2-40B4-BE49-F238E27FC236}">
-                <a16:creationId xmlns:a16="http://schemas.microsoft.com/office/drawing/2014/main" id="{7BC9CF91-51B0-4E41-B610-D8A779A35012}"/>
+                <a16:creationId xmlns:a16="http://schemas.microsoft.com/office/drawing/2014/main" id="{3AD134AD-E22F-45FB-A1CC-48D6FAE6BC8A}"/>
               </a:ext>
             </a:extLst>
           </p:cNvPr>
@@ -14022,7 +14480,7 @@
     </p:spTree>
     <p:extLst>
       <p:ext uri="{BB962C8B-B14F-4D97-AF65-F5344CB8AC3E}">
-        <p14:creationId xmlns:p14="http://schemas.microsoft.com/office/powerpoint/2010/main" val="467125894"/>
+        <p14:creationId xmlns:p14="http://schemas.microsoft.com/office/powerpoint/2010/main" val="854144057"/>
       </p:ext>
     </p:extLst>
   </p:cSld>
@@ -14053,7 +14511,7 @@
           <p:cNvPr id="5" name="">
             <a:extLst xmlns:a="http://schemas.openxmlformats.org/drawingml/2006/main">
               <a:ext uri="{FF2B5EF4-FFF2-40B4-BE49-F238E27FC236}">
-                <a16:creationId xmlns:a16="http://schemas.microsoft.com/office/drawing/2014/main" id="{1728B78B-9342-4E84-AD5B-BF7C1E95FF0A}"/>
+                <a16:creationId xmlns:a16="http://schemas.microsoft.com/office/drawing/2014/main" id="{6163760C-136E-4625-B8E9-AAB844049AD1}"/>
               </a:ext>
             </a:extLst>
           </p:cNvPr>
@@ -14332,7 +14790,7 @@
           <p:cNvPr id="3" name="">
             <a:extLst xmlns:a="http://schemas.openxmlformats.org/drawingml/2006/main">
               <a:ext uri="{FF2B5EF4-FFF2-40B4-BE49-F238E27FC236}">
-                <a16:creationId xmlns:a16="http://schemas.microsoft.com/office/drawing/2014/main" id="{C106782C-307A-4D2B-BDCA-BE0596244746}"/>
+                <a16:creationId xmlns:a16="http://schemas.microsoft.com/office/drawing/2014/main" id="{FFBD9758-D453-42C4-BCE5-9814F1418365}"/>
               </a:ext>
             </a:extLst>
           </p:cNvPr>
@@ -14389,7 +14847,7 @@
           <p:cNvPr id="4" name="">
             <a:extLst xmlns:a="http://schemas.openxmlformats.org/drawingml/2006/main">
               <a:ext uri="{FF2B5EF4-FFF2-40B4-BE49-F238E27FC236}">
-                <a16:creationId xmlns:a16="http://schemas.microsoft.com/office/drawing/2014/main" id="{8853DCD2-C4EB-4FB0-B5D0-052373A3378F}"/>
+                <a16:creationId xmlns:a16="http://schemas.microsoft.com/office/drawing/2014/main" id="{997A0FCF-7BA7-4E3C-8E6F-CA6D601AD477}"/>
               </a:ext>
             </a:extLst>
           </p:cNvPr>
@@ -14444,7 +14902,7 @@
     </p:spTree>
     <p:extLst>
       <p:ext uri="{BB962C8B-B14F-4D97-AF65-F5344CB8AC3E}">
-        <p14:creationId xmlns:p14="http://schemas.microsoft.com/office/powerpoint/2010/main" val="812895997"/>
+        <p14:creationId xmlns:p14="http://schemas.microsoft.com/office/powerpoint/2010/main" val="1491986120"/>
       </p:ext>
     </p:extLst>
   </p:cSld>
@@ -14475,7 +14933,7 @@
           <p:cNvPr id="5" name="">
             <a:extLst xmlns:a="http://schemas.openxmlformats.org/drawingml/2006/main">
               <a:ext uri="{FF2B5EF4-FFF2-40B4-BE49-F238E27FC236}">
-                <a16:creationId xmlns:a16="http://schemas.microsoft.com/office/drawing/2014/main" id="{DB0BCA22-A74E-4A80-9A80-BDE97234DB22}"/>
+                <a16:creationId xmlns:a16="http://schemas.microsoft.com/office/drawing/2014/main" id="{DB18AF3B-E4F6-4DB0-813E-24F758FD0DAE}"/>
               </a:ext>
             </a:extLst>
           </p:cNvPr>
@@ -14754,7 +15212,7 @@
           <p:cNvPr id="3" name="">
             <a:extLst xmlns:a="http://schemas.openxmlformats.org/drawingml/2006/main">
               <a:ext uri="{FF2B5EF4-FFF2-40B4-BE49-F238E27FC236}">
-                <a16:creationId xmlns:a16="http://schemas.microsoft.com/office/drawing/2014/main" id="{C4AF41F5-398E-4887-ACAE-B9315AE55E51}"/>
+                <a16:creationId xmlns:a16="http://schemas.microsoft.com/office/drawing/2014/main" id="{B0A10C20-DEF1-4752-B2CB-68BB443D6EF2}"/>
               </a:ext>
             </a:extLst>
           </p:cNvPr>
@@ -14811,7 +15269,7 @@
           <p:cNvPr id="4" name="">
             <a:extLst xmlns:a="http://schemas.openxmlformats.org/drawingml/2006/main">
               <a:ext uri="{FF2B5EF4-FFF2-40B4-BE49-F238E27FC236}">
-                <a16:creationId xmlns:a16="http://schemas.microsoft.com/office/drawing/2014/main" id="{AA64AEEE-AC9A-47DB-A78D-BF428399E577}"/>
+                <a16:creationId xmlns:a16="http://schemas.microsoft.com/office/drawing/2014/main" id="{A0ABB6F2-1ECC-460D-A9C7-11892A563B7F}"/>
               </a:ext>
             </a:extLst>
           </p:cNvPr>
@@ -14866,7 +15324,7 @@
     </p:spTree>
     <p:extLst>
       <p:ext uri="{BB962C8B-B14F-4D97-AF65-F5344CB8AC3E}">
-        <p14:creationId xmlns:p14="http://schemas.microsoft.com/office/powerpoint/2010/main" val="947046183"/>
+        <p14:creationId xmlns:p14="http://schemas.microsoft.com/office/powerpoint/2010/main" val="2127753512"/>
       </p:ext>
     </p:extLst>
   </p:cSld>
@@ -14897,7 +15355,7 @@
           <p:cNvPr id="5" name="">
             <a:extLst xmlns:a="http://schemas.openxmlformats.org/drawingml/2006/main">
               <a:ext uri="{FF2B5EF4-FFF2-40B4-BE49-F238E27FC236}">
-                <a16:creationId xmlns:a16="http://schemas.microsoft.com/office/drawing/2014/main" id="{98C68FEA-584B-45E3-969A-2AC7EAF1AB06}"/>
+                <a16:creationId xmlns:a16="http://schemas.microsoft.com/office/drawing/2014/main" id="{800066AB-D29D-4FBE-B5A4-1E507D26BD40}"/>
               </a:ext>
             </a:extLst>
           </p:cNvPr>
@@ -15126,7 +15584,7 @@
           <p:cNvPr id="3" name="">
             <a:extLst xmlns:a="http://schemas.openxmlformats.org/drawingml/2006/main">
               <a:ext uri="{FF2B5EF4-FFF2-40B4-BE49-F238E27FC236}">
-                <a16:creationId xmlns:a16="http://schemas.microsoft.com/office/drawing/2014/main" id="{78F96641-825C-4F53-B002-0181E78E2A0A}"/>
+                <a16:creationId xmlns:a16="http://schemas.microsoft.com/office/drawing/2014/main" id="{046D95A8-137B-411C-9218-5ADAA3D37404}"/>
               </a:ext>
             </a:extLst>
           </p:cNvPr>
@@ -15183,7 +15641,7 @@
           <p:cNvPr id="4" name="">
             <a:extLst xmlns:a="http://schemas.openxmlformats.org/drawingml/2006/main">
               <a:ext uri="{FF2B5EF4-FFF2-40B4-BE49-F238E27FC236}">
-                <a16:creationId xmlns:a16="http://schemas.microsoft.com/office/drawing/2014/main" id="{282CDD22-8E1B-469C-8231-D90372F19667}"/>
+                <a16:creationId xmlns:a16="http://schemas.microsoft.com/office/drawing/2014/main" id="{2FAF6FEA-F1F6-434D-9592-71E8CACC4949}"/>
               </a:ext>
             </a:extLst>
           </p:cNvPr>
@@ -15238,7 +15696,879 @@
     </p:spTree>
     <p:extLst>
       <p:ext uri="{BB962C8B-B14F-4D97-AF65-F5344CB8AC3E}">
-        <p14:creationId xmlns:p14="http://schemas.microsoft.com/office/powerpoint/2010/main" val="1490437536"/>
+        <p14:creationId xmlns:p14="http://schemas.microsoft.com/office/powerpoint/2010/main" val="1009031219"/>
+      </p:ext>
+    </p:extLst>
+  </p:cSld>
+</p:sld>
+</file>
+
+<file path=ppt/slides/slide29.xml><?xml version="1.0" encoding="utf-8"?>
+<p:sld xmlns:p="http://schemas.openxmlformats.org/presentationml/2006/main">
+  <p:cSld>
+    <p:bg>
+      <p:bgPr>
+        <a:solidFill xmlns:a="http://schemas.openxmlformats.org/drawingml/2006/main">
+          <a:srgbClr val="F6F4ED"/>
+        </a:solidFill>
+      </p:bgPr>
+    </p:bg>
+    <p:spTree>
+      <p:nvGrpSpPr>
+        <p:cNvPr id="1" name=""/>
+        <p:cNvGrpSpPr/>
+        <p:nvPr/>
+      </p:nvGrpSpPr>
+      <p:grpSpPr>
+        <a:xfrm xmlns:a="http://schemas.openxmlformats.org/drawingml/2006/main"/>
+      </p:grpSpPr>
+      <p:sp>
+        <p:nvSpPr>
+          <p:cNvPr id="6" name="">
+            <a:extLst xmlns:a="http://schemas.openxmlformats.org/drawingml/2006/main">
+              <a:ext uri="{FF2B5EF4-FFF2-40B4-BE49-F238E27FC236}">
+                <a16:creationId xmlns:a16="http://schemas.microsoft.com/office/drawing/2014/main" id="{073B2E49-2464-45BA-8317-ACCAAE499BFE}"/>
+              </a:ext>
+            </a:extLst>
+          </p:cNvPr>
+          <p:cNvSpPr>
+            <a:spLocks xmlns:a="http://schemas.openxmlformats.org/drawingml/2006/main" noGrp="1"/>
+          </p:cNvSpPr>
+          <p:nvPr/>
+        </p:nvSpPr>
+        <p:spPr>
+          <a:xfrm xmlns:a="http://schemas.openxmlformats.org/drawingml/2006/main">
+            <a:off x="762000" y="485775"/>
+            <a:ext cx="10668000" cy="586550"/>
+          </a:xfrm>
+          <a:prstGeom xmlns:a="http://schemas.openxmlformats.org/drawingml/2006/main" prst="rect">
+            <a:avLst/>
+          </a:prstGeom>
+          <a:noFill xmlns:a="http://schemas.openxmlformats.org/drawingml/2006/main"/>
+          <a:ln xmlns:a="http://schemas.openxmlformats.org/drawingml/2006/main" w="0">
+            <a:noFill/>
+          </a:ln>
+        </p:spPr>
+        <p:txBody>
+          <a:bodyPr xmlns:a="http://schemas.openxmlformats.org/drawingml/2006/main" wrap="square" lIns="0" tIns="0" rIns="0" bIns="0" anchor="t">
+            <a:noAutofit/>
+          </a:bodyPr>
+          <a:lstStyle xmlns:a="http://schemas.openxmlformats.org/drawingml/2006/main"/>
+          <a:p xmlns:a="http://schemas.openxmlformats.org/drawingml/2006/main">
+            <a:pPr>
+              <a:defRPr sz="3525" b="1">
+                <a:solidFill>
+                  <a:srgbClr val="243866"/>
+                </a:solidFill>
+                <a:latin typeface="Arial"/>
+                <a:ea typeface="Arial"/>
+                <a:cs typeface="Arial"/>
+              </a:defRPr>
+            </a:pPr>
+            <a:r>
+              <a:rPr sz="3525" b="1">
+                <a:solidFill>
+                  <a:srgbClr val="243866"/>
+                </a:solidFill>
+                <a:latin typeface="Arial"/>
+                <a:ea typeface="Arial"/>
+                <a:cs typeface="Arial"/>
+              </a:rPr>
+              <a:t>Development experiment: new urgent misses</a:t>
+            </a:r>
+          </a:p>
+        </p:txBody>
+      </p:sp>
+      <p:graphicFrame>
+        <p:nvGraphicFramePr>
+          <p:cNvPr id="7" name=""/>
+          <p:cNvGraphicFramePr/>
+          <p:nvPr/>
+        </p:nvGraphicFramePr>
+        <p:xfrm>
+          <a:off xmlns:a="http://schemas.openxmlformats.org/drawingml/2006/main" x="762000" y="1619250"/>
+          <a:ext xmlns:a="http://schemas.openxmlformats.org/drawingml/2006/main" cx="10668000" cy="3679698"/>
+        </p:xfrm>
+        <a:graphic xmlns:a="http://schemas.openxmlformats.org/drawingml/2006/main">
+          <a:graphicData uri="http://schemas.openxmlformats.org/drawingml/2006/table">
+            <a:tbl>
+              <a:tblPr firstRow="1" bandRow="0"/>
+              <a:tblGrid>
+                <a:gridCol w="6400800"/>
+                <a:gridCol w="2133600"/>
+                <a:gridCol w="2133600"/>
+              </a:tblGrid>
+              <a:tr h="459962">
+                <a:tc>
+                  <a:txBody>
+                    <a:bodyPr/>
+                    <a:lstStyle/>
+                    <a:p>
+                      <a:r>
+                        <a:rPr sz="1725" b="1">
+                          <a:solidFill>
+                            <a:srgbClr val="FFFFFF"/>
+                          </a:solidFill>
+                          <a:latin typeface="Arial"/>
+                          <a:ea typeface="Arial"/>
+                          <a:cs typeface="Arial"/>
+                        </a:rPr>
+                        <a:t>Case set and endpoint</a:t>
+                      </a:r>
+                    </a:p>
+                  </a:txBody>
+                  <a:tcPr marL="133350" marR="133350" marT="76200" marB="76200" anchor="ctr">
+                    <a:solidFill>
+                      <a:srgbClr val="243866"/>
+                    </a:solidFill>
+                  </a:tcPr>
+                </a:tc>
+                <a:tc>
+                  <a:txBody>
+                    <a:bodyPr/>
+                    <a:lstStyle/>
+                    <a:p>
+                      <a:r>
+                        <a:rPr sz="1725" b="1">
+                          <a:solidFill>
+                            <a:srgbClr val="FFFFFF"/>
+                          </a:solidFill>
+                          <a:latin typeface="Arial"/>
+                          <a:ea typeface="Arial"/>
+                          <a:cs typeface="Arial"/>
+                        </a:rPr>
+                        <a:t>Baseline</a:t>
+                      </a:r>
+                    </a:p>
+                  </a:txBody>
+                  <a:tcPr marL="133350" marR="133350" marT="76200" marB="76200" anchor="ctr">
+                    <a:solidFill>
+                      <a:srgbClr val="243866"/>
+                    </a:solidFill>
+                  </a:tcPr>
+                </a:tc>
+                <a:tc>
+                  <a:txBody>
+                    <a:bodyPr/>
+                    <a:lstStyle/>
+                    <a:p>
+                      <a:r>
+                        <a:rPr sz="1725" b="1">
+                          <a:solidFill>
+                            <a:srgbClr val="FFFFFF"/>
+                          </a:solidFill>
+                          <a:latin typeface="Arial"/>
+                          <a:ea typeface="Arial"/>
+                          <a:cs typeface="Arial"/>
+                        </a:rPr>
+                        <a:t>New prompt</a:t>
+                      </a:r>
+                    </a:p>
+                  </a:txBody>
+                  <a:tcPr marL="133350" marR="133350" marT="76200" marB="76200" anchor="ctr">
+                    <a:solidFill>
+                      <a:srgbClr val="243866"/>
+                    </a:solidFill>
+                  </a:tcPr>
+                </a:tc>
+              </a:tr>
+              <a:tr h="459962">
+                <a:tc>
+                  <a:txBody>
+                    <a:bodyPr/>
+                    <a:lstStyle/>
+                    <a:p>
+                      <a:r>
+                        <a:rPr sz="1725" b="0">
+                          <a:solidFill>
+                            <a:srgbClr val="28354A"/>
+                          </a:solidFill>
+                          <a:latin typeface="Arial"/>
+                          <a:ea typeface="Arial"/>
+                          <a:cs typeface="Arial"/>
+                        </a:rPr>
+                        <a:t>Known physician reference: agreement</a:t>
+                      </a:r>
+                    </a:p>
+                  </a:txBody>
+                  <a:tcPr marL="133350" marR="133350" marT="76200" marB="76200" anchor="ctr">
+                    <a:solidFill>
+                      <a:srgbClr val="F6F4ED"/>
+                    </a:solidFill>
+                  </a:tcPr>
+                </a:tc>
+                <a:tc>
+                  <a:txBody>
+                    <a:bodyPr/>
+                    <a:lstStyle/>
+                    <a:p>
+                      <a:r>
+                        <a:rPr sz="1725" b="0">
+                          <a:solidFill>
+                            <a:srgbClr val="28354A"/>
+                          </a:solidFill>
+                          <a:latin typeface="Arial"/>
+                          <a:ea typeface="Arial"/>
+                          <a:cs typeface="Arial"/>
+                        </a:rPr>
+                        <a:t>48/50</a:t>
+                      </a:r>
+                    </a:p>
+                  </a:txBody>
+                  <a:tcPr marL="133350" marR="133350" marT="76200" marB="76200" anchor="ctr">
+                    <a:solidFill>
+                      <a:srgbClr val="F6F4ED"/>
+                    </a:solidFill>
+                  </a:tcPr>
+                </a:tc>
+                <a:tc>
+                  <a:txBody>
+                    <a:bodyPr/>
+                    <a:lstStyle/>
+                    <a:p>
+                      <a:r>
+                        <a:rPr sz="1725" b="0">
+                          <a:solidFill>
+                            <a:srgbClr val="28354A"/>
+                          </a:solidFill>
+                          <a:latin typeface="Arial"/>
+                          <a:ea typeface="Arial"/>
+                          <a:cs typeface="Arial"/>
+                        </a:rPr>
+                        <a:t>44/50</a:t>
+                      </a:r>
+                    </a:p>
+                  </a:txBody>
+                  <a:tcPr marL="133350" marR="133350" marT="76200" marB="76200" anchor="ctr">
+                    <a:solidFill>
+                      <a:srgbClr val="F6F4ED"/>
+                    </a:solidFill>
+                  </a:tcPr>
+                </a:tc>
+              </a:tr>
+              <a:tr h="459962">
+                <a:tc>
+                  <a:txBody>
+                    <a:bodyPr/>
+                    <a:lstStyle/>
+                    <a:p>
+                      <a:r>
+                        <a:rPr sz="1725" b="0">
+                          <a:solidFill>
+                            <a:srgbClr val="28354A"/>
+                          </a:solidFill>
+                          <a:latin typeface="Arial"/>
+                          <a:ea typeface="Arial"/>
+                          <a:cs typeface="Arial"/>
+                        </a:rPr>
+                        <a:t>Known: required clinician action missed</a:t>
+                      </a:r>
+                    </a:p>
+                  </a:txBody>
+                  <a:tcPr marL="133350" marR="133350" marT="76200" marB="76200" anchor="ctr">
+                    <a:solidFill>
+                      <a:srgbClr val="F6F4ED"/>
+                    </a:solidFill>
+                  </a:tcPr>
+                </a:tc>
+                <a:tc>
+                  <a:txBody>
+                    <a:bodyPr/>
+                    <a:lstStyle/>
+                    <a:p>
+                      <a:r>
+                        <a:rPr sz="1725" b="0">
+                          <a:solidFill>
+                            <a:srgbClr val="28354A"/>
+                          </a:solidFill>
+                          <a:latin typeface="Arial"/>
+                          <a:ea typeface="Arial"/>
+                          <a:cs typeface="Arial"/>
+                        </a:rPr>
+                        <a:t>2/43</a:t>
+                      </a:r>
+                    </a:p>
+                  </a:txBody>
+                  <a:tcPr marL="133350" marR="133350" marT="76200" marB="76200" anchor="ctr">
+                    <a:solidFill>
+                      <a:srgbClr val="F6F4ED"/>
+                    </a:solidFill>
+                  </a:tcPr>
+                </a:tc>
+                <a:tc>
+                  <a:txBody>
+                    <a:bodyPr/>
+                    <a:lstStyle/>
+                    <a:p>
+                      <a:r>
+                        <a:rPr sz="1725" b="0">
+                          <a:solidFill>
+                            <a:srgbClr val="28354A"/>
+                          </a:solidFill>
+                          <a:latin typeface="Arial"/>
+                          <a:ea typeface="Arial"/>
+                          <a:cs typeface="Arial"/>
+                        </a:rPr>
+                        <a:t>2/43</a:t>
+                      </a:r>
+                    </a:p>
+                  </a:txBody>
+                  <a:tcPr marL="133350" marR="133350" marT="76200" marB="76200" anchor="ctr">
+                    <a:solidFill>
+                      <a:srgbClr val="F6F4ED"/>
+                    </a:solidFill>
+                  </a:tcPr>
+                </a:tc>
+              </a:tr>
+              <a:tr h="459962">
+                <a:tc>
+                  <a:txBody>
+                    <a:bodyPr/>
+                    <a:lstStyle/>
+                    <a:p>
+                      <a:r>
+                        <a:rPr sz="1725" b="0">
+                          <a:solidFill>
+                            <a:srgbClr val="28354A"/>
+                          </a:solidFill>
+                          <a:latin typeface="Arial"/>
+                          <a:ea typeface="Arial"/>
+                          <a:cs typeface="Arial"/>
+                        </a:rPr>
+                        <a:t>Known: required urgent action missed</a:t>
+                      </a:r>
+                    </a:p>
+                  </a:txBody>
+                  <a:tcPr marL="133350" marR="133350" marT="76200" marB="76200" anchor="ctr">
+                    <a:solidFill>
+                      <a:srgbClr val="F6F4ED"/>
+                    </a:solidFill>
+                  </a:tcPr>
+                </a:tc>
+                <a:tc>
+                  <a:txBody>
+                    <a:bodyPr/>
+                    <a:lstStyle/>
+                    <a:p>
+                      <a:r>
+                        <a:rPr sz="1725" b="0">
+                          <a:solidFill>
+                            <a:srgbClr val="28354A"/>
+                          </a:solidFill>
+                          <a:latin typeface="Arial"/>
+                          <a:ea typeface="Arial"/>
+                          <a:cs typeface="Arial"/>
+                        </a:rPr>
+                        <a:t>0/25</a:t>
+                      </a:r>
+                    </a:p>
+                  </a:txBody>
+                  <a:tcPr marL="133350" marR="133350" marT="76200" marB="76200" anchor="ctr">
+                    <a:solidFill>
+                      <a:srgbClr val="F6F4ED"/>
+                    </a:solidFill>
+                  </a:tcPr>
+                </a:tc>
+                <a:tc>
+                  <a:txBody>
+                    <a:bodyPr/>
+                    <a:lstStyle/>
+                    <a:p>
+                      <a:r>
+                        <a:rPr sz="1725" b="0">
+                          <a:solidFill>
+                            <a:srgbClr val="28354A"/>
+                          </a:solidFill>
+                          <a:latin typeface="Arial"/>
+                          <a:ea typeface="Arial"/>
+                          <a:cs typeface="Arial"/>
+                        </a:rPr>
+                        <a:t>3/25</a:t>
+                      </a:r>
+                    </a:p>
+                  </a:txBody>
+                  <a:tcPr marL="133350" marR="133350" marT="76200" marB="76200" anchor="ctr">
+                    <a:solidFill>
+                      <a:srgbClr val="F6F4ED"/>
+                    </a:solidFill>
+                  </a:tcPr>
+                </a:tc>
+              </a:tr>
+              <a:tr h="459962">
+                <a:tc>
+                  <a:txBody>
+                    <a:bodyPr/>
+                    <a:lstStyle/>
+                    <a:p>
+                      <a:r>
+                        <a:rPr sz="1725" b="0">
+                          <a:solidFill>
+                            <a:srgbClr val="28354A"/>
+                          </a:solidFill>
+                          <a:latin typeface="Arial"/>
+                          <a:ea typeface="Arial"/>
+                          <a:cs typeface="Arial"/>
+                        </a:rPr>
+                        <a:t>Known: unnecessary clinician review</a:t>
+                      </a:r>
+                    </a:p>
+                  </a:txBody>
+                  <a:tcPr marL="133350" marR="133350" marT="76200" marB="76200" anchor="ctr">
+                    <a:solidFill>
+                      <a:srgbClr val="F6F4ED"/>
+                    </a:solidFill>
+                  </a:tcPr>
+                </a:tc>
+                <a:tc>
+                  <a:txBody>
+                    <a:bodyPr/>
+                    <a:lstStyle/>
+                    <a:p>
+                      <a:r>
+                        <a:rPr sz="1725" b="0">
+                          <a:solidFill>
+                            <a:srgbClr val="28354A"/>
+                          </a:solidFill>
+                          <a:latin typeface="Arial"/>
+                          <a:ea typeface="Arial"/>
+                          <a:cs typeface="Arial"/>
+                        </a:rPr>
+                        <a:t>0/7</a:t>
+                      </a:r>
+                    </a:p>
+                  </a:txBody>
+                  <a:tcPr marL="133350" marR="133350" marT="76200" marB="76200" anchor="ctr">
+                    <a:solidFill>
+                      <a:srgbClr val="F6F4ED"/>
+                    </a:solidFill>
+                  </a:tcPr>
+                </a:tc>
+                <a:tc>
+                  <a:txBody>
+                    <a:bodyPr/>
+                    <a:lstStyle/>
+                    <a:p>
+                      <a:r>
+                        <a:rPr sz="1725" b="0">
+                          <a:solidFill>
+                            <a:srgbClr val="28354A"/>
+                          </a:solidFill>
+                          <a:latin typeface="Arial"/>
+                          <a:ea typeface="Arial"/>
+                          <a:cs typeface="Arial"/>
+                        </a:rPr>
+                        <a:t>1/7</a:t>
+                      </a:r>
+                    </a:p>
+                  </a:txBody>
+                  <a:tcPr marL="133350" marR="133350" marT="76200" marB="76200" anchor="ctr">
+                    <a:solidFill>
+                      <a:srgbClr val="F6F4ED"/>
+                    </a:solidFill>
+                  </a:tcPr>
+                </a:tc>
+              </a:tr>
+              <a:tr h="459962">
+                <a:tc>
+                  <a:txBody>
+                    <a:bodyPr/>
+                    <a:lstStyle/>
+                    <a:p>
+                      <a:r>
+                        <a:rPr sz="1725" b="0">
+                          <a:solidFill>
+                            <a:srgbClr val="28354A"/>
+                          </a:solidFill>
+                          <a:latin typeface="Arial"/>
+                          <a:ea typeface="Arial"/>
+                          <a:cs typeface="Arial"/>
+                        </a:rPr>
+                        <a:t>Authored challenge: agreement</a:t>
+                      </a:r>
+                    </a:p>
+                  </a:txBody>
+                  <a:tcPr marL="133350" marR="133350" marT="76200" marB="76200" anchor="ctr">
+                    <a:solidFill>
+                      <a:srgbClr val="F6F4ED"/>
+                    </a:solidFill>
+                  </a:tcPr>
+                </a:tc>
+                <a:tc>
+                  <a:txBody>
+                    <a:bodyPr/>
+                    <a:lstStyle/>
+                    <a:p>
+                      <a:r>
+                        <a:rPr sz="1725" b="0">
+                          <a:solidFill>
+                            <a:srgbClr val="28354A"/>
+                          </a:solidFill>
+                          <a:latin typeface="Arial"/>
+                          <a:ea typeface="Arial"/>
+                          <a:cs typeface="Arial"/>
+                        </a:rPr>
+                        <a:t>22/24</a:t>
+                      </a:r>
+                    </a:p>
+                  </a:txBody>
+                  <a:tcPr marL="133350" marR="133350" marT="76200" marB="76200" anchor="ctr">
+                    <a:solidFill>
+                      <a:srgbClr val="F6F4ED"/>
+                    </a:solidFill>
+                  </a:tcPr>
+                </a:tc>
+                <a:tc>
+                  <a:txBody>
+                    <a:bodyPr/>
+                    <a:lstStyle/>
+                    <a:p>
+                      <a:r>
+                        <a:rPr sz="1725" b="0">
+                          <a:solidFill>
+                            <a:srgbClr val="28354A"/>
+                          </a:solidFill>
+                          <a:latin typeface="Arial"/>
+                          <a:ea typeface="Arial"/>
+                          <a:cs typeface="Arial"/>
+                        </a:rPr>
+                        <a:t>23/24</a:t>
+                      </a:r>
+                    </a:p>
+                  </a:txBody>
+                  <a:tcPr marL="133350" marR="133350" marT="76200" marB="76200" anchor="ctr">
+                    <a:solidFill>
+                      <a:srgbClr val="F6F4ED"/>
+                    </a:solidFill>
+                  </a:tcPr>
+                </a:tc>
+              </a:tr>
+              <a:tr h="459962">
+                <a:tc>
+                  <a:txBody>
+                    <a:bodyPr/>
+                    <a:lstStyle/>
+                    <a:p>
+                      <a:r>
+                        <a:rPr sz="1725" b="0">
+                          <a:solidFill>
+                            <a:srgbClr val="28354A"/>
+                          </a:solidFill>
+                          <a:latin typeface="Arial"/>
+                          <a:ea typeface="Arial"/>
+                          <a:cs typeface="Arial"/>
+                        </a:rPr>
+                        <a:t>Authored challenge: clinician action missed</a:t>
+                      </a:r>
+                    </a:p>
+                  </a:txBody>
+                  <a:tcPr marL="133350" marR="133350" marT="76200" marB="76200" anchor="ctr">
+                    <a:solidFill>
+                      <a:srgbClr val="F6F4ED"/>
+                    </a:solidFill>
+                  </a:tcPr>
+                </a:tc>
+                <a:tc>
+                  <a:txBody>
+                    <a:bodyPr/>
+                    <a:lstStyle/>
+                    <a:p>
+                      <a:r>
+                        <a:rPr sz="1725" b="0">
+                          <a:solidFill>
+                            <a:srgbClr val="28354A"/>
+                          </a:solidFill>
+                          <a:latin typeface="Arial"/>
+                          <a:ea typeface="Arial"/>
+                          <a:cs typeface="Arial"/>
+                        </a:rPr>
+                        <a:t>1/18</a:t>
+                      </a:r>
+                    </a:p>
+                  </a:txBody>
+                  <a:tcPr marL="133350" marR="133350" marT="76200" marB="76200" anchor="ctr">
+                    <a:solidFill>
+                      <a:srgbClr val="F6F4ED"/>
+                    </a:solidFill>
+                  </a:tcPr>
+                </a:tc>
+                <a:tc>
+                  <a:txBody>
+                    <a:bodyPr/>
+                    <a:lstStyle/>
+                    <a:p>
+                      <a:r>
+                        <a:rPr sz="1725" b="0">
+                          <a:solidFill>
+                            <a:srgbClr val="28354A"/>
+                          </a:solidFill>
+                          <a:latin typeface="Arial"/>
+                          <a:ea typeface="Arial"/>
+                          <a:cs typeface="Arial"/>
+                        </a:rPr>
+                        <a:t>0/18</a:t>
+                      </a:r>
+                    </a:p>
+                  </a:txBody>
+                  <a:tcPr marL="133350" marR="133350" marT="76200" marB="76200" anchor="ctr">
+                    <a:solidFill>
+                      <a:srgbClr val="F6F4ED"/>
+                    </a:solidFill>
+                  </a:tcPr>
+                </a:tc>
+              </a:tr>
+              <a:tr h="459962">
+                <a:tc>
+                  <a:txBody>
+                    <a:bodyPr/>
+                    <a:lstStyle/>
+                    <a:p>
+                      <a:r>
+                        <a:rPr sz="1725" b="0">
+                          <a:solidFill>
+                            <a:srgbClr val="28354A"/>
+                          </a:solidFill>
+                          <a:latin typeface="Arial"/>
+                          <a:ea typeface="Arial"/>
+                          <a:cs typeface="Arial"/>
+                        </a:rPr>
+                        <a:t>Authored challenge: urgent action missed</a:t>
+                      </a:r>
+                    </a:p>
+                  </a:txBody>
+                  <a:tcPr marL="133350" marR="133350" marT="76200" marB="76200" anchor="ctr">
+                    <a:solidFill>
+                      <a:srgbClr val="F6F4ED"/>
+                    </a:solidFill>
+                  </a:tcPr>
+                </a:tc>
+                <a:tc>
+                  <a:txBody>
+                    <a:bodyPr/>
+                    <a:lstStyle/>
+                    <a:p>
+                      <a:r>
+                        <a:rPr sz="1725" b="0">
+                          <a:solidFill>
+                            <a:srgbClr val="28354A"/>
+                          </a:solidFill>
+                          <a:latin typeface="Arial"/>
+                          <a:ea typeface="Arial"/>
+                          <a:cs typeface="Arial"/>
+                        </a:rPr>
+                        <a:t>1/10</a:t>
+                      </a:r>
+                    </a:p>
+                  </a:txBody>
+                  <a:tcPr marL="133350" marR="133350" marT="76200" marB="76200" anchor="ctr">
+                    <a:solidFill>
+                      <a:srgbClr val="F6F4ED"/>
+                    </a:solidFill>
+                  </a:tcPr>
+                </a:tc>
+                <a:tc>
+                  <a:txBody>
+                    <a:bodyPr/>
+                    <a:lstStyle/>
+                    <a:p>
+                      <a:r>
+                        <a:rPr sz="1725" b="0">
+                          <a:solidFill>
+                            <a:srgbClr val="28354A"/>
+                          </a:solidFill>
+                          <a:latin typeface="Arial"/>
+                          <a:ea typeface="Arial"/>
+                          <a:cs typeface="Arial"/>
+                        </a:rPr>
+                        <a:t>1/10</a:t>
+                      </a:r>
+                    </a:p>
+                  </a:txBody>
+                  <a:tcPr marL="133350" marR="133350" marT="76200" marB="76200" anchor="ctr">
+                    <a:solidFill>
+                      <a:srgbClr val="F6F4ED"/>
+                    </a:solidFill>
+                  </a:tcPr>
+                </a:tc>
+              </a:tr>
+            </a:tbl>
+          </a:graphicData>
+        </a:graphic>
+      </p:graphicFrame>
+      <p:sp>
+        <p:nvSpPr>
+          <p:cNvPr id="3" name="">
+            <a:extLst xmlns:a="http://schemas.openxmlformats.org/drawingml/2006/main">
+              <a:ext uri="{FF2B5EF4-FFF2-40B4-BE49-F238E27FC236}">
+                <a16:creationId xmlns:a16="http://schemas.microsoft.com/office/drawing/2014/main" id="{6639EC88-DFA0-459A-A673-D526DB5581A4}"/>
+              </a:ext>
+            </a:extLst>
+          </p:cNvPr>
+          <p:cNvSpPr>
+            <a:spLocks xmlns:a="http://schemas.openxmlformats.org/drawingml/2006/main" noGrp="1"/>
+          </p:cNvSpPr>
+          <p:nvPr/>
+        </p:nvSpPr>
+        <p:spPr>
+          <a:xfrm xmlns:a="http://schemas.openxmlformats.org/drawingml/2006/main">
+            <a:off x="762000" y="5562600"/>
+            <a:ext cx="10382250" cy="590550"/>
+          </a:xfrm>
+          <a:prstGeom xmlns:a="http://schemas.openxmlformats.org/drawingml/2006/main" prst="rect">
+            <a:avLst/>
+          </a:prstGeom>
+          <a:noFill xmlns:a="http://schemas.openxmlformats.org/drawingml/2006/main"/>
+          <a:ln xmlns:a="http://schemas.openxmlformats.org/drawingml/2006/main" w="0">
+            <a:noFill/>
+          </a:ln>
+        </p:spPr>
+        <p:txBody>
+          <a:bodyPr xmlns:a="http://schemas.openxmlformats.org/drawingml/2006/main" wrap="square" lIns="0" tIns="0" rIns="0" bIns="0" anchor="t">
+            <a:noAutofit/>
+          </a:bodyPr>
+          <a:lstStyle xmlns:a="http://schemas.openxmlformats.org/drawingml/2006/main"/>
+          <a:p xmlns:a="http://schemas.openxmlformats.org/drawingml/2006/main">
+            <a:pPr>
+              <a:defRPr sz="1875" b="1">
+                <a:solidFill>
+                  <a:srgbClr val="286B68"/>
+                </a:solidFill>
+                <a:latin typeface="Arial"/>
+                <a:ea typeface="Arial"/>
+                <a:cs typeface="Arial"/>
+              </a:defRPr>
+            </a:pPr>
+            <a:r>
+              <a:rPr sz="1875" b="1">
+                <a:solidFill>
+                  <a:srgbClr val="286B68"/>
+                </a:solidFill>
+                <a:latin typeface="Arial"/>
+                <a:ea typeface="Arial"/>
+                <a:cs typeface="Arial"/>
+              </a:rPr>
+              <a:t>Candidate not promoted. Three new urgent routing misses require review.</a:t>
+            </a:r>
+          </a:p>
+        </p:txBody>
+      </p:sp>
+      <p:sp>
+        <p:nvSpPr>
+          <p:cNvPr id="4" name="">
+            <a:extLst xmlns:a="http://schemas.openxmlformats.org/drawingml/2006/main">
+              <a:ext uri="{FF2B5EF4-FFF2-40B4-BE49-F238E27FC236}">
+                <a16:creationId xmlns:a16="http://schemas.microsoft.com/office/drawing/2014/main" id="{891CB177-EADF-4F64-ACC3-443F553A8D7A}"/>
+              </a:ext>
+            </a:extLst>
+          </p:cNvPr>
+          <p:cNvSpPr>
+            <a:spLocks xmlns:a="http://schemas.openxmlformats.org/drawingml/2006/main" noGrp="1"/>
+          </p:cNvSpPr>
+          <p:nvPr/>
+        </p:nvSpPr>
+        <p:spPr>
+          <a:xfrm xmlns:a="http://schemas.openxmlformats.org/drawingml/2006/main">
+            <a:off x="762000" y="6229350"/>
+            <a:ext cx="10096500" cy="466725"/>
+          </a:xfrm>
+          <a:prstGeom xmlns:a="http://schemas.openxmlformats.org/drawingml/2006/main" prst="rect">
+            <a:avLst/>
+          </a:prstGeom>
+          <a:noFill xmlns:a="http://schemas.openxmlformats.org/drawingml/2006/main"/>
+          <a:ln xmlns:a="http://schemas.openxmlformats.org/drawingml/2006/main" w="0">
+            <a:noFill/>
+          </a:ln>
+        </p:spPr>
+        <p:txBody>
+          <a:bodyPr xmlns:a="http://schemas.openxmlformats.org/drawingml/2006/main" wrap="square" lIns="0" tIns="0" rIns="0" bIns="0" anchor="t">
+            <a:noAutofit/>
+          </a:bodyPr>
+          <a:lstStyle xmlns:a="http://schemas.openxmlformats.org/drawingml/2006/main"/>
+          <a:p xmlns:a="http://schemas.openxmlformats.org/drawingml/2006/main">
+            <a:pPr>
+              <a:defRPr sz="1275">
+                <a:solidFill>
+                  <a:srgbClr val="667084"/>
+                </a:solidFill>
+                <a:latin typeface="Arial"/>
+                <a:ea typeface="Arial"/>
+                <a:cs typeface="Arial"/>
+              </a:defRPr>
+            </a:pPr>
+            <a:r>
+              <a:rPr sz="1275">
+                <a:solidFill>
+                  <a:srgbClr val="667084"/>
+                </a:solidFill>
+                <a:latin typeface="Arial"/>
+                <a:ea typeface="Arial"/>
+                <a:cs typeface="Arial"/>
+              </a:rPr>
+              <a:t>Known set: post-output physician reference. Challenge: AI-authored policy checks, no physician approval. GUI unchanged.</a:t>
+            </a:r>
+          </a:p>
+        </p:txBody>
+      </p:sp>
+      <p:sp>
+        <p:nvSpPr>
+          <p:cNvPr id="5" name="">
+            <a:extLst xmlns:a="http://schemas.openxmlformats.org/drawingml/2006/main">
+              <a:ext uri="{FF2B5EF4-FFF2-40B4-BE49-F238E27FC236}">
+                <a16:creationId xmlns:a16="http://schemas.microsoft.com/office/drawing/2014/main" id="{B35010EE-7355-4BE3-8A40-8ADA42631472}"/>
+              </a:ext>
+            </a:extLst>
+          </p:cNvPr>
+          <p:cNvSpPr>
+            <a:spLocks xmlns:a="http://schemas.openxmlformats.org/drawingml/2006/main" noGrp="1"/>
+          </p:cNvSpPr>
+          <p:nvPr/>
+        </p:nvSpPr>
+        <p:spPr>
+          <a:xfrm xmlns:a="http://schemas.openxmlformats.org/drawingml/2006/main">
+            <a:off x="11296650" y="6400800"/>
+            <a:ext cx="361950" cy="228600"/>
+          </a:xfrm>
+          <a:prstGeom xmlns:a="http://schemas.openxmlformats.org/drawingml/2006/main" prst="rect">
+            <a:avLst/>
+          </a:prstGeom>
+          <a:noFill xmlns:a="http://schemas.openxmlformats.org/drawingml/2006/main"/>
+          <a:ln xmlns:a="http://schemas.openxmlformats.org/drawingml/2006/main" w="0">
+            <a:noFill/>
+          </a:ln>
+        </p:spPr>
+        <p:txBody>
+          <a:bodyPr xmlns:a="http://schemas.openxmlformats.org/drawingml/2006/main" wrap="square" lIns="0" tIns="0" rIns="0" bIns="0" anchor="t">
+            <a:noAutofit/>
+          </a:bodyPr>
+          <a:lstStyle xmlns:a="http://schemas.openxmlformats.org/drawingml/2006/main"/>
+          <a:p xmlns:a="http://schemas.openxmlformats.org/drawingml/2006/main">
+            <a:pPr algn="r">
+              <a:defRPr sz="1275">
+                <a:solidFill>
+                  <a:srgbClr val="667084"/>
+                </a:solidFill>
+                <a:latin typeface="Arial"/>
+                <a:ea typeface="Arial"/>
+                <a:cs typeface="Arial"/>
+              </a:defRPr>
+            </a:pPr>
+            <a:r>
+              <a:rPr sz="1275">
+                <a:solidFill>
+                  <a:srgbClr val="667084"/>
+                </a:solidFill>
+                <a:latin typeface="Arial"/>
+                <a:ea typeface="Arial"/>
+                <a:cs typeface="Arial"/>
+              </a:rPr>
+              <a:t>29</a:t>
+            </a:r>
+          </a:p>
+        </p:txBody>
+      </p:sp>
+    </p:spTree>
+    <p:extLst>
+      <p:ext uri="{BB962C8B-B14F-4D97-AF65-F5344CB8AC3E}">
+        <p14:creationId xmlns:p14="http://schemas.microsoft.com/office/powerpoint/2010/main" val="1333111578"/>
       </p:ext>
     </p:extLst>
   </p:cSld>
@@ -15269,7 +16599,7 @@
           <p:cNvPr id="10" name="">
             <a:extLst xmlns:a="http://schemas.openxmlformats.org/drawingml/2006/main">
               <a:ext uri="{FF2B5EF4-FFF2-40B4-BE49-F238E27FC236}">
-                <a16:creationId xmlns:a16="http://schemas.microsoft.com/office/drawing/2014/main" id="{D6384096-12F4-4707-9975-93BDC363C910}"/>
+                <a16:creationId xmlns:a16="http://schemas.microsoft.com/office/drawing/2014/main" id="{6684928C-032B-425F-8334-CBA8FD3CCD0F}"/>
               </a:ext>
             </a:extLst>
           </p:cNvPr>
@@ -15326,7 +16656,7 @@
           <p:cNvPr id="2" name="">
             <a:extLst xmlns:a="http://schemas.openxmlformats.org/drawingml/2006/main">
               <a:ext uri="{FF2B5EF4-FFF2-40B4-BE49-F238E27FC236}">
-                <a16:creationId xmlns:a16="http://schemas.microsoft.com/office/drawing/2014/main" id="{3263E1E0-B960-4048-82ED-D06DEDF51302}"/>
+                <a16:creationId xmlns:a16="http://schemas.microsoft.com/office/drawing/2014/main" id="{A2F83472-C267-4091-9E3E-9957683AD764}"/>
               </a:ext>
             </a:extLst>
           </p:cNvPr>
@@ -15373,7 +16703,7 @@
                 <a:ea typeface="Arial"/>
                 <a:cs typeface="Arial"/>
               </a:rPr>
-              <a:t>Fable SELF_CARE → physician ASYNC_PHYSICIAN</a:t>
+              <a:t>Frozen Fable SELF_CARE → physician ASYNC_PHYSICIAN</a:t>
             </a:r>
           </a:p>
         </p:txBody>
@@ -15383,7 +16713,7 @@
           <p:cNvPr id="3" name="">
             <a:extLst xmlns:a="http://schemas.openxmlformats.org/drawingml/2006/main">
               <a:ext uri="{FF2B5EF4-FFF2-40B4-BE49-F238E27FC236}">
-                <a16:creationId xmlns:a16="http://schemas.microsoft.com/office/drawing/2014/main" id="{92817178-6FD8-4423-9AD0-2433AC8E4C33}"/>
+                <a16:creationId xmlns:a16="http://schemas.microsoft.com/office/drawing/2014/main" id="{EAB90AA2-CD7A-41AD-A619-A399C5647D8B}"/>
               </a:ext>
             </a:extLst>
           </p:cNvPr>
@@ -15440,7 +16770,7 @@
           <p:cNvPr id="4" name="">
             <a:extLst xmlns:a="http://schemas.openxmlformats.org/drawingml/2006/main">
               <a:ext uri="{FF2B5EF4-FFF2-40B4-BE49-F238E27FC236}">
-                <a16:creationId xmlns:a16="http://schemas.microsoft.com/office/drawing/2014/main" id="{4135CA28-0EB8-4795-B1E7-888063ACE426}"/>
+                <a16:creationId xmlns:a16="http://schemas.microsoft.com/office/drawing/2014/main" id="{F93D5451-2B78-4B36-ACA6-3C4C4E2DFE8D}"/>
               </a:ext>
             </a:extLst>
           </p:cNvPr>
@@ -15497,7 +16827,7 @@
           <p:cNvPr id="5" name="">
             <a:extLst xmlns:a="http://schemas.openxmlformats.org/drawingml/2006/main">
               <a:ext uri="{FF2B5EF4-FFF2-40B4-BE49-F238E27FC236}">
-                <a16:creationId xmlns:a16="http://schemas.microsoft.com/office/drawing/2014/main" id="{EC256323-D62A-4006-A39A-6F929A1F8BEF}"/>
+                <a16:creationId xmlns:a16="http://schemas.microsoft.com/office/drawing/2014/main" id="{27AFB6CC-0CB3-4DB3-8618-F9DB18B023B4}"/>
               </a:ext>
             </a:extLst>
           </p:cNvPr>
@@ -15554,7 +16884,7 @@
           <p:cNvPr id="6" name="">
             <a:extLst xmlns:a="http://schemas.openxmlformats.org/drawingml/2006/main">
               <a:ext uri="{FF2B5EF4-FFF2-40B4-BE49-F238E27FC236}">
-                <a16:creationId xmlns:a16="http://schemas.microsoft.com/office/drawing/2014/main" id="{D1ABB657-FEB1-4A61-BAC2-28CD86576492}"/>
+                <a16:creationId xmlns:a16="http://schemas.microsoft.com/office/drawing/2014/main" id="{854293D3-8AA4-4FFA-88F8-B19954106153}"/>
               </a:ext>
             </a:extLst>
           </p:cNvPr>
@@ -15611,7 +16941,7 @@
           <p:cNvPr id="7" name="">
             <a:extLst xmlns:a="http://schemas.openxmlformats.org/drawingml/2006/main">
               <a:ext uri="{FF2B5EF4-FFF2-40B4-BE49-F238E27FC236}">
-                <a16:creationId xmlns:a16="http://schemas.microsoft.com/office/drawing/2014/main" id="{424534AE-5038-47F4-B9EE-EC3A68C8EDDC}"/>
+                <a16:creationId xmlns:a16="http://schemas.microsoft.com/office/drawing/2014/main" id="{0181DCCE-80C6-40F5-9450-31DA6D80BB9B}"/>
               </a:ext>
             </a:extLst>
           </p:cNvPr>
@@ -15668,7 +16998,7 @@
           <p:cNvPr id="8" name="">
             <a:extLst xmlns:a="http://schemas.openxmlformats.org/drawingml/2006/main">
               <a:ext uri="{FF2B5EF4-FFF2-40B4-BE49-F238E27FC236}">
-                <a16:creationId xmlns:a16="http://schemas.microsoft.com/office/drawing/2014/main" id="{B3DF7DEA-D009-4A03-AAC2-B539A1116B9F}"/>
+                <a16:creationId xmlns:a16="http://schemas.microsoft.com/office/drawing/2014/main" id="{22E14226-6FC7-4CBF-80D5-DC5490E274AF}"/>
               </a:ext>
             </a:extLst>
           </p:cNvPr>
@@ -15725,7 +17055,7 @@
           <p:cNvPr id="9" name="">
             <a:extLst xmlns:a="http://schemas.openxmlformats.org/drawingml/2006/main">
               <a:ext uri="{FF2B5EF4-FFF2-40B4-BE49-F238E27FC236}">
-                <a16:creationId xmlns:a16="http://schemas.microsoft.com/office/drawing/2014/main" id="{7D26B055-0FF1-4916-AC63-857D533D02C2}"/>
+                <a16:creationId xmlns:a16="http://schemas.microsoft.com/office/drawing/2014/main" id="{9D1CAE06-D8B9-4F46-8608-9D5E5F942607}"/>
               </a:ext>
             </a:extLst>
           </p:cNvPr>
@@ -15780,7 +17110,953 @@
     </p:spTree>
     <p:extLst>
       <p:ext uri="{BB962C8B-B14F-4D97-AF65-F5344CB8AC3E}">
-        <p14:creationId xmlns:p14="http://schemas.microsoft.com/office/powerpoint/2010/main" val="859143774"/>
+        <p14:creationId xmlns:p14="http://schemas.microsoft.com/office/powerpoint/2010/main" val="1267219906"/>
+      </p:ext>
+    </p:extLst>
+  </p:cSld>
+</p:sld>
+</file>
+
+<file path=ppt/slides/slide30.xml><?xml version="1.0" encoding="utf-8"?>
+<p:sld xmlns:p="http://schemas.openxmlformats.org/presentationml/2006/main">
+  <p:cSld>
+    <p:bg>
+      <p:bgPr>
+        <a:solidFill xmlns:a="http://schemas.openxmlformats.org/drawingml/2006/main">
+          <a:srgbClr val="F6F4ED"/>
+        </a:solidFill>
+      </p:bgPr>
+    </p:bg>
+    <p:spTree>
+      <p:nvGrpSpPr>
+        <p:cNvPr id="1" name=""/>
+        <p:cNvGrpSpPr/>
+        <p:nvPr/>
+      </p:nvGrpSpPr>
+      <p:grpSpPr>
+        <a:xfrm xmlns:a="http://schemas.openxmlformats.org/drawingml/2006/main"/>
+      </p:grpSpPr>
+      <p:sp>
+        <p:nvSpPr>
+          <p:cNvPr id="5" name="">
+            <a:extLst xmlns:a="http://schemas.openxmlformats.org/drawingml/2006/main">
+              <a:ext uri="{FF2B5EF4-FFF2-40B4-BE49-F238E27FC236}">
+                <a16:creationId xmlns:a16="http://schemas.microsoft.com/office/drawing/2014/main" id="{ABFD1881-AD6C-4D73-B6F4-48F640A06A62}"/>
+              </a:ext>
+            </a:extLst>
+          </p:cNvPr>
+          <p:cNvSpPr>
+            <a:spLocks xmlns:a="http://schemas.openxmlformats.org/drawingml/2006/main" noGrp="1"/>
+          </p:cNvSpPr>
+          <p:nvPr/>
+        </p:nvSpPr>
+        <p:spPr>
+          <a:xfrm xmlns:a="http://schemas.openxmlformats.org/drawingml/2006/main">
+            <a:off x="762000" y="485775"/>
+            <a:ext cx="10668000" cy="586550"/>
+          </a:xfrm>
+          <a:prstGeom xmlns:a="http://schemas.openxmlformats.org/drawingml/2006/main" prst="rect">
+            <a:avLst/>
+          </a:prstGeom>
+          <a:noFill xmlns:a="http://schemas.openxmlformats.org/drawingml/2006/main"/>
+          <a:ln xmlns:a="http://schemas.openxmlformats.org/drawingml/2006/main" w="0">
+            <a:noFill/>
+          </a:ln>
+        </p:spPr>
+        <p:txBody>
+          <a:bodyPr xmlns:a="http://schemas.openxmlformats.org/drawingml/2006/main" wrap="square" lIns="0" tIns="0" rIns="0" bIns="0" anchor="t">
+            <a:noAutofit/>
+          </a:bodyPr>
+          <a:lstStyle xmlns:a="http://schemas.openxmlformats.org/drawingml/2006/main"/>
+          <a:p xmlns:a="http://schemas.openxmlformats.org/drawingml/2006/main">
+            <a:pPr>
+              <a:defRPr sz="3525" b="1">
+                <a:solidFill>
+                  <a:srgbClr val="243866"/>
+                </a:solidFill>
+                <a:latin typeface="Arial"/>
+                <a:ea typeface="Arial"/>
+                <a:cs typeface="Arial"/>
+              </a:defRPr>
+            </a:pPr>
+            <a:r>
+              <a:rPr sz="3525" b="1">
+                <a:solidFill>
+                  <a:srgbClr val="243866"/>
+                </a:solidFill>
+                <a:latin typeface="Arial"/>
+                <a:ea typeface="Arial"/>
+                <a:cs typeface="Arial"/>
+              </a:rPr>
+              <a:t>Independent validation remains pending</a:t>
+            </a:r>
+          </a:p>
+        </p:txBody>
+      </p:sp>
+      <p:graphicFrame>
+        <p:nvGraphicFramePr>
+          <p:cNvPr id="6" name=""/>
+          <p:cNvGraphicFramePr/>
+          <p:nvPr/>
+        </p:nvGraphicFramePr>
+        <p:xfrm>
+          <a:off xmlns:a="http://schemas.openxmlformats.org/drawingml/2006/main" x="762000" y="1619250"/>
+          <a:ext xmlns:a="http://schemas.openxmlformats.org/drawingml/2006/main" cx="10668000" cy="3377660"/>
+        </p:xfrm>
+        <a:graphic xmlns:a="http://schemas.openxmlformats.org/drawingml/2006/main">
+          <a:graphicData uri="http://schemas.openxmlformats.org/drawingml/2006/table">
+            <a:tbl>
+              <a:tblPr firstRow="1" bandRow="0"/>
+              <a:tblGrid>
+                <a:gridCol w="3413760"/>
+                <a:gridCol w="7254240"/>
+              </a:tblGrid>
+              <a:tr h="459962">
+                <a:tc>
+                  <a:txBody>
+                    <a:bodyPr/>
+                    <a:lstStyle/>
+                    <a:p>
+                      <a:r>
+                        <a:rPr sz="1725" b="1">
+                          <a:solidFill>
+                            <a:srgbClr val="FFFFFF"/>
+                          </a:solidFill>
+                          <a:latin typeface="Arial"/>
+                          <a:ea typeface="Arial"/>
+                          <a:cs typeface="Arial"/>
+                        </a:rPr>
+                        <a:t>Owner and work</a:t>
+                      </a:r>
+                    </a:p>
+                  </a:txBody>
+                  <a:tcPr marL="133350" marR="133350" marT="76200" marB="76200" anchor="ctr">
+                    <a:solidFill>
+                      <a:srgbClr val="243866"/>
+                    </a:solidFill>
+                  </a:tcPr>
+                </a:tc>
+                <a:tc>
+                  <a:txBody>
+                    <a:bodyPr/>
+                    <a:lstStyle/>
+                    <a:p>
+                      <a:r>
+                        <a:rPr sz="1725" b="1">
+                          <a:solidFill>
+                            <a:srgbClr val="FFFFFF"/>
+                          </a:solidFill>
+                          <a:latin typeface="Arial"/>
+                          <a:ea typeface="Arial"/>
+                          <a:cs typeface="Arial"/>
+                        </a:rPr>
+                        <a:t>Evidence required</a:t>
+                      </a:r>
+                    </a:p>
+                  </a:txBody>
+                  <a:tcPr marL="133350" marR="133350" marT="76200" marB="76200" anchor="ctr">
+                    <a:solidFill>
+                      <a:srgbClr val="243866"/>
+                    </a:solidFill>
+                  </a:tcPr>
+                </a:tc>
+              </a:tr>
+              <a:tr h="729425">
+                <a:tc>
+                  <a:txBody>
+                    <a:bodyPr/>
+                    <a:lstStyle/>
+                    <a:p>
+                      <a:r>
+                        <a:rPr sz="1725" b="0">
+                          <a:solidFill>
+                            <a:srgbClr val="28354A"/>
+                          </a:solidFill>
+                          <a:latin typeface="Arial"/>
+                          <a:ea typeface="Arial"/>
+                          <a:cs typeface="Arial"/>
+                        </a:rPr>
+                        <a:t>Clinical policy</a:t>
+                      </a:r>
+                    </a:p>
+                    <a:p>
+                      <a:r>
+                        <a:rPr sz="1725" b="0">
+                          <a:solidFill>
+                            <a:srgbClr val="28354A"/>
+                          </a:solidFill>
+                          <a:latin typeface="Arial"/>
+                          <a:ea typeface="Arial"/>
+                          <a:cs typeface="Arial"/>
+                        </a:rPr>
+                        <a:t>Clinical lead</a:t>
+                      </a:r>
+                    </a:p>
+                  </a:txBody>
+                  <a:tcPr marL="133350" marR="133350" marT="76200" marB="76200" anchor="ctr">
+                    <a:solidFill>
+                      <a:srgbClr val="F6F4ED"/>
+                    </a:solidFill>
+                  </a:tcPr>
+                </a:tc>
+                <a:tc>
+                  <a:txBody>
+                    <a:bodyPr/>
+                    <a:lstStyle/>
+                    <a:p>
+                      <a:r>
+                        <a:rPr sz="1725" b="0">
+                          <a:solidFill>
+                            <a:srgbClr val="28354A"/>
+                          </a:solidFill>
+                          <a:latin typeface="Arial"/>
+                          <a:ea typeface="Arial"/>
+                          <a:cs typeface="Arial"/>
+                        </a:rPr>
+                        <a:t>Approve self-care eligibility, care timing and handling of clinically material unknowns.</a:t>
+                      </a:r>
+                    </a:p>
+                  </a:txBody>
+                  <a:tcPr marL="133350" marR="133350" marT="76200" marB="76200" anchor="ctr">
+                    <a:solidFill>
+                      <a:srgbClr val="F6F4ED"/>
+                    </a:solidFill>
+                  </a:tcPr>
+                </a:tc>
+              </a:tr>
+              <a:tr h="729425">
+                <a:tc>
+                  <a:txBody>
+                    <a:bodyPr/>
+                    <a:lstStyle/>
+                    <a:p>
+                      <a:r>
+                        <a:rPr sz="1725" b="0">
+                          <a:solidFill>
+                            <a:srgbClr val="28354A"/>
+                          </a:solidFill>
+                          <a:latin typeface="Arial"/>
+                          <a:ea typeface="Arial"/>
+                          <a:cs typeface="Arial"/>
+                        </a:rPr>
+                        <a:t>Independent reference</a:t>
+                      </a:r>
+                    </a:p>
+                    <a:p>
+                      <a:r>
+                        <a:rPr sz="1725" b="0">
+                          <a:solidFill>
+                            <a:srgbClr val="28354A"/>
+                          </a:solidFill>
+                          <a:latin typeface="Arial"/>
+                          <a:ea typeface="Arial"/>
+                          <a:cs typeface="Arial"/>
+                        </a:rPr>
+                        <a:t>Clinical evaluation lead</a:t>
+                      </a:r>
+                    </a:p>
+                  </a:txBody>
+                  <a:tcPr marL="133350" marR="133350" marT="76200" marB="76200" anchor="ctr">
+                    <a:solidFill>
+                      <a:srgbClr val="F6F4ED"/>
+                    </a:solidFill>
+                  </a:tcPr>
+                </a:tc>
+                <a:tc>
+                  <a:txBody>
+                    <a:bodyPr/>
+                    <a:lstStyle/>
+                    <a:p>
+                      <a:r>
+                        <a:rPr sz="1725" b="0">
+                          <a:solidFill>
+                            <a:srgbClr val="28354A"/>
+                          </a:solidFill>
+                          <a:latin typeface="Arial"/>
+                          <a:ea typeface="Arial"/>
+                          <a:cs typeface="Arial"/>
+                        </a:rPr>
+                        <a:t>Two clinicians label new cases without model outputs. A third adjudicates disagreements.</a:t>
+                      </a:r>
+                    </a:p>
+                  </a:txBody>
+                  <a:tcPr marL="133350" marR="133350" marT="76200" marB="76200" anchor="ctr">
+                    <a:solidFill>
+                      <a:srgbClr val="F6F4ED"/>
+                    </a:solidFill>
+                  </a:tcPr>
+                </a:tc>
+              </a:tr>
+              <a:tr h="729425">
+                <a:tc>
+                  <a:txBody>
+                    <a:bodyPr/>
+                    <a:lstStyle/>
+                    <a:p>
+                      <a:r>
+                        <a:rPr sz="1725" b="0">
+                          <a:solidFill>
+                            <a:srgbClr val="28354A"/>
+                          </a:solidFill>
+                          <a:latin typeface="Arial"/>
+                          <a:ea typeface="Arial"/>
+                          <a:cs typeface="Arial"/>
+                        </a:rPr>
+                        <a:t>Locked evaluation</a:t>
+                      </a:r>
+                    </a:p>
+                    <a:p>
+                      <a:r>
+                        <a:rPr sz="1725" b="0">
+                          <a:solidFill>
+                            <a:srgbClr val="28354A"/>
+                          </a:solidFill>
+                          <a:latin typeface="Arial"/>
+                          <a:ea typeface="Arial"/>
+                          <a:cs typeface="Arial"/>
+                        </a:rPr>
+                        <a:t>Evaluation + safety</a:t>
+                      </a:r>
+                    </a:p>
+                  </a:txBody>
+                  <a:tcPr marL="133350" marR="133350" marT="76200" marB="76200" anchor="ctr">
+                    <a:solidFill>
+                      <a:srgbClr val="F6F4ED"/>
+                    </a:solidFill>
+                  </a:tcPr>
+                </a:tc>
+                <a:tc>
+                  <a:txBody>
+                    <a:bodyPr/>
+                    <a:lstStyle/>
+                    <a:p>
+                      <a:r>
+                        <a:rPr sz="1725" b="0">
+                          <a:solidFill>
+                            <a:srgbClr val="28354A"/>
+                          </a:solidFill>
+                          <a:latin typeface="Arial"/>
+                          <a:ea typeface="Arial"/>
+                          <a:cs typeface="Arial"/>
+                        </a:rPr>
+                        <a:t>Freeze new case sets, endpoints and limits. Report severe misses, uncertainty and referral burden.</a:t>
+                      </a:r>
+                    </a:p>
+                  </a:txBody>
+                  <a:tcPr marL="133350" marR="133350" marT="76200" marB="76200" anchor="ctr">
+                    <a:solidFill>
+                      <a:srgbClr val="F6F4ED"/>
+                    </a:solidFill>
+                  </a:tcPr>
+                </a:tc>
+              </a:tr>
+              <a:tr h="729425">
+                <a:tc>
+                  <a:txBody>
+                    <a:bodyPr/>
+                    <a:lstStyle/>
+                    <a:p>
+                      <a:r>
+                        <a:rPr sz="1725" b="0">
+                          <a:solidFill>
+                            <a:srgbClr val="28354A"/>
+                          </a:solidFill>
+                          <a:latin typeface="Arial"/>
+                          <a:ea typeface="Arial"/>
+                          <a:cs typeface="Arial"/>
+                        </a:rPr>
+                        <a:t>Prospective review</a:t>
+                      </a:r>
+                    </a:p>
+                    <a:p>
+                      <a:r>
+                        <a:rPr sz="1725" b="0">
+                          <a:solidFill>
+                            <a:srgbClr val="28354A"/>
+                          </a:solidFill>
+                          <a:latin typeface="Arial"/>
+                          <a:ea typeface="Arial"/>
+                          <a:cs typeface="Arial"/>
+                        </a:rPr>
+                        <a:t>Care operations</a:t>
+                      </a:r>
+                    </a:p>
+                  </a:txBody>
+                  <a:tcPr marL="133350" marR="133350" marT="76200" marB="76200" anchor="ctr">
+                    <a:solidFill>
+                      <a:srgbClr val="F6F4ED"/>
+                    </a:solidFill>
+                  </a:tcPr>
+                </a:tc>
+                <a:tc>
+                  <a:txBody>
+                    <a:bodyPr/>
+                    <a:lstStyle/>
+                    <a:p>
+                      <a:r>
+                        <a:rPr sz="1725" b="0">
+                          <a:solidFill>
+                            <a:srgbClr val="28354A"/>
+                          </a:solidFill>
+                          <a:latin typeface="Arial"/>
+                          <a:ea typeface="Arial"/>
+                          <a:cs typeface="Arial"/>
+                        </a:rPr>
+                        <a:t>After offline criteria pass, evaluate alongside usual care. Verify follow-through, workload and pause rules.</a:t>
+                      </a:r>
+                    </a:p>
+                  </a:txBody>
+                  <a:tcPr marL="133350" marR="133350" marT="76200" marB="76200" anchor="ctr">
+                    <a:solidFill>
+                      <a:srgbClr val="F6F4ED"/>
+                    </a:solidFill>
+                  </a:tcPr>
+                </a:tc>
+              </a:tr>
+            </a:tbl>
+          </a:graphicData>
+        </a:graphic>
+      </p:graphicFrame>
+      <p:sp>
+        <p:nvSpPr>
+          <p:cNvPr id="3" name="">
+            <a:extLst xmlns:a="http://schemas.openxmlformats.org/drawingml/2006/main">
+              <a:ext uri="{FF2B5EF4-FFF2-40B4-BE49-F238E27FC236}">
+                <a16:creationId xmlns:a16="http://schemas.microsoft.com/office/drawing/2014/main" id="{F32B60F4-5AC2-462B-8D8C-16C5820E6443}"/>
+              </a:ext>
+            </a:extLst>
+          </p:cNvPr>
+          <p:cNvSpPr>
+            <a:spLocks xmlns:a="http://schemas.openxmlformats.org/drawingml/2006/main" noGrp="1"/>
+          </p:cNvSpPr>
+          <p:nvPr/>
+        </p:nvSpPr>
+        <p:spPr>
+          <a:xfrm xmlns:a="http://schemas.openxmlformats.org/drawingml/2006/main">
+            <a:off x="762000" y="5886450"/>
+            <a:ext cx="10096500" cy="514350"/>
+          </a:xfrm>
+          <a:prstGeom xmlns:a="http://schemas.openxmlformats.org/drawingml/2006/main" prst="rect">
+            <a:avLst/>
+          </a:prstGeom>
+          <a:noFill xmlns:a="http://schemas.openxmlformats.org/drawingml/2006/main"/>
+          <a:ln xmlns:a="http://schemas.openxmlformats.org/drawingml/2006/main" w="0">
+            <a:noFill/>
+          </a:ln>
+        </p:spPr>
+        <p:txBody>
+          <a:bodyPr xmlns:a="http://schemas.openxmlformats.org/drawingml/2006/main" wrap="square" lIns="0" tIns="0" rIns="0" bIns="0" anchor="t">
+            <a:noAutofit/>
+          </a:bodyPr>
+          <a:lstStyle xmlns:a="http://schemas.openxmlformats.org/drawingml/2006/main"/>
+          <a:p xmlns:a="http://schemas.openxmlformats.org/drawingml/2006/main">
+            <a:pPr>
+              <a:defRPr sz="1350">
+                <a:solidFill>
+                  <a:srgbClr val="667084"/>
+                </a:solidFill>
+                <a:latin typeface="Arial"/>
+                <a:ea typeface="Arial"/>
+                <a:cs typeface="Arial"/>
+              </a:defRPr>
+            </a:pPr>
+            <a:r>
+              <a:rPr sz="1350">
+                <a:solidFill>
+                  <a:srgbClr val="667084"/>
+                </a:solidFill>
+                <a:latin typeface="Arial"/>
+                <a:ea typeface="Arial"/>
+                <a:cs typeface="Arial"/>
+              </a:rPr>
+              <a:t>Physician approval, independent clinical labels and prospective testing have not occurred. No autonomous clinical use.</a:t>
+            </a:r>
+          </a:p>
+        </p:txBody>
+      </p:sp>
+      <p:sp>
+        <p:nvSpPr>
+          <p:cNvPr id="4" name="">
+            <a:extLst xmlns:a="http://schemas.openxmlformats.org/drawingml/2006/main">
+              <a:ext uri="{FF2B5EF4-FFF2-40B4-BE49-F238E27FC236}">
+                <a16:creationId xmlns:a16="http://schemas.microsoft.com/office/drawing/2014/main" id="{30AABD4A-3F38-4583-9095-76231BF412D3}"/>
+              </a:ext>
+            </a:extLst>
+          </p:cNvPr>
+          <p:cNvSpPr>
+            <a:spLocks xmlns:a="http://schemas.openxmlformats.org/drawingml/2006/main" noGrp="1"/>
+          </p:cNvSpPr>
+          <p:nvPr/>
+        </p:nvSpPr>
+        <p:spPr>
+          <a:xfrm xmlns:a="http://schemas.openxmlformats.org/drawingml/2006/main">
+            <a:off x="11296650" y="6400800"/>
+            <a:ext cx="361950" cy="228600"/>
+          </a:xfrm>
+          <a:prstGeom xmlns:a="http://schemas.openxmlformats.org/drawingml/2006/main" prst="rect">
+            <a:avLst/>
+          </a:prstGeom>
+          <a:noFill xmlns:a="http://schemas.openxmlformats.org/drawingml/2006/main"/>
+          <a:ln xmlns:a="http://schemas.openxmlformats.org/drawingml/2006/main" w="0">
+            <a:noFill/>
+          </a:ln>
+        </p:spPr>
+        <p:txBody>
+          <a:bodyPr xmlns:a="http://schemas.openxmlformats.org/drawingml/2006/main" wrap="square" lIns="0" tIns="0" rIns="0" bIns="0" anchor="t">
+            <a:noAutofit/>
+          </a:bodyPr>
+          <a:lstStyle xmlns:a="http://schemas.openxmlformats.org/drawingml/2006/main"/>
+          <a:p xmlns:a="http://schemas.openxmlformats.org/drawingml/2006/main">
+            <a:pPr algn="r">
+              <a:defRPr sz="1275">
+                <a:solidFill>
+                  <a:srgbClr val="667084"/>
+                </a:solidFill>
+                <a:latin typeface="Arial"/>
+                <a:ea typeface="Arial"/>
+                <a:cs typeface="Arial"/>
+              </a:defRPr>
+            </a:pPr>
+            <a:r>
+              <a:rPr sz="1275">
+                <a:solidFill>
+                  <a:srgbClr val="667084"/>
+                </a:solidFill>
+                <a:latin typeface="Arial"/>
+                <a:ea typeface="Arial"/>
+                <a:cs typeface="Arial"/>
+              </a:rPr>
+              <a:t>30</a:t>
+            </a:r>
+          </a:p>
+        </p:txBody>
+      </p:sp>
+    </p:spTree>
+    <p:extLst>
+      <p:ext uri="{BB962C8B-B14F-4D97-AF65-F5344CB8AC3E}">
+        <p14:creationId xmlns:p14="http://schemas.microsoft.com/office/powerpoint/2010/main" val="1452197195"/>
+      </p:ext>
+    </p:extLst>
+  </p:cSld>
+</p:sld>
+</file>
+
+<file path=ppt/slides/slide31.xml><?xml version="1.0" encoding="utf-8"?>
+<p:sld xmlns:p="http://schemas.openxmlformats.org/presentationml/2006/main">
+  <p:cSld>
+    <p:bg>
+      <p:bgPr>
+        <a:solidFill xmlns:a="http://schemas.openxmlformats.org/drawingml/2006/main">
+          <a:srgbClr val="F6F4ED"/>
+        </a:solidFill>
+      </p:bgPr>
+    </p:bg>
+    <p:spTree>
+      <p:nvGrpSpPr>
+        <p:cNvPr id="1" name=""/>
+        <p:cNvGrpSpPr/>
+        <p:nvPr/>
+      </p:nvGrpSpPr>
+      <p:grpSpPr>
+        <a:xfrm xmlns:a="http://schemas.openxmlformats.org/drawingml/2006/main"/>
+      </p:grpSpPr>
+      <p:sp>
+        <p:nvSpPr>
+          <p:cNvPr id="5" name="">
+            <a:extLst xmlns:a="http://schemas.openxmlformats.org/drawingml/2006/main">
+              <a:ext uri="{FF2B5EF4-FFF2-40B4-BE49-F238E27FC236}">
+                <a16:creationId xmlns:a16="http://schemas.microsoft.com/office/drawing/2014/main" id="{82CB2349-799A-4C55-AEE6-A07FA7A5A36C}"/>
+              </a:ext>
+            </a:extLst>
+          </p:cNvPr>
+          <p:cNvSpPr>
+            <a:spLocks xmlns:a="http://schemas.openxmlformats.org/drawingml/2006/main" noGrp="1"/>
+          </p:cNvSpPr>
+          <p:nvPr/>
+        </p:nvSpPr>
+        <p:spPr>
+          <a:xfrm xmlns:a="http://schemas.openxmlformats.org/drawingml/2006/main">
+            <a:off x="762000" y="485775"/>
+            <a:ext cx="10668000" cy="586550"/>
+          </a:xfrm>
+          <a:prstGeom xmlns:a="http://schemas.openxmlformats.org/drawingml/2006/main" prst="rect">
+            <a:avLst/>
+          </a:prstGeom>
+          <a:noFill xmlns:a="http://schemas.openxmlformats.org/drawingml/2006/main"/>
+          <a:ln xmlns:a="http://schemas.openxmlformats.org/drawingml/2006/main" w="0">
+            <a:noFill/>
+          </a:ln>
+        </p:spPr>
+        <p:txBody>
+          <a:bodyPr xmlns:a="http://schemas.openxmlformats.org/drawingml/2006/main" wrap="square" lIns="0" tIns="0" rIns="0" bIns="0" anchor="t">
+            <a:noAutofit/>
+          </a:bodyPr>
+          <a:lstStyle xmlns:a="http://schemas.openxmlformats.org/drawingml/2006/main"/>
+          <a:p xmlns:a="http://schemas.openxmlformats.org/drawingml/2006/main">
+            <a:pPr>
+              <a:defRPr sz="3525" b="1">
+                <a:solidFill>
+                  <a:srgbClr val="243866"/>
+                </a:solidFill>
+                <a:latin typeface="Arial"/>
+                <a:ea typeface="Arial"/>
+                <a:cs typeface="Arial"/>
+              </a:defRPr>
+            </a:pPr>
+            <a:r>
+              <a:rPr sz="3525" b="1">
+                <a:solidFill>
+                  <a:srgbClr val="243866"/>
+                </a:solidFill>
+                <a:latin typeface="Arial"/>
+                <a:ea typeface="Arial"/>
+                <a:cs typeface="Arial"/>
+              </a:rPr>
+              <a:t>Case text: new urgent-routing misses</a:t>
+            </a:r>
+          </a:p>
+        </p:txBody>
+      </p:sp>
+      <p:graphicFrame>
+        <p:nvGraphicFramePr>
+          <p:cNvPr id="6" name=""/>
+          <p:cNvGraphicFramePr/>
+          <p:nvPr/>
+        </p:nvGraphicFramePr>
+        <p:xfrm>
+          <a:off xmlns:a="http://schemas.openxmlformats.org/drawingml/2006/main" x="762000" y="1619250"/>
+          <a:ext xmlns:a="http://schemas.openxmlformats.org/drawingml/2006/main" cx="10668000" cy="3011424"/>
+        </p:xfrm>
+        <a:graphic xmlns:a="http://schemas.openxmlformats.org/drawingml/2006/main">
+          <a:graphicData uri="http://schemas.openxmlformats.org/drawingml/2006/table">
+            <a:tbl>
+              <a:tblPr firstRow="1" bandRow="0"/>
+              <a:tblGrid>
+                <a:gridCol w="1066800"/>
+                <a:gridCol w="9601200"/>
+              </a:tblGrid>
+              <a:tr h="471678">
+                <a:tc>
+                  <a:txBody>
+                    <a:bodyPr/>
+                    <a:lstStyle/>
+                    <a:p>
+                      <a:r>
+                        <a:rPr sz="1800" b="1">
+                          <a:solidFill>
+                            <a:srgbClr val="FFFFFF"/>
+                          </a:solidFill>
+                          <a:latin typeface="Arial"/>
+                          <a:ea typeface="Arial"/>
+                          <a:cs typeface="Arial"/>
+                        </a:rPr>
+                        <a:t>Case</a:t>
+                      </a:r>
+                    </a:p>
+                  </a:txBody>
+                  <a:tcPr marL="133350" marR="133350" marT="76200" marB="76200" anchor="ctr">
+                    <a:solidFill>
+                      <a:srgbClr val="243866"/>
+                    </a:solidFill>
+                  </a:tcPr>
+                </a:tc>
+                <a:tc>
+                  <a:txBody>
+                    <a:bodyPr/>
+                    <a:lstStyle/>
+                    <a:p>
+                      <a:r>
+                        <a:rPr sz="1800" b="1">
+                          <a:solidFill>
+                            <a:srgbClr val="FFFFFF"/>
+                          </a:solidFill>
+                          <a:latin typeface="Arial"/>
+                          <a:ea typeface="Arial"/>
+                          <a:cs typeface="Arial"/>
+                        </a:rPr>
+                        <a:t>Exact patient message</a:t>
+                      </a:r>
+                    </a:p>
+                  </a:txBody>
+                  <a:tcPr marL="133350" marR="133350" marT="76200" marB="76200" anchor="ctr">
+                    <a:solidFill>
+                      <a:srgbClr val="243866"/>
+                    </a:solidFill>
+                  </a:tcPr>
+                </a:tc>
+              </a:tr>
+              <a:tr h="752856">
+                <a:tc>
+                  <a:txBody>
+                    <a:bodyPr/>
+                    <a:lstStyle/>
+                    <a:p>
+                      <a:r>
+                        <a:rPr sz="1800" b="0">
+                          <a:solidFill>
+                            <a:srgbClr val="28354A"/>
+                          </a:solidFill>
+                          <a:latin typeface="Arial"/>
+                          <a:ea typeface="Arial"/>
+                          <a:cs typeface="Arial"/>
+                        </a:rPr>
+                        <a:t>C04</a:t>
+                      </a:r>
+                    </a:p>
+                  </a:txBody>
+                  <a:tcPr marL="133350" marR="133350" marT="76200" marB="76200" anchor="ctr">
+                    <a:solidFill>
+                      <a:srgbClr val="F6F4ED"/>
+                    </a:solidFill>
+                  </a:tcPr>
+                </a:tc>
+                <a:tc>
+                  <a:txBody>
+                    <a:bodyPr/>
+                    <a:lstStyle/>
+                    <a:p>
+                      <a:r>
+                        <a:rPr sz="1800" b="0">
+                          <a:solidFill>
+                            <a:srgbClr val="28354A"/>
+                          </a:solidFill>
+                          <a:latin typeface="Arial"/>
+                          <a:ea typeface="Arial"/>
+                          <a:cs typeface="Arial"/>
+                        </a:rPr>
+                        <a:t>62F, I'm diabetic. I got a small cut on the bottom of my foot about 4 days ago and now the skin around it is red and a little swollen. No fever. It's tender when I press on it.</a:t>
+                      </a:r>
+                    </a:p>
+                  </a:txBody>
+                  <a:tcPr marL="133350" marR="133350" marT="76200" marB="76200" anchor="ctr">
+                    <a:solidFill>
+                      <a:srgbClr val="F6F4ED"/>
+                    </a:solidFill>
+                  </a:tcPr>
+                </a:tc>
+              </a:tr>
+              <a:tr h="752856">
+                <a:tc>
+                  <a:txBody>
+                    <a:bodyPr/>
+                    <a:lstStyle/>
+                    <a:p>
+                      <a:r>
+                        <a:rPr sz="1800" b="0">
+                          <a:solidFill>
+                            <a:srgbClr val="28354A"/>
+                          </a:solidFill>
+                          <a:latin typeface="Arial"/>
+                          <a:ea typeface="Arial"/>
+                          <a:cs typeface="Arial"/>
+                        </a:rPr>
+                        <a:t>C43</a:t>
+                      </a:r>
+                    </a:p>
+                  </a:txBody>
+                  <a:tcPr marL="133350" marR="133350" marT="76200" marB="76200" anchor="ctr">
+                    <a:solidFill>
+                      <a:srgbClr val="F6F4ED"/>
+                    </a:solidFill>
+                  </a:tcPr>
+                </a:tc>
+                <a:tc>
+                  <a:txBody>
+                    <a:bodyPr/>
+                    <a:lstStyle/>
+                    <a:p>
+                      <a:r>
+                        <a:rPr sz="1800" b="0">
+                          <a:solidFill>
+                            <a:srgbClr val="28354A"/>
+                          </a:solidFill>
+                          <a:latin typeface="Arial"/>
+                          <a:ea typeface="Arial"/>
+                          <a:cs typeface="Arial"/>
+                        </a:rPr>
+                        <a:t>34M. I've had a cough for about three weeks now with night sweats and I've lost maybe 10 pounds without trying. I moved here from a country where TB is common.</a:t>
+                      </a:r>
+                    </a:p>
+                  </a:txBody>
+                  <a:tcPr marL="133350" marR="133350" marT="76200" marB="76200" anchor="ctr">
+                    <a:solidFill>
+                      <a:srgbClr val="F6F4ED"/>
+                    </a:solidFill>
+                  </a:tcPr>
+                </a:tc>
+              </a:tr>
+              <a:tr h="1034034">
+                <a:tc>
+                  <a:txBody>
+                    <a:bodyPr/>
+                    <a:lstStyle/>
+                    <a:p>
+                      <a:r>
+                        <a:rPr sz="1800" b="0">
+                          <a:solidFill>
+                            <a:srgbClr val="28354A"/>
+                          </a:solidFill>
+                          <a:latin typeface="Arial"/>
+                          <a:ea typeface="Arial"/>
+                          <a:cs typeface="Arial"/>
+                        </a:rPr>
+                        <a:t>C49</a:t>
+                      </a:r>
+                    </a:p>
+                  </a:txBody>
+                  <a:tcPr marL="133350" marR="133350" marT="76200" marB="76200" anchor="ctr">
+                    <a:solidFill>
+                      <a:srgbClr val="F6F4ED"/>
+                    </a:solidFill>
+                  </a:tcPr>
+                </a:tc>
+                <a:tc>
+                  <a:txBody>
+                    <a:bodyPr/>
+                    <a:lstStyle/>
+                    <a:p>
+                      <a:r>
+                        <a:rPr sz="1800" b="0">
+                          <a:solidFill>
+                            <a:srgbClr val="28354A"/>
+                          </a:solidFill>
+                          <a:latin typeface="Arial"/>
+                          <a:ea typeface="Arial"/>
+                          <a:cs typeface="Arial"/>
+                        </a:rPr>
+                        <a:t>28M. Sharp pain on the left side of my chest since yesterday, worse when I take a deep breath. I did a heavy chest workout two days ago. No shortness of breath, no leg swelling, I don't smoke.</a:t>
+                      </a:r>
+                    </a:p>
+                  </a:txBody>
+                  <a:tcPr marL="133350" marR="133350" marT="76200" marB="76200" anchor="ctr">
+                    <a:solidFill>
+                      <a:srgbClr val="F6F4ED"/>
+                    </a:solidFill>
+                  </a:tcPr>
+                </a:tc>
+              </a:tr>
+            </a:tbl>
+          </a:graphicData>
+        </a:graphic>
+      </p:graphicFrame>
+      <p:sp>
+        <p:nvSpPr>
+          <p:cNvPr id="3" name="">
+            <a:extLst xmlns:a="http://schemas.openxmlformats.org/drawingml/2006/main">
+              <a:ext uri="{FF2B5EF4-FFF2-40B4-BE49-F238E27FC236}">
+                <a16:creationId xmlns:a16="http://schemas.microsoft.com/office/drawing/2014/main" id="{B2620C7B-BC83-4F3D-A2BE-4E58878130B5}"/>
+              </a:ext>
+            </a:extLst>
+          </p:cNvPr>
+          <p:cNvSpPr>
+            <a:spLocks xmlns:a="http://schemas.openxmlformats.org/drawingml/2006/main" noGrp="1"/>
+          </p:cNvSpPr>
+          <p:nvPr/>
+        </p:nvSpPr>
+        <p:spPr>
+          <a:xfrm xmlns:a="http://schemas.openxmlformats.org/drawingml/2006/main">
+            <a:off x="762000" y="5886450"/>
+            <a:ext cx="10096500" cy="514350"/>
+          </a:xfrm>
+          <a:prstGeom xmlns:a="http://schemas.openxmlformats.org/drawingml/2006/main" prst="rect">
+            <a:avLst/>
+          </a:prstGeom>
+          <a:noFill xmlns:a="http://schemas.openxmlformats.org/drawingml/2006/main"/>
+          <a:ln xmlns:a="http://schemas.openxmlformats.org/drawingml/2006/main" w="0">
+            <a:noFill/>
+          </a:ln>
+        </p:spPr>
+        <p:txBody>
+          <a:bodyPr xmlns:a="http://schemas.openxmlformats.org/drawingml/2006/main" wrap="square" lIns="0" tIns="0" rIns="0" bIns="0" anchor="t">
+            <a:noAutofit/>
+          </a:bodyPr>
+          <a:lstStyle xmlns:a="http://schemas.openxmlformats.org/drawingml/2006/main"/>
+          <a:p xmlns:a="http://schemas.openxmlformats.org/drawingml/2006/main">
+            <a:pPr>
+              <a:defRPr sz="1350">
+                <a:solidFill>
+                  <a:srgbClr val="667084"/>
+                </a:solidFill>
+                <a:latin typeface="Arial"/>
+                <a:ea typeface="Arial"/>
+                <a:cs typeface="Arial"/>
+              </a:defRPr>
+            </a:pPr>
+            <a:r>
+              <a:rPr sz="1350">
+                <a:solidFill>
+                  <a:srgbClr val="667084"/>
+                </a:solidFill>
+                <a:latin typeface="Arial"/>
+                <a:ea typeface="Arial"/>
+                <a:cs typeface="Arial"/>
+              </a:rPr>
+              <a:t>The new prompt assigns ASYNC_PHYSICIAN to all three. Frozen baseline and unchanged physician reference assign URGENT_ESCALATION.</a:t>
+            </a:r>
+          </a:p>
+        </p:txBody>
+      </p:sp>
+      <p:sp>
+        <p:nvSpPr>
+          <p:cNvPr id="4" name="">
+            <a:extLst xmlns:a="http://schemas.openxmlformats.org/drawingml/2006/main">
+              <a:ext uri="{FF2B5EF4-FFF2-40B4-BE49-F238E27FC236}">
+                <a16:creationId xmlns:a16="http://schemas.microsoft.com/office/drawing/2014/main" id="{C6F97261-6BAF-4486-A0B8-B5B28CDC45AB}"/>
+              </a:ext>
+            </a:extLst>
+          </p:cNvPr>
+          <p:cNvSpPr>
+            <a:spLocks xmlns:a="http://schemas.openxmlformats.org/drawingml/2006/main" noGrp="1"/>
+          </p:cNvSpPr>
+          <p:nvPr/>
+        </p:nvSpPr>
+        <p:spPr>
+          <a:xfrm xmlns:a="http://schemas.openxmlformats.org/drawingml/2006/main">
+            <a:off x="11296650" y="6400800"/>
+            <a:ext cx="361950" cy="228600"/>
+          </a:xfrm>
+          <a:prstGeom xmlns:a="http://schemas.openxmlformats.org/drawingml/2006/main" prst="rect">
+            <a:avLst/>
+          </a:prstGeom>
+          <a:noFill xmlns:a="http://schemas.openxmlformats.org/drawingml/2006/main"/>
+          <a:ln xmlns:a="http://schemas.openxmlformats.org/drawingml/2006/main" w="0">
+            <a:noFill/>
+          </a:ln>
+        </p:spPr>
+        <p:txBody>
+          <a:bodyPr xmlns:a="http://schemas.openxmlformats.org/drawingml/2006/main" wrap="square" lIns="0" tIns="0" rIns="0" bIns="0" anchor="t">
+            <a:noAutofit/>
+          </a:bodyPr>
+          <a:lstStyle xmlns:a="http://schemas.openxmlformats.org/drawingml/2006/main"/>
+          <a:p xmlns:a="http://schemas.openxmlformats.org/drawingml/2006/main">
+            <a:pPr algn="r">
+              <a:defRPr sz="1275">
+                <a:solidFill>
+                  <a:srgbClr val="667084"/>
+                </a:solidFill>
+                <a:latin typeface="Arial"/>
+                <a:ea typeface="Arial"/>
+                <a:cs typeface="Arial"/>
+              </a:defRPr>
+            </a:pPr>
+            <a:r>
+              <a:rPr sz="1275">
+                <a:solidFill>
+                  <a:srgbClr val="667084"/>
+                </a:solidFill>
+                <a:latin typeface="Arial"/>
+                <a:ea typeface="Arial"/>
+                <a:cs typeface="Arial"/>
+              </a:rPr>
+              <a:t>31</a:t>
+            </a:r>
+          </a:p>
+        </p:txBody>
+      </p:sp>
+    </p:spTree>
+    <p:extLst>
+      <p:ext uri="{BB962C8B-B14F-4D97-AF65-F5344CB8AC3E}">
+        <p14:creationId xmlns:p14="http://schemas.microsoft.com/office/powerpoint/2010/main" val="1391466645"/>
       </p:ext>
     </p:extLst>
   </p:cSld>
@@ -15811,7 +18087,7 @@
           <p:cNvPr id="7" name="">
             <a:extLst xmlns:a="http://schemas.openxmlformats.org/drawingml/2006/main">
               <a:ext uri="{FF2B5EF4-FFF2-40B4-BE49-F238E27FC236}">
-                <a16:creationId xmlns:a16="http://schemas.microsoft.com/office/drawing/2014/main" id="{8A93A1EE-90A5-4104-81F0-2F5DB45FD583}"/>
+                <a16:creationId xmlns:a16="http://schemas.microsoft.com/office/drawing/2014/main" id="{55A09439-ADB4-4D0D-9722-A107596696B4}"/>
               </a:ext>
             </a:extLst>
           </p:cNvPr>
@@ -15872,7 +18148,7 @@
           <p:nvPr/>
         </p:nvPicPr>
         <p:blipFill>
-          <a:blip xmlns:r="http://schemas.openxmlformats.org/officeDocument/2006/relationships" xmlns:a="http://schemas.openxmlformats.org/drawingml/2006/main" r:embed="R7a9705c66d3641e5"/>
+          <a:blip xmlns:r="http://schemas.openxmlformats.org/officeDocument/2006/relationships" xmlns:a="http://schemas.openxmlformats.org/drawingml/2006/main" r:embed="Rb6957c25684e4695"/>
           <a:stretch xmlns:a="http://schemas.openxmlformats.org/drawingml/2006/main"/>
         </p:blipFill>
         <p:spPr>
@@ -15890,7 +18166,7 @@
           <p:cNvPr id="3" name="">
             <a:extLst xmlns:a="http://schemas.openxmlformats.org/drawingml/2006/main">
               <a:ext uri="{FF2B5EF4-FFF2-40B4-BE49-F238E27FC236}">
-                <a16:creationId xmlns:a16="http://schemas.microsoft.com/office/drawing/2014/main" id="{BC2B5A7E-FF39-4A20-A139-31E2BC5571A1}"/>
+                <a16:creationId xmlns:a16="http://schemas.microsoft.com/office/drawing/2014/main" id="{A2F48E6A-22DE-4097-9451-1980029FD95D}"/>
               </a:ext>
             </a:extLst>
           </p:cNvPr>
@@ -15947,7 +18223,7 @@
           <p:cNvPr id="4" name="">
             <a:extLst xmlns:a="http://schemas.openxmlformats.org/drawingml/2006/main">
               <a:ext uri="{FF2B5EF4-FFF2-40B4-BE49-F238E27FC236}">
-                <a16:creationId xmlns:a16="http://schemas.microsoft.com/office/drawing/2014/main" id="{D4BC6971-7EC5-423C-82E1-E17803269D60}"/>
+                <a16:creationId xmlns:a16="http://schemas.microsoft.com/office/drawing/2014/main" id="{72BB7D1A-7876-4B7B-AE8D-E7E06C5A686C}"/>
               </a:ext>
             </a:extLst>
           </p:cNvPr>
@@ -16004,7 +18280,7 @@
           <p:cNvPr id="5" name="">
             <a:extLst xmlns:a="http://schemas.openxmlformats.org/drawingml/2006/main">
               <a:ext uri="{FF2B5EF4-FFF2-40B4-BE49-F238E27FC236}">
-                <a16:creationId xmlns:a16="http://schemas.microsoft.com/office/drawing/2014/main" id="{745C448C-3445-46C2-BC3F-1875FE4620E8}"/>
+                <a16:creationId xmlns:a16="http://schemas.microsoft.com/office/drawing/2014/main" id="{C5DF6373-AC07-422E-B561-BB724AE4F1E1}"/>
               </a:ext>
             </a:extLst>
           </p:cNvPr>
@@ -16061,7 +18337,7 @@
           <p:cNvPr id="6" name="">
             <a:extLst xmlns:a="http://schemas.openxmlformats.org/drawingml/2006/main">
               <a:ext uri="{FF2B5EF4-FFF2-40B4-BE49-F238E27FC236}">
-                <a16:creationId xmlns:a16="http://schemas.microsoft.com/office/drawing/2014/main" id="{B2BC0C4B-40D7-4FED-A682-9D6784AC6857}"/>
+                <a16:creationId xmlns:a16="http://schemas.microsoft.com/office/drawing/2014/main" id="{39E97F15-CD12-48A2-BD30-60059C147368}"/>
               </a:ext>
             </a:extLst>
           </p:cNvPr>
@@ -16116,7 +18392,7 @@
     </p:spTree>
     <p:extLst>
       <p:ext uri="{BB962C8B-B14F-4D97-AF65-F5344CB8AC3E}">
-        <p14:creationId xmlns:p14="http://schemas.microsoft.com/office/powerpoint/2010/main" val="1865803515"/>
+        <p14:creationId xmlns:p14="http://schemas.microsoft.com/office/powerpoint/2010/main" val="1014604273"/>
       </p:ext>
     </p:extLst>
   </p:cSld>
@@ -16147,7 +18423,7 @@
           <p:cNvPr id="5" name="">
             <a:extLst xmlns:a="http://schemas.openxmlformats.org/drawingml/2006/main">
               <a:ext uri="{FF2B5EF4-FFF2-40B4-BE49-F238E27FC236}">
-                <a16:creationId xmlns:a16="http://schemas.microsoft.com/office/drawing/2014/main" id="{B3E235E6-D1D7-4CE8-8A49-316DD0CF7073}"/>
+                <a16:creationId xmlns:a16="http://schemas.microsoft.com/office/drawing/2014/main" id="{06DD2180-651B-4353-88E3-20265A4837D2}"/>
               </a:ext>
             </a:extLst>
           </p:cNvPr>
@@ -16476,7 +18752,7 @@
           <p:cNvPr id="3" name="">
             <a:extLst xmlns:a="http://schemas.openxmlformats.org/drawingml/2006/main">
               <a:ext uri="{FF2B5EF4-FFF2-40B4-BE49-F238E27FC236}">
-                <a16:creationId xmlns:a16="http://schemas.microsoft.com/office/drawing/2014/main" id="{91DDB88E-7200-45CA-85AF-085FAFAEFCAC}"/>
+                <a16:creationId xmlns:a16="http://schemas.microsoft.com/office/drawing/2014/main" id="{496F08C5-8791-4D1C-A2EF-C36353984622}"/>
               </a:ext>
             </a:extLst>
           </p:cNvPr>
@@ -16533,7 +18809,7 @@
           <p:cNvPr id="4" name="">
             <a:extLst xmlns:a="http://schemas.openxmlformats.org/drawingml/2006/main">
               <a:ext uri="{FF2B5EF4-FFF2-40B4-BE49-F238E27FC236}">
-                <a16:creationId xmlns:a16="http://schemas.microsoft.com/office/drawing/2014/main" id="{9918C403-7107-4FB4-81E8-6C36F53285BD}"/>
+                <a16:creationId xmlns:a16="http://schemas.microsoft.com/office/drawing/2014/main" id="{F1B638A8-FE3C-4EB0-920F-0D1459B6EA4C}"/>
               </a:ext>
             </a:extLst>
           </p:cNvPr>
@@ -16588,7 +18864,7 @@
     </p:spTree>
     <p:extLst>
       <p:ext uri="{BB962C8B-B14F-4D97-AF65-F5344CB8AC3E}">
-        <p14:creationId xmlns:p14="http://schemas.microsoft.com/office/powerpoint/2010/main" val="902431955"/>
+        <p14:creationId xmlns:p14="http://schemas.microsoft.com/office/powerpoint/2010/main" val="2056065562"/>
       </p:ext>
     </p:extLst>
   </p:cSld>
@@ -16619,7 +18895,7 @@
           <p:cNvPr id="7" name="">
             <a:extLst xmlns:a="http://schemas.openxmlformats.org/drawingml/2006/main">
               <a:ext uri="{FF2B5EF4-FFF2-40B4-BE49-F238E27FC236}">
-                <a16:creationId xmlns:a16="http://schemas.microsoft.com/office/drawing/2014/main" id="{5DDB404B-3C0A-4BAE-A5F9-C14165BEF45A}"/>
+                <a16:creationId xmlns:a16="http://schemas.microsoft.com/office/drawing/2014/main" id="{A6AD5BF8-1899-494B-8F05-35F05831220A}"/>
               </a:ext>
             </a:extLst>
           </p:cNvPr>
@@ -16898,7 +19174,7 @@
           <p:cNvPr id="3" name="">
             <a:extLst xmlns:a="http://schemas.openxmlformats.org/drawingml/2006/main">
               <a:ext uri="{FF2B5EF4-FFF2-40B4-BE49-F238E27FC236}">
-                <a16:creationId xmlns:a16="http://schemas.microsoft.com/office/drawing/2014/main" id="{86533E6D-FDE0-42FA-A169-23BE65EF2F85}"/>
+                <a16:creationId xmlns:a16="http://schemas.microsoft.com/office/drawing/2014/main" id="{722C9D5B-7592-4D3B-BEFF-197305BFCBA2}"/>
               </a:ext>
             </a:extLst>
           </p:cNvPr>
@@ -16955,7 +19231,7 @@
           <p:cNvPr id="4" name="">
             <a:extLst xmlns:a="http://schemas.openxmlformats.org/drawingml/2006/main">
               <a:ext uri="{FF2B5EF4-FFF2-40B4-BE49-F238E27FC236}">
-                <a16:creationId xmlns:a16="http://schemas.microsoft.com/office/drawing/2014/main" id="{E7B33E69-10A7-4A75-B1F7-92EC1E4C3596}"/>
+                <a16:creationId xmlns:a16="http://schemas.microsoft.com/office/drawing/2014/main" id="{62EC42B3-E43A-4397-B38B-EE2CFB0CB938}"/>
               </a:ext>
             </a:extLst>
           </p:cNvPr>
@@ -17012,7 +19288,7 @@
           <p:cNvPr id="5" name="">
             <a:extLst xmlns:a="http://schemas.openxmlformats.org/drawingml/2006/main">
               <a:ext uri="{FF2B5EF4-FFF2-40B4-BE49-F238E27FC236}">
-                <a16:creationId xmlns:a16="http://schemas.microsoft.com/office/drawing/2014/main" id="{8AE77AAE-84D9-4125-B37D-D207A0AAA9EC}"/>
+                <a16:creationId xmlns:a16="http://schemas.microsoft.com/office/drawing/2014/main" id="{1B5FE35A-1E3D-4D0B-AE16-41FF7ADD2450}"/>
               </a:ext>
             </a:extLst>
           </p:cNvPr>
@@ -17069,7 +19345,7 @@
           <p:cNvPr id="6" name="">
             <a:extLst xmlns:a="http://schemas.openxmlformats.org/drawingml/2006/main">
               <a:ext uri="{FF2B5EF4-FFF2-40B4-BE49-F238E27FC236}">
-                <a16:creationId xmlns:a16="http://schemas.microsoft.com/office/drawing/2014/main" id="{B78B0A2E-5DA6-446B-8E7F-26BF977E8D4E}"/>
+                <a16:creationId xmlns:a16="http://schemas.microsoft.com/office/drawing/2014/main" id="{2FAAC6EC-10D9-457D-B73F-DC57CA38BC7C}"/>
               </a:ext>
             </a:extLst>
           </p:cNvPr>
@@ -17124,7 +19400,7 @@
     </p:spTree>
     <p:extLst>
       <p:ext uri="{BB962C8B-B14F-4D97-AF65-F5344CB8AC3E}">
-        <p14:creationId xmlns:p14="http://schemas.microsoft.com/office/powerpoint/2010/main" val="1869934954"/>
+        <p14:creationId xmlns:p14="http://schemas.microsoft.com/office/powerpoint/2010/main" val="1228187678"/>
       </p:ext>
     </p:extLst>
   </p:cSld>
@@ -17155,7 +19431,7 @@
           <p:cNvPr id="9" name="">
             <a:extLst xmlns:a="http://schemas.openxmlformats.org/drawingml/2006/main">
               <a:ext uri="{FF2B5EF4-FFF2-40B4-BE49-F238E27FC236}">
-                <a16:creationId xmlns:a16="http://schemas.microsoft.com/office/drawing/2014/main" id="{6B51E344-0A71-4028-B5A4-297FFA717284}"/>
+                <a16:creationId xmlns:a16="http://schemas.microsoft.com/office/drawing/2014/main" id="{6038C41A-C883-492D-9D86-A81D92468DD5}"/>
               </a:ext>
             </a:extLst>
           </p:cNvPr>
@@ -17212,7 +19488,7 @@
           <p:cNvPr id="2" name="">
             <a:extLst xmlns:a="http://schemas.openxmlformats.org/drawingml/2006/main">
               <a:ext uri="{FF2B5EF4-FFF2-40B4-BE49-F238E27FC236}">
-                <a16:creationId xmlns:a16="http://schemas.microsoft.com/office/drawing/2014/main" id="{6121D79C-237D-4EEC-89E8-6D82219EA171}"/>
+                <a16:creationId xmlns:a16="http://schemas.microsoft.com/office/drawing/2014/main" id="{597193A7-0BE4-4B22-AE72-116563CF446A}"/>
               </a:ext>
             </a:extLst>
           </p:cNvPr>
@@ -17269,7 +19545,7 @@
           <p:cNvPr id="3" name="">
             <a:extLst xmlns:a="http://schemas.openxmlformats.org/drawingml/2006/main">
               <a:ext uri="{FF2B5EF4-FFF2-40B4-BE49-F238E27FC236}">
-                <a16:creationId xmlns:a16="http://schemas.microsoft.com/office/drawing/2014/main" id="{076E50C2-8DD2-49D6-AD6D-C46CF9ABDF51}"/>
+                <a16:creationId xmlns:a16="http://schemas.microsoft.com/office/drawing/2014/main" id="{D610E7BF-2848-48CA-BA4C-F3F3CEB427F9}"/>
               </a:ext>
             </a:extLst>
           </p:cNvPr>
@@ -17326,7 +19602,7 @@
           <p:cNvPr id="4" name="">
             <a:extLst xmlns:a="http://schemas.openxmlformats.org/drawingml/2006/main">
               <a:ext uri="{FF2B5EF4-FFF2-40B4-BE49-F238E27FC236}">
-                <a16:creationId xmlns:a16="http://schemas.microsoft.com/office/drawing/2014/main" id="{0A486E39-E5C4-498B-88F8-DE5C15138E72}"/>
+                <a16:creationId xmlns:a16="http://schemas.microsoft.com/office/drawing/2014/main" id="{6434A3BC-00DB-4517-889C-BD3C550D1DB5}"/>
               </a:ext>
             </a:extLst>
           </p:cNvPr>
@@ -17383,7 +19659,7 @@
           <p:cNvPr id="5" name="">
             <a:extLst xmlns:a="http://schemas.openxmlformats.org/drawingml/2006/main">
               <a:ext uri="{FF2B5EF4-FFF2-40B4-BE49-F238E27FC236}">
-                <a16:creationId xmlns:a16="http://schemas.microsoft.com/office/drawing/2014/main" id="{E66F0527-E889-432B-A898-874DDD0BA788}"/>
+                <a16:creationId xmlns:a16="http://schemas.microsoft.com/office/drawing/2014/main" id="{16D43A30-D7B3-4B81-B3BC-D2983E8BFDA1}"/>
               </a:ext>
             </a:extLst>
           </p:cNvPr>
@@ -17440,7 +19716,7 @@
           <p:cNvPr id="6" name="">
             <a:extLst xmlns:a="http://schemas.openxmlformats.org/drawingml/2006/main">
               <a:ext uri="{FF2B5EF4-FFF2-40B4-BE49-F238E27FC236}">
-                <a16:creationId xmlns:a16="http://schemas.microsoft.com/office/drawing/2014/main" id="{8F5DF719-7870-4DEA-98C6-EB8BF58CF6CE}"/>
+                <a16:creationId xmlns:a16="http://schemas.microsoft.com/office/drawing/2014/main" id="{58F9B781-883A-4DC9-AB24-1320272F2DC2}"/>
               </a:ext>
             </a:extLst>
           </p:cNvPr>
@@ -17497,7 +19773,7 @@
           <p:cNvPr id="7" name="">
             <a:extLst xmlns:a="http://schemas.openxmlformats.org/drawingml/2006/main">
               <a:ext uri="{FF2B5EF4-FFF2-40B4-BE49-F238E27FC236}">
-                <a16:creationId xmlns:a16="http://schemas.microsoft.com/office/drawing/2014/main" id="{561A7972-9B50-4854-B401-A584F8E1E2D2}"/>
+                <a16:creationId xmlns:a16="http://schemas.microsoft.com/office/drawing/2014/main" id="{9022BA3A-4DE6-4A8D-BB3F-FB8408F7F530}"/>
               </a:ext>
             </a:extLst>
           </p:cNvPr>
@@ -17554,7 +19830,7 @@
           <p:cNvPr id="8" name="">
             <a:extLst xmlns:a="http://schemas.openxmlformats.org/drawingml/2006/main">
               <a:ext uri="{FF2B5EF4-FFF2-40B4-BE49-F238E27FC236}">
-                <a16:creationId xmlns:a16="http://schemas.microsoft.com/office/drawing/2014/main" id="{40A85468-9C38-4860-8A0B-29A88F1537F1}"/>
+                <a16:creationId xmlns:a16="http://schemas.microsoft.com/office/drawing/2014/main" id="{87105B3F-2888-4742-89AB-2B449EB4EE37}"/>
               </a:ext>
             </a:extLst>
           </p:cNvPr>
@@ -17609,7 +19885,7 @@
     </p:spTree>
     <p:extLst>
       <p:ext uri="{BB962C8B-B14F-4D97-AF65-F5344CB8AC3E}">
-        <p14:creationId xmlns:p14="http://schemas.microsoft.com/office/powerpoint/2010/main" val="442545537"/>
+        <p14:creationId xmlns:p14="http://schemas.microsoft.com/office/powerpoint/2010/main" val="215353726"/>
       </p:ext>
     </p:extLst>
   </p:cSld>
@@ -17640,7 +19916,7 @@
           <p:cNvPr id="15" name="">
             <a:extLst xmlns:a="http://schemas.openxmlformats.org/drawingml/2006/main">
               <a:ext uri="{FF2B5EF4-FFF2-40B4-BE49-F238E27FC236}">
-                <a16:creationId xmlns:a16="http://schemas.microsoft.com/office/drawing/2014/main" id="{1794FA62-B5C5-47C3-95E7-F2F512886ADC}"/>
+                <a16:creationId xmlns:a16="http://schemas.microsoft.com/office/drawing/2014/main" id="{2C6C4EEA-CFEB-45C4-A74A-555675604643}"/>
               </a:ext>
             </a:extLst>
           </p:cNvPr>
@@ -17697,7 +19973,7 @@
           <p:cNvPr id="2" name="">
             <a:extLst xmlns:a="http://schemas.openxmlformats.org/drawingml/2006/main">
               <a:ext uri="{FF2B5EF4-FFF2-40B4-BE49-F238E27FC236}">
-                <a16:creationId xmlns:a16="http://schemas.microsoft.com/office/drawing/2014/main" id="{4A883E48-EB6E-4E11-AC1B-569E0AD2471B}"/>
+                <a16:creationId xmlns:a16="http://schemas.microsoft.com/office/drawing/2014/main" id="{D49F6FFB-A150-4CBC-874D-49907B2D2A78}"/>
               </a:ext>
             </a:extLst>
           </p:cNvPr>
@@ -17754,7 +20030,7 @@
           <p:cNvPr id="3" name="">
             <a:extLst xmlns:a="http://schemas.openxmlformats.org/drawingml/2006/main">
               <a:ext uri="{FF2B5EF4-FFF2-40B4-BE49-F238E27FC236}">
-                <a16:creationId xmlns:a16="http://schemas.microsoft.com/office/drawing/2014/main" id="{78256DD7-5D86-4310-BB12-598CFFDC1EAB}"/>
+                <a16:creationId xmlns:a16="http://schemas.microsoft.com/office/drawing/2014/main" id="{9E8F55FE-53CE-484E-971B-7A795627206E}"/>
               </a:ext>
             </a:extLst>
           </p:cNvPr>
@@ -17811,7 +20087,7 @@
           <p:cNvPr id="4" name="">
             <a:extLst xmlns:a="http://schemas.openxmlformats.org/drawingml/2006/main">
               <a:ext uri="{FF2B5EF4-FFF2-40B4-BE49-F238E27FC236}">
-                <a16:creationId xmlns:a16="http://schemas.microsoft.com/office/drawing/2014/main" id="{E24D56D1-81C3-4CB6-9982-226878F44C3C}"/>
+                <a16:creationId xmlns:a16="http://schemas.microsoft.com/office/drawing/2014/main" id="{A384828C-E6AA-4F14-BB4F-1F8514D107D0}"/>
               </a:ext>
             </a:extLst>
           </p:cNvPr>
@@ -17868,7 +20144,7 @@
           <p:cNvPr id="5" name="">
             <a:extLst xmlns:a="http://schemas.openxmlformats.org/drawingml/2006/main">
               <a:ext uri="{FF2B5EF4-FFF2-40B4-BE49-F238E27FC236}">
-                <a16:creationId xmlns:a16="http://schemas.microsoft.com/office/drawing/2014/main" id="{5AD84A1A-D134-4A43-9A96-B1B419437646}"/>
+                <a16:creationId xmlns:a16="http://schemas.microsoft.com/office/drawing/2014/main" id="{D02A4861-6C9A-42E6-8F74-F461AFA54C93}"/>
               </a:ext>
             </a:extLst>
           </p:cNvPr>
@@ -17925,7 +20201,7 @@
           <p:cNvPr id="6" name="">
             <a:extLst xmlns:a="http://schemas.openxmlformats.org/drawingml/2006/main">
               <a:ext uri="{FF2B5EF4-FFF2-40B4-BE49-F238E27FC236}">
-                <a16:creationId xmlns:a16="http://schemas.microsoft.com/office/drawing/2014/main" id="{8FAA3287-EC41-40DF-AFEC-3FC292490F9F}"/>
+                <a16:creationId xmlns:a16="http://schemas.microsoft.com/office/drawing/2014/main" id="{AF92DD21-C041-45D0-A545-126A9D450172}"/>
               </a:ext>
             </a:extLst>
           </p:cNvPr>
@@ -17982,7 +20258,7 @@
           <p:cNvPr id="7" name="">
             <a:extLst xmlns:a="http://schemas.openxmlformats.org/drawingml/2006/main">
               <a:ext uri="{FF2B5EF4-FFF2-40B4-BE49-F238E27FC236}">
-                <a16:creationId xmlns:a16="http://schemas.microsoft.com/office/drawing/2014/main" id="{7A0D7D42-807A-45FD-ADA1-14AF0C319823}"/>
+                <a16:creationId xmlns:a16="http://schemas.microsoft.com/office/drawing/2014/main" id="{908653EC-F317-40B1-83CD-28A89B461E13}"/>
               </a:ext>
             </a:extLst>
           </p:cNvPr>
@@ -18039,7 +20315,7 @@
           <p:cNvPr id="8" name="">
             <a:extLst xmlns:a="http://schemas.openxmlformats.org/drawingml/2006/main">
               <a:ext uri="{FF2B5EF4-FFF2-40B4-BE49-F238E27FC236}">
-                <a16:creationId xmlns:a16="http://schemas.microsoft.com/office/drawing/2014/main" id="{A717FA71-9C7E-4CF4-9253-315EA8D56469}"/>
+                <a16:creationId xmlns:a16="http://schemas.microsoft.com/office/drawing/2014/main" id="{0214948B-9882-4603-BB3C-A05EC3F619E9}"/>
               </a:ext>
             </a:extLst>
           </p:cNvPr>
@@ -18096,7 +20372,7 @@
           <p:cNvPr id="9" name="">
             <a:extLst xmlns:a="http://schemas.openxmlformats.org/drawingml/2006/main">
               <a:ext uri="{FF2B5EF4-FFF2-40B4-BE49-F238E27FC236}">
-                <a16:creationId xmlns:a16="http://schemas.microsoft.com/office/drawing/2014/main" id="{C508CBF5-41B8-41D9-B4BD-654B3BD04FF6}"/>
+                <a16:creationId xmlns:a16="http://schemas.microsoft.com/office/drawing/2014/main" id="{4406A7AA-E94E-4E7C-835F-BAE3B45C55AB}"/>
               </a:ext>
             </a:extLst>
           </p:cNvPr>
@@ -18153,7 +20429,7 @@
           <p:cNvPr id="10" name="">
             <a:extLst xmlns:a="http://schemas.openxmlformats.org/drawingml/2006/main">
               <a:ext uri="{FF2B5EF4-FFF2-40B4-BE49-F238E27FC236}">
-                <a16:creationId xmlns:a16="http://schemas.microsoft.com/office/drawing/2014/main" id="{A1CF2031-AB36-4B2B-9662-DB6964515E60}"/>
+                <a16:creationId xmlns:a16="http://schemas.microsoft.com/office/drawing/2014/main" id="{7F83E4E9-C6FB-444D-8012-1F6225E85219}"/>
               </a:ext>
             </a:extLst>
           </p:cNvPr>
@@ -18210,7 +20486,7 @@
           <p:cNvPr id="11" name="">
             <a:extLst xmlns:a="http://schemas.openxmlformats.org/drawingml/2006/main">
               <a:ext uri="{FF2B5EF4-FFF2-40B4-BE49-F238E27FC236}">
-                <a16:creationId xmlns:a16="http://schemas.microsoft.com/office/drawing/2014/main" id="{00CF203B-F6C8-457B-9517-B3D622000E92}"/>
+                <a16:creationId xmlns:a16="http://schemas.microsoft.com/office/drawing/2014/main" id="{F95FD072-B461-4476-AE52-BCF8D459B82A}"/>
               </a:ext>
             </a:extLst>
           </p:cNvPr>
@@ -18267,7 +20543,7 @@
           <p:cNvPr id="12" name="">
             <a:extLst xmlns:a="http://schemas.openxmlformats.org/drawingml/2006/main">
               <a:ext uri="{FF2B5EF4-FFF2-40B4-BE49-F238E27FC236}">
-                <a16:creationId xmlns:a16="http://schemas.microsoft.com/office/drawing/2014/main" id="{65DEF4BC-1229-4D2B-89BD-1521EF779114}"/>
+                <a16:creationId xmlns:a16="http://schemas.microsoft.com/office/drawing/2014/main" id="{7F106BE8-4AE9-4E17-B17C-ED756DB5982B}"/>
               </a:ext>
             </a:extLst>
           </p:cNvPr>
@@ -18324,7 +20600,7 @@
           <p:cNvPr id="13" name="">
             <a:extLst xmlns:a="http://schemas.openxmlformats.org/drawingml/2006/main">
               <a:ext uri="{FF2B5EF4-FFF2-40B4-BE49-F238E27FC236}">
-                <a16:creationId xmlns:a16="http://schemas.microsoft.com/office/drawing/2014/main" id="{EEDABD6A-7566-4176-9A50-BD1F6B6013DA}"/>
+                <a16:creationId xmlns:a16="http://schemas.microsoft.com/office/drawing/2014/main" id="{7A4D1A11-C1C3-4223-B345-6AA5F09A440D}"/>
               </a:ext>
             </a:extLst>
           </p:cNvPr>
@@ -18381,7 +20657,7 @@
           <p:cNvPr id="14" name="">
             <a:extLst xmlns:a="http://schemas.openxmlformats.org/drawingml/2006/main">
               <a:ext uri="{FF2B5EF4-FFF2-40B4-BE49-F238E27FC236}">
-                <a16:creationId xmlns:a16="http://schemas.microsoft.com/office/drawing/2014/main" id="{6C91E373-19BF-4E3B-9E7D-1C228DDD1293}"/>
+                <a16:creationId xmlns:a16="http://schemas.microsoft.com/office/drawing/2014/main" id="{E6220D46-205C-4229-A862-A5D59FA19FDB}"/>
               </a:ext>
             </a:extLst>
           </p:cNvPr>
@@ -18436,7 +20712,7 @@
     </p:spTree>
     <p:extLst>
       <p:ext uri="{BB962C8B-B14F-4D97-AF65-F5344CB8AC3E}">
-        <p14:creationId xmlns:p14="http://schemas.microsoft.com/office/powerpoint/2010/main" val="2039030296"/>
+        <p14:creationId xmlns:p14="http://schemas.microsoft.com/office/powerpoint/2010/main" val="1840600143"/>
       </p:ext>
     </p:extLst>
   </p:cSld>
@@ -18467,7 +20743,7 @@
           <p:cNvPr id="7" name="">
             <a:extLst xmlns:a="http://schemas.openxmlformats.org/drawingml/2006/main">
               <a:ext uri="{FF2B5EF4-FFF2-40B4-BE49-F238E27FC236}">
-                <a16:creationId xmlns:a16="http://schemas.microsoft.com/office/drawing/2014/main" id="{B9070B66-414E-43D4-AC0F-3530ABC4F333}"/>
+                <a16:creationId xmlns:a16="http://schemas.microsoft.com/office/drawing/2014/main" id="{3D55299D-5739-49E2-A275-4F489354FC5A}"/>
               </a:ext>
             </a:extLst>
           </p:cNvPr>
@@ -18843,7 +21119,7 @@
           <p:cNvPr id="3" name="">
             <a:extLst xmlns:a="http://schemas.openxmlformats.org/drawingml/2006/main">
               <a:ext uri="{FF2B5EF4-FFF2-40B4-BE49-F238E27FC236}">
-                <a16:creationId xmlns:a16="http://schemas.microsoft.com/office/drawing/2014/main" id="{1DED4F9C-28D3-4BF1-8C33-3BC68A095A17}"/>
+                <a16:creationId xmlns:a16="http://schemas.microsoft.com/office/drawing/2014/main" id="{80E5AD51-B7BC-478E-B9CA-DB3E922519D9}"/>
               </a:ext>
             </a:extLst>
           </p:cNvPr>
@@ -18900,7 +21176,7 @@
           <p:cNvPr id="4" name="">
             <a:extLst xmlns:a="http://schemas.openxmlformats.org/drawingml/2006/main">
               <a:ext uri="{FF2B5EF4-FFF2-40B4-BE49-F238E27FC236}">
-                <a16:creationId xmlns:a16="http://schemas.microsoft.com/office/drawing/2014/main" id="{FDADC113-5299-4352-8C00-C317C940DE9F}"/>
+                <a16:creationId xmlns:a16="http://schemas.microsoft.com/office/drawing/2014/main" id="{3A541AEA-BD76-44CE-B273-28CB8DCC5E73}"/>
               </a:ext>
             </a:extLst>
           </p:cNvPr>
@@ -18957,7 +21233,7 @@
           <p:cNvPr id="5" name="">
             <a:extLst xmlns:a="http://schemas.openxmlformats.org/drawingml/2006/main">
               <a:ext uri="{FF2B5EF4-FFF2-40B4-BE49-F238E27FC236}">
-                <a16:creationId xmlns:a16="http://schemas.microsoft.com/office/drawing/2014/main" id="{D2EA1E7D-5332-4FB0-BE05-3BA8C606E0D8}"/>
+                <a16:creationId xmlns:a16="http://schemas.microsoft.com/office/drawing/2014/main" id="{C114959A-E9AC-42C5-89EF-3162E33B1C04}"/>
               </a:ext>
             </a:extLst>
           </p:cNvPr>
@@ -19014,7 +21290,7 @@
           <p:cNvPr id="6" name="">
             <a:extLst xmlns:a="http://schemas.openxmlformats.org/drawingml/2006/main">
               <a:ext uri="{FF2B5EF4-FFF2-40B4-BE49-F238E27FC236}">
-                <a16:creationId xmlns:a16="http://schemas.microsoft.com/office/drawing/2014/main" id="{2EFB773A-42FF-4EBC-AAE2-65C671B71DFA}"/>
+                <a16:creationId xmlns:a16="http://schemas.microsoft.com/office/drawing/2014/main" id="{4F402B8C-F96B-4180-AC85-6C57F18EEB4B}"/>
               </a:ext>
             </a:extLst>
           </p:cNvPr>
@@ -19069,7 +21345,7 @@
     </p:spTree>
     <p:extLst>
       <p:ext uri="{BB962C8B-B14F-4D97-AF65-F5344CB8AC3E}">
-        <p14:creationId xmlns:p14="http://schemas.microsoft.com/office/powerpoint/2010/main" val="1021259709"/>
+        <p14:creationId xmlns:p14="http://schemas.microsoft.com/office/powerpoint/2010/main" val="1208925010"/>
       </p:ext>
     </p:extLst>
   </p:cSld>

--- a/output/submission-2026-09-15/counsel-disposition-google-slides.pptx
+++ b/output/submission-2026-09-15/counsel-disposition-google-slides.pptx
@@ -2,43 +2,44 @@
 <file path=ppt/presentation.xml><?xml version="1.0" encoding="utf-8"?>
 <p:presentation xmlns:p="http://schemas.openxmlformats.org/presentationml/2006/main">
   <p:sldMasterIdLst>
-    <p:sldMasterId xmlns:r="http://schemas.openxmlformats.org/officeDocument/2006/relationships" id="2147483648" r:id="Rec7b589be50f4ed3"/>
+    <p:sldMasterId xmlns:r="http://schemas.openxmlformats.org/officeDocument/2006/relationships" id="2147483648" r:id="R9359f40ee7cf47da"/>
   </p:sldMasterIdLst>
   <p:notesMasterIdLst>
-    <p:notesMasterId xmlns:r="http://schemas.openxmlformats.org/officeDocument/2006/relationships" r:id="R01a288a71e0a489e"/>
+    <p:notesMasterId xmlns:r="http://schemas.openxmlformats.org/officeDocument/2006/relationships" r:id="Re18c0cdf1f194b49"/>
   </p:notesMasterIdLst>
   <p:sldIdLst>
-    <p:sldId xmlns:r="http://schemas.openxmlformats.org/officeDocument/2006/relationships" id="256" r:id="R2bf2614f4bb844e3"/>
-    <p:sldId xmlns:r="http://schemas.openxmlformats.org/officeDocument/2006/relationships" id="257" r:id="R3167aa2c855a4a17"/>
-    <p:sldId xmlns:r="http://schemas.openxmlformats.org/officeDocument/2006/relationships" id="258" r:id="R3de173b467574b48"/>
-    <p:sldId xmlns:r="http://schemas.openxmlformats.org/officeDocument/2006/relationships" id="259" r:id="R5d7e4ac95c164057"/>
-    <p:sldId xmlns:r="http://schemas.openxmlformats.org/officeDocument/2006/relationships" id="260" r:id="R75418515c70c4dda"/>
-    <p:sldId xmlns:r="http://schemas.openxmlformats.org/officeDocument/2006/relationships" id="261" r:id="Rb612706e7fa8478b"/>
-    <p:sldId xmlns:r="http://schemas.openxmlformats.org/officeDocument/2006/relationships" id="262" r:id="Rfbecb33e8c1545e0"/>
-    <p:sldId xmlns:r="http://schemas.openxmlformats.org/officeDocument/2006/relationships" id="263" r:id="R7e884cfb60134bea"/>
-    <p:sldId xmlns:r="http://schemas.openxmlformats.org/officeDocument/2006/relationships" id="264" r:id="Rcbdcb0e61bc148c5"/>
-    <p:sldId xmlns:r="http://schemas.openxmlformats.org/officeDocument/2006/relationships" id="265" r:id="R247c0745546d467a"/>
-    <p:sldId xmlns:r="http://schemas.openxmlformats.org/officeDocument/2006/relationships" id="266" r:id="R97d1523c9eb24710"/>
-    <p:sldId xmlns:r="http://schemas.openxmlformats.org/officeDocument/2006/relationships" id="267" r:id="R435943b24d924f1a"/>
-    <p:sldId xmlns:r="http://schemas.openxmlformats.org/officeDocument/2006/relationships" id="268" r:id="Rc6a43e89fc634cc7"/>
-    <p:sldId xmlns:r="http://schemas.openxmlformats.org/officeDocument/2006/relationships" id="269" r:id="Rc73c3a0f15944868"/>
-    <p:sldId xmlns:r="http://schemas.openxmlformats.org/officeDocument/2006/relationships" id="270" r:id="R524e45a2c6c042fa"/>
-    <p:sldId xmlns:r="http://schemas.openxmlformats.org/officeDocument/2006/relationships" id="271" r:id="R133b173e025246a1"/>
-    <p:sldId xmlns:r="http://schemas.openxmlformats.org/officeDocument/2006/relationships" id="272" r:id="Rdb570b95dd4d4480"/>
-    <p:sldId xmlns:r="http://schemas.openxmlformats.org/officeDocument/2006/relationships" id="273" r:id="R3807e04ef3904840"/>
-    <p:sldId xmlns:r="http://schemas.openxmlformats.org/officeDocument/2006/relationships" id="274" r:id="Rd4cebe3f0f464849"/>
-    <p:sldId xmlns:r="http://schemas.openxmlformats.org/officeDocument/2006/relationships" id="275" r:id="R69b393c48d9c46da"/>
-    <p:sldId xmlns:r="http://schemas.openxmlformats.org/officeDocument/2006/relationships" id="276" r:id="R649a215210474a60"/>
-    <p:sldId xmlns:r="http://schemas.openxmlformats.org/officeDocument/2006/relationships" id="277" r:id="R3c7742a6ca814c97"/>
-    <p:sldId xmlns:r="http://schemas.openxmlformats.org/officeDocument/2006/relationships" id="278" r:id="R27e1167859a94dc1"/>
-    <p:sldId xmlns:r="http://schemas.openxmlformats.org/officeDocument/2006/relationships" id="279" r:id="R620732dcb4ad4321"/>
-    <p:sldId xmlns:r="http://schemas.openxmlformats.org/officeDocument/2006/relationships" id="280" r:id="R7d9eaf82217b481a"/>
-    <p:sldId xmlns:r="http://schemas.openxmlformats.org/officeDocument/2006/relationships" id="281" r:id="R544a1adf092440f0"/>
-    <p:sldId xmlns:r="http://schemas.openxmlformats.org/officeDocument/2006/relationships" id="282" r:id="Rcafa889813c743f1"/>
-    <p:sldId xmlns:r="http://schemas.openxmlformats.org/officeDocument/2006/relationships" id="283" r:id="R82bcf2c095e94d10"/>
-    <p:sldId xmlns:r="http://schemas.openxmlformats.org/officeDocument/2006/relationships" id="284" r:id="R68e7c627eba24127"/>
-    <p:sldId xmlns:r="http://schemas.openxmlformats.org/officeDocument/2006/relationships" id="285" r:id="R95d8d8a19cd84237"/>
-    <p:sldId xmlns:r="http://schemas.openxmlformats.org/officeDocument/2006/relationships" id="286" r:id="R3e7afe063d2d4dac"/>
+    <p:sldId xmlns:r="http://schemas.openxmlformats.org/officeDocument/2006/relationships" id="256" r:id="Rc3130ffb9e984a53"/>
+    <p:sldId xmlns:r="http://schemas.openxmlformats.org/officeDocument/2006/relationships" id="257" r:id="R59f5a015b866425e"/>
+    <p:sldId xmlns:r="http://schemas.openxmlformats.org/officeDocument/2006/relationships" id="258" r:id="R5a242369c5da4b2a"/>
+    <p:sldId xmlns:r="http://schemas.openxmlformats.org/officeDocument/2006/relationships" id="259" r:id="R547953d6b0294a54"/>
+    <p:sldId xmlns:r="http://schemas.openxmlformats.org/officeDocument/2006/relationships" id="260" r:id="R2655d4732aed42e1"/>
+    <p:sldId xmlns:r="http://schemas.openxmlformats.org/officeDocument/2006/relationships" id="261" r:id="R23084b1aa8844a83"/>
+    <p:sldId xmlns:r="http://schemas.openxmlformats.org/officeDocument/2006/relationships" id="262" r:id="Rad0c1328b6ea4a92"/>
+    <p:sldId xmlns:r="http://schemas.openxmlformats.org/officeDocument/2006/relationships" id="263" r:id="Ra81a4a6e5d6c460a"/>
+    <p:sldId xmlns:r="http://schemas.openxmlformats.org/officeDocument/2006/relationships" id="264" r:id="R76f603d91cb04a1f"/>
+    <p:sldId xmlns:r="http://schemas.openxmlformats.org/officeDocument/2006/relationships" id="265" r:id="R3242ac11ce594484"/>
+    <p:sldId xmlns:r="http://schemas.openxmlformats.org/officeDocument/2006/relationships" id="266" r:id="Rd10cab4e4a7548ac"/>
+    <p:sldId xmlns:r="http://schemas.openxmlformats.org/officeDocument/2006/relationships" id="267" r:id="R7725b28df30e4536"/>
+    <p:sldId xmlns:r="http://schemas.openxmlformats.org/officeDocument/2006/relationships" id="268" r:id="R319df0568bca4495"/>
+    <p:sldId xmlns:r="http://schemas.openxmlformats.org/officeDocument/2006/relationships" id="269" r:id="R4f64257c22594c85"/>
+    <p:sldId xmlns:r="http://schemas.openxmlformats.org/officeDocument/2006/relationships" id="270" r:id="Rc2b8ff6843ce4031"/>
+    <p:sldId xmlns:r="http://schemas.openxmlformats.org/officeDocument/2006/relationships" id="271" r:id="R1afdbf7b7a0848ad"/>
+    <p:sldId xmlns:r="http://schemas.openxmlformats.org/officeDocument/2006/relationships" id="272" r:id="Rac10f98a93ff47c5"/>
+    <p:sldId xmlns:r="http://schemas.openxmlformats.org/officeDocument/2006/relationships" id="273" r:id="R92abc22fea5541c9"/>
+    <p:sldId xmlns:r="http://schemas.openxmlformats.org/officeDocument/2006/relationships" id="274" r:id="Rfa39ab125a5b45f3"/>
+    <p:sldId xmlns:r="http://schemas.openxmlformats.org/officeDocument/2006/relationships" id="275" r:id="Rdebe305d7f2c4e48"/>
+    <p:sldId xmlns:r="http://schemas.openxmlformats.org/officeDocument/2006/relationships" id="276" r:id="R5b623e0320eb43fa"/>
+    <p:sldId xmlns:r="http://schemas.openxmlformats.org/officeDocument/2006/relationships" id="277" r:id="R0c2dd4136ffb419a"/>
+    <p:sldId xmlns:r="http://schemas.openxmlformats.org/officeDocument/2006/relationships" id="278" r:id="R215f600e85f245cf"/>
+    <p:sldId xmlns:r="http://schemas.openxmlformats.org/officeDocument/2006/relationships" id="279" r:id="Rbbd4617f3d9a4dd8"/>
+    <p:sldId xmlns:r="http://schemas.openxmlformats.org/officeDocument/2006/relationships" id="280" r:id="R08d2504001d14e5b"/>
+    <p:sldId xmlns:r="http://schemas.openxmlformats.org/officeDocument/2006/relationships" id="281" r:id="R90dd3b36ca934adc"/>
+    <p:sldId xmlns:r="http://schemas.openxmlformats.org/officeDocument/2006/relationships" id="282" r:id="Ra9595c24d1004653"/>
+    <p:sldId xmlns:r="http://schemas.openxmlformats.org/officeDocument/2006/relationships" id="283" r:id="R2b237fe279fd4d56"/>
+    <p:sldId xmlns:r="http://schemas.openxmlformats.org/officeDocument/2006/relationships" id="284" r:id="Rece619dcf2474b45"/>
+    <p:sldId xmlns:r="http://schemas.openxmlformats.org/officeDocument/2006/relationships" id="285" r:id="R6879ba4d493540ff"/>
+    <p:sldId xmlns:r="http://schemas.openxmlformats.org/officeDocument/2006/relationships" id="286" r:id="R95f4b7b1659f486a"/>
+    <p:sldId xmlns:r="http://schemas.openxmlformats.org/officeDocument/2006/relationships" id="287" r:id="R24f1903240b040cd"/>
   </p:sldIdLst>
   <p:sldSz cx="12192000" cy="6858000"/>
   <p:notesSz cx="6858000" cy="9144000"/>
@@ -2857,7 +2858,7 @@
           </a:p>
           <a:p xmlns:a="http://schemas.openxmlformats.org/drawingml/2006/main">
             <a:r>
-              <a:t>On the known set, C47 changes from self-care to the accepted async disposition, while C22 remains a missed review. C07 becomes a new self-care miss and C32 becomes an unnecessary async referral under the unchanged reference. C04, C43 and C49 change from accepted urgent escalation to async review. Their exact messages appear on slide 31. Thus the number of missed clinician-action cases stays at two, while missed urgent action increases from zero to three. The original frozen 48/50 result and the existing GUI remain unchanged.</a:t>
+              <a:t>On the known set, C47 changes from self-care to the accepted async disposition, while C22 remains a missed review. C07 becomes a new self-care miss and C32 becomes an unnecessary async referral under the unchanged reference. C04, C43 and C49 change from the accepted urgent bucket to async review. Their exact messages appear on slide 31. The missed-clinician-action count stays at two. The frozen scorer counts the three urgent-to-async changes as false negatives against its urgent-reference endpoint. That remains the correct description of the scorer and its unchanged labels. It does not establish that a physician response, examination, investigation or treatment actually occurred late. No such outcomes were measured. The original 48/50 result and selected GUI remain unchanged.</a:t>
             </a:r>
           </a:p>
           <a:p xmlns:a="http://schemas.openxmlformats.org/drawingml/2006/main">
@@ -2867,7 +2868,7 @@
           </a:p>
           <a:p xmlns:a="http://schemas.openxmlformats.org/drawingml/2006/main">
             <a:r>
-              <a:t>The new urgent errors are important because a generic instruction intended to prevent premature self-care can also shift the boundary between async review and urgent care. Several saved rationales focus on absence of emergency findings even though URGENT_ESCALATION includes same-day assessment. That is a hypothesis from these outputs, not an established causal mechanism. One run per arm does not isolate prompt effects from sampling variation, and related authored challenge cases are not independent samples of clinical prevalence. The authored challenge improvement cannot offset new urgent misses or establish safety. The candidate is not promoted. The next work requires approval of the clinical policy, independent reference labels and locked evaluation criteria before another clinical performance claim.</a:t>
+              <a:t>ASYNC_PHYSICIAN describes a communication channel and can potentially provide rapid physician assessment and coordinate same-day care. The required time and care capability need separate definitions. These three model/reference disagreements therefore require a clinical and operational contract review before interpreting them as demonstrated undertriage in the actual service. Several saved rationales focus on emergency thresholds even though the frozen urgent bucket includes same-day assessment. That is a hypothesis about the disagreement, not an established causal mechanism or proof that async is inappropriate in every case.</a:t>
             </a:r>
           </a:p>
           <a:p xmlns:a="http://schemas.openxmlformats.org/drawingml/2006/main">
@@ -2877,6 +2878,16 @@
           </a:p>
           <a:p xmlns:a="http://schemas.openxmlformats.org/drawingml/2006/main">
             <a:r>
+              <a:t>One run per arm does not isolate prompt effects from sampling variation. Related authored challenge cases do not independently sample clinical prevalence. Known-reference agreement falls from 48/50 to 44/50 and the two clinician-action false negatives remain, so this experiment establishes no improvement in the primary known-set missed-action endpoint. Authored checks cannot establish clinical safety. The candidate is not promoted. The next work requires approval of the routing contract, independent reference labels and prospectively defined evaluation criteria.</a:t>
+            </a:r>
+          </a:p>
+          <a:p xmlns:a="http://schemas.openxmlformats.org/drawingml/2006/main">
+            <a:r>
+              <a:t/>
+            </a:r>
+          </a:p>
+          <a:p xmlns:a="http://schemas.openxmlformats.org/drawingml/2006/main">
+            <a:r>
               <a:t>Sources</a:t>
             </a:r>
           </a:p>
@@ -2913,6 +2924,16 @@
           <a:p xmlns:a="http://schemas.openxmlformats.org/drawingml/2006/main">
             <a:r>
               <a:t>docs/FALSE_NEGATIVE_REDUCTION_RESULTS_2026-09-16.md</a:t>
+            </a:r>
+          </a:p>
+          <a:p xmlns:a="http://schemas.openxmlformats.org/drawingml/2006/main">
+            <a:r>
+              <a:t/>
+            </a:r>
+          </a:p>
+          <a:p xmlns:a="http://schemas.openxmlformats.org/drawingml/2006/main">
+            <a:r>
+              <a:t>docs/COUNSEL_ASYNC_CARE_CONTEXT_2026-09-16.md</a:t>
             </a:r>
           </a:p>
         </p:txBody>
@@ -3107,7 +3128,7 @@
           <a:lstStyle xmlns:a="http://schemas.openxmlformats.org/drawingml/2006/main"/>
           <a:p xmlns:a="http://schemas.openxmlformats.org/drawingml/2006/main">
             <a:r>
-              <a:t>The completed experiment implements a proposed policy as a development hypothesis. It does not establish that the policy is clinically approved, that the authored cases are an independent reference, or that any future workflow is safe for patient care. Those are separate accountable decisions. The prior general instruction did not reduce known-set missed clinician action and introduced urgent-routing disagreements. Avoid repeatedly tuning against these known misses while calling the same cases independent evidence. Preserve this negative result and freeze any future protocol before evaluation.</a:t>
+              <a:t>The completed experiment implements a proposed policy as a development hypothesis. It does not establish that the policy is clinically approved, that the authored cases are an independent reference, or that any future workflow is safe for patient care. Those are separate accountable decisions. The prior general instruction did not reduce known-set missed clinician action and introduced urgent-routing disagreements. Avoid repeatedly tuning against these known misses while calling the same cases independent evidence. Preserve this result and freeze any future protocol before evaluation.</a:t>
             </a:r>
           </a:p>
           <a:p xmlns:a="http://schemas.openxmlformats.org/drawingml/2006/main">
@@ -3117,7 +3138,7 @@
           </a:p>
           <a:p xmlns:a="http://schemas.openxmlformats.org/drawingml/2006/main">
             <a:r>
-              <a:t>The clinical lead must first define what evidence permits SELF_CARE, what information is material to that decision, and when urgent care means emergency action now versus in-person assessment today. Care operations must review whether the selected action can occur within the required interval. Missing information alone should not be treated as an emergency diagnosis. The operational policy needs a verified pathway when review is recommended.</a:t>
+              <a:t>The clinical lead must first define what evidence permits SELF_CARE and what information is material to that decision. The routing contract must distinguish the next contact from the setting in which care must be completed, the required clinical deadline, and the capability of the available pathway. Async physician contact can be compatible with same-day care. It does not establish whether an examination, testing or treatment can actually occur within the needed interval. Care operations must verify that capability and the process for completing a recommended transfer or assessment. Missing information alone should not be treated as an emergency diagnosis. A response-time average cannot substitute for the required case-specific deadline.</a:t>
             </a:r>
           </a:p>
           <a:p xmlns:a="http://schemas.openxmlformats.org/drawingml/2006/main">
@@ -3183,6 +3204,16 @@
           <a:p xmlns:a="http://schemas.openxmlformats.org/drawingml/2006/main">
             <a:r>
               <a:t>https://www.nature.com/articles/s41591-022-01772-9</a:t>
+            </a:r>
+          </a:p>
+          <a:p xmlns:a="http://schemas.openxmlformats.org/drawingml/2006/main">
+            <a:r>
+              <a:t/>
+            </a:r>
+          </a:p>
+          <a:p xmlns:a="http://schemas.openxmlformats.org/drawingml/2006/main">
+            <a:r>
+              <a:t>docs/COUNSEL_ASYNC_CARE_CONTEXT_2026-09-16.md</a:t>
             </a:r>
           </a:p>
         </p:txBody>
@@ -3252,7 +3283,7 @@
           <a:lstStyle xmlns:a="http://schemas.openxmlformats.org/drawingml/2006/main"/>
           <a:p xmlns:a="http://schemas.openxmlformats.org/drawingml/2006/main">
             <a:r>
-              <a:t>These are the exact synthetic assignment messages, reproduced from the labels-free input file verified against the frozen baseline requests. They entered the separate candidate generation without case IDs or reference labels. C04, C43 and C49 are three new urgent-action false negatives under the unchanged physician v3 reference: the candidate still requests clinician review but assigns async instead of urgent care. The table records a routing disagreement, not an observed patient outcome or a confirmed diagnosis. No case-specific runtime rule or label revision follows from this review. All three cases and rationales remain in the frozen development scorecard. No CSV label serves as a clinical target.</a:t>
+              <a:t>These are the exact synthetic assignment messages, reproduced from the labels-free input file verified against the frozen baseline requests. They entered the separate candidate generation without case IDs or reference labels. For C04, C43 and C49, the candidate still requests clinician review but assigns async rather than the urgent bucket required by physician reference v3. The frozen scorer therefore counts all three as urgent-reference false negatives. This records a label disagreement. It does not show whether the next physician contact or necessary care would have been delayed.</a:t>
             </a:r>
           </a:p>
           <a:p xmlns:a="http://schemas.openxmlformats.org/drawingml/2006/main">
@@ -3262,12 +3293,177 @@
           </a:p>
           <a:p xmlns:a="http://schemas.openxmlformats.org/drawingml/2006/main">
             <a:r>
+              <a:t>A rapid async pathway could potentially assess the presentation and coordinate same-day care when the required capabilities and deadline are confirmed. That conditional possibility requires clinical and operational validation. It does not make every async route acceptable and does not change the saved labels or this experiment’s 44/50 agreement. No observed patient outcome or confirmed diagnosis is established here. No case-specific runtime rule or label revision follows from this review. All three cases and rationales remain in the frozen development scorecard. No CSV label serves as a clinical target.</a:t>
+            </a:r>
+          </a:p>
+          <a:p xmlns:a="http://schemas.openxmlformats.org/drawingml/2006/main">
+            <a:r>
+              <a:t/>
+            </a:r>
+          </a:p>
+          <a:p xmlns:a="http://schemas.openxmlformats.org/drawingml/2006/main">
+            <a:r>
               <a:t>Sources</a:t>
             </a:r>
           </a:p>
           <a:p xmlns:a="http://schemas.openxmlformats.org/drawingml/2006/main">
             <a:r>
               <a:t>outputs/fn-reduction-2026-09-16/known-messages.json</a:t>
+            </a:r>
+          </a:p>
+          <a:p xmlns:a="http://schemas.openxmlformats.org/drawingml/2006/main">
+            <a:r>
+              <a:t/>
+            </a:r>
+          </a:p>
+          <a:p xmlns:a="http://schemas.openxmlformats.org/drawingml/2006/main">
+            <a:r>
+              <a:t>outputs/fn-reduction-2026-09-16/scorecard-known-development.json</a:t>
+            </a:r>
+          </a:p>
+          <a:p xmlns:a="http://schemas.openxmlformats.org/drawingml/2006/main">
+            <a:r>
+              <a:t/>
+            </a:r>
+          </a:p>
+          <a:p xmlns:a="http://schemas.openxmlformats.org/drawingml/2006/main">
+            <a:r>
+              <a:t>docs/COUNSEL_ASYNC_CARE_CONTEXT_2026-09-16.md</a:t>
+            </a:r>
+          </a:p>
+        </p:txBody>
+      </p:sp>
+      <p:sp>
+        <p:nvSpPr>
+          <p:cNvPr id="4" name="Slide Number Placeholder 3"/>
+          <p:cNvSpPr>
+            <a:spLocks xmlns:a="http://schemas.openxmlformats.org/drawingml/2006/main" noGrp="1"/>
+          </p:cNvSpPr>
+          <p:nvPr>
+            <p:ph type="sldNum" idx="5"/>
+          </p:nvPr>
+        </p:nvSpPr>
+        <p:spPr/>
+        <p:txBody>
+          <a:bodyPr xmlns:a="http://schemas.openxmlformats.org/drawingml/2006/main"/>
+          <a:lstStyle xmlns:a="http://schemas.openxmlformats.org/drawingml/2006/main"/>
+          <a:p xmlns:a="http://schemas.openxmlformats.org/drawingml/2006/main"/>
+        </p:txBody>
+      </p:sp>
+    </p:spTree>
+  </p:cSld>
+  <p:clrMapOvr>
+    <a:masterClrMapping xmlns:a="http://schemas.openxmlformats.org/drawingml/2006/main"/>
+  </p:clrMapOvr>
+</p:notes>
+</file>
+
+<file path=ppt/notesSlides/notesSlide32.xml><?xml version="1.0" encoding="utf-8"?>
+<p:notes xmlns:p="http://schemas.openxmlformats.org/presentationml/2006/main">
+  <p:cSld>
+    <p:spTree>
+      <p:nvGrpSpPr>
+        <p:cNvPr id="1" name=""/>
+        <p:cNvGrpSpPr/>
+        <p:nvPr/>
+      </p:nvGrpSpPr>
+      <p:grpSpPr>
+        <a:xfrm xmlns:a="http://schemas.openxmlformats.org/drawingml/2006/main"/>
+      </p:grpSpPr>
+      <p:sp>
+        <p:nvSpPr>
+          <p:cNvPr id="2" name="Slide Image Placeholder 1"/>
+          <p:cNvSpPr>
+            <a:spLocks xmlns:a="http://schemas.openxmlformats.org/drawingml/2006/main" noGrp="1"/>
+          </p:cNvSpPr>
+          <p:nvPr>
+            <p:ph type="sldImg" idx="0"/>
+          </p:nvPr>
+        </p:nvSpPr>
+        <p:spPr/>
+      </p:sp>
+      <p:sp>
+        <p:nvSpPr>
+          <p:cNvPr id="3" name="Notes Placeholder 2"/>
+          <p:cNvSpPr>
+            <a:spLocks xmlns:a="http://schemas.openxmlformats.org/drawingml/2006/main" noGrp="1"/>
+          </p:cNvSpPr>
+          <p:nvPr>
+            <p:ph type="body" idx="1"/>
+          </p:nvPr>
+        </p:nvSpPr>
+        <p:spPr/>
+        <p:txBody>
+          <a:bodyPr xmlns:a="http://schemas.openxmlformats.org/drawingml/2006/main"/>
+          <a:lstStyle xmlns:a="http://schemas.openxmlformats.org/drawingml/2006/main"/>
+          <a:p xmlns:a="http://schemas.openxmlformats.org/drawingml/2006/main">
+            <a:r>
+              <a:t>The FAQ qualifies access by clinical hours, 8am–9pm daily. Informed consent describes primarily asynchronous care, with in-person limits and emergency instructions. Sources accessed 16 September 2026.</a:t>
+            </a:r>
+          </a:p>
+          <a:p xmlns:a="http://schemas.openxmlformats.org/drawingml/2006/main">
+            <a:r>
+              <a:t/>
+            </a:r>
+          </a:p>
+          <a:p xmlns:a="http://schemas.openxmlformats.org/drawingml/2006/main">
+            <a:r>
+              <a:t>This public service description provides context for interpreting a communication channel. It does not establish a guaranteed response for a particular case, an end-to-end clinical deadline, or verified availability of an examination, testing, treatment or transfer. The prototype measured provider inference latency, not those clinical events.</a:t>
+            </a:r>
+          </a:p>
+          <a:p xmlns:a="http://schemas.openxmlformats.org/drawingml/2006/main">
+            <a:r>
+              <a:t/>
+            </a:r>
+          </a:p>
+          <a:p xmlns:a="http://schemas.openxmlformats.org/drawingml/2006/main">
+            <a:r>
+              <a:t>For a future approved policy, rapid async physician assessment could be an appropriate first contact when the pathway can complete or arrange the clinically required next action within its deadline. This is a proposed conditional routing contract for evaluation, not a statement of Counsel’s internal clinical policy or a treatment recommendation for these synthetic cases. Emergency presentations still require a separately defined immediate-action policy. No queue, service-availability logic, new physician label or runtime promotion is implemented by this presentation.</a:t>
+            </a:r>
+          </a:p>
+          <a:p xmlns:a="http://schemas.openxmlformats.org/drawingml/2006/main">
+            <a:r>
+              <a:t/>
+            </a:r>
+          </a:p>
+          <a:p xmlns:a="http://schemas.openxmlformats.org/drawingml/2006/main">
+            <a:r>
+              <a:t>The next review should determine whether the bucket represents the first contact or the required final care setting. Future labels and measurement should then follow that definition. Frozen baseline and candidate predictions and reference scores remain intact, with the development disagreements reported transparently.</a:t>
+            </a:r>
+          </a:p>
+          <a:p xmlns:a="http://schemas.openxmlformats.org/drawingml/2006/main">
+            <a:r>
+              <a:t/>
+            </a:r>
+          </a:p>
+          <a:p xmlns:a="http://schemas.openxmlformats.org/drawingml/2006/main">
+            <a:r>
+              <a:t>Sources</a:t>
+            </a:r>
+          </a:p>
+          <a:p xmlns:a="http://schemas.openxmlformats.org/drawingml/2006/main">
+            <a:r>
+              <a:t>https://www.counselhealth.com/</a:t>
+            </a:r>
+          </a:p>
+          <a:p xmlns:a="http://schemas.openxmlformats.org/drawingml/2006/main">
+            <a:r>
+              <a:t/>
+            </a:r>
+          </a:p>
+          <a:p xmlns:a="http://schemas.openxmlformats.org/drawingml/2006/main">
+            <a:r>
+              <a:t>https://www.counselhealth.com/informed-consent</a:t>
+            </a:r>
+          </a:p>
+          <a:p xmlns:a="http://schemas.openxmlformats.org/drawingml/2006/main">
+            <a:r>
+              <a:t/>
+            </a:r>
+          </a:p>
+          <a:p xmlns:a="http://schemas.openxmlformats.org/drawingml/2006/main">
+            <a:r>
+              <a:t>docs/COUNSEL_ASYNC_CARE_CONTEXT_2026-09-16.md</a:t>
             </a:r>
           </a:p>
           <a:p xmlns:a="http://schemas.openxmlformats.org/drawingml/2006/main">
@@ -3462,6 +3658,16 @@
           </a:p>
           <a:p xmlns:a="http://schemas.openxmlformats.org/drawingml/2006/main">
             <a:r>
+              <a:t>The labels are the frozen research interface. They do not fully specify the receiving service or distinguish first physician contact from the location and deadline of definitive assessment. The later service-context review explains why async contact can still support same-day care. No saved label or output changes.</a:t>
+            </a:r>
+          </a:p>
+          <a:p xmlns:a="http://schemas.openxmlformats.org/drawingml/2006/main">
+            <a:r>
+              <a:t/>
+            </a:r>
+          </a:p>
+          <a:p xmlns:a="http://schemas.openxmlformats.org/drawingml/2006/main">
+            <a:r>
               <a:t>Sources</a:t>
             </a:r>
           </a:p>
@@ -3488,6 +3694,16 @@
           <a:p xmlns:a="http://schemas.openxmlformats.org/drawingml/2006/main">
             <a:r>
               <a:t>docs/PHYSICIAN_ADJUDICATION_V3_2026-09-15.md</a:t>
+            </a:r>
+          </a:p>
+          <a:p xmlns:a="http://schemas.openxmlformats.org/drawingml/2006/main">
+            <a:r>
+              <a:t/>
+            </a:r>
+          </a:p>
+          <a:p xmlns:a="http://schemas.openxmlformats.org/drawingml/2006/main">
+            <a:r>
+              <a:t>docs/COUNSEL_ASYNC_CARE_CONTEXT_2026-09-16.md</a:t>
             </a:r>
           </a:p>
         </p:txBody>
@@ -3567,6 +3783,16 @@
           </a:p>
           <a:p xmlns:a="http://schemas.openxmlformats.org/drawingml/2006/main">
             <a:r>
+              <a:t>ASYNC_PHYSICIAN describes a communication channel, not an assumption of delayed care. Rapid async physician review can be compatible with same-day care, subject to the available clinical capabilities and the required deadline. The urgent bucket in this frozen evaluation still combines same-day in-person care and emergency action. Its saved labels and deterministic scores remain unchanged. The service-context correction does not make all async alternatives clinically interchangeable. A future clinical and operational contract must specify the next contact, necessary care setting, clinical deadline and who confirms completion. None of those service events was measured or implemented in the current prototype.</a:t>
+            </a:r>
+          </a:p>
+          <a:p xmlns:a="http://schemas.openxmlformats.org/drawingml/2006/main">
+            <a:r>
+              <a:t/>
+            </a:r>
+          </a:p>
+          <a:p xmlns:a="http://schemas.openxmlformats.org/drawingml/2006/main">
+            <a:r>
               <a:t>Sources</a:t>
             </a:r>
           </a:p>
@@ -3583,6 +3809,16 @@
           <a:p xmlns:a="http://schemas.openxmlformats.org/drawingml/2006/main">
             <a:r>
               <a:t>data/evaluation/physician-adjudication-v3-2026-09-15.json</a:t>
+            </a:r>
+          </a:p>
+          <a:p xmlns:a="http://schemas.openxmlformats.org/drawingml/2006/main">
+            <a:r>
+              <a:t/>
+            </a:r>
+          </a:p>
+          <a:p xmlns:a="http://schemas.openxmlformats.org/drawingml/2006/main">
+            <a:r>
+              <a:t>docs/COUNSEL_ASYNC_CARE_CONTEXT_2026-09-16.md</a:t>
             </a:r>
           </a:p>
         </p:txBody>
@@ -3975,7 +4211,7 @@
   </p:cSld>
   <p:clrMap bg1="lt1" tx1="dk1" bg2="lt2" tx2="dk2" accent1="accent1" accent2="accent2" accent3="accent3" accent4="accent4" accent5="accent5" accent6="accent6" hlink="hlink" folHlink="folHlink"/>
   <p:sldLayoutIdLst>
-    <p:sldLayoutId xmlns:r="http://schemas.openxmlformats.org/officeDocument/2006/relationships" id="2147483649" r:id="Rdeee332b0a2243e9"/>
+    <p:sldLayoutId xmlns:r="http://schemas.openxmlformats.org/officeDocument/2006/relationships" id="2147483649" r:id="R944de6c12ef54002"/>
   </p:sldLayoutIdLst>
   <p:txStyles>
     <p:titleStyle>
@@ -4526,7 +4762,7 @@
           <p:cNvPr id="16" name="">
             <a:extLst>
               <a:ext uri="{FF2B5EF4-FFF2-40B4-BE49-F238E27FC236}">
-                <ns2:creationId id="{E1AFEE42-206F-4F05-B6E8-29A36C8568DA}"/>
+                <ns2:creationId id="{E2006363-5ED7-4E19-9A8F-1A5DF2382B5F}"/>
               </a:ext>
             </a:extLst>
           </p:cNvPr>
@@ -4583,7 +4819,7 @@
           <p:cNvPr id="2" name="">
             <a:extLst>
               <a:ext uri="{FF2B5EF4-FFF2-40B4-BE49-F238E27FC236}">
-                <ns2:creationId id="{CF2164FB-7344-4DF5-8A87-D97D62C1B85D}"/>
+                <ns2:creationId id="{6E3495E1-E1C6-4BBF-98DD-16C27821CE30}"/>
               </a:ext>
             </a:extLst>
           </p:cNvPr>
@@ -4644,7 +4880,7 @@
           <p:nvPr/>
         </p:nvPicPr>
         <p:blipFill>
-          <a:blip r:embed="Rec8ef0f6b4df4340"/>
+          <a:blip r:embed="Rbc77e40048254d92"/>
           <a:stretch/>
         </p:blipFill>
         <p:spPr>
@@ -4662,7 +4898,7 @@
           <p:cNvPr id="4" name="">
             <a:extLst>
               <a:ext uri="{FF2B5EF4-FFF2-40B4-BE49-F238E27FC236}">
-                <ns2:creationId id="{D0DA9419-C4FE-4C02-8E53-B4AA2B53A0D8}"/>
+                <ns2:creationId id="{AAFB440B-FCE4-4D06-9F25-14BE25EE8E2F}"/>
               </a:ext>
             </a:extLst>
           </p:cNvPr>
@@ -4719,7 +4955,7 @@
           <p:cNvPr id="5" name="">
             <a:extLst>
               <a:ext uri="{FF2B5EF4-FFF2-40B4-BE49-F238E27FC236}">
-                <ns2:creationId id="{DF238197-91C0-4E28-8414-002843DF5EED}"/>
+                <ns2:creationId id="{6CB5875B-39FB-4C54-A775-7D7F2B012FE9}"/>
               </a:ext>
             </a:extLst>
           </p:cNvPr>
@@ -4776,7 +5012,7 @@
           <p:cNvPr id="6" name="">
             <a:extLst>
               <a:ext uri="{FF2B5EF4-FFF2-40B4-BE49-F238E27FC236}">
-                <ns2:creationId id="{8ED08D6D-7676-4515-80F3-84EBB7A8F643}"/>
+                <ns2:creationId id="{143EC994-B347-47BE-81BE-7624456E2377}"/>
               </a:ext>
             </a:extLst>
           </p:cNvPr>
@@ -4833,7 +5069,7 @@
           <p:cNvPr id="7" name="">
             <a:extLst>
               <a:ext uri="{FF2B5EF4-FFF2-40B4-BE49-F238E27FC236}">
-                <ns2:creationId id="{AB234C04-6B4D-4115-9FE0-374323905D22}"/>
+                <ns2:creationId id="{B90B43DC-D5D0-4D13-9642-A42753BF68A8}"/>
               </a:ext>
             </a:extLst>
           </p:cNvPr>
@@ -4890,7 +5126,7 @@
           <p:cNvPr id="8" name="">
             <a:extLst>
               <a:ext uri="{FF2B5EF4-FFF2-40B4-BE49-F238E27FC236}">
-                <ns2:creationId id="{3C55C66A-E3F1-4B60-ABD1-FF3B09733700}"/>
+                <ns2:creationId id="{CBCA569A-3727-43A7-A567-58B59F11AEE6}"/>
               </a:ext>
             </a:extLst>
           </p:cNvPr>
@@ -4948,7 +5184,7 @@
           <p:cNvPr id="9" name="">
             <a:extLst>
               <a:ext uri="{FF2B5EF4-FFF2-40B4-BE49-F238E27FC236}">
-                <ns2:creationId id="{7D8CE243-B554-46BA-94BC-4541C71B609C}"/>
+                <ns2:creationId id="{E715EAB3-7AA5-4237-9C98-EA1C48C77D39}"/>
               </a:ext>
             </a:extLst>
           </p:cNvPr>
@@ -5005,7 +5241,7 @@
           <p:cNvPr id="10" name="">
             <a:extLst>
               <a:ext uri="{FF2B5EF4-FFF2-40B4-BE49-F238E27FC236}">
-                <ns2:creationId id="{E5AFD7CC-087B-41B6-AA89-4801F43BBC24}"/>
+                <ns2:creationId id="{C2FC0D9E-FB52-4F46-9F3C-02D12D651BA9}"/>
               </a:ext>
             </a:extLst>
           </p:cNvPr>
@@ -5062,7 +5298,7 @@
           <p:cNvPr id="11" name="">
             <a:extLst>
               <a:ext uri="{FF2B5EF4-FFF2-40B4-BE49-F238E27FC236}">
-                <ns2:creationId id="{73BECD1B-DD00-4E4E-9F08-966BD7C42BCB}"/>
+                <ns2:creationId id="{E2F8A6C0-FDAB-4D26-B88D-F5FD6A0EADC2}"/>
               </a:ext>
             </a:extLst>
           </p:cNvPr>
@@ -5120,7 +5356,7 @@
           <p:cNvPr id="12" name="">
             <a:extLst>
               <a:ext uri="{FF2B5EF4-FFF2-40B4-BE49-F238E27FC236}">
-                <ns2:creationId id="{206605D2-8598-4C77-B587-448F7B193A1B}"/>
+                <ns2:creationId id="{90B05C36-8580-48F7-A244-C30E230AB171}"/>
               </a:ext>
             </a:extLst>
           </p:cNvPr>
@@ -5177,7 +5413,7 @@
           <p:cNvPr id="13" name="">
             <a:extLst>
               <a:ext uri="{FF2B5EF4-FFF2-40B4-BE49-F238E27FC236}">
-                <ns2:creationId id="{D5C61D7A-77EB-4AD2-9374-FE827C966B94}"/>
+                <ns2:creationId id="{50774CC7-F850-468C-992F-B71F5A6D64B2}"/>
               </a:ext>
             </a:extLst>
           </p:cNvPr>
@@ -5234,7 +5470,7 @@
           <p:cNvPr id="14" name="">
             <a:extLst>
               <a:ext uri="{FF2B5EF4-FFF2-40B4-BE49-F238E27FC236}">
-                <ns2:creationId id="{FCC89A28-5B1C-4A37-AC49-9E19CF627601}"/>
+                <ns2:creationId id="{1A56EA99-303D-41D0-A898-212C168D1FD2}"/>
               </a:ext>
             </a:extLst>
           </p:cNvPr>
@@ -5291,7 +5527,7 @@
           <p:cNvPr id="15" name="">
             <a:extLst>
               <a:ext uri="{FF2B5EF4-FFF2-40B4-BE49-F238E27FC236}">
-                <ns2:creationId id="{6D31EA88-0FFD-4FD7-BC40-CAEC4E48A97A}"/>
+                <ns2:creationId id="{BE3A2BDF-08F4-4BE5-B2AB-77DA505E9CF1}"/>
               </a:ext>
             </a:extLst>
           </p:cNvPr>
@@ -5346,7 +5582,7 @@
     </p:spTree>
     <p:extLst>
       <p:ext uri="{BB962C8B-B14F-4D97-AF65-F5344CB8AC3E}">
-        <ns4:creationId val="618866186"/>
+        <ns4:creationId val="734977239"/>
       </p:ext>
     </p:extLst>
   </p:cSld>
@@ -5377,7 +5613,7 @@
           <p:cNvPr id="7" name="">
             <a:extLst xmlns:a="http://schemas.openxmlformats.org/drawingml/2006/main">
               <a:ext uri="{FF2B5EF4-FFF2-40B4-BE49-F238E27FC236}">
-                <a16:creationId xmlns:a16="http://schemas.microsoft.com/office/drawing/2014/main" id="{2A23B494-59E0-4EDB-AFE1-B050FAFCC7C5}"/>
+                <a16:creationId xmlns:a16="http://schemas.microsoft.com/office/drawing/2014/main" id="{09E1DA10-A2DE-4368-A8DD-2A4AEED3FAF5}"/>
               </a:ext>
             </a:extLst>
           </p:cNvPr>
@@ -6046,7 +6282,7 @@
           <p:cNvPr id="3" name="">
             <a:extLst xmlns:a="http://schemas.openxmlformats.org/drawingml/2006/main">
               <a:ext uri="{FF2B5EF4-FFF2-40B4-BE49-F238E27FC236}">
-                <a16:creationId xmlns:a16="http://schemas.microsoft.com/office/drawing/2014/main" id="{721F2854-8D98-4A80-8834-CC2561C9AEC2}"/>
+                <a16:creationId xmlns:a16="http://schemas.microsoft.com/office/drawing/2014/main" id="{7D6842EE-DEED-4E7E-9BF0-CBC31B5DC463}"/>
               </a:ext>
             </a:extLst>
           </p:cNvPr>
@@ -6103,7 +6339,7 @@
           <p:cNvPr id="4" name="">
             <a:extLst xmlns:a="http://schemas.openxmlformats.org/drawingml/2006/main">
               <a:ext uri="{FF2B5EF4-FFF2-40B4-BE49-F238E27FC236}">
-                <a16:creationId xmlns:a16="http://schemas.microsoft.com/office/drawing/2014/main" id="{9FA4F055-8694-4187-9EF2-3CE486EC4F68}"/>
+                <a16:creationId xmlns:a16="http://schemas.microsoft.com/office/drawing/2014/main" id="{AECE8DE3-4F30-4CF7-A826-60181E41A10B}"/>
               </a:ext>
             </a:extLst>
           </p:cNvPr>
@@ -6160,7 +6396,7 @@
           <p:cNvPr id="5" name="">
             <a:extLst xmlns:a="http://schemas.openxmlformats.org/drawingml/2006/main">
               <a:ext uri="{FF2B5EF4-FFF2-40B4-BE49-F238E27FC236}">
-                <a16:creationId xmlns:a16="http://schemas.microsoft.com/office/drawing/2014/main" id="{9F2AAD90-C80A-44B8-874A-8E35275621B1}"/>
+                <a16:creationId xmlns:a16="http://schemas.microsoft.com/office/drawing/2014/main" id="{CB5463CE-3FA4-4494-A1CE-FEADC19E3A2C}"/>
               </a:ext>
             </a:extLst>
           </p:cNvPr>
@@ -6217,7 +6453,7 @@
           <p:cNvPr id="6" name="">
             <a:extLst xmlns:a="http://schemas.openxmlformats.org/drawingml/2006/main">
               <a:ext uri="{FF2B5EF4-FFF2-40B4-BE49-F238E27FC236}">
-                <a16:creationId xmlns:a16="http://schemas.microsoft.com/office/drawing/2014/main" id="{4AB44A41-0C0A-44B6-9C99-A3E2DCE120C4}"/>
+                <a16:creationId xmlns:a16="http://schemas.microsoft.com/office/drawing/2014/main" id="{753070FE-2E0C-49EF-A5F9-DAAAD4CC67C2}"/>
               </a:ext>
             </a:extLst>
           </p:cNvPr>
@@ -6272,7 +6508,7 @@
     </p:spTree>
     <p:extLst>
       <p:ext uri="{BB962C8B-B14F-4D97-AF65-F5344CB8AC3E}">
-        <p14:creationId xmlns:p14="http://schemas.microsoft.com/office/powerpoint/2010/main" val="1300347087"/>
+        <p14:creationId xmlns:p14="http://schemas.microsoft.com/office/powerpoint/2010/main" val="1023995832"/>
       </p:ext>
     </p:extLst>
   </p:cSld>
@@ -6303,7 +6539,7 @@
           <p:cNvPr id="7" name="">
             <a:extLst xmlns:a="http://schemas.openxmlformats.org/drawingml/2006/main">
               <a:ext uri="{FF2B5EF4-FFF2-40B4-BE49-F238E27FC236}">
-                <a16:creationId xmlns:a16="http://schemas.microsoft.com/office/drawing/2014/main" id="{8363ED18-B1C7-4199-A37B-4373897DE11F}"/>
+                <a16:creationId xmlns:a16="http://schemas.microsoft.com/office/drawing/2014/main" id="{3590ED64-A532-49E8-A8DD-24A472D48019}"/>
               </a:ext>
             </a:extLst>
           </p:cNvPr>
@@ -6679,7 +6915,7 @@
           <p:cNvPr id="3" name="">
             <a:extLst xmlns:a="http://schemas.openxmlformats.org/drawingml/2006/main">
               <a:ext uri="{FF2B5EF4-FFF2-40B4-BE49-F238E27FC236}">
-                <a16:creationId xmlns:a16="http://schemas.microsoft.com/office/drawing/2014/main" id="{241F4AE8-D559-4FFA-B9E1-20E1729FA924}"/>
+                <a16:creationId xmlns:a16="http://schemas.microsoft.com/office/drawing/2014/main" id="{293597CF-C260-4C00-9C5A-BF9F7F9B7E61}"/>
               </a:ext>
             </a:extLst>
           </p:cNvPr>
@@ -6736,7 +6972,7 @@
           <p:cNvPr id="4" name="">
             <a:extLst xmlns:a="http://schemas.openxmlformats.org/drawingml/2006/main">
               <a:ext uri="{FF2B5EF4-FFF2-40B4-BE49-F238E27FC236}">
-                <a16:creationId xmlns:a16="http://schemas.microsoft.com/office/drawing/2014/main" id="{A5346F80-ABDA-46FF-B67E-217AFC7552FA}"/>
+                <a16:creationId xmlns:a16="http://schemas.microsoft.com/office/drawing/2014/main" id="{96648007-6F56-449E-AA7A-6E458E6655A8}"/>
               </a:ext>
             </a:extLst>
           </p:cNvPr>
@@ -6793,7 +7029,7 @@
           <p:cNvPr id="5" name="">
             <a:extLst xmlns:a="http://schemas.openxmlformats.org/drawingml/2006/main">
               <a:ext uri="{FF2B5EF4-FFF2-40B4-BE49-F238E27FC236}">
-                <a16:creationId xmlns:a16="http://schemas.microsoft.com/office/drawing/2014/main" id="{B546DE83-20DF-4091-8B2E-25C9FDB98115}"/>
+                <a16:creationId xmlns:a16="http://schemas.microsoft.com/office/drawing/2014/main" id="{9C0304C3-CEEF-4787-A0A5-9D4626ADA0EB}"/>
               </a:ext>
             </a:extLst>
           </p:cNvPr>
@@ -6850,7 +7086,7 @@
           <p:cNvPr id="6" name="">
             <a:extLst xmlns:a="http://schemas.openxmlformats.org/drawingml/2006/main">
               <a:ext uri="{FF2B5EF4-FFF2-40B4-BE49-F238E27FC236}">
-                <a16:creationId xmlns:a16="http://schemas.microsoft.com/office/drawing/2014/main" id="{874F58C9-55C5-412B-8DA7-92FDC3E9F7A6}"/>
+                <a16:creationId xmlns:a16="http://schemas.microsoft.com/office/drawing/2014/main" id="{73E3E1E1-8CCB-48C2-BE13-6B453FAC1A30}"/>
               </a:ext>
             </a:extLst>
           </p:cNvPr>
@@ -6905,7 +7141,7 @@
     </p:spTree>
     <p:extLst>
       <p:ext uri="{BB962C8B-B14F-4D97-AF65-F5344CB8AC3E}">
-        <p14:creationId xmlns:p14="http://schemas.microsoft.com/office/powerpoint/2010/main" val="261451796"/>
+        <p14:creationId xmlns:p14="http://schemas.microsoft.com/office/powerpoint/2010/main" val="1245908843"/>
       </p:ext>
     </p:extLst>
   </p:cSld>
@@ -6936,7 +7172,7 @@
           <p:cNvPr id="5" name="">
             <a:extLst xmlns:a="http://schemas.openxmlformats.org/drawingml/2006/main">
               <a:ext uri="{FF2B5EF4-FFF2-40B4-BE49-F238E27FC236}">
-                <a16:creationId xmlns:a16="http://schemas.microsoft.com/office/drawing/2014/main" id="{CF60605E-4E4C-4047-BDC5-569BEA3D07F2}"/>
+                <a16:creationId xmlns:a16="http://schemas.microsoft.com/office/drawing/2014/main" id="{31FC4C9A-CA13-4CA6-A2CF-4AFF4FCFF65B}"/>
               </a:ext>
             </a:extLst>
           </p:cNvPr>
@@ -7265,7 +7501,7 @@
           <p:cNvPr id="3" name="">
             <a:extLst xmlns:a="http://schemas.openxmlformats.org/drawingml/2006/main">
               <a:ext uri="{FF2B5EF4-FFF2-40B4-BE49-F238E27FC236}">
-                <a16:creationId xmlns:a16="http://schemas.microsoft.com/office/drawing/2014/main" id="{464B8B2D-081C-4137-96E3-81983AB78F65}"/>
+                <a16:creationId xmlns:a16="http://schemas.microsoft.com/office/drawing/2014/main" id="{EC734C13-252D-4826-A08C-D628BFABEA1B}"/>
               </a:ext>
             </a:extLst>
           </p:cNvPr>
@@ -7322,7 +7558,7 @@
           <p:cNvPr id="4" name="">
             <a:extLst xmlns:a="http://schemas.openxmlformats.org/drawingml/2006/main">
               <a:ext uri="{FF2B5EF4-FFF2-40B4-BE49-F238E27FC236}">
-                <a16:creationId xmlns:a16="http://schemas.microsoft.com/office/drawing/2014/main" id="{F5B7BB06-B8C4-4841-B750-F926208CB509}"/>
+                <a16:creationId xmlns:a16="http://schemas.microsoft.com/office/drawing/2014/main" id="{70EADC33-E7A2-4B9C-878E-D846BAD4BABC}"/>
               </a:ext>
             </a:extLst>
           </p:cNvPr>
@@ -7377,7 +7613,7 @@
     </p:spTree>
     <p:extLst>
       <p:ext uri="{BB962C8B-B14F-4D97-AF65-F5344CB8AC3E}">
-        <p14:creationId xmlns:p14="http://schemas.microsoft.com/office/powerpoint/2010/main" val="809918692"/>
+        <p14:creationId xmlns:p14="http://schemas.microsoft.com/office/powerpoint/2010/main" val="394132160"/>
       </p:ext>
     </p:extLst>
   </p:cSld>
@@ -7408,7 +7644,7 @@
           <p:cNvPr id="5" name="">
             <a:extLst xmlns:a="http://schemas.openxmlformats.org/drawingml/2006/main">
               <a:ext uri="{FF2B5EF4-FFF2-40B4-BE49-F238E27FC236}">
-                <a16:creationId xmlns:a16="http://schemas.microsoft.com/office/drawing/2014/main" id="{F779E6DD-A311-42D8-9A85-90E0973133E5}"/>
+                <a16:creationId xmlns:a16="http://schemas.microsoft.com/office/drawing/2014/main" id="{2F4C7D29-A626-415B-9767-24307AE70411}"/>
               </a:ext>
             </a:extLst>
           </p:cNvPr>
@@ -7787,7 +8023,7 @@
           <p:cNvPr id="3" name="">
             <a:extLst xmlns:a="http://schemas.openxmlformats.org/drawingml/2006/main">
               <a:ext uri="{FF2B5EF4-FFF2-40B4-BE49-F238E27FC236}">
-                <a16:creationId xmlns:a16="http://schemas.microsoft.com/office/drawing/2014/main" id="{CB6D5277-48B5-42FC-8322-97356276BE48}"/>
+                <a16:creationId xmlns:a16="http://schemas.microsoft.com/office/drawing/2014/main" id="{5508CF0C-63F5-4040-A15D-BE25E923AEBD}"/>
               </a:ext>
             </a:extLst>
           </p:cNvPr>
@@ -7844,7 +8080,7 @@
           <p:cNvPr id="4" name="">
             <a:extLst xmlns:a="http://schemas.openxmlformats.org/drawingml/2006/main">
               <a:ext uri="{FF2B5EF4-FFF2-40B4-BE49-F238E27FC236}">
-                <a16:creationId xmlns:a16="http://schemas.microsoft.com/office/drawing/2014/main" id="{90EA7474-35A2-4B69-95E8-3E76201B70C9}"/>
+                <a16:creationId xmlns:a16="http://schemas.microsoft.com/office/drawing/2014/main" id="{CD492481-89B4-4C27-A1A9-C0B009563DC0}"/>
               </a:ext>
             </a:extLst>
           </p:cNvPr>
@@ -7899,7 +8135,7 @@
     </p:spTree>
     <p:extLst>
       <p:ext uri="{BB962C8B-B14F-4D97-AF65-F5344CB8AC3E}">
-        <p14:creationId xmlns:p14="http://schemas.microsoft.com/office/powerpoint/2010/main" val="778116643"/>
+        <p14:creationId xmlns:p14="http://schemas.microsoft.com/office/powerpoint/2010/main" val="1717278837"/>
       </p:ext>
     </p:extLst>
   </p:cSld>
@@ -7930,7 +8166,7 @@
           <p:cNvPr id="5" name="">
             <a:extLst xmlns:a="http://schemas.openxmlformats.org/drawingml/2006/main">
               <a:ext uri="{FF2B5EF4-FFF2-40B4-BE49-F238E27FC236}">
-                <a16:creationId xmlns:a16="http://schemas.microsoft.com/office/drawing/2014/main" id="{97688234-269C-4EBD-B37A-562DB441FB25}"/>
+                <a16:creationId xmlns:a16="http://schemas.microsoft.com/office/drawing/2014/main" id="{AA8D5BC8-D936-41AE-9E07-205FE191EAC6}"/>
               </a:ext>
             </a:extLst>
           </p:cNvPr>
@@ -8432,7 +8668,7 @@
           <p:cNvPr id="3" name="">
             <a:extLst xmlns:a="http://schemas.openxmlformats.org/drawingml/2006/main">
               <a:ext uri="{FF2B5EF4-FFF2-40B4-BE49-F238E27FC236}">
-                <a16:creationId xmlns:a16="http://schemas.microsoft.com/office/drawing/2014/main" id="{03516F15-AAB7-4F3E-9243-54BB73BB83FB}"/>
+                <a16:creationId xmlns:a16="http://schemas.microsoft.com/office/drawing/2014/main" id="{0C121F5C-AB20-493E-B73E-535ADEA51A83}"/>
               </a:ext>
             </a:extLst>
           </p:cNvPr>
@@ -8489,7 +8725,7 @@
           <p:cNvPr id="4" name="">
             <a:extLst xmlns:a="http://schemas.openxmlformats.org/drawingml/2006/main">
               <a:ext uri="{FF2B5EF4-FFF2-40B4-BE49-F238E27FC236}">
-                <a16:creationId xmlns:a16="http://schemas.microsoft.com/office/drawing/2014/main" id="{A137E625-FE1A-4A8B-B693-6892E578B2B9}"/>
+                <a16:creationId xmlns:a16="http://schemas.microsoft.com/office/drawing/2014/main" id="{D8DE4763-CA39-49CE-BB59-8F49048BD6A3}"/>
               </a:ext>
             </a:extLst>
           </p:cNvPr>
@@ -8544,7 +8780,7 @@
     </p:spTree>
     <p:extLst>
       <p:ext uri="{BB962C8B-B14F-4D97-AF65-F5344CB8AC3E}">
-        <p14:creationId xmlns:p14="http://schemas.microsoft.com/office/powerpoint/2010/main" val="1616477692"/>
+        <p14:creationId xmlns:p14="http://schemas.microsoft.com/office/powerpoint/2010/main" val="452969687"/>
       </p:ext>
     </p:extLst>
   </p:cSld>
@@ -8575,7 +8811,7 @@
           <p:cNvPr id="6" name="">
             <a:extLst xmlns:a="http://schemas.openxmlformats.org/drawingml/2006/main">
               <a:ext uri="{FF2B5EF4-FFF2-40B4-BE49-F238E27FC236}">
-                <a16:creationId xmlns:a16="http://schemas.microsoft.com/office/drawing/2014/main" id="{8C1D5EE1-C2B7-49A8-AE6B-221CF9A8F92B}"/>
+                <a16:creationId xmlns:a16="http://schemas.microsoft.com/office/drawing/2014/main" id="{BE438A29-58AF-4FEA-88F9-E2AF985C6E9C}"/>
               </a:ext>
             </a:extLst>
           </p:cNvPr>
@@ -8990,7 +9226,7 @@
           <p:cNvPr id="3" name="">
             <a:extLst xmlns:a="http://schemas.openxmlformats.org/drawingml/2006/main">
               <a:ext uri="{FF2B5EF4-FFF2-40B4-BE49-F238E27FC236}">
-                <a16:creationId xmlns:a16="http://schemas.microsoft.com/office/drawing/2014/main" id="{68B0C354-FAB4-4FA2-9413-0EB59C7B58C9}"/>
+                <a16:creationId xmlns:a16="http://schemas.microsoft.com/office/drawing/2014/main" id="{371586DB-0BF2-4DDF-A157-5F5AE539206A}"/>
               </a:ext>
             </a:extLst>
           </p:cNvPr>
@@ -9047,7 +9283,7 @@
           <p:cNvPr id="4" name="">
             <a:extLst xmlns:a="http://schemas.openxmlformats.org/drawingml/2006/main">
               <a:ext uri="{FF2B5EF4-FFF2-40B4-BE49-F238E27FC236}">
-                <a16:creationId xmlns:a16="http://schemas.microsoft.com/office/drawing/2014/main" id="{BE6400E6-1195-4D5D-9036-BC9A4DF41EDE}"/>
+                <a16:creationId xmlns:a16="http://schemas.microsoft.com/office/drawing/2014/main" id="{3305FE7D-83BA-4A0C-82F2-818EAAF7BB63}"/>
               </a:ext>
             </a:extLst>
           </p:cNvPr>
@@ -9104,7 +9340,7 @@
           <p:cNvPr id="5" name="">
             <a:extLst xmlns:a="http://schemas.openxmlformats.org/drawingml/2006/main">
               <a:ext uri="{FF2B5EF4-FFF2-40B4-BE49-F238E27FC236}">
-                <a16:creationId xmlns:a16="http://schemas.microsoft.com/office/drawing/2014/main" id="{11836D48-11DF-486A-9F8D-4AD6312D372F}"/>
+                <a16:creationId xmlns:a16="http://schemas.microsoft.com/office/drawing/2014/main" id="{7CC1A7FD-CC96-4799-9E58-514FC4A1A55C}"/>
               </a:ext>
             </a:extLst>
           </p:cNvPr>
@@ -9159,7 +9395,7 @@
     </p:spTree>
     <p:extLst>
       <p:ext uri="{BB962C8B-B14F-4D97-AF65-F5344CB8AC3E}">
-        <p14:creationId xmlns:p14="http://schemas.microsoft.com/office/powerpoint/2010/main" val="52404378"/>
+        <p14:creationId xmlns:p14="http://schemas.microsoft.com/office/powerpoint/2010/main" val="600988350"/>
       </p:ext>
     </p:extLst>
   </p:cSld>
@@ -9190,7 +9426,7 @@
           <p:cNvPr id="6" name="">
             <a:extLst xmlns:a="http://schemas.openxmlformats.org/drawingml/2006/main">
               <a:ext uri="{FF2B5EF4-FFF2-40B4-BE49-F238E27FC236}">
-                <a16:creationId xmlns:a16="http://schemas.microsoft.com/office/drawing/2014/main" id="{F0F5BF94-1DC8-42F8-93D4-DE28022F9A5F}"/>
+                <a16:creationId xmlns:a16="http://schemas.microsoft.com/office/drawing/2014/main" id="{F06C09FC-723C-4551-8E8D-28D815B123D5}"/>
               </a:ext>
             </a:extLst>
           </p:cNvPr>
@@ -9251,7 +9487,7 @@
           <p:nvPr/>
         </p:nvPicPr>
         <p:blipFill>
-          <a:blip xmlns:r="http://schemas.openxmlformats.org/officeDocument/2006/relationships" xmlns:a="http://schemas.openxmlformats.org/drawingml/2006/main" r:embed="R281d2eb4d7ce4015"/>
+          <a:blip xmlns:r="http://schemas.openxmlformats.org/officeDocument/2006/relationships" xmlns:a="http://schemas.openxmlformats.org/drawingml/2006/main" r:embed="R6b64817263044ecf"/>
           <a:stretch xmlns:a="http://schemas.openxmlformats.org/drawingml/2006/main"/>
         </p:blipFill>
         <p:spPr>
@@ -9269,7 +9505,7 @@
           <p:cNvPr id="3" name="">
             <a:extLst xmlns:a="http://schemas.openxmlformats.org/drawingml/2006/main">
               <a:ext uri="{FF2B5EF4-FFF2-40B4-BE49-F238E27FC236}">
-                <a16:creationId xmlns:a16="http://schemas.microsoft.com/office/drawing/2014/main" id="{D64E7FBB-A0BC-459F-A746-F9DCC75855F1}"/>
+                <a16:creationId xmlns:a16="http://schemas.microsoft.com/office/drawing/2014/main" id="{5387B5D5-60EF-40D8-BCEE-F37DB3551AAE}"/>
               </a:ext>
             </a:extLst>
           </p:cNvPr>
@@ -9326,7 +9562,7 @@
           <p:cNvPr id="4" name="">
             <a:extLst xmlns:a="http://schemas.openxmlformats.org/drawingml/2006/main">
               <a:ext uri="{FF2B5EF4-FFF2-40B4-BE49-F238E27FC236}">
-                <a16:creationId xmlns:a16="http://schemas.microsoft.com/office/drawing/2014/main" id="{67BB2306-C7EE-4791-A06A-E220E1FF59C7}"/>
+                <a16:creationId xmlns:a16="http://schemas.microsoft.com/office/drawing/2014/main" id="{DA673AA1-032A-4B60-AE47-0496C70F9129}"/>
               </a:ext>
             </a:extLst>
           </p:cNvPr>
@@ -9406,7 +9642,7 @@
           <p:cNvPr id="5" name="">
             <a:extLst xmlns:a="http://schemas.openxmlformats.org/drawingml/2006/main">
               <a:ext uri="{FF2B5EF4-FFF2-40B4-BE49-F238E27FC236}">
-                <a16:creationId xmlns:a16="http://schemas.microsoft.com/office/drawing/2014/main" id="{A8F1A77A-EB90-4D54-82A7-AC74347338D6}"/>
+                <a16:creationId xmlns:a16="http://schemas.microsoft.com/office/drawing/2014/main" id="{57A669B9-E759-48CB-B761-79A7F584D126}"/>
               </a:ext>
             </a:extLst>
           </p:cNvPr>
@@ -9461,7 +9697,7 @@
     </p:spTree>
     <p:extLst>
       <p:ext uri="{BB962C8B-B14F-4D97-AF65-F5344CB8AC3E}">
-        <p14:creationId xmlns:p14="http://schemas.microsoft.com/office/powerpoint/2010/main" val="1442526476"/>
+        <p14:creationId xmlns:p14="http://schemas.microsoft.com/office/powerpoint/2010/main" val="428767448"/>
       </p:ext>
     </p:extLst>
   </p:cSld>
@@ -9492,7 +9728,7 @@
           <p:cNvPr id="10" name="">
             <a:extLst xmlns:a="http://schemas.openxmlformats.org/drawingml/2006/main">
               <a:ext uri="{FF2B5EF4-FFF2-40B4-BE49-F238E27FC236}">
-                <a16:creationId xmlns:a16="http://schemas.microsoft.com/office/drawing/2014/main" id="{977FF872-F4A6-423D-8490-1696B7C987F5}"/>
+                <a16:creationId xmlns:a16="http://schemas.microsoft.com/office/drawing/2014/main" id="{76218BB4-D7D9-40A3-8725-B83A7D0082ED}"/>
               </a:ext>
             </a:extLst>
           </p:cNvPr>
@@ -9549,7 +9785,7 @@
           <p:cNvPr id="2" name="">
             <a:extLst xmlns:a="http://schemas.openxmlformats.org/drawingml/2006/main">
               <a:ext uri="{FF2B5EF4-FFF2-40B4-BE49-F238E27FC236}">
-                <a16:creationId xmlns:a16="http://schemas.microsoft.com/office/drawing/2014/main" id="{05CFEB77-3403-4F9F-A147-AD7FC67F5759}"/>
+                <a16:creationId xmlns:a16="http://schemas.microsoft.com/office/drawing/2014/main" id="{AB6E71D0-498C-4F6D-964C-E22218AEB57A}"/>
               </a:ext>
             </a:extLst>
           </p:cNvPr>
@@ -9606,7 +9842,7 @@
           <p:cNvPr id="3" name="">
             <a:extLst xmlns:a="http://schemas.openxmlformats.org/drawingml/2006/main">
               <a:ext uri="{FF2B5EF4-FFF2-40B4-BE49-F238E27FC236}">
-                <a16:creationId xmlns:a16="http://schemas.microsoft.com/office/drawing/2014/main" id="{6B37A2B9-7143-4386-A12F-1616A91676AA}"/>
+                <a16:creationId xmlns:a16="http://schemas.microsoft.com/office/drawing/2014/main" id="{843B60B1-A108-4751-A1FC-73F76360F495}"/>
               </a:ext>
             </a:extLst>
           </p:cNvPr>
@@ -9663,7 +9899,7 @@
           <p:cNvPr id="4" name="">
             <a:extLst xmlns:a="http://schemas.openxmlformats.org/drawingml/2006/main">
               <a:ext uri="{FF2B5EF4-FFF2-40B4-BE49-F238E27FC236}">
-                <a16:creationId xmlns:a16="http://schemas.microsoft.com/office/drawing/2014/main" id="{14962FD7-8CA4-4EBD-90AA-CB4B656E76AB}"/>
+                <a16:creationId xmlns:a16="http://schemas.microsoft.com/office/drawing/2014/main" id="{0A47DE9E-FAFA-4F23-A298-EF755FEE48D3}"/>
               </a:ext>
             </a:extLst>
           </p:cNvPr>
@@ -9720,7 +9956,7 @@
           <p:cNvPr id="5" name="">
             <a:extLst xmlns:a="http://schemas.openxmlformats.org/drawingml/2006/main">
               <a:ext uri="{FF2B5EF4-FFF2-40B4-BE49-F238E27FC236}">
-                <a16:creationId xmlns:a16="http://schemas.microsoft.com/office/drawing/2014/main" id="{DA372AF6-7E71-458B-8330-6A1B00D2A5C6}"/>
+                <a16:creationId xmlns:a16="http://schemas.microsoft.com/office/drawing/2014/main" id="{39C05C85-3316-48EE-ACE4-4A8864E8DE4A}"/>
               </a:ext>
             </a:extLst>
           </p:cNvPr>
@@ -9777,7 +10013,7 @@
           <p:cNvPr id="6" name="">
             <a:extLst xmlns:a="http://schemas.openxmlformats.org/drawingml/2006/main">
               <a:ext uri="{FF2B5EF4-FFF2-40B4-BE49-F238E27FC236}">
-                <a16:creationId xmlns:a16="http://schemas.microsoft.com/office/drawing/2014/main" id="{2069A1A6-5268-434F-9E07-179A6B1262A6}"/>
+                <a16:creationId xmlns:a16="http://schemas.microsoft.com/office/drawing/2014/main" id="{B6AF6124-DD38-4D23-A1E3-9CB3A1853801}"/>
               </a:ext>
             </a:extLst>
           </p:cNvPr>
@@ -9834,7 +10070,7 @@
           <p:cNvPr id="7" name="">
             <a:extLst xmlns:a="http://schemas.openxmlformats.org/drawingml/2006/main">
               <a:ext uri="{FF2B5EF4-FFF2-40B4-BE49-F238E27FC236}">
-                <a16:creationId xmlns:a16="http://schemas.microsoft.com/office/drawing/2014/main" id="{66846337-471F-4E4D-8D75-723AFE65D677}"/>
+                <a16:creationId xmlns:a16="http://schemas.microsoft.com/office/drawing/2014/main" id="{FEC0CEDD-48B4-4859-A120-8C2DD7E4EAD5}"/>
               </a:ext>
             </a:extLst>
           </p:cNvPr>
@@ -9891,7 +10127,7 @@
           <p:cNvPr id="8" name="">
             <a:extLst xmlns:a="http://schemas.openxmlformats.org/drawingml/2006/main">
               <a:ext uri="{FF2B5EF4-FFF2-40B4-BE49-F238E27FC236}">
-                <a16:creationId xmlns:a16="http://schemas.microsoft.com/office/drawing/2014/main" id="{43CD4721-4D7A-460A-B463-5769451A9346}"/>
+                <a16:creationId xmlns:a16="http://schemas.microsoft.com/office/drawing/2014/main" id="{5A912B70-B2A7-4CD1-8A86-AB9AD079C5AF}"/>
               </a:ext>
             </a:extLst>
           </p:cNvPr>
@@ -9948,7 +10184,7 @@
           <p:cNvPr id="9" name="">
             <a:extLst xmlns:a="http://schemas.openxmlformats.org/drawingml/2006/main">
               <a:ext uri="{FF2B5EF4-FFF2-40B4-BE49-F238E27FC236}">
-                <a16:creationId xmlns:a16="http://schemas.microsoft.com/office/drawing/2014/main" id="{097FF824-A258-4DB9-B901-5CF3D606CC16}"/>
+                <a16:creationId xmlns:a16="http://schemas.microsoft.com/office/drawing/2014/main" id="{FE3FF3B6-A8CD-43F7-847A-EE71FBBC9782}"/>
               </a:ext>
             </a:extLst>
           </p:cNvPr>
@@ -10003,7 +10239,7 @@
     </p:spTree>
     <p:extLst>
       <p:ext uri="{BB962C8B-B14F-4D97-AF65-F5344CB8AC3E}">
-        <p14:creationId xmlns:p14="http://schemas.microsoft.com/office/powerpoint/2010/main" val="376484738"/>
+        <p14:creationId xmlns:p14="http://schemas.microsoft.com/office/powerpoint/2010/main" val="507489511"/>
       </p:ext>
     </p:extLst>
   </p:cSld>
@@ -10034,7 +10270,7 @@
           <p:cNvPr id="5" name="">
             <a:extLst xmlns:a="http://schemas.openxmlformats.org/drawingml/2006/main">
               <a:ext uri="{FF2B5EF4-FFF2-40B4-BE49-F238E27FC236}">
-                <a16:creationId xmlns:a16="http://schemas.microsoft.com/office/drawing/2014/main" id="{264AA7FC-05A8-4CB2-A207-92F89D4F4A56}"/>
+                <a16:creationId xmlns:a16="http://schemas.microsoft.com/office/drawing/2014/main" id="{2A17B06D-503B-4512-B32B-3A9A542FB96A}"/>
               </a:ext>
             </a:extLst>
           </p:cNvPr>
@@ -10393,7 +10629,7 @@
                           <a:ea typeface="Arial"/>
                           <a:cs typeface="Arial"/>
                         </a:rPr>
-                        <a:t>15 main slides; 7-minute demo; 16 appendix slides</a:t>
+                        <a:t>15 main slides; 7-minute demo; 17 appendix slides</a:t>
                       </a:r>
                     </a:p>
                   </a:txBody>
@@ -10413,7 +10649,7 @@
           <p:cNvPr id="3" name="">
             <a:extLst xmlns:a="http://schemas.openxmlformats.org/drawingml/2006/main">
               <a:ext uri="{FF2B5EF4-FFF2-40B4-BE49-F238E27FC236}">
-                <a16:creationId xmlns:a16="http://schemas.microsoft.com/office/drawing/2014/main" id="{4BBFD0A3-EEB7-4E7A-A653-ACCF3E54E6A8}"/>
+                <a16:creationId xmlns:a16="http://schemas.microsoft.com/office/drawing/2014/main" id="{2062D805-D68D-4E65-B4B0-B5D5646360FB}"/>
               </a:ext>
             </a:extLst>
           </p:cNvPr>
@@ -10470,7 +10706,7 @@
           <p:cNvPr id="4" name="">
             <a:extLst xmlns:a="http://schemas.openxmlformats.org/drawingml/2006/main">
               <a:ext uri="{FF2B5EF4-FFF2-40B4-BE49-F238E27FC236}">
-                <a16:creationId xmlns:a16="http://schemas.microsoft.com/office/drawing/2014/main" id="{AEB91C04-F3D0-47C3-A784-427B713E4937}"/>
+                <a16:creationId xmlns:a16="http://schemas.microsoft.com/office/drawing/2014/main" id="{C346D22B-63A4-4762-AFF9-A84A3A8CCCC9}"/>
               </a:ext>
             </a:extLst>
           </p:cNvPr>
@@ -10525,7 +10761,7 @@
     </p:spTree>
     <p:extLst>
       <p:ext uri="{BB962C8B-B14F-4D97-AF65-F5344CB8AC3E}">
-        <p14:creationId xmlns:p14="http://schemas.microsoft.com/office/powerpoint/2010/main" val="161128596"/>
+        <p14:creationId xmlns:p14="http://schemas.microsoft.com/office/powerpoint/2010/main" val="652484674"/>
       </p:ext>
     </p:extLst>
   </p:cSld>
@@ -10556,7 +10792,7 @@
           <p:cNvPr id="5" name="">
             <a:extLst xmlns:a="http://schemas.openxmlformats.org/drawingml/2006/main">
               <a:ext uri="{FF2B5EF4-FFF2-40B4-BE49-F238E27FC236}">
-                <a16:creationId xmlns:a16="http://schemas.microsoft.com/office/drawing/2014/main" id="{02499DAE-A04E-4DF3-8BF4-480B413082BE}"/>
+                <a16:creationId xmlns:a16="http://schemas.microsoft.com/office/drawing/2014/main" id="{3CA7FA0D-AB95-440B-A07F-093E795BA477}"/>
               </a:ext>
             </a:extLst>
           </p:cNvPr>
@@ -10613,7 +10849,7 @@
           <p:cNvPr id="2" name="">
             <a:extLst xmlns:a="http://schemas.openxmlformats.org/drawingml/2006/main">
               <a:ext uri="{FF2B5EF4-FFF2-40B4-BE49-F238E27FC236}">
-                <a16:creationId xmlns:a16="http://schemas.microsoft.com/office/drawing/2014/main" id="{324EED81-C7F4-4B6F-B301-3093C94AF685}"/>
+                <a16:creationId xmlns:a16="http://schemas.microsoft.com/office/drawing/2014/main" id="{E827F966-D792-4580-93CE-87C91AAADFFA}"/>
               </a:ext>
             </a:extLst>
           </p:cNvPr>
@@ -10790,7 +11026,7 @@
           <p:cNvPr id="3" name="">
             <a:extLst xmlns:a="http://schemas.openxmlformats.org/drawingml/2006/main">
               <a:ext uri="{FF2B5EF4-FFF2-40B4-BE49-F238E27FC236}">
-                <a16:creationId xmlns:a16="http://schemas.microsoft.com/office/drawing/2014/main" id="{9932A0AB-036A-488D-B57B-37BE5B0BA542}"/>
+                <a16:creationId xmlns:a16="http://schemas.microsoft.com/office/drawing/2014/main" id="{3DE4DA3C-36D1-4FCC-8B93-E33AC12E44FD}"/>
               </a:ext>
             </a:extLst>
           </p:cNvPr>
@@ -10847,7 +11083,7 @@
           <p:cNvPr id="4" name="">
             <a:extLst xmlns:a="http://schemas.openxmlformats.org/drawingml/2006/main">
               <a:ext uri="{FF2B5EF4-FFF2-40B4-BE49-F238E27FC236}">
-                <a16:creationId xmlns:a16="http://schemas.microsoft.com/office/drawing/2014/main" id="{22A9B1E7-AF25-4076-A536-824784B5C8A1}"/>
+                <a16:creationId xmlns:a16="http://schemas.microsoft.com/office/drawing/2014/main" id="{0A0085EC-D200-4B65-ADE9-71CC133A46C7}"/>
               </a:ext>
             </a:extLst>
           </p:cNvPr>
@@ -10902,7 +11138,7 @@
     </p:spTree>
     <p:extLst>
       <p:ext uri="{BB962C8B-B14F-4D97-AF65-F5344CB8AC3E}">
-        <p14:creationId xmlns:p14="http://schemas.microsoft.com/office/powerpoint/2010/main" val="1175507891"/>
+        <p14:creationId xmlns:p14="http://schemas.microsoft.com/office/powerpoint/2010/main" val="1167939322"/>
       </p:ext>
     </p:extLst>
   </p:cSld>
@@ -10933,7 +11169,7 @@
           <p:cNvPr id="12" name="">
             <a:extLst xmlns:a="http://schemas.openxmlformats.org/drawingml/2006/main">
               <a:ext uri="{FF2B5EF4-FFF2-40B4-BE49-F238E27FC236}">
-                <a16:creationId xmlns:a16="http://schemas.microsoft.com/office/drawing/2014/main" id="{4F0B6593-5B1F-4719-B87F-B1A42DECB87B}"/>
+                <a16:creationId xmlns:a16="http://schemas.microsoft.com/office/drawing/2014/main" id="{9CD7A1BB-8FE5-40F8-BDB6-D98E620D3F9C}"/>
               </a:ext>
             </a:extLst>
           </p:cNvPr>
@@ -10994,7 +11230,7 @@
           <p:nvPr/>
         </p:nvPicPr>
         <p:blipFill>
-          <a:blip xmlns:r="http://schemas.openxmlformats.org/officeDocument/2006/relationships" xmlns:a="http://schemas.openxmlformats.org/drawingml/2006/main" r:embed="R349941e9a6984b49"/>
+          <a:blip xmlns:r="http://schemas.openxmlformats.org/officeDocument/2006/relationships" xmlns:a="http://schemas.openxmlformats.org/drawingml/2006/main" r:embed="R53aa9368849c4215"/>
           <a:stretch xmlns:a="http://schemas.openxmlformats.org/drawingml/2006/main"/>
         </p:blipFill>
         <p:spPr>
@@ -11016,7 +11252,7 @@
           <p:nvPr/>
         </p:nvPicPr>
         <p:blipFill>
-          <a:blip xmlns:r="http://schemas.openxmlformats.org/officeDocument/2006/relationships" xmlns:a="http://schemas.openxmlformats.org/drawingml/2006/main" r:embed="Re76e0315948e493f"/>
+          <a:blip xmlns:r="http://schemas.openxmlformats.org/officeDocument/2006/relationships" xmlns:a="http://schemas.openxmlformats.org/drawingml/2006/main" r:embed="Ra8349924904c44a2"/>
           <a:stretch xmlns:a="http://schemas.openxmlformats.org/drawingml/2006/main"/>
         </p:blipFill>
         <p:spPr>
@@ -11034,7 +11270,7 @@
           <p:cNvPr id="4" name="">
             <a:extLst xmlns:a="http://schemas.openxmlformats.org/drawingml/2006/main">
               <a:ext uri="{FF2B5EF4-FFF2-40B4-BE49-F238E27FC236}">
-                <a16:creationId xmlns:a16="http://schemas.microsoft.com/office/drawing/2014/main" id="{A421A570-BE8A-4DA1-9477-1D10B9BCB57A}"/>
+                <a16:creationId xmlns:a16="http://schemas.microsoft.com/office/drawing/2014/main" id="{BB37C659-B8D8-4E96-889E-CFDD31D837D8}"/>
               </a:ext>
             </a:extLst>
           </p:cNvPr>
@@ -11091,7 +11327,7 @@
           <p:cNvPr id="5" name="">
             <a:extLst xmlns:a="http://schemas.openxmlformats.org/drawingml/2006/main">
               <a:ext uri="{FF2B5EF4-FFF2-40B4-BE49-F238E27FC236}">
-                <a16:creationId xmlns:a16="http://schemas.microsoft.com/office/drawing/2014/main" id="{311158E8-F978-4525-A276-B9A5BE87FDF2}"/>
+                <a16:creationId xmlns:a16="http://schemas.microsoft.com/office/drawing/2014/main" id="{107D74B2-7D02-4C9C-A404-223EBCD3DE17}"/>
               </a:ext>
             </a:extLst>
           </p:cNvPr>
@@ -11148,7 +11384,7 @@
           <p:cNvPr id="6" name="">
             <a:extLst xmlns:a="http://schemas.openxmlformats.org/drawingml/2006/main">
               <a:ext uri="{FF2B5EF4-FFF2-40B4-BE49-F238E27FC236}">
-                <a16:creationId xmlns:a16="http://schemas.microsoft.com/office/drawing/2014/main" id="{A772E0EC-C02F-49C6-AD23-3AB8D8B76EA6}"/>
+                <a16:creationId xmlns:a16="http://schemas.microsoft.com/office/drawing/2014/main" id="{DA59ACE5-27AC-440B-AC48-FD3EFE120F36}"/>
               </a:ext>
             </a:extLst>
           </p:cNvPr>
@@ -11228,7 +11464,7 @@
           <p:cNvPr id="7" name="">
             <a:extLst xmlns:a="http://schemas.openxmlformats.org/drawingml/2006/main">
               <a:ext uri="{FF2B5EF4-FFF2-40B4-BE49-F238E27FC236}">
-                <a16:creationId xmlns:a16="http://schemas.microsoft.com/office/drawing/2014/main" id="{49ECF6E7-962A-450E-B24B-131BF55C9B04}"/>
+                <a16:creationId xmlns:a16="http://schemas.microsoft.com/office/drawing/2014/main" id="{BA3F602D-74A6-47B7-B022-C5AFCE20391C}"/>
               </a:ext>
             </a:extLst>
           </p:cNvPr>
@@ -11285,7 +11521,7 @@
           <p:cNvPr id="8" name="">
             <a:extLst xmlns:a="http://schemas.openxmlformats.org/drawingml/2006/main">
               <a:ext uri="{FF2B5EF4-FFF2-40B4-BE49-F238E27FC236}">
-                <a16:creationId xmlns:a16="http://schemas.microsoft.com/office/drawing/2014/main" id="{5B3DD810-CC1D-4E82-BBA9-72C696C2BA01}"/>
+                <a16:creationId xmlns:a16="http://schemas.microsoft.com/office/drawing/2014/main" id="{30307286-6750-417F-AEAD-55937059ED2A}"/>
               </a:ext>
             </a:extLst>
           </p:cNvPr>
@@ -11342,7 +11578,7 @@
           <p:cNvPr id="9" name="">
             <a:extLst xmlns:a="http://schemas.openxmlformats.org/drawingml/2006/main">
               <a:ext uri="{FF2B5EF4-FFF2-40B4-BE49-F238E27FC236}">
-                <a16:creationId xmlns:a16="http://schemas.microsoft.com/office/drawing/2014/main" id="{2E4C442A-318C-4673-A742-C1A429BDA927}"/>
+                <a16:creationId xmlns:a16="http://schemas.microsoft.com/office/drawing/2014/main" id="{467180A2-393C-4943-93B5-3D69A6B5C7F9}"/>
               </a:ext>
             </a:extLst>
           </p:cNvPr>
@@ -11399,7 +11635,7 @@
           <p:cNvPr id="10" name="">
             <a:extLst xmlns:a="http://schemas.openxmlformats.org/drawingml/2006/main">
               <a:ext uri="{FF2B5EF4-FFF2-40B4-BE49-F238E27FC236}">
-                <a16:creationId xmlns:a16="http://schemas.microsoft.com/office/drawing/2014/main" id="{46AB35AA-A63F-4547-8DFB-469F612E13EC}"/>
+                <a16:creationId xmlns:a16="http://schemas.microsoft.com/office/drawing/2014/main" id="{D3347670-7349-403E-86ED-2821AB871264}"/>
               </a:ext>
             </a:extLst>
           </p:cNvPr>
@@ -11456,7 +11692,7 @@
           <p:cNvPr id="11" name="">
             <a:extLst xmlns:a="http://schemas.openxmlformats.org/drawingml/2006/main">
               <a:ext uri="{FF2B5EF4-FFF2-40B4-BE49-F238E27FC236}">
-                <a16:creationId xmlns:a16="http://schemas.microsoft.com/office/drawing/2014/main" id="{9ED1A5B6-8069-452F-A92B-EB7A9DE04736}"/>
+                <a16:creationId xmlns:a16="http://schemas.microsoft.com/office/drawing/2014/main" id="{6F969228-7BF8-4C24-9978-E690C8FCF8F3}"/>
               </a:ext>
             </a:extLst>
           </p:cNvPr>
@@ -11511,7 +11747,7 @@
     </p:spTree>
     <p:extLst>
       <p:ext uri="{BB962C8B-B14F-4D97-AF65-F5344CB8AC3E}">
-        <p14:creationId xmlns:p14="http://schemas.microsoft.com/office/powerpoint/2010/main" val="250057367"/>
+        <p14:creationId xmlns:p14="http://schemas.microsoft.com/office/powerpoint/2010/main" val="220408299"/>
       </p:ext>
     </p:extLst>
   </p:cSld>
@@ -11542,7 +11778,7 @@
           <p:cNvPr id="9" name="">
             <a:extLst xmlns:a="http://schemas.openxmlformats.org/drawingml/2006/main">
               <a:ext uri="{FF2B5EF4-FFF2-40B4-BE49-F238E27FC236}">
-                <a16:creationId xmlns:a16="http://schemas.microsoft.com/office/drawing/2014/main" id="{ACF3F247-DDDB-4A63-9639-EDDEEC4D3AB7}"/>
+                <a16:creationId xmlns:a16="http://schemas.microsoft.com/office/drawing/2014/main" id="{EA07B244-ECC2-4742-8FD2-E9544EC87BA8}"/>
               </a:ext>
             </a:extLst>
           </p:cNvPr>
@@ -11599,7 +11835,7 @@
           <p:cNvPr id="2" name="">
             <a:extLst xmlns:a="http://schemas.openxmlformats.org/drawingml/2006/main">
               <a:ext uri="{FF2B5EF4-FFF2-40B4-BE49-F238E27FC236}">
-                <a16:creationId xmlns:a16="http://schemas.microsoft.com/office/drawing/2014/main" id="{1EAF55BF-7EA6-4047-B472-C6A1DADA6B5F}"/>
+                <a16:creationId xmlns:a16="http://schemas.microsoft.com/office/drawing/2014/main" id="{39D09F26-87CE-4838-B831-4B67AD413174}"/>
               </a:ext>
             </a:extLst>
           </p:cNvPr>
@@ -11656,7 +11892,7 @@
           <p:cNvPr id="3" name="">
             <a:extLst xmlns:a="http://schemas.openxmlformats.org/drawingml/2006/main">
               <a:ext uri="{FF2B5EF4-FFF2-40B4-BE49-F238E27FC236}">
-                <a16:creationId xmlns:a16="http://schemas.microsoft.com/office/drawing/2014/main" id="{B1FBEE24-FA83-4BA1-964C-0AE25197FF2C}"/>
+                <a16:creationId xmlns:a16="http://schemas.microsoft.com/office/drawing/2014/main" id="{E469B88D-C505-4C3B-9739-99CDF1894C9F}"/>
               </a:ext>
             </a:extLst>
           </p:cNvPr>
@@ -11713,7 +11949,7 @@
           <p:cNvPr id="4" name="">
             <a:extLst xmlns:a="http://schemas.openxmlformats.org/drawingml/2006/main">
               <a:ext uri="{FF2B5EF4-FFF2-40B4-BE49-F238E27FC236}">
-                <a16:creationId xmlns:a16="http://schemas.microsoft.com/office/drawing/2014/main" id="{8D332FF1-32EA-4908-9EE2-A070D8F53849}"/>
+                <a16:creationId xmlns:a16="http://schemas.microsoft.com/office/drawing/2014/main" id="{9EB2AD8C-7C4A-4FFC-A24F-8AAD59DD0096}"/>
               </a:ext>
             </a:extLst>
           </p:cNvPr>
@@ -11770,7 +12006,7 @@
           <p:cNvPr id="5" name="">
             <a:extLst xmlns:a="http://schemas.openxmlformats.org/drawingml/2006/main">
               <a:ext uri="{FF2B5EF4-FFF2-40B4-BE49-F238E27FC236}">
-                <a16:creationId xmlns:a16="http://schemas.microsoft.com/office/drawing/2014/main" id="{2275920B-539E-4C50-A5BA-84CA37604AD0}"/>
+                <a16:creationId xmlns:a16="http://schemas.microsoft.com/office/drawing/2014/main" id="{740BCD41-6E04-449A-895B-F758FE10C72E}"/>
               </a:ext>
             </a:extLst>
           </p:cNvPr>
@@ -11827,7 +12063,7 @@
           <p:cNvPr id="6" name="">
             <a:extLst xmlns:a="http://schemas.openxmlformats.org/drawingml/2006/main">
               <a:ext uri="{FF2B5EF4-FFF2-40B4-BE49-F238E27FC236}">
-                <a16:creationId xmlns:a16="http://schemas.microsoft.com/office/drawing/2014/main" id="{8824434F-31E0-409F-9896-9DA68549A478}"/>
+                <a16:creationId xmlns:a16="http://schemas.microsoft.com/office/drawing/2014/main" id="{F53A4421-11AD-46D2-BEB2-3B67E863076B}"/>
               </a:ext>
             </a:extLst>
           </p:cNvPr>
@@ -11884,7 +12120,7 @@
           <p:cNvPr id="7" name="">
             <a:extLst xmlns:a="http://schemas.openxmlformats.org/drawingml/2006/main">
               <a:ext uri="{FF2B5EF4-FFF2-40B4-BE49-F238E27FC236}">
-                <a16:creationId xmlns:a16="http://schemas.microsoft.com/office/drawing/2014/main" id="{72290381-9BE1-46B2-A1DD-25DB05E74F2B}"/>
+                <a16:creationId xmlns:a16="http://schemas.microsoft.com/office/drawing/2014/main" id="{52834EE7-7F42-4B1F-AA62-02B16836D51C}"/>
               </a:ext>
             </a:extLst>
           </p:cNvPr>
@@ -11941,7 +12177,7 @@
           <p:cNvPr id="8" name="">
             <a:extLst xmlns:a="http://schemas.openxmlformats.org/drawingml/2006/main">
               <a:ext uri="{FF2B5EF4-FFF2-40B4-BE49-F238E27FC236}">
-                <a16:creationId xmlns:a16="http://schemas.microsoft.com/office/drawing/2014/main" id="{C118132B-ED12-4E9B-A1CE-CFBC0DDE204A}"/>
+                <a16:creationId xmlns:a16="http://schemas.microsoft.com/office/drawing/2014/main" id="{160A957A-362A-4DB2-AD58-CE8E8E90BD93}"/>
               </a:ext>
             </a:extLst>
           </p:cNvPr>
@@ -11996,7 +12232,7 @@
     </p:spTree>
     <p:extLst>
       <p:ext uri="{BB962C8B-B14F-4D97-AF65-F5344CB8AC3E}">
-        <p14:creationId xmlns:p14="http://schemas.microsoft.com/office/powerpoint/2010/main" val="651066066"/>
+        <p14:creationId xmlns:p14="http://schemas.microsoft.com/office/powerpoint/2010/main" val="1995028778"/>
       </p:ext>
     </p:extLst>
   </p:cSld>
@@ -12027,7 +12263,7 @@
           <p:cNvPr id="7" name="">
             <a:extLst xmlns:a="http://schemas.openxmlformats.org/drawingml/2006/main">
               <a:ext uri="{FF2B5EF4-FFF2-40B4-BE49-F238E27FC236}">
-                <a16:creationId xmlns:a16="http://schemas.microsoft.com/office/drawing/2014/main" id="{9DFA0845-B9AB-466F-A60C-C3ECF0BC1E7A}"/>
+                <a16:creationId xmlns:a16="http://schemas.microsoft.com/office/drawing/2014/main" id="{4B17F7A7-96BE-486E-B487-E1FF3AF118FA}"/>
               </a:ext>
             </a:extLst>
           </p:cNvPr>
@@ -12355,7 +12591,7 @@
           <p:cNvPr id="3" name="">
             <a:extLst xmlns:a="http://schemas.openxmlformats.org/drawingml/2006/main">
               <a:ext uri="{FF2B5EF4-FFF2-40B4-BE49-F238E27FC236}">
-                <a16:creationId xmlns:a16="http://schemas.microsoft.com/office/drawing/2014/main" id="{8DA8AF90-2122-4581-81A2-1B1EFB4DA4F4}"/>
+                <a16:creationId xmlns:a16="http://schemas.microsoft.com/office/drawing/2014/main" id="{1F9E5C77-138A-4C81-8EA9-82D53CDA03E9}"/>
               </a:ext>
             </a:extLst>
           </p:cNvPr>
@@ -12412,7 +12648,7 @@
           <p:cNvPr id="4" name="">
             <a:extLst xmlns:a="http://schemas.openxmlformats.org/drawingml/2006/main">
               <a:ext uri="{FF2B5EF4-FFF2-40B4-BE49-F238E27FC236}">
-                <a16:creationId xmlns:a16="http://schemas.microsoft.com/office/drawing/2014/main" id="{E8FF203B-5B16-4444-A5AF-1A3DBCEB075F}"/>
+                <a16:creationId xmlns:a16="http://schemas.microsoft.com/office/drawing/2014/main" id="{8ECF002B-C1D3-4686-83F8-FC6FE11CFED4}"/>
               </a:ext>
             </a:extLst>
           </p:cNvPr>
@@ -12469,7 +12705,7 @@
           <p:cNvPr id="5" name="">
             <a:extLst xmlns:a="http://schemas.openxmlformats.org/drawingml/2006/main">
               <a:ext uri="{FF2B5EF4-FFF2-40B4-BE49-F238E27FC236}">
-                <a16:creationId xmlns:a16="http://schemas.microsoft.com/office/drawing/2014/main" id="{FD993375-1DEE-406C-9101-38C1C146BC32}"/>
+                <a16:creationId xmlns:a16="http://schemas.microsoft.com/office/drawing/2014/main" id="{FD840BD7-11B6-48F1-A5E1-AAA106BBE647}"/>
               </a:ext>
             </a:extLst>
           </p:cNvPr>
@@ -12526,7 +12762,7 @@
           <p:cNvPr id="6" name="">
             <a:extLst xmlns:a="http://schemas.openxmlformats.org/drawingml/2006/main">
               <a:ext uri="{FF2B5EF4-FFF2-40B4-BE49-F238E27FC236}">
-                <a16:creationId xmlns:a16="http://schemas.microsoft.com/office/drawing/2014/main" id="{DCDD88E9-CA57-4D1D-A44E-1D8E55F3D04C}"/>
+                <a16:creationId xmlns:a16="http://schemas.microsoft.com/office/drawing/2014/main" id="{1FD39FF5-7A01-4089-AC7E-3E7A5B02F90A}"/>
               </a:ext>
             </a:extLst>
           </p:cNvPr>
@@ -12581,7 +12817,7 @@
     </p:spTree>
     <p:extLst>
       <p:ext uri="{BB962C8B-B14F-4D97-AF65-F5344CB8AC3E}">
-        <p14:creationId xmlns:p14="http://schemas.microsoft.com/office/powerpoint/2010/main" val="133682894"/>
+        <p14:creationId xmlns:p14="http://schemas.microsoft.com/office/powerpoint/2010/main" val="1436861644"/>
       </p:ext>
     </p:extLst>
   </p:cSld>
@@ -12612,7 +12848,7 @@
           <p:cNvPr id="7" name="">
             <a:extLst xmlns:a="http://schemas.openxmlformats.org/drawingml/2006/main">
               <a:ext uri="{FF2B5EF4-FFF2-40B4-BE49-F238E27FC236}">
-                <a16:creationId xmlns:a16="http://schemas.microsoft.com/office/drawing/2014/main" id="{E9C867C3-CAE9-44F3-A7AD-449818DF619C}"/>
+                <a16:creationId xmlns:a16="http://schemas.microsoft.com/office/drawing/2014/main" id="{4BAC56D0-85AF-4605-B151-8BFE9C6A7CB5}"/>
               </a:ext>
             </a:extLst>
           </p:cNvPr>
@@ -12988,7 +13224,7 @@
           <p:cNvPr id="3" name="">
             <a:extLst xmlns:a="http://schemas.openxmlformats.org/drawingml/2006/main">
               <a:ext uri="{FF2B5EF4-FFF2-40B4-BE49-F238E27FC236}">
-                <a16:creationId xmlns:a16="http://schemas.microsoft.com/office/drawing/2014/main" id="{D66B9DFF-812C-4441-BD02-8A27C3642193}"/>
+                <a16:creationId xmlns:a16="http://schemas.microsoft.com/office/drawing/2014/main" id="{62F46BED-4057-49C6-A22E-33FAF3C3C844}"/>
               </a:ext>
             </a:extLst>
           </p:cNvPr>
@@ -13045,7 +13281,7 @@
           <p:cNvPr id="4" name="">
             <a:extLst xmlns:a="http://schemas.openxmlformats.org/drawingml/2006/main">
               <a:ext uri="{FF2B5EF4-FFF2-40B4-BE49-F238E27FC236}">
-                <a16:creationId xmlns:a16="http://schemas.microsoft.com/office/drawing/2014/main" id="{72381DAA-3FC1-4243-A690-7185363BC4C1}"/>
+                <a16:creationId xmlns:a16="http://schemas.microsoft.com/office/drawing/2014/main" id="{800E3F99-D052-46FD-B83A-2951350D35A6}"/>
               </a:ext>
             </a:extLst>
           </p:cNvPr>
@@ -13102,7 +13338,7 @@
           <p:cNvPr id="5" name="">
             <a:extLst xmlns:a="http://schemas.openxmlformats.org/drawingml/2006/main">
               <a:ext uri="{FF2B5EF4-FFF2-40B4-BE49-F238E27FC236}">
-                <a16:creationId xmlns:a16="http://schemas.microsoft.com/office/drawing/2014/main" id="{21E3159F-18EC-47FD-A81D-D9DE950C450C}"/>
+                <a16:creationId xmlns:a16="http://schemas.microsoft.com/office/drawing/2014/main" id="{6F6E02DA-1E6E-4451-B447-4634705E7998}"/>
               </a:ext>
             </a:extLst>
           </p:cNvPr>
@@ -13159,7 +13395,7 @@
           <p:cNvPr id="6" name="">
             <a:extLst xmlns:a="http://schemas.openxmlformats.org/drawingml/2006/main">
               <a:ext uri="{FF2B5EF4-FFF2-40B4-BE49-F238E27FC236}">
-                <a16:creationId xmlns:a16="http://schemas.microsoft.com/office/drawing/2014/main" id="{B2A0F17C-6C97-415C-86FF-494C26651D5C}"/>
+                <a16:creationId xmlns:a16="http://schemas.microsoft.com/office/drawing/2014/main" id="{336CF50D-C13C-414E-BFA2-65A67CEC824A}"/>
               </a:ext>
             </a:extLst>
           </p:cNvPr>
@@ -13214,7 +13450,7 @@
     </p:spTree>
     <p:extLst>
       <p:ext uri="{BB962C8B-B14F-4D97-AF65-F5344CB8AC3E}">
-        <p14:creationId xmlns:p14="http://schemas.microsoft.com/office/powerpoint/2010/main" val="1176373197"/>
+        <p14:creationId xmlns:p14="http://schemas.microsoft.com/office/powerpoint/2010/main" val="745499933"/>
       </p:ext>
     </p:extLst>
   </p:cSld>
@@ -13245,7 +13481,7 @@
           <p:cNvPr id="5" name="">
             <a:extLst xmlns:a="http://schemas.openxmlformats.org/drawingml/2006/main">
               <a:ext uri="{FF2B5EF4-FFF2-40B4-BE49-F238E27FC236}">
-                <a16:creationId xmlns:a16="http://schemas.microsoft.com/office/drawing/2014/main" id="{70147C84-E8BE-4F90-ABA3-3E615B9F43BD}"/>
+                <a16:creationId xmlns:a16="http://schemas.microsoft.com/office/drawing/2014/main" id="{D56FC8CC-4DC3-4F00-8D59-CC422B511833}"/>
               </a:ext>
             </a:extLst>
           </p:cNvPr>
@@ -13524,7 +13760,7 @@
           <p:cNvPr id="3" name="">
             <a:extLst xmlns:a="http://schemas.openxmlformats.org/drawingml/2006/main">
               <a:ext uri="{FF2B5EF4-FFF2-40B4-BE49-F238E27FC236}">
-                <a16:creationId xmlns:a16="http://schemas.microsoft.com/office/drawing/2014/main" id="{ED35CB17-183A-44CB-8C4F-0916418654CB}"/>
+                <a16:creationId xmlns:a16="http://schemas.microsoft.com/office/drawing/2014/main" id="{EBEE81B8-427A-47CE-A8F1-4E749D9C9939}"/>
               </a:ext>
             </a:extLst>
           </p:cNvPr>
@@ -13581,7 +13817,7 @@
           <p:cNvPr id="4" name="">
             <a:extLst xmlns:a="http://schemas.openxmlformats.org/drawingml/2006/main">
               <a:ext uri="{FF2B5EF4-FFF2-40B4-BE49-F238E27FC236}">
-                <a16:creationId xmlns:a16="http://schemas.microsoft.com/office/drawing/2014/main" id="{4C0288AB-7B5D-4341-A476-5C43621F413F}"/>
+                <a16:creationId xmlns:a16="http://schemas.microsoft.com/office/drawing/2014/main" id="{56F4AAD6-E5FA-416F-8899-0939D65A4B8B}"/>
               </a:ext>
             </a:extLst>
           </p:cNvPr>
@@ -13636,7 +13872,7 @@
     </p:spTree>
     <p:extLst>
       <p:ext uri="{BB962C8B-B14F-4D97-AF65-F5344CB8AC3E}">
-        <p14:creationId xmlns:p14="http://schemas.microsoft.com/office/powerpoint/2010/main" val="551304386"/>
+        <p14:creationId xmlns:p14="http://schemas.microsoft.com/office/powerpoint/2010/main" val="1752884258"/>
       </p:ext>
     </p:extLst>
   </p:cSld>
@@ -13667,7 +13903,7 @@
           <p:cNvPr id="5" name="">
             <a:extLst xmlns:a="http://schemas.openxmlformats.org/drawingml/2006/main">
               <a:ext uri="{FF2B5EF4-FFF2-40B4-BE49-F238E27FC236}">
-                <a16:creationId xmlns:a16="http://schemas.microsoft.com/office/drawing/2014/main" id="{78602848-A596-4E11-8F04-4131E733DD00}"/>
+                <a16:creationId xmlns:a16="http://schemas.microsoft.com/office/drawing/2014/main" id="{76C68A8D-17EE-47C0-8C79-3FC2819037D1}"/>
               </a:ext>
             </a:extLst>
           </p:cNvPr>
@@ -13946,7 +14182,7 @@
           <p:cNvPr id="3" name="">
             <a:extLst xmlns:a="http://schemas.openxmlformats.org/drawingml/2006/main">
               <a:ext uri="{FF2B5EF4-FFF2-40B4-BE49-F238E27FC236}">
-                <a16:creationId xmlns:a16="http://schemas.microsoft.com/office/drawing/2014/main" id="{3FC928F5-4CAD-4168-B8AA-8C6335C106F3}"/>
+                <a16:creationId xmlns:a16="http://schemas.microsoft.com/office/drawing/2014/main" id="{6C86F1FD-B867-4CA9-AE3F-FB52273F41BE}"/>
               </a:ext>
             </a:extLst>
           </p:cNvPr>
@@ -14003,7 +14239,7 @@
           <p:cNvPr id="4" name="">
             <a:extLst xmlns:a="http://schemas.openxmlformats.org/drawingml/2006/main">
               <a:ext uri="{FF2B5EF4-FFF2-40B4-BE49-F238E27FC236}">
-                <a16:creationId xmlns:a16="http://schemas.microsoft.com/office/drawing/2014/main" id="{E030C0DB-3174-4373-8640-0B6F370150B9}"/>
+                <a16:creationId xmlns:a16="http://schemas.microsoft.com/office/drawing/2014/main" id="{2CF59B1D-780F-4E78-BEB0-7AC134A91CFA}"/>
               </a:ext>
             </a:extLst>
           </p:cNvPr>
@@ -14058,7 +14294,7 @@
     </p:spTree>
     <p:extLst>
       <p:ext uri="{BB962C8B-B14F-4D97-AF65-F5344CB8AC3E}">
-        <p14:creationId xmlns:p14="http://schemas.microsoft.com/office/powerpoint/2010/main" val="248176847"/>
+        <p14:creationId xmlns:p14="http://schemas.microsoft.com/office/powerpoint/2010/main" val="130690183"/>
       </p:ext>
     </p:extLst>
   </p:cSld>
@@ -14089,7 +14325,7 @@
           <p:cNvPr id="5" name="">
             <a:extLst xmlns:a="http://schemas.openxmlformats.org/drawingml/2006/main">
               <a:ext uri="{FF2B5EF4-FFF2-40B4-BE49-F238E27FC236}">
-                <a16:creationId xmlns:a16="http://schemas.microsoft.com/office/drawing/2014/main" id="{10D3A628-046F-41A7-8C94-C93C69D555B9}"/>
+                <a16:creationId xmlns:a16="http://schemas.microsoft.com/office/drawing/2014/main" id="{535DA540-EAAF-45B3-BD31-F5BACDD6CCF6}"/>
               </a:ext>
             </a:extLst>
           </p:cNvPr>
@@ -14368,7 +14604,7 @@
           <p:cNvPr id="3" name="">
             <a:extLst xmlns:a="http://schemas.openxmlformats.org/drawingml/2006/main">
               <a:ext uri="{FF2B5EF4-FFF2-40B4-BE49-F238E27FC236}">
-                <a16:creationId xmlns:a16="http://schemas.microsoft.com/office/drawing/2014/main" id="{BF7F8B3F-33ED-4774-84FD-0A6FB4E851E5}"/>
+                <a16:creationId xmlns:a16="http://schemas.microsoft.com/office/drawing/2014/main" id="{FACFFA5C-F5F4-44EA-A02E-E493AF4A7624}"/>
               </a:ext>
             </a:extLst>
           </p:cNvPr>
@@ -14425,7 +14661,7 @@
           <p:cNvPr id="4" name="">
             <a:extLst xmlns:a="http://schemas.openxmlformats.org/drawingml/2006/main">
               <a:ext uri="{FF2B5EF4-FFF2-40B4-BE49-F238E27FC236}">
-                <a16:creationId xmlns:a16="http://schemas.microsoft.com/office/drawing/2014/main" id="{3AD134AD-E22F-45FB-A1CC-48D6FAE6BC8A}"/>
+                <a16:creationId xmlns:a16="http://schemas.microsoft.com/office/drawing/2014/main" id="{0ACC60CE-9F92-4CAD-B365-2DF98E95EDC6}"/>
               </a:ext>
             </a:extLst>
           </p:cNvPr>
@@ -14480,7 +14716,7 @@
     </p:spTree>
     <p:extLst>
       <p:ext uri="{BB962C8B-B14F-4D97-AF65-F5344CB8AC3E}">
-        <p14:creationId xmlns:p14="http://schemas.microsoft.com/office/powerpoint/2010/main" val="854144057"/>
+        <p14:creationId xmlns:p14="http://schemas.microsoft.com/office/powerpoint/2010/main" val="1769665292"/>
       </p:ext>
     </p:extLst>
   </p:cSld>
@@ -14511,7 +14747,7 @@
           <p:cNvPr id="5" name="">
             <a:extLst xmlns:a="http://schemas.openxmlformats.org/drawingml/2006/main">
               <a:ext uri="{FF2B5EF4-FFF2-40B4-BE49-F238E27FC236}">
-                <a16:creationId xmlns:a16="http://schemas.microsoft.com/office/drawing/2014/main" id="{6163760C-136E-4625-B8E9-AAB844049AD1}"/>
+                <a16:creationId xmlns:a16="http://schemas.microsoft.com/office/drawing/2014/main" id="{41DA46E6-1054-4F8C-B131-690FDD70447F}"/>
               </a:ext>
             </a:extLst>
           </p:cNvPr>
@@ -14790,7 +15026,7 @@
           <p:cNvPr id="3" name="">
             <a:extLst xmlns:a="http://schemas.openxmlformats.org/drawingml/2006/main">
               <a:ext uri="{FF2B5EF4-FFF2-40B4-BE49-F238E27FC236}">
-                <a16:creationId xmlns:a16="http://schemas.microsoft.com/office/drawing/2014/main" id="{FFBD9758-D453-42C4-BCE5-9814F1418365}"/>
+                <a16:creationId xmlns:a16="http://schemas.microsoft.com/office/drawing/2014/main" id="{9F1D2AFC-154E-4692-AC27-090ED6A5CB2E}"/>
               </a:ext>
             </a:extLst>
           </p:cNvPr>
@@ -14847,7 +15083,7 @@
           <p:cNvPr id="4" name="">
             <a:extLst xmlns:a="http://schemas.openxmlformats.org/drawingml/2006/main">
               <a:ext uri="{FF2B5EF4-FFF2-40B4-BE49-F238E27FC236}">
-                <a16:creationId xmlns:a16="http://schemas.microsoft.com/office/drawing/2014/main" id="{997A0FCF-7BA7-4E3C-8E6F-CA6D601AD477}"/>
+                <a16:creationId xmlns:a16="http://schemas.microsoft.com/office/drawing/2014/main" id="{3293837F-D9C7-406F-9BBC-7B4C3145D833}"/>
               </a:ext>
             </a:extLst>
           </p:cNvPr>
@@ -14902,7 +15138,7 @@
     </p:spTree>
     <p:extLst>
       <p:ext uri="{BB962C8B-B14F-4D97-AF65-F5344CB8AC3E}">
-        <p14:creationId xmlns:p14="http://schemas.microsoft.com/office/powerpoint/2010/main" val="1491986120"/>
+        <p14:creationId xmlns:p14="http://schemas.microsoft.com/office/powerpoint/2010/main" val="1461432178"/>
       </p:ext>
     </p:extLst>
   </p:cSld>
@@ -14933,7 +15169,7 @@
           <p:cNvPr id="5" name="">
             <a:extLst xmlns:a="http://schemas.openxmlformats.org/drawingml/2006/main">
               <a:ext uri="{FF2B5EF4-FFF2-40B4-BE49-F238E27FC236}">
-                <a16:creationId xmlns:a16="http://schemas.microsoft.com/office/drawing/2014/main" id="{DB18AF3B-E4F6-4DB0-813E-24F758FD0DAE}"/>
+                <a16:creationId xmlns:a16="http://schemas.microsoft.com/office/drawing/2014/main" id="{551C15A7-6BB4-4A91-A9C7-EF2EE2699B9F}"/>
               </a:ext>
             </a:extLst>
           </p:cNvPr>
@@ -15212,7 +15448,7 @@
           <p:cNvPr id="3" name="">
             <a:extLst xmlns:a="http://schemas.openxmlformats.org/drawingml/2006/main">
               <a:ext uri="{FF2B5EF4-FFF2-40B4-BE49-F238E27FC236}">
-                <a16:creationId xmlns:a16="http://schemas.microsoft.com/office/drawing/2014/main" id="{B0A10C20-DEF1-4752-B2CB-68BB443D6EF2}"/>
+                <a16:creationId xmlns:a16="http://schemas.microsoft.com/office/drawing/2014/main" id="{428C2DE4-64FA-4F02-8A9B-31E569658425}"/>
               </a:ext>
             </a:extLst>
           </p:cNvPr>
@@ -15269,7 +15505,7 @@
           <p:cNvPr id="4" name="">
             <a:extLst xmlns:a="http://schemas.openxmlformats.org/drawingml/2006/main">
               <a:ext uri="{FF2B5EF4-FFF2-40B4-BE49-F238E27FC236}">
-                <a16:creationId xmlns:a16="http://schemas.microsoft.com/office/drawing/2014/main" id="{A0ABB6F2-1ECC-460D-A9C7-11892A563B7F}"/>
+                <a16:creationId xmlns:a16="http://schemas.microsoft.com/office/drawing/2014/main" id="{E57853C5-EF00-4095-BF09-1AD90CA4BA70}"/>
               </a:ext>
             </a:extLst>
           </p:cNvPr>
@@ -15324,7 +15560,7 @@
     </p:spTree>
     <p:extLst>
       <p:ext uri="{BB962C8B-B14F-4D97-AF65-F5344CB8AC3E}">
-        <p14:creationId xmlns:p14="http://schemas.microsoft.com/office/powerpoint/2010/main" val="2127753512"/>
+        <p14:creationId xmlns:p14="http://schemas.microsoft.com/office/powerpoint/2010/main" val="1979001750"/>
       </p:ext>
     </p:extLst>
   </p:cSld>
@@ -15355,7 +15591,7 @@
           <p:cNvPr id="5" name="">
             <a:extLst xmlns:a="http://schemas.openxmlformats.org/drawingml/2006/main">
               <a:ext uri="{FF2B5EF4-FFF2-40B4-BE49-F238E27FC236}">
-                <a16:creationId xmlns:a16="http://schemas.microsoft.com/office/drawing/2014/main" id="{800066AB-D29D-4FBE-B5A4-1E507D26BD40}"/>
+                <a16:creationId xmlns:a16="http://schemas.microsoft.com/office/drawing/2014/main" id="{EBCA172C-BCB6-46CA-A21B-75C3E3567844}"/>
               </a:ext>
             </a:extLst>
           </p:cNvPr>
@@ -15584,7 +15820,7 @@
           <p:cNvPr id="3" name="">
             <a:extLst xmlns:a="http://schemas.openxmlformats.org/drawingml/2006/main">
               <a:ext uri="{FF2B5EF4-FFF2-40B4-BE49-F238E27FC236}">
-                <a16:creationId xmlns:a16="http://schemas.microsoft.com/office/drawing/2014/main" id="{046D95A8-137B-411C-9218-5ADAA3D37404}"/>
+                <a16:creationId xmlns:a16="http://schemas.microsoft.com/office/drawing/2014/main" id="{3FE24925-C62D-42A6-89E5-4B1A1D412DBE}"/>
               </a:ext>
             </a:extLst>
           </p:cNvPr>
@@ -15641,7 +15877,7 @@
           <p:cNvPr id="4" name="">
             <a:extLst xmlns:a="http://schemas.openxmlformats.org/drawingml/2006/main">
               <a:ext uri="{FF2B5EF4-FFF2-40B4-BE49-F238E27FC236}">
-                <a16:creationId xmlns:a16="http://schemas.microsoft.com/office/drawing/2014/main" id="{2FAF6FEA-F1F6-434D-9592-71E8CACC4949}"/>
+                <a16:creationId xmlns:a16="http://schemas.microsoft.com/office/drawing/2014/main" id="{F8F36E5B-EFEF-4AC2-B359-B54814C80515}"/>
               </a:ext>
             </a:extLst>
           </p:cNvPr>
@@ -15696,7 +15932,7 @@
     </p:spTree>
     <p:extLst>
       <p:ext uri="{BB962C8B-B14F-4D97-AF65-F5344CB8AC3E}">
-        <p14:creationId xmlns:p14="http://schemas.microsoft.com/office/powerpoint/2010/main" val="1009031219"/>
+        <p14:creationId xmlns:p14="http://schemas.microsoft.com/office/powerpoint/2010/main" val="779074584"/>
       </p:ext>
     </p:extLst>
   </p:cSld>
@@ -15727,7 +15963,7 @@
           <p:cNvPr id="6" name="">
             <a:extLst xmlns:a="http://schemas.openxmlformats.org/drawingml/2006/main">
               <a:ext uri="{FF2B5EF4-FFF2-40B4-BE49-F238E27FC236}">
-                <a16:creationId xmlns:a16="http://schemas.microsoft.com/office/drawing/2014/main" id="{073B2E49-2464-45BA-8317-ACCAAE499BFE}"/>
+                <a16:creationId xmlns:a16="http://schemas.microsoft.com/office/drawing/2014/main" id="{1502D6DE-CC98-428C-80A9-B5CF17285844}"/>
               </a:ext>
             </a:extLst>
           </p:cNvPr>
@@ -15774,7 +16010,7 @@
                 <a:ea typeface="Arial"/>
                 <a:cs typeface="Arial"/>
               </a:rPr>
-              <a:t>Development experiment: new urgent misses</a:t>
+              <a:t>Development: urgent-reference disagreements</a:t>
             </a:r>
           </a:p>
         </p:txBody>
@@ -16035,7 +16271,7 @@
                           <a:ea typeface="Arial"/>
                           <a:cs typeface="Arial"/>
                         </a:rPr>
-                        <a:t>Known: required urgent action missed</a:t>
+                        <a:t>Known: urgent-reference cases assigned async</a:t>
                       </a:r>
                     </a:p>
                   </a:txBody>
@@ -16331,7 +16567,7 @@
                           <a:ea typeface="Arial"/>
                           <a:cs typeface="Arial"/>
                         </a:rPr>
-                        <a:t>Authored challenge: urgent action missed</a:t>
+                        <a:t>Challenge: urgent-reference cases not urgent</a:t>
                       </a:r>
                     </a:p>
                   </a:txBody>
@@ -16399,7 +16635,7 @@
           <p:cNvPr id="3" name="">
             <a:extLst xmlns:a="http://schemas.openxmlformats.org/drawingml/2006/main">
               <a:ext uri="{FF2B5EF4-FFF2-40B4-BE49-F238E27FC236}">
-                <a16:creationId xmlns:a16="http://schemas.microsoft.com/office/drawing/2014/main" id="{6639EC88-DFA0-459A-A673-D526DB5581A4}"/>
+                <a16:creationId xmlns:a16="http://schemas.microsoft.com/office/drawing/2014/main" id="{7201CF68-F8EF-40CF-A0C7-BEBBCB7C56C9}"/>
               </a:ext>
             </a:extLst>
           </p:cNvPr>
@@ -16446,7 +16682,7 @@
                 <a:ea typeface="Arial"/>
                 <a:cs typeface="Arial"/>
               </a:rPr>
-              <a:t>Candidate not promoted. Three new urgent routing misses require review.</a:t>
+              <a:t>Async does not imply delayed care. Clinical timing was not measured.</a:t>
             </a:r>
           </a:p>
         </p:txBody>
@@ -16456,7 +16692,7 @@
           <p:cNvPr id="4" name="">
             <a:extLst xmlns:a="http://schemas.openxmlformats.org/drawingml/2006/main">
               <a:ext uri="{FF2B5EF4-FFF2-40B4-BE49-F238E27FC236}">
-                <a16:creationId xmlns:a16="http://schemas.microsoft.com/office/drawing/2014/main" id="{891CB177-EADF-4F64-ACC3-443F553A8D7A}"/>
+                <a16:creationId xmlns:a16="http://schemas.microsoft.com/office/drawing/2014/main" id="{4ADABC3D-BDBB-41C0-9F82-B9E5042EF32E}"/>
               </a:ext>
             </a:extLst>
           </p:cNvPr>
@@ -16503,7 +16739,7 @@
                 <a:ea typeface="Arial"/>
                 <a:cs typeface="Arial"/>
               </a:rPr>
-              <a:t>Known set: post-output physician reference. Challenge: AI-authored policy checks, no physician approval. GUI unchanged.</a:t>
+              <a:t>Known set: unchanged physician reference. Challenge: AI-authored checks without physician approval. Candidate not promoted.</a:t>
             </a:r>
           </a:p>
         </p:txBody>
@@ -16513,7 +16749,7 @@
           <p:cNvPr id="5" name="">
             <a:extLst xmlns:a="http://schemas.openxmlformats.org/drawingml/2006/main">
               <a:ext uri="{FF2B5EF4-FFF2-40B4-BE49-F238E27FC236}">
-                <a16:creationId xmlns:a16="http://schemas.microsoft.com/office/drawing/2014/main" id="{B35010EE-7355-4BE3-8A40-8ADA42631472}"/>
+                <a16:creationId xmlns:a16="http://schemas.microsoft.com/office/drawing/2014/main" id="{4798A26A-7EF8-44C9-BF70-81188D925F9B}"/>
               </a:ext>
             </a:extLst>
           </p:cNvPr>
@@ -16568,7 +16804,7 @@
     </p:spTree>
     <p:extLst>
       <p:ext uri="{BB962C8B-B14F-4D97-AF65-F5344CB8AC3E}">
-        <p14:creationId xmlns:p14="http://schemas.microsoft.com/office/powerpoint/2010/main" val="1333111578"/>
+        <p14:creationId xmlns:p14="http://schemas.microsoft.com/office/powerpoint/2010/main" val="236379818"/>
       </p:ext>
     </p:extLst>
   </p:cSld>
@@ -16599,7 +16835,7 @@
           <p:cNvPr id="10" name="">
             <a:extLst xmlns:a="http://schemas.openxmlformats.org/drawingml/2006/main">
               <a:ext uri="{FF2B5EF4-FFF2-40B4-BE49-F238E27FC236}">
-                <a16:creationId xmlns:a16="http://schemas.microsoft.com/office/drawing/2014/main" id="{6684928C-032B-425F-8334-CBA8FD3CCD0F}"/>
+                <a16:creationId xmlns:a16="http://schemas.microsoft.com/office/drawing/2014/main" id="{168A7245-EF6B-4775-9521-EAF2F2068C29}"/>
               </a:ext>
             </a:extLst>
           </p:cNvPr>
@@ -16656,7 +16892,7 @@
           <p:cNvPr id="2" name="">
             <a:extLst xmlns:a="http://schemas.openxmlformats.org/drawingml/2006/main">
               <a:ext uri="{FF2B5EF4-FFF2-40B4-BE49-F238E27FC236}">
-                <a16:creationId xmlns:a16="http://schemas.microsoft.com/office/drawing/2014/main" id="{A2F83472-C267-4091-9E3E-9957683AD764}"/>
+                <a16:creationId xmlns:a16="http://schemas.microsoft.com/office/drawing/2014/main" id="{CBE95E4C-CD59-4C3C-9896-75A10474EC1D}"/>
               </a:ext>
             </a:extLst>
           </p:cNvPr>
@@ -16713,7 +16949,7 @@
           <p:cNvPr id="3" name="">
             <a:extLst xmlns:a="http://schemas.openxmlformats.org/drawingml/2006/main">
               <a:ext uri="{FF2B5EF4-FFF2-40B4-BE49-F238E27FC236}">
-                <a16:creationId xmlns:a16="http://schemas.microsoft.com/office/drawing/2014/main" id="{EAB90AA2-CD7A-41AD-A619-A399C5647D8B}"/>
+                <a16:creationId xmlns:a16="http://schemas.microsoft.com/office/drawing/2014/main" id="{061A2D2F-E8F5-4441-9BCA-72D221C27366}"/>
               </a:ext>
             </a:extLst>
           </p:cNvPr>
@@ -16770,7 +17006,7 @@
           <p:cNvPr id="4" name="">
             <a:extLst xmlns:a="http://schemas.openxmlformats.org/drawingml/2006/main">
               <a:ext uri="{FF2B5EF4-FFF2-40B4-BE49-F238E27FC236}">
-                <a16:creationId xmlns:a16="http://schemas.microsoft.com/office/drawing/2014/main" id="{F93D5451-2B78-4B36-ACA6-3C4C4E2DFE8D}"/>
+                <a16:creationId xmlns:a16="http://schemas.microsoft.com/office/drawing/2014/main" id="{986A513A-4F56-497B-8928-99AB9A743BDE}"/>
               </a:ext>
             </a:extLst>
           </p:cNvPr>
@@ -16827,7 +17063,7 @@
           <p:cNvPr id="5" name="">
             <a:extLst xmlns:a="http://schemas.openxmlformats.org/drawingml/2006/main">
               <a:ext uri="{FF2B5EF4-FFF2-40B4-BE49-F238E27FC236}">
-                <a16:creationId xmlns:a16="http://schemas.microsoft.com/office/drawing/2014/main" id="{27AFB6CC-0CB3-4DB3-8618-F9DB18B023B4}"/>
+                <a16:creationId xmlns:a16="http://schemas.microsoft.com/office/drawing/2014/main" id="{ECEDC388-200C-45FF-8CBA-5ADE0D41D04E}"/>
               </a:ext>
             </a:extLst>
           </p:cNvPr>
@@ -16884,7 +17120,7 @@
           <p:cNvPr id="6" name="">
             <a:extLst xmlns:a="http://schemas.openxmlformats.org/drawingml/2006/main">
               <a:ext uri="{FF2B5EF4-FFF2-40B4-BE49-F238E27FC236}">
-                <a16:creationId xmlns:a16="http://schemas.microsoft.com/office/drawing/2014/main" id="{854293D3-8AA4-4FFA-88F8-B19954106153}"/>
+                <a16:creationId xmlns:a16="http://schemas.microsoft.com/office/drawing/2014/main" id="{1BF92A20-71C6-44C0-9C3F-427F51486CFD}"/>
               </a:ext>
             </a:extLst>
           </p:cNvPr>
@@ -16941,7 +17177,7 @@
           <p:cNvPr id="7" name="">
             <a:extLst xmlns:a="http://schemas.openxmlformats.org/drawingml/2006/main">
               <a:ext uri="{FF2B5EF4-FFF2-40B4-BE49-F238E27FC236}">
-                <a16:creationId xmlns:a16="http://schemas.microsoft.com/office/drawing/2014/main" id="{0181DCCE-80C6-40F5-9450-31DA6D80BB9B}"/>
+                <a16:creationId xmlns:a16="http://schemas.microsoft.com/office/drawing/2014/main" id="{CBE50E17-AA84-4292-8D14-845209FF02C7}"/>
               </a:ext>
             </a:extLst>
           </p:cNvPr>
@@ -16998,7 +17234,7 @@
           <p:cNvPr id="8" name="">
             <a:extLst xmlns:a="http://schemas.openxmlformats.org/drawingml/2006/main">
               <a:ext uri="{FF2B5EF4-FFF2-40B4-BE49-F238E27FC236}">
-                <a16:creationId xmlns:a16="http://schemas.microsoft.com/office/drawing/2014/main" id="{22E14226-6FC7-4CBF-80D5-DC5490E274AF}"/>
+                <a16:creationId xmlns:a16="http://schemas.microsoft.com/office/drawing/2014/main" id="{C0D9183F-66CF-4E36-A5F1-A381273A178C}"/>
               </a:ext>
             </a:extLst>
           </p:cNvPr>
@@ -17055,7 +17291,7 @@
           <p:cNvPr id="9" name="">
             <a:extLst xmlns:a="http://schemas.openxmlformats.org/drawingml/2006/main">
               <a:ext uri="{FF2B5EF4-FFF2-40B4-BE49-F238E27FC236}">
-                <a16:creationId xmlns:a16="http://schemas.microsoft.com/office/drawing/2014/main" id="{9D1CAE06-D8B9-4F46-8608-9D5E5F942607}"/>
+                <a16:creationId xmlns:a16="http://schemas.microsoft.com/office/drawing/2014/main" id="{07F6EA3E-1135-4B41-AE4C-197182511762}"/>
               </a:ext>
             </a:extLst>
           </p:cNvPr>
@@ -17110,7 +17346,7 @@
     </p:spTree>
     <p:extLst>
       <p:ext uri="{BB962C8B-B14F-4D97-AF65-F5344CB8AC3E}">
-        <p14:creationId xmlns:p14="http://schemas.microsoft.com/office/powerpoint/2010/main" val="1267219906"/>
+        <p14:creationId xmlns:p14="http://schemas.microsoft.com/office/powerpoint/2010/main" val="652594943"/>
       </p:ext>
     </p:extLst>
   </p:cSld>
@@ -17141,7 +17377,7 @@
           <p:cNvPr id="5" name="">
             <a:extLst xmlns:a="http://schemas.openxmlformats.org/drawingml/2006/main">
               <a:ext uri="{FF2B5EF4-FFF2-40B4-BE49-F238E27FC236}">
-                <a16:creationId xmlns:a16="http://schemas.microsoft.com/office/drawing/2014/main" id="{ABFD1881-AD6C-4D73-B6F4-48F640A06A62}"/>
+                <a16:creationId xmlns:a16="http://schemas.microsoft.com/office/drawing/2014/main" id="{694D974F-F2B5-46C8-9145-1C4B1A06FC27}"/>
               </a:ext>
             </a:extLst>
           </p:cNvPr>
@@ -17313,7 +17549,7 @@
                           <a:ea typeface="Arial"/>
                           <a:cs typeface="Arial"/>
                         </a:rPr>
-                        <a:t>Approve self-care eligibility, care timing and handling of clinically material unknowns.</a:t>
+                        <a:t>Separate next contact, required care setting, clinical deadline and service capability before approving routing.</a:t>
                       </a:r>
                     </a:p>
                   </a:txBody>
@@ -17522,7 +17758,7 @@
           <p:cNvPr id="3" name="">
             <a:extLst xmlns:a="http://schemas.openxmlformats.org/drawingml/2006/main">
               <a:ext uri="{FF2B5EF4-FFF2-40B4-BE49-F238E27FC236}">
-                <a16:creationId xmlns:a16="http://schemas.microsoft.com/office/drawing/2014/main" id="{F32B60F4-5AC2-462B-8D8C-16C5820E6443}"/>
+                <a16:creationId xmlns:a16="http://schemas.microsoft.com/office/drawing/2014/main" id="{EC8002B9-82EF-4EA1-91C6-5BA059D0B0E2}"/>
               </a:ext>
             </a:extLst>
           </p:cNvPr>
@@ -17579,7 +17815,7 @@
           <p:cNvPr id="4" name="">
             <a:extLst xmlns:a="http://schemas.openxmlformats.org/drawingml/2006/main">
               <a:ext uri="{FF2B5EF4-FFF2-40B4-BE49-F238E27FC236}">
-                <a16:creationId xmlns:a16="http://schemas.microsoft.com/office/drawing/2014/main" id="{30AABD4A-3F38-4583-9095-76231BF412D3}"/>
+                <a16:creationId xmlns:a16="http://schemas.microsoft.com/office/drawing/2014/main" id="{9CE53D2F-AE2A-4531-9A33-748EFF1E6F71}"/>
               </a:ext>
             </a:extLst>
           </p:cNvPr>
@@ -17634,7 +17870,7 @@
     </p:spTree>
     <p:extLst>
       <p:ext uri="{BB962C8B-B14F-4D97-AF65-F5344CB8AC3E}">
-        <p14:creationId xmlns:p14="http://schemas.microsoft.com/office/powerpoint/2010/main" val="1452197195"/>
+        <p14:creationId xmlns:p14="http://schemas.microsoft.com/office/powerpoint/2010/main" val="315172709"/>
       </p:ext>
     </p:extLst>
   </p:cSld>
@@ -17665,7 +17901,7 @@
           <p:cNvPr id="5" name="">
             <a:extLst xmlns:a="http://schemas.openxmlformats.org/drawingml/2006/main">
               <a:ext uri="{FF2B5EF4-FFF2-40B4-BE49-F238E27FC236}">
-                <a16:creationId xmlns:a16="http://schemas.microsoft.com/office/drawing/2014/main" id="{82CB2349-799A-4C55-AEE6-A07FA7A5A36C}"/>
+                <a16:creationId xmlns:a16="http://schemas.microsoft.com/office/drawing/2014/main" id="{ACCDD65E-8145-482E-8291-FF1A7EFABF8F}"/>
               </a:ext>
             </a:extLst>
           </p:cNvPr>
@@ -17712,7 +17948,7 @@
                 <a:ea typeface="Arial"/>
                 <a:cs typeface="Arial"/>
               </a:rPr>
-              <a:t>Case text: new urgent-routing misses</a:t>
+              <a:t>Case text: care-setting disagreements</a:t>
             </a:r>
           </a:p>
         </p:txBody>
@@ -17944,7 +18180,7 @@
           <p:cNvPr id="3" name="">
             <a:extLst xmlns:a="http://schemas.openxmlformats.org/drawingml/2006/main">
               <a:ext uri="{FF2B5EF4-FFF2-40B4-BE49-F238E27FC236}">
-                <a16:creationId xmlns:a16="http://schemas.microsoft.com/office/drawing/2014/main" id="{B2620C7B-BC83-4F3D-A2BE-4E58878130B5}"/>
+                <a16:creationId xmlns:a16="http://schemas.microsoft.com/office/drawing/2014/main" id="{F79D714A-8A6D-454B-89D1-065C208504E2}"/>
               </a:ext>
             </a:extLst>
           </p:cNvPr>
@@ -17991,7 +18227,7 @@
                 <a:ea typeface="Arial"/>
                 <a:cs typeface="Arial"/>
               </a:rPr>
-              <a:t>The new prompt assigns ASYNC_PHYSICIAN to all three. Frozen baseline and unchanged physician reference assign URGENT_ESCALATION.</a:t>
+              <a:t>Candidate: ASYNC_PHYSICIAN. Frozen baseline and reference: URGENT_ESCALATION. Clinical timing and completed care were not measured.</a:t>
             </a:r>
           </a:p>
         </p:txBody>
@@ -18001,7 +18237,7 @@
           <p:cNvPr id="4" name="">
             <a:extLst xmlns:a="http://schemas.openxmlformats.org/drawingml/2006/main">
               <a:ext uri="{FF2B5EF4-FFF2-40B4-BE49-F238E27FC236}">
-                <a16:creationId xmlns:a16="http://schemas.microsoft.com/office/drawing/2014/main" id="{C6F97261-6BAF-4486-A0B8-B5B28CDC45AB}"/>
+                <a16:creationId xmlns:a16="http://schemas.microsoft.com/office/drawing/2014/main" id="{4FE14EAC-C28C-43C9-8A66-E8FEAF3F73EF}"/>
               </a:ext>
             </a:extLst>
           </p:cNvPr>
@@ -18056,7 +18292,583 @@
     </p:spTree>
     <p:extLst>
       <p:ext uri="{BB962C8B-B14F-4D97-AF65-F5344CB8AC3E}">
-        <p14:creationId xmlns:p14="http://schemas.microsoft.com/office/powerpoint/2010/main" val="1391466645"/>
+        <p14:creationId xmlns:p14="http://schemas.microsoft.com/office/powerpoint/2010/main" val="469175054"/>
+      </p:ext>
+    </p:extLst>
+  </p:cSld>
+</p:sld>
+</file>
+
+<file path=ppt/slides/slide32.xml><?xml version="1.0" encoding="utf-8"?>
+<p:sld xmlns:p="http://schemas.openxmlformats.org/presentationml/2006/main">
+  <p:cSld>
+    <p:bg>
+      <p:bgPr>
+        <a:solidFill xmlns:a="http://schemas.openxmlformats.org/drawingml/2006/main">
+          <a:srgbClr val="F6F4ED"/>
+        </a:solidFill>
+      </p:bgPr>
+    </p:bg>
+    <p:spTree>
+      <p:nvGrpSpPr>
+        <p:cNvPr id="1" name=""/>
+        <p:cNvGrpSpPr/>
+        <p:nvPr/>
+      </p:nvGrpSpPr>
+      <p:grpSpPr>
+        <a:xfrm xmlns:a="http://schemas.openxmlformats.org/drawingml/2006/main"/>
+      </p:grpSpPr>
+      <p:sp>
+        <p:nvSpPr>
+          <p:cNvPr id="6" name="">
+            <a:extLst xmlns:a="http://schemas.openxmlformats.org/drawingml/2006/main">
+              <a:ext uri="{FF2B5EF4-FFF2-40B4-BE49-F238E27FC236}">
+                <a16:creationId xmlns:a16="http://schemas.microsoft.com/office/drawing/2014/main" id="{78541EFA-D9A0-4D41-A266-8AF0670A74CD}"/>
+              </a:ext>
+            </a:extLst>
+          </p:cNvPr>
+          <p:cNvSpPr>
+            <a:spLocks xmlns:a="http://schemas.openxmlformats.org/drawingml/2006/main" noGrp="1"/>
+          </p:cNvSpPr>
+          <p:nvPr/>
+        </p:nvSpPr>
+        <p:spPr>
+          <a:xfrm xmlns:a="http://schemas.openxmlformats.org/drawingml/2006/main">
+            <a:off x="762000" y="485775"/>
+            <a:ext cx="10668000" cy="586550"/>
+          </a:xfrm>
+          <a:prstGeom xmlns:a="http://schemas.openxmlformats.org/drawingml/2006/main" prst="rect">
+            <a:avLst/>
+          </a:prstGeom>
+          <a:noFill xmlns:a="http://schemas.openxmlformats.org/drawingml/2006/main"/>
+          <a:ln xmlns:a="http://schemas.openxmlformats.org/drawingml/2006/main" w="0">
+            <a:noFill/>
+          </a:ln>
+        </p:spPr>
+        <p:txBody>
+          <a:bodyPr xmlns:a="http://schemas.openxmlformats.org/drawingml/2006/main" wrap="square" lIns="0" tIns="0" rIns="0" bIns="0" anchor="t">
+            <a:noAutofit/>
+          </a:bodyPr>
+          <a:lstStyle xmlns:a="http://schemas.openxmlformats.org/drawingml/2006/main"/>
+          <a:p xmlns:a="http://schemas.openxmlformats.org/drawingml/2006/main">
+            <a:pPr>
+              <a:defRPr sz="3525" b="1">
+                <a:solidFill>
+                  <a:srgbClr val="243866"/>
+                </a:solidFill>
+                <a:latin typeface="Arial"/>
+                <a:ea typeface="Arial"/>
+                <a:cs typeface="Arial"/>
+              </a:defRPr>
+            </a:pPr>
+            <a:r>
+              <a:rPr sz="3525" b="1">
+                <a:solidFill>
+                  <a:srgbClr val="243866"/>
+                </a:solidFill>
+                <a:latin typeface="Arial"/>
+                <a:ea typeface="Arial"/>
+                <a:cs typeface="Arial"/>
+              </a:rPr>
+              <a:t>Async care and required clinical timing</a:t>
+            </a:r>
+          </a:p>
+        </p:txBody>
+      </p:sp>
+      <p:graphicFrame>
+        <p:nvGraphicFramePr>
+          <p:cNvPr id="7" name=""/>
+          <p:cNvGraphicFramePr/>
+          <p:nvPr/>
+        </p:nvGraphicFramePr>
+        <p:xfrm>
+          <a:off xmlns:a="http://schemas.openxmlformats.org/drawingml/2006/main" x="762000" y="1619250"/>
+          <a:ext xmlns:a="http://schemas.openxmlformats.org/drawingml/2006/main" cx="10668000" cy="2730246"/>
+        </p:xfrm>
+        <a:graphic xmlns:a="http://schemas.openxmlformats.org/drawingml/2006/main">
+          <a:graphicData uri="http://schemas.openxmlformats.org/drawingml/2006/table">
+            <a:tbl>
+              <a:tblPr firstRow="1" bandRow="0"/>
+              <a:tblGrid>
+                <a:gridCol w="2133600"/>
+                <a:gridCol w="4267200"/>
+                <a:gridCol w="4267200"/>
+              </a:tblGrid>
+              <a:tr h="471678">
+                <a:tc>
+                  <a:txBody>
+                    <a:bodyPr/>
+                    <a:lstStyle/>
+                    <a:p>
+                      <a:r>
+                        <a:rPr sz="1800" b="1">
+                          <a:solidFill>
+                            <a:srgbClr val="FFFFFF"/>
+                          </a:solidFill>
+                          <a:latin typeface="Arial"/>
+                          <a:ea typeface="Arial"/>
+                          <a:cs typeface="Arial"/>
+                        </a:rPr>
+                        <a:t>Dimension</a:t>
+                      </a:r>
+                    </a:p>
+                  </a:txBody>
+                  <a:tcPr marL="133350" marR="133350" marT="76200" marB="76200" anchor="ctr">
+                    <a:solidFill>
+                      <a:srgbClr val="243866"/>
+                    </a:solidFill>
+                  </a:tcPr>
+                </a:tc>
+                <a:tc>
+                  <a:txBody>
+                    <a:bodyPr/>
+                    <a:lstStyle/>
+                    <a:p>
+                      <a:r>
+                        <a:rPr sz="1800" b="1">
+                          <a:solidFill>
+                            <a:srgbClr val="FFFFFF"/>
+                          </a:solidFill>
+                          <a:latin typeface="Arial"/>
+                          <a:ea typeface="Arial"/>
+                          <a:cs typeface="Arial"/>
+                        </a:rPr>
+                        <a:t>Question to specify</a:t>
+                      </a:r>
+                    </a:p>
+                  </a:txBody>
+                  <a:tcPr marL="133350" marR="133350" marT="76200" marB="76200" anchor="ctr">
+                    <a:solidFill>
+                      <a:srgbClr val="243866"/>
+                    </a:solidFill>
+                  </a:tcPr>
+                </a:tc>
+                <a:tc>
+                  <a:txBody>
+                    <a:bodyPr/>
+                    <a:lstStyle/>
+                    <a:p>
+                      <a:r>
+                        <a:rPr sz="1800" b="1">
+                          <a:solidFill>
+                            <a:srgbClr val="FFFFFF"/>
+                          </a:solidFill>
+                          <a:latin typeface="Arial"/>
+                          <a:ea typeface="Arial"/>
+                          <a:cs typeface="Arial"/>
+                        </a:rPr>
+                        <a:t>Evidence required</a:t>
+                      </a:r>
+                    </a:p>
+                  </a:txBody>
+                  <a:tcPr marL="133350" marR="133350" marT="76200" marB="76200" anchor="ctr">
+                    <a:solidFill>
+                      <a:srgbClr val="243866"/>
+                    </a:solidFill>
+                  </a:tcPr>
+                </a:tc>
+              </a:tr>
+              <a:tr h="752856">
+                <a:tc>
+                  <a:txBody>
+                    <a:bodyPr/>
+                    <a:lstStyle/>
+                    <a:p>
+                      <a:r>
+                        <a:rPr sz="1800" b="0">
+                          <a:solidFill>
+                            <a:srgbClr val="28354A"/>
+                          </a:solidFill>
+                          <a:latin typeface="Arial"/>
+                          <a:ea typeface="Arial"/>
+                          <a:cs typeface="Arial"/>
+                        </a:rPr>
+                        <a:t>Contact channel</a:t>
+                      </a:r>
+                    </a:p>
+                  </a:txBody>
+                  <a:tcPr marL="133350" marR="133350" marT="76200" marB="76200" anchor="ctr">
+                    <a:solidFill>
+                      <a:srgbClr val="F6F4ED"/>
+                    </a:solidFill>
+                  </a:tcPr>
+                </a:tc>
+                <a:tc>
+                  <a:txBody>
+                    <a:bodyPr/>
+                    <a:lstStyle/>
+                    <a:p>
+                      <a:r>
+                        <a:rPr sz="1800" b="0">
+                          <a:solidFill>
+                            <a:srgbClr val="28354A"/>
+                          </a:solidFill>
+                          <a:latin typeface="Arial"/>
+                          <a:ea typeface="Arial"/>
+                          <a:cs typeface="Arial"/>
+                        </a:rPr>
+                        <a:t>How does the patient reach a clinician?</a:t>
+                      </a:r>
+                    </a:p>
+                  </a:txBody>
+                  <a:tcPr marL="133350" marR="133350" marT="76200" marB="76200" anchor="ctr">
+                    <a:solidFill>
+                      <a:srgbClr val="F6F4ED"/>
+                    </a:solidFill>
+                  </a:tcPr>
+                </a:tc>
+                <a:tc>
+                  <a:txBody>
+                    <a:bodyPr/>
+                    <a:lstStyle/>
+                    <a:p>
+                      <a:r>
+                        <a:rPr sz="1800" b="0">
+                          <a:solidFill>
+                            <a:srgbClr val="28354A"/>
+                          </a:solidFill>
+                          <a:latin typeface="Arial"/>
+                          <a:ea typeface="Arial"/>
+                          <a:cs typeface="Arial"/>
+                        </a:rPr>
+                        <a:t>Observed time to an appropriate physician response</a:t>
+                      </a:r>
+                    </a:p>
+                  </a:txBody>
+                  <a:tcPr marL="133350" marR="133350" marT="76200" marB="76200" anchor="ctr">
+                    <a:solidFill>
+                      <a:srgbClr val="F6F4ED"/>
+                    </a:solidFill>
+                  </a:tcPr>
+                </a:tc>
+              </a:tr>
+              <a:tr h="752856">
+                <a:tc>
+                  <a:txBody>
+                    <a:bodyPr/>
+                    <a:lstStyle/>
+                    <a:p>
+                      <a:r>
+                        <a:rPr sz="1800" b="0">
+                          <a:solidFill>
+                            <a:srgbClr val="28354A"/>
+                          </a:solidFill>
+                          <a:latin typeface="Arial"/>
+                          <a:ea typeface="Arial"/>
+                          <a:cs typeface="Arial"/>
+                        </a:rPr>
+                        <a:t>Clinical timing</a:t>
+                      </a:r>
+                    </a:p>
+                  </a:txBody>
+                  <a:tcPr marL="133350" marR="133350" marT="76200" marB="76200" anchor="ctr">
+                    <a:solidFill>
+                      <a:srgbClr val="F6F4ED"/>
+                    </a:solidFill>
+                  </a:tcPr>
+                </a:tc>
+                <a:tc>
+                  <a:txBody>
+                    <a:bodyPr/>
+                    <a:lstStyle/>
+                    <a:p>
+                      <a:r>
+                        <a:rPr sz="1800" b="0">
+                          <a:solidFill>
+                            <a:srgbClr val="28354A"/>
+                          </a:solidFill>
+                          <a:latin typeface="Arial"/>
+                          <a:ea typeface="Arial"/>
+                          <a:cs typeface="Arial"/>
+                        </a:rPr>
+                        <a:t>When must assessment or treatment occur?</a:t>
+                      </a:r>
+                    </a:p>
+                  </a:txBody>
+                  <a:tcPr marL="133350" marR="133350" marT="76200" marB="76200" anchor="ctr">
+                    <a:solidFill>
+                      <a:srgbClr val="F6F4ED"/>
+                    </a:solidFill>
+                  </a:tcPr>
+                </a:tc>
+                <a:tc>
+                  <a:txBody>
+                    <a:bodyPr/>
+                    <a:lstStyle/>
+                    <a:p>
+                      <a:r>
+                        <a:rPr sz="1800" b="0">
+                          <a:solidFill>
+                            <a:srgbClr val="28354A"/>
+                          </a:solidFill>
+                          <a:latin typeface="Arial"/>
+                          <a:ea typeface="Arial"/>
+                          <a:cs typeface="Arial"/>
+                        </a:rPr>
+                        <a:t>A clinically approved deadline for the required action</a:t>
+                      </a:r>
+                    </a:p>
+                  </a:txBody>
+                  <a:tcPr marL="133350" marR="133350" marT="76200" marB="76200" anchor="ctr">
+                    <a:solidFill>
+                      <a:srgbClr val="F6F4ED"/>
+                    </a:solidFill>
+                  </a:tcPr>
+                </a:tc>
+              </a:tr>
+              <a:tr h="752856">
+                <a:tc>
+                  <a:txBody>
+                    <a:bodyPr/>
+                    <a:lstStyle/>
+                    <a:p>
+                      <a:r>
+                        <a:rPr sz="1800" b="0">
+                          <a:solidFill>
+                            <a:srgbClr val="28354A"/>
+                          </a:solidFill>
+                          <a:latin typeface="Arial"/>
+                          <a:ea typeface="Arial"/>
+                          <a:cs typeface="Arial"/>
+                        </a:rPr>
+                        <a:t>Care capability</a:t>
+                      </a:r>
+                    </a:p>
+                  </a:txBody>
+                  <a:tcPr marL="133350" marR="133350" marT="76200" marB="76200" anchor="ctr">
+                    <a:solidFill>
+                      <a:srgbClr val="F6F4ED"/>
+                    </a:solidFill>
+                  </a:tcPr>
+                </a:tc>
+                <a:tc>
+                  <a:txBody>
+                    <a:bodyPr/>
+                    <a:lstStyle/>
+                    <a:p>
+                      <a:r>
+                        <a:rPr sz="1800" b="0">
+                          <a:solidFill>
+                            <a:srgbClr val="28354A"/>
+                          </a:solidFill>
+                          <a:latin typeface="Arial"/>
+                          <a:ea typeface="Arial"/>
+                          <a:cs typeface="Arial"/>
+                        </a:rPr>
+                        <a:t>What can the pathway complete or arrange?</a:t>
+                      </a:r>
+                    </a:p>
+                  </a:txBody>
+                  <a:tcPr marL="133350" marR="133350" marT="76200" marB="76200" anchor="ctr">
+                    <a:solidFill>
+                      <a:srgbClr val="F6F4ED"/>
+                    </a:solidFill>
+                  </a:tcPr>
+                </a:tc>
+                <a:tc>
+                  <a:txBody>
+                    <a:bodyPr/>
+                    <a:lstStyle/>
+                    <a:p>
+                      <a:r>
+                        <a:rPr sz="1800" b="0">
+                          <a:solidFill>
+                            <a:srgbClr val="28354A"/>
+                          </a:solidFill>
+                          <a:latin typeface="Arial"/>
+                          <a:ea typeface="Arial"/>
+                          <a:cs typeface="Arial"/>
+                        </a:rPr>
+                        <a:t>Verified examination, testing or transfer when required</a:t>
+                      </a:r>
+                    </a:p>
+                  </a:txBody>
+                  <a:tcPr marL="133350" marR="133350" marT="76200" marB="76200" anchor="ctr">
+                    <a:solidFill>
+                      <a:srgbClr val="F6F4ED"/>
+                    </a:solidFill>
+                  </a:tcPr>
+                </a:tc>
+              </a:tr>
+            </a:tbl>
+          </a:graphicData>
+        </a:graphic>
+      </p:graphicFrame>
+      <p:sp>
+        <p:nvSpPr>
+          <p:cNvPr id="3" name="">
+            <a:extLst xmlns:a="http://schemas.openxmlformats.org/drawingml/2006/main">
+              <a:ext uri="{FF2B5EF4-FFF2-40B4-BE49-F238E27FC236}">
+                <a16:creationId xmlns:a16="http://schemas.microsoft.com/office/drawing/2014/main" id="{71580236-E76C-42B0-AB72-72FFE0A0F9BD}"/>
+              </a:ext>
+            </a:extLst>
+          </p:cNvPr>
+          <p:cNvSpPr>
+            <a:spLocks xmlns:a="http://schemas.openxmlformats.org/drawingml/2006/main" noGrp="1"/>
+          </p:cNvSpPr>
+          <p:nvPr/>
+        </p:nvSpPr>
+        <p:spPr>
+          <a:xfrm xmlns:a="http://schemas.openxmlformats.org/drawingml/2006/main">
+            <a:off x="762000" y="4539996"/>
+            <a:ext cx="10382250" cy="316992"/>
+          </a:xfrm>
+          <a:prstGeom xmlns:a="http://schemas.openxmlformats.org/drawingml/2006/main" prst="rect">
+            <a:avLst/>
+          </a:prstGeom>
+          <a:noFill xmlns:a="http://schemas.openxmlformats.org/drawingml/2006/main"/>
+          <a:ln xmlns:a="http://schemas.openxmlformats.org/drawingml/2006/main" w="0">
+            <a:noFill/>
+          </a:ln>
+        </p:spPr>
+        <p:txBody>
+          <a:bodyPr xmlns:a="http://schemas.openxmlformats.org/drawingml/2006/main" wrap="square" lIns="0" tIns="0" rIns="0" bIns="0" anchor="t">
+            <a:noAutofit/>
+          </a:bodyPr>
+          <a:lstStyle xmlns:a="http://schemas.openxmlformats.org/drawingml/2006/main"/>
+          <a:p xmlns:a="http://schemas.openxmlformats.org/drawingml/2006/main">
+            <a:pPr>
+              <a:defRPr sz="1800">
+                <a:solidFill>
+                  <a:srgbClr val="28354A"/>
+                </a:solidFill>
+                <a:latin typeface="Arial"/>
+                <a:ea typeface="Arial"/>
+                <a:cs typeface="Arial"/>
+              </a:defRPr>
+            </a:pPr>
+            <a:r>
+              <a:rPr sz="1800">
+                <a:solidFill>
+                  <a:srgbClr val="28354A"/>
+                </a:solidFill>
+                <a:latin typeface="Arial"/>
+                <a:ea typeface="Arial"/>
+                <a:cs typeface="Arial"/>
+              </a:rPr>
+              <a:t>Counsel reports an average 2-minute physician response. This is not a guarantee for a particular case.</a:t>
+            </a:r>
+          </a:p>
+        </p:txBody>
+      </p:sp>
+      <p:sp>
+        <p:nvSpPr>
+          <p:cNvPr id="4" name="">
+            <a:extLst xmlns:a="http://schemas.openxmlformats.org/drawingml/2006/main">
+              <a:ext uri="{FF2B5EF4-FFF2-40B4-BE49-F238E27FC236}">
+                <a16:creationId xmlns:a16="http://schemas.microsoft.com/office/drawing/2014/main" id="{7793C984-323C-4D25-9C46-238325DC4EDE}"/>
+              </a:ext>
+            </a:extLst>
+          </p:cNvPr>
+          <p:cNvSpPr>
+            <a:spLocks xmlns:a="http://schemas.openxmlformats.org/drawingml/2006/main" noGrp="1"/>
+          </p:cNvSpPr>
+          <p:nvPr/>
+        </p:nvSpPr>
+        <p:spPr>
+          <a:xfrm xmlns:a="http://schemas.openxmlformats.org/drawingml/2006/main">
+            <a:off x="762000" y="5886450"/>
+            <a:ext cx="10096500" cy="514350"/>
+          </a:xfrm>
+          <a:prstGeom xmlns:a="http://schemas.openxmlformats.org/drawingml/2006/main" prst="rect">
+            <a:avLst/>
+          </a:prstGeom>
+          <a:noFill xmlns:a="http://schemas.openxmlformats.org/drawingml/2006/main"/>
+          <a:ln xmlns:a="http://schemas.openxmlformats.org/drawingml/2006/main" w="0">
+            <a:noFill/>
+          </a:ln>
+        </p:spPr>
+        <p:txBody>
+          <a:bodyPr xmlns:a="http://schemas.openxmlformats.org/drawingml/2006/main" wrap="square" lIns="0" tIns="0" rIns="0" bIns="0" anchor="t">
+            <a:noAutofit/>
+          </a:bodyPr>
+          <a:lstStyle xmlns:a="http://schemas.openxmlformats.org/drawingml/2006/main"/>
+          <a:p xmlns:a="http://schemas.openxmlformats.org/drawingml/2006/main">
+            <a:pPr>
+              <a:defRPr sz="1350">
+                <a:solidFill>
+                  <a:srgbClr val="667084"/>
+                </a:solidFill>
+                <a:latin typeface="Arial"/>
+                <a:ea typeface="Arial"/>
+                <a:cs typeface="Arial"/>
+              </a:defRPr>
+            </a:pPr>
+            <a:r>
+              <a:rPr sz="1350">
+                <a:solidFill>
+                  <a:srgbClr val="667084"/>
+                </a:solidFill>
+                <a:latin typeface="Arial"/>
+                <a:ea typeface="Arial"/>
+                <a:cs typeface="Arial"/>
+              </a:rPr>
+              <a:t>Physician response time does not measure time to examination, testing or completed care. No such timing was measured here.</a:t>
+            </a:r>
+          </a:p>
+        </p:txBody>
+      </p:sp>
+      <p:sp>
+        <p:nvSpPr>
+          <p:cNvPr id="5" name="">
+            <a:extLst xmlns:a="http://schemas.openxmlformats.org/drawingml/2006/main">
+              <a:ext uri="{FF2B5EF4-FFF2-40B4-BE49-F238E27FC236}">
+                <a16:creationId xmlns:a16="http://schemas.microsoft.com/office/drawing/2014/main" id="{C0FB2947-E4BC-445F-8557-28D9D0A2A7A3}"/>
+              </a:ext>
+            </a:extLst>
+          </p:cNvPr>
+          <p:cNvSpPr>
+            <a:spLocks xmlns:a="http://schemas.openxmlformats.org/drawingml/2006/main" noGrp="1"/>
+          </p:cNvSpPr>
+          <p:nvPr/>
+        </p:nvSpPr>
+        <p:spPr>
+          <a:xfrm xmlns:a="http://schemas.openxmlformats.org/drawingml/2006/main">
+            <a:off x="11296650" y="6400800"/>
+            <a:ext cx="361950" cy="228600"/>
+          </a:xfrm>
+          <a:prstGeom xmlns:a="http://schemas.openxmlformats.org/drawingml/2006/main" prst="rect">
+            <a:avLst/>
+          </a:prstGeom>
+          <a:noFill xmlns:a="http://schemas.openxmlformats.org/drawingml/2006/main"/>
+          <a:ln xmlns:a="http://schemas.openxmlformats.org/drawingml/2006/main" w="0">
+            <a:noFill/>
+          </a:ln>
+        </p:spPr>
+        <p:txBody>
+          <a:bodyPr xmlns:a="http://schemas.openxmlformats.org/drawingml/2006/main" wrap="square" lIns="0" tIns="0" rIns="0" bIns="0" anchor="t">
+            <a:noAutofit/>
+          </a:bodyPr>
+          <a:lstStyle xmlns:a="http://schemas.openxmlformats.org/drawingml/2006/main"/>
+          <a:p xmlns:a="http://schemas.openxmlformats.org/drawingml/2006/main">
+            <a:pPr algn="r">
+              <a:defRPr sz="1275">
+                <a:solidFill>
+                  <a:srgbClr val="667084"/>
+                </a:solidFill>
+                <a:latin typeface="Arial"/>
+                <a:ea typeface="Arial"/>
+                <a:cs typeface="Arial"/>
+              </a:defRPr>
+            </a:pPr>
+            <a:r>
+              <a:rPr sz="1275">
+                <a:solidFill>
+                  <a:srgbClr val="667084"/>
+                </a:solidFill>
+                <a:latin typeface="Arial"/>
+                <a:ea typeface="Arial"/>
+                <a:cs typeface="Arial"/>
+              </a:rPr>
+              <a:t>32</a:t>
+            </a:r>
+          </a:p>
+        </p:txBody>
+      </p:sp>
+    </p:spTree>
+    <p:extLst>
+      <p:ext uri="{BB962C8B-B14F-4D97-AF65-F5344CB8AC3E}">
+        <p14:creationId xmlns:p14="http://schemas.microsoft.com/office/powerpoint/2010/main" val="976821349"/>
       </p:ext>
     </p:extLst>
   </p:cSld>
@@ -18087,7 +18899,7 @@
           <p:cNvPr id="7" name="">
             <a:extLst xmlns:a="http://schemas.openxmlformats.org/drawingml/2006/main">
               <a:ext uri="{FF2B5EF4-FFF2-40B4-BE49-F238E27FC236}">
-                <a16:creationId xmlns:a16="http://schemas.microsoft.com/office/drawing/2014/main" id="{55A09439-ADB4-4D0D-9722-A107596696B4}"/>
+                <a16:creationId xmlns:a16="http://schemas.microsoft.com/office/drawing/2014/main" id="{57FD8AB5-63E8-46EC-B60D-5B6BC47788C9}"/>
               </a:ext>
             </a:extLst>
           </p:cNvPr>
@@ -18148,7 +18960,7 @@
           <p:nvPr/>
         </p:nvPicPr>
         <p:blipFill>
-          <a:blip xmlns:r="http://schemas.openxmlformats.org/officeDocument/2006/relationships" xmlns:a="http://schemas.openxmlformats.org/drawingml/2006/main" r:embed="Rb6957c25684e4695"/>
+          <a:blip xmlns:r="http://schemas.openxmlformats.org/officeDocument/2006/relationships" xmlns:a="http://schemas.openxmlformats.org/drawingml/2006/main" r:embed="R3195ccbc7c1e42e8"/>
           <a:stretch xmlns:a="http://schemas.openxmlformats.org/drawingml/2006/main"/>
         </p:blipFill>
         <p:spPr>
@@ -18166,7 +18978,7 @@
           <p:cNvPr id="3" name="">
             <a:extLst xmlns:a="http://schemas.openxmlformats.org/drawingml/2006/main">
               <a:ext uri="{FF2B5EF4-FFF2-40B4-BE49-F238E27FC236}">
-                <a16:creationId xmlns:a16="http://schemas.microsoft.com/office/drawing/2014/main" id="{A2F48E6A-22DE-4097-9451-1980029FD95D}"/>
+                <a16:creationId xmlns:a16="http://schemas.microsoft.com/office/drawing/2014/main" id="{BA0CCFAF-8B07-4781-AF99-569D920AD856}"/>
               </a:ext>
             </a:extLst>
           </p:cNvPr>
@@ -18223,7 +19035,7 @@
           <p:cNvPr id="4" name="">
             <a:extLst xmlns:a="http://schemas.openxmlformats.org/drawingml/2006/main">
               <a:ext uri="{FF2B5EF4-FFF2-40B4-BE49-F238E27FC236}">
-                <a16:creationId xmlns:a16="http://schemas.microsoft.com/office/drawing/2014/main" id="{72BB7D1A-7876-4B7B-AE8D-E7E06C5A686C}"/>
+                <a16:creationId xmlns:a16="http://schemas.microsoft.com/office/drawing/2014/main" id="{B4791358-D571-460A-B385-B342984D2283}"/>
               </a:ext>
             </a:extLst>
           </p:cNvPr>
@@ -18280,7 +19092,7 @@
           <p:cNvPr id="5" name="">
             <a:extLst xmlns:a="http://schemas.openxmlformats.org/drawingml/2006/main">
               <a:ext uri="{FF2B5EF4-FFF2-40B4-BE49-F238E27FC236}">
-                <a16:creationId xmlns:a16="http://schemas.microsoft.com/office/drawing/2014/main" id="{C5DF6373-AC07-422E-B561-BB724AE4F1E1}"/>
+                <a16:creationId xmlns:a16="http://schemas.microsoft.com/office/drawing/2014/main" id="{11440483-3CBC-4FAA-BD4F-CB9006E22024}"/>
               </a:ext>
             </a:extLst>
           </p:cNvPr>
@@ -18337,7 +19149,7 @@
           <p:cNvPr id="6" name="">
             <a:extLst xmlns:a="http://schemas.openxmlformats.org/drawingml/2006/main">
               <a:ext uri="{FF2B5EF4-FFF2-40B4-BE49-F238E27FC236}">
-                <a16:creationId xmlns:a16="http://schemas.microsoft.com/office/drawing/2014/main" id="{39E97F15-CD12-48A2-BD30-60059C147368}"/>
+                <a16:creationId xmlns:a16="http://schemas.microsoft.com/office/drawing/2014/main" id="{7841FAE7-BD21-4207-A030-4472A1199AA9}"/>
               </a:ext>
             </a:extLst>
           </p:cNvPr>
@@ -18392,7 +19204,7 @@
     </p:spTree>
     <p:extLst>
       <p:ext uri="{BB962C8B-B14F-4D97-AF65-F5344CB8AC3E}">
-        <p14:creationId xmlns:p14="http://schemas.microsoft.com/office/powerpoint/2010/main" val="1014604273"/>
+        <p14:creationId xmlns:p14="http://schemas.microsoft.com/office/powerpoint/2010/main" val="1210388423"/>
       </p:ext>
     </p:extLst>
   </p:cSld>
@@ -18423,7 +19235,7 @@
           <p:cNvPr id="5" name="">
             <a:extLst xmlns:a="http://schemas.openxmlformats.org/drawingml/2006/main">
               <a:ext uri="{FF2B5EF4-FFF2-40B4-BE49-F238E27FC236}">
-                <a16:creationId xmlns:a16="http://schemas.microsoft.com/office/drawing/2014/main" id="{06DD2180-651B-4353-88E3-20265A4837D2}"/>
+                <a16:creationId xmlns:a16="http://schemas.microsoft.com/office/drawing/2014/main" id="{16DBFF1D-F202-4FB5-A4EE-5EBBA550B8AE}"/>
               </a:ext>
             </a:extLst>
           </p:cNvPr>
@@ -18582,7 +19394,7 @@
                           <a:ea typeface="Arial"/>
                           <a:cs typeface="Arial"/>
                         </a:rPr>
-                        <a:t>Choose the next care setting</a:t>
+                        <a:t>Choose a care-route bucket</a:t>
                       </a:r>
                     </a:p>
                   </a:txBody>
@@ -18752,7 +19564,7 @@
           <p:cNvPr id="3" name="">
             <a:extLst xmlns:a="http://schemas.openxmlformats.org/drawingml/2006/main">
               <a:ext uri="{FF2B5EF4-FFF2-40B4-BE49-F238E27FC236}">
-                <a16:creationId xmlns:a16="http://schemas.microsoft.com/office/drawing/2014/main" id="{496F08C5-8791-4D1C-A2EF-C36353984622}"/>
+                <a16:creationId xmlns:a16="http://schemas.microsoft.com/office/drawing/2014/main" id="{5A0233E7-BB1D-434B-A797-2F8479936007}"/>
               </a:ext>
             </a:extLst>
           </p:cNvPr>
@@ -18809,7 +19621,7 @@
           <p:cNvPr id="4" name="">
             <a:extLst xmlns:a="http://schemas.openxmlformats.org/drawingml/2006/main">
               <a:ext uri="{FF2B5EF4-FFF2-40B4-BE49-F238E27FC236}">
-                <a16:creationId xmlns:a16="http://schemas.microsoft.com/office/drawing/2014/main" id="{F1B638A8-FE3C-4EB0-920F-0D1459B6EA4C}"/>
+                <a16:creationId xmlns:a16="http://schemas.microsoft.com/office/drawing/2014/main" id="{EA61A5B7-0CB1-4738-86AB-FF1858060ECB}"/>
               </a:ext>
             </a:extLst>
           </p:cNvPr>
@@ -18864,7 +19676,7 @@
     </p:spTree>
     <p:extLst>
       <p:ext uri="{BB962C8B-B14F-4D97-AF65-F5344CB8AC3E}">
-        <p14:creationId xmlns:p14="http://schemas.microsoft.com/office/powerpoint/2010/main" val="2056065562"/>
+        <p14:creationId xmlns:p14="http://schemas.microsoft.com/office/powerpoint/2010/main" val="1015729828"/>
       </p:ext>
     </p:extLst>
   </p:cSld>
@@ -18895,7 +19707,7 @@
           <p:cNvPr id="7" name="">
             <a:extLst xmlns:a="http://schemas.openxmlformats.org/drawingml/2006/main">
               <a:ext uri="{FF2B5EF4-FFF2-40B4-BE49-F238E27FC236}">
-                <a16:creationId xmlns:a16="http://schemas.microsoft.com/office/drawing/2014/main" id="{A6AD5BF8-1899-494B-8F05-35F05831220A}"/>
+                <a16:creationId xmlns:a16="http://schemas.microsoft.com/office/drawing/2014/main" id="{EA8E61FC-4A2C-4BC8-95F8-2E72D8D0B6FA}"/>
               </a:ext>
             </a:extLst>
           </p:cNvPr>
@@ -19174,7 +19986,7 @@
           <p:cNvPr id="3" name="">
             <a:extLst xmlns:a="http://schemas.openxmlformats.org/drawingml/2006/main">
               <a:ext uri="{FF2B5EF4-FFF2-40B4-BE49-F238E27FC236}">
-                <a16:creationId xmlns:a16="http://schemas.microsoft.com/office/drawing/2014/main" id="{722C9D5B-7592-4D3B-BEFF-197305BFCBA2}"/>
+                <a16:creationId xmlns:a16="http://schemas.microsoft.com/office/drawing/2014/main" id="{A4065233-B176-4F40-859C-6DE07A041FA0}"/>
               </a:ext>
             </a:extLst>
           </p:cNvPr>
@@ -19231,7 +20043,7 @@
           <p:cNvPr id="4" name="">
             <a:extLst xmlns:a="http://schemas.openxmlformats.org/drawingml/2006/main">
               <a:ext uri="{FF2B5EF4-FFF2-40B4-BE49-F238E27FC236}">
-                <a16:creationId xmlns:a16="http://schemas.microsoft.com/office/drawing/2014/main" id="{62EC42B3-E43A-4397-B38B-EE2CFB0CB938}"/>
+                <a16:creationId xmlns:a16="http://schemas.microsoft.com/office/drawing/2014/main" id="{4D4E5242-ED81-4FF1-A582-56EC2406F8A4}"/>
               </a:ext>
             </a:extLst>
           </p:cNvPr>
@@ -19288,7 +20100,7 @@
           <p:cNvPr id="5" name="">
             <a:extLst xmlns:a="http://schemas.openxmlformats.org/drawingml/2006/main">
               <a:ext uri="{FF2B5EF4-FFF2-40B4-BE49-F238E27FC236}">
-                <a16:creationId xmlns:a16="http://schemas.microsoft.com/office/drawing/2014/main" id="{1B5FE35A-1E3D-4D0B-AE16-41FF7ADD2450}"/>
+                <a16:creationId xmlns:a16="http://schemas.microsoft.com/office/drawing/2014/main" id="{9C0B61DB-2CF2-4911-B1B6-2C5F1B45C4F2}"/>
               </a:ext>
             </a:extLst>
           </p:cNvPr>
@@ -19335,7 +20147,7 @@
                 <a:ea typeface="Arial"/>
                 <a:cs typeface="Arial"/>
               </a:rPr>
-              <a:t>URGENT_ESCALATION merges two levels of urgency. Route agreement does not establish safe timing or transport.</a:t>
+              <a:t>Async can provide same-day review. These buckets do not specify response deadlines or confirm completed care.</a:t>
             </a:r>
           </a:p>
         </p:txBody>
@@ -19345,7 +20157,7 @@
           <p:cNvPr id="6" name="">
             <a:extLst xmlns:a="http://schemas.openxmlformats.org/drawingml/2006/main">
               <a:ext uri="{FF2B5EF4-FFF2-40B4-BE49-F238E27FC236}">
-                <a16:creationId xmlns:a16="http://schemas.microsoft.com/office/drawing/2014/main" id="{2FAAC6EC-10D9-457D-B73F-DC57CA38BC7C}"/>
+                <a16:creationId xmlns:a16="http://schemas.microsoft.com/office/drawing/2014/main" id="{FE0381D9-195A-4110-B571-992F336B8F45}"/>
               </a:ext>
             </a:extLst>
           </p:cNvPr>
@@ -19400,7 +20212,7 @@
     </p:spTree>
     <p:extLst>
       <p:ext uri="{BB962C8B-B14F-4D97-AF65-F5344CB8AC3E}">
-        <p14:creationId xmlns:p14="http://schemas.microsoft.com/office/powerpoint/2010/main" val="1228187678"/>
+        <p14:creationId xmlns:p14="http://schemas.microsoft.com/office/powerpoint/2010/main" val="426871259"/>
       </p:ext>
     </p:extLst>
   </p:cSld>
@@ -19431,7 +20243,7 @@
           <p:cNvPr id="9" name="">
             <a:extLst xmlns:a="http://schemas.openxmlformats.org/drawingml/2006/main">
               <a:ext uri="{FF2B5EF4-FFF2-40B4-BE49-F238E27FC236}">
-                <a16:creationId xmlns:a16="http://schemas.microsoft.com/office/drawing/2014/main" id="{6038C41A-C883-492D-9D86-A81D92468DD5}"/>
+                <a16:creationId xmlns:a16="http://schemas.microsoft.com/office/drawing/2014/main" id="{25597DD2-E228-4542-953F-C96F06C770DA}"/>
               </a:ext>
             </a:extLst>
           </p:cNvPr>
@@ -19488,7 +20300,7 @@
           <p:cNvPr id="2" name="">
             <a:extLst xmlns:a="http://schemas.openxmlformats.org/drawingml/2006/main">
               <a:ext uri="{FF2B5EF4-FFF2-40B4-BE49-F238E27FC236}">
-                <a16:creationId xmlns:a16="http://schemas.microsoft.com/office/drawing/2014/main" id="{597193A7-0BE4-4B22-AE72-116563CF446A}"/>
+                <a16:creationId xmlns:a16="http://schemas.microsoft.com/office/drawing/2014/main" id="{5477AD1C-D24F-40C9-9DC9-C6D90D6BA175}"/>
               </a:ext>
             </a:extLst>
           </p:cNvPr>
@@ -19545,7 +20357,7 @@
           <p:cNvPr id="3" name="">
             <a:extLst xmlns:a="http://schemas.openxmlformats.org/drawingml/2006/main">
               <a:ext uri="{FF2B5EF4-FFF2-40B4-BE49-F238E27FC236}">
-                <a16:creationId xmlns:a16="http://schemas.microsoft.com/office/drawing/2014/main" id="{D610E7BF-2848-48CA-BA4C-F3F3CEB427F9}"/>
+                <a16:creationId xmlns:a16="http://schemas.microsoft.com/office/drawing/2014/main" id="{ED3DF6A2-F499-4DC4-A8B5-921E8ECD2FBC}"/>
               </a:ext>
             </a:extLst>
           </p:cNvPr>
@@ -19602,7 +20414,7 @@
           <p:cNvPr id="4" name="">
             <a:extLst xmlns:a="http://schemas.openxmlformats.org/drawingml/2006/main">
               <a:ext uri="{FF2B5EF4-FFF2-40B4-BE49-F238E27FC236}">
-                <a16:creationId xmlns:a16="http://schemas.microsoft.com/office/drawing/2014/main" id="{6434A3BC-00DB-4517-889C-BD3C550D1DB5}"/>
+                <a16:creationId xmlns:a16="http://schemas.microsoft.com/office/drawing/2014/main" id="{91C59989-0440-4498-880C-1CBA9DC6BACF}"/>
               </a:ext>
             </a:extLst>
           </p:cNvPr>
@@ -19659,7 +20471,7 @@
           <p:cNvPr id="5" name="">
             <a:extLst xmlns:a="http://schemas.openxmlformats.org/drawingml/2006/main">
               <a:ext uri="{FF2B5EF4-FFF2-40B4-BE49-F238E27FC236}">
-                <a16:creationId xmlns:a16="http://schemas.microsoft.com/office/drawing/2014/main" id="{16D43A30-D7B3-4B81-B3BC-D2983E8BFDA1}"/>
+                <a16:creationId xmlns:a16="http://schemas.microsoft.com/office/drawing/2014/main" id="{C10413B4-412A-4F13-BA07-0C374D0C4141}"/>
               </a:ext>
             </a:extLst>
           </p:cNvPr>
@@ -19716,7 +20528,7 @@
           <p:cNvPr id="6" name="">
             <a:extLst xmlns:a="http://schemas.openxmlformats.org/drawingml/2006/main">
               <a:ext uri="{FF2B5EF4-FFF2-40B4-BE49-F238E27FC236}">
-                <a16:creationId xmlns:a16="http://schemas.microsoft.com/office/drawing/2014/main" id="{58F9B781-883A-4DC9-AB24-1320272F2DC2}"/>
+                <a16:creationId xmlns:a16="http://schemas.microsoft.com/office/drawing/2014/main" id="{0CBF2E5D-1D4E-4757-8CBE-412557F727A5}"/>
               </a:ext>
             </a:extLst>
           </p:cNvPr>
@@ -19773,7 +20585,7 @@
           <p:cNvPr id="7" name="">
             <a:extLst xmlns:a="http://schemas.openxmlformats.org/drawingml/2006/main">
               <a:ext uri="{FF2B5EF4-FFF2-40B4-BE49-F238E27FC236}">
-                <a16:creationId xmlns:a16="http://schemas.microsoft.com/office/drawing/2014/main" id="{9022BA3A-4DE6-4A8D-BB3F-FB8408F7F530}"/>
+                <a16:creationId xmlns:a16="http://schemas.microsoft.com/office/drawing/2014/main" id="{5B2E8EBE-C1BE-4537-B436-7E1C403A8DA1}"/>
               </a:ext>
             </a:extLst>
           </p:cNvPr>
@@ -19830,7 +20642,7 @@
           <p:cNvPr id="8" name="">
             <a:extLst xmlns:a="http://schemas.openxmlformats.org/drawingml/2006/main">
               <a:ext uri="{FF2B5EF4-FFF2-40B4-BE49-F238E27FC236}">
-                <a16:creationId xmlns:a16="http://schemas.microsoft.com/office/drawing/2014/main" id="{87105B3F-2888-4742-89AB-2B449EB4EE37}"/>
+                <a16:creationId xmlns:a16="http://schemas.microsoft.com/office/drawing/2014/main" id="{7CD5EB01-105C-4798-A607-B24717C656B9}"/>
               </a:ext>
             </a:extLst>
           </p:cNvPr>
@@ -19885,7 +20697,7 @@
     </p:spTree>
     <p:extLst>
       <p:ext uri="{BB962C8B-B14F-4D97-AF65-F5344CB8AC3E}">
-        <p14:creationId xmlns:p14="http://schemas.microsoft.com/office/powerpoint/2010/main" val="215353726"/>
+        <p14:creationId xmlns:p14="http://schemas.microsoft.com/office/powerpoint/2010/main" val="426372728"/>
       </p:ext>
     </p:extLst>
   </p:cSld>
@@ -19916,7 +20728,7 @@
           <p:cNvPr id="15" name="">
             <a:extLst xmlns:a="http://schemas.openxmlformats.org/drawingml/2006/main">
               <a:ext uri="{FF2B5EF4-FFF2-40B4-BE49-F238E27FC236}">
-                <a16:creationId xmlns:a16="http://schemas.microsoft.com/office/drawing/2014/main" id="{2C6C4EEA-CFEB-45C4-A74A-555675604643}"/>
+                <a16:creationId xmlns:a16="http://schemas.microsoft.com/office/drawing/2014/main" id="{6047AE0B-98BD-4C46-9B45-BEE423A7B471}"/>
               </a:ext>
             </a:extLst>
           </p:cNvPr>
@@ -19973,7 +20785,7 @@
           <p:cNvPr id="2" name="">
             <a:extLst xmlns:a="http://schemas.openxmlformats.org/drawingml/2006/main">
               <a:ext uri="{FF2B5EF4-FFF2-40B4-BE49-F238E27FC236}">
-                <a16:creationId xmlns:a16="http://schemas.microsoft.com/office/drawing/2014/main" id="{D49F6FFB-A150-4CBC-874D-49907B2D2A78}"/>
+                <a16:creationId xmlns:a16="http://schemas.microsoft.com/office/drawing/2014/main" id="{A47494FB-2907-4F19-A620-A1FD8CC5F687}"/>
               </a:ext>
             </a:extLst>
           </p:cNvPr>
@@ -20030,7 +20842,7 @@
           <p:cNvPr id="3" name="">
             <a:extLst xmlns:a="http://schemas.openxmlformats.org/drawingml/2006/main">
               <a:ext uri="{FF2B5EF4-FFF2-40B4-BE49-F238E27FC236}">
-                <a16:creationId xmlns:a16="http://schemas.microsoft.com/office/drawing/2014/main" id="{9E8F55FE-53CE-484E-971B-7A795627206E}"/>
+                <a16:creationId xmlns:a16="http://schemas.microsoft.com/office/drawing/2014/main" id="{18ED8953-7CC9-46C0-9741-33E40F2DD786}"/>
               </a:ext>
             </a:extLst>
           </p:cNvPr>
@@ -20087,7 +20899,7 @@
           <p:cNvPr id="4" name="">
             <a:extLst xmlns:a="http://schemas.openxmlformats.org/drawingml/2006/main">
               <a:ext uri="{FF2B5EF4-FFF2-40B4-BE49-F238E27FC236}">
-                <a16:creationId xmlns:a16="http://schemas.microsoft.com/office/drawing/2014/main" id="{A384828C-E6AA-4F14-BB4F-1F8514D107D0}"/>
+                <a16:creationId xmlns:a16="http://schemas.microsoft.com/office/drawing/2014/main" id="{B13F260D-AD76-4EE2-877B-DD6445C2F87C}"/>
               </a:ext>
             </a:extLst>
           </p:cNvPr>
@@ -20144,7 +20956,7 @@
           <p:cNvPr id="5" name="">
             <a:extLst xmlns:a="http://schemas.openxmlformats.org/drawingml/2006/main">
               <a:ext uri="{FF2B5EF4-FFF2-40B4-BE49-F238E27FC236}">
-                <a16:creationId xmlns:a16="http://schemas.microsoft.com/office/drawing/2014/main" id="{D02A4861-6C9A-42E6-8F74-F461AFA54C93}"/>
+                <a16:creationId xmlns:a16="http://schemas.microsoft.com/office/drawing/2014/main" id="{9A61BE79-D093-40FA-BF02-E5E7B2681A0D}"/>
               </a:ext>
             </a:extLst>
           </p:cNvPr>
@@ -20201,7 +21013,7 @@
           <p:cNvPr id="6" name="">
             <a:extLst xmlns:a="http://schemas.openxmlformats.org/drawingml/2006/main">
               <a:ext uri="{FF2B5EF4-FFF2-40B4-BE49-F238E27FC236}">
-                <a16:creationId xmlns:a16="http://schemas.microsoft.com/office/drawing/2014/main" id="{AF92DD21-C041-45D0-A545-126A9D450172}"/>
+                <a16:creationId xmlns:a16="http://schemas.microsoft.com/office/drawing/2014/main" id="{AABC776A-D53A-4966-9B21-03144EB5C41C}"/>
               </a:ext>
             </a:extLst>
           </p:cNvPr>
@@ -20258,7 +21070,7 @@
           <p:cNvPr id="7" name="">
             <a:extLst xmlns:a="http://schemas.openxmlformats.org/drawingml/2006/main">
               <a:ext uri="{FF2B5EF4-FFF2-40B4-BE49-F238E27FC236}">
-                <a16:creationId xmlns:a16="http://schemas.microsoft.com/office/drawing/2014/main" id="{908653EC-F317-40B1-83CD-28A89B461E13}"/>
+                <a16:creationId xmlns:a16="http://schemas.microsoft.com/office/drawing/2014/main" id="{2D81A6D8-A7BE-427A-B6E0-5F666E608AC6}"/>
               </a:ext>
             </a:extLst>
           </p:cNvPr>
@@ -20315,7 +21127,7 @@
           <p:cNvPr id="8" name="">
             <a:extLst xmlns:a="http://schemas.openxmlformats.org/drawingml/2006/main">
               <a:ext uri="{FF2B5EF4-FFF2-40B4-BE49-F238E27FC236}">
-                <a16:creationId xmlns:a16="http://schemas.microsoft.com/office/drawing/2014/main" id="{0214948B-9882-4603-BB3C-A05EC3F619E9}"/>
+                <a16:creationId xmlns:a16="http://schemas.microsoft.com/office/drawing/2014/main" id="{1EA74291-092F-4772-B7A9-A2BB5AC4004E}"/>
               </a:ext>
             </a:extLst>
           </p:cNvPr>
@@ -20372,7 +21184,7 @@
           <p:cNvPr id="9" name="">
             <a:extLst xmlns:a="http://schemas.openxmlformats.org/drawingml/2006/main">
               <a:ext uri="{FF2B5EF4-FFF2-40B4-BE49-F238E27FC236}">
-                <a16:creationId xmlns:a16="http://schemas.microsoft.com/office/drawing/2014/main" id="{4406A7AA-E94E-4E7C-835F-BAE3B45C55AB}"/>
+                <a16:creationId xmlns:a16="http://schemas.microsoft.com/office/drawing/2014/main" id="{19E93D36-00BB-459B-BC7B-EABF7C9649B0}"/>
               </a:ext>
             </a:extLst>
           </p:cNvPr>
@@ -20429,7 +21241,7 @@
           <p:cNvPr id="10" name="">
             <a:extLst xmlns:a="http://schemas.openxmlformats.org/drawingml/2006/main">
               <a:ext uri="{FF2B5EF4-FFF2-40B4-BE49-F238E27FC236}">
-                <a16:creationId xmlns:a16="http://schemas.microsoft.com/office/drawing/2014/main" id="{7F83E4E9-C6FB-444D-8012-1F6225E85219}"/>
+                <a16:creationId xmlns:a16="http://schemas.microsoft.com/office/drawing/2014/main" id="{0DD52983-48E0-4C40-ACFC-E81414CD8B63}"/>
               </a:ext>
             </a:extLst>
           </p:cNvPr>
@@ -20486,7 +21298,7 @@
           <p:cNvPr id="11" name="">
             <a:extLst xmlns:a="http://schemas.openxmlformats.org/drawingml/2006/main">
               <a:ext uri="{FF2B5EF4-FFF2-40B4-BE49-F238E27FC236}">
-                <a16:creationId xmlns:a16="http://schemas.microsoft.com/office/drawing/2014/main" id="{F95FD072-B461-4476-AE52-BCF8D459B82A}"/>
+                <a16:creationId xmlns:a16="http://schemas.microsoft.com/office/drawing/2014/main" id="{DDEE6597-D269-4E0C-BD3C-4F62B9A5756E}"/>
               </a:ext>
             </a:extLst>
           </p:cNvPr>
@@ -20543,7 +21355,7 @@
           <p:cNvPr id="12" name="">
             <a:extLst xmlns:a="http://schemas.openxmlformats.org/drawingml/2006/main">
               <a:ext uri="{FF2B5EF4-FFF2-40B4-BE49-F238E27FC236}">
-                <a16:creationId xmlns:a16="http://schemas.microsoft.com/office/drawing/2014/main" id="{7F106BE8-4AE9-4E17-B17C-ED756DB5982B}"/>
+                <a16:creationId xmlns:a16="http://schemas.microsoft.com/office/drawing/2014/main" id="{4641ED77-468C-44C1-A630-229D38AC2D62}"/>
               </a:ext>
             </a:extLst>
           </p:cNvPr>
@@ -20600,7 +21412,7 @@
           <p:cNvPr id="13" name="">
             <a:extLst xmlns:a="http://schemas.openxmlformats.org/drawingml/2006/main">
               <a:ext uri="{FF2B5EF4-FFF2-40B4-BE49-F238E27FC236}">
-                <a16:creationId xmlns:a16="http://schemas.microsoft.com/office/drawing/2014/main" id="{7A4D1A11-C1C3-4223-B345-6AA5F09A440D}"/>
+                <a16:creationId xmlns:a16="http://schemas.microsoft.com/office/drawing/2014/main" id="{F96F44E2-9E47-48EB-9845-F897CCCCC98A}"/>
               </a:ext>
             </a:extLst>
           </p:cNvPr>
@@ -20657,7 +21469,7 @@
           <p:cNvPr id="14" name="">
             <a:extLst xmlns:a="http://schemas.openxmlformats.org/drawingml/2006/main">
               <a:ext uri="{FF2B5EF4-FFF2-40B4-BE49-F238E27FC236}">
-                <a16:creationId xmlns:a16="http://schemas.microsoft.com/office/drawing/2014/main" id="{E6220D46-205C-4229-A862-A5D59FA19FDB}"/>
+                <a16:creationId xmlns:a16="http://schemas.microsoft.com/office/drawing/2014/main" id="{1B69EA4B-931C-4719-88CC-0C933938E8C7}"/>
               </a:ext>
             </a:extLst>
           </p:cNvPr>
@@ -20712,7 +21524,7 @@
     </p:spTree>
     <p:extLst>
       <p:ext uri="{BB962C8B-B14F-4D97-AF65-F5344CB8AC3E}">
-        <p14:creationId xmlns:p14="http://schemas.microsoft.com/office/powerpoint/2010/main" val="1840600143"/>
+        <p14:creationId xmlns:p14="http://schemas.microsoft.com/office/powerpoint/2010/main" val="588257605"/>
       </p:ext>
     </p:extLst>
   </p:cSld>
@@ -20743,7 +21555,7 @@
           <p:cNvPr id="7" name="">
             <a:extLst xmlns:a="http://schemas.openxmlformats.org/drawingml/2006/main">
               <a:ext uri="{FF2B5EF4-FFF2-40B4-BE49-F238E27FC236}">
-                <a16:creationId xmlns:a16="http://schemas.microsoft.com/office/drawing/2014/main" id="{3D55299D-5739-49E2-A275-4F489354FC5A}"/>
+                <a16:creationId xmlns:a16="http://schemas.microsoft.com/office/drawing/2014/main" id="{AF43F282-9D69-4F59-91E8-F8FCFB221245}"/>
               </a:ext>
             </a:extLst>
           </p:cNvPr>
@@ -21119,7 +21931,7 @@
           <p:cNvPr id="3" name="">
             <a:extLst xmlns:a="http://schemas.openxmlformats.org/drawingml/2006/main">
               <a:ext uri="{FF2B5EF4-FFF2-40B4-BE49-F238E27FC236}">
-                <a16:creationId xmlns:a16="http://schemas.microsoft.com/office/drawing/2014/main" id="{80E5AD51-B7BC-478E-B9CA-DB3E922519D9}"/>
+                <a16:creationId xmlns:a16="http://schemas.microsoft.com/office/drawing/2014/main" id="{4D3272FB-5DD8-47E9-B125-E0CF2199E4C4}"/>
               </a:ext>
             </a:extLst>
           </p:cNvPr>
@@ -21176,7 +21988,7 @@
           <p:cNvPr id="4" name="">
             <a:extLst xmlns:a="http://schemas.openxmlformats.org/drawingml/2006/main">
               <a:ext uri="{FF2B5EF4-FFF2-40B4-BE49-F238E27FC236}">
-                <a16:creationId xmlns:a16="http://schemas.microsoft.com/office/drawing/2014/main" id="{3A541AEA-BD76-44CE-B273-28CB8DCC5E73}"/>
+                <a16:creationId xmlns:a16="http://schemas.microsoft.com/office/drawing/2014/main" id="{8B1F7F74-91DB-4AC3-AAE4-FC45E8F76AF8}"/>
               </a:ext>
             </a:extLst>
           </p:cNvPr>
@@ -21233,7 +22045,7 @@
           <p:cNvPr id="5" name="">
             <a:extLst xmlns:a="http://schemas.openxmlformats.org/drawingml/2006/main">
               <a:ext uri="{FF2B5EF4-FFF2-40B4-BE49-F238E27FC236}">
-                <a16:creationId xmlns:a16="http://schemas.microsoft.com/office/drawing/2014/main" id="{C114959A-E9AC-42C5-89EF-3162E33B1C04}"/>
+                <a16:creationId xmlns:a16="http://schemas.microsoft.com/office/drawing/2014/main" id="{F10A7FCE-85AB-4547-8E60-015F8B210823}"/>
               </a:ext>
             </a:extLst>
           </p:cNvPr>
@@ -21290,7 +22102,7 @@
           <p:cNvPr id="6" name="">
             <a:extLst xmlns:a="http://schemas.openxmlformats.org/drawingml/2006/main">
               <a:ext uri="{FF2B5EF4-FFF2-40B4-BE49-F238E27FC236}">
-                <a16:creationId xmlns:a16="http://schemas.microsoft.com/office/drawing/2014/main" id="{4F402B8C-F96B-4180-AC85-6C57F18EEB4B}"/>
+                <a16:creationId xmlns:a16="http://schemas.microsoft.com/office/drawing/2014/main" id="{F6A40DFE-EC16-4182-893B-EDD30A831085}"/>
               </a:ext>
             </a:extLst>
           </p:cNvPr>
@@ -21345,7 +22157,7 @@
     </p:spTree>
     <p:extLst>
       <p:ext uri="{BB962C8B-B14F-4D97-AF65-F5344CB8AC3E}">
-        <p14:creationId xmlns:p14="http://schemas.microsoft.com/office/powerpoint/2010/main" val="1208925010"/>
+        <p14:creationId xmlns:p14="http://schemas.microsoft.com/office/powerpoint/2010/main" val="1116098289"/>
       </p:ext>
     </p:extLst>
   </p:cSld>

--- a/output/submission-2026-09-15/counsel-disposition-google-slides.pptx
+++ b/output/submission-2026-09-15/counsel-disposition-google-slides.pptx
@@ -2,57 +2,57 @@
 <file path=ppt/presentation.xml><?xml version="1.0" encoding="utf-8"?>
 <p:presentation xmlns:p="http://schemas.openxmlformats.org/presentationml/2006/main">
   <p:sldMasterIdLst>
-    <p:sldMasterId xmlns:r="http://schemas.openxmlformats.org/officeDocument/2006/relationships" id="2147483648" r:id="R3404b034df864ea1"/>
+    <p:sldMasterId xmlns:r="http://schemas.openxmlformats.org/officeDocument/2006/relationships" id="2147483648" r:id="Ref9524323a114535"/>
   </p:sldMasterIdLst>
   <p:notesMasterIdLst>
-    <p:notesMasterId xmlns:r="http://schemas.openxmlformats.org/officeDocument/2006/relationships" r:id="R4bddc05d8caa4fa5"/>
+    <p:notesMasterId xmlns:r="http://schemas.openxmlformats.org/officeDocument/2006/relationships" r:id="Rb3820cd226d246f0"/>
   </p:notesMasterIdLst>
   <p:sldIdLst>
-    <p:sldId xmlns:r="http://schemas.openxmlformats.org/officeDocument/2006/relationships" id="256" r:id="R89dd8e152dfd470c"/>
-    <p:sldId xmlns:r="http://schemas.openxmlformats.org/officeDocument/2006/relationships" id="257" r:id="Red59d72460df48fd"/>
-    <p:sldId xmlns:r="http://schemas.openxmlformats.org/officeDocument/2006/relationships" id="258" r:id="R22ff7fdc802a4945"/>
-    <p:sldId xmlns:r="http://schemas.openxmlformats.org/officeDocument/2006/relationships" id="259" r:id="Rdfd2814640624ff2"/>
-    <p:sldId xmlns:r="http://schemas.openxmlformats.org/officeDocument/2006/relationships" id="260" r:id="R8ac3a7d01c134a69"/>
-    <p:sldId xmlns:r="http://schemas.openxmlformats.org/officeDocument/2006/relationships" id="261" r:id="Ree29f888bbe84ba1"/>
-    <p:sldId xmlns:r="http://schemas.openxmlformats.org/officeDocument/2006/relationships" id="262" r:id="Re5f6afdfc9954674"/>
-    <p:sldId xmlns:r="http://schemas.openxmlformats.org/officeDocument/2006/relationships" id="263" r:id="R4043130d6d544251"/>
-    <p:sldId xmlns:r="http://schemas.openxmlformats.org/officeDocument/2006/relationships" id="264" r:id="Rf57b83b3c3a24e1a"/>
-    <p:sldId xmlns:r="http://schemas.openxmlformats.org/officeDocument/2006/relationships" id="265" r:id="R7c2c00e387ef4eda"/>
-    <p:sldId xmlns:r="http://schemas.openxmlformats.org/officeDocument/2006/relationships" id="266" r:id="R39aa6ee0fb7b47a4"/>
-    <p:sldId xmlns:r="http://schemas.openxmlformats.org/officeDocument/2006/relationships" id="267" r:id="R9b13dc96ce984a73"/>
-    <p:sldId xmlns:r="http://schemas.openxmlformats.org/officeDocument/2006/relationships" id="268" r:id="R77d36dcd07f74405"/>
-    <p:sldId xmlns:r="http://schemas.openxmlformats.org/officeDocument/2006/relationships" id="269" r:id="Rbe437b10cf4241e0"/>
-    <p:sldId xmlns:r="http://schemas.openxmlformats.org/officeDocument/2006/relationships" id="270" r:id="R74c37d661fd24c30"/>
-    <p:sldId xmlns:r="http://schemas.openxmlformats.org/officeDocument/2006/relationships" id="271" r:id="R6ed66c4e00de48d7"/>
-    <p:sldId xmlns:r="http://schemas.openxmlformats.org/officeDocument/2006/relationships" id="272" r:id="Rdff55eefddc9489b"/>
-    <p:sldId xmlns:r="http://schemas.openxmlformats.org/officeDocument/2006/relationships" id="273" r:id="R3e36dfd8719a4fbf"/>
-    <p:sldId xmlns:r="http://schemas.openxmlformats.org/officeDocument/2006/relationships" id="274" r:id="R5e817591907f44ab"/>
-    <p:sldId xmlns:r="http://schemas.openxmlformats.org/officeDocument/2006/relationships" id="275" r:id="Rf90e3bb3eb34472d"/>
-    <p:sldId xmlns:r="http://schemas.openxmlformats.org/officeDocument/2006/relationships" id="276" r:id="R9a756ab904eb4900"/>
-    <p:sldId xmlns:r="http://schemas.openxmlformats.org/officeDocument/2006/relationships" id="277" r:id="Rd7a7f20e8c5f4355"/>
-    <p:sldId xmlns:r="http://schemas.openxmlformats.org/officeDocument/2006/relationships" id="278" r:id="R11a6475c29324a5b"/>
-    <p:sldId xmlns:r="http://schemas.openxmlformats.org/officeDocument/2006/relationships" id="279" r:id="R36d6af11422a4f7e"/>
-    <p:sldId xmlns:r="http://schemas.openxmlformats.org/officeDocument/2006/relationships" id="280" r:id="Ref64da321d02469c"/>
-    <p:sldId xmlns:r="http://schemas.openxmlformats.org/officeDocument/2006/relationships" id="281" r:id="Rec15b1949ebc4a72"/>
-    <p:sldId xmlns:r="http://schemas.openxmlformats.org/officeDocument/2006/relationships" id="282" r:id="R3cf2f75b3daa4dcc"/>
-    <p:sldId xmlns:r="http://schemas.openxmlformats.org/officeDocument/2006/relationships" id="283" r:id="R59d6a29527ed4965"/>
-    <p:sldId xmlns:r="http://schemas.openxmlformats.org/officeDocument/2006/relationships" id="284" r:id="Rf9b38c548a1b4783"/>
-    <p:sldId xmlns:r="http://schemas.openxmlformats.org/officeDocument/2006/relationships" id="285" r:id="R840363e22e06424c"/>
-    <p:sldId xmlns:r="http://schemas.openxmlformats.org/officeDocument/2006/relationships" id="286" r:id="Rca1ba3c3e2814802"/>
-    <p:sldId xmlns:r="http://schemas.openxmlformats.org/officeDocument/2006/relationships" id="287" r:id="R1c4fe9f8663f4c29"/>
-    <p:sldId xmlns:r="http://schemas.openxmlformats.org/officeDocument/2006/relationships" id="288" r:id="R3010be6ecd774e8d"/>
-    <p:sldId xmlns:r="http://schemas.openxmlformats.org/officeDocument/2006/relationships" id="289" r:id="Rdf3e24cab25340c0"/>
-    <p:sldId xmlns:r="http://schemas.openxmlformats.org/officeDocument/2006/relationships" id="290" r:id="R301a142750dc411d"/>
-    <p:sldId xmlns:r="http://schemas.openxmlformats.org/officeDocument/2006/relationships" id="291" r:id="R700a32eb181c483d"/>
-    <p:sldId xmlns:r="http://schemas.openxmlformats.org/officeDocument/2006/relationships" id="292" r:id="R56608ceafd4b4879"/>
-    <p:sldId xmlns:r="http://schemas.openxmlformats.org/officeDocument/2006/relationships" id="293" r:id="Rf576552c29d84838"/>
-    <p:sldId xmlns:r="http://schemas.openxmlformats.org/officeDocument/2006/relationships" id="294" r:id="Rbe935e6ccb4c4c0f"/>
-    <p:sldId xmlns:r="http://schemas.openxmlformats.org/officeDocument/2006/relationships" id="295" r:id="Rd60debb7368f4948"/>
-    <p:sldId xmlns:r="http://schemas.openxmlformats.org/officeDocument/2006/relationships" id="296" r:id="Rc816ce6364fd48cf"/>
-    <p:sldId xmlns:r="http://schemas.openxmlformats.org/officeDocument/2006/relationships" id="297" r:id="Reb7d73d406fb4245"/>
-    <p:sldId xmlns:r="http://schemas.openxmlformats.org/officeDocument/2006/relationships" id="298" r:id="R38eed893ce194a53"/>
-    <p:sldId xmlns:r="http://schemas.openxmlformats.org/officeDocument/2006/relationships" id="299" r:id="R861a20cc851c474d"/>
-    <p:sldId xmlns:r="http://schemas.openxmlformats.org/officeDocument/2006/relationships" id="300" r:id="R3007c08220424c8b"/>
+    <p:sldId xmlns:r="http://schemas.openxmlformats.org/officeDocument/2006/relationships" id="256" r:id="R52f22bf94bc0433c"/>
+    <p:sldId xmlns:r="http://schemas.openxmlformats.org/officeDocument/2006/relationships" id="257" r:id="R6219a4c236b448fc"/>
+    <p:sldId xmlns:r="http://schemas.openxmlformats.org/officeDocument/2006/relationships" id="258" r:id="R98c083f06b2243bf"/>
+    <p:sldId xmlns:r="http://schemas.openxmlformats.org/officeDocument/2006/relationships" id="259" r:id="Ra93711b89baa4f5c"/>
+    <p:sldId xmlns:r="http://schemas.openxmlformats.org/officeDocument/2006/relationships" id="260" r:id="R4c297dc2b8b34498"/>
+    <p:sldId xmlns:r="http://schemas.openxmlformats.org/officeDocument/2006/relationships" id="261" r:id="R80f7d6bf61b142c8"/>
+    <p:sldId xmlns:r="http://schemas.openxmlformats.org/officeDocument/2006/relationships" id="262" r:id="R18b9bf3deec24b9c"/>
+    <p:sldId xmlns:r="http://schemas.openxmlformats.org/officeDocument/2006/relationships" id="263" r:id="R8c35aa7dd038482e"/>
+    <p:sldId xmlns:r="http://schemas.openxmlformats.org/officeDocument/2006/relationships" id="264" r:id="Rfca17c52cb6345d7"/>
+    <p:sldId xmlns:r="http://schemas.openxmlformats.org/officeDocument/2006/relationships" id="265" r:id="Re114d446c70e4a80"/>
+    <p:sldId xmlns:r="http://schemas.openxmlformats.org/officeDocument/2006/relationships" id="266" r:id="Rd59ab514e54a434d"/>
+    <p:sldId xmlns:r="http://schemas.openxmlformats.org/officeDocument/2006/relationships" id="267" r:id="R5bb96b7fdb0a4703"/>
+    <p:sldId xmlns:r="http://schemas.openxmlformats.org/officeDocument/2006/relationships" id="268" r:id="Rb350127c22ca4628"/>
+    <p:sldId xmlns:r="http://schemas.openxmlformats.org/officeDocument/2006/relationships" id="269" r:id="R9d69f53b72334852"/>
+    <p:sldId xmlns:r="http://schemas.openxmlformats.org/officeDocument/2006/relationships" id="270" r:id="R327e036453064bdf"/>
+    <p:sldId xmlns:r="http://schemas.openxmlformats.org/officeDocument/2006/relationships" id="271" r:id="Rc1ccc3ce9ef747e7"/>
+    <p:sldId xmlns:r="http://schemas.openxmlformats.org/officeDocument/2006/relationships" id="272" r:id="Ra6a6d5bd29a3488c"/>
+    <p:sldId xmlns:r="http://schemas.openxmlformats.org/officeDocument/2006/relationships" id="273" r:id="R5bc04674a36f4b8c"/>
+    <p:sldId xmlns:r="http://schemas.openxmlformats.org/officeDocument/2006/relationships" id="274" r:id="R5b278b67794d4c15"/>
+    <p:sldId xmlns:r="http://schemas.openxmlformats.org/officeDocument/2006/relationships" id="275" r:id="R8162010bdb844ceb"/>
+    <p:sldId xmlns:r="http://schemas.openxmlformats.org/officeDocument/2006/relationships" id="276" r:id="R1adbe6810cc247a5"/>
+    <p:sldId xmlns:r="http://schemas.openxmlformats.org/officeDocument/2006/relationships" id="277" r:id="R303bc4c324674625"/>
+    <p:sldId xmlns:r="http://schemas.openxmlformats.org/officeDocument/2006/relationships" id="278" r:id="Rfe099e6d6029442c"/>
+    <p:sldId xmlns:r="http://schemas.openxmlformats.org/officeDocument/2006/relationships" id="279" r:id="Rbdfc29af9db3473b"/>
+    <p:sldId xmlns:r="http://schemas.openxmlformats.org/officeDocument/2006/relationships" id="280" r:id="Rdfd46edc6be4457e"/>
+    <p:sldId xmlns:r="http://schemas.openxmlformats.org/officeDocument/2006/relationships" id="281" r:id="R3802df0b71a9474a"/>
+    <p:sldId xmlns:r="http://schemas.openxmlformats.org/officeDocument/2006/relationships" id="282" r:id="Rc717bf4d75354564"/>
+    <p:sldId xmlns:r="http://schemas.openxmlformats.org/officeDocument/2006/relationships" id="283" r:id="R23f96093b9b94682"/>
+    <p:sldId xmlns:r="http://schemas.openxmlformats.org/officeDocument/2006/relationships" id="284" r:id="Rd70ec330faa54e68"/>
+    <p:sldId xmlns:r="http://schemas.openxmlformats.org/officeDocument/2006/relationships" id="285" r:id="R67b40ab1d4d5457e"/>
+    <p:sldId xmlns:r="http://schemas.openxmlformats.org/officeDocument/2006/relationships" id="286" r:id="R011306e1498f434e"/>
+    <p:sldId xmlns:r="http://schemas.openxmlformats.org/officeDocument/2006/relationships" id="287" r:id="R84bd6d00e32f4ed4"/>
+    <p:sldId xmlns:r="http://schemas.openxmlformats.org/officeDocument/2006/relationships" id="288" r:id="Raa909ed8eeef47d8"/>
+    <p:sldId xmlns:r="http://schemas.openxmlformats.org/officeDocument/2006/relationships" id="289" r:id="R83f969341157438c"/>
+    <p:sldId xmlns:r="http://schemas.openxmlformats.org/officeDocument/2006/relationships" id="290" r:id="R965e8ed387c5446f"/>
+    <p:sldId xmlns:r="http://schemas.openxmlformats.org/officeDocument/2006/relationships" id="291" r:id="R60f87ab952bb4593"/>
+    <p:sldId xmlns:r="http://schemas.openxmlformats.org/officeDocument/2006/relationships" id="292" r:id="R48da5e5306124b01"/>
+    <p:sldId xmlns:r="http://schemas.openxmlformats.org/officeDocument/2006/relationships" id="293" r:id="R2b0c6b38f9ab4162"/>
+    <p:sldId xmlns:r="http://schemas.openxmlformats.org/officeDocument/2006/relationships" id="294" r:id="Rce282545572c48a9"/>
+    <p:sldId xmlns:r="http://schemas.openxmlformats.org/officeDocument/2006/relationships" id="295" r:id="Rd432734aeea34400"/>
+    <p:sldId xmlns:r="http://schemas.openxmlformats.org/officeDocument/2006/relationships" id="296" r:id="Rb3794a4bca8640c9"/>
+    <p:sldId xmlns:r="http://schemas.openxmlformats.org/officeDocument/2006/relationships" id="297" r:id="Rf683bc2772e242ad"/>
+    <p:sldId xmlns:r="http://schemas.openxmlformats.org/officeDocument/2006/relationships" id="298" r:id="R4b7b892fd1b743e5"/>
+    <p:sldId xmlns:r="http://schemas.openxmlformats.org/officeDocument/2006/relationships" id="299" r:id="R478b2a4a6230416a"/>
+    <p:sldId xmlns:r="http://schemas.openxmlformats.org/officeDocument/2006/relationships" id="300" r:id="R0494c27d1ee9442e"/>
   </p:sldIdLst>
   <p:sldSz cx="12192000" cy="6858000"/>
   <p:notesSz cx="6858000" cy="9144000"/>
@@ -506,6 +506,16 @@
           </a:p>
           <a:p xmlns:a="http://schemas.openxmlformats.org/drawingml/2006/main">
             <a:r>
+              <a:t>Open with the shared clinical problem: a reassuring routing error can delay necessary assessment, while unnecessary escalation consumes attention. I built the smallest executable contract and made its behavior inspectable. I tested added complexity, retained the failures and kept the demonstration simple because the additional components did not establish a reliable improvement. The expanded project exceeded the original assignment timebox; it is not presented as an eight-hour build. The first four slides establish the concrete failure and the historical architecture before discussing the proposed evaluation controls.</a:t>
+            </a:r>
+          </a:p>
+          <a:p xmlns:a="http://schemas.openxmlformats.org/drawingml/2006/main">
+            <a:r>
+              <a:t/>
+            </a:r>
+          </a:p>
+          <a:p xmlns:a="http://schemas.openxmlformats.org/drawingml/2006/main">
+            <a:r>
               <a:t>Sources</a:t>
             </a:r>
           </a:p>
@@ -1016,7 +1026,7 @@
           </a:p>
           <a:p xmlns:a="http://schemas.openxmlformats.org/drawingml/2006/main">
             <a:r>
-              <a:t>The completed study adds direct failure evidence. Exact baseline request parity does not reproduce the original agreement. Fable rapid-context repetition 2 exchanges urgent misses without changing their count. The source package changes C47 to the accepted route but do not eliminate other clinician misses and introduce authored challenge regressions. The full endpoint and case-level record matters more than a ranking. These are development observations, not measured outcomes in Counsel care.</a:t>
+              <a:t>The completed study adds direct failure evidence. Exact baseline request parity does not reproduce the original agreement. Fable rapid-context repetition 2 exchanges urgent misses without changing their count. The source package changes C47 to the accepted route but does not eliminate other clinician misses and introduces authored challenge regressions. The full endpoint and case-level record matters more than a ranking. These are development observations, not measured outcomes in Counsel care.</a:t>
             </a:r>
           </a:p>
           <a:p xmlns:a="http://schemas.openxmlformats.org/drawingml/2006/main">
@@ -1211,6 +1221,16 @@
           </a:p>
           <a:p xmlns:a="http://schemas.openxmlformats.org/drawingml/2006/main">
             <a:r>
+              <a:t>The commitment is a bounded, reviewable contribution: own the code, preserve the baseline, prepare clinical review material, make one matched comparison and hand over a result that supports a decision. The outcome may be retaining the baseline. Clinical partners own the policy and adjudication; care operations own the feasible pathway. Do not promise a specific agreement increase or clinical outcome before measurement.</a:t>
+            </a:r>
+          </a:p>
+          <a:p xmlns:a="http://schemas.openxmlformats.org/drawingml/2006/main">
+            <a:r>
+              <a:t/>
+            </a:r>
+          </a:p>
+          <a:p xmlns:a="http://schemas.openxmlformats.org/drawingml/2006/main">
+            <a:r>
               <a:t>Sources</a:t>
             </a:r>
           </a:p>
@@ -4541,6 +4561,16 @@
           </a:p>
           <a:p xmlns:a="http://schemas.openxmlformats.org/drawingml/2006/main">
             <a:r>
+              <a:t>Describe the initial architecture as an overextended scope with incomplete delivery, then show the simpler contract and the subsequent bounded experiments. The accurate conclusion is that added components did not establish a reliable improvement. Do not suggest that the later expanded research was completed inside the original take-home timebox or that an unfinished feature is already integrated.</a:t>
+            </a:r>
+          </a:p>
+          <a:p xmlns:a="http://schemas.openxmlformats.org/drawingml/2006/main">
+            <a:r>
+              <a:t/>
+            </a:r>
+          </a:p>
+          <a:p xmlns:a="http://schemas.openxmlformats.org/drawingml/2006/main">
+            <a:r>
               <a:t>Sources</a:t>
             </a:r>
           </a:p>
@@ -5266,7 +5296,7 @@
           <a:lstStyle xmlns:a="http://schemas.openxmlformats.org/drawingml/2006/main"/>
           <a:p xmlns:a="http://schemas.openxmlformats.org/drawingml/2006/main">
             <a:r>
-              <a:t>The original file is byte-identical to the supplied CSV and contains 50 messages. I used every row and documented the mismatch with the brief. The CSV contains disagreements relevant to red-flag recognition, so agreement with it is not a model-selection objective. Its historical score is preserved separately for traceability. The clinical target is also subject to review: it must specify when guidance alone is sufficient and when physician action is needed. Internal service levels and access to patient records were not established in this exercise.</a:t>
+              <a:t>Define the endpoint before calling an output a false positive or false negative. A clinician-action false negative is SELF_CARE when the frozen reference requires async or urgent action. An urgent false negative is any non-urgent route when urgent escalation is required. Severity, timing and actual care completion are separate from bucket agreement. No patient outcomes were measured.</a:t>
             </a:r>
           </a:p>
           <a:p xmlns:a="http://schemas.openxmlformats.org/drawingml/2006/main">
@@ -5276,7 +5306,7 @@
           </a:p>
           <a:p xmlns:a="http://schemas.openxmlformats.org/drawingml/2006/main">
             <a:r>
-              <a:t>The labels are the frozen research interface. They do not fully specify the receiving service or distinguish first physician contact from the location and deadline of definitive assessment. The later service-context review explains why async contact can still support same-day care. No saved label or output changes.</a:t>
+              <a:t>C22 does not provide the examination findings needed to apply the Ottawa rule. Missing tenderness or four-step weight-bearing information must remain unknown, not be recorded as absent. This does not make every incomplete ankle assessment an emergency. Clinical and operational owners must agree when uncertainty requires physician review, clarification or examination. Rapid async contact can begin same-day care; it cannot itself establish access to examination or completed treatment.</a:t>
             </a:r>
           </a:p>
           <a:p xmlns:a="http://schemas.openxmlformats.org/drawingml/2006/main">
@@ -5286,12 +5316,32 @@
           </a:p>
           <a:p xmlns:a="http://schemas.openxmlformats.org/drawingml/2006/main">
             <a:r>
+              <a:t>C47 remains a historical missed clinician review. Its route agrees with the reference in the source-package repetitions, but that does not certify the rationale. C32, C34 and C38 illustrate why clinicians must also review the reference: their revised self-care targets are label corrections, not model improvements. Do not optimize toward every prior physician label without examining whether the target is defensible.</a:t>
+            </a:r>
+          </a:p>
+          <a:p xmlns:a="http://schemas.openxmlformats.org/drawingml/2006/main">
+            <a:r>
+              <a:t/>
+            </a:r>
+          </a:p>
+          <a:p xmlns:a="http://schemas.openxmlformats.org/drawingml/2006/main">
+            <a:r>
+              <a:t>Next, two physicians independently label new cases without seeing model outputs, with adjudication or an explicit uncertainty category. Fix severity-specific acceptance limits, false-alarm and workload limits, and the handling of abstentions before inference. Track the exact cases: an unchanged urgent-miss count concealed the C49/C43 exchange in the rapid-context experiment. Register a case-level critical-regression rule for future comparisons. Keep familiar examples as regression cases, separate from the independent result. If later clinical use is considered, establish a receiving clinician, response deadline, pause procedure and incident review first. These are proposed controls, not implemented care delivery.</a:t>
+            </a:r>
+          </a:p>
+          <a:p xmlns:a="http://schemas.openxmlformats.org/drawingml/2006/main">
+            <a:r>
+              <a:t/>
+            </a:r>
+          </a:p>
+          <a:p xmlns:a="http://schemas.openxmlformats.org/drawingml/2006/main">
+            <a:r>
               <a:t>Sources</a:t>
             </a:r>
           </a:p>
           <a:p xmlns:a="http://schemas.openxmlformats.org/drawingml/2006/main">
             <a:r>
-              <a:t>docs/TAKE_HOME_REQUIREMENTS_AUDIT_2026-09-15.md</a:t>
+              <a:t>docs/WORKFLOW_REFERENCE_REVIEW_PROTOCOL_2026-09-16.md</a:t>
             </a:r>
           </a:p>
           <a:p xmlns:a="http://schemas.openxmlformats.org/drawingml/2006/main">
@@ -5301,7 +5351,7 @@
           </a:p>
           <a:p xmlns:a="http://schemas.openxmlformats.org/drawingml/2006/main">
             <a:r>
-              <a:t>outputs/submission-audit-2026-09-15/audit.json</a:t>
+              <a:t>docs/WORKFLOW_AWARE_RESULTS_2026-09-16.md</a:t>
             </a:r>
           </a:p>
           <a:p xmlns:a="http://schemas.openxmlformats.org/drawingml/2006/main">
@@ -5321,7 +5371,7 @@
           </a:p>
           <a:p xmlns:a="http://schemas.openxmlformats.org/drawingml/2006/main">
             <a:r>
-              <a:t>docs/COUNSEL_ASYNC_CARE_CONTEXT_2026-09-16.md</a:t>
+              <a:t>https://aci.health.nsw.gov.au/ecat/appendices/ottawa-ankle-adult</a:t>
             </a:r>
           </a:p>
         </p:txBody>
@@ -5391,7 +5441,7 @@
           <a:lstStyle xmlns:a="http://schemas.openxmlformats.org/drawingml/2006/main"/>
           <a:p xmlns:a="http://schemas.openxmlformats.org/drawingml/2006/main">
             <a:r>
-              <a:t>This is the same three-bucket protocol used for the frozen experiments. It has no new clinical rules or prompt edits. The input is one patient message. The output is one bucket and a rationale. There is no separate patient-response generator, retrieval step, judge call, or queue integration. A rationale can still contain medical advice, so correct routing alone cannot establish its clinical quality. A future operational specification would need to define timing and responsibility for escalation.</a:t>
+              <a:t>Start with the clinical decision and one narrow, observable criterion. Examples include whether the route requires clinician action, whether a rationale invents a negative finding, and whether a medication recommendation omits a required precaution. These are different endpoints and should not be collapsed into a single impression of quality. Provide only information available at decision time. Return criterion identity, a quoted evidence span, verdict and short justification. If the criterion cannot be determined, return ABSTAIN rather than force a pass. Use deterministic software checks for contracts that can be checked directly.</a:t>
             </a:r>
           </a:p>
           <a:p xmlns:a="http://schemas.openxmlformats.org/drawingml/2006/main">
@@ -5401,7 +5451,7 @@
           </a:p>
           <a:p xmlns:a="http://schemas.openxmlformats.org/drawingml/2006/main">
             <a:r>
-              <a:t>ASYNC_PHYSICIAN describes a communication channel, not an assumption of delayed care. Rapid async physician review can be compatible with same-day care, subject to the available clinical capabilities and the required deadline. The urgent bucket in this frozen evaluation still combines same-day in-person care and emergency action. Its saved labels and deterministic scores remain unchanged. The service-context correction does not make all async alternatives clinically interchangeable. A future clinical and operational contract must specify the next contact, necessary care setting, clinical deadline and who confirms completion. None of those service events was measured or implemented in the current prototype.</a:t>
+              <a:t>Implemented outside the selected GUI: five retrospective Mastra research judges with evidence spans, decision-time boundaries and typed abstention; nine separate deterministic software-contract scorers. Those five criterion-specific CQA agents are one research implementation. A separate graph reviewer scores seven criteria; its 28-call full-versus-concise experiment detected seven of seven planted target defects and accepted seven of seven target controls in each style. Those results do not validate the five CQA agents. The authored examples check the graph reviewer’s target mechanism, not clinical validity. They do not establish rare-failure sensitivity or a safe online gate. Historical V25 recorded zero judge calls in its 50-case cohort, despite the proposed architecture diagram. The stripped demonstration calls no judge.</a:t>
             </a:r>
           </a:p>
           <a:p xmlns:a="http://schemas.openxmlformats.org/drawingml/2006/main">
@@ -5411,7 +5461,7 @@
           </a:p>
           <a:p xmlns:a="http://schemas.openxmlformats.org/drawingml/2006/main">
             <a:r>
-              <a:t>The table explains the displayed routes and the public service context. It is not a verbatim quotation of the frozen minimal system prompt. The newer workflow experiment explicitly tests adding these distinctions in a separate version. The selected demonstration retains its original prompt.</a:t>
+              <a:t>Proposed validation: clinicians author the criteria and independently label development, calibration and untouched test sets. Blind reviewers to model identity and model output where constructing the clinical target; judge-validation reviewers necessarily see the output they are evaluating. Include uncommon high-severity failures, with sampling and prevalence reported separately. For each criterion report failure sensitivity, false-alarm rate, abstention, uncertainty intervals and review workload. Test whether the judge ranks competing versions correctly, including across model families. Version the rubric, examples and judge configuration. Begin retrospectively; a blocking judge or automated repair needs a separate comparison including new errors and delay.</a:t>
             </a:r>
           </a:p>
           <a:p xmlns:a="http://schemas.openxmlformats.org/drawingml/2006/main">
@@ -5421,12 +5471,22 @@
           </a:p>
           <a:p xmlns:a="http://schemas.openxmlformats.org/drawingml/2006/main">
             <a:r>
+              <a:t>Counsel’s supplied report describes specialized condition-specific judges over full clinical threads. This project is limited to opening messages and does not reproduce its proprietary rubric or transfer its reported metrics. Weighted aggregate recall cannot be read as sensitivity for rare serious errors. The next useful contribution is a clinician-reviewed judge calibration set and a documented decision about which criterion can be evaluated reliably.</a:t>
+            </a:r>
+          </a:p>
+          <a:p xmlns:a="http://schemas.openxmlformats.org/drawingml/2006/main">
+            <a:r>
+              <a:t/>
+            </a:r>
+          </a:p>
+          <a:p xmlns:a="http://schemas.openxmlformats.org/drawingml/2006/main">
+            <a:r>
               <a:t>Sources</a:t>
             </a:r>
           </a:p>
           <a:p xmlns:a="http://schemas.openxmlformats.org/drawingml/2006/main">
             <a:r>
-              <a:t>src/stripped/protocol.ts</a:t>
+              <a:t>docs/JUDGE_STYLE_COMPARISON_2026-09-14.md</a:t>
             </a:r>
           </a:p>
           <a:p xmlns:a="http://schemas.openxmlformats.org/drawingml/2006/main">
@@ -5436,7 +5496,7 @@
           </a:p>
           <a:p xmlns:a="http://schemas.openxmlformats.org/drawingml/2006/main">
             <a:r>
-              <a:t>data/evaluation/physician-adjudication-v3-2026-09-15.json</a:t>
+              <a:t>docs/V25_COMPLETED_REPORT.md</a:t>
             </a:r>
           </a:p>
           <a:p xmlns:a="http://schemas.openxmlformats.org/drawingml/2006/main">
@@ -5446,7 +5506,7 @@
           </a:p>
           <a:p xmlns:a="http://schemas.openxmlformats.org/drawingml/2006/main">
             <a:r>
-              <a:t>docs/COUNSEL_ASYNC_CARE_CONTEXT_2026-09-16.md</a:t>
+              <a:t>https://www.counselhealth.com/ai-report/llm-as-a-judge</a:t>
             </a:r>
           </a:p>
           <a:p xmlns:a="http://schemas.openxmlformats.org/drawingml/2006/main">
@@ -5456,7 +5516,47 @@
           </a:p>
           <a:p xmlns:a="http://schemas.openxmlformats.org/drawingml/2006/main">
             <a:r>
-              <a:t>https://www.counselhealth.com/</a:t>
+              <a:t>https://tech.abridge.com/blog/continual-monitoring-validating-and-using-llm-judges</a:t>
+            </a:r>
+          </a:p>
+          <a:p xmlns:a="http://schemas.openxmlformats.org/drawingml/2006/main">
+            <a:r>
+              <a:t/>
+            </a:r>
+          </a:p>
+          <a:p xmlns:a="http://schemas.openxmlformats.org/drawingml/2006/main">
+            <a:r>
+              <a:t>src/mastra/agents/quality-judges.ts</a:t>
+            </a:r>
+          </a:p>
+          <a:p xmlns:a="http://schemas.openxmlformats.org/drawingml/2006/main">
+            <a:r>
+              <a:t/>
+            </a:r>
+          </a:p>
+          <a:p xmlns:a="http://schemas.openxmlformats.org/drawingml/2006/main">
+            <a:r>
+              <a:t>src/cqa/rubrics.ts</a:t>
+            </a:r>
+          </a:p>
+          <a:p xmlns:a="http://schemas.openxmlformats.org/drawingml/2006/main">
+            <a:r>
+              <a:t/>
+            </a:r>
+          </a:p>
+          <a:p xmlns:a="http://schemas.openxmlformats.org/drawingml/2006/main">
+            <a:r>
+              <a:t>src/mastra/workflows/quality-audit-workflow.ts</a:t>
+            </a:r>
+          </a:p>
+          <a:p xmlns:a="http://schemas.openxmlformats.org/drawingml/2006/main">
+            <a:r>
+              <a:t/>
+            </a:r>
+          </a:p>
+          <a:p xmlns:a="http://schemas.openxmlformats.org/drawingml/2006/main">
+            <a:r>
+              <a:t>src/evaluation/handoff-graders.mjs</a:t>
             </a:r>
           </a:p>
         </p:txBody>
@@ -5526,7 +5626,7 @@
           <a:lstStyle xmlns:a="http://schemas.openxmlformats.org/drawingml/2006/main"/>
           <a:p xmlns:a="http://schemas.openxmlformats.org/drawingml/2006/main">
             <a:r>
-              <a:t>Use the canonical local server at localhost:4120/stripped after npm run demo. The public reviewer guide documents startup and offline review. Confirm the exact message, submit, and describe the actual output. Show loading, disposition, and rationale, then the request and response trace. Edit C06 to add crushing chest pressure, sweating, and left-arm radiation. Confirm that editing clears the old answer and that the next call contains only the edited message. Frozen benchmark records and live demonstrations are different observations. If the call fails, preserve the failure and show a dated saved run with its ID. A saved result must be identified as such. The prior browser verification covered all three buckets and an in-flight edit.</a:t>
+              <a:t>Retrieval-augmented generation supplies selected external evidence to the model. The narrow use here is to test a documented failure mechanism, not to attach an undifferentiated guideline library to every message. Retrieve sources with version, citation, inclusion and exclusion conditions. Check applicability against facts actually present in the message, preserving unknown findings. The answer should cite the source supporting the decision and avoid asserting that missing clinical findings are negative. Retrieved content is evidence, not an instruction that overrides the routing contract.</a:t>
             </a:r>
           </a:p>
           <a:p xmlns:a="http://schemas.openxmlformats.org/drawingml/2006/main">
@@ -5536,12 +5636,42 @@
           </a:p>
           <a:p xmlns:a="http://schemas.openxmlformats.org/drawingml/2006/main">
             <a:r>
+              <a:t>Completed research includes seven source cards, lexical and dense search, exclusions, citations and frozen evidence packets. The four-arm study compared original prompt, rapid async context, explicit care pathways, and pathways plus the evidence package. Fable’s evidence package scored 46/50 in both repetitions, versus 45/50 twice for the contemporary pathway arm. C47 changed to async in both repetitions. C22 remained self-care despite receiving both ankle cards. Dense ranking changed the selected card order for none of 98 messages relative to the lexical path. Packet metadata can differ; this is a selection comparison, not a byte-identity claim. No embeddings-specific benefit was observed.</a:t>
+            </a:r>
+          </a:p>
+          <a:p xmlns:a="http://schemas.openxmlformats.org/drawingml/2006/main">
+            <a:r>
+              <a:t/>
+            </a:r>
+          </a:p>
+          <a:p xmlns:a="http://schemas.openxmlformats.org/drawingml/2006/main">
+            <a:r>
+              <a:t>The package adds evidence-use instructions as well as cards, so this is not an isolated causal test of retrieval. A later offline candidate audit surfaced omitted topics, but none of the candidate pairs has clinician relevance review. Retrieval ranking, source applicability and downstream clinical decisions need separate labels. Next, review relevance and applicability independently, include paraphrases, exclusions and negation, then run a matched new-case comparison that changes one component. Separate missing-source failures from misinterpreted evidence, unsupported patient facts and missing examination findings.</a:t>
+            </a:r>
+          </a:p>
+          <a:p xmlns:a="http://schemas.openxmlformats.org/drawingml/2006/main">
+            <a:r>
+              <a:t/>
+            </a:r>
+          </a:p>
+          <a:p xmlns:a="http://schemas.openxmlformats.org/drawingml/2006/main">
+            <a:r>
+              <a:t>The selected live GUI remains message-only and invokes no retrieval. These experiments justify a more specific next evaluation; they do not establish clinical improvement or deployment readiness.</a:t>
+            </a:r>
+          </a:p>
+          <a:p xmlns:a="http://schemas.openxmlformats.org/drawingml/2006/main">
+            <a:r>
+              <a:t/>
+            </a:r>
+          </a:p>
+          <a:p xmlns:a="http://schemas.openxmlformats.org/drawingml/2006/main">
+            <a:r>
               <a:t>Sources</a:t>
             </a:r>
           </a:p>
           <a:p xmlns:a="http://schemas.openxmlformats.org/drawingml/2006/main">
             <a:r>
-              <a:t>docs/DEMO_SCRIPT_2026-09-15.md</a:t>
+              <a:t>docs/WORKFLOW_AWARE_RESULTS_2026-09-16.md</a:t>
             </a:r>
           </a:p>
           <a:p xmlns:a="http://schemas.openxmlformats.org/drawingml/2006/main">
@@ -5551,7 +5681,7 @@
           </a:p>
           <a:p xmlns:a="http://schemas.openxmlformats.org/drawingml/2006/main">
             <a:r>
-              <a:t>outputs/stripped-gui-2026-09-15/manifest.json</a:t>
+              <a:t>docs/WORKFLOW_EVIDENCE_FAILURE_ANALYSIS_2026-09-16.md</a:t>
             </a:r>
           </a:p>
           <a:p xmlns:a="http://schemas.openxmlformats.org/drawingml/2006/main">
@@ -5561,7 +5691,17 @@
           </a:p>
           <a:p xmlns:a="http://schemas.openxmlformats.org/drawingml/2006/main">
             <a:r>
-              <a:t>docs/GUI_ACCESS.md</a:t>
+              <a:t>docs/WORKFLOW_EVIDENCE_REVIEW_2026-09-16.md</a:t>
+            </a:r>
+          </a:p>
+          <a:p xmlns:a="http://schemas.openxmlformats.org/drawingml/2006/main">
+            <a:r>
+              <a:t/>
+            </a:r>
+          </a:p>
+          <a:p xmlns:a="http://schemas.openxmlformats.org/drawingml/2006/main">
+            <a:r>
+              <a:t>docs/RETRIEVAL_CANDIDATE_AUDIT_2026-09-16.md</a:t>
             </a:r>
           </a:p>
         </p:txBody>
@@ -5631,6 +5771,16 @@
           <a:lstStyle xmlns:a="http://schemas.openxmlformats.org/drawingml/2006/main"/>
           <a:p xmlns:a="http://schemas.openxmlformats.org/drawingml/2006/main">
             <a:r>
+              <a:t>Use the canonical local server at localhost:4120/stripped after npm run demo. The public reviewer guide documents startup and offline review. Confirm the exact message, submit, and describe the actual output. Show loading, disposition and rationale, then expand Model configuration. Edit C06 to add crushing chest pressure, sweating, and left-arm radiation. Confirm that editing clears the old answer and that the next call contains only the edited message. Frozen benchmark records and live demonstrations are different observations. If the call fails, preserve the failure and show a dated saved run with its ID. A saved result must be identified as such. The prior browser verification covered all three buckets and an in-flight edit.</a:t>
+            </a:r>
+          </a:p>
+          <a:p xmlns:a="http://schemas.openxmlformats.org/drawingml/2006/main">
+            <a:r>
+              <a:t/>
+            </a:r>
+          </a:p>
+          <a:p xmlns:a="http://schemas.openxmlformats.org/drawingml/2006/main">
+            <a:r>
               <a:t>Mastra provides one visible step. It does not rewrite the model request or invoke an additional model. The frozen configuration is claude-fable-5-1, adaptive thinking, low effort, and 4096 maximum output tokens. The system prompt and message-only user content are unchanged. Request-shape, payload-size, and concurrency checks protect the software boundary. They do not adjudicate clinical decisions. Tests compare all saved requests and replay all saved responses through the parser. These checks establish request and parser compatibility, not clinical performance on new cases.</a:t>
             </a:r>
           </a:p>
@@ -5641,11 +5791,81 @@
           </a:p>
           <a:p xmlns:a="http://schemas.openxmlformats.org/drawingml/2006/main">
             <a:r>
+              <a:t>Keep the interface simple and use the demonstration to expose the implementation boundary. Name the three exact outputs: SELF_CARE, ASYNC_PHYSICIAN and URGENT_ESCALATION. The frozen refill rule routes prescribing assessment to async unless clear same-day or emergency red flags require escalation. Explain that async can support same-day care but the prototype does not confirm receiving services, treatment or follow-up.</a:t>
+            </a:r>
+          </a:p>
+          <a:p xmlns:a="http://schemas.openxmlformats.org/drawingml/2006/main">
+            <a:r>
+              <a:t/>
+            </a:r>
+          </a:p>
+          <a:p xmlns:a="http://schemas.openxmlformats.org/drawingml/2006/main">
+            <a:r>
+              <a:t>Suggested seven-minute sequence: one minute to establish the contract and choose the routine case, two minutes for urgent and refill submissions, one minute to edit and inspect stale-result handling, one minute for the frozen configuration and single-call implementation, and two minutes in the separate offline case viewer to compare saved failures and repetitions. Use actual live output; preserve unexpected answers. If provider timing prevents completion, explicitly switch to a dated saved result. No benchmark score is attached to a new live answer. Traces expose the request and returned rationale, not hidden chain of thought.</a:t>
+            </a:r>
+          </a:p>
+          <a:p xmlns:a="http://schemas.openxmlformats.org/drawingml/2006/main">
+            <a:r>
+              <a:t/>
+            </a:r>
+          </a:p>
+          <a:p xmlns:a="http://schemas.openxmlformats.org/drawingml/2006/main">
+            <a:r>
+              <a:t>The submitted brief accepts a lightweight prompt-driven build. The value demonstrated is an executable contract, inspectable behavior, error handling and reproducible evaluation. Judge and retrieval experiments on slides 6 and 7 are not live features. The original 48/50 is historical saved-output agreement; fresh identical-request controls returned 45/50 and 46/50.</a:t>
+            </a:r>
+          </a:p>
+          <a:p xmlns:a="http://schemas.openxmlformats.org/drawingml/2006/main">
+            <a:r>
+              <a:t/>
+            </a:r>
+          </a:p>
+          <a:p xmlns:a="http://schemas.openxmlformats.org/drawingml/2006/main">
+            <a:r>
+              <a:t>During the prepared walkthrough, keep Request &amp; response trace collapsed and use Model configuration plus the short workflow implementation to explain the call boundary. Complete trace records remain available for separate technical inspection. The saved-result viewer is a separate local page, not an integrated feature of the live classifier.</a:t>
+            </a:r>
+          </a:p>
+          <a:p xmlns:a="http://schemas.openxmlformats.org/drawingml/2006/main">
+            <a:r>
+              <a:t/>
+            </a:r>
+          </a:p>
+          <a:p xmlns:a="http://schemas.openxmlformats.org/drawingml/2006/main">
+            <a:r>
               <a:t>Sources</a:t>
             </a:r>
           </a:p>
           <a:p xmlns:a="http://schemas.openxmlformats.org/drawingml/2006/main">
             <a:r>
+              <a:t>docs/DEMO_SCRIPT_2026-09-15.md</a:t>
+            </a:r>
+          </a:p>
+          <a:p xmlns:a="http://schemas.openxmlformats.org/drawingml/2006/main">
+            <a:r>
+              <a:t/>
+            </a:r>
+          </a:p>
+          <a:p xmlns:a="http://schemas.openxmlformats.org/drawingml/2006/main">
+            <a:r>
+              <a:t>outputs/stripped-gui-2026-09-15/manifest.json</a:t>
+            </a:r>
+          </a:p>
+          <a:p xmlns:a="http://schemas.openxmlformats.org/drawingml/2006/main">
+            <a:r>
+              <a:t/>
+            </a:r>
+          </a:p>
+          <a:p xmlns:a="http://schemas.openxmlformats.org/drawingml/2006/main">
+            <a:r>
+              <a:t>docs/GUI_ACCESS.md</a:t>
+            </a:r>
+          </a:p>
+          <a:p xmlns:a="http://schemas.openxmlformats.org/drawingml/2006/main">
+            <a:r>
+              <a:t/>
+            </a:r>
+          </a:p>
+          <a:p xmlns:a="http://schemas.openxmlformats.org/drawingml/2006/main">
+            <a:r>
               <a:t>src/stripped/workflow.ts</a:t>
             </a:r>
           </a:p>
@@ -5667,6 +5887,26 @@
           <a:p xmlns:a="http://schemas.openxmlformats.org/drawingml/2006/main">
             <a:r>
               <a:t>tests/stripped-gui-workflow.test.mjs</a:t>
+            </a:r>
+          </a:p>
+          <a:p xmlns:a="http://schemas.openxmlformats.org/drawingml/2006/main">
+            <a:r>
+              <a:t/>
+            </a:r>
+          </a:p>
+          <a:p xmlns:a="http://schemas.openxmlformats.org/drawingml/2006/main">
+            <a:r>
+              <a:t>publication/workflow-study-review/README.md</a:t>
+            </a:r>
+          </a:p>
+          <a:p xmlns:a="http://schemas.openxmlformats.org/drawingml/2006/main">
+            <a:r>
+              <a:t/>
+            </a:r>
+          </a:p>
+          <a:p xmlns:a="http://schemas.openxmlformats.org/drawingml/2006/main">
+            <a:r>
+              <a:t>docs/TAKE_HOME_REQUIREMENTS_AUDIT_2026-09-15.md</a:t>
             </a:r>
           </a:p>
         </p:txBody>
@@ -5859,7 +6099,7 @@
   </p:cSld>
   <p:clrMap bg1="lt1" tx1="dk1" bg2="lt2" tx2="dk2" accent1="accent1" accent2="accent2" accent3="accent3" accent4="accent4" accent5="accent5" accent6="accent6" hlink="hlink" folHlink="folHlink"/>
   <p:sldLayoutIdLst>
-    <p:sldLayoutId xmlns:r="http://schemas.openxmlformats.org/officeDocument/2006/relationships" id="2147483649" r:id="R9f4116583333416f"/>
+    <p:sldLayoutId xmlns:r="http://schemas.openxmlformats.org/officeDocument/2006/relationships" id="2147483649" r:id="Rbacef57adf4d41f4"/>
   </p:sldLayoutIdLst>
   <p:txStyles>
     <p:titleStyle>
@@ -6410,7 +6650,7 @@
           <p:cNvPr id="16" name="">
             <a:extLst>
               <a:ext uri="{FF2B5EF4-FFF2-40B4-BE49-F238E27FC236}">
-                <ns2:creationId id="{59469254-4C1C-463B-889A-5CB3F8FCD751}"/>
+                <ns2:creationId id="{384E0F28-2818-469D-BBB0-C46DDF7AC7B7}"/>
               </a:ext>
             </a:extLst>
           </p:cNvPr>
@@ -6467,7 +6707,7 @@
           <p:cNvPr id="2" name="">
             <a:extLst>
               <a:ext uri="{FF2B5EF4-FFF2-40B4-BE49-F238E27FC236}">
-                <ns2:creationId id="{D613FC31-1821-4BF6-842F-5A3D407930F1}"/>
+                <ns2:creationId id="{A7123FE7-24AE-4791-91ED-20461062F37B}"/>
               </a:ext>
             </a:extLst>
           </p:cNvPr>
@@ -6528,7 +6768,7 @@
           <p:nvPr/>
         </p:nvPicPr>
         <p:blipFill>
-          <a:blip r:embed="R3e996c6eb9ec4b69"/>
+          <a:blip r:embed="R1b36a13fa80245fb"/>
           <a:stretch/>
         </p:blipFill>
         <p:spPr>
@@ -6546,7 +6786,7 @@
           <p:cNvPr id="4" name="">
             <a:extLst>
               <a:ext uri="{FF2B5EF4-FFF2-40B4-BE49-F238E27FC236}">
-                <ns2:creationId id="{6609F0E3-4818-4D9F-BC44-1C1C7A81F77E}"/>
+                <ns2:creationId id="{E6643F58-7D30-43DA-8215-92474CE8DC4A}"/>
               </a:ext>
             </a:extLst>
           </p:cNvPr>
@@ -6603,7 +6843,7 @@
           <p:cNvPr id="5" name="">
             <a:extLst>
               <a:ext uri="{FF2B5EF4-FFF2-40B4-BE49-F238E27FC236}">
-                <ns2:creationId id="{A8D0C9D1-D054-48B3-8C14-106EBA422C28}"/>
+                <ns2:creationId id="{93094494-A1A5-463B-82B9-7B79D4249E86}"/>
               </a:ext>
             </a:extLst>
           </p:cNvPr>
@@ -6660,7 +6900,7 @@
           <p:cNvPr id="6" name="">
             <a:extLst>
               <a:ext uri="{FF2B5EF4-FFF2-40B4-BE49-F238E27FC236}">
-                <ns2:creationId id="{52DA368A-5978-4FC5-9BFB-7E7364F63234}"/>
+                <ns2:creationId id="{ECF004BC-6098-4141-8BAF-F9C456ACDE04}"/>
               </a:ext>
             </a:extLst>
           </p:cNvPr>
@@ -6717,7 +6957,7 @@
           <p:cNvPr id="7" name="">
             <a:extLst>
               <a:ext uri="{FF2B5EF4-FFF2-40B4-BE49-F238E27FC236}">
-                <ns2:creationId id="{FD1479F0-2BC4-4740-AEEE-DEDE07562155}"/>
+                <ns2:creationId id="{3FF0E1BD-121C-4A15-BF77-E92BE85A8F73}"/>
               </a:ext>
             </a:extLst>
           </p:cNvPr>
@@ -6774,7 +7014,7 @@
           <p:cNvPr id="8" name="">
             <a:extLst>
               <a:ext uri="{FF2B5EF4-FFF2-40B4-BE49-F238E27FC236}">
-                <ns2:creationId id="{6C5E97F0-16BB-4924-A70E-12A17A079E19}"/>
+                <ns2:creationId id="{D8A55024-8893-481B-BF85-154EB83852ED}"/>
               </a:ext>
             </a:extLst>
           </p:cNvPr>
@@ -6832,7 +7072,7 @@
           <p:cNvPr id="9" name="">
             <a:extLst>
               <a:ext uri="{FF2B5EF4-FFF2-40B4-BE49-F238E27FC236}">
-                <ns2:creationId id="{1F6027E6-FF07-4D09-B9A0-0AC5FEE8E543}"/>
+                <ns2:creationId id="{ACCEC0A3-57BD-4584-B082-51ACFD48F117}"/>
               </a:ext>
             </a:extLst>
           </p:cNvPr>
@@ -6889,7 +7129,7 @@
           <p:cNvPr id="10" name="">
             <a:extLst>
               <a:ext uri="{FF2B5EF4-FFF2-40B4-BE49-F238E27FC236}">
-                <ns2:creationId id="{46C5A6D8-653B-4833-B9EA-56EE31FD3033}"/>
+                <ns2:creationId id="{B9B014B2-F873-4FDD-977A-98ED5856870A}"/>
               </a:ext>
             </a:extLst>
           </p:cNvPr>
@@ -6946,7 +7186,7 @@
           <p:cNvPr id="11" name="">
             <a:extLst>
               <a:ext uri="{FF2B5EF4-FFF2-40B4-BE49-F238E27FC236}">
-                <ns2:creationId id="{B0133D1F-5114-462F-9D57-E05EF4BDB3C0}"/>
+                <ns2:creationId id="{DAEEAA63-3BFF-42EB-9B0E-13F01A586054}"/>
               </a:ext>
             </a:extLst>
           </p:cNvPr>
@@ -7004,7 +7244,7 @@
           <p:cNvPr id="12" name="">
             <a:extLst>
               <a:ext uri="{FF2B5EF4-FFF2-40B4-BE49-F238E27FC236}">
-                <ns2:creationId id="{6F881309-97CD-4D95-8871-47EFA0C496D7}"/>
+                <ns2:creationId id="{EECBAA9C-4E2C-4058-8889-03F6DB3E33DA}"/>
               </a:ext>
             </a:extLst>
           </p:cNvPr>
@@ -7061,7 +7301,7 @@
           <p:cNvPr id="13" name="">
             <a:extLst>
               <a:ext uri="{FF2B5EF4-FFF2-40B4-BE49-F238E27FC236}">
-                <ns2:creationId id="{6E3FCE39-1F23-4DC6-B290-252D97042641}"/>
+                <ns2:creationId id="{B110602A-D1B7-4EAE-BD8F-1F00144984C3}"/>
               </a:ext>
             </a:extLst>
           </p:cNvPr>
@@ -7118,7 +7358,7 @@
           <p:cNvPr id="14" name="">
             <a:extLst>
               <a:ext uri="{FF2B5EF4-FFF2-40B4-BE49-F238E27FC236}">
-                <ns2:creationId id="{99E13E71-12DD-474A-A4A6-12557E07583F}"/>
+                <ns2:creationId id="{CA7B0C9A-3CB8-46FC-96EC-E3B30DFAD5D7}"/>
               </a:ext>
             </a:extLst>
           </p:cNvPr>
@@ -7175,7 +7415,7 @@
           <p:cNvPr id="15" name="">
             <a:extLst>
               <a:ext uri="{FF2B5EF4-FFF2-40B4-BE49-F238E27FC236}">
-                <ns2:creationId id="{80C0117B-AA5F-4F70-AAD5-61A4C2423B9B}"/>
+                <ns2:creationId id="{7544480A-6D5F-4A71-A095-8BC5A412CBDE}"/>
               </a:ext>
             </a:extLst>
           </p:cNvPr>
@@ -7230,7 +7470,7 @@
     </p:spTree>
     <p:extLst>
       <p:ext uri="{BB962C8B-B14F-4D97-AF65-F5344CB8AC3E}">
-        <ns4:creationId val="732481755"/>
+        <ns4:creationId val="2006524862"/>
       </p:ext>
     </p:extLst>
   </p:cSld>
@@ -7261,7 +7501,7 @@
           <p:cNvPr id="7" name="">
             <a:extLst xmlns:a="http://schemas.openxmlformats.org/drawingml/2006/main">
               <a:ext uri="{FF2B5EF4-FFF2-40B4-BE49-F238E27FC236}">
-                <a16:creationId xmlns:a16="http://schemas.microsoft.com/office/drawing/2014/main" id="{89350CA1-D344-4EAB-B2B4-0D8A6499EDED}"/>
+                <a16:creationId xmlns:a16="http://schemas.microsoft.com/office/drawing/2014/main" id="{33694EC5-B805-4E4D-8058-8DD3C7682BBE}"/>
               </a:ext>
             </a:extLst>
           </p:cNvPr>
@@ -7308,7 +7548,7 @@
                 <a:ea typeface="Arial"/>
                 <a:cs typeface="Arial"/>
               </a:rPr>
-              <a:t>Clearer workflow language: mixed Fable results</a:t>
+              <a:t>Workflow context produced mixed results</a:t>
             </a:r>
           </a:p>
         </p:txBody>
@@ -7832,7 +8072,7 @@
           <p:cNvPr id="3" name="">
             <a:extLst xmlns:a="http://schemas.openxmlformats.org/drawingml/2006/main">
               <a:ext uri="{FF2B5EF4-FFF2-40B4-BE49-F238E27FC236}">
-                <a16:creationId xmlns:a16="http://schemas.microsoft.com/office/drawing/2014/main" id="{D51619C2-45E5-49A0-9FB3-E6FB128351AA}"/>
+                <a16:creationId xmlns:a16="http://schemas.microsoft.com/office/drawing/2014/main" id="{67CA7CCD-8AF7-49AF-A7C2-6CBC209B9A32}"/>
               </a:ext>
             </a:extLst>
           </p:cNvPr>
@@ -7879,7 +8119,7 @@
                 <a:ea typeface="Arial"/>
                 <a:cs typeface="Arial"/>
               </a:rPr>
-              <a:t>Each cell shows repetition 1 / repetition 2.</a:t>
+              <a:t>Cells show repetition 1 / repetition 2.</a:t>
             </a:r>
           </a:p>
         </p:txBody>
@@ -7889,7 +8129,7 @@
           <p:cNvPr id="4" name="">
             <a:extLst xmlns:a="http://schemas.openxmlformats.org/drawingml/2006/main">
               <a:ext uri="{FF2B5EF4-FFF2-40B4-BE49-F238E27FC236}">
-                <a16:creationId xmlns:a16="http://schemas.microsoft.com/office/drawing/2014/main" id="{1D9CF15B-E96B-45A8-8004-39276131900D}"/>
+                <a16:creationId xmlns:a16="http://schemas.microsoft.com/office/drawing/2014/main" id="{6BAEEE47-ADD8-43A5-B3C2-ED29DD82313A}"/>
               </a:ext>
             </a:extLst>
           </p:cNvPr>
@@ -7936,7 +8176,7 @@
                 <a:ea typeface="Arial"/>
                 <a:cs typeface="Arial"/>
               </a:rPr>
-              <a:t>The source package changes C47 to physician review in both repetitions; C22 remains missed.</a:t>
+              <a:t>Source package: C47 matched the reference; C22 remained missed.</a:t>
             </a:r>
           </a:p>
         </p:txBody>
@@ -7946,7 +8186,7 @@
           <p:cNvPr id="5" name="">
             <a:extLst xmlns:a="http://schemas.openxmlformats.org/drawingml/2006/main">
               <a:ext uri="{FF2B5EF4-FFF2-40B4-BE49-F238E27FC236}">
-                <a16:creationId xmlns:a16="http://schemas.microsoft.com/office/drawing/2014/main" id="{13F32CD7-68BC-4727-A1DC-C8E5BE21C1D4}"/>
+                <a16:creationId xmlns:a16="http://schemas.microsoft.com/office/drawing/2014/main" id="{A3720CA8-BD23-48E3-8BAC-48EA149B3C10}"/>
               </a:ext>
             </a:extLst>
           </p:cNvPr>
@@ -8003,7 +8243,7 @@
           <p:cNvPr id="6" name="">
             <a:extLst xmlns:a="http://schemas.openxmlformats.org/drawingml/2006/main">
               <a:ext uri="{FF2B5EF4-FFF2-40B4-BE49-F238E27FC236}">
-                <a16:creationId xmlns:a16="http://schemas.microsoft.com/office/drawing/2014/main" id="{E3711D2E-F94C-4708-BA0E-1243BCD7F0A5}"/>
+                <a16:creationId xmlns:a16="http://schemas.microsoft.com/office/drawing/2014/main" id="{869CC535-D4AD-41C4-8860-13E2FA42A45B}"/>
               </a:ext>
             </a:extLst>
           </p:cNvPr>
@@ -8058,7 +8298,7 @@
     </p:spTree>
     <p:extLst>
       <p:ext uri="{BB962C8B-B14F-4D97-AF65-F5344CB8AC3E}">
-        <p14:creationId xmlns:p14="http://schemas.microsoft.com/office/powerpoint/2010/main" val="1811808997"/>
+        <p14:creationId xmlns:p14="http://schemas.microsoft.com/office/powerpoint/2010/main" val="359963213"/>
       </p:ext>
     </p:extLst>
   </p:cSld>
@@ -8086,10 +8326,10 @@
       </p:grpSpPr>
       <p:sp>
         <p:nvSpPr>
-          <p:cNvPr id="7" name="">
+          <p:cNvPr id="6" name="">
             <a:extLst xmlns:a="http://schemas.openxmlformats.org/drawingml/2006/main">
               <a:ext uri="{FF2B5EF4-FFF2-40B4-BE49-F238E27FC236}">
-                <a16:creationId xmlns:a16="http://schemas.microsoft.com/office/drawing/2014/main" id="{924D3511-087E-4374-90BE-BCC04946A843}"/>
+                <a16:creationId xmlns:a16="http://schemas.microsoft.com/office/drawing/2014/main" id="{50EC21AF-E4B8-4E3E-A9C3-FC54E5455E83}"/>
               </a:ext>
             </a:extLst>
           </p:cNvPr>
@@ -8101,7 +8341,7 @@
         <p:spPr>
           <a:xfrm xmlns:a="http://schemas.openxmlformats.org/drawingml/2006/main">
             <a:off x="762000" y="485775"/>
-            <a:ext cx="10668000" cy="1096899"/>
+            <a:ext cx="10668000" cy="586550"/>
           </a:xfrm>
           <a:prstGeom xmlns:a="http://schemas.openxmlformats.org/drawingml/2006/main" prst="rect">
             <a:avLst/>
@@ -8136,20 +8376,20 @@
                 <a:ea typeface="Arial"/>
                 <a:cs typeface="Arial"/>
               </a:rPr>
-              <a:t>Reference overtriage: three corrected self-care labels</a:t>
+              <a:t>Correct routing still needs a sound rationale</a:t>
             </a:r>
           </a:p>
         </p:txBody>
       </p:sp>
       <p:graphicFrame>
         <p:nvGraphicFramePr>
-          <p:cNvPr id="8" name=""/>
+          <p:cNvPr id="7" name=""/>
           <p:cNvGraphicFramePr/>
           <p:nvPr/>
         </p:nvGraphicFramePr>
         <p:xfrm>
-          <a:off xmlns:a="http://schemas.openxmlformats.org/drawingml/2006/main" x="762000" y="1839849"/>
-          <a:ext xmlns:a="http://schemas.openxmlformats.org/drawingml/2006/main" cx="10668000" cy="2378774"/>
+          <a:off xmlns:a="http://schemas.openxmlformats.org/drawingml/2006/main" x="762000" y="1619250"/>
+          <a:ext xmlns:a="http://schemas.openxmlformats.org/drawingml/2006/main" cx="10668000" cy="1839849"/>
         </p:xfrm>
         <a:graphic xmlns:a="http://schemas.openxmlformats.org/drawingml/2006/main">
           <a:graphicData uri="http://schemas.openxmlformats.org/drawingml/2006/table">
@@ -8199,7 +8439,7 @@
                           <a:ea typeface="Arial"/>
                           <a:cs typeface="Arial"/>
                         </a:rPr>
-                        <a:t>Physician correction</a:t>
+                        <a:t>Revised route</a:t>
                       </a:r>
                     </a:p>
                   </a:txBody>
@@ -8223,87 +8463,13 @@
                           <a:ea typeface="Arial"/>
                           <a:cs typeface="Arial"/>
                         </a:rPr>
-                        <a:t>Separate advice requirement</a:t>
+                        <a:t>Separate rationale concern</a:t>
                       </a:r>
                     </a:p>
                   </a:txBody>
                   <a:tcPr marL="133350" marR="133350" marT="76200" marB="76200" anchor="ctr">
                     <a:solidFill>
                       <a:srgbClr val="243866"/>
-                    </a:solidFill>
-                  </a:tcPr>
-                </a:tc>
-              </a:tr>
-              <a:tr h="729425">
-                <a:tc>
-                  <a:txBody>
-                    <a:bodyPr/>
-                    <a:lstStyle/>
-                    <a:p>
-                      <a:r>
-                        <a:rPr sz="1725" b="0">
-                          <a:solidFill>
-                            <a:srgbClr val="28354A"/>
-                          </a:solidFill>
-                          <a:latin typeface="Arial"/>
-                          <a:ea typeface="Arial"/>
-                          <a:cs typeface="Arial"/>
-                        </a:rPr>
-                        <a:t>C32: recent ear pain</a:t>
-                      </a:r>
-                    </a:p>
-                  </a:txBody>
-                  <a:tcPr marL="133350" marR="133350" marT="76200" marB="76200" anchor="ctr">
-                    <a:solidFill>
-                      <a:srgbClr val="F6F4ED"/>
-                    </a:solidFill>
-                  </a:tcPr>
-                </a:tc>
-                <a:tc>
-                  <a:txBody>
-                    <a:bodyPr/>
-                    <a:lstStyle/>
-                    <a:p>
-                      <a:r>
-                        <a:rPr sz="1725" b="0">
-                          <a:solidFill>
-                            <a:srgbClr val="28354A"/>
-                          </a:solidFill>
-                          <a:latin typeface="Arial"/>
-                          <a:ea typeface="Arial"/>
-                          <a:cs typeface="Arial"/>
-                        </a:rPr>
-                        <a:t>ASYNC → SELF_CARE</a:t>
-                      </a:r>
-                    </a:p>
-                  </a:txBody>
-                  <a:tcPr marL="133350" marR="133350" marT="76200" marB="76200" anchor="ctr">
-                    <a:solidFill>
-                      <a:srgbClr val="F6F4ED"/>
-                    </a:solidFill>
-                  </a:tcPr>
-                </a:tc>
-                <a:tc>
-                  <a:txBody>
-                    <a:bodyPr/>
-                    <a:lstStyle/>
-                    <a:p>
-                      <a:r>
-                        <a:rPr sz="1725" b="0">
-                          <a:solidFill>
-                            <a:srgbClr val="28354A"/>
-                          </a:solidFill>
-                          <a:latin typeface="Arial"/>
-                          <a:ea typeface="Arial"/>
-                          <a:cs typeface="Arial"/>
-                        </a:rPr>
-                        <a:t>Watchful waiting with reassessment criteria</a:t>
-                      </a:r>
-                    </a:p>
-                  </a:txBody>
-                  <a:tcPr marL="133350" marR="133350" marT="76200" marB="76200" anchor="ctr">
-                    <a:solidFill>
-                      <a:srgbClr val="F6F4ED"/>
                     </a:solidFill>
                   </a:tcPr>
                 </a:tc>
@@ -8323,7 +8489,7 @@
                           <a:ea typeface="Arial"/>
                           <a:cs typeface="Arial"/>
                         </a:rPr>
-                        <a:t>C34: seasonal allergies</a:t>
+                        <a:t>C32: ear pain</a:t>
                       </a:r>
                     </a:p>
                   </a:txBody>
@@ -8347,7 +8513,7 @@
                           <a:ea typeface="Arial"/>
                           <a:cs typeface="Arial"/>
                         </a:rPr>
-                        <a:t>ASYNC → SELF_CARE</a:t>
+                        <a:t>SELF_CARE</a:t>
                       </a:r>
                     </a:p>
                   </a:txBody>
@@ -8371,7 +8537,7 @@
                           <a:ea typeface="Arial"/>
                           <a:cs typeface="Arial"/>
                         </a:rPr>
-                        <a:t>Check assumptions in medication advice</a:t>
+                        <a:t>Watchful waiting and reassessment</a:t>
                       </a:r>
                     </a:p>
                   </a:txBody>
@@ -8382,7 +8548,7 @@
                   </a:tcPr>
                 </a:tc>
               </a:tr>
-              <a:tr h="729425">
+              <a:tr h="459962">
                 <a:tc>
                   <a:txBody>
                     <a:bodyPr/>
@@ -8397,7 +8563,7 @@
                           <a:ea typeface="Arial"/>
                           <a:cs typeface="Arial"/>
                         </a:rPr>
-                        <a:t>C38: improving sprain</a:t>
+                        <a:t>C34: allergies</a:t>
                       </a:r>
                     </a:p>
                   </a:txBody>
@@ -8421,7 +8587,7 @@
                           <a:ea typeface="Arial"/>
                           <a:cs typeface="Arial"/>
                         </a:rPr>
-                        <a:t>ASYNC → SELF_CARE</a:t>
+                        <a:t>SELF_CARE</a:t>
                       </a:r>
                     </a:p>
                   </a:txBody>
@@ -8445,7 +8611,81 @@
                           <a:ea typeface="Arial"/>
                           <a:cs typeface="Arial"/>
                         </a:rPr>
-                        <a:t>Include pregnancy precautions for ibuprofen</a:t>
+                        <a:t>Medication assumptions</a:t>
+                      </a:r>
+                    </a:p>
+                  </a:txBody>
+                  <a:tcPr marL="133350" marR="133350" marT="76200" marB="76200" anchor="ctr">
+                    <a:solidFill>
+                      <a:srgbClr val="F6F4ED"/>
+                    </a:solidFill>
+                  </a:tcPr>
+                </a:tc>
+              </a:tr>
+              <a:tr h="459962">
+                <a:tc>
+                  <a:txBody>
+                    <a:bodyPr/>
+                    <a:lstStyle/>
+                    <a:p>
+                      <a:r>
+                        <a:rPr sz="1725" b="0">
+                          <a:solidFill>
+                            <a:srgbClr val="28354A"/>
+                          </a:solidFill>
+                          <a:latin typeface="Arial"/>
+                          <a:ea typeface="Arial"/>
+                          <a:cs typeface="Arial"/>
+                        </a:rPr>
+                        <a:t>C38: sprain</a:t>
+                      </a:r>
+                    </a:p>
+                  </a:txBody>
+                  <a:tcPr marL="133350" marR="133350" marT="76200" marB="76200" anchor="ctr">
+                    <a:solidFill>
+                      <a:srgbClr val="F6F4ED"/>
+                    </a:solidFill>
+                  </a:tcPr>
+                </a:tc>
+                <a:tc>
+                  <a:txBody>
+                    <a:bodyPr/>
+                    <a:lstStyle/>
+                    <a:p>
+                      <a:r>
+                        <a:rPr sz="1725" b="0">
+                          <a:solidFill>
+                            <a:srgbClr val="28354A"/>
+                          </a:solidFill>
+                          <a:latin typeface="Arial"/>
+                          <a:ea typeface="Arial"/>
+                          <a:cs typeface="Arial"/>
+                        </a:rPr>
+                        <a:t>SELF_CARE</a:t>
+                      </a:r>
+                    </a:p>
+                  </a:txBody>
+                  <a:tcPr marL="133350" marR="133350" marT="76200" marB="76200" anchor="ctr">
+                    <a:solidFill>
+                      <a:srgbClr val="F6F4ED"/>
+                    </a:solidFill>
+                  </a:tcPr>
+                </a:tc>
+                <a:tc>
+                  <a:txBody>
+                    <a:bodyPr/>
+                    <a:lstStyle/>
+                    <a:p>
+                      <a:r>
+                        <a:rPr sz="1725" b="0">
+                          <a:solidFill>
+                            <a:srgbClr val="28354A"/>
+                          </a:solidFill>
+                          <a:latin typeface="Arial"/>
+                          <a:ea typeface="Arial"/>
+                          <a:cs typeface="Arial"/>
+                        </a:rPr>
+                        <a:t>Pregnancy precautions omitted</a:t>
                       </a:r>
                     </a:p>
                   </a:txBody>
@@ -8465,7 +8705,7 @@
           <p:cNvPr id="3" name="">
             <a:extLst xmlns:a="http://schemas.openxmlformats.org/drawingml/2006/main">
               <a:ext uri="{FF2B5EF4-FFF2-40B4-BE49-F238E27FC236}">
-                <a16:creationId xmlns:a16="http://schemas.microsoft.com/office/drawing/2014/main" id="{9F972926-CDE5-4EF1-A275-8864B40197B7}"/>
+                <a16:creationId xmlns:a16="http://schemas.microsoft.com/office/drawing/2014/main" id="{ED85230C-7109-4015-8922-D63E2869CF31}"/>
               </a:ext>
             </a:extLst>
           </p:cNvPr>
@@ -8476,7 +8716,7 @@
         </p:nvSpPr>
         <p:spPr>
           <a:xfrm xmlns:a="http://schemas.openxmlformats.org/drawingml/2006/main">
-            <a:off x="762000" y="4409123"/>
+            <a:off x="762000" y="3649599"/>
             <a:ext cx="10382250" cy="316992"/>
           </a:xfrm>
           <a:prstGeom xmlns:a="http://schemas.openxmlformats.org/drawingml/2006/main" prst="rect">
@@ -8512,7 +8752,7 @@
                 <a:ea typeface="Arial"/>
                 <a:cs typeface="Arial"/>
               </a:rPr>
-              <a:t>The prior reference has false positives for clinician action; Fable is a true negative after correction.</a:t>
+              <a:t>These are reference corrections, not model improvements.</a:t>
             </a:r>
           </a:p>
         </p:txBody>
@@ -8522,64 +8762,7 @@
           <p:cNvPr id="4" name="">
             <a:extLst xmlns:a="http://schemas.openxmlformats.org/drawingml/2006/main">
               <a:ext uri="{FF2B5EF4-FFF2-40B4-BE49-F238E27FC236}">
-                <a16:creationId xmlns:a16="http://schemas.microsoft.com/office/drawing/2014/main" id="{3672A0A5-EFAC-4DAC-AFF8-812CBC8C4747}"/>
-              </a:ext>
-            </a:extLst>
-          </p:cNvPr>
-          <p:cNvSpPr>
-            <a:spLocks xmlns:a="http://schemas.openxmlformats.org/drawingml/2006/main" noGrp="1"/>
-          </p:cNvSpPr>
-          <p:nvPr/>
-        </p:nvSpPr>
-        <p:spPr>
-          <a:xfrm xmlns:a="http://schemas.openxmlformats.org/drawingml/2006/main">
-            <a:off x="762000" y="4849939"/>
-            <a:ext cx="10382250" cy="316992"/>
-          </a:xfrm>
-          <a:prstGeom xmlns:a="http://schemas.openxmlformats.org/drawingml/2006/main" prst="rect">
-            <a:avLst/>
-          </a:prstGeom>
-          <a:noFill xmlns:a="http://schemas.openxmlformats.org/drawingml/2006/main"/>
-          <a:ln xmlns:a="http://schemas.openxmlformats.org/drawingml/2006/main" w="0">
-            <a:noFill/>
-          </a:ln>
-        </p:spPr>
-        <p:txBody>
-          <a:bodyPr xmlns:a="http://schemas.openxmlformats.org/drawingml/2006/main" wrap="square" lIns="0" tIns="0" rIns="0" bIns="0" anchor="t">
-            <a:noAutofit/>
-          </a:bodyPr>
-          <a:lstStyle xmlns:a="http://schemas.openxmlformats.org/drawingml/2006/main"/>
-          <a:p xmlns:a="http://schemas.openxmlformats.org/drawingml/2006/main">
-            <a:pPr>
-              <a:defRPr sz="1800">
-                <a:solidFill>
-                  <a:srgbClr val="28354A"/>
-                </a:solidFill>
-                <a:latin typeface="Arial"/>
-                <a:ea typeface="Arial"/>
-                <a:cs typeface="Arial"/>
-              </a:defRPr>
-            </a:pPr>
-            <a:r>
-              <a:rPr sz="1800">
-                <a:solidFill>
-                  <a:srgbClr val="28354A"/>
-                </a:solidFill>
-                <a:latin typeface="Arial"/>
-                <a:ea typeface="Arial"/>
-                <a:cs typeface="Arial"/>
-              </a:rPr>
-              <a:t>C38’s frozen rationale omits pregnancy precautions. Correct routing does not resolve that omission.</a:t>
-            </a:r>
-          </a:p>
-        </p:txBody>
-      </p:sp>
-      <p:sp>
-        <p:nvSpPr>
-          <p:cNvPr id="5" name="">
-            <a:extLst xmlns:a="http://schemas.openxmlformats.org/drawingml/2006/main">
-              <a:ext uri="{FF2B5EF4-FFF2-40B4-BE49-F238E27FC236}">
-                <a16:creationId xmlns:a16="http://schemas.microsoft.com/office/drawing/2014/main" id="{EAA3C72F-7972-4DB8-B957-0A9CE6F695BB}"/>
+                <a16:creationId xmlns:a16="http://schemas.microsoft.com/office/drawing/2014/main" id="{6FDC8034-34F7-4C70-A518-7F15B280C709}"/>
               </a:ext>
             </a:extLst>
           </p:cNvPr>
@@ -8633,10 +8816,10 @@
       </p:sp>
       <p:sp>
         <p:nvSpPr>
-          <p:cNvPr id="6" name="">
+          <p:cNvPr id="5" name="">
             <a:extLst xmlns:a="http://schemas.openxmlformats.org/drawingml/2006/main">
               <a:ext uri="{FF2B5EF4-FFF2-40B4-BE49-F238E27FC236}">
-                <a16:creationId xmlns:a16="http://schemas.microsoft.com/office/drawing/2014/main" id="{BA010913-F511-472E-947C-1CDA45F08094}"/>
+                <a16:creationId xmlns:a16="http://schemas.microsoft.com/office/drawing/2014/main" id="{40D6BA45-7782-4A9A-8637-5BBDF9C4C6FF}"/>
               </a:ext>
             </a:extLst>
           </p:cNvPr>
@@ -8691,7 +8874,7 @@
     </p:spTree>
     <p:extLst>
       <p:ext uri="{BB962C8B-B14F-4D97-AF65-F5344CB8AC3E}">
-        <p14:creationId xmlns:p14="http://schemas.microsoft.com/office/powerpoint/2010/main" val="944175321"/>
+        <p14:creationId xmlns:p14="http://schemas.microsoft.com/office/powerpoint/2010/main" val="1923195062"/>
       </p:ext>
     </p:extLst>
   </p:cSld>
@@ -8719,10 +8902,10 @@
       </p:grpSpPr>
       <p:sp>
         <p:nvSpPr>
-          <p:cNvPr id="7" name="">
+          <p:cNvPr id="6" name="">
             <a:extLst xmlns:a="http://schemas.openxmlformats.org/drawingml/2006/main">
               <a:ext uri="{FF2B5EF4-FFF2-40B4-BE49-F238E27FC236}">
-                <a16:creationId xmlns:a16="http://schemas.microsoft.com/office/drawing/2014/main" id="{30832088-18BF-4ECA-82BF-DD0ADAE0B78C}"/>
+                <a16:creationId xmlns:a16="http://schemas.microsoft.com/office/drawing/2014/main" id="{65931A56-C35C-4749-A6A5-699CE481EA7F}"/>
               </a:ext>
             </a:extLst>
           </p:cNvPr>
@@ -8769,14 +8952,14 @@
                 <a:ea typeface="Arial"/>
                 <a:cs typeface="Arial"/>
               </a:rPr>
-              <a:t>Local Nano: agreement hides exchanged misses</a:t>
+              <a:t>Nano: higher agreement, new missed reviews</a:t>
             </a:r>
           </a:p>
         </p:txBody>
       </p:sp>
       <p:graphicFrame>
         <p:nvGraphicFramePr>
-          <p:cNvPr id="8" name=""/>
+          <p:cNvPr id="7" name=""/>
           <p:cNvGraphicFramePr/>
           <p:nvPr/>
         </p:nvGraphicFramePr>
@@ -9293,7 +9476,7 @@
           <p:cNvPr id="3" name="">
             <a:extLst xmlns:a="http://schemas.openxmlformats.org/drawingml/2006/main">
               <a:ext uri="{FF2B5EF4-FFF2-40B4-BE49-F238E27FC236}">
-                <a16:creationId xmlns:a16="http://schemas.microsoft.com/office/drawing/2014/main" id="{2BE2B058-C155-4409-A410-CF7E7A9DF8E1}"/>
+                <a16:creationId xmlns:a16="http://schemas.microsoft.com/office/drawing/2014/main" id="{748829E1-1C26-4521-B58C-DE9893042E7B}"/>
               </a:ext>
             </a:extLst>
           </p:cNvPr>
@@ -9340,7 +9523,7 @@
                 <a:ea typeface="Arial"/>
                 <a:cs typeface="Arial"/>
               </a:rPr>
-              <a:t>All three variants introduce new missed-review cases versus their own baseline.</a:t>
+              <a:t>All three variants introduced new missed-review cases.</a:t>
             </a:r>
           </a:p>
         </p:txBody>
@@ -9350,64 +9533,7 @@
           <p:cNvPr id="4" name="">
             <a:extLst xmlns:a="http://schemas.openxmlformats.org/drawingml/2006/main">
               <a:ext uri="{FF2B5EF4-FFF2-40B4-BE49-F238E27FC236}">
-                <a16:creationId xmlns:a16="http://schemas.microsoft.com/office/drawing/2014/main" id="{04C9FA09-D818-497D-A9E6-8149502AB670}"/>
-              </a:ext>
-            </a:extLst>
-          </p:cNvPr>
-          <p:cNvSpPr>
-            <a:spLocks xmlns:a="http://schemas.openxmlformats.org/drawingml/2006/main" noGrp="1"/>
-          </p:cNvSpPr>
-          <p:nvPr/>
-        </p:nvSpPr>
-        <p:spPr>
-          <a:xfrm xmlns:a="http://schemas.openxmlformats.org/drawingml/2006/main">
-            <a:off x="762000" y="4608957"/>
-            <a:ext cx="10382250" cy="316992"/>
-          </a:xfrm>
-          <a:prstGeom xmlns:a="http://schemas.openxmlformats.org/drawingml/2006/main" prst="rect">
-            <a:avLst/>
-          </a:prstGeom>
-          <a:noFill xmlns:a="http://schemas.openxmlformats.org/drawingml/2006/main"/>
-          <a:ln xmlns:a="http://schemas.openxmlformats.org/drawingml/2006/main" w="0">
-            <a:noFill/>
-          </a:ln>
-        </p:spPr>
-        <p:txBody>
-          <a:bodyPr xmlns:a="http://schemas.openxmlformats.org/drawingml/2006/main" wrap="square" lIns="0" tIns="0" rIns="0" bIns="0" anchor="t">
-            <a:noAutofit/>
-          </a:bodyPr>
-          <a:lstStyle xmlns:a="http://schemas.openxmlformats.org/drawingml/2006/main"/>
-          <a:p xmlns:a="http://schemas.openxmlformats.org/drawingml/2006/main">
-            <a:pPr>
-              <a:defRPr sz="1800">
-                <a:solidFill>
-                  <a:srgbClr val="28354A"/>
-                </a:solidFill>
-                <a:latin typeface="Arial"/>
-                <a:ea typeface="Arial"/>
-                <a:cs typeface="Arial"/>
-              </a:defRPr>
-            </a:pPr>
-            <a:r>
-              <a:rPr sz="1800">
-                <a:solidFill>
-                  <a:srgbClr val="28354A"/>
-                </a:solidFill>
-                <a:latin typeface="Arial"/>
-                <a:ea typeface="Arial"/>
-                <a:cs typeface="Arial"/>
-              </a:rPr>
-              <a:t>Repeat stability does not establish correctness.</a:t>
-            </a:r>
-          </a:p>
-        </p:txBody>
-      </p:sp>
-      <p:sp>
-        <p:nvSpPr>
-          <p:cNvPr id="5" name="">
-            <a:extLst xmlns:a="http://schemas.openxmlformats.org/drawingml/2006/main">
-              <a:ext uri="{FF2B5EF4-FFF2-40B4-BE49-F238E27FC236}">
-                <a16:creationId xmlns:a16="http://schemas.microsoft.com/office/drawing/2014/main" id="{CB2325CA-0F47-4A32-AF6C-9D5E32146694}"/>
+                <a16:creationId xmlns:a16="http://schemas.microsoft.com/office/drawing/2014/main" id="{4861CEAD-ADDB-4102-9CCA-715B038AA184}"/>
               </a:ext>
             </a:extLst>
           </p:cNvPr>
@@ -9461,10 +9587,10 @@
       </p:sp>
       <p:sp>
         <p:nvSpPr>
-          <p:cNvPr id="6" name="">
+          <p:cNvPr id="5" name="">
             <a:extLst xmlns:a="http://schemas.openxmlformats.org/drawingml/2006/main">
               <a:ext uri="{FF2B5EF4-FFF2-40B4-BE49-F238E27FC236}">
-                <a16:creationId xmlns:a16="http://schemas.microsoft.com/office/drawing/2014/main" id="{7908CA0F-7E09-41EA-A0BD-22D1A09AFC6A}"/>
+                <a16:creationId xmlns:a16="http://schemas.microsoft.com/office/drawing/2014/main" id="{A80D0AC7-E355-4344-AF93-E19C6737F280}"/>
               </a:ext>
             </a:extLst>
           </p:cNvPr>
@@ -9519,7 +9645,7 @@
     </p:spTree>
     <p:extLst>
       <p:ext uri="{BB962C8B-B14F-4D97-AF65-F5344CB8AC3E}">
-        <p14:creationId xmlns:p14="http://schemas.microsoft.com/office/powerpoint/2010/main" val="60821664"/>
+        <p14:creationId xmlns:p14="http://schemas.microsoft.com/office/powerpoint/2010/main" val="479668726"/>
       </p:ext>
     </p:extLst>
   </p:cSld>
@@ -9550,7 +9676,7 @@
           <p:cNvPr id="5" name="">
             <a:extLst xmlns:a="http://schemas.openxmlformats.org/drawingml/2006/main">
               <a:ext uri="{FF2B5EF4-FFF2-40B4-BE49-F238E27FC236}">
-                <a16:creationId xmlns:a16="http://schemas.microsoft.com/office/drawing/2014/main" id="{224016E5-4E25-4D45-858C-867CD41F8180}"/>
+                <a16:creationId xmlns:a16="http://schemas.microsoft.com/office/drawing/2014/main" id="{8AA8E5C5-DE84-4D06-83B6-7F9CDCC81B81}"/>
               </a:ext>
             </a:extLst>
           </p:cNvPr>
@@ -9597,7 +9723,7 @@
                 <a:ea typeface="Arial"/>
                 <a:cs typeface="Arial"/>
               </a:rPr>
-              <a:t>Failure modes and evidence limits</a:t>
+              <a:t>How could this evaluation mislead us?</a:t>
             </a:r>
           </a:p>
         </p:txBody>
@@ -9610,7 +9736,7 @@
         </p:nvGraphicFramePr>
         <p:xfrm>
           <a:off xmlns:a="http://schemas.openxmlformats.org/drawingml/2006/main" x="762000" y="1619250"/>
-          <a:ext xmlns:a="http://schemas.openxmlformats.org/drawingml/2006/main" cx="10668000" cy="3392424"/>
+          <a:ext xmlns:a="http://schemas.openxmlformats.org/drawingml/2006/main" cx="10668000" cy="2830068"/>
         </p:xfrm>
         <a:graphic xmlns:a="http://schemas.openxmlformats.org/drawingml/2006/main">
           <a:graphicData uri="http://schemas.openxmlformats.org/drawingml/2006/table">
@@ -9635,7 +9761,7 @@
                           <a:ea typeface="Arial"/>
                           <a:cs typeface="Arial"/>
                         </a:rPr>
-                        <a:t>Failure mode</a:t>
+                        <a:t>Failure</a:t>
                       </a:r>
                     </a:p>
                   </a:txBody>
@@ -9659,7 +9785,7 @@
                           <a:ea typeface="Arial"/>
                           <a:cs typeface="Arial"/>
                         </a:rPr>
-                        <a:t>Current evidence or required work</a:t>
+                        <a:t>Required check</a:t>
                       </a:r>
                     </a:p>
                   </a:txBody>
@@ -9685,7 +9811,7 @@
                           <a:ea typeface="Arial"/>
                           <a:cs typeface="Arial"/>
                         </a:rPr>
-                        <a:t>Known score treated as stable</a:t>
+                        <a:t>A saved score appears stable</a:t>
                       </a:r>
                     </a:p>
                   </a:txBody>
@@ -9709,7 +9835,7 @@
                           <a:ea typeface="Arial"/>
                           <a:cs typeface="Arial"/>
                         </a:rPr>
-                        <a:t>Historical 48/50 becomes 45/50 and 46/50 on repetition</a:t>
+                        <a:t>Repeat identical requests</a:t>
                       </a:r>
                     </a:p>
                   </a:txBody>
@@ -9735,7 +9861,7 @@
                           <a:ea typeface="Arial"/>
                           <a:cs typeface="Arial"/>
                         </a:rPr>
-                        <a:t>Aggregate count hides new misses</a:t>
+                        <a:t>Equal totals conceal different misses</a:t>
                       </a:r>
                     </a:p>
                   </a:txBody>
@@ -9759,107 +9885,7 @@
                           <a:ea typeface="Arial"/>
                           <a:cs typeface="Arial"/>
                         </a:rPr>
-                        <a:t>C43 replaces C49 as an urgent-reference miss</a:t>
-                      </a:r>
-                    </a:p>
-                  </a:txBody>
-                  <a:tcPr marL="133350" marR="133350" marT="76200" marB="76200" anchor="ctr">
-                    <a:solidFill>
-                      <a:srgbClr val="F6F4ED"/>
-                    </a:solidFill>
-                  </a:tcPr>
-                </a:tc>
-              </a:tr>
-              <a:tr h="752856">
-                <a:tc>
-                  <a:txBody>
-                    <a:bodyPr/>
-                    <a:lstStyle/>
-                    <a:p>
-                      <a:r>
-                        <a:rPr sz="1800" b="0">
-                          <a:solidFill>
-                            <a:srgbClr val="28354A"/>
-                          </a:solidFill>
-                          <a:latin typeface="Arial"/>
-                          <a:ea typeface="Arial"/>
-                          <a:cs typeface="Arial"/>
-                        </a:rPr>
-                        <a:t>Patient text changes the routing instruction</a:t>
-                      </a:r>
-                    </a:p>
-                  </a:txBody>
-                  <a:tcPr marL="133350" marR="133350" marT="76200" marB="76200" anchor="ctr">
-                    <a:solidFill>
-                      <a:srgbClr val="F6F4ED"/>
-                    </a:solidFill>
-                  </a:tcPr>
-                </a:tc>
-                <a:tc>
-                  <a:txBody>
-                    <a:bodyPr/>
-                    <a:lstStyle/>
-                    <a:p>
-                      <a:r>
-                        <a:rPr sz="1800" b="0">
-                          <a:solidFill>
-                            <a:srgbClr val="28354A"/>
-                          </a:solidFill>
-                          <a:latin typeface="Arial"/>
-                          <a:ea typeface="Arial"/>
-                          <a:cs typeface="Arial"/>
-                        </a:rPr>
-                        <a:t>Nano follows an embedded instruction; appendix 44</a:t>
-                      </a:r>
-                    </a:p>
-                  </a:txBody>
-                  <a:tcPr marL="133350" marR="133350" marT="76200" marB="76200" anchor="ctr">
-                    <a:solidFill>
-                      <a:srgbClr val="F6F4ED"/>
-                    </a:solidFill>
-                  </a:tcPr>
-                </a:tc>
-              </a:tr>
-              <a:tr h="752856">
-                <a:tc>
-                  <a:txBody>
-                    <a:bodyPr/>
-                    <a:lstStyle/>
-                    <a:p>
-                      <a:r>
-                        <a:rPr sz="1800" b="0">
-                          <a:solidFill>
-                            <a:srgbClr val="28354A"/>
-                          </a:solidFill>
-                          <a:latin typeface="Arial"/>
-                          <a:ea typeface="Arial"/>
-                          <a:cs typeface="Arial"/>
-                        </a:rPr>
-                        <a:t>Fast response treated as completed care</a:t>
-                      </a:r>
-                    </a:p>
-                  </a:txBody>
-                  <a:tcPr marL="133350" marR="133350" marT="76200" marB="76200" anchor="ctr">
-                    <a:solidFill>
-                      <a:srgbClr val="F6F4ED"/>
-                    </a:solidFill>
-                  </a:tcPr>
-                </a:tc>
-                <a:tc>
-                  <a:txBody>
-                    <a:bodyPr/>
-                    <a:lstStyle/>
-                    <a:p>
-                      <a:r>
-                        <a:rPr sz="1800" b="0">
-                          <a:solidFill>
-                            <a:srgbClr val="28354A"/>
-                          </a:solidFill>
-                          <a:latin typeface="Arial"/>
-                          <a:ea typeface="Arial"/>
-                          <a:cs typeface="Arial"/>
-                        </a:rPr>
-                        <a:t>Measure required action, deadline and ownership</a:t>
+                        <a:t>Inspect every changed case</a:t>
                       </a:r>
                     </a:p>
                   </a:txBody>
@@ -9885,7 +9911,7 @@
                           <a:ea typeface="Arial"/>
                           <a:cs typeface="Arial"/>
                         </a:rPr>
-                        <a:t>Known cases treated as validation</a:t>
+                        <a:t>Patient text redirects the model</a:t>
                       </a:r>
                     </a:p>
                   </a:txBody>
@@ -9909,7 +9935,107 @@
                           <a:ea typeface="Arial"/>
                           <a:cs typeface="Arial"/>
                         </a:rPr>
-                        <a:t>Independent blinded references remain pending</a:t>
+                        <a:t>Test instruction boundaries</a:t>
+                      </a:r>
+                    </a:p>
+                  </a:txBody>
+                  <a:tcPr marL="133350" marR="133350" marT="76200" marB="76200" anchor="ctr">
+                    <a:solidFill>
+                      <a:srgbClr val="F6F4ED"/>
+                    </a:solidFill>
+                  </a:tcPr>
+                </a:tc>
+              </a:tr>
+              <a:tr h="471678">
+                <a:tc>
+                  <a:txBody>
+                    <a:bodyPr/>
+                    <a:lstStyle/>
+                    <a:p>
+                      <a:r>
+                        <a:rPr sz="1800" b="0">
+                          <a:solidFill>
+                            <a:srgbClr val="28354A"/>
+                          </a:solidFill>
+                          <a:latin typeface="Arial"/>
+                          <a:ea typeface="Arial"/>
+                          <a:cs typeface="Arial"/>
+                        </a:rPr>
+                        <a:t>A fast reply substitutes for care</a:t>
+                      </a:r>
+                    </a:p>
+                  </a:txBody>
+                  <a:tcPr marL="133350" marR="133350" marT="76200" marB="76200" anchor="ctr">
+                    <a:solidFill>
+                      <a:srgbClr val="F6F4ED"/>
+                    </a:solidFill>
+                  </a:tcPr>
+                </a:tc>
+                <a:tc>
+                  <a:txBody>
+                    <a:bodyPr/>
+                    <a:lstStyle/>
+                    <a:p>
+                      <a:r>
+                        <a:rPr sz="1800" b="0">
+                          <a:solidFill>
+                            <a:srgbClr val="28354A"/>
+                          </a:solidFill>
+                          <a:latin typeface="Arial"/>
+                          <a:ea typeface="Arial"/>
+                          <a:cs typeface="Arial"/>
+                        </a:rPr>
+                        <a:t>Measure completed action and timing</a:t>
+                      </a:r>
+                    </a:p>
+                  </a:txBody>
+                  <a:tcPr marL="133350" marR="133350" marT="76200" marB="76200" anchor="ctr">
+                    <a:solidFill>
+                      <a:srgbClr val="F6F4ED"/>
+                    </a:solidFill>
+                  </a:tcPr>
+                </a:tc>
+              </a:tr>
+              <a:tr h="471678">
+                <a:tc>
+                  <a:txBody>
+                    <a:bodyPr/>
+                    <a:lstStyle/>
+                    <a:p>
+                      <a:r>
+                        <a:rPr sz="1800" b="0">
+                          <a:solidFill>
+                            <a:srgbClr val="28354A"/>
+                          </a:solidFill>
+                          <a:latin typeface="Arial"/>
+                          <a:ea typeface="Arial"/>
+                          <a:cs typeface="Arial"/>
+                        </a:rPr>
+                        <a:t>Known examples appear independent</a:t>
+                      </a:r>
+                    </a:p>
+                  </a:txBody>
+                  <a:tcPr marL="133350" marR="133350" marT="76200" marB="76200" anchor="ctr">
+                    <a:solidFill>
+                      <a:srgbClr val="F6F4ED"/>
+                    </a:solidFill>
+                  </a:tcPr>
+                </a:tc>
+                <a:tc>
+                  <a:txBody>
+                    <a:bodyPr/>
+                    <a:lstStyle/>
+                    <a:p>
+                      <a:r>
+                        <a:rPr sz="1800" b="0">
+                          <a:solidFill>
+                            <a:srgbClr val="28354A"/>
+                          </a:solidFill>
+                          <a:latin typeface="Arial"/>
+                          <a:ea typeface="Arial"/>
+                          <a:cs typeface="Arial"/>
+                        </a:rPr>
+                        <a:t>Use new, blinded references</a:t>
                       </a:r>
                     </a:p>
                   </a:txBody>
@@ -9929,7 +10055,7 @@
           <p:cNvPr id="3" name="">
             <a:extLst xmlns:a="http://schemas.openxmlformats.org/drawingml/2006/main">
               <a:ext uri="{FF2B5EF4-FFF2-40B4-BE49-F238E27FC236}">
-                <a16:creationId xmlns:a16="http://schemas.microsoft.com/office/drawing/2014/main" id="{D0DC3941-4872-4F12-8ADC-02C6B5124835}"/>
+                <a16:creationId xmlns:a16="http://schemas.microsoft.com/office/drawing/2014/main" id="{47CBEC66-910C-403D-8570-326ABB1C8253}"/>
               </a:ext>
             </a:extLst>
           </p:cNvPr>
@@ -9986,7 +10112,7 @@
           <p:cNvPr id="4" name="">
             <a:extLst xmlns:a="http://schemas.openxmlformats.org/drawingml/2006/main">
               <a:ext uri="{FF2B5EF4-FFF2-40B4-BE49-F238E27FC236}">
-                <a16:creationId xmlns:a16="http://schemas.microsoft.com/office/drawing/2014/main" id="{F4D5CE6E-FF1B-403D-B8AB-63C2B79D0D1A}"/>
+                <a16:creationId xmlns:a16="http://schemas.microsoft.com/office/drawing/2014/main" id="{30B816AA-FED3-4A58-A04D-2F58B6D32C3E}"/>
               </a:ext>
             </a:extLst>
           </p:cNvPr>
@@ -10041,7 +10167,7 @@
     </p:spTree>
     <p:extLst>
       <p:ext uri="{BB962C8B-B14F-4D97-AF65-F5344CB8AC3E}">
-        <p14:creationId xmlns:p14="http://schemas.microsoft.com/office/powerpoint/2010/main" val="605454911"/>
+        <p14:creationId xmlns:p14="http://schemas.microsoft.com/office/powerpoint/2010/main" val="1416605812"/>
       </p:ext>
     </p:extLst>
   </p:cSld>
@@ -10069,10 +10195,10 @@
       </p:grpSpPr>
       <p:sp>
         <p:nvSpPr>
-          <p:cNvPr id="5" name="">
+          <p:cNvPr id="6" name="">
             <a:extLst xmlns:a="http://schemas.openxmlformats.org/drawingml/2006/main">
               <a:ext uri="{FF2B5EF4-FFF2-40B4-BE49-F238E27FC236}">
-                <a16:creationId xmlns:a16="http://schemas.microsoft.com/office/drawing/2014/main" id="{8A15950A-8A91-48BB-B97B-54F2FE58EC1B}"/>
+                <a16:creationId xmlns:a16="http://schemas.microsoft.com/office/drawing/2014/main" id="{25658398-FC47-43E0-9C8F-991A43C54647}"/>
               </a:ext>
             </a:extLst>
           </p:cNvPr>
@@ -10119,29 +10245,29 @@
                 <a:ea typeface="Arial"/>
                 <a:cs typeface="Arial"/>
               </a:rPr>
-              <a:t>First 30 days: one reviewed decision</a:t>
+              <a:t>First 30 days: one test, one reviewed decision</a:t>
             </a:r>
           </a:p>
         </p:txBody>
       </p:sp>
       <p:graphicFrame>
         <p:nvGraphicFramePr>
-          <p:cNvPr id="6" name=""/>
+          <p:cNvPr id="7" name=""/>
           <p:cNvGraphicFramePr/>
           <p:nvPr/>
         </p:nvGraphicFramePr>
         <p:xfrm>
           <a:off xmlns:a="http://schemas.openxmlformats.org/drawingml/2006/main" x="762000" y="1619250"/>
-          <a:ext xmlns:a="http://schemas.openxmlformats.org/drawingml/2006/main" cx="10668000" cy="3483102"/>
+          <a:ext xmlns:a="http://schemas.openxmlformats.org/drawingml/2006/main" cx="10668000" cy="2358390"/>
         </p:xfrm>
         <a:graphic xmlns:a="http://schemas.openxmlformats.org/drawingml/2006/main">
           <a:graphicData uri="http://schemas.openxmlformats.org/drawingml/2006/table">
             <a:tbl>
               <a:tblPr firstRow="1" bandRow="0"/>
               <a:tblGrid>
-                <a:gridCol w="1600200"/>
-                <a:gridCol w="4800600"/>
-                <a:gridCol w="4267200"/>
+                <a:gridCol w="1813560"/>
+                <a:gridCol w="3520440"/>
+                <a:gridCol w="5334000"/>
               </a:tblGrid>
               <a:tr h="471678">
                 <a:tc>
@@ -10182,7 +10308,7 @@
                           <a:ea typeface="Arial"/>
                           <a:cs typeface="Arial"/>
                         </a:rPr>
-                        <a:t>Deliverable and owner</a:t>
+                        <a:t>Work with</a:t>
                       </a:r>
                     </a:p>
                   </a:txBody>
@@ -10206,7 +10332,7 @@
                           <a:ea typeface="Arial"/>
                           <a:cs typeface="Arial"/>
                         </a:rPr>
-                        <a:t>Decision before the next step</a:t>
+                        <a:t>Deliverable</a:t>
                       </a:r>
                     </a:p>
                   </a:txBody>
@@ -10217,7 +10343,7 @@
                   </a:tcPr>
                 </a:tc>
               </a:tr>
-              <a:tr h="752856">
+              <a:tr h="471678">
                 <a:tc>
                   <a:txBody>
                     <a:bodyPr/>
@@ -10256,9 +10382,20 @@
                           <a:ea typeface="Arial"/>
                           <a:cs typeface="Arial"/>
                         </a:rPr>
-                        <a:t>Routing and timing policy</a:t>
-                      </a:r>
-                    </a:p>
+                        <a:t>Clinical + operations</a:t>
+                      </a:r>
+                    </a:p>
+                  </a:txBody>
+                  <a:tcPr marL="133350" marR="133350" marT="76200" marB="76200" anchor="ctr">
+                    <a:solidFill>
+                      <a:srgbClr val="F6F4ED"/>
+                    </a:solidFill>
+                  </a:tcPr>
+                </a:tc>
+                <a:tc>
+                  <a:txBody>
+                    <a:bodyPr/>
+                    <a:lstStyle/>
                     <a:p>
                       <a:r>
                         <a:rPr sz="1800" b="0">
@@ -10269,7 +10406,7 @@
                           <a:ea typeface="Arial"/>
                           <a:cs typeface="Arial"/>
                         </a:rPr>
-                        <a:t>Clinical lead + care operations</a:t>
+                        <a:t>Agreed routing and timing policy</a:t>
                       </a:r>
                     </a:p>
                   </a:txBody>
@@ -10279,6 +10416,8 @@
                     </a:solidFill>
                   </a:tcPr>
                 </a:tc>
+              </a:tr>
+              <a:tr h="471678">
                 <a:tc>
                   <a:txBody>
                     <a:bodyPr/>
@@ -10293,7 +10432,7 @@
                           <a:ea typeface="Arial"/>
                           <a:cs typeface="Arial"/>
                         </a:rPr>
-                        <a:t>Can clinicians apply the same boundaries?</a:t>
+                        <a:t>Week 2</a:t>
                       </a:r>
                     </a:p>
                   </a:txBody>
@@ -10303,8 +10442,56 @@
                     </a:solidFill>
                   </a:tcPr>
                 </a:tc>
+                <a:tc>
+                  <a:txBody>
+                    <a:bodyPr/>
+                    <a:lstStyle/>
+                    <a:p>
+                      <a:r>
+                        <a:rPr sz="1800" b="0">
+                          <a:solidFill>
+                            <a:srgbClr val="28354A"/>
+                          </a:solidFill>
+                          <a:latin typeface="Arial"/>
+                          <a:ea typeface="Arial"/>
+                          <a:cs typeface="Arial"/>
+                        </a:rPr>
+                        <a:t>Clinical evaluation</a:t>
+                      </a:r>
+                    </a:p>
+                  </a:txBody>
+                  <a:tcPr marL="133350" marR="133350" marT="76200" marB="76200" anchor="ctr">
+                    <a:solidFill>
+                      <a:srgbClr val="F6F4ED"/>
+                    </a:solidFill>
+                  </a:tcPr>
+                </a:tc>
+                <a:tc>
+                  <a:txBody>
+                    <a:bodyPr/>
+                    <a:lstStyle/>
+                    <a:p>
+                      <a:r>
+                        <a:rPr sz="1800" b="0">
+                          <a:solidFill>
+                            <a:srgbClr val="28354A"/>
+                          </a:solidFill>
+                          <a:latin typeface="Arial"/>
+                          <a:ea typeface="Arial"/>
+                          <a:cs typeface="Arial"/>
+                        </a:rPr>
+                        <a:t>New, independently labeled cases</a:t>
+                      </a:r>
+                    </a:p>
+                  </a:txBody>
+                  <a:tcPr marL="133350" marR="133350" marT="76200" marB="76200" anchor="ctr">
+                    <a:solidFill>
+                      <a:srgbClr val="F6F4ED"/>
+                    </a:solidFill>
+                  </a:tcPr>
+                </a:tc>
               </a:tr>
-              <a:tr h="752856">
+              <a:tr h="471678">
                 <a:tc>
                   <a:txBody>
                     <a:bodyPr/>
@@ -10319,7 +10506,7 @@
                           <a:ea typeface="Arial"/>
                           <a:cs typeface="Arial"/>
                         </a:rPr>
-                        <a:t>Week 2</a:t>
+                        <a:t>Week 3</a:t>
                       </a:r>
                     </a:p>
                   </a:txBody>
@@ -10343,9 +10530,20 @@
                           <a:ea typeface="Arial"/>
                           <a:cs typeface="Arial"/>
                         </a:rPr>
-                        <a:t>New cases with blinded labels</a:t>
-                      </a:r>
-                    </a:p>
+                        <a:t>Applied AI</a:t>
+                      </a:r>
+                    </a:p>
+                  </a:txBody>
+                  <a:tcPr marL="133350" marR="133350" marT="76200" marB="76200" anchor="ctr">
+                    <a:solidFill>
+                      <a:srgbClr val="F6F4ED"/>
+                    </a:solidFill>
+                  </a:tcPr>
+                </a:tc>
+                <a:tc>
+                  <a:txBody>
+                    <a:bodyPr/>
+                    <a:lstStyle/>
                     <a:p>
                       <a:r>
                         <a:rPr sz="1800" b="0">
@@ -10356,7 +10554,7 @@
                           <a:ea typeface="Arial"/>
                           <a:cs typeface="Arial"/>
                         </a:rPr>
-                        <a:t>Clinical evaluation lead</a:t>
+                        <a:t>One paired comparison</a:t>
                       </a:r>
                     </a:p>
                   </a:txBody>
@@ -10366,6 +10564,8 @@
                     </a:solidFill>
                   </a:tcPr>
                 </a:tc>
+              </a:tr>
+              <a:tr h="471678">
                 <a:tc>
                   <a:txBody>
                     <a:bodyPr/>
@@ -10380,7 +10580,7 @@
                           <a:ea typeface="Arial"/>
                           <a:cs typeface="Arial"/>
                         </a:rPr>
-                        <a:t>Fix error definitions and acceptance limits before inference.</a:t>
+                        <a:t>Week 4</a:t>
                       </a:r>
                     </a:p>
                   </a:txBody>
@@ -10390,8 +10590,6 @@
                     </a:solidFill>
                   </a:tcPr>
                 </a:tc>
-              </a:tr>
-              <a:tr h="752856">
                 <a:tc>
                   <a:txBody>
                     <a:bodyPr/>
@@ -10406,7 +10604,7 @@
                           <a:ea typeface="Arial"/>
                           <a:cs typeface="Arial"/>
                         </a:rPr>
-                        <a:t>Week 3</a:t>
+                        <a:t>Clinical safety + engineering</a:t>
                       </a:r>
                     </a:p>
                   </a:txBody>
@@ -10430,131 +10628,7 @@
                           <a:ea typeface="Arial"/>
                           <a:cs typeface="Arial"/>
                         </a:rPr>
-                        <a:t>One scoped comparison</a:t>
-                      </a:r>
-                    </a:p>
-                    <a:p>
-                      <a:r>
-                        <a:rPr sz="1800" b="0">
-                          <a:solidFill>
-                            <a:srgbClr val="28354A"/>
-                          </a:solidFill>
-                          <a:latin typeface="Arial"/>
-                          <a:ea typeface="Arial"/>
-                          <a:cs typeface="Arial"/>
-                        </a:rPr>
-                        <a:t>Applied AI + clinical review</a:t>
-                      </a:r>
-                    </a:p>
-                  </a:txBody>
-                  <a:tcPr marL="133350" marR="133350" marT="76200" marB="76200" anchor="ctr">
-                    <a:solidFill>
-                      <a:srgbClr val="F6F4ED"/>
-                    </a:solidFill>
-                  </a:tcPr>
-                </a:tc>
-                <a:tc>
-                  <a:txBody>
-                    <a:bodyPr/>
-                    <a:lstStyle/>
-                    <a:p>
-                      <a:r>
-                        <a:rPr sz="1800" b="0">
-                          <a:solidFill>
-                            <a:srgbClr val="28354A"/>
-                          </a:solidFill>
-                          <a:latin typeface="Arial"/>
-                          <a:ea typeface="Arial"/>
-                          <a:cs typeface="Arial"/>
-                        </a:rPr>
-                        <a:t>Fewer misses within escalation and workload limits?</a:t>
-                      </a:r>
-                    </a:p>
-                  </a:txBody>
-                  <a:tcPr marL="133350" marR="133350" marT="76200" marB="76200" anchor="ctr">
-                    <a:solidFill>
-                      <a:srgbClr val="F6F4ED"/>
-                    </a:solidFill>
-                  </a:tcPr>
-                </a:tc>
-              </a:tr>
-              <a:tr h="752856">
-                <a:tc>
-                  <a:txBody>
-                    <a:bodyPr/>
-                    <a:lstStyle/>
-                    <a:p>
-                      <a:r>
-                        <a:rPr sz="1800" b="0">
-                          <a:solidFill>
-                            <a:srgbClr val="28354A"/>
-                          </a:solidFill>
-                          <a:latin typeface="Arial"/>
-                          <a:ea typeface="Arial"/>
-                          <a:cs typeface="Arial"/>
-                        </a:rPr>
-                        <a:t>Week 4</a:t>
-                      </a:r>
-                    </a:p>
-                  </a:txBody>
-                  <a:tcPr marL="133350" marR="133350" marT="76200" marB="76200" anchor="ctr">
-                    <a:solidFill>
-                      <a:srgbClr val="F6F4ED"/>
-                    </a:solidFill>
-                  </a:tcPr>
-                </a:tc>
-                <a:tc>
-                  <a:txBody>
-                    <a:bodyPr/>
-                    <a:lstStyle/>
-                    <a:p>
-                      <a:r>
-                        <a:rPr sz="1800" b="0">
-                          <a:solidFill>
-                            <a:srgbClr val="28354A"/>
-                          </a:solidFill>
-                          <a:latin typeface="Arial"/>
-                          <a:ea typeface="Arial"/>
-                          <a:cs typeface="Arial"/>
-                        </a:rPr>
-                        <a:t>Reviewed change and evaluation</a:t>
-                      </a:r>
-                    </a:p>
-                    <a:p>
-                      <a:r>
-                        <a:rPr sz="1800" b="0">
-                          <a:solidFill>
-                            <a:srgbClr val="28354A"/>
-                          </a:solidFill>
-                          <a:latin typeface="Arial"/>
-                          <a:ea typeface="Arial"/>
-                          <a:cs typeface="Arial"/>
-                        </a:rPr>
-                        <a:t>Engineering + clinical safety</a:t>
-                      </a:r>
-                    </a:p>
-                  </a:txBody>
-                  <a:tcPr marL="133350" marR="133350" marT="76200" marB="76200" anchor="ctr">
-                    <a:solidFill>
-                      <a:srgbClr val="F6F4ED"/>
-                    </a:solidFill>
-                  </a:tcPr>
-                </a:tc>
-                <a:tc>
-                  <a:txBody>
-                    <a:bodyPr/>
-                    <a:lstStyle/>
-                    <a:p>
-                      <a:r>
-                        <a:rPr sz="1800" b="0">
-                          <a:solidFill>
-                            <a:srgbClr val="28354A"/>
-                          </a:solidFill>
-                          <a:latin typeface="Arial"/>
-                          <a:ea typeface="Arial"/>
-                          <a:cs typeface="Arial"/>
-                        </a:rPr>
-                        <a:t>Continue, revise or stop against the agreed criteria.</a:t>
+                        <a:t>Reproducible result and decision</a:t>
                       </a:r>
                     </a:p>
                   </a:txBody>
@@ -10574,7 +10648,7 @@
           <p:cNvPr id="3" name="">
             <a:extLst xmlns:a="http://schemas.openxmlformats.org/drawingml/2006/main">
               <a:ext uri="{FF2B5EF4-FFF2-40B4-BE49-F238E27FC236}">
-                <a16:creationId xmlns:a16="http://schemas.microsoft.com/office/drawing/2014/main" id="{50DC10B6-50A5-4484-8C57-9C82F0338863}"/>
+                <a16:creationId xmlns:a16="http://schemas.microsoft.com/office/drawing/2014/main" id="{9725052B-F9E3-4FF5-88B7-D91A9E1A0A40}"/>
               </a:ext>
             </a:extLst>
           </p:cNvPr>
@@ -10585,8 +10659,8 @@
         </p:nvSpPr>
         <p:spPr>
           <a:xfrm xmlns:a="http://schemas.openxmlformats.org/drawingml/2006/main">
-            <a:off x="762000" y="5886450"/>
-            <a:ext cx="10096500" cy="514350"/>
+            <a:off x="762000" y="5562600"/>
+            <a:ext cx="10382250" cy="590550"/>
           </a:xfrm>
           <a:prstGeom xmlns:a="http://schemas.openxmlformats.org/drawingml/2006/main" prst="rect">
             <a:avLst/>
@@ -10603,9 +10677,9 @@
           <a:lstStyle xmlns:a="http://schemas.openxmlformats.org/drawingml/2006/main"/>
           <a:p xmlns:a="http://schemas.openxmlformats.org/drawingml/2006/main">
             <a:pPr>
-              <a:defRPr sz="1350">
-                <a:solidFill>
-                  <a:srgbClr val="667084"/>
+              <a:defRPr sz="1875" b="1">
+                <a:solidFill>
+                  <a:srgbClr val="286B68"/>
                 </a:solidFill>
                 <a:latin typeface="Arial"/>
                 <a:ea typeface="Arial"/>
@@ -10613,15 +10687,15 @@
               </a:defRPr>
             </a:pPr>
             <a:r>
-              <a:rPr sz="1350">
-                <a:solidFill>
-                  <a:srgbClr val="667084"/>
+              <a:rPr sz="1875" b="1">
+                <a:solidFill>
+                  <a:srgbClr val="286B68"/>
                 </a:solidFill>
                 <a:latin typeface="Arial"/>
                 <a:ea typeface="Arial"/>
                 <a:cs typeface="Arial"/>
               </a:rPr>
-              <a:t>The development ablation is complete. Blinded clinical validation remains pending. The selected GUI stays unchanged.</a:t>
+              <a:t>Own the implementation, evaluation and handoff.</a:t>
             </a:r>
           </a:p>
         </p:txBody>
@@ -10631,7 +10705,64 @@
           <p:cNvPr id="4" name="">
             <a:extLst xmlns:a="http://schemas.openxmlformats.org/drawingml/2006/main">
               <a:ext uri="{FF2B5EF4-FFF2-40B4-BE49-F238E27FC236}">
-                <a16:creationId xmlns:a16="http://schemas.microsoft.com/office/drawing/2014/main" id="{1F133AD4-22BE-4AC3-A280-8B79AF0887EB}"/>
+                <a16:creationId xmlns:a16="http://schemas.microsoft.com/office/drawing/2014/main" id="{B90BC362-8B35-4F25-8B04-960ADF049D13}"/>
+              </a:ext>
+            </a:extLst>
+          </p:cNvPr>
+          <p:cNvSpPr>
+            <a:spLocks xmlns:a="http://schemas.openxmlformats.org/drawingml/2006/main" noGrp="1"/>
+          </p:cNvSpPr>
+          <p:nvPr/>
+        </p:nvSpPr>
+        <p:spPr>
+          <a:xfrm xmlns:a="http://schemas.openxmlformats.org/drawingml/2006/main">
+            <a:off x="762000" y="6229350"/>
+            <a:ext cx="10096500" cy="466725"/>
+          </a:xfrm>
+          <a:prstGeom xmlns:a="http://schemas.openxmlformats.org/drawingml/2006/main" prst="rect">
+            <a:avLst/>
+          </a:prstGeom>
+          <a:noFill xmlns:a="http://schemas.openxmlformats.org/drawingml/2006/main"/>
+          <a:ln xmlns:a="http://schemas.openxmlformats.org/drawingml/2006/main" w="0">
+            <a:noFill/>
+          </a:ln>
+        </p:spPr>
+        <p:txBody>
+          <a:bodyPr xmlns:a="http://schemas.openxmlformats.org/drawingml/2006/main" wrap="square" lIns="0" tIns="0" rIns="0" bIns="0" anchor="t">
+            <a:noAutofit/>
+          </a:bodyPr>
+          <a:lstStyle xmlns:a="http://schemas.openxmlformats.org/drawingml/2006/main"/>
+          <a:p xmlns:a="http://schemas.openxmlformats.org/drawingml/2006/main">
+            <a:pPr>
+              <a:defRPr sz="1275">
+                <a:solidFill>
+                  <a:srgbClr val="667084"/>
+                </a:solidFill>
+                <a:latin typeface="Arial"/>
+                <a:ea typeface="Arial"/>
+                <a:cs typeface="Arial"/>
+              </a:defRPr>
+            </a:pPr>
+            <a:r>
+              <a:rPr sz="1275">
+                <a:solidFill>
+                  <a:srgbClr val="667084"/>
+                </a:solidFill>
+                <a:latin typeface="Arial"/>
+                <a:ea typeface="Arial"/>
+                <a:cs typeface="Arial"/>
+              </a:rPr>
+              <a:t>Proposed collaboration. Decide to continue, revise or stop using criteria agreed before inference.</a:t>
+            </a:r>
+          </a:p>
+        </p:txBody>
+      </p:sp>
+      <p:sp>
+        <p:nvSpPr>
+          <p:cNvPr id="5" name="">
+            <a:extLst xmlns:a="http://schemas.openxmlformats.org/drawingml/2006/main">
+              <a:ext uri="{FF2B5EF4-FFF2-40B4-BE49-F238E27FC236}">
+                <a16:creationId xmlns:a16="http://schemas.microsoft.com/office/drawing/2014/main" id="{7B2AEBC4-B728-4205-AA88-AC5C8B2698A8}"/>
               </a:ext>
             </a:extLst>
           </p:cNvPr>
@@ -10686,7 +10817,7 @@
     </p:spTree>
     <p:extLst>
       <p:ext uri="{BB962C8B-B14F-4D97-AF65-F5344CB8AC3E}">
-        <p14:creationId xmlns:p14="http://schemas.microsoft.com/office/powerpoint/2010/main" val="1817310870"/>
+        <p14:creationId xmlns:p14="http://schemas.microsoft.com/office/powerpoint/2010/main" val="1039507433"/>
       </p:ext>
     </p:extLst>
   </p:cSld>
@@ -10717,7 +10848,7 @@
           <p:cNvPr id="5" name="">
             <a:extLst xmlns:a="http://schemas.openxmlformats.org/drawingml/2006/main">
               <a:ext uri="{FF2B5EF4-FFF2-40B4-BE49-F238E27FC236}">
-                <a16:creationId xmlns:a16="http://schemas.microsoft.com/office/drawing/2014/main" id="{5217CC31-0715-4BD7-A363-98DAD699102D}"/>
+                <a16:creationId xmlns:a16="http://schemas.microsoft.com/office/drawing/2014/main" id="{86741A7B-0134-433C-BE72-76478E91BA64}"/>
               </a:ext>
             </a:extLst>
           </p:cNvPr>
@@ -10777,7 +10908,7 @@
         </p:nvGraphicFramePr>
         <p:xfrm>
           <a:off xmlns:a="http://schemas.openxmlformats.org/drawingml/2006/main" x="762000" y="1619250"/>
-          <a:ext xmlns:a="http://schemas.openxmlformats.org/drawingml/2006/main" cx="10668000" cy="3483102"/>
+          <a:ext xmlns:a="http://schemas.openxmlformats.org/drawingml/2006/main" cx="10668000" cy="2639568"/>
         </p:xfrm>
         <a:graphic xmlns:a="http://schemas.openxmlformats.org/drawingml/2006/main">
           <a:graphicData uri="http://schemas.openxmlformats.org/drawingml/2006/table">
@@ -10803,7 +10934,7 @@
                           <a:ea typeface="Arial"/>
                           <a:cs typeface="Arial"/>
                         </a:rPr>
-                        <a:t>Stage and owner</a:t>
+                        <a:t>Stage</a:t>
                       </a:r>
                     </a:p>
                   </a:txBody>
@@ -10827,7 +10958,7 @@
                           <a:ea typeface="Arial"/>
                           <a:cs typeface="Arial"/>
                         </a:rPr>
-                        <a:t>Deliverable</a:t>
+                        <a:t>Evidence required</a:t>
                       </a:r>
                     </a:p>
                   </a:txBody>
@@ -10851,13 +10982,235 @@
                           <a:ea typeface="Arial"/>
                           <a:cs typeface="Arial"/>
                         </a:rPr>
-                        <a:t>Decision to proceed</a:t>
+                        <a:t>Decision</a:t>
                       </a:r>
                     </a:p>
                   </a:txBody>
                   <a:tcPr marL="133350" marR="133350" marT="76200" marB="76200" anchor="ctr">
                     <a:solidFill>
                       <a:srgbClr val="243866"/>
+                    </a:solidFill>
+                  </a:tcPr>
+                </a:tc>
+              </a:tr>
+              <a:tr h="471678">
+                <a:tc>
+                  <a:txBody>
+                    <a:bodyPr/>
+                    <a:lstStyle/>
+                    <a:p>
+                      <a:r>
+                        <a:rPr sz="1800" b="0">
+                          <a:solidFill>
+                            <a:srgbClr val="28354A"/>
+                          </a:solidFill>
+                          <a:latin typeface="Arial"/>
+                          <a:ea typeface="Arial"/>
+                          <a:cs typeface="Arial"/>
+                        </a:rPr>
+                        <a:t>Now</a:t>
+                      </a:r>
+                    </a:p>
+                  </a:txBody>
+                  <a:tcPr marL="133350" marR="133350" marT="76200" marB="76200" anchor="ctr">
+                    <a:solidFill>
+                      <a:srgbClr val="F6F4ED"/>
+                    </a:solidFill>
+                  </a:tcPr>
+                </a:tc>
+                <a:tc>
+                  <a:txBody>
+                    <a:bodyPr/>
+                    <a:lstStyle/>
+                    <a:p>
+                      <a:r>
+                        <a:rPr sz="1800" b="0">
+                          <a:solidFill>
+                            <a:srgbClr val="28354A"/>
+                          </a:solidFill>
+                          <a:latin typeface="Arial"/>
+                          <a:ea typeface="Arial"/>
+                          <a:cs typeface="Arial"/>
+                        </a:rPr>
+                        <a:t>Clinical pathway and owner</a:t>
+                      </a:r>
+                    </a:p>
+                  </a:txBody>
+                  <a:tcPr marL="133350" marR="133350" marT="76200" marB="76200" anchor="ctr">
+                    <a:solidFill>
+                      <a:srgbClr val="F6F4ED"/>
+                    </a:solidFill>
+                  </a:tcPr>
+                </a:tc>
+                <a:tc>
+                  <a:txBody>
+                    <a:bodyPr/>
+                    <a:lstStyle/>
+                    <a:p>
+                      <a:r>
+                        <a:rPr sz="1800" b="0">
+                          <a:solidFill>
+                            <a:srgbClr val="28354A"/>
+                          </a:solidFill>
+                          <a:latin typeface="Arial"/>
+                          <a:ea typeface="Arial"/>
+                          <a:cs typeface="Arial"/>
+                        </a:rPr>
+                        <a:t>Agree on the task</a:t>
+                      </a:r>
+                    </a:p>
+                  </a:txBody>
+                  <a:tcPr marL="133350" marR="133350" marT="76200" marB="76200" anchor="ctr">
+                    <a:solidFill>
+                      <a:srgbClr val="F6F4ED"/>
+                    </a:solidFill>
+                  </a:tcPr>
+                </a:tc>
+              </a:tr>
+              <a:tr h="471678">
+                <a:tc>
+                  <a:txBody>
+                    <a:bodyPr/>
+                    <a:lstStyle/>
+                    <a:p>
+                      <a:r>
+                        <a:rPr sz="1800" b="0">
+                          <a:solidFill>
+                            <a:srgbClr val="28354A"/>
+                          </a:solidFill>
+                          <a:latin typeface="Arial"/>
+                          <a:ea typeface="Arial"/>
+                          <a:cs typeface="Arial"/>
+                        </a:rPr>
+                        <a:t>Weeks 2–4</a:t>
+                      </a:r>
+                    </a:p>
+                  </a:txBody>
+                  <a:tcPr marL="133350" marR="133350" marT="76200" marB="76200" anchor="ctr">
+                    <a:solidFill>
+                      <a:srgbClr val="F6F4ED"/>
+                    </a:solidFill>
+                  </a:tcPr>
+                </a:tc>
+                <a:tc>
+                  <a:txBody>
+                    <a:bodyPr/>
+                    <a:lstStyle/>
+                    <a:p>
+                      <a:r>
+                        <a:rPr sz="1800" b="0">
+                          <a:solidFill>
+                            <a:srgbClr val="28354A"/>
+                          </a:solidFill>
+                          <a:latin typeface="Arial"/>
+                          <a:ea typeface="Arial"/>
+                          <a:cs typeface="Arial"/>
+                        </a:rPr>
+                        <a:t>Independent paired evaluation</a:t>
+                      </a:r>
+                    </a:p>
+                  </a:txBody>
+                  <a:tcPr marL="133350" marR="133350" marT="76200" marB="76200" anchor="ctr">
+                    <a:solidFill>
+                      <a:srgbClr val="F6F4ED"/>
+                    </a:solidFill>
+                  </a:tcPr>
+                </a:tc>
+                <a:tc>
+                  <a:txBody>
+                    <a:bodyPr/>
+                    <a:lstStyle/>
+                    <a:p>
+                      <a:r>
+                        <a:rPr sz="1800" b="0">
+                          <a:solidFill>
+                            <a:srgbClr val="28354A"/>
+                          </a:solidFill>
+                          <a:latin typeface="Arial"/>
+                          <a:ea typeface="Arial"/>
+                          <a:cs typeface="Arial"/>
+                        </a:rPr>
+                        <a:t>Continue, revise or stop</a:t>
+                      </a:r>
+                    </a:p>
+                  </a:txBody>
+                  <a:tcPr marL="133350" marR="133350" marT="76200" marB="76200" anchor="ctr">
+                    <a:solidFill>
+                      <a:srgbClr val="F6F4ED"/>
+                    </a:solidFill>
+                  </a:tcPr>
+                </a:tc>
+              </a:tr>
+              <a:tr h="471678">
+                <a:tc>
+                  <a:txBody>
+                    <a:bodyPr/>
+                    <a:lstStyle/>
+                    <a:p>
+                      <a:r>
+                        <a:rPr sz="1800" b="0">
+                          <a:solidFill>
+                            <a:srgbClr val="28354A"/>
+                          </a:solidFill>
+                          <a:latin typeface="Arial"/>
+                          <a:ea typeface="Arial"/>
+                          <a:cs typeface="Arial"/>
+                        </a:rPr>
+                        <a:t>Months 2–3</a:t>
+                      </a:r>
+                    </a:p>
+                  </a:txBody>
+                  <a:tcPr marL="133350" marR="133350" marT="76200" marB="76200" anchor="ctr">
+                    <a:solidFill>
+                      <a:srgbClr val="F6F4ED"/>
+                    </a:solidFill>
+                  </a:tcPr>
+                </a:tc>
+                <a:tc>
+                  <a:txBody>
+                    <a:bodyPr/>
+                    <a:lstStyle/>
+                    <a:p>
+                      <a:r>
+                        <a:rPr sz="1800" b="0">
+                          <a:solidFill>
+                            <a:srgbClr val="28354A"/>
+                          </a:solidFill>
+                          <a:latin typeface="Arial"/>
+                          <a:ea typeface="Arial"/>
+                          <a:cs typeface="Arial"/>
+                        </a:rPr>
+                        <a:t>Observe alongside normal care</a:t>
+                      </a:r>
+                    </a:p>
+                  </a:txBody>
+                  <a:tcPr marL="133350" marR="133350" marT="76200" marB="76200" anchor="ctr">
+                    <a:solidFill>
+                      <a:srgbClr val="F6F4ED"/>
+                    </a:solidFill>
+                  </a:tcPr>
+                </a:tc>
+                <a:tc>
+                  <a:txBody>
+                    <a:bodyPr/>
+                    <a:lstStyle/>
+                    <a:p>
+                      <a:r>
+                        <a:rPr sz="1800" b="0">
+                          <a:solidFill>
+                            <a:srgbClr val="28354A"/>
+                          </a:solidFill>
+                          <a:latin typeface="Arial"/>
+                          <a:ea typeface="Arial"/>
+                          <a:cs typeface="Arial"/>
+                        </a:rPr>
+                        <a:t>Check timing and clinician burden</a:t>
+                      </a:r>
+                    </a:p>
+                  </a:txBody>
+                  <a:tcPr marL="133350" marR="133350" marT="76200" marB="76200" anchor="ctr">
+                    <a:solidFill>
+                      <a:srgbClr val="F6F4ED"/>
                     </a:solidFill>
                   </a:tcPr>
                 </a:tc>
@@ -10877,9 +11230,20 @@
                           <a:ea typeface="Arial"/>
                           <a:cs typeface="Arial"/>
                         </a:rPr>
-                        <a:t>Now</a:t>
-                      </a:r>
-                    </a:p>
+                        <a:t>Months 3–6</a:t>
+                      </a:r>
+                    </a:p>
+                  </a:txBody>
+                  <a:tcPr marL="133350" marR="133350" marT="76200" marB="76200" anchor="ctr">
+                    <a:solidFill>
+                      <a:srgbClr val="F6F4ED"/>
+                    </a:solidFill>
+                  </a:tcPr>
+                </a:tc>
+                <a:tc>
+                  <a:txBody>
+                    <a:bodyPr/>
+                    <a:lstStyle/>
                     <a:p>
                       <a:r>
                         <a:rPr sz="1800" b="0">
@@ -10890,7 +11254,7 @@
                           <a:ea typeface="Arial"/>
                           <a:cs typeface="Arial"/>
                         </a:rPr>
-                        <a:t>Clinical + operations</a:t>
+                        <a:t>Supervised pilot, pause and rollback</a:t>
                       </a:r>
                     </a:p>
                   </a:txBody>
@@ -10914,292 +11278,7 @@
                           <a:ea typeface="Arial"/>
                           <a:cs typeface="Arial"/>
                         </a:rPr>
-                        <a:t>Care pathways, action deadlines and receiving clinician</a:t>
-                      </a:r>
-                    </a:p>
-                  </a:txBody>
-                  <a:tcPr marL="133350" marR="133350" marT="76200" marB="76200" anchor="ctr">
-                    <a:solidFill>
-                      <a:srgbClr val="F6F4ED"/>
-                    </a:solidFill>
-                  </a:tcPr>
-                </a:tc>
-                <a:tc>
-                  <a:txBody>
-                    <a:bodyPr/>
-                    <a:lstStyle/>
-                    <a:p>
-                      <a:r>
-                        <a:rPr sz="1800" b="0">
-                          <a:solidFill>
-                            <a:srgbClr val="28354A"/>
-                          </a:solidFill>
-                          <a:latin typeface="Arial"/>
-                          <a:ea typeface="Arial"/>
-                          <a:cs typeface="Arial"/>
-                        </a:rPr>
-                        <a:t>Do labels describe first contact or required care?</a:t>
-                      </a:r>
-                    </a:p>
-                  </a:txBody>
-                  <a:tcPr marL="133350" marR="133350" marT="76200" marB="76200" anchor="ctr">
-                    <a:solidFill>
-                      <a:srgbClr val="F6F4ED"/>
-                    </a:solidFill>
-                  </a:tcPr>
-                </a:tc>
-              </a:tr>
-              <a:tr h="752856">
-                <a:tc>
-                  <a:txBody>
-                    <a:bodyPr/>
-                    <a:lstStyle/>
-                    <a:p>
-                      <a:r>
-                        <a:rPr sz="1800" b="0">
-                          <a:solidFill>
-                            <a:srgbClr val="28354A"/>
-                          </a:solidFill>
-                          <a:latin typeface="Arial"/>
-                          <a:ea typeface="Arial"/>
-                          <a:cs typeface="Arial"/>
-                        </a:rPr>
-                        <a:t>2–4 weeks</a:t>
-                      </a:r>
-                    </a:p>
-                    <a:p>
-                      <a:r>
-                        <a:rPr sz="1800" b="0">
-                          <a:solidFill>
-                            <a:srgbClr val="28354A"/>
-                          </a:solidFill>
-                          <a:latin typeface="Arial"/>
-                          <a:ea typeface="Arial"/>
-                          <a:cs typeface="Arial"/>
-                        </a:rPr>
-                        <a:t>Evaluation + AI</a:t>
-                      </a:r>
-                    </a:p>
-                  </a:txBody>
-                  <a:tcPr marL="133350" marR="133350" marT="76200" marB="76200" anchor="ctr">
-                    <a:solidFill>
-                      <a:srgbClr val="F6F4ED"/>
-                    </a:solidFill>
-                  </a:tcPr>
-                </a:tc>
-                <a:tc>
-                  <a:txBody>
-                    <a:bodyPr/>
-                    <a:lstStyle/>
-                    <a:p>
-                      <a:r>
-                        <a:rPr sz="1800" b="0">
-                          <a:solidFill>
-                            <a:srgbClr val="28354A"/>
-                          </a:solidFill>
-                          <a:latin typeface="Arial"/>
-                          <a:ea typeface="Arial"/>
-                          <a:cs typeface="Arial"/>
-                        </a:rPr>
-                        <a:t>New cases, independent ratings and paired comparisons</a:t>
-                      </a:r>
-                    </a:p>
-                  </a:txBody>
-                  <a:tcPr marL="133350" marR="133350" marT="76200" marB="76200" anchor="ctr">
-                    <a:solidFill>
-                      <a:srgbClr val="F6F4ED"/>
-                    </a:solidFill>
-                  </a:tcPr>
-                </a:tc>
-                <a:tc>
-                  <a:txBody>
-                    <a:bodyPr/>
-                    <a:lstStyle/>
-                    <a:p>
-                      <a:r>
-                        <a:rPr sz="1800" b="0">
-                          <a:solidFill>
-                            <a:srgbClr val="28354A"/>
-                          </a:solidFill>
-                          <a:latin typeface="Arial"/>
-                          <a:ea typeface="Arial"/>
-                          <a:cs typeface="Arial"/>
-                        </a:rPr>
-                        <a:t>Fewer missed actions within agreed referral limits?</a:t>
-                      </a:r>
-                    </a:p>
-                  </a:txBody>
-                  <a:tcPr marL="133350" marR="133350" marT="76200" marB="76200" anchor="ctr">
-                    <a:solidFill>
-                      <a:srgbClr val="F6F4ED"/>
-                    </a:solidFill>
-                  </a:tcPr>
-                </a:tc>
-              </a:tr>
-              <a:tr h="752856">
-                <a:tc>
-                  <a:txBody>
-                    <a:bodyPr/>
-                    <a:lstStyle/>
-                    <a:p>
-                      <a:r>
-                        <a:rPr sz="1800" b="0">
-                          <a:solidFill>
-                            <a:srgbClr val="28354A"/>
-                          </a:solidFill>
-                          <a:latin typeface="Arial"/>
-                          <a:ea typeface="Arial"/>
-                          <a:cs typeface="Arial"/>
-                        </a:rPr>
-                        <a:t>Months 2–3</a:t>
-                      </a:r>
-                    </a:p>
-                    <a:p>
-                      <a:r>
-                        <a:rPr sz="1800" b="0">
-                          <a:solidFill>
-                            <a:srgbClr val="28354A"/>
-                          </a:solidFill>
-                          <a:latin typeface="Arial"/>
-                          <a:ea typeface="Arial"/>
-                          <a:cs typeface="Arial"/>
-                        </a:rPr>
-                        <a:t>Operations</a:t>
-                      </a:r>
-                    </a:p>
-                  </a:txBody>
-                  <a:tcPr marL="133350" marR="133350" marT="76200" marB="76200" anchor="ctr">
-                    <a:solidFill>
-                      <a:srgbClr val="F6F4ED"/>
-                    </a:solidFill>
-                  </a:tcPr>
-                </a:tc>
-                <a:tc>
-                  <a:txBody>
-                    <a:bodyPr/>
-                    <a:lstStyle/>
-                    <a:p>
-                      <a:r>
-                        <a:rPr sz="1800" b="0">
-                          <a:solidFill>
-                            <a:srgbClr val="28354A"/>
-                          </a:solidFill>
-                          <a:latin typeface="Arial"/>
-                          <a:ea typeface="Arial"/>
-                          <a:cs typeface="Arial"/>
-                        </a:rPr>
-                        <a:t>Normal-care observation, action timing and overrides</a:t>
-                      </a:r>
-                    </a:p>
-                  </a:txBody>
-                  <a:tcPr marL="133350" marR="133350" marT="76200" marB="76200" anchor="ctr">
-                    <a:solidFill>
-                      <a:srgbClr val="F6F4ED"/>
-                    </a:solidFill>
-                  </a:tcPr>
-                </a:tc>
-                <a:tc>
-                  <a:txBody>
-                    <a:bodyPr/>
-                    <a:lstStyle/>
-                    <a:p>
-                      <a:r>
-                        <a:rPr sz="1800" b="0">
-                          <a:solidFill>
-                            <a:srgbClr val="28354A"/>
-                          </a:solidFill>
-                          <a:latin typeface="Arial"/>
-                          <a:ea typeface="Arial"/>
-                          <a:cs typeface="Arial"/>
-                        </a:rPr>
-                        <a:t>Does the aid improve completed care?</a:t>
-                      </a:r>
-                    </a:p>
-                  </a:txBody>
-                  <a:tcPr marL="133350" marR="133350" marT="76200" marB="76200" anchor="ctr">
-                    <a:solidFill>
-                      <a:srgbClr val="F6F4ED"/>
-                    </a:solidFill>
-                  </a:tcPr>
-                </a:tc>
-              </a:tr>
-              <a:tr h="752856">
-                <a:tc>
-                  <a:txBody>
-                    <a:bodyPr/>
-                    <a:lstStyle/>
-                    <a:p>
-                      <a:r>
-                        <a:rPr sz="1800" b="0">
-                          <a:solidFill>
-                            <a:srgbClr val="28354A"/>
-                          </a:solidFill>
-                          <a:latin typeface="Arial"/>
-                          <a:ea typeface="Arial"/>
-                          <a:cs typeface="Arial"/>
-                        </a:rPr>
-                        <a:t>Months 3–6</a:t>
-                      </a:r>
-                    </a:p>
-                    <a:p>
-                      <a:r>
-                        <a:rPr sz="1800" b="0">
-                          <a:solidFill>
-                            <a:srgbClr val="28354A"/>
-                          </a:solidFill>
-                          <a:latin typeface="Arial"/>
-                          <a:ea typeface="Arial"/>
-                          <a:cs typeface="Arial"/>
-                        </a:rPr>
-                        <a:t>Clinical safety</a:t>
-                      </a:r>
-                    </a:p>
-                  </a:txBody>
-                  <a:tcPr marL="133350" marR="133350" marT="76200" marB="76200" anchor="ctr">
-                    <a:solidFill>
-                      <a:srgbClr val="F6F4ED"/>
-                    </a:solidFill>
-                  </a:tcPr>
-                </a:tc>
-                <a:tc>
-                  <a:txBody>
-                    <a:bodyPr/>
-                    <a:lstStyle/>
-                    <a:p>
-                      <a:r>
-                        <a:rPr sz="1800" b="0">
-                          <a:solidFill>
-                            <a:srgbClr val="28354A"/>
-                          </a:solidFill>
-                          <a:latin typeface="Arial"/>
-                          <a:ea typeface="Arial"/>
-                          <a:cs typeface="Arial"/>
-                        </a:rPr>
-                        <a:t>Supervised workflow; pause criteria and rollback</a:t>
-                      </a:r>
-                    </a:p>
-                  </a:txBody>
-                  <a:tcPr marL="133350" marR="133350" marT="76200" marB="76200" anchor="ctr">
-                    <a:solidFill>
-                      <a:srgbClr val="F6F4ED"/>
-                    </a:solidFill>
-                  </a:tcPr>
-                </a:tc>
-                <a:tc>
-                  <a:txBody>
-                    <a:bodyPr/>
-                    <a:lstStyle/>
-                    <a:p>
-                      <a:r>
-                        <a:rPr sz="1800" b="0">
-                          <a:solidFill>
-                            <a:srgbClr val="28354A"/>
-                          </a:solidFill>
-                          <a:latin typeface="Arial"/>
-                          <a:ea typeface="Arial"/>
-                          <a:cs typeface="Arial"/>
-                        </a:rPr>
-                        <a:t>Does evidence support this use and population?</a:t>
+                        <a:t>Expand only if evidence supports use</a:t>
                       </a:r>
                     </a:p>
                   </a:txBody>
@@ -11219,7 +11298,7 @@
           <p:cNvPr id="3" name="">
             <a:extLst xmlns:a="http://schemas.openxmlformats.org/drawingml/2006/main">
               <a:ext uri="{FF2B5EF4-FFF2-40B4-BE49-F238E27FC236}">
-                <a16:creationId xmlns:a16="http://schemas.microsoft.com/office/drawing/2014/main" id="{3BC96886-1FA8-4071-9D16-B77A5CE3E18E}"/>
+                <a16:creationId xmlns:a16="http://schemas.microsoft.com/office/drawing/2014/main" id="{2CE38322-0E6D-433B-93C3-BC624AEE078D}"/>
               </a:ext>
             </a:extLst>
           </p:cNvPr>
@@ -11266,7 +11345,7 @@
                 <a:ea typeface="Arial"/>
                 <a:cs typeface="Arial"/>
               </a:rPr>
-              <a:t>Proposed sequence. Clinical review and approved data access determine timing. The current GUI remains a synthetic demonstration.</a:t>
+              <a:t>Proposed sequence, subject to clinical review and approved data access. Current GUI: synthetic demonstration.</a:t>
             </a:r>
           </a:p>
         </p:txBody>
@@ -11276,7 +11355,7 @@
           <p:cNvPr id="4" name="">
             <a:extLst xmlns:a="http://schemas.openxmlformats.org/drawingml/2006/main">
               <a:ext uri="{FF2B5EF4-FFF2-40B4-BE49-F238E27FC236}">
-                <a16:creationId xmlns:a16="http://schemas.microsoft.com/office/drawing/2014/main" id="{513B5F2C-ED90-4451-8E9E-0492EF8C20E0}"/>
+                <a16:creationId xmlns:a16="http://schemas.microsoft.com/office/drawing/2014/main" id="{6D2B66BD-66B9-4043-BB2A-AFCB94FCAC0F}"/>
               </a:ext>
             </a:extLst>
           </p:cNvPr>
@@ -11331,7 +11410,7 @@
     </p:spTree>
     <p:extLst>
       <p:ext uri="{BB962C8B-B14F-4D97-AF65-F5344CB8AC3E}">
-        <p14:creationId xmlns:p14="http://schemas.microsoft.com/office/powerpoint/2010/main" val="1294821898"/>
+        <p14:creationId xmlns:p14="http://schemas.microsoft.com/office/powerpoint/2010/main" val="910414783"/>
       </p:ext>
     </p:extLst>
   </p:cSld>
@@ -11362,7 +11441,7 @@
           <p:cNvPr id="6" name="">
             <a:extLst xmlns:a="http://schemas.openxmlformats.org/drawingml/2006/main">
               <a:ext uri="{FF2B5EF4-FFF2-40B4-BE49-F238E27FC236}">
-                <a16:creationId xmlns:a16="http://schemas.microsoft.com/office/drawing/2014/main" id="{FBCC4246-7621-42E9-BA91-8A3796234933}"/>
+                <a16:creationId xmlns:a16="http://schemas.microsoft.com/office/drawing/2014/main" id="{24FB5339-E68B-4FC9-A585-82035062CCED}"/>
               </a:ext>
             </a:extLst>
           </p:cNvPr>
@@ -11423,7 +11502,7 @@
           <p:nvPr/>
         </p:nvPicPr>
         <p:blipFill>
-          <a:blip xmlns:r="http://schemas.openxmlformats.org/officeDocument/2006/relationships" xmlns:a="http://schemas.openxmlformats.org/drawingml/2006/main" r:embed="R5edffe52786a49ce"/>
+          <a:blip xmlns:r="http://schemas.openxmlformats.org/officeDocument/2006/relationships" xmlns:a="http://schemas.openxmlformats.org/drawingml/2006/main" r:embed="Rd8f3ce6ba01640a1"/>
           <a:stretch xmlns:a="http://schemas.openxmlformats.org/drawingml/2006/main"/>
         </p:blipFill>
         <p:spPr>
@@ -11441,7 +11520,7 @@
           <p:cNvPr id="3" name="">
             <a:extLst xmlns:a="http://schemas.openxmlformats.org/drawingml/2006/main">
               <a:ext uri="{FF2B5EF4-FFF2-40B4-BE49-F238E27FC236}">
-                <a16:creationId xmlns:a16="http://schemas.microsoft.com/office/drawing/2014/main" id="{843011FD-8A20-4E8B-8A31-3002539B58F2}"/>
+                <a16:creationId xmlns:a16="http://schemas.microsoft.com/office/drawing/2014/main" id="{AB831F17-7217-4EBF-AFCA-EB7801519214}"/>
               </a:ext>
             </a:extLst>
           </p:cNvPr>
@@ -11498,7 +11577,7 @@
           <p:cNvPr id="4" name="">
             <a:extLst xmlns:a="http://schemas.openxmlformats.org/drawingml/2006/main">
               <a:ext uri="{FF2B5EF4-FFF2-40B4-BE49-F238E27FC236}">
-                <a16:creationId xmlns:a16="http://schemas.microsoft.com/office/drawing/2014/main" id="{AED79D51-CDA6-4192-98A9-A2E8CBD68966}"/>
+                <a16:creationId xmlns:a16="http://schemas.microsoft.com/office/drawing/2014/main" id="{D40240C7-6EA5-4839-B1FE-D3FA2F8C260D}"/>
               </a:ext>
             </a:extLst>
           </p:cNvPr>
@@ -11578,7 +11657,7 @@
           <p:cNvPr id="5" name="">
             <a:extLst xmlns:a="http://schemas.openxmlformats.org/drawingml/2006/main">
               <a:ext uri="{FF2B5EF4-FFF2-40B4-BE49-F238E27FC236}">
-                <a16:creationId xmlns:a16="http://schemas.microsoft.com/office/drawing/2014/main" id="{15AE47D3-7F46-4F93-B252-AABDDCB62403}"/>
+                <a16:creationId xmlns:a16="http://schemas.microsoft.com/office/drawing/2014/main" id="{691BD6F2-548D-4FA1-8FC9-BCEB2D4E09D8}"/>
               </a:ext>
             </a:extLst>
           </p:cNvPr>
@@ -11633,7 +11712,7 @@
     </p:spTree>
     <p:extLst>
       <p:ext uri="{BB962C8B-B14F-4D97-AF65-F5344CB8AC3E}">
-        <p14:creationId xmlns:p14="http://schemas.microsoft.com/office/powerpoint/2010/main" val="629008952"/>
+        <p14:creationId xmlns:p14="http://schemas.microsoft.com/office/powerpoint/2010/main" val="698856622"/>
       </p:ext>
     </p:extLst>
   </p:cSld>
@@ -11664,7 +11743,7 @@
           <p:cNvPr id="10" name="">
             <a:extLst xmlns:a="http://schemas.openxmlformats.org/drawingml/2006/main">
               <a:ext uri="{FF2B5EF4-FFF2-40B4-BE49-F238E27FC236}">
-                <a16:creationId xmlns:a16="http://schemas.microsoft.com/office/drawing/2014/main" id="{2B08430E-C0B9-40AC-A7C2-F2ADE943463D}"/>
+                <a16:creationId xmlns:a16="http://schemas.microsoft.com/office/drawing/2014/main" id="{84158561-08EB-4520-87D9-C2DF498B30BE}"/>
               </a:ext>
             </a:extLst>
           </p:cNvPr>
@@ -11721,7 +11800,7 @@
           <p:cNvPr id="2" name="">
             <a:extLst xmlns:a="http://schemas.openxmlformats.org/drawingml/2006/main">
               <a:ext uri="{FF2B5EF4-FFF2-40B4-BE49-F238E27FC236}">
-                <a16:creationId xmlns:a16="http://schemas.microsoft.com/office/drawing/2014/main" id="{D936374D-0041-408B-BBCE-F465BD9596AB}"/>
+                <a16:creationId xmlns:a16="http://schemas.microsoft.com/office/drawing/2014/main" id="{AD51CCA0-66C8-4F2A-95DC-1F55F0145F08}"/>
               </a:ext>
             </a:extLst>
           </p:cNvPr>
@@ -11778,7 +11857,7 @@
           <p:cNvPr id="3" name="">
             <a:extLst xmlns:a="http://schemas.openxmlformats.org/drawingml/2006/main">
               <a:ext uri="{FF2B5EF4-FFF2-40B4-BE49-F238E27FC236}">
-                <a16:creationId xmlns:a16="http://schemas.microsoft.com/office/drawing/2014/main" id="{3F3FF284-0A07-4532-89DA-E01165EE3DFD}"/>
+                <a16:creationId xmlns:a16="http://schemas.microsoft.com/office/drawing/2014/main" id="{622F9EF6-FECD-4D1E-8328-6B5F6D3EA2AF}"/>
               </a:ext>
             </a:extLst>
           </p:cNvPr>
@@ -11835,7 +11914,7 @@
           <p:cNvPr id="4" name="">
             <a:extLst xmlns:a="http://schemas.openxmlformats.org/drawingml/2006/main">
               <a:ext uri="{FF2B5EF4-FFF2-40B4-BE49-F238E27FC236}">
-                <a16:creationId xmlns:a16="http://schemas.microsoft.com/office/drawing/2014/main" id="{72FC4CC9-D814-4B1D-A090-B180CA757509}"/>
+                <a16:creationId xmlns:a16="http://schemas.microsoft.com/office/drawing/2014/main" id="{64AF632A-867D-4971-AB8B-EEF7F99A7E90}"/>
               </a:ext>
             </a:extLst>
           </p:cNvPr>
@@ -11892,7 +11971,7 @@
           <p:cNvPr id="5" name="">
             <a:extLst xmlns:a="http://schemas.openxmlformats.org/drawingml/2006/main">
               <a:ext uri="{FF2B5EF4-FFF2-40B4-BE49-F238E27FC236}">
-                <a16:creationId xmlns:a16="http://schemas.microsoft.com/office/drawing/2014/main" id="{842B5ACF-1C32-4F93-B9EB-5C0DAA1DEF2C}"/>
+                <a16:creationId xmlns:a16="http://schemas.microsoft.com/office/drawing/2014/main" id="{DDFA80B9-C8DF-4AEC-ACA5-3C3109D06BDC}"/>
               </a:ext>
             </a:extLst>
           </p:cNvPr>
@@ -11949,7 +12028,7 @@
           <p:cNvPr id="6" name="">
             <a:extLst xmlns:a="http://schemas.openxmlformats.org/drawingml/2006/main">
               <a:ext uri="{FF2B5EF4-FFF2-40B4-BE49-F238E27FC236}">
-                <a16:creationId xmlns:a16="http://schemas.microsoft.com/office/drawing/2014/main" id="{DBB17A5C-824D-4261-B95B-F612D196742C}"/>
+                <a16:creationId xmlns:a16="http://schemas.microsoft.com/office/drawing/2014/main" id="{DC9FEC4E-7B64-4B18-B587-AB972EE8E5BB}"/>
               </a:ext>
             </a:extLst>
           </p:cNvPr>
@@ -12006,7 +12085,7 @@
           <p:cNvPr id="7" name="">
             <a:extLst xmlns:a="http://schemas.openxmlformats.org/drawingml/2006/main">
               <a:ext uri="{FF2B5EF4-FFF2-40B4-BE49-F238E27FC236}">
-                <a16:creationId xmlns:a16="http://schemas.microsoft.com/office/drawing/2014/main" id="{7FE89027-B7EB-44B4-AB24-B204FFBB5062}"/>
+                <a16:creationId xmlns:a16="http://schemas.microsoft.com/office/drawing/2014/main" id="{558E9327-6CCB-458B-8ED5-505A381B3DA3}"/>
               </a:ext>
             </a:extLst>
           </p:cNvPr>
@@ -12063,7 +12142,7 @@
           <p:cNvPr id="8" name="">
             <a:extLst xmlns:a="http://schemas.openxmlformats.org/drawingml/2006/main">
               <a:ext uri="{FF2B5EF4-FFF2-40B4-BE49-F238E27FC236}">
-                <a16:creationId xmlns:a16="http://schemas.microsoft.com/office/drawing/2014/main" id="{E57E462E-BB57-47A9-9830-58FB9E16B3CD}"/>
+                <a16:creationId xmlns:a16="http://schemas.microsoft.com/office/drawing/2014/main" id="{36E4B294-A0A8-4E4B-8712-B085042966C4}"/>
               </a:ext>
             </a:extLst>
           </p:cNvPr>
@@ -12120,7 +12199,7 @@
           <p:cNvPr id="9" name="">
             <a:extLst xmlns:a="http://schemas.openxmlformats.org/drawingml/2006/main">
               <a:ext uri="{FF2B5EF4-FFF2-40B4-BE49-F238E27FC236}">
-                <a16:creationId xmlns:a16="http://schemas.microsoft.com/office/drawing/2014/main" id="{FF230181-DDDA-491C-89E1-8768744909B7}"/>
+                <a16:creationId xmlns:a16="http://schemas.microsoft.com/office/drawing/2014/main" id="{1961F63E-31E8-46BC-9402-DE4E35621ABF}"/>
               </a:ext>
             </a:extLst>
           </p:cNvPr>
@@ -12175,7 +12254,7 @@
     </p:spTree>
     <p:extLst>
       <p:ext uri="{BB962C8B-B14F-4D97-AF65-F5344CB8AC3E}">
-        <p14:creationId xmlns:p14="http://schemas.microsoft.com/office/powerpoint/2010/main" val="476884899"/>
+        <p14:creationId xmlns:p14="http://schemas.microsoft.com/office/powerpoint/2010/main" val="446874370"/>
       </p:ext>
     </p:extLst>
   </p:cSld>
@@ -12206,7 +12285,7 @@
           <p:cNvPr id="5" name="">
             <a:extLst xmlns:a="http://schemas.openxmlformats.org/drawingml/2006/main">
               <a:ext uri="{FF2B5EF4-FFF2-40B4-BE49-F238E27FC236}">
-                <a16:creationId xmlns:a16="http://schemas.microsoft.com/office/drawing/2014/main" id="{1AD5C9EE-2D75-4589-96CF-A164F410327F}"/>
+                <a16:creationId xmlns:a16="http://schemas.microsoft.com/office/drawing/2014/main" id="{9679A4D3-0F35-4F1C-8535-0C4CCB1DB789}"/>
               </a:ext>
             </a:extLst>
           </p:cNvPr>
@@ -12585,7 +12664,7 @@
           <p:cNvPr id="3" name="">
             <a:extLst xmlns:a="http://schemas.openxmlformats.org/drawingml/2006/main">
               <a:ext uri="{FF2B5EF4-FFF2-40B4-BE49-F238E27FC236}">
-                <a16:creationId xmlns:a16="http://schemas.microsoft.com/office/drawing/2014/main" id="{249C324A-811F-4364-937A-CEC90C908A7B}"/>
+                <a16:creationId xmlns:a16="http://schemas.microsoft.com/office/drawing/2014/main" id="{D4DC1685-150A-4326-82EA-0AB46154CA31}"/>
               </a:ext>
             </a:extLst>
           </p:cNvPr>
@@ -12642,7 +12721,7 @@
           <p:cNvPr id="4" name="">
             <a:extLst xmlns:a="http://schemas.openxmlformats.org/drawingml/2006/main">
               <a:ext uri="{FF2B5EF4-FFF2-40B4-BE49-F238E27FC236}">
-                <a16:creationId xmlns:a16="http://schemas.microsoft.com/office/drawing/2014/main" id="{6D1B4621-BF19-4AFF-B2A8-AF4546286AB3}"/>
+                <a16:creationId xmlns:a16="http://schemas.microsoft.com/office/drawing/2014/main" id="{7EBD4956-2AC8-446C-B9EC-27DF306B424A}"/>
               </a:ext>
             </a:extLst>
           </p:cNvPr>
@@ -12697,7 +12776,7 @@
     </p:spTree>
     <p:extLst>
       <p:ext uri="{BB962C8B-B14F-4D97-AF65-F5344CB8AC3E}">
-        <p14:creationId xmlns:p14="http://schemas.microsoft.com/office/powerpoint/2010/main" val="1873663916"/>
+        <p14:creationId xmlns:p14="http://schemas.microsoft.com/office/powerpoint/2010/main" val="246318203"/>
       </p:ext>
     </p:extLst>
   </p:cSld>
@@ -12728,7 +12807,7 @@
           <p:cNvPr id="5" name="">
             <a:extLst xmlns:a="http://schemas.openxmlformats.org/drawingml/2006/main">
               <a:ext uri="{FF2B5EF4-FFF2-40B4-BE49-F238E27FC236}">
-                <a16:creationId xmlns:a16="http://schemas.microsoft.com/office/drawing/2014/main" id="{B3F8EF7D-50A9-4A9F-9F5D-48A7A45E9EF2}"/>
+                <a16:creationId xmlns:a16="http://schemas.microsoft.com/office/drawing/2014/main" id="{C6DF0AA7-0CA1-4D98-A66E-D89E6DC4371B}"/>
               </a:ext>
             </a:extLst>
           </p:cNvPr>
@@ -12785,7 +12864,7 @@
           <p:cNvPr id="2" name="">
             <a:extLst xmlns:a="http://schemas.openxmlformats.org/drawingml/2006/main">
               <a:ext uri="{FF2B5EF4-FFF2-40B4-BE49-F238E27FC236}">
-                <a16:creationId xmlns:a16="http://schemas.microsoft.com/office/drawing/2014/main" id="{5EFCCFA1-360A-4AC3-B855-3A36CFDBD9B1}"/>
+                <a16:creationId xmlns:a16="http://schemas.microsoft.com/office/drawing/2014/main" id="{71B3583E-08B3-4FA0-9DB9-C33F674925E8}"/>
               </a:ext>
             </a:extLst>
           </p:cNvPr>
@@ -12962,7 +13041,7 @@
           <p:cNvPr id="3" name="">
             <a:extLst xmlns:a="http://schemas.openxmlformats.org/drawingml/2006/main">
               <a:ext uri="{FF2B5EF4-FFF2-40B4-BE49-F238E27FC236}">
-                <a16:creationId xmlns:a16="http://schemas.microsoft.com/office/drawing/2014/main" id="{C2EC146A-53BD-46B3-B2C6-C12EE19B76F8}"/>
+                <a16:creationId xmlns:a16="http://schemas.microsoft.com/office/drawing/2014/main" id="{AB25DD41-35A3-457E-A510-1E56DED77C6F}"/>
               </a:ext>
             </a:extLst>
           </p:cNvPr>
@@ -13019,7 +13098,7 @@
           <p:cNvPr id="4" name="">
             <a:extLst xmlns:a="http://schemas.openxmlformats.org/drawingml/2006/main">
               <a:ext uri="{FF2B5EF4-FFF2-40B4-BE49-F238E27FC236}">
-                <a16:creationId xmlns:a16="http://schemas.microsoft.com/office/drawing/2014/main" id="{8A0DA9BD-A7F9-46BD-86C6-DD65BFABC243}"/>
+                <a16:creationId xmlns:a16="http://schemas.microsoft.com/office/drawing/2014/main" id="{81F8BC66-BD87-4EE0-AB5A-94539062AD3B}"/>
               </a:ext>
             </a:extLst>
           </p:cNvPr>
@@ -13074,7 +13153,7 @@
     </p:spTree>
     <p:extLst>
       <p:ext uri="{BB962C8B-B14F-4D97-AF65-F5344CB8AC3E}">
-        <p14:creationId xmlns:p14="http://schemas.microsoft.com/office/powerpoint/2010/main" val="1698730796"/>
+        <p14:creationId xmlns:p14="http://schemas.microsoft.com/office/powerpoint/2010/main" val="1077451687"/>
       </p:ext>
     </p:extLst>
   </p:cSld>
@@ -13105,7 +13184,7 @@
           <p:cNvPr id="12" name="">
             <a:extLst xmlns:a="http://schemas.openxmlformats.org/drawingml/2006/main">
               <a:ext uri="{FF2B5EF4-FFF2-40B4-BE49-F238E27FC236}">
-                <a16:creationId xmlns:a16="http://schemas.microsoft.com/office/drawing/2014/main" id="{15403B02-DAD9-4205-8C08-4743A204F309}"/>
+                <a16:creationId xmlns:a16="http://schemas.microsoft.com/office/drawing/2014/main" id="{D83EF9E8-E372-431A-815B-A4E522B46B04}"/>
               </a:ext>
             </a:extLst>
           </p:cNvPr>
@@ -13166,7 +13245,7 @@
           <p:nvPr/>
         </p:nvPicPr>
         <p:blipFill>
-          <a:blip xmlns:r="http://schemas.openxmlformats.org/officeDocument/2006/relationships" xmlns:a="http://schemas.openxmlformats.org/drawingml/2006/main" r:embed="Rf2f6e35381004765"/>
+          <a:blip xmlns:r="http://schemas.openxmlformats.org/officeDocument/2006/relationships" xmlns:a="http://schemas.openxmlformats.org/drawingml/2006/main" r:embed="Ra788b19cf4464337"/>
           <a:stretch xmlns:a="http://schemas.openxmlformats.org/drawingml/2006/main"/>
         </p:blipFill>
         <p:spPr>
@@ -13188,7 +13267,7 @@
           <p:nvPr/>
         </p:nvPicPr>
         <p:blipFill>
-          <a:blip xmlns:r="http://schemas.openxmlformats.org/officeDocument/2006/relationships" xmlns:a="http://schemas.openxmlformats.org/drawingml/2006/main" r:embed="Rfb10f4a391fa4004"/>
+          <a:blip xmlns:r="http://schemas.openxmlformats.org/officeDocument/2006/relationships" xmlns:a="http://schemas.openxmlformats.org/drawingml/2006/main" r:embed="Rb2a2d71e236e4b6d"/>
           <a:stretch xmlns:a="http://schemas.openxmlformats.org/drawingml/2006/main"/>
         </p:blipFill>
         <p:spPr>
@@ -13206,7 +13285,7 @@
           <p:cNvPr id="4" name="">
             <a:extLst xmlns:a="http://schemas.openxmlformats.org/drawingml/2006/main">
               <a:ext uri="{FF2B5EF4-FFF2-40B4-BE49-F238E27FC236}">
-                <a16:creationId xmlns:a16="http://schemas.microsoft.com/office/drawing/2014/main" id="{E1C8FD03-8024-44A5-8C56-9EA81B25EA46}"/>
+                <a16:creationId xmlns:a16="http://schemas.microsoft.com/office/drawing/2014/main" id="{8EF2F9BF-DFCD-4433-B170-7B1F73860729}"/>
               </a:ext>
             </a:extLst>
           </p:cNvPr>
@@ -13263,7 +13342,7 @@
           <p:cNvPr id="5" name="">
             <a:extLst xmlns:a="http://schemas.openxmlformats.org/drawingml/2006/main">
               <a:ext uri="{FF2B5EF4-FFF2-40B4-BE49-F238E27FC236}">
-                <a16:creationId xmlns:a16="http://schemas.microsoft.com/office/drawing/2014/main" id="{910E6DC3-7D77-4776-8608-CB869BAD247B}"/>
+                <a16:creationId xmlns:a16="http://schemas.microsoft.com/office/drawing/2014/main" id="{E7243B61-97E5-4A2E-911A-DB0D680C6B76}"/>
               </a:ext>
             </a:extLst>
           </p:cNvPr>
@@ -13320,7 +13399,7 @@
           <p:cNvPr id="6" name="">
             <a:extLst xmlns:a="http://schemas.openxmlformats.org/drawingml/2006/main">
               <a:ext uri="{FF2B5EF4-FFF2-40B4-BE49-F238E27FC236}">
-                <a16:creationId xmlns:a16="http://schemas.microsoft.com/office/drawing/2014/main" id="{1E92A488-E39B-4B84-A1B6-FF95D252414E}"/>
+                <a16:creationId xmlns:a16="http://schemas.microsoft.com/office/drawing/2014/main" id="{133E5C70-999C-45EE-BF75-07CA0372C656}"/>
               </a:ext>
             </a:extLst>
           </p:cNvPr>
@@ -13400,7 +13479,7 @@
           <p:cNvPr id="7" name="">
             <a:extLst xmlns:a="http://schemas.openxmlformats.org/drawingml/2006/main">
               <a:ext uri="{FF2B5EF4-FFF2-40B4-BE49-F238E27FC236}">
-                <a16:creationId xmlns:a16="http://schemas.microsoft.com/office/drawing/2014/main" id="{C437A532-D8B4-44D3-8B0E-1FBB8C8D656D}"/>
+                <a16:creationId xmlns:a16="http://schemas.microsoft.com/office/drawing/2014/main" id="{EE888833-3F07-42B3-9378-4BA1E5403A37}"/>
               </a:ext>
             </a:extLst>
           </p:cNvPr>
@@ -13457,7 +13536,7 @@
           <p:cNvPr id="8" name="">
             <a:extLst xmlns:a="http://schemas.openxmlformats.org/drawingml/2006/main">
               <a:ext uri="{FF2B5EF4-FFF2-40B4-BE49-F238E27FC236}">
-                <a16:creationId xmlns:a16="http://schemas.microsoft.com/office/drawing/2014/main" id="{D319E34E-49B2-4FC9-B707-DDE965F7665E}"/>
+                <a16:creationId xmlns:a16="http://schemas.microsoft.com/office/drawing/2014/main" id="{5B0EF073-E99B-42E4-9F8E-F8865A7C2590}"/>
               </a:ext>
             </a:extLst>
           </p:cNvPr>
@@ -13514,7 +13593,7 @@
           <p:cNvPr id="9" name="">
             <a:extLst xmlns:a="http://schemas.openxmlformats.org/drawingml/2006/main">
               <a:ext uri="{FF2B5EF4-FFF2-40B4-BE49-F238E27FC236}">
-                <a16:creationId xmlns:a16="http://schemas.microsoft.com/office/drawing/2014/main" id="{290E2043-6947-4DA5-8D71-46B4BD48CE12}"/>
+                <a16:creationId xmlns:a16="http://schemas.microsoft.com/office/drawing/2014/main" id="{54DDB661-1433-47DB-95AE-E0D78E5F8EAE}"/>
               </a:ext>
             </a:extLst>
           </p:cNvPr>
@@ -13571,7 +13650,7 @@
           <p:cNvPr id="10" name="">
             <a:extLst xmlns:a="http://schemas.openxmlformats.org/drawingml/2006/main">
               <a:ext uri="{FF2B5EF4-FFF2-40B4-BE49-F238E27FC236}">
-                <a16:creationId xmlns:a16="http://schemas.microsoft.com/office/drawing/2014/main" id="{3CB918B8-79FC-4063-ABC8-05E3ECC73580}"/>
+                <a16:creationId xmlns:a16="http://schemas.microsoft.com/office/drawing/2014/main" id="{309C0C6B-FF73-4DFA-8063-3EEFD1001666}"/>
               </a:ext>
             </a:extLst>
           </p:cNvPr>
@@ -13628,7 +13707,7 @@
           <p:cNvPr id="11" name="">
             <a:extLst xmlns:a="http://schemas.openxmlformats.org/drawingml/2006/main">
               <a:ext uri="{FF2B5EF4-FFF2-40B4-BE49-F238E27FC236}">
-                <a16:creationId xmlns:a16="http://schemas.microsoft.com/office/drawing/2014/main" id="{8624E2B5-B073-4EF1-8BCA-372CC55513A1}"/>
+                <a16:creationId xmlns:a16="http://schemas.microsoft.com/office/drawing/2014/main" id="{6F23D145-AC50-4702-A3C0-C0F11D9DBD5C}"/>
               </a:ext>
             </a:extLst>
           </p:cNvPr>
@@ -13683,7 +13762,7 @@
     </p:spTree>
     <p:extLst>
       <p:ext uri="{BB962C8B-B14F-4D97-AF65-F5344CB8AC3E}">
-        <p14:creationId xmlns:p14="http://schemas.microsoft.com/office/powerpoint/2010/main" val="1138405987"/>
+        <p14:creationId xmlns:p14="http://schemas.microsoft.com/office/powerpoint/2010/main" val="1905386657"/>
       </p:ext>
     </p:extLst>
   </p:cSld>
@@ -13714,7 +13793,7 @@
           <p:cNvPr id="9" name="">
             <a:extLst xmlns:a="http://schemas.openxmlformats.org/drawingml/2006/main">
               <a:ext uri="{FF2B5EF4-FFF2-40B4-BE49-F238E27FC236}">
-                <a16:creationId xmlns:a16="http://schemas.microsoft.com/office/drawing/2014/main" id="{0BE1227D-1542-4CD2-BBB6-4AADEDB3C52F}"/>
+                <a16:creationId xmlns:a16="http://schemas.microsoft.com/office/drawing/2014/main" id="{C3C7D5A1-34C8-4B65-8025-7B899C43DC63}"/>
               </a:ext>
             </a:extLst>
           </p:cNvPr>
@@ -13771,7 +13850,7 @@
           <p:cNvPr id="2" name="">
             <a:extLst xmlns:a="http://schemas.openxmlformats.org/drawingml/2006/main">
               <a:ext uri="{FF2B5EF4-FFF2-40B4-BE49-F238E27FC236}">
-                <a16:creationId xmlns:a16="http://schemas.microsoft.com/office/drawing/2014/main" id="{1D2A7273-A9AC-4D58-B8D9-2AB9EB4E3C24}"/>
+                <a16:creationId xmlns:a16="http://schemas.microsoft.com/office/drawing/2014/main" id="{36457662-DE52-4398-84B2-DF19C329551C}"/>
               </a:ext>
             </a:extLst>
           </p:cNvPr>
@@ -13828,7 +13907,7 @@
           <p:cNvPr id="3" name="">
             <a:extLst xmlns:a="http://schemas.openxmlformats.org/drawingml/2006/main">
               <a:ext uri="{FF2B5EF4-FFF2-40B4-BE49-F238E27FC236}">
-                <a16:creationId xmlns:a16="http://schemas.microsoft.com/office/drawing/2014/main" id="{E99B21B0-1605-4BB5-B9E3-61CC5174D5E5}"/>
+                <a16:creationId xmlns:a16="http://schemas.microsoft.com/office/drawing/2014/main" id="{0F5D01C2-8812-4C80-95EF-4A62270CF1ED}"/>
               </a:ext>
             </a:extLst>
           </p:cNvPr>
@@ -13885,7 +13964,7 @@
           <p:cNvPr id="4" name="">
             <a:extLst xmlns:a="http://schemas.openxmlformats.org/drawingml/2006/main">
               <a:ext uri="{FF2B5EF4-FFF2-40B4-BE49-F238E27FC236}">
-                <a16:creationId xmlns:a16="http://schemas.microsoft.com/office/drawing/2014/main" id="{5AB14C66-663F-4523-80E7-8C3632BC5F08}"/>
+                <a16:creationId xmlns:a16="http://schemas.microsoft.com/office/drawing/2014/main" id="{D88D7557-CF6E-4B56-B0DA-9562252CB836}"/>
               </a:ext>
             </a:extLst>
           </p:cNvPr>
@@ -13942,7 +14021,7 @@
           <p:cNvPr id="5" name="">
             <a:extLst xmlns:a="http://schemas.openxmlformats.org/drawingml/2006/main">
               <a:ext uri="{FF2B5EF4-FFF2-40B4-BE49-F238E27FC236}">
-                <a16:creationId xmlns:a16="http://schemas.microsoft.com/office/drawing/2014/main" id="{4664C27B-DF16-4E80-BEC3-D6F5C724393C}"/>
+                <a16:creationId xmlns:a16="http://schemas.microsoft.com/office/drawing/2014/main" id="{7F9A4761-F282-4267-AE25-07434ED5CE59}"/>
               </a:ext>
             </a:extLst>
           </p:cNvPr>
@@ -13999,7 +14078,7 @@
           <p:cNvPr id="6" name="">
             <a:extLst xmlns:a="http://schemas.openxmlformats.org/drawingml/2006/main">
               <a:ext uri="{FF2B5EF4-FFF2-40B4-BE49-F238E27FC236}">
-                <a16:creationId xmlns:a16="http://schemas.microsoft.com/office/drawing/2014/main" id="{A8197AC5-5D5C-4D99-8E3D-565A36D6C651}"/>
+                <a16:creationId xmlns:a16="http://schemas.microsoft.com/office/drawing/2014/main" id="{2F84C7B0-4679-4E36-BA2A-03544CDA5F94}"/>
               </a:ext>
             </a:extLst>
           </p:cNvPr>
@@ -14056,7 +14135,7 @@
           <p:cNvPr id="7" name="">
             <a:extLst xmlns:a="http://schemas.openxmlformats.org/drawingml/2006/main">
               <a:ext uri="{FF2B5EF4-FFF2-40B4-BE49-F238E27FC236}">
-                <a16:creationId xmlns:a16="http://schemas.microsoft.com/office/drawing/2014/main" id="{FFF2805C-B017-4423-A0AF-86422F177164}"/>
+                <a16:creationId xmlns:a16="http://schemas.microsoft.com/office/drawing/2014/main" id="{DD805BC9-9001-4A14-B991-074AD8849A0A}"/>
               </a:ext>
             </a:extLst>
           </p:cNvPr>
@@ -14113,7 +14192,7 @@
           <p:cNvPr id="8" name="">
             <a:extLst xmlns:a="http://schemas.openxmlformats.org/drawingml/2006/main">
               <a:ext uri="{FF2B5EF4-FFF2-40B4-BE49-F238E27FC236}">
-                <a16:creationId xmlns:a16="http://schemas.microsoft.com/office/drawing/2014/main" id="{419E8749-3148-48C2-8464-352122DD65FD}"/>
+                <a16:creationId xmlns:a16="http://schemas.microsoft.com/office/drawing/2014/main" id="{2C146844-83EE-4463-8FFF-6EF15EC6A477}"/>
               </a:ext>
             </a:extLst>
           </p:cNvPr>
@@ -14168,7 +14247,7 @@
     </p:spTree>
     <p:extLst>
       <p:ext uri="{BB962C8B-B14F-4D97-AF65-F5344CB8AC3E}">
-        <p14:creationId xmlns:p14="http://schemas.microsoft.com/office/powerpoint/2010/main" val="241603592"/>
+        <p14:creationId xmlns:p14="http://schemas.microsoft.com/office/powerpoint/2010/main" val="1995240816"/>
       </p:ext>
     </p:extLst>
   </p:cSld>
@@ -14199,7 +14278,7 @@
           <p:cNvPr id="7" name="">
             <a:extLst xmlns:a="http://schemas.openxmlformats.org/drawingml/2006/main">
               <a:ext uri="{FF2B5EF4-FFF2-40B4-BE49-F238E27FC236}">
-                <a16:creationId xmlns:a16="http://schemas.microsoft.com/office/drawing/2014/main" id="{C0738534-7CB0-4C97-8120-FF508DC43724}"/>
+                <a16:creationId xmlns:a16="http://schemas.microsoft.com/office/drawing/2014/main" id="{A8EB5F66-3254-4D99-9CBC-2AABD6DDE221}"/>
               </a:ext>
             </a:extLst>
           </p:cNvPr>
@@ -14527,7 +14606,7 @@
           <p:cNvPr id="3" name="">
             <a:extLst xmlns:a="http://schemas.openxmlformats.org/drawingml/2006/main">
               <a:ext uri="{FF2B5EF4-FFF2-40B4-BE49-F238E27FC236}">
-                <a16:creationId xmlns:a16="http://schemas.microsoft.com/office/drawing/2014/main" id="{DC8148CA-F523-4C2D-9845-77BE4DDE2393}"/>
+                <a16:creationId xmlns:a16="http://schemas.microsoft.com/office/drawing/2014/main" id="{FEC4A5A0-A00A-4859-9200-A00E86B23BB4}"/>
               </a:ext>
             </a:extLst>
           </p:cNvPr>
@@ -14584,7 +14663,7 @@
           <p:cNvPr id="4" name="">
             <a:extLst xmlns:a="http://schemas.openxmlformats.org/drawingml/2006/main">
               <a:ext uri="{FF2B5EF4-FFF2-40B4-BE49-F238E27FC236}">
-                <a16:creationId xmlns:a16="http://schemas.microsoft.com/office/drawing/2014/main" id="{AB2F23A9-66F3-4178-889C-8773967C4043}"/>
+                <a16:creationId xmlns:a16="http://schemas.microsoft.com/office/drawing/2014/main" id="{FA151A3B-FD32-42CB-9040-BAAD2EACB776}"/>
               </a:ext>
             </a:extLst>
           </p:cNvPr>
@@ -14641,7 +14720,7 @@
           <p:cNvPr id="5" name="">
             <a:extLst xmlns:a="http://schemas.openxmlformats.org/drawingml/2006/main">
               <a:ext uri="{FF2B5EF4-FFF2-40B4-BE49-F238E27FC236}">
-                <a16:creationId xmlns:a16="http://schemas.microsoft.com/office/drawing/2014/main" id="{292A2F34-B65C-444E-A882-F45ED589DB3A}"/>
+                <a16:creationId xmlns:a16="http://schemas.microsoft.com/office/drawing/2014/main" id="{F03A36DF-490A-4B6F-8DC0-88AA4E33E635}"/>
               </a:ext>
             </a:extLst>
           </p:cNvPr>
@@ -14698,7 +14777,7 @@
           <p:cNvPr id="6" name="">
             <a:extLst xmlns:a="http://schemas.openxmlformats.org/drawingml/2006/main">
               <a:ext uri="{FF2B5EF4-FFF2-40B4-BE49-F238E27FC236}">
-                <a16:creationId xmlns:a16="http://schemas.microsoft.com/office/drawing/2014/main" id="{8D74771D-0469-4FD5-A623-BCA97B6AA58A}"/>
+                <a16:creationId xmlns:a16="http://schemas.microsoft.com/office/drawing/2014/main" id="{DA806017-3A9E-4633-A481-E18ACF570E6C}"/>
               </a:ext>
             </a:extLst>
           </p:cNvPr>
@@ -14753,7 +14832,7 @@
     </p:spTree>
     <p:extLst>
       <p:ext uri="{BB962C8B-B14F-4D97-AF65-F5344CB8AC3E}">
-        <p14:creationId xmlns:p14="http://schemas.microsoft.com/office/powerpoint/2010/main" val="2085005869"/>
+        <p14:creationId xmlns:p14="http://schemas.microsoft.com/office/powerpoint/2010/main" val="1134263274"/>
       </p:ext>
     </p:extLst>
   </p:cSld>
@@ -14784,7 +14863,7 @@
           <p:cNvPr id="7" name="">
             <a:extLst xmlns:a="http://schemas.openxmlformats.org/drawingml/2006/main">
               <a:ext uri="{FF2B5EF4-FFF2-40B4-BE49-F238E27FC236}">
-                <a16:creationId xmlns:a16="http://schemas.microsoft.com/office/drawing/2014/main" id="{1810B2F8-24B6-48FD-B700-6B3811AC8CDA}"/>
+                <a16:creationId xmlns:a16="http://schemas.microsoft.com/office/drawing/2014/main" id="{A02869E9-F14F-4DDB-954B-B7183BEF13A6}"/>
               </a:ext>
             </a:extLst>
           </p:cNvPr>
@@ -15160,7 +15239,7 @@
           <p:cNvPr id="3" name="">
             <a:extLst xmlns:a="http://schemas.openxmlformats.org/drawingml/2006/main">
               <a:ext uri="{FF2B5EF4-FFF2-40B4-BE49-F238E27FC236}">
-                <a16:creationId xmlns:a16="http://schemas.microsoft.com/office/drawing/2014/main" id="{E9B234D1-0F30-48DC-AB94-F71E2A3F468A}"/>
+                <a16:creationId xmlns:a16="http://schemas.microsoft.com/office/drawing/2014/main" id="{F6C7C68B-8B64-43BC-BBB2-1A36D1CE77D0}"/>
               </a:ext>
             </a:extLst>
           </p:cNvPr>
@@ -15217,7 +15296,7 @@
           <p:cNvPr id="4" name="">
             <a:extLst xmlns:a="http://schemas.openxmlformats.org/drawingml/2006/main">
               <a:ext uri="{FF2B5EF4-FFF2-40B4-BE49-F238E27FC236}">
-                <a16:creationId xmlns:a16="http://schemas.microsoft.com/office/drawing/2014/main" id="{6D47FE00-5849-4F9B-9B89-302817F04B2F}"/>
+                <a16:creationId xmlns:a16="http://schemas.microsoft.com/office/drawing/2014/main" id="{D7B4CF1D-3E19-42B9-A981-27EB604F8212}"/>
               </a:ext>
             </a:extLst>
           </p:cNvPr>
@@ -15274,7 +15353,7 @@
           <p:cNvPr id="5" name="">
             <a:extLst xmlns:a="http://schemas.openxmlformats.org/drawingml/2006/main">
               <a:ext uri="{FF2B5EF4-FFF2-40B4-BE49-F238E27FC236}">
-                <a16:creationId xmlns:a16="http://schemas.microsoft.com/office/drawing/2014/main" id="{E9E9B2C7-D94E-4F43-9C5D-F2B8B08E10BA}"/>
+                <a16:creationId xmlns:a16="http://schemas.microsoft.com/office/drawing/2014/main" id="{C7F8EDB6-C399-4408-A5E0-A951780C2844}"/>
               </a:ext>
             </a:extLst>
           </p:cNvPr>
@@ -15331,7 +15410,7 @@
           <p:cNvPr id="6" name="">
             <a:extLst xmlns:a="http://schemas.openxmlformats.org/drawingml/2006/main">
               <a:ext uri="{FF2B5EF4-FFF2-40B4-BE49-F238E27FC236}">
-                <a16:creationId xmlns:a16="http://schemas.microsoft.com/office/drawing/2014/main" id="{197E6179-4662-415B-8FC1-FD50B5713EC2}"/>
+                <a16:creationId xmlns:a16="http://schemas.microsoft.com/office/drawing/2014/main" id="{6901E4B9-1A57-4461-A647-75CF27706917}"/>
               </a:ext>
             </a:extLst>
           </p:cNvPr>
@@ -15386,7 +15465,7 @@
     </p:spTree>
     <p:extLst>
       <p:ext uri="{BB962C8B-B14F-4D97-AF65-F5344CB8AC3E}">
-        <p14:creationId xmlns:p14="http://schemas.microsoft.com/office/powerpoint/2010/main" val="1650382112"/>
+        <p14:creationId xmlns:p14="http://schemas.microsoft.com/office/powerpoint/2010/main" val="1698223263"/>
       </p:ext>
     </p:extLst>
   </p:cSld>
@@ -15417,7 +15496,7 @@
           <p:cNvPr id="5" name="">
             <a:extLst xmlns:a="http://schemas.openxmlformats.org/drawingml/2006/main">
               <a:ext uri="{FF2B5EF4-FFF2-40B4-BE49-F238E27FC236}">
-                <a16:creationId xmlns:a16="http://schemas.microsoft.com/office/drawing/2014/main" id="{75400D23-3FCE-4559-9FF3-6B2A2D0D29C6}"/>
+                <a16:creationId xmlns:a16="http://schemas.microsoft.com/office/drawing/2014/main" id="{D0E1ADD1-6E61-48EE-8F31-AE1A06518B7D}"/>
               </a:ext>
             </a:extLst>
           </p:cNvPr>
@@ -15696,7 +15775,7 @@
           <p:cNvPr id="3" name="">
             <a:extLst xmlns:a="http://schemas.openxmlformats.org/drawingml/2006/main">
               <a:ext uri="{FF2B5EF4-FFF2-40B4-BE49-F238E27FC236}">
-                <a16:creationId xmlns:a16="http://schemas.microsoft.com/office/drawing/2014/main" id="{FAAC7E77-D555-49BB-B9D9-691BE6CB17C6}"/>
+                <a16:creationId xmlns:a16="http://schemas.microsoft.com/office/drawing/2014/main" id="{3D0E13D1-0416-4865-BBF8-F43E247F5B5D}"/>
               </a:ext>
             </a:extLst>
           </p:cNvPr>
@@ -15753,7 +15832,7 @@
           <p:cNvPr id="4" name="">
             <a:extLst xmlns:a="http://schemas.openxmlformats.org/drawingml/2006/main">
               <a:ext uri="{FF2B5EF4-FFF2-40B4-BE49-F238E27FC236}">
-                <a16:creationId xmlns:a16="http://schemas.microsoft.com/office/drawing/2014/main" id="{40BBB0DB-7D6E-443F-A7EA-7D698336F1D3}"/>
+                <a16:creationId xmlns:a16="http://schemas.microsoft.com/office/drawing/2014/main" id="{B3F1B1B6-E2E6-442B-B06D-F00A013EACE5}"/>
               </a:ext>
             </a:extLst>
           </p:cNvPr>
@@ -15808,7 +15887,7 @@
     </p:spTree>
     <p:extLst>
       <p:ext uri="{BB962C8B-B14F-4D97-AF65-F5344CB8AC3E}">
-        <p14:creationId xmlns:p14="http://schemas.microsoft.com/office/powerpoint/2010/main" val="1510860423"/>
+        <p14:creationId xmlns:p14="http://schemas.microsoft.com/office/powerpoint/2010/main" val="1440360678"/>
       </p:ext>
     </p:extLst>
   </p:cSld>
@@ -15839,7 +15918,7 @@
           <p:cNvPr id="5" name="">
             <a:extLst xmlns:a="http://schemas.openxmlformats.org/drawingml/2006/main">
               <a:ext uri="{FF2B5EF4-FFF2-40B4-BE49-F238E27FC236}">
-                <a16:creationId xmlns:a16="http://schemas.microsoft.com/office/drawing/2014/main" id="{E7DCB921-6F7E-42C3-9B20-A3BA34896DBB}"/>
+                <a16:creationId xmlns:a16="http://schemas.microsoft.com/office/drawing/2014/main" id="{0A53B59D-7FAB-40E1-9B2E-9CA868D8ACD6}"/>
               </a:ext>
             </a:extLst>
           </p:cNvPr>
@@ -16118,7 +16197,7 @@
           <p:cNvPr id="3" name="">
             <a:extLst xmlns:a="http://schemas.openxmlformats.org/drawingml/2006/main">
               <a:ext uri="{FF2B5EF4-FFF2-40B4-BE49-F238E27FC236}">
-                <a16:creationId xmlns:a16="http://schemas.microsoft.com/office/drawing/2014/main" id="{3781D108-4F1F-4363-BB95-05D77CB94263}"/>
+                <a16:creationId xmlns:a16="http://schemas.microsoft.com/office/drawing/2014/main" id="{F09DB0FA-EBFA-43FC-A1FD-2C63F5F08A33}"/>
               </a:ext>
             </a:extLst>
           </p:cNvPr>
@@ -16175,7 +16254,7 @@
           <p:cNvPr id="4" name="">
             <a:extLst xmlns:a="http://schemas.openxmlformats.org/drawingml/2006/main">
               <a:ext uri="{FF2B5EF4-FFF2-40B4-BE49-F238E27FC236}">
-                <a16:creationId xmlns:a16="http://schemas.microsoft.com/office/drawing/2014/main" id="{5E8AC753-F20D-4A93-9BB2-93B83401C50E}"/>
+                <a16:creationId xmlns:a16="http://schemas.microsoft.com/office/drawing/2014/main" id="{E4877344-5D0E-4D43-BD60-A6D1E75A3B1E}"/>
               </a:ext>
             </a:extLst>
           </p:cNvPr>
@@ -16230,7 +16309,7 @@
     </p:spTree>
     <p:extLst>
       <p:ext uri="{BB962C8B-B14F-4D97-AF65-F5344CB8AC3E}">
-        <p14:creationId xmlns:p14="http://schemas.microsoft.com/office/powerpoint/2010/main" val="775385644"/>
+        <p14:creationId xmlns:p14="http://schemas.microsoft.com/office/powerpoint/2010/main" val="1480728016"/>
       </p:ext>
     </p:extLst>
   </p:cSld>
@@ -16261,7 +16340,7 @@
           <p:cNvPr id="5" name="">
             <a:extLst xmlns:a="http://schemas.openxmlformats.org/drawingml/2006/main">
               <a:ext uri="{FF2B5EF4-FFF2-40B4-BE49-F238E27FC236}">
-                <a16:creationId xmlns:a16="http://schemas.microsoft.com/office/drawing/2014/main" id="{B675685F-9EF4-4A04-9822-668D5F8C4189}"/>
+                <a16:creationId xmlns:a16="http://schemas.microsoft.com/office/drawing/2014/main" id="{64DC2378-2144-45EA-A19B-46D32219A313}"/>
               </a:ext>
             </a:extLst>
           </p:cNvPr>
@@ -16540,7 +16619,7 @@
           <p:cNvPr id="3" name="">
             <a:extLst xmlns:a="http://schemas.openxmlformats.org/drawingml/2006/main">
               <a:ext uri="{FF2B5EF4-FFF2-40B4-BE49-F238E27FC236}">
-                <a16:creationId xmlns:a16="http://schemas.microsoft.com/office/drawing/2014/main" id="{E7DC7868-CD8D-4AEB-979D-EA5FA4FAFEF2}"/>
+                <a16:creationId xmlns:a16="http://schemas.microsoft.com/office/drawing/2014/main" id="{D7F408DC-1926-4F08-9FB7-83083069090B}"/>
               </a:ext>
             </a:extLst>
           </p:cNvPr>
@@ -16597,7 +16676,7 @@
           <p:cNvPr id="4" name="">
             <a:extLst xmlns:a="http://schemas.openxmlformats.org/drawingml/2006/main">
               <a:ext uri="{FF2B5EF4-FFF2-40B4-BE49-F238E27FC236}">
-                <a16:creationId xmlns:a16="http://schemas.microsoft.com/office/drawing/2014/main" id="{1B66C3E0-AE03-4708-B367-CF83AD963B91}"/>
+                <a16:creationId xmlns:a16="http://schemas.microsoft.com/office/drawing/2014/main" id="{D25ABB10-2E59-410F-A51C-F507725406E2}"/>
               </a:ext>
             </a:extLst>
           </p:cNvPr>
@@ -16652,7 +16731,7 @@
     </p:spTree>
     <p:extLst>
       <p:ext uri="{BB962C8B-B14F-4D97-AF65-F5344CB8AC3E}">
-        <p14:creationId xmlns:p14="http://schemas.microsoft.com/office/powerpoint/2010/main" val="1544652623"/>
+        <p14:creationId xmlns:p14="http://schemas.microsoft.com/office/powerpoint/2010/main" val="444671533"/>
       </p:ext>
     </p:extLst>
   </p:cSld>
@@ -16683,7 +16762,7 @@
           <p:cNvPr id="5" name="">
             <a:extLst xmlns:a="http://schemas.openxmlformats.org/drawingml/2006/main">
               <a:ext uri="{FF2B5EF4-FFF2-40B4-BE49-F238E27FC236}">
-                <a16:creationId xmlns:a16="http://schemas.microsoft.com/office/drawing/2014/main" id="{FE867320-3FAD-425F-A3CE-C1366B259D94}"/>
+                <a16:creationId xmlns:a16="http://schemas.microsoft.com/office/drawing/2014/main" id="{1AC124E0-D5B2-4CA7-A00E-1064891A8C64}"/>
               </a:ext>
             </a:extLst>
           </p:cNvPr>
@@ -16962,7 +17041,7 @@
           <p:cNvPr id="3" name="">
             <a:extLst xmlns:a="http://schemas.openxmlformats.org/drawingml/2006/main">
               <a:ext uri="{FF2B5EF4-FFF2-40B4-BE49-F238E27FC236}">
-                <a16:creationId xmlns:a16="http://schemas.microsoft.com/office/drawing/2014/main" id="{0B02193D-A71E-4492-A624-F0122412EC14}"/>
+                <a16:creationId xmlns:a16="http://schemas.microsoft.com/office/drawing/2014/main" id="{492E789B-7FF9-41DE-A00F-8C6A237AF550}"/>
               </a:ext>
             </a:extLst>
           </p:cNvPr>
@@ -17019,7 +17098,7 @@
           <p:cNvPr id="4" name="">
             <a:extLst xmlns:a="http://schemas.openxmlformats.org/drawingml/2006/main">
               <a:ext uri="{FF2B5EF4-FFF2-40B4-BE49-F238E27FC236}">
-                <a16:creationId xmlns:a16="http://schemas.microsoft.com/office/drawing/2014/main" id="{23D98383-A203-4B49-8FC3-D505689B3397}"/>
+                <a16:creationId xmlns:a16="http://schemas.microsoft.com/office/drawing/2014/main" id="{AC251555-2A9F-40F7-B8A8-D5DAB3925CA9}"/>
               </a:ext>
             </a:extLst>
           </p:cNvPr>
@@ -17074,7 +17153,7 @@
     </p:spTree>
     <p:extLst>
       <p:ext uri="{BB962C8B-B14F-4D97-AF65-F5344CB8AC3E}">
-        <p14:creationId xmlns:p14="http://schemas.microsoft.com/office/powerpoint/2010/main" val="142194420"/>
+        <p14:creationId xmlns:p14="http://schemas.microsoft.com/office/powerpoint/2010/main" val="2139378809"/>
       </p:ext>
     </p:extLst>
   </p:cSld>
@@ -17105,7 +17184,7 @@
           <p:cNvPr id="5" name="">
             <a:extLst xmlns:a="http://schemas.openxmlformats.org/drawingml/2006/main">
               <a:ext uri="{FF2B5EF4-FFF2-40B4-BE49-F238E27FC236}">
-                <a16:creationId xmlns:a16="http://schemas.microsoft.com/office/drawing/2014/main" id="{D5E790C6-5DF8-4C14-BA6D-667AC7821D83}"/>
+                <a16:creationId xmlns:a16="http://schemas.microsoft.com/office/drawing/2014/main" id="{A5A748A1-0DC1-4CF7-9296-D22C38BC1AE0}"/>
               </a:ext>
             </a:extLst>
           </p:cNvPr>
@@ -17384,7 +17463,7 @@
           <p:cNvPr id="3" name="">
             <a:extLst xmlns:a="http://schemas.openxmlformats.org/drawingml/2006/main">
               <a:ext uri="{FF2B5EF4-FFF2-40B4-BE49-F238E27FC236}">
-                <a16:creationId xmlns:a16="http://schemas.microsoft.com/office/drawing/2014/main" id="{14567CF7-F3CE-4E69-82AF-3C44D553757B}"/>
+                <a16:creationId xmlns:a16="http://schemas.microsoft.com/office/drawing/2014/main" id="{7D64F54B-C48B-477B-9486-11452F9135BD}"/>
               </a:ext>
             </a:extLst>
           </p:cNvPr>
@@ -17441,7 +17520,7 @@
           <p:cNvPr id="4" name="">
             <a:extLst xmlns:a="http://schemas.openxmlformats.org/drawingml/2006/main">
               <a:ext uri="{FF2B5EF4-FFF2-40B4-BE49-F238E27FC236}">
-                <a16:creationId xmlns:a16="http://schemas.microsoft.com/office/drawing/2014/main" id="{7248011F-A1AB-4795-9260-34312270A1F7}"/>
+                <a16:creationId xmlns:a16="http://schemas.microsoft.com/office/drawing/2014/main" id="{DA86AFFC-7CC8-4C2E-9A5E-B18F69CF2A1D}"/>
               </a:ext>
             </a:extLst>
           </p:cNvPr>
@@ -17496,7 +17575,7 @@
     </p:spTree>
     <p:extLst>
       <p:ext uri="{BB962C8B-B14F-4D97-AF65-F5344CB8AC3E}">
-        <p14:creationId xmlns:p14="http://schemas.microsoft.com/office/powerpoint/2010/main" val="438876828"/>
+        <p14:creationId xmlns:p14="http://schemas.microsoft.com/office/powerpoint/2010/main" val="1766277911"/>
       </p:ext>
     </p:extLst>
   </p:cSld>
@@ -17527,7 +17606,7 @@
           <p:cNvPr id="5" name="">
             <a:extLst xmlns:a="http://schemas.openxmlformats.org/drawingml/2006/main">
               <a:ext uri="{FF2B5EF4-FFF2-40B4-BE49-F238E27FC236}">
-                <a16:creationId xmlns:a16="http://schemas.microsoft.com/office/drawing/2014/main" id="{2ADF43A5-E264-44DB-B265-2991D3954455}"/>
+                <a16:creationId xmlns:a16="http://schemas.microsoft.com/office/drawing/2014/main" id="{D2E42E87-FDC4-491E-AC7C-9D395C9480DA}"/>
               </a:ext>
             </a:extLst>
           </p:cNvPr>
@@ -17756,7 +17835,7 @@
           <p:cNvPr id="3" name="">
             <a:extLst xmlns:a="http://schemas.openxmlformats.org/drawingml/2006/main">
               <a:ext uri="{FF2B5EF4-FFF2-40B4-BE49-F238E27FC236}">
-                <a16:creationId xmlns:a16="http://schemas.microsoft.com/office/drawing/2014/main" id="{5DA61D0B-2601-4E41-9FBB-557DE8727F67}"/>
+                <a16:creationId xmlns:a16="http://schemas.microsoft.com/office/drawing/2014/main" id="{9A552E26-4C16-484C-8C25-E42EF2991926}"/>
               </a:ext>
             </a:extLst>
           </p:cNvPr>
@@ -17813,7 +17892,7 @@
           <p:cNvPr id="4" name="">
             <a:extLst xmlns:a="http://schemas.openxmlformats.org/drawingml/2006/main">
               <a:ext uri="{FF2B5EF4-FFF2-40B4-BE49-F238E27FC236}">
-                <a16:creationId xmlns:a16="http://schemas.microsoft.com/office/drawing/2014/main" id="{8C909965-9EAB-4A4E-8F9D-7C986F96B9DA}"/>
+                <a16:creationId xmlns:a16="http://schemas.microsoft.com/office/drawing/2014/main" id="{CEED638C-C58D-447A-906F-4860A383956E}"/>
               </a:ext>
             </a:extLst>
           </p:cNvPr>
@@ -17868,7 +17947,7 @@
     </p:spTree>
     <p:extLst>
       <p:ext uri="{BB962C8B-B14F-4D97-AF65-F5344CB8AC3E}">
-        <p14:creationId xmlns:p14="http://schemas.microsoft.com/office/powerpoint/2010/main" val="528078874"/>
+        <p14:creationId xmlns:p14="http://schemas.microsoft.com/office/powerpoint/2010/main" val="148766524"/>
       </p:ext>
     </p:extLst>
   </p:cSld>
@@ -17899,7 +17978,7 @@
           <p:cNvPr id="6" name="">
             <a:extLst xmlns:a="http://schemas.openxmlformats.org/drawingml/2006/main">
               <a:ext uri="{FF2B5EF4-FFF2-40B4-BE49-F238E27FC236}">
-                <a16:creationId xmlns:a16="http://schemas.microsoft.com/office/drawing/2014/main" id="{0C4EA522-66DA-4D09-9945-FF8922AD1ACF}"/>
+                <a16:creationId xmlns:a16="http://schemas.microsoft.com/office/drawing/2014/main" id="{BB3D4037-2457-444D-A4C0-9474AD7C778A}"/>
               </a:ext>
             </a:extLst>
           </p:cNvPr>
@@ -18571,7 +18650,7 @@
           <p:cNvPr id="3" name="">
             <a:extLst xmlns:a="http://schemas.openxmlformats.org/drawingml/2006/main">
               <a:ext uri="{FF2B5EF4-FFF2-40B4-BE49-F238E27FC236}">
-                <a16:creationId xmlns:a16="http://schemas.microsoft.com/office/drawing/2014/main" id="{D5E4C4A6-65F0-4405-BEE9-1BE8CD7ED4E4}"/>
+                <a16:creationId xmlns:a16="http://schemas.microsoft.com/office/drawing/2014/main" id="{8091497B-F15C-43F0-BE1F-A00D1D0078BB}"/>
               </a:ext>
             </a:extLst>
           </p:cNvPr>
@@ -18628,7 +18707,7 @@
           <p:cNvPr id="4" name="">
             <a:extLst xmlns:a="http://schemas.openxmlformats.org/drawingml/2006/main">
               <a:ext uri="{FF2B5EF4-FFF2-40B4-BE49-F238E27FC236}">
-                <a16:creationId xmlns:a16="http://schemas.microsoft.com/office/drawing/2014/main" id="{A72FF8A5-7F06-461B-96C2-1B8349541778}"/>
+                <a16:creationId xmlns:a16="http://schemas.microsoft.com/office/drawing/2014/main" id="{84F4B0BC-4E68-4610-BC5C-BDF7B45E1497}"/>
               </a:ext>
             </a:extLst>
           </p:cNvPr>
@@ -18685,7 +18764,7 @@
           <p:cNvPr id="5" name="">
             <a:extLst xmlns:a="http://schemas.openxmlformats.org/drawingml/2006/main">
               <a:ext uri="{FF2B5EF4-FFF2-40B4-BE49-F238E27FC236}">
-                <a16:creationId xmlns:a16="http://schemas.microsoft.com/office/drawing/2014/main" id="{8E19DB3C-37B0-4D1A-8A29-0F1200E9A06C}"/>
+                <a16:creationId xmlns:a16="http://schemas.microsoft.com/office/drawing/2014/main" id="{580C2B78-33F7-478A-B0C5-1FD36C8AD453}"/>
               </a:ext>
             </a:extLst>
           </p:cNvPr>
@@ -18740,7 +18819,7 @@
     </p:spTree>
     <p:extLst>
       <p:ext uri="{BB962C8B-B14F-4D97-AF65-F5344CB8AC3E}">
-        <p14:creationId xmlns:p14="http://schemas.microsoft.com/office/powerpoint/2010/main" val="251006231"/>
+        <p14:creationId xmlns:p14="http://schemas.microsoft.com/office/powerpoint/2010/main" val="1693247754"/>
       </p:ext>
     </p:extLst>
   </p:cSld>
@@ -18771,7 +18850,7 @@
           <p:cNvPr id="10" name="">
             <a:extLst xmlns:a="http://schemas.openxmlformats.org/drawingml/2006/main">
               <a:ext uri="{FF2B5EF4-FFF2-40B4-BE49-F238E27FC236}">
-                <a16:creationId xmlns:a16="http://schemas.microsoft.com/office/drawing/2014/main" id="{064180C4-5D6C-43D8-8185-D86821843021}"/>
+                <a16:creationId xmlns:a16="http://schemas.microsoft.com/office/drawing/2014/main" id="{C08AF68C-DE45-45F4-B764-334D65779C94}"/>
               </a:ext>
             </a:extLst>
           </p:cNvPr>
@@ -18828,7 +18907,7 @@
           <p:cNvPr id="2" name="">
             <a:extLst xmlns:a="http://schemas.openxmlformats.org/drawingml/2006/main">
               <a:ext uri="{FF2B5EF4-FFF2-40B4-BE49-F238E27FC236}">
-                <a16:creationId xmlns:a16="http://schemas.microsoft.com/office/drawing/2014/main" id="{2CDCEC8D-B959-4018-B32E-43E260569E8B}"/>
+                <a16:creationId xmlns:a16="http://schemas.microsoft.com/office/drawing/2014/main" id="{6D668EF4-4891-46E2-B8E7-204E1AD70504}"/>
               </a:ext>
             </a:extLst>
           </p:cNvPr>
@@ -18885,7 +18964,7 @@
           <p:cNvPr id="3" name="">
             <a:extLst xmlns:a="http://schemas.openxmlformats.org/drawingml/2006/main">
               <a:ext uri="{FF2B5EF4-FFF2-40B4-BE49-F238E27FC236}">
-                <a16:creationId xmlns:a16="http://schemas.microsoft.com/office/drawing/2014/main" id="{897F3F68-752D-4FD1-926E-411CBAD07800}"/>
+                <a16:creationId xmlns:a16="http://schemas.microsoft.com/office/drawing/2014/main" id="{1B6E86FC-F6B5-4518-BA7B-45831E783299}"/>
               </a:ext>
             </a:extLst>
           </p:cNvPr>
@@ -18942,7 +19021,7 @@
           <p:cNvPr id="4" name="">
             <a:extLst xmlns:a="http://schemas.openxmlformats.org/drawingml/2006/main">
               <a:ext uri="{FF2B5EF4-FFF2-40B4-BE49-F238E27FC236}">
-                <a16:creationId xmlns:a16="http://schemas.microsoft.com/office/drawing/2014/main" id="{982AEC98-E41F-4AA9-8E10-A3849EEBFD70}"/>
+                <a16:creationId xmlns:a16="http://schemas.microsoft.com/office/drawing/2014/main" id="{83B392C0-B21C-4D7A-8381-28290C326564}"/>
               </a:ext>
             </a:extLst>
           </p:cNvPr>
@@ -18999,7 +19078,7 @@
           <p:cNvPr id="5" name="">
             <a:extLst xmlns:a="http://schemas.openxmlformats.org/drawingml/2006/main">
               <a:ext uri="{FF2B5EF4-FFF2-40B4-BE49-F238E27FC236}">
-                <a16:creationId xmlns:a16="http://schemas.microsoft.com/office/drawing/2014/main" id="{B85B8B10-CDDC-4E8E-81FA-B7B19FCF2F6F}"/>
+                <a16:creationId xmlns:a16="http://schemas.microsoft.com/office/drawing/2014/main" id="{7AF7F4D8-6187-4F64-9438-36991BDBEF47}"/>
               </a:ext>
             </a:extLst>
           </p:cNvPr>
@@ -19056,7 +19135,7 @@
           <p:cNvPr id="6" name="">
             <a:extLst xmlns:a="http://schemas.openxmlformats.org/drawingml/2006/main">
               <a:ext uri="{FF2B5EF4-FFF2-40B4-BE49-F238E27FC236}">
-                <a16:creationId xmlns:a16="http://schemas.microsoft.com/office/drawing/2014/main" id="{6833A9F5-F240-4F24-A71D-BF16BF667367}"/>
+                <a16:creationId xmlns:a16="http://schemas.microsoft.com/office/drawing/2014/main" id="{009D286A-1373-433C-B232-8AA317D9944D}"/>
               </a:ext>
             </a:extLst>
           </p:cNvPr>
@@ -19113,7 +19192,7 @@
           <p:cNvPr id="7" name="">
             <a:extLst xmlns:a="http://schemas.openxmlformats.org/drawingml/2006/main">
               <a:ext uri="{FF2B5EF4-FFF2-40B4-BE49-F238E27FC236}">
-                <a16:creationId xmlns:a16="http://schemas.microsoft.com/office/drawing/2014/main" id="{7BC892AF-A74D-4EC8-AA6B-C417D7B3698A}"/>
+                <a16:creationId xmlns:a16="http://schemas.microsoft.com/office/drawing/2014/main" id="{4F968247-B65C-4B67-BA5C-05120122F61C}"/>
               </a:ext>
             </a:extLst>
           </p:cNvPr>
@@ -19170,7 +19249,7 @@
           <p:cNvPr id="8" name="">
             <a:extLst xmlns:a="http://schemas.openxmlformats.org/drawingml/2006/main">
               <a:ext uri="{FF2B5EF4-FFF2-40B4-BE49-F238E27FC236}">
-                <a16:creationId xmlns:a16="http://schemas.microsoft.com/office/drawing/2014/main" id="{B0D17B2F-AB71-408D-812E-62E48D48FD8F}"/>
+                <a16:creationId xmlns:a16="http://schemas.microsoft.com/office/drawing/2014/main" id="{F577DBC7-27BA-443F-93C8-71D93C2691E8}"/>
               </a:ext>
             </a:extLst>
           </p:cNvPr>
@@ -19227,7 +19306,7 @@
           <p:cNvPr id="9" name="">
             <a:extLst xmlns:a="http://schemas.openxmlformats.org/drawingml/2006/main">
               <a:ext uri="{FF2B5EF4-FFF2-40B4-BE49-F238E27FC236}">
-                <a16:creationId xmlns:a16="http://schemas.microsoft.com/office/drawing/2014/main" id="{AC33BF97-C747-44C8-A87A-E5BE57E1BFD2}"/>
+                <a16:creationId xmlns:a16="http://schemas.microsoft.com/office/drawing/2014/main" id="{8FC9A3B1-16B2-4EC7-A34C-B051008CA8FE}"/>
               </a:ext>
             </a:extLst>
           </p:cNvPr>
@@ -19282,7 +19361,7 @@
     </p:spTree>
     <p:extLst>
       <p:ext uri="{BB962C8B-B14F-4D97-AF65-F5344CB8AC3E}">
-        <p14:creationId xmlns:p14="http://schemas.microsoft.com/office/powerpoint/2010/main" val="1581251179"/>
+        <p14:creationId xmlns:p14="http://schemas.microsoft.com/office/powerpoint/2010/main" val="864462442"/>
       </p:ext>
     </p:extLst>
   </p:cSld>
@@ -19313,7 +19392,7 @@
           <p:cNvPr id="5" name="">
             <a:extLst xmlns:a="http://schemas.openxmlformats.org/drawingml/2006/main">
               <a:ext uri="{FF2B5EF4-FFF2-40B4-BE49-F238E27FC236}">
-                <a16:creationId xmlns:a16="http://schemas.microsoft.com/office/drawing/2014/main" id="{3131CCBF-CBBA-4B15-8D38-FCEBCAC3B284}"/>
+                <a16:creationId xmlns:a16="http://schemas.microsoft.com/office/drawing/2014/main" id="{9CE75437-9631-430F-AE63-D6957B627003}"/>
               </a:ext>
             </a:extLst>
           </p:cNvPr>
@@ -19694,7 +19773,7 @@
           <p:cNvPr id="3" name="">
             <a:extLst xmlns:a="http://schemas.openxmlformats.org/drawingml/2006/main">
               <a:ext uri="{FF2B5EF4-FFF2-40B4-BE49-F238E27FC236}">
-                <a16:creationId xmlns:a16="http://schemas.microsoft.com/office/drawing/2014/main" id="{8920AD8F-EC6F-498F-8CFD-C4E64F3EB8B7}"/>
+                <a16:creationId xmlns:a16="http://schemas.microsoft.com/office/drawing/2014/main" id="{9F330609-8C37-410E-ADCA-559E04F0653E}"/>
               </a:ext>
             </a:extLst>
           </p:cNvPr>
@@ -19751,7 +19830,7 @@
           <p:cNvPr id="4" name="">
             <a:extLst xmlns:a="http://schemas.openxmlformats.org/drawingml/2006/main">
               <a:ext uri="{FF2B5EF4-FFF2-40B4-BE49-F238E27FC236}">
-                <a16:creationId xmlns:a16="http://schemas.microsoft.com/office/drawing/2014/main" id="{7FDB1389-487E-4E91-8514-D4E1C7F4BBFF}"/>
+                <a16:creationId xmlns:a16="http://schemas.microsoft.com/office/drawing/2014/main" id="{CD597B92-4180-494F-89AA-3F1D458844B4}"/>
               </a:ext>
             </a:extLst>
           </p:cNvPr>
@@ -19806,7 +19885,7 @@
     </p:spTree>
     <p:extLst>
       <p:ext uri="{BB962C8B-B14F-4D97-AF65-F5344CB8AC3E}">
-        <p14:creationId xmlns:p14="http://schemas.microsoft.com/office/powerpoint/2010/main" val="1016512089"/>
+        <p14:creationId xmlns:p14="http://schemas.microsoft.com/office/powerpoint/2010/main" val="1778464267"/>
       </p:ext>
     </p:extLst>
   </p:cSld>
@@ -19837,7 +19916,7 @@
           <p:cNvPr id="5" name="">
             <a:extLst xmlns:a="http://schemas.openxmlformats.org/drawingml/2006/main">
               <a:ext uri="{FF2B5EF4-FFF2-40B4-BE49-F238E27FC236}">
-                <a16:creationId xmlns:a16="http://schemas.microsoft.com/office/drawing/2014/main" id="{C40F7067-A795-4708-9DC4-75A93849F7A6}"/>
+                <a16:creationId xmlns:a16="http://schemas.microsoft.com/office/drawing/2014/main" id="{26309D8B-AEB1-40B7-B639-2F47F7E7B6F0}"/>
               </a:ext>
             </a:extLst>
           </p:cNvPr>
@@ -20116,7 +20195,7 @@
           <p:cNvPr id="3" name="">
             <a:extLst xmlns:a="http://schemas.openxmlformats.org/drawingml/2006/main">
               <a:ext uri="{FF2B5EF4-FFF2-40B4-BE49-F238E27FC236}">
-                <a16:creationId xmlns:a16="http://schemas.microsoft.com/office/drawing/2014/main" id="{5FA1C761-C2A5-4749-8A0C-D8F8DE5AA20B}"/>
+                <a16:creationId xmlns:a16="http://schemas.microsoft.com/office/drawing/2014/main" id="{C57C9DB3-A5D5-48E2-A4CE-A00CBA396A55}"/>
               </a:ext>
             </a:extLst>
           </p:cNvPr>
@@ -20173,7 +20252,7 @@
           <p:cNvPr id="4" name="">
             <a:extLst xmlns:a="http://schemas.openxmlformats.org/drawingml/2006/main">
               <a:ext uri="{FF2B5EF4-FFF2-40B4-BE49-F238E27FC236}">
-                <a16:creationId xmlns:a16="http://schemas.microsoft.com/office/drawing/2014/main" id="{C4141694-426A-4A65-AB0D-20901DE1D996}"/>
+                <a16:creationId xmlns:a16="http://schemas.microsoft.com/office/drawing/2014/main" id="{DD9AD1A6-B69E-43FB-88A9-714015529C0F}"/>
               </a:ext>
             </a:extLst>
           </p:cNvPr>
@@ -20228,7 +20307,7 @@
     </p:spTree>
     <p:extLst>
       <p:ext uri="{BB962C8B-B14F-4D97-AF65-F5344CB8AC3E}">
-        <p14:creationId xmlns:p14="http://schemas.microsoft.com/office/powerpoint/2010/main" val="2039738262"/>
+        <p14:creationId xmlns:p14="http://schemas.microsoft.com/office/powerpoint/2010/main" val="1784117192"/>
       </p:ext>
     </p:extLst>
   </p:cSld>
@@ -20259,7 +20338,7 @@
           <p:cNvPr id="6" name="">
             <a:extLst xmlns:a="http://schemas.openxmlformats.org/drawingml/2006/main">
               <a:ext uri="{FF2B5EF4-FFF2-40B4-BE49-F238E27FC236}">
-                <a16:creationId xmlns:a16="http://schemas.microsoft.com/office/drawing/2014/main" id="{849827A5-4C81-4F81-999C-78EBD081EB95}"/>
+                <a16:creationId xmlns:a16="http://schemas.microsoft.com/office/drawing/2014/main" id="{F7117987-14E3-45DE-80FD-56DCF14C1D70}"/>
               </a:ext>
             </a:extLst>
           </p:cNvPr>
@@ -20635,7 +20714,7 @@
           <p:cNvPr id="3" name="">
             <a:extLst xmlns:a="http://schemas.openxmlformats.org/drawingml/2006/main">
               <a:ext uri="{FF2B5EF4-FFF2-40B4-BE49-F238E27FC236}">
-                <a16:creationId xmlns:a16="http://schemas.microsoft.com/office/drawing/2014/main" id="{D2E4E59F-4BE8-4CFB-B672-734A46B5DEDA}"/>
+                <a16:creationId xmlns:a16="http://schemas.microsoft.com/office/drawing/2014/main" id="{7B3AAE0E-5A11-4C00-9C97-B4BE75306929}"/>
               </a:ext>
             </a:extLst>
           </p:cNvPr>
@@ -20692,7 +20771,7 @@
           <p:cNvPr id="4" name="">
             <a:extLst xmlns:a="http://schemas.openxmlformats.org/drawingml/2006/main">
               <a:ext uri="{FF2B5EF4-FFF2-40B4-BE49-F238E27FC236}">
-                <a16:creationId xmlns:a16="http://schemas.microsoft.com/office/drawing/2014/main" id="{EA2293EE-C2A4-4E5F-A05C-0B23D920C68B}"/>
+                <a16:creationId xmlns:a16="http://schemas.microsoft.com/office/drawing/2014/main" id="{07ED42E8-9867-4CFE-84CD-E91FCD046495}"/>
               </a:ext>
             </a:extLst>
           </p:cNvPr>
@@ -20749,7 +20828,7 @@
           <p:cNvPr id="5" name="">
             <a:extLst xmlns:a="http://schemas.openxmlformats.org/drawingml/2006/main">
               <a:ext uri="{FF2B5EF4-FFF2-40B4-BE49-F238E27FC236}">
-                <a16:creationId xmlns:a16="http://schemas.microsoft.com/office/drawing/2014/main" id="{AE64F21F-6386-457A-ADDA-2888A43BC7D7}"/>
+                <a16:creationId xmlns:a16="http://schemas.microsoft.com/office/drawing/2014/main" id="{50085AC6-3B8E-49EB-A807-29BFBBD9F687}"/>
               </a:ext>
             </a:extLst>
           </p:cNvPr>
@@ -20804,7 +20883,7 @@
     </p:spTree>
     <p:extLst>
       <p:ext uri="{BB962C8B-B14F-4D97-AF65-F5344CB8AC3E}">
-        <p14:creationId xmlns:p14="http://schemas.microsoft.com/office/powerpoint/2010/main" val="244718743"/>
+        <p14:creationId xmlns:p14="http://schemas.microsoft.com/office/powerpoint/2010/main" val="1591495612"/>
       </p:ext>
     </p:extLst>
   </p:cSld>
@@ -20835,7 +20914,7 @@
           <p:cNvPr id="6" name="">
             <a:extLst xmlns:a="http://schemas.openxmlformats.org/drawingml/2006/main">
               <a:ext uri="{FF2B5EF4-FFF2-40B4-BE49-F238E27FC236}">
-                <a16:creationId xmlns:a16="http://schemas.microsoft.com/office/drawing/2014/main" id="{CE8F1348-D56C-426B-8905-41AA081E62E9}"/>
+                <a16:creationId xmlns:a16="http://schemas.microsoft.com/office/drawing/2014/main" id="{95357062-644A-4099-A46B-69330A36B92B}"/>
               </a:ext>
             </a:extLst>
           </p:cNvPr>
@@ -21164,7 +21243,7 @@
           <p:cNvPr id="3" name="">
             <a:extLst xmlns:a="http://schemas.openxmlformats.org/drawingml/2006/main">
               <a:ext uri="{FF2B5EF4-FFF2-40B4-BE49-F238E27FC236}">
-                <a16:creationId xmlns:a16="http://schemas.microsoft.com/office/drawing/2014/main" id="{34025B7D-9A66-47A2-A943-0B708A0909B2}"/>
+                <a16:creationId xmlns:a16="http://schemas.microsoft.com/office/drawing/2014/main" id="{5528B2A5-710E-47F6-8A0B-7D7BA519B0A8}"/>
               </a:ext>
             </a:extLst>
           </p:cNvPr>
@@ -21221,7 +21300,7 @@
           <p:cNvPr id="4" name="">
             <a:extLst xmlns:a="http://schemas.openxmlformats.org/drawingml/2006/main">
               <a:ext uri="{FF2B5EF4-FFF2-40B4-BE49-F238E27FC236}">
-                <a16:creationId xmlns:a16="http://schemas.microsoft.com/office/drawing/2014/main" id="{5BA8087F-1D78-4A80-A388-941CC17AD456}"/>
+                <a16:creationId xmlns:a16="http://schemas.microsoft.com/office/drawing/2014/main" id="{6BACFD27-A5DA-4178-8B35-D5BCABB1CFA7}"/>
               </a:ext>
             </a:extLst>
           </p:cNvPr>
@@ -21278,7 +21357,7 @@
           <p:cNvPr id="5" name="">
             <a:extLst xmlns:a="http://schemas.openxmlformats.org/drawingml/2006/main">
               <a:ext uri="{FF2B5EF4-FFF2-40B4-BE49-F238E27FC236}">
-                <a16:creationId xmlns:a16="http://schemas.microsoft.com/office/drawing/2014/main" id="{36E6E293-08C7-4CB2-B3D6-630C094229EE}"/>
+                <a16:creationId xmlns:a16="http://schemas.microsoft.com/office/drawing/2014/main" id="{F6A05B66-1BA9-4644-A241-1866562FC7C7}"/>
               </a:ext>
             </a:extLst>
           </p:cNvPr>
@@ -21333,7 +21412,7 @@
     </p:spTree>
     <p:extLst>
       <p:ext uri="{BB962C8B-B14F-4D97-AF65-F5344CB8AC3E}">
-        <p14:creationId xmlns:p14="http://schemas.microsoft.com/office/powerpoint/2010/main" val="1600643408"/>
+        <p14:creationId xmlns:p14="http://schemas.microsoft.com/office/powerpoint/2010/main" val="566313770"/>
       </p:ext>
     </p:extLst>
   </p:cSld>
@@ -21364,7 +21443,7 @@
           <p:cNvPr id="5" name="">
             <a:extLst xmlns:a="http://schemas.openxmlformats.org/drawingml/2006/main">
               <a:ext uri="{FF2B5EF4-FFF2-40B4-BE49-F238E27FC236}">
-                <a16:creationId xmlns:a16="http://schemas.microsoft.com/office/drawing/2014/main" id="{3BE267BA-51BE-47F2-A1FC-3EEAA4C03C75}"/>
+                <a16:creationId xmlns:a16="http://schemas.microsoft.com/office/drawing/2014/main" id="{CD73BB88-3C56-4AEC-B80C-8F4D61AEB34C}"/>
               </a:ext>
             </a:extLst>
           </p:cNvPr>
@@ -21693,7 +21772,7 @@
           <p:cNvPr id="3" name="">
             <a:extLst xmlns:a="http://schemas.openxmlformats.org/drawingml/2006/main">
               <a:ext uri="{FF2B5EF4-FFF2-40B4-BE49-F238E27FC236}">
-                <a16:creationId xmlns:a16="http://schemas.microsoft.com/office/drawing/2014/main" id="{F610E654-33EA-47C5-8256-B32CECC9966A}"/>
+                <a16:creationId xmlns:a16="http://schemas.microsoft.com/office/drawing/2014/main" id="{16740EC3-8799-4321-B642-5F870245851F}"/>
               </a:ext>
             </a:extLst>
           </p:cNvPr>
@@ -21750,7 +21829,7 @@
           <p:cNvPr id="4" name="">
             <a:extLst xmlns:a="http://schemas.openxmlformats.org/drawingml/2006/main">
               <a:ext uri="{FF2B5EF4-FFF2-40B4-BE49-F238E27FC236}">
-                <a16:creationId xmlns:a16="http://schemas.microsoft.com/office/drawing/2014/main" id="{26B9B32D-582C-4533-B4A7-55DFC51A70D6}"/>
+                <a16:creationId xmlns:a16="http://schemas.microsoft.com/office/drawing/2014/main" id="{A090C4D3-F4C2-4498-82E1-35444A04D8A9}"/>
               </a:ext>
             </a:extLst>
           </p:cNvPr>
@@ -21805,7 +21884,7 @@
     </p:spTree>
     <p:extLst>
       <p:ext uri="{BB962C8B-B14F-4D97-AF65-F5344CB8AC3E}">
-        <p14:creationId xmlns:p14="http://schemas.microsoft.com/office/powerpoint/2010/main" val="1092379937"/>
+        <p14:creationId xmlns:p14="http://schemas.microsoft.com/office/powerpoint/2010/main" val="1255396459"/>
       </p:ext>
     </p:extLst>
   </p:cSld>
@@ -21836,7 +21915,7 @@
           <p:cNvPr id="5" name="">
             <a:extLst xmlns:a="http://schemas.openxmlformats.org/drawingml/2006/main">
               <a:ext uri="{FF2B5EF4-FFF2-40B4-BE49-F238E27FC236}">
-                <a16:creationId xmlns:a16="http://schemas.microsoft.com/office/drawing/2014/main" id="{362C4A7D-65F8-44BB-8503-AD0229B55B90}"/>
+                <a16:creationId xmlns:a16="http://schemas.microsoft.com/office/drawing/2014/main" id="{D94ED2CC-CB67-4C2B-9A0E-821BD7493F1C}"/>
               </a:ext>
             </a:extLst>
           </p:cNvPr>
@@ -22193,7 +22272,7 @@
           <p:cNvPr id="3" name="">
             <a:extLst xmlns:a="http://schemas.openxmlformats.org/drawingml/2006/main">
               <a:ext uri="{FF2B5EF4-FFF2-40B4-BE49-F238E27FC236}">
-                <a16:creationId xmlns:a16="http://schemas.microsoft.com/office/drawing/2014/main" id="{84F396C8-65B5-479C-A3DF-ACB5257DABC0}"/>
+                <a16:creationId xmlns:a16="http://schemas.microsoft.com/office/drawing/2014/main" id="{5AD012A7-6AB3-43C3-824A-D6B4FB25687D}"/>
               </a:ext>
             </a:extLst>
           </p:cNvPr>
@@ -22250,7 +22329,7 @@
           <p:cNvPr id="4" name="">
             <a:extLst xmlns:a="http://schemas.openxmlformats.org/drawingml/2006/main">
               <a:ext uri="{FF2B5EF4-FFF2-40B4-BE49-F238E27FC236}">
-                <a16:creationId xmlns:a16="http://schemas.microsoft.com/office/drawing/2014/main" id="{F6026977-6A30-482E-8E82-A06E660715CE}"/>
+                <a16:creationId xmlns:a16="http://schemas.microsoft.com/office/drawing/2014/main" id="{ADAE18BB-F9B7-4331-8ADA-169DD6F554C7}"/>
               </a:ext>
             </a:extLst>
           </p:cNvPr>
@@ -22305,7 +22384,7 @@
     </p:spTree>
     <p:extLst>
       <p:ext uri="{BB962C8B-B14F-4D97-AF65-F5344CB8AC3E}">
-        <p14:creationId xmlns:p14="http://schemas.microsoft.com/office/powerpoint/2010/main" val="499108103"/>
+        <p14:creationId xmlns:p14="http://schemas.microsoft.com/office/powerpoint/2010/main" val="643565722"/>
       </p:ext>
     </p:extLst>
   </p:cSld>
@@ -22336,7 +22415,7 @@
           <p:cNvPr id="7" name="">
             <a:extLst xmlns:a="http://schemas.openxmlformats.org/drawingml/2006/main">
               <a:ext uri="{FF2B5EF4-FFF2-40B4-BE49-F238E27FC236}">
-                <a16:creationId xmlns:a16="http://schemas.microsoft.com/office/drawing/2014/main" id="{3A579719-248E-44FF-96F4-70B23CF119CA}"/>
+                <a16:creationId xmlns:a16="http://schemas.microsoft.com/office/drawing/2014/main" id="{38C45348-DE46-47FD-9481-9E8BC52107A0}"/>
               </a:ext>
             </a:extLst>
           </p:cNvPr>
@@ -23005,7 +23084,7 @@
           <p:cNvPr id="3" name="">
             <a:extLst xmlns:a="http://schemas.openxmlformats.org/drawingml/2006/main">
               <a:ext uri="{FF2B5EF4-FFF2-40B4-BE49-F238E27FC236}">
-                <a16:creationId xmlns:a16="http://schemas.microsoft.com/office/drawing/2014/main" id="{6FE506DC-F87E-4AFE-A65E-C4921B334D60}"/>
+                <a16:creationId xmlns:a16="http://schemas.microsoft.com/office/drawing/2014/main" id="{1D27C22C-AB57-4550-9EF4-31B286F1A920}"/>
               </a:ext>
             </a:extLst>
           </p:cNvPr>
@@ -23062,7 +23141,7 @@
           <p:cNvPr id="4" name="">
             <a:extLst xmlns:a="http://schemas.openxmlformats.org/drawingml/2006/main">
               <a:ext uri="{FF2B5EF4-FFF2-40B4-BE49-F238E27FC236}">
-                <a16:creationId xmlns:a16="http://schemas.microsoft.com/office/drawing/2014/main" id="{1F802CDF-BD57-4747-AD07-36BADAF8C1A5}"/>
+                <a16:creationId xmlns:a16="http://schemas.microsoft.com/office/drawing/2014/main" id="{09CC4406-C532-4734-A0D4-8BBCEF869C40}"/>
               </a:ext>
             </a:extLst>
           </p:cNvPr>
@@ -23119,7 +23198,7 @@
           <p:cNvPr id="5" name="">
             <a:extLst xmlns:a="http://schemas.openxmlformats.org/drawingml/2006/main">
               <a:ext uri="{FF2B5EF4-FFF2-40B4-BE49-F238E27FC236}">
-                <a16:creationId xmlns:a16="http://schemas.microsoft.com/office/drawing/2014/main" id="{411BD5CD-2BB6-4461-99BB-3F8B43FD23D3}"/>
+                <a16:creationId xmlns:a16="http://schemas.microsoft.com/office/drawing/2014/main" id="{5C51096E-AEFC-4307-AF5C-846F61643269}"/>
               </a:ext>
             </a:extLst>
           </p:cNvPr>
@@ -23176,7 +23255,7 @@
           <p:cNvPr id="6" name="">
             <a:extLst xmlns:a="http://schemas.openxmlformats.org/drawingml/2006/main">
               <a:ext uri="{FF2B5EF4-FFF2-40B4-BE49-F238E27FC236}">
-                <a16:creationId xmlns:a16="http://schemas.microsoft.com/office/drawing/2014/main" id="{9FDAB240-F494-4EF2-AD0A-5985595F64B5}"/>
+                <a16:creationId xmlns:a16="http://schemas.microsoft.com/office/drawing/2014/main" id="{EBFBEA81-2124-4C6D-B580-843D676EDF4F}"/>
               </a:ext>
             </a:extLst>
           </p:cNvPr>
@@ -23231,7 +23310,7 @@
     </p:spTree>
     <p:extLst>
       <p:ext uri="{BB962C8B-B14F-4D97-AF65-F5344CB8AC3E}">
-        <p14:creationId xmlns:p14="http://schemas.microsoft.com/office/powerpoint/2010/main" val="1108317500"/>
+        <p14:creationId xmlns:p14="http://schemas.microsoft.com/office/powerpoint/2010/main" val="1267543373"/>
       </p:ext>
     </p:extLst>
   </p:cSld>
@@ -23262,7 +23341,7 @@
           <p:cNvPr id="5" name="">
             <a:extLst xmlns:a="http://schemas.openxmlformats.org/drawingml/2006/main">
               <a:ext uri="{FF2B5EF4-FFF2-40B4-BE49-F238E27FC236}">
-                <a16:creationId xmlns:a16="http://schemas.microsoft.com/office/drawing/2014/main" id="{3C06D64C-7BAA-4563-BCE4-93E12E620F26}"/>
+                <a16:creationId xmlns:a16="http://schemas.microsoft.com/office/drawing/2014/main" id="{AE1EB3E6-AC3A-45F1-9D5D-F4CD2E92347B}"/>
               </a:ext>
             </a:extLst>
           </p:cNvPr>
@@ -23591,7 +23670,7 @@
           <p:cNvPr id="3" name="">
             <a:extLst xmlns:a="http://schemas.openxmlformats.org/drawingml/2006/main">
               <a:ext uri="{FF2B5EF4-FFF2-40B4-BE49-F238E27FC236}">
-                <a16:creationId xmlns:a16="http://schemas.microsoft.com/office/drawing/2014/main" id="{E98843A0-EE40-48C5-9DC7-FDA37597F4BD}"/>
+                <a16:creationId xmlns:a16="http://schemas.microsoft.com/office/drawing/2014/main" id="{39D7AC02-480C-47DD-9E7D-C5F3BCF3ACA5}"/>
               </a:ext>
             </a:extLst>
           </p:cNvPr>
@@ -23648,7 +23727,7 @@
           <p:cNvPr id="4" name="">
             <a:extLst xmlns:a="http://schemas.openxmlformats.org/drawingml/2006/main">
               <a:ext uri="{FF2B5EF4-FFF2-40B4-BE49-F238E27FC236}">
-                <a16:creationId xmlns:a16="http://schemas.microsoft.com/office/drawing/2014/main" id="{B4AF566B-31C7-4E7A-B312-CD8FBFEF9F20}"/>
+                <a16:creationId xmlns:a16="http://schemas.microsoft.com/office/drawing/2014/main" id="{2CADD617-8776-49D8-B619-257EEEAA1CB8}"/>
               </a:ext>
             </a:extLst>
           </p:cNvPr>
@@ -23703,7 +23782,7 @@
     </p:spTree>
     <p:extLst>
       <p:ext uri="{BB962C8B-B14F-4D97-AF65-F5344CB8AC3E}">
-        <p14:creationId xmlns:p14="http://schemas.microsoft.com/office/powerpoint/2010/main" val="861825241"/>
+        <p14:creationId xmlns:p14="http://schemas.microsoft.com/office/powerpoint/2010/main" val="679735434"/>
       </p:ext>
     </p:extLst>
   </p:cSld>
@@ -23734,7 +23813,7 @@
           <p:cNvPr id="6" name="">
             <a:extLst xmlns:a="http://schemas.openxmlformats.org/drawingml/2006/main">
               <a:ext uri="{FF2B5EF4-FFF2-40B4-BE49-F238E27FC236}">
-                <a16:creationId xmlns:a16="http://schemas.microsoft.com/office/drawing/2014/main" id="{09190700-F4FE-4524-AD1E-4ED0DD4E27A2}"/>
+                <a16:creationId xmlns:a16="http://schemas.microsoft.com/office/drawing/2014/main" id="{DEB58F51-CC66-4618-89FF-E06BF965B2FA}"/>
               </a:ext>
             </a:extLst>
           </p:cNvPr>
@@ -24184,7 +24263,7 @@
           <p:cNvPr id="3" name="">
             <a:extLst xmlns:a="http://schemas.openxmlformats.org/drawingml/2006/main">
               <a:ext uri="{FF2B5EF4-FFF2-40B4-BE49-F238E27FC236}">
-                <a16:creationId xmlns:a16="http://schemas.microsoft.com/office/drawing/2014/main" id="{1944C9AF-206D-4BD5-B3BF-0869334C3E58}"/>
+                <a16:creationId xmlns:a16="http://schemas.microsoft.com/office/drawing/2014/main" id="{1C655AF4-0C9D-4B44-B16D-7D06AFFFEDD8}"/>
               </a:ext>
             </a:extLst>
           </p:cNvPr>
@@ -24241,7 +24320,7 @@
           <p:cNvPr id="4" name="">
             <a:extLst xmlns:a="http://schemas.openxmlformats.org/drawingml/2006/main">
               <a:ext uri="{FF2B5EF4-FFF2-40B4-BE49-F238E27FC236}">
-                <a16:creationId xmlns:a16="http://schemas.microsoft.com/office/drawing/2014/main" id="{1CB1974C-E24F-4B22-9115-C6CE3B72FFD7}"/>
+                <a16:creationId xmlns:a16="http://schemas.microsoft.com/office/drawing/2014/main" id="{B3598093-8BFE-410A-A481-02E833276CC5}"/>
               </a:ext>
             </a:extLst>
           </p:cNvPr>
@@ -24298,7 +24377,7 @@
           <p:cNvPr id="5" name="">
             <a:extLst xmlns:a="http://schemas.openxmlformats.org/drawingml/2006/main">
               <a:ext uri="{FF2B5EF4-FFF2-40B4-BE49-F238E27FC236}">
-                <a16:creationId xmlns:a16="http://schemas.microsoft.com/office/drawing/2014/main" id="{5EA3C8F3-796A-490D-AA09-9D57C497E2AE}"/>
+                <a16:creationId xmlns:a16="http://schemas.microsoft.com/office/drawing/2014/main" id="{B558526B-1CFD-44D7-9E2F-85DF879C042D}"/>
               </a:ext>
             </a:extLst>
           </p:cNvPr>
@@ -24353,7 +24432,7 @@
     </p:spTree>
     <p:extLst>
       <p:ext uri="{BB962C8B-B14F-4D97-AF65-F5344CB8AC3E}">
-        <p14:creationId xmlns:p14="http://schemas.microsoft.com/office/powerpoint/2010/main" val="2042172432"/>
+        <p14:creationId xmlns:p14="http://schemas.microsoft.com/office/powerpoint/2010/main" val="1528145007"/>
       </p:ext>
     </p:extLst>
   </p:cSld>
@@ -24384,7 +24463,7 @@
           <p:cNvPr id="5" name="">
             <a:extLst xmlns:a="http://schemas.openxmlformats.org/drawingml/2006/main">
               <a:ext uri="{FF2B5EF4-FFF2-40B4-BE49-F238E27FC236}">
-                <a16:creationId xmlns:a16="http://schemas.microsoft.com/office/drawing/2014/main" id="{BBD549A0-8863-4BB5-B610-661D17789D86}"/>
+                <a16:creationId xmlns:a16="http://schemas.microsoft.com/office/drawing/2014/main" id="{3FDF1691-C55D-42CF-9DF2-CF1A03BBC482}"/>
               </a:ext>
             </a:extLst>
           </p:cNvPr>
@@ -24834,7 +24913,7 @@
           <p:cNvPr id="3" name="">
             <a:extLst xmlns:a="http://schemas.openxmlformats.org/drawingml/2006/main">
               <a:ext uri="{FF2B5EF4-FFF2-40B4-BE49-F238E27FC236}">
-                <a16:creationId xmlns:a16="http://schemas.microsoft.com/office/drawing/2014/main" id="{5CFFC295-9EBB-413C-9338-502AB52BE1D5}"/>
+                <a16:creationId xmlns:a16="http://schemas.microsoft.com/office/drawing/2014/main" id="{FCA0B5D4-81F8-4957-A9E0-8CF142871CE7}"/>
               </a:ext>
             </a:extLst>
           </p:cNvPr>
@@ -24891,7 +24970,7 @@
           <p:cNvPr id="4" name="">
             <a:extLst xmlns:a="http://schemas.openxmlformats.org/drawingml/2006/main">
               <a:ext uri="{FF2B5EF4-FFF2-40B4-BE49-F238E27FC236}">
-                <a16:creationId xmlns:a16="http://schemas.microsoft.com/office/drawing/2014/main" id="{4662B5C4-B3B5-4AE5-B78C-B0D8809A4D21}"/>
+                <a16:creationId xmlns:a16="http://schemas.microsoft.com/office/drawing/2014/main" id="{C4AFA460-D62B-44C2-BF74-358D7311FEA1}"/>
               </a:ext>
             </a:extLst>
           </p:cNvPr>
@@ -24946,7 +25025,7 @@
     </p:spTree>
     <p:extLst>
       <p:ext uri="{BB962C8B-B14F-4D97-AF65-F5344CB8AC3E}">
-        <p14:creationId xmlns:p14="http://schemas.microsoft.com/office/powerpoint/2010/main" val="1570158638"/>
+        <p14:creationId xmlns:p14="http://schemas.microsoft.com/office/powerpoint/2010/main" val="100342764"/>
       </p:ext>
     </p:extLst>
   </p:cSld>
@@ -24977,7 +25056,7 @@
           <p:cNvPr id="7" name="">
             <a:extLst xmlns:a="http://schemas.openxmlformats.org/drawingml/2006/main">
               <a:ext uri="{FF2B5EF4-FFF2-40B4-BE49-F238E27FC236}">
-                <a16:creationId xmlns:a16="http://schemas.microsoft.com/office/drawing/2014/main" id="{050A92B9-ABB2-4137-BD7D-A142FFB0C9DC}"/>
+                <a16:creationId xmlns:a16="http://schemas.microsoft.com/office/drawing/2014/main" id="{C6233FC8-4775-4D04-852D-7F26C569DBF5}"/>
               </a:ext>
             </a:extLst>
           </p:cNvPr>
@@ -25038,7 +25117,7 @@
           <p:nvPr/>
         </p:nvPicPr>
         <p:blipFill>
-          <a:blip xmlns:r="http://schemas.openxmlformats.org/officeDocument/2006/relationships" xmlns:a="http://schemas.openxmlformats.org/drawingml/2006/main" r:embed="Re4acbc379f8147e8"/>
+          <a:blip xmlns:r="http://schemas.openxmlformats.org/officeDocument/2006/relationships" xmlns:a="http://schemas.openxmlformats.org/drawingml/2006/main" r:embed="R530bd6debb124d37"/>
           <a:stretch xmlns:a="http://schemas.openxmlformats.org/drawingml/2006/main"/>
         </p:blipFill>
         <p:spPr>
@@ -25056,7 +25135,7 @@
           <p:cNvPr id="3" name="">
             <a:extLst xmlns:a="http://schemas.openxmlformats.org/drawingml/2006/main">
               <a:ext uri="{FF2B5EF4-FFF2-40B4-BE49-F238E27FC236}">
-                <a16:creationId xmlns:a16="http://schemas.microsoft.com/office/drawing/2014/main" id="{28332DA6-03CC-44E1-8CE1-22B1B476F6B0}"/>
+                <a16:creationId xmlns:a16="http://schemas.microsoft.com/office/drawing/2014/main" id="{10F9012D-6DD9-4149-9AD4-00A1B9863737}"/>
               </a:ext>
             </a:extLst>
           </p:cNvPr>
@@ -25113,7 +25192,7 @@
           <p:cNvPr id="4" name="">
             <a:extLst xmlns:a="http://schemas.openxmlformats.org/drawingml/2006/main">
               <a:ext uri="{FF2B5EF4-FFF2-40B4-BE49-F238E27FC236}">
-                <a16:creationId xmlns:a16="http://schemas.microsoft.com/office/drawing/2014/main" id="{B48F2569-EA96-4CF2-A717-6799A454CF1B}"/>
+                <a16:creationId xmlns:a16="http://schemas.microsoft.com/office/drawing/2014/main" id="{B1625657-34CB-4681-8C23-2A418E22F86E}"/>
               </a:ext>
             </a:extLst>
           </p:cNvPr>
@@ -25170,7 +25249,7 @@
           <p:cNvPr id="5" name="">
             <a:extLst xmlns:a="http://schemas.openxmlformats.org/drawingml/2006/main">
               <a:ext uri="{FF2B5EF4-FFF2-40B4-BE49-F238E27FC236}">
-                <a16:creationId xmlns:a16="http://schemas.microsoft.com/office/drawing/2014/main" id="{A1341F92-4E43-4851-B312-3550ED64BC8B}"/>
+                <a16:creationId xmlns:a16="http://schemas.microsoft.com/office/drawing/2014/main" id="{2D9303F8-B3F8-4247-8A4E-FEE0B5EC17B8}"/>
               </a:ext>
             </a:extLst>
           </p:cNvPr>
@@ -25227,7 +25306,7 @@
           <p:cNvPr id="6" name="">
             <a:extLst xmlns:a="http://schemas.openxmlformats.org/drawingml/2006/main">
               <a:ext uri="{FF2B5EF4-FFF2-40B4-BE49-F238E27FC236}">
-                <a16:creationId xmlns:a16="http://schemas.microsoft.com/office/drawing/2014/main" id="{9EA6FBAF-EAEE-4D88-8053-42486B065E71}"/>
+                <a16:creationId xmlns:a16="http://schemas.microsoft.com/office/drawing/2014/main" id="{5E503769-0482-4171-949A-690A64AD20AC}"/>
               </a:ext>
             </a:extLst>
           </p:cNvPr>
@@ -25282,7 +25361,7 @@
     </p:spTree>
     <p:extLst>
       <p:ext uri="{BB962C8B-B14F-4D97-AF65-F5344CB8AC3E}">
-        <p14:creationId xmlns:p14="http://schemas.microsoft.com/office/powerpoint/2010/main" val="1239840679"/>
+        <p14:creationId xmlns:p14="http://schemas.microsoft.com/office/powerpoint/2010/main" val="1403784482"/>
       </p:ext>
     </p:extLst>
   </p:cSld>
@@ -25313,7 +25392,7 @@
           <p:cNvPr id="5" name="">
             <a:extLst xmlns:a="http://schemas.openxmlformats.org/drawingml/2006/main">
               <a:ext uri="{FF2B5EF4-FFF2-40B4-BE49-F238E27FC236}">
-                <a16:creationId xmlns:a16="http://schemas.microsoft.com/office/drawing/2014/main" id="{E900B3B4-681B-4769-B8A7-0A4722A80996}"/>
+                <a16:creationId xmlns:a16="http://schemas.microsoft.com/office/drawing/2014/main" id="{BEE4EF52-6B5B-442D-8F4B-DBEC5E3AA973}"/>
               </a:ext>
             </a:extLst>
           </p:cNvPr>
@@ -25763,7 +25842,7 @@
           <p:cNvPr id="3" name="">
             <a:extLst xmlns:a="http://schemas.openxmlformats.org/drawingml/2006/main">
               <a:ext uri="{FF2B5EF4-FFF2-40B4-BE49-F238E27FC236}">
-                <a16:creationId xmlns:a16="http://schemas.microsoft.com/office/drawing/2014/main" id="{E5BD7E1E-6293-4D2C-BB2F-223C0E426B3E}"/>
+                <a16:creationId xmlns:a16="http://schemas.microsoft.com/office/drawing/2014/main" id="{BD1C8A8E-71A1-4EEE-A342-BD612761D23F}"/>
               </a:ext>
             </a:extLst>
           </p:cNvPr>
@@ -25820,7 +25899,7 @@
           <p:cNvPr id="4" name="">
             <a:extLst xmlns:a="http://schemas.openxmlformats.org/drawingml/2006/main">
               <a:ext uri="{FF2B5EF4-FFF2-40B4-BE49-F238E27FC236}">
-                <a16:creationId xmlns:a16="http://schemas.microsoft.com/office/drawing/2014/main" id="{5B174254-DCC2-4E81-BB61-6A0B7AF4C831}"/>
+                <a16:creationId xmlns:a16="http://schemas.microsoft.com/office/drawing/2014/main" id="{C2DBEF58-1406-43A1-90F8-C26A82749ECB}"/>
               </a:ext>
             </a:extLst>
           </p:cNvPr>
@@ -25875,7 +25954,7 @@
     </p:spTree>
     <p:extLst>
       <p:ext uri="{BB962C8B-B14F-4D97-AF65-F5344CB8AC3E}">
-        <p14:creationId xmlns:p14="http://schemas.microsoft.com/office/powerpoint/2010/main" val="624547329"/>
+        <p14:creationId xmlns:p14="http://schemas.microsoft.com/office/powerpoint/2010/main" val="925546451"/>
       </p:ext>
     </p:extLst>
   </p:cSld>
@@ -25906,7 +25985,7 @@
           <p:cNvPr id="5" name="">
             <a:extLst xmlns:a="http://schemas.openxmlformats.org/drawingml/2006/main">
               <a:ext uri="{FF2B5EF4-FFF2-40B4-BE49-F238E27FC236}">
-                <a16:creationId xmlns:a16="http://schemas.microsoft.com/office/drawing/2014/main" id="{BA5525F9-31E7-4B0B-A4B3-15BB7258E101}"/>
+                <a16:creationId xmlns:a16="http://schemas.microsoft.com/office/drawing/2014/main" id="{1ED44A0A-79DD-4B0B-9DF1-86929D445797}"/>
               </a:ext>
             </a:extLst>
           </p:cNvPr>
@@ -26185,7 +26264,7 @@
           <p:cNvPr id="3" name="">
             <a:extLst xmlns:a="http://schemas.openxmlformats.org/drawingml/2006/main">
               <a:ext uri="{FF2B5EF4-FFF2-40B4-BE49-F238E27FC236}">
-                <a16:creationId xmlns:a16="http://schemas.microsoft.com/office/drawing/2014/main" id="{A39323EA-433E-4195-8553-814480992807}"/>
+                <a16:creationId xmlns:a16="http://schemas.microsoft.com/office/drawing/2014/main" id="{410A5785-9B1D-4713-9E6E-05B10A052EA8}"/>
               </a:ext>
             </a:extLst>
           </p:cNvPr>
@@ -26242,7 +26321,7 @@
           <p:cNvPr id="4" name="">
             <a:extLst xmlns:a="http://schemas.openxmlformats.org/drawingml/2006/main">
               <a:ext uri="{FF2B5EF4-FFF2-40B4-BE49-F238E27FC236}">
-                <a16:creationId xmlns:a16="http://schemas.microsoft.com/office/drawing/2014/main" id="{F34D9007-2753-421F-A522-E92875F4872C}"/>
+                <a16:creationId xmlns:a16="http://schemas.microsoft.com/office/drawing/2014/main" id="{B8DD6C35-1839-4472-BCC4-E945E8A1127B}"/>
               </a:ext>
             </a:extLst>
           </p:cNvPr>
@@ -26297,7 +26376,7 @@
     </p:spTree>
     <p:extLst>
       <p:ext uri="{BB962C8B-B14F-4D97-AF65-F5344CB8AC3E}">
-        <p14:creationId xmlns:p14="http://schemas.microsoft.com/office/powerpoint/2010/main" val="1071005070"/>
+        <p14:creationId xmlns:p14="http://schemas.microsoft.com/office/powerpoint/2010/main" val="1407739073"/>
       </p:ext>
     </p:extLst>
   </p:cSld>
@@ -26328,7 +26407,7 @@
           <p:cNvPr id="5" name="">
             <a:extLst xmlns:a="http://schemas.openxmlformats.org/drawingml/2006/main">
               <a:ext uri="{FF2B5EF4-FFF2-40B4-BE49-F238E27FC236}">
-                <a16:creationId xmlns:a16="http://schemas.microsoft.com/office/drawing/2014/main" id="{661DE97C-DF60-41C5-9B40-969B85368665}"/>
+                <a16:creationId xmlns:a16="http://schemas.microsoft.com/office/drawing/2014/main" id="{A721C5EF-089F-4AE7-A8FA-C52D90986869}"/>
               </a:ext>
             </a:extLst>
           </p:cNvPr>
@@ -26557,7 +26636,7 @@
           <p:cNvPr id="3" name="">
             <a:extLst xmlns:a="http://schemas.openxmlformats.org/drawingml/2006/main">
               <a:ext uri="{FF2B5EF4-FFF2-40B4-BE49-F238E27FC236}">
-                <a16:creationId xmlns:a16="http://schemas.microsoft.com/office/drawing/2014/main" id="{957BDE63-A1AF-46B6-8CF4-AD99CD16F2CD}"/>
+                <a16:creationId xmlns:a16="http://schemas.microsoft.com/office/drawing/2014/main" id="{5A04A773-DBC6-4662-9D3B-0467F8F2FFC6}"/>
               </a:ext>
             </a:extLst>
           </p:cNvPr>
@@ -26614,7 +26693,7 @@
           <p:cNvPr id="4" name="">
             <a:extLst xmlns:a="http://schemas.openxmlformats.org/drawingml/2006/main">
               <a:ext uri="{FF2B5EF4-FFF2-40B4-BE49-F238E27FC236}">
-                <a16:creationId xmlns:a16="http://schemas.microsoft.com/office/drawing/2014/main" id="{21CBA88C-7862-4821-88FF-2E8ADFDFA9F5}"/>
+                <a16:creationId xmlns:a16="http://schemas.microsoft.com/office/drawing/2014/main" id="{4BCB343C-90A4-4BBB-9B4D-A322023A2F60}"/>
               </a:ext>
             </a:extLst>
           </p:cNvPr>
@@ -26669,7 +26748,7 @@
     </p:spTree>
     <p:extLst>
       <p:ext uri="{BB962C8B-B14F-4D97-AF65-F5344CB8AC3E}">
-        <p14:creationId xmlns:p14="http://schemas.microsoft.com/office/powerpoint/2010/main" val="1137490865"/>
+        <p14:creationId xmlns:p14="http://schemas.microsoft.com/office/powerpoint/2010/main" val="1145332288"/>
       </p:ext>
     </p:extLst>
   </p:cSld>
@@ -26700,7 +26779,7 @@
           <p:cNvPr id="5" name="">
             <a:extLst xmlns:a="http://schemas.openxmlformats.org/drawingml/2006/main">
               <a:ext uri="{FF2B5EF4-FFF2-40B4-BE49-F238E27FC236}">
-                <a16:creationId xmlns:a16="http://schemas.microsoft.com/office/drawing/2014/main" id="{42A56847-E948-44DD-A118-665C836F8C4B}"/>
+                <a16:creationId xmlns:a16="http://schemas.microsoft.com/office/drawing/2014/main" id="{A1B4526C-FF43-4C72-ADB3-471360DFD059}"/>
               </a:ext>
             </a:extLst>
           </p:cNvPr>
@@ -26929,7 +27008,7 @@
           <p:cNvPr id="3" name="">
             <a:extLst xmlns:a="http://schemas.openxmlformats.org/drawingml/2006/main">
               <a:ext uri="{FF2B5EF4-FFF2-40B4-BE49-F238E27FC236}">
-                <a16:creationId xmlns:a16="http://schemas.microsoft.com/office/drawing/2014/main" id="{78CC8438-3EDB-4E7A-87F3-A89AF19BEF32}"/>
+                <a16:creationId xmlns:a16="http://schemas.microsoft.com/office/drawing/2014/main" id="{EA2ADB67-59A2-46AC-9BDA-5EC43A529392}"/>
               </a:ext>
             </a:extLst>
           </p:cNvPr>
@@ -26986,7 +27065,7 @@
           <p:cNvPr id="4" name="">
             <a:extLst xmlns:a="http://schemas.openxmlformats.org/drawingml/2006/main">
               <a:ext uri="{FF2B5EF4-FFF2-40B4-BE49-F238E27FC236}">
-                <a16:creationId xmlns:a16="http://schemas.microsoft.com/office/drawing/2014/main" id="{402A5CBC-5635-41BE-8759-4DBE506A68AB}"/>
+                <a16:creationId xmlns:a16="http://schemas.microsoft.com/office/drawing/2014/main" id="{4FF18A18-7B7C-48E7-A44D-EEBFE0184BC7}"/>
               </a:ext>
             </a:extLst>
           </p:cNvPr>
@@ -27041,7 +27120,7 @@
     </p:spTree>
     <p:extLst>
       <p:ext uri="{BB962C8B-B14F-4D97-AF65-F5344CB8AC3E}">
-        <p14:creationId xmlns:p14="http://schemas.microsoft.com/office/powerpoint/2010/main" val="704279979"/>
+        <p14:creationId xmlns:p14="http://schemas.microsoft.com/office/powerpoint/2010/main" val="1108148906"/>
       </p:ext>
     </p:extLst>
   </p:cSld>
@@ -27072,7 +27151,7 @@
           <p:cNvPr id="5" name="">
             <a:extLst xmlns:a="http://schemas.openxmlformats.org/drawingml/2006/main">
               <a:ext uri="{FF2B5EF4-FFF2-40B4-BE49-F238E27FC236}">
-                <a16:creationId xmlns:a16="http://schemas.microsoft.com/office/drawing/2014/main" id="{2597DA95-FFD7-4606-A582-C2BCB5CBD412}"/>
+                <a16:creationId xmlns:a16="http://schemas.microsoft.com/office/drawing/2014/main" id="{E8552353-4D85-4613-8669-19BCA172149F}"/>
               </a:ext>
             </a:extLst>
           </p:cNvPr>
@@ -27351,7 +27430,7 @@
           <p:cNvPr id="3" name="">
             <a:extLst xmlns:a="http://schemas.openxmlformats.org/drawingml/2006/main">
               <a:ext uri="{FF2B5EF4-FFF2-40B4-BE49-F238E27FC236}">
-                <a16:creationId xmlns:a16="http://schemas.microsoft.com/office/drawing/2014/main" id="{F0F76527-C928-4B92-8ACC-57EFB9002465}"/>
+                <a16:creationId xmlns:a16="http://schemas.microsoft.com/office/drawing/2014/main" id="{19B6E2F8-C6B3-4DDA-B712-E06EA2E5094F}"/>
               </a:ext>
             </a:extLst>
           </p:cNvPr>
@@ -27408,7 +27487,7 @@
           <p:cNvPr id="4" name="">
             <a:extLst xmlns:a="http://schemas.openxmlformats.org/drawingml/2006/main">
               <a:ext uri="{FF2B5EF4-FFF2-40B4-BE49-F238E27FC236}">
-                <a16:creationId xmlns:a16="http://schemas.microsoft.com/office/drawing/2014/main" id="{7D1556E5-A678-4F29-A5AB-2C159862E846}"/>
+                <a16:creationId xmlns:a16="http://schemas.microsoft.com/office/drawing/2014/main" id="{5C6F6097-316A-4C5E-8DB3-CE9992522369}"/>
               </a:ext>
             </a:extLst>
           </p:cNvPr>
@@ -27463,7 +27542,7 @@
     </p:spTree>
     <p:extLst>
       <p:ext uri="{BB962C8B-B14F-4D97-AF65-F5344CB8AC3E}">
-        <p14:creationId xmlns:p14="http://schemas.microsoft.com/office/powerpoint/2010/main" val="1114482512"/>
+        <p14:creationId xmlns:p14="http://schemas.microsoft.com/office/powerpoint/2010/main" val="1767831773"/>
       </p:ext>
     </p:extLst>
   </p:cSld>
@@ -27494,7 +27573,7 @@
           <p:cNvPr id="5" name="">
             <a:extLst xmlns:a="http://schemas.openxmlformats.org/drawingml/2006/main">
               <a:ext uri="{FF2B5EF4-FFF2-40B4-BE49-F238E27FC236}">
-                <a16:creationId xmlns:a16="http://schemas.microsoft.com/office/drawing/2014/main" id="{CF9BAF02-2AA4-42EC-87AB-6D2DE6A58365}"/>
+                <a16:creationId xmlns:a16="http://schemas.microsoft.com/office/drawing/2014/main" id="{24113A63-B579-4248-A185-2AACE21C5267}"/>
               </a:ext>
             </a:extLst>
           </p:cNvPr>
@@ -27723,7 +27802,7 @@
           <p:cNvPr id="3" name="">
             <a:extLst xmlns:a="http://schemas.openxmlformats.org/drawingml/2006/main">
               <a:ext uri="{FF2B5EF4-FFF2-40B4-BE49-F238E27FC236}">
-                <a16:creationId xmlns:a16="http://schemas.microsoft.com/office/drawing/2014/main" id="{AEBF21E6-D8B7-4916-B94E-26840E65F1DB}"/>
+                <a16:creationId xmlns:a16="http://schemas.microsoft.com/office/drawing/2014/main" id="{743343F6-E8E7-4B9D-95B2-55B617A4FBE7}"/>
               </a:ext>
             </a:extLst>
           </p:cNvPr>
@@ -27780,7 +27859,7 @@
           <p:cNvPr id="4" name="">
             <a:extLst xmlns:a="http://schemas.openxmlformats.org/drawingml/2006/main">
               <a:ext uri="{FF2B5EF4-FFF2-40B4-BE49-F238E27FC236}">
-                <a16:creationId xmlns:a16="http://schemas.microsoft.com/office/drawing/2014/main" id="{0B7B774F-61C9-42B4-9449-33FDA000FE2A}"/>
+                <a16:creationId xmlns:a16="http://schemas.microsoft.com/office/drawing/2014/main" id="{9CF3729D-C3E3-4240-888E-872194DE224A}"/>
               </a:ext>
             </a:extLst>
           </p:cNvPr>
@@ -27835,7 +27914,7 @@
     </p:spTree>
     <p:extLst>
       <p:ext uri="{BB962C8B-B14F-4D97-AF65-F5344CB8AC3E}">
-        <p14:creationId xmlns:p14="http://schemas.microsoft.com/office/powerpoint/2010/main" val="1679559198"/>
+        <p14:creationId xmlns:p14="http://schemas.microsoft.com/office/powerpoint/2010/main" val="1808135552"/>
       </p:ext>
     </p:extLst>
   </p:cSld>
@@ -27863,10 +27942,10 @@
       </p:grpSpPr>
       <p:sp>
         <p:nvSpPr>
-          <p:cNvPr id="5" name="">
+          <p:cNvPr id="7" name="">
             <a:extLst xmlns:a="http://schemas.openxmlformats.org/drawingml/2006/main">
               <a:ext uri="{FF2B5EF4-FFF2-40B4-BE49-F238E27FC236}">
-                <a16:creationId xmlns:a16="http://schemas.microsoft.com/office/drawing/2014/main" id="{3E389B0E-34CD-444A-A562-663D2F4A6DCA}"/>
+                <a16:creationId xmlns:a16="http://schemas.microsoft.com/office/drawing/2014/main" id="{7A15D4D9-9DB8-4569-8A82-338C62ED137B}"/>
               </a:ext>
             </a:extLst>
           </p:cNvPr>
@@ -27913,289 +27992,257 @@
                 <a:ea typeface="Arial"/>
                 <a:cs typeface="Arial"/>
               </a:rPr>
-              <a:t>The decision and the available evidence</a:t>
+              <a:t>Reduce missed care and unnecessary escalation</a:t>
             </a:r>
           </a:p>
         </p:txBody>
       </p:sp>
-      <p:graphicFrame>
-        <p:nvGraphicFramePr>
-          <p:cNvPr id="6" name=""/>
-          <p:cNvGraphicFramePr/>
+      <p:sp>
+        <p:nvSpPr>
+          <p:cNvPr id="2" name="">
+            <a:extLst xmlns:a="http://schemas.openxmlformats.org/drawingml/2006/main">
+              <a:ext uri="{FF2B5EF4-FFF2-40B4-BE49-F238E27FC236}">
+                <a16:creationId xmlns:a16="http://schemas.microsoft.com/office/drawing/2014/main" id="{00F242AA-FE4E-422F-91CE-A2C6124611E3}"/>
+              </a:ext>
+            </a:extLst>
+          </p:cNvPr>
+          <p:cNvSpPr>
+            <a:spLocks xmlns:a="http://schemas.openxmlformats.org/drawingml/2006/main" noGrp="1"/>
+          </p:cNvSpPr>
           <p:nvPr/>
-        </p:nvGraphicFramePr>
-        <p:xfrm>
-          <a:off xmlns:a="http://schemas.openxmlformats.org/drawingml/2006/main" x="762000" y="1619250"/>
-          <a:ext xmlns:a="http://schemas.openxmlformats.org/drawingml/2006/main" cx="10668000" cy="2639568"/>
-        </p:xfrm>
-        <a:graphic xmlns:a="http://schemas.openxmlformats.org/drawingml/2006/main">
-          <a:graphicData uri="http://schemas.openxmlformats.org/drawingml/2006/table">
-            <a:tbl>
-              <a:tblPr firstRow="1" bandRow="0"/>
-              <a:tblGrid>
-                <a:gridCol w="4267200"/>
-                <a:gridCol w="6400800"/>
-              </a:tblGrid>
-              <a:tr h="471678">
-                <a:tc>
-                  <a:txBody>
-                    <a:bodyPr/>
-                    <a:lstStyle/>
-                    <a:p>
-                      <a:r>
-                        <a:rPr sz="1800" b="1">
-                          <a:solidFill>
-                            <a:srgbClr val="FFFFFF"/>
-                          </a:solidFill>
-                          <a:latin typeface="Arial"/>
-                          <a:ea typeface="Arial"/>
-                          <a:cs typeface="Arial"/>
-                        </a:rPr>
-                        <a:t>Assignment evidence</a:t>
-                      </a:r>
-                    </a:p>
-                  </a:txBody>
-                  <a:tcPr marL="133350" marR="133350" marT="76200" marB="76200" anchor="ctr">
-                    <a:solidFill>
-                      <a:srgbClr val="243866"/>
-                    </a:solidFill>
-                  </a:tcPr>
-                </a:tc>
-                <a:tc>
-                  <a:txBody>
-                    <a:bodyPr/>
-                    <a:lstStyle/>
-                    <a:p>
-                      <a:r>
-                        <a:rPr sz="1800" b="1">
-                          <a:solidFill>
-                            <a:srgbClr val="FFFFFF"/>
-                          </a:solidFill>
-                          <a:latin typeface="Arial"/>
-                          <a:ea typeface="Arial"/>
-                          <a:cs typeface="Arial"/>
-                        </a:rPr>
-                        <a:t>Implementation choice</a:t>
-                      </a:r>
-                    </a:p>
-                  </a:txBody>
-                  <a:tcPr marL="133350" marR="133350" marT="76200" marB="76200" anchor="ctr">
-                    <a:solidFill>
-                      <a:srgbClr val="243866"/>
-                    </a:solidFill>
-                  </a:tcPr>
-                </a:tc>
-              </a:tr>
-              <a:tr h="471678">
-                <a:tc>
-                  <a:txBody>
-                    <a:bodyPr/>
-                    <a:lstStyle/>
-                    <a:p>
-                      <a:r>
-                        <a:rPr sz="1800" b="0">
-                          <a:solidFill>
-                            <a:srgbClr val="28354A"/>
-                          </a:solidFill>
-                          <a:latin typeface="Arial"/>
-                          <a:ea typeface="Arial"/>
-                          <a:cs typeface="Arial"/>
-                        </a:rPr>
-                        <a:t>An incoming patient message</a:t>
-                      </a:r>
-                    </a:p>
-                  </a:txBody>
-                  <a:tcPr marL="133350" marR="133350" marT="76200" marB="76200" anchor="ctr">
-                    <a:solidFill>
-                      <a:srgbClr val="F6F4ED"/>
-                    </a:solidFill>
-                  </a:tcPr>
-                </a:tc>
-                <a:tc>
-                  <a:txBody>
-                    <a:bodyPr/>
-                    <a:lstStyle/>
-                    <a:p>
-                      <a:r>
-                        <a:rPr sz="1800" b="0">
-                          <a:solidFill>
-                            <a:srgbClr val="28354A"/>
-                          </a:solidFill>
-                          <a:latin typeface="Arial"/>
-                          <a:ea typeface="Arial"/>
-                          <a:cs typeface="Arial"/>
-                        </a:rPr>
-                        <a:t>Choose a care-route bucket</a:t>
-                      </a:r>
-                    </a:p>
-                  </a:txBody>
-                  <a:tcPr marL="133350" marR="133350" marT="76200" marB="76200" anchor="ctr">
-                    <a:solidFill>
-                      <a:srgbClr val="F6F4ED"/>
-                    </a:solidFill>
-                  </a:tcPr>
-                </a:tc>
-              </a:tr>
-              <a:tr h="471678">
-                <a:tc>
-                  <a:txBody>
-                    <a:bodyPr/>
-                    <a:lstStyle/>
-                    <a:p>
-                      <a:r>
-                        <a:rPr sz="1800" b="0">
-                          <a:solidFill>
-                            <a:srgbClr val="28354A"/>
-                          </a:solidFill>
-                          <a:latin typeface="Arial"/>
-                          <a:ea typeface="Arial"/>
-                          <a:cs typeface="Arial"/>
-                        </a:rPr>
-                        <a:t>Three supplied disposition labels</a:t>
-                      </a:r>
-                    </a:p>
-                  </a:txBody>
-                  <a:tcPr marL="133350" marR="133350" marT="76200" marB="76200" anchor="ctr">
-                    <a:solidFill>
-                      <a:srgbClr val="F6F4ED"/>
-                    </a:solidFill>
-                  </a:tcPr>
-                </a:tc>
-                <a:tc>
-                  <a:txBody>
-                    <a:bodyPr/>
-                    <a:lstStyle/>
-                    <a:p>
-                      <a:r>
-                        <a:rPr sz="1800" b="0">
-                          <a:solidFill>
-                            <a:srgbClr val="28354A"/>
-                          </a:solidFill>
-                          <a:latin typeface="Arial"/>
-                          <a:ea typeface="Arial"/>
-                          <a:cs typeface="Arial"/>
-                        </a:rPr>
-                        <a:t>Keep the assignment interface</a:t>
-                      </a:r>
-                    </a:p>
-                  </a:txBody>
-                  <a:tcPr marL="133350" marR="133350" marT="76200" marB="76200" anchor="ctr">
-                    <a:solidFill>
-                      <a:srgbClr val="F6F4ED"/>
-                    </a:solidFill>
-                  </a:tcPr>
-                </a:tc>
-              </a:tr>
-              <a:tr h="471678">
-                <a:tc>
-                  <a:txBody>
-                    <a:bodyPr/>
-                    <a:lstStyle/>
-                    <a:p>
-                      <a:r>
-                        <a:rPr sz="1800" b="0">
-                          <a:solidFill>
-                            <a:srgbClr val="28354A"/>
-                          </a:solidFill>
-                          <a:latin typeface="Arial"/>
-                          <a:ea typeface="Arial"/>
-                          <a:cs typeface="Arial"/>
-                        </a:rPr>
-                        <a:t>50 CSV rows; the brief describes 20</a:t>
-                      </a:r>
-                    </a:p>
-                  </a:txBody>
-                  <a:tcPr marL="133350" marR="133350" marT="76200" marB="76200" anchor="ctr">
-                    <a:solidFill>
-                      <a:srgbClr val="F6F4ED"/>
-                    </a:solidFill>
-                  </a:tcPr>
-                </a:tc>
-                <a:tc>
-                  <a:txBody>
-                    <a:bodyPr/>
-                    <a:lstStyle/>
-                    <a:p>
-                      <a:r>
-                        <a:rPr sz="1800" b="0">
-                          <a:solidFill>
-                            <a:srgbClr val="28354A"/>
-                          </a:solidFill>
-                          <a:latin typeface="Arial"/>
-                          <a:ea typeface="Arial"/>
-                          <a:cs typeface="Arial"/>
-                        </a:rPr>
-                        <a:t>Run and retain every supplied message</a:t>
-                      </a:r>
-                    </a:p>
-                  </a:txBody>
-                  <a:tcPr marL="133350" marR="133350" marT="76200" marB="76200" anchor="ctr">
-                    <a:solidFill>
-                      <a:srgbClr val="F6F4ED"/>
-                    </a:solidFill>
-                  </a:tcPr>
-                </a:tc>
-              </a:tr>
-              <a:tr h="752856">
-                <a:tc>
-                  <a:txBody>
-                    <a:bodyPr/>
-                    <a:lstStyle/>
-                    <a:p>
-                      <a:r>
-                        <a:rPr sz="1800" b="0">
-                          <a:solidFill>
-                            <a:srgbClr val="28354A"/>
-                          </a:solidFill>
-                          <a:latin typeface="Arial"/>
-                          <a:ea typeface="Arial"/>
-                          <a:cs typeface="Arial"/>
-                        </a:rPr>
-                        <a:t>Clinical disagreement with supplied labels</a:t>
-                      </a:r>
-                    </a:p>
-                  </a:txBody>
-                  <a:tcPr marL="133350" marR="133350" marT="76200" marB="76200" anchor="ctr">
-                    <a:solidFill>
-                      <a:srgbClr val="F6F4ED"/>
-                    </a:solidFill>
-                  </a:tcPr>
-                </a:tc>
-                <a:tc>
-                  <a:txBody>
-                    <a:bodyPr/>
-                    <a:lstStyle/>
-                    <a:p>
-                      <a:r>
-                        <a:rPr sz="1800" b="0">
-                          <a:solidFill>
-                            <a:srgbClr val="28354A"/>
-                          </a:solidFill>
-                          <a:latin typeface="Arial"/>
-                          <a:ea typeface="Arial"/>
-                          <a:cs typeface="Arial"/>
-                        </a:rPr>
-                        <a:t>Use physician review for clinical evaluation</a:t>
-                      </a:r>
-                    </a:p>
-                  </a:txBody>
-                  <a:tcPr marL="133350" marR="133350" marT="76200" marB="76200" anchor="ctr">
-                    <a:solidFill>
-                      <a:srgbClr val="F6F4ED"/>
-                    </a:solidFill>
-                  </a:tcPr>
-                </a:tc>
-              </a:tr>
-            </a:tbl>
-          </a:graphicData>
-        </a:graphic>
-      </p:graphicFrame>
+        </p:nvSpPr>
+        <p:spPr>
+          <a:xfrm xmlns:a="http://schemas.openxmlformats.org/drawingml/2006/main">
+            <a:off x="762000" y="1619250"/>
+            <a:ext cx="10382250" cy="735330"/>
+          </a:xfrm>
+          <a:prstGeom xmlns:a="http://schemas.openxmlformats.org/drawingml/2006/main" prst="rect">
+            <a:avLst/>
+          </a:prstGeom>
+          <a:noFill xmlns:a="http://schemas.openxmlformats.org/drawingml/2006/main"/>
+          <a:ln xmlns:a="http://schemas.openxmlformats.org/drawingml/2006/main" w="0">
+            <a:noFill/>
+          </a:ln>
+        </p:spPr>
+        <p:txBody>
+          <a:bodyPr xmlns:a="http://schemas.openxmlformats.org/drawingml/2006/main" wrap="square" lIns="0" tIns="0" rIns="0" bIns="0" anchor="t">
+            <a:noAutofit/>
+          </a:bodyPr>
+          <a:lstStyle xmlns:a="http://schemas.openxmlformats.org/drawingml/2006/main"/>
+          <a:p xmlns:a="http://schemas.openxmlformats.org/drawingml/2006/main">
+            <a:pPr>
+              <a:defRPr sz="2250">
+                <a:solidFill>
+                  <a:srgbClr val="28354A"/>
+                </a:solidFill>
+                <a:latin typeface="Arial"/>
+                <a:ea typeface="Arial"/>
+                <a:cs typeface="Arial"/>
+              </a:defRPr>
+            </a:pPr>
+            <a:r>
+              <a:rPr sz="2250" b="1">
+                <a:solidFill>
+                  <a:srgbClr val="28354A"/>
+                </a:solidFill>
+                <a:latin typeface="Arial"/>
+                <a:ea typeface="Arial"/>
+                <a:cs typeface="Arial"/>
+              </a:rPr>
+              <a:t>False negatives: required review not selected</a:t>
+            </a:r>
+          </a:p>
+          <a:p xmlns:a="http://schemas.openxmlformats.org/drawingml/2006/main">
+            <a:pPr>
+              <a:defRPr sz="2250">
+                <a:solidFill>
+                  <a:srgbClr val="28354A"/>
+                </a:solidFill>
+                <a:latin typeface="Arial"/>
+                <a:ea typeface="Arial"/>
+                <a:cs typeface="Arial"/>
+              </a:defRPr>
+            </a:pPr>
+            <a:r>
+              <a:rPr sz="2250">
+                <a:solidFill>
+                  <a:srgbClr val="28354A"/>
+                </a:solidFill>
+                <a:latin typeface="Arial"/>
+                <a:ea typeface="Arial"/>
+                <a:cs typeface="Arial"/>
+              </a:rPr>
+              <a:t>Preserve critical unknowns. Review severity and required timing.</a:t>
+            </a:r>
+          </a:p>
+        </p:txBody>
+      </p:sp>
       <p:sp>
         <p:nvSpPr>
           <p:cNvPr id="3" name="">
             <a:extLst xmlns:a="http://schemas.openxmlformats.org/drawingml/2006/main">
               <a:ext uri="{FF2B5EF4-FFF2-40B4-BE49-F238E27FC236}">
-                <a16:creationId xmlns:a16="http://schemas.microsoft.com/office/drawing/2014/main" id="{6D6D692C-25A0-44D0-827C-24C131443CDF}"/>
+                <a16:creationId xmlns:a16="http://schemas.microsoft.com/office/drawing/2014/main" id="{53E0A254-85E7-4E25-A28A-03C4BD8DE916}"/>
+              </a:ext>
+            </a:extLst>
+          </p:cNvPr>
+          <p:cNvSpPr>
+            <a:spLocks xmlns:a="http://schemas.openxmlformats.org/drawingml/2006/main" noGrp="1"/>
+          </p:cNvSpPr>
+          <p:nvPr/>
+        </p:nvSpPr>
+        <p:spPr>
+          <a:xfrm xmlns:a="http://schemas.openxmlformats.org/drawingml/2006/main">
+            <a:off x="762000" y="2640330"/>
+            <a:ext cx="10382250" cy="735330"/>
+          </a:xfrm>
+          <a:prstGeom xmlns:a="http://schemas.openxmlformats.org/drawingml/2006/main" prst="rect">
+            <a:avLst/>
+          </a:prstGeom>
+          <a:noFill xmlns:a="http://schemas.openxmlformats.org/drawingml/2006/main"/>
+          <a:ln xmlns:a="http://schemas.openxmlformats.org/drawingml/2006/main" w="0">
+            <a:noFill/>
+          </a:ln>
+        </p:spPr>
+        <p:txBody>
+          <a:bodyPr xmlns:a="http://schemas.openxmlformats.org/drawingml/2006/main" wrap="square" lIns="0" tIns="0" rIns="0" bIns="0" anchor="t">
+            <a:noAutofit/>
+          </a:bodyPr>
+          <a:lstStyle xmlns:a="http://schemas.openxmlformats.org/drawingml/2006/main"/>
+          <a:p xmlns:a="http://schemas.openxmlformats.org/drawingml/2006/main">
+            <a:pPr>
+              <a:defRPr sz="2250">
+                <a:solidFill>
+                  <a:srgbClr val="28354A"/>
+                </a:solidFill>
+                <a:latin typeface="Arial"/>
+                <a:ea typeface="Arial"/>
+                <a:cs typeface="Arial"/>
+              </a:defRPr>
+            </a:pPr>
+            <a:r>
+              <a:rPr sz="2250" b="1">
+                <a:solidFill>
+                  <a:srgbClr val="28354A"/>
+                </a:solidFill>
+                <a:latin typeface="Arial"/>
+                <a:ea typeface="Arial"/>
+                <a:cs typeface="Arial"/>
+              </a:rPr>
+              <a:t>False positives: referral beyond the agreed reference</a:t>
+            </a:r>
+          </a:p>
+          <a:p xmlns:a="http://schemas.openxmlformats.org/drawingml/2006/main">
+            <a:pPr>
+              <a:defRPr sz="2250">
+                <a:solidFill>
+                  <a:srgbClr val="28354A"/>
+                </a:solidFill>
+                <a:latin typeface="Arial"/>
+                <a:ea typeface="Arial"/>
+                <a:cs typeface="Arial"/>
+              </a:defRPr>
+            </a:pPr>
+            <a:r>
+              <a:rPr sz="2250">
+                <a:solidFill>
+                  <a:srgbClr val="28354A"/>
+                </a:solidFill>
+                <a:latin typeface="Arial"/>
+                <a:ea typeface="Arial"/>
+                <a:cs typeface="Arial"/>
+              </a:rPr>
+              <a:t>Review referral burden and defensible alternatives.</a:t>
+            </a:r>
+          </a:p>
+        </p:txBody>
+      </p:sp>
+      <p:sp>
+        <p:nvSpPr>
+          <p:cNvPr id="4" name="">
+            <a:extLst xmlns:a="http://schemas.openxmlformats.org/drawingml/2006/main">
+              <a:ext uri="{FF2B5EF4-FFF2-40B4-BE49-F238E27FC236}">
+                <a16:creationId xmlns:a16="http://schemas.microsoft.com/office/drawing/2014/main" id="{9D4A3AD5-2873-40BE-BF3F-6D64D1560B06}"/>
+              </a:ext>
+            </a:extLst>
+          </p:cNvPr>
+          <p:cNvSpPr>
+            <a:spLocks xmlns:a="http://schemas.openxmlformats.org/drawingml/2006/main" noGrp="1"/>
+          </p:cNvSpPr>
+          <p:nvPr/>
+        </p:nvSpPr>
+        <p:spPr>
+          <a:xfrm xmlns:a="http://schemas.openxmlformats.org/drawingml/2006/main">
+            <a:off x="762000" y="3661410"/>
+            <a:ext cx="10382250" cy="735330"/>
+          </a:xfrm>
+          <a:prstGeom xmlns:a="http://schemas.openxmlformats.org/drawingml/2006/main" prst="rect">
+            <a:avLst/>
+          </a:prstGeom>
+          <a:noFill xmlns:a="http://schemas.openxmlformats.org/drawingml/2006/main"/>
+          <a:ln xmlns:a="http://schemas.openxmlformats.org/drawingml/2006/main" w="0">
+            <a:noFill/>
+          </a:ln>
+        </p:spPr>
+        <p:txBody>
+          <a:bodyPr xmlns:a="http://schemas.openxmlformats.org/drawingml/2006/main" wrap="square" lIns="0" tIns="0" rIns="0" bIns="0" anchor="t">
+            <a:noAutofit/>
+          </a:bodyPr>
+          <a:lstStyle xmlns:a="http://schemas.openxmlformats.org/drawingml/2006/main"/>
+          <a:p xmlns:a="http://schemas.openxmlformats.org/drawingml/2006/main">
+            <a:pPr>
+              <a:defRPr sz="2250">
+                <a:solidFill>
+                  <a:srgbClr val="28354A"/>
+                </a:solidFill>
+                <a:latin typeface="Arial"/>
+                <a:ea typeface="Arial"/>
+                <a:cs typeface="Arial"/>
+              </a:defRPr>
+            </a:pPr>
+            <a:r>
+              <a:rPr sz="2250" b="1">
+                <a:solidFill>
+                  <a:srgbClr val="28354A"/>
+                </a:solidFill>
+                <a:latin typeface="Arial"/>
+                <a:ea typeface="Arial"/>
+                <a:cs typeface="Arial"/>
+              </a:rPr>
+              <a:t>Next: independent clinical adjudication</a:t>
+            </a:r>
+          </a:p>
+          <a:p xmlns:a="http://schemas.openxmlformats.org/drawingml/2006/main">
+            <a:pPr>
+              <a:defRPr sz="2250">
+                <a:solidFill>
+                  <a:srgbClr val="28354A"/>
+                </a:solidFill>
+                <a:latin typeface="Arial"/>
+                <a:ea typeface="Arial"/>
+                <a:cs typeface="Arial"/>
+              </a:defRPr>
+            </a:pPr>
+            <a:r>
+              <a:rPr sz="2250">
+                <a:solidFill>
+                  <a:srgbClr val="28354A"/>
+                </a:solidFill>
+                <a:latin typeface="Arial"/>
+                <a:ea typeface="Arial"/>
+                <a:cs typeface="Arial"/>
+              </a:rPr>
+              <a:t>Test fresh cases. Check every new miss.</a:t>
+            </a:r>
+          </a:p>
+        </p:txBody>
+      </p:sp>
+      <p:sp>
+        <p:nvSpPr>
+          <p:cNvPr id="5" name="">
+            <a:extLst xmlns:a="http://schemas.openxmlformats.org/drawingml/2006/main">
+              <a:ext uri="{FF2B5EF4-FFF2-40B4-BE49-F238E27FC236}">
+                <a16:creationId xmlns:a16="http://schemas.microsoft.com/office/drawing/2014/main" id="{4D5D2946-DE15-4363-91D6-AB13A9DF2B01}"/>
               </a:ext>
             </a:extLst>
           </p:cNvPr>
@@ -28242,17 +28289,17 @@
                 <a:ea typeface="Arial"/>
                 <a:cs typeface="Arial"/>
               </a:rPr>
-              <a:t>CSV labels remain an archived discussion baseline. They do not select the model or define clinical correctness.</a:t>
+              <a:t>Measure missed clinician-review routes, missed urgent routes and unnecessary referrals separately.</a:t>
             </a:r>
           </a:p>
         </p:txBody>
       </p:sp>
       <p:sp>
         <p:nvSpPr>
-          <p:cNvPr id="4" name="">
+          <p:cNvPr id="6" name="">
             <a:extLst xmlns:a="http://schemas.openxmlformats.org/drawingml/2006/main">
               <a:ext uri="{FF2B5EF4-FFF2-40B4-BE49-F238E27FC236}">
-                <a16:creationId xmlns:a16="http://schemas.microsoft.com/office/drawing/2014/main" id="{FA284285-DA92-47CF-912E-6727B1924E28}"/>
+                <a16:creationId xmlns:a16="http://schemas.microsoft.com/office/drawing/2014/main" id="{98227C35-74F7-465A-A581-939BE9BBFAB2}"/>
               </a:ext>
             </a:extLst>
           </p:cNvPr>
@@ -28307,7 +28354,7 @@
     </p:spTree>
     <p:extLst>
       <p:ext uri="{BB962C8B-B14F-4D97-AF65-F5344CB8AC3E}">
-        <p14:creationId xmlns:p14="http://schemas.microsoft.com/office/powerpoint/2010/main" val="1759011837"/>
+        <p14:creationId xmlns:p14="http://schemas.microsoft.com/office/powerpoint/2010/main" val="1854743580"/>
       </p:ext>
     </p:extLst>
   </p:cSld>
@@ -28335,10 +28382,10 @@
       </p:grpSpPr>
       <p:sp>
         <p:nvSpPr>
-          <p:cNvPr id="7" name="">
+          <p:cNvPr id="12" name="">
             <a:extLst xmlns:a="http://schemas.openxmlformats.org/drawingml/2006/main">
               <a:ext uri="{FF2B5EF4-FFF2-40B4-BE49-F238E27FC236}">
-                <a16:creationId xmlns:a16="http://schemas.microsoft.com/office/drawing/2014/main" id="{944D32BE-E66A-4436-AA96-09B276AE75B4}"/>
+                <a16:creationId xmlns:a16="http://schemas.microsoft.com/office/drawing/2014/main" id="{512E8B04-7E44-4CB8-8FD3-94A02E7DBE62}"/>
               </a:ext>
             </a:extLst>
           </p:cNvPr>
@@ -28385,239 +28432,17 @@
                 <a:ea typeface="Arial"/>
                 <a:cs typeface="Arial"/>
               </a:rPr>
-              <a:t>The frozen three-bucket contract</a:t>
+              <a:t>Validate the judge before relying on it</a:t>
             </a:r>
           </a:p>
         </p:txBody>
       </p:sp>
-      <p:graphicFrame>
-        <p:nvGraphicFramePr>
-          <p:cNvPr id="8" name=""/>
-          <p:cNvGraphicFramePr/>
-          <p:nvPr/>
-        </p:nvGraphicFramePr>
-        <p:xfrm>
-          <a:off xmlns:a="http://schemas.openxmlformats.org/drawingml/2006/main" x="762000" y="1619250"/>
-          <a:ext xmlns:a="http://schemas.openxmlformats.org/drawingml/2006/main" cx="10668000" cy="1839849"/>
-        </p:xfrm>
-        <a:graphic xmlns:a="http://schemas.openxmlformats.org/drawingml/2006/main">
-          <a:graphicData uri="http://schemas.openxmlformats.org/drawingml/2006/table">
-            <a:tbl>
-              <a:tblPr firstRow="1" bandRow="0"/>
-              <a:tblGrid>
-                <a:gridCol w="4267200"/>
-                <a:gridCol w="6400800"/>
-              </a:tblGrid>
-              <a:tr h="459962">
-                <a:tc>
-                  <a:txBody>
-                    <a:bodyPr/>
-                    <a:lstStyle/>
-                    <a:p>
-                      <a:r>
-                        <a:rPr sz="1725" b="1">
-                          <a:solidFill>
-                            <a:srgbClr val="FFFFFF"/>
-                          </a:solidFill>
-                          <a:latin typeface="Arial"/>
-                          <a:ea typeface="Arial"/>
-                          <a:cs typeface="Arial"/>
-                        </a:rPr>
-                        <a:t>Bucket</a:t>
-                      </a:r>
-                    </a:p>
-                  </a:txBody>
-                  <a:tcPr marL="133350" marR="133350" marT="76200" marB="76200" anchor="ctr">
-                    <a:solidFill>
-                      <a:srgbClr val="243866"/>
-                    </a:solidFill>
-                  </a:tcPr>
-                </a:tc>
-                <a:tc>
-                  <a:txBody>
-                    <a:bodyPr/>
-                    <a:lstStyle/>
-                    <a:p>
-                      <a:r>
-                        <a:rPr sz="1725" b="1">
-                          <a:solidFill>
-                            <a:srgbClr val="FFFFFF"/>
-                          </a:solidFill>
-                          <a:latin typeface="Arial"/>
-                          <a:ea typeface="Arial"/>
-                          <a:cs typeface="Arial"/>
-                        </a:rPr>
-                        <a:t>Meaning</a:t>
-                      </a:r>
-                    </a:p>
-                  </a:txBody>
-                  <a:tcPr marL="133350" marR="133350" marT="76200" marB="76200" anchor="ctr">
-                    <a:solidFill>
-                      <a:srgbClr val="243866"/>
-                    </a:solidFill>
-                  </a:tcPr>
-                </a:tc>
-              </a:tr>
-              <a:tr h="459962">
-                <a:tc>
-                  <a:txBody>
-                    <a:bodyPr/>
-                    <a:lstStyle/>
-                    <a:p>
-                      <a:r>
-                        <a:rPr sz="1725" b="0">
-                          <a:solidFill>
-                            <a:srgbClr val="28354A"/>
-                          </a:solidFill>
-                          <a:latin typeface="Arial"/>
-                          <a:ea typeface="Arial"/>
-                          <a:cs typeface="Arial"/>
-                        </a:rPr>
-                        <a:t>SELF_CARE</a:t>
-                      </a:r>
-                    </a:p>
-                  </a:txBody>
-                  <a:tcPr marL="133350" marR="133350" marT="76200" marB="76200" anchor="ctr">
-                    <a:solidFill>
-                      <a:srgbClr val="F6F4ED"/>
-                    </a:solidFill>
-                  </a:tcPr>
-                </a:tc>
-                <a:tc>
-                  <a:txBody>
-                    <a:bodyPr/>
-                    <a:lstStyle/>
-                    <a:p>
-                      <a:r>
-                        <a:rPr sz="1725" b="0">
-                          <a:solidFill>
-                            <a:srgbClr val="28354A"/>
-                          </a:solidFill>
-                          <a:latin typeface="Arial"/>
-                          <a:ea typeface="Arial"/>
-                          <a:cs typeface="Arial"/>
-                        </a:rPr>
-                        <a:t>Guidance only; no clinician action now</a:t>
-                      </a:r>
-                    </a:p>
-                  </a:txBody>
-                  <a:tcPr marL="133350" marR="133350" marT="76200" marB="76200" anchor="ctr">
-                    <a:solidFill>
-                      <a:srgbClr val="F6F4ED"/>
-                    </a:solidFill>
-                  </a:tcPr>
-                </a:tc>
-              </a:tr>
-              <a:tr h="459962">
-                <a:tc>
-                  <a:txBody>
-                    <a:bodyPr/>
-                    <a:lstStyle/>
-                    <a:p>
-                      <a:r>
-                        <a:rPr sz="1725" b="0">
-                          <a:solidFill>
-                            <a:srgbClr val="28354A"/>
-                          </a:solidFill>
-                          <a:latin typeface="Arial"/>
-                          <a:ea typeface="Arial"/>
-                          <a:cs typeface="Arial"/>
-                        </a:rPr>
-                        <a:t>ASYNC_PHYSICIAN</a:t>
-                      </a:r>
-                    </a:p>
-                  </a:txBody>
-                  <a:tcPr marL="133350" marR="133350" marT="76200" marB="76200" anchor="ctr">
-                    <a:solidFill>
-                      <a:srgbClr val="F6F4ED"/>
-                    </a:solidFill>
-                  </a:tcPr>
-                </a:tc>
-                <a:tc>
-                  <a:txBody>
-                    <a:bodyPr/>
-                    <a:lstStyle/>
-                    <a:p>
-                      <a:r>
-                        <a:rPr sz="1725" b="0">
-                          <a:solidFill>
-                            <a:srgbClr val="28354A"/>
-                          </a:solidFill>
-                          <a:latin typeface="Arial"/>
-                          <a:ea typeface="Arial"/>
-                          <a:cs typeface="Arial"/>
-                        </a:rPr>
-                        <a:t>Physician review by message, potentially the same day</a:t>
-                      </a:r>
-                    </a:p>
-                  </a:txBody>
-                  <a:tcPr marL="133350" marR="133350" marT="76200" marB="76200" anchor="ctr">
-                    <a:solidFill>
-                      <a:srgbClr val="F6F4ED"/>
-                    </a:solidFill>
-                  </a:tcPr>
-                </a:tc>
-              </a:tr>
-              <a:tr h="459962">
-                <a:tc>
-                  <a:txBody>
-                    <a:bodyPr/>
-                    <a:lstStyle/>
-                    <a:p>
-                      <a:r>
-                        <a:rPr sz="1725" b="0">
-                          <a:solidFill>
-                            <a:srgbClr val="28354A"/>
-                          </a:solidFill>
-                          <a:latin typeface="Arial"/>
-                          <a:ea typeface="Arial"/>
-                          <a:cs typeface="Arial"/>
-                        </a:rPr>
-                        <a:t>URGENT_ESCALATION</a:t>
-                      </a:r>
-                    </a:p>
-                  </a:txBody>
-                  <a:tcPr marL="133350" marR="133350" marT="76200" marB="76200" anchor="ctr">
-                    <a:solidFill>
-                      <a:srgbClr val="F6F4ED"/>
-                    </a:solidFill>
-                  </a:tcPr>
-                </a:tc>
-                <a:tc>
-                  <a:txBody>
-                    <a:bodyPr/>
-                    <a:lstStyle/>
-                    <a:p>
-                      <a:r>
-                        <a:rPr sz="1725" b="0">
-                          <a:solidFill>
-                            <a:srgbClr val="28354A"/>
-                          </a:solidFill>
-                          <a:latin typeface="Arial"/>
-                          <a:ea typeface="Arial"/>
-                          <a:cs typeface="Arial"/>
-                        </a:rPr>
-                        <a:t>Same-day in-person care or emergency action</a:t>
-                      </a:r>
-                    </a:p>
-                  </a:txBody>
-                  <a:tcPr marL="133350" marR="133350" marT="76200" marB="76200" anchor="ctr">
-                    <a:solidFill>
-                      <a:srgbClr val="F6F4ED"/>
-                    </a:solidFill>
-                  </a:tcPr>
-                </a:tc>
-              </a:tr>
-            </a:tbl>
-          </a:graphicData>
-        </a:graphic>
-      </p:graphicFrame>
-      <p:sp>
-        <p:nvSpPr>
-          <p:cNvPr id="3" name="">
+      <p:sp>
+        <p:nvSpPr>
+          <p:cNvPr id="2" name="">
             <a:extLst xmlns:a="http://schemas.openxmlformats.org/drawingml/2006/main">
               <a:ext uri="{FF2B5EF4-FFF2-40B4-BE49-F238E27FC236}">
-                <a16:creationId xmlns:a16="http://schemas.microsoft.com/office/drawing/2014/main" id="{760332D3-3A2C-4A13-9148-1AB386FA40E2}"/>
+                <a16:creationId xmlns:a16="http://schemas.microsoft.com/office/drawing/2014/main" id="{D10B2184-0E95-414C-AAEE-2CED4595F0BA}"/>
               </a:ext>
             </a:extLst>
           </p:cNvPr>
@@ -28628,8 +28453,8 @@
         </p:nvSpPr>
         <p:spPr>
           <a:xfrm xmlns:a="http://schemas.openxmlformats.org/drawingml/2006/main">
-            <a:off x="762000" y="3649599"/>
-            <a:ext cx="10382250" cy="595884"/>
+            <a:off x="762000" y="1619250"/>
+            <a:ext cx="3289300" cy="476250"/>
           </a:xfrm>
           <a:prstGeom xmlns:a="http://schemas.openxmlformats.org/drawingml/2006/main" prst="rect">
             <a:avLst/>
@@ -28646,9 +28471,9 @@
           <a:lstStyle xmlns:a="http://schemas.openxmlformats.org/drawingml/2006/main"/>
           <a:p xmlns:a="http://schemas.openxmlformats.org/drawingml/2006/main">
             <a:pPr>
-              <a:defRPr sz="1800">
-                <a:solidFill>
-                  <a:srgbClr val="28354A"/>
+              <a:defRPr sz="2775" b="1">
+                <a:solidFill>
+                  <a:srgbClr val="286B68"/>
                 </a:solidFill>
                 <a:latin typeface="Arial"/>
                 <a:ea typeface="Arial"/>
@@ -28656,25 +28481,25 @@
               </a:defRPr>
             </a:pPr>
             <a:r>
-              <a:rPr sz="1800">
-                <a:solidFill>
-                  <a:srgbClr val="28354A"/>
+              <a:rPr sz="2775" b="1">
+                <a:solidFill>
+                  <a:srgbClr val="286B68"/>
                 </a:solidFill>
                 <a:latin typeface="Arial"/>
                 <a:ea typeface="Arial"/>
                 <a:cs typeface="Arial"/>
               </a:rPr>
-              <a:t>Medication refill → ASYNC_PHYSICIAN unless clear same-day or emergency red flags require escalation.</a:t>
+              <a:t>01</a:t>
             </a:r>
           </a:p>
         </p:txBody>
       </p:sp>
       <p:sp>
         <p:nvSpPr>
-          <p:cNvPr id="4" name="">
+          <p:cNvPr id="3" name="">
             <a:extLst xmlns:a="http://schemas.openxmlformats.org/drawingml/2006/main">
               <a:ext uri="{FF2B5EF4-FFF2-40B4-BE49-F238E27FC236}">
-                <a16:creationId xmlns:a16="http://schemas.microsoft.com/office/drawing/2014/main" id="{CEC431D8-0583-4358-8FCA-BF9870594B04}"/>
+                <a16:creationId xmlns:a16="http://schemas.microsoft.com/office/drawing/2014/main" id="{B504EB42-9C9C-4A3C-A96D-1C7D585262D4}"/>
               </a:ext>
             </a:extLst>
           </p:cNvPr>
@@ -28685,8 +28510,8 @@
         </p:nvSpPr>
         <p:spPr>
           <a:xfrm xmlns:a="http://schemas.openxmlformats.org/drawingml/2006/main">
-            <a:off x="762000" y="4369308"/>
-            <a:ext cx="10382250" cy="316992"/>
+            <a:off x="762000" y="2190750"/>
+            <a:ext cx="3270250" cy="781050"/>
           </a:xfrm>
           <a:prstGeom xmlns:a="http://schemas.openxmlformats.org/drawingml/2006/main" prst="rect">
             <a:avLst/>
@@ -28703,9 +28528,9 @@
           <a:lstStyle xmlns:a="http://schemas.openxmlformats.org/drawingml/2006/main"/>
           <a:p xmlns:a="http://schemas.openxmlformats.org/drawingml/2006/main">
             <a:pPr>
-              <a:defRPr sz="1800">
-                <a:solidFill>
-                  <a:srgbClr val="28354A"/>
+              <a:defRPr sz="2100" b="1">
+                <a:solidFill>
+                  <a:srgbClr val="243866"/>
                 </a:solidFill>
                 <a:latin typeface="Arial"/>
                 <a:ea typeface="Arial"/>
@@ -28713,15 +28538,95 @@
               </a:defRPr>
             </a:pPr>
             <a:r>
-              <a:rPr sz="1800">
-                <a:solidFill>
-                  <a:srgbClr val="28354A"/>
+              <a:rPr sz="2100" b="1">
+                <a:solidFill>
+                  <a:srgbClr val="243866"/>
                 </a:solidFill>
                 <a:latin typeface="Arial"/>
                 <a:ea typeface="Arial"/>
                 <a:cs typeface="Arial"/>
               </a:rPr>
-              <a:t>Return one exact bucket and a short rationale as JSON.</a:t>
+              <a:t>Clinician-defined</a:t>
+            </a:r>
+          </a:p>
+          <a:p xmlns:a="http://schemas.openxmlformats.org/drawingml/2006/main">
+            <a:pPr>
+              <a:defRPr sz="2100" b="1">
+                <a:solidFill>
+                  <a:srgbClr val="243866"/>
+                </a:solidFill>
+                <a:latin typeface="Arial"/>
+                <a:ea typeface="Arial"/>
+                <a:cs typeface="Arial"/>
+              </a:defRPr>
+            </a:pPr>
+            <a:r>
+              <a:rPr sz="2100" b="1">
+                <a:solidFill>
+                  <a:srgbClr val="243866"/>
+                </a:solidFill>
+                <a:latin typeface="Arial"/>
+                <a:ea typeface="Arial"/>
+                <a:cs typeface="Arial"/>
+              </a:rPr>
+              <a:t>criterion</a:t>
+            </a:r>
+          </a:p>
+        </p:txBody>
+      </p:sp>
+      <p:sp>
+        <p:nvSpPr>
+          <p:cNvPr id="4" name="">
+            <a:extLst xmlns:a="http://schemas.openxmlformats.org/drawingml/2006/main">
+              <a:ext uri="{FF2B5EF4-FFF2-40B4-BE49-F238E27FC236}">
+                <a16:creationId xmlns:a16="http://schemas.microsoft.com/office/drawing/2014/main" id="{6C9C9A1D-E8BF-49D1-97BA-A145E89FF9E7}"/>
+              </a:ext>
+            </a:extLst>
+          </p:cNvPr>
+          <p:cNvSpPr>
+            <a:spLocks xmlns:a="http://schemas.openxmlformats.org/drawingml/2006/main" noGrp="1"/>
+          </p:cNvSpPr>
+          <p:nvPr/>
+        </p:nvSpPr>
+        <p:spPr>
+          <a:xfrm xmlns:a="http://schemas.openxmlformats.org/drawingml/2006/main">
+            <a:off x="4318000" y="1619250"/>
+            <a:ext cx="3289300" cy="476250"/>
+          </a:xfrm>
+          <a:prstGeom xmlns:a="http://schemas.openxmlformats.org/drawingml/2006/main" prst="rect">
+            <a:avLst/>
+          </a:prstGeom>
+          <a:noFill xmlns:a="http://schemas.openxmlformats.org/drawingml/2006/main"/>
+          <a:ln xmlns:a="http://schemas.openxmlformats.org/drawingml/2006/main" w="0">
+            <a:noFill/>
+          </a:ln>
+        </p:spPr>
+        <p:txBody>
+          <a:bodyPr xmlns:a="http://schemas.openxmlformats.org/drawingml/2006/main" wrap="square" lIns="0" tIns="0" rIns="0" bIns="0" anchor="t">
+            <a:noAutofit/>
+          </a:bodyPr>
+          <a:lstStyle xmlns:a="http://schemas.openxmlformats.org/drawingml/2006/main"/>
+          <a:p xmlns:a="http://schemas.openxmlformats.org/drawingml/2006/main">
+            <a:pPr>
+              <a:defRPr sz="2775" b="1">
+                <a:solidFill>
+                  <a:srgbClr val="286B68"/>
+                </a:solidFill>
+                <a:latin typeface="Arial"/>
+                <a:ea typeface="Arial"/>
+                <a:cs typeface="Arial"/>
+              </a:defRPr>
+            </a:pPr>
+            <a:r>
+              <a:rPr sz="2775" b="1">
+                <a:solidFill>
+                  <a:srgbClr val="286B68"/>
+                </a:solidFill>
+                <a:latin typeface="Arial"/>
+                <a:ea typeface="Arial"/>
+                <a:cs typeface="Arial"/>
+              </a:rPr>
+              <a:t>02</a:t>
             </a:r>
           </a:p>
         </p:txBody>
@@ -28731,7 +28636,315 @@
           <p:cNvPr id="5" name="">
             <a:extLst xmlns:a="http://schemas.openxmlformats.org/drawingml/2006/main">
               <a:ext uri="{FF2B5EF4-FFF2-40B4-BE49-F238E27FC236}">
-                <a16:creationId xmlns:a16="http://schemas.microsoft.com/office/drawing/2014/main" id="{56630AE4-EC91-4432-B184-C5D3C94C6835}"/>
+                <a16:creationId xmlns:a16="http://schemas.microsoft.com/office/drawing/2014/main" id="{6E53DE6D-D106-46F3-85CC-B5CD8C9A0E99}"/>
+              </a:ext>
+            </a:extLst>
+          </p:cNvPr>
+          <p:cNvSpPr>
+            <a:spLocks xmlns:a="http://schemas.openxmlformats.org/drawingml/2006/main" noGrp="1"/>
+          </p:cNvSpPr>
+          <p:nvPr/>
+        </p:nvSpPr>
+        <p:spPr>
+          <a:xfrm xmlns:a="http://schemas.openxmlformats.org/drawingml/2006/main">
+            <a:off x="4318000" y="2190750"/>
+            <a:ext cx="3270250" cy="781050"/>
+          </a:xfrm>
+          <a:prstGeom xmlns:a="http://schemas.openxmlformats.org/drawingml/2006/main" prst="rect">
+            <a:avLst/>
+          </a:prstGeom>
+          <a:noFill xmlns:a="http://schemas.openxmlformats.org/drawingml/2006/main"/>
+          <a:ln xmlns:a="http://schemas.openxmlformats.org/drawingml/2006/main" w="0">
+            <a:noFill/>
+          </a:ln>
+        </p:spPr>
+        <p:txBody>
+          <a:bodyPr xmlns:a="http://schemas.openxmlformats.org/drawingml/2006/main" wrap="square" lIns="0" tIns="0" rIns="0" bIns="0" anchor="t">
+            <a:noAutofit/>
+          </a:bodyPr>
+          <a:lstStyle xmlns:a="http://schemas.openxmlformats.org/drawingml/2006/main"/>
+          <a:p xmlns:a="http://schemas.openxmlformats.org/drawingml/2006/main">
+            <a:pPr>
+              <a:defRPr sz="2100" b="1">
+                <a:solidFill>
+                  <a:srgbClr val="243866"/>
+                </a:solidFill>
+                <a:latin typeface="Arial"/>
+                <a:ea typeface="Arial"/>
+                <a:cs typeface="Arial"/>
+              </a:defRPr>
+            </a:pPr>
+            <a:r>
+              <a:rPr sz="2100" b="1">
+                <a:solidFill>
+                  <a:srgbClr val="243866"/>
+                </a:solidFill>
+                <a:latin typeface="Arial"/>
+                <a:ea typeface="Arial"/>
+                <a:cs typeface="Arial"/>
+              </a:rPr>
+              <a:t>Quoted evidence</a:t>
+            </a:r>
+          </a:p>
+        </p:txBody>
+      </p:sp>
+      <p:sp>
+        <p:nvSpPr>
+          <p:cNvPr id="6" name="">
+            <a:extLst xmlns:a="http://schemas.openxmlformats.org/drawingml/2006/main">
+              <a:ext uri="{FF2B5EF4-FFF2-40B4-BE49-F238E27FC236}">
+                <a16:creationId xmlns:a16="http://schemas.microsoft.com/office/drawing/2014/main" id="{41CFC340-8160-4ED0-ADB7-04834FF3596E}"/>
+              </a:ext>
+            </a:extLst>
+          </p:cNvPr>
+          <p:cNvSpPr>
+            <a:spLocks xmlns:a="http://schemas.openxmlformats.org/drawingml/2006/main" noGrp="1"/>
+          </p:cNvSpPr>
+          <p:nvPr/>
+        </p:nvSpPr>
+        <p:spPr>
+          <a:xfrm xmlns:a="http://schemas.openxmlformats.org/drawingml/2006/main">
+            <a:off x="7874000" y="1619250"/>
+            <a:ext cx="3289300" cy="476250"/>
+          </a:xfrm>
+          <a:prstGeom xmlns:a="http://schemas.openxmlformats.org/drawingml/2006/main" prst="rect">
+            <a:avLst/>
+          </a:prstGeom>
+          <a:noFill xmlns:a="http://schemas.openxmlformats.org/drawingml/2006/main"/>
+          <a:ln xmlns:a="http://schemas.openxmlformats.org/drawingml/2006/main" w="0">
+            <a:noFill/>
+          </a:ln>
+        </p:spPr>
+        <p:txBody>
+          <a:bodyPr xmlns:a="http://schemas.openxmlformats.org/drawingml/2006/main" wrap="square" lIns="0" tIns="0" rIns="0" bIns="0" anchor="t">
+            <a:noAutofit/>
+          </a:bodyPr>
+          <a:lstStyle xmlns:a="http://schemas.openxmlformats.org/drawingml/2006/main"/>
+          <a:p xmlns:a="http://schemas.openxmlformats.org/drawingml/2006/main">
+            <a:pPr>
+              <a:defRPr sz="2775" b="1">
+                <a:solidFill>
+                  <a:srgbClr val="286B68"/>
+                </a:solidFill>
+                <a:latin typeface="Arial"/>
+                <a:ea typeface="Arial"/>
+                <a:cs typeface="Arial"/>
+              </a:defRPr>
+            </a:pPr>
+            <a:r>
+              <a:rPr sz="2775" b="1">
+                <a:solidFill>
+                  <a:srgbClr val="286B68"/>
+                </a:solidFill>
+                <a:latin typeface="Arial"/>
+                <a:ea typeface="Arial"/>
+                <a:cs typeface="Arial"/>
+              </a:rPr>
+              <a:t>03</a:t>
+            </a:r>
+          </a:p>
+        </p:txBody>
+      </p:sp>
+      <p:sp>
+        <p:nvSpPr>
+          <p:cNvPr id="7" name="">
+            <a:extLst xmlns:a="http://schemas.openxmlformats.org/drawingml/2006/main">
+              <a:ext uri="{FF2B5EF4-FFF2-40B4-BE49-F238E27FC236}">
+                <a16:creationId xmlns:a16="http://schemas.microsoft.com/office/drawing/2014/main" id="{C03B94A4-494A-435B-8149-5137E3CBF666}"/>
+              </a:ext>
+            </a:extLst>
+          </p:cNvPr>
+          <p:cNvSpPr>
+            <a:spLocks xmlns:a="http://schemas.openxmlformats.org/drawingml/2006/main" noGrp="1"/>
+          </p:cNvSpPr>
+          <p:nvPr/>
+        </p:nvSpPr>
+        <p:spPr>
+          <a:xfrm xmlns:a="http://schemas.openxmlformats.org/drawingml/2006/main">
+            <a:off x="7874000" y="2190750"/>
+            <a:ext cx="3270250" cy="781050"/>
+          </a:xfrm>
+          <a:prstGeom xmlns:a="http://schemas.openxmlformats.org/drawingml/2006/main" prst="rect">
+            <a:avLst/>
+          </a:prstGeom>
+          <a:noFill xmlns:a="http://schemas.openxmlformats.org/drawingml/2006/main"/>
+          <a:ln xmlns:a="http://schemas.openxmlformats.org/drawingml/2006/main" w="0">
+            <a:noFill/>
+          </a:ln>
+        </p:spPr>
+        <p:txBody>
+          <a:bodyPr xmlns:a="http://schemas.openxmlformats.org/drawingml/2006/main" wrap="square" lIns="0" tIns="0" rIns="0" bIns="0" anchor="t">
+            <a:noAutofit/>
+          </a:bodyPr>
+          <a:lstStyle xmlns:a="http://schemas.openxmlformats.org/drawingml/2006/main"/>
+          <a:p xmlns:a="http://schemas.openxmlformats.org/drawingml/2006/main">
+            <a:pPr>
+              <a:defRPr sz="2100" b="1">
+                <a:solidFill>
+                  <a:srgbClr val="243866"/>
+                </a:solidFill>
+                <a:latin typeface="Arial"/>
+                <a:ea typeface="Arial"/>
+                <a:cs typeface="Arial"/>
+              </a:defRPr>
+            </a:pPr>
+            <a:r>
+              <a:rPr sz="2100" b="1">
+                <a:solidFill>
+                  <a:srgbClr val="243866"/>
+                </a:solidFill>
+                <a:latin typeface="Arial"/>
+                <a:ea typeface="Arial"/>
+                <a:cs typeface="Arial"/>
+              </a:rPr>
+              <a:t>PASS / FAIL /</a:t>
+            </a:r>
+          </a:p>
+          <a:p xmlns:a="http://schemas.openxmlformats.org/drawingml/2006/main">
+            <a:pPr>
+              <a:defRPr sz="2100" b="1">
+                <a:solidFill>
+                  <a:srgbClr val="243866"/>
+                </a:solidFill>
+                <a:latin typeface="Arial"/>
+                <a:ea typeface="Arial"/>
+                <a:cs typeface="Arial"/>
+              </a:defRPr>
+            </a:pPr>
+            <a:r>
+              <a:rPr sz="2100" b="1">
+                <a:solidFill>
+                  <a:srgbClr val="243866"/>
+                </a:solidFill>
+                <a:latin typeface="Arial"/>
+                <a:ea typeface="Arial"/>
+                <a:cs typeface="Arial"/>
+              </a:rPr>
+              <a:t>ABSTAIN</a:t>
+            </a:r>
+          </a:p>
+        </p:txBody>
+      </p:sp>
+      <p:sp>
+        <p:nvSpPr>
+          <p:cNvPr id="8" name="">
+            <a:extLst xmlns:a="http://schemas.openxmlformats.org/drawingml/2006/main">
+              <a:ext uri="{FF2B5EF4-FFF2-40B4-BE49-F238E27FC236}">
+                <a16:creationId xmlns:a16="http://schemas.microsoft.com/office/drawing/2014/main" id="{E1B14E28-8B86-4A70-9DED-EF31146B9BEF}"/>
+              </a:ext>
+            </a:extLst>
+          </p:cNvPr>
+          <p:cNvSpPr>
+            <a:spLocks xmlns:a="http://schemas.openxmlformats.org/drawingml/2006/main" noGrp="1"/>
+          </p:cNvSpPr>
+          <p:nvPr/>
+        </p:nvSpPr>
+        <p:spPr>
+          <a:xfrm xmlns:a="http://schemas.openxmlformats.org/drawingml/2006/main">
+            <a:off x="762000" y="3381375"/>
+            <a:ext cx="10382250" cy="351854"/>
+          </a:xfrm>
+          <a:prstGeom xmlns:a="http://schemas.openxmlformats.org/drawingml/2006/main" prst="rect">
+            <a:avLst/>
+          </a:prstGeom>
+          <a:noFill xmlns:a="http://schemas.openxmlformats.org/drawingml/2006/main"/>
+          <a:ln xmlns:a="http://schemas.openxmlformats.org/drawingml/2006/main" w="0">
+            <a:noFill/>
+          </a:ln>
+        </p:spPr>
+        <p:txBody>
+          <a:bodyPr xmlns:a="http://schemas.openxmlformats.org/drawingml/2006/main" wrap="square" lIns="0" tIns="0" rIns="0" bIns="0" anchor="t">
+            <a:noAutofit/>
+          </a:bodyPr>
+          <a:lstStyle xmlns:a="http://schemas.openxmlformats.org/drawingml/2006/main"/>
+          <a:p xmlns:a="http://schemas.openxmlformats.org/drawingml/2006/main">
+            <a:pPr>
+              <a:defRPr sz="2025">
+                <a:solidFill>
+                  <a:srgbClr val="28354A"/>
+                </a:solidFill>
+                <a:latin typeface="Arial"/>
+                <a:ea typeface="Arial"/>
+                <a:cs typeface="Arial"/>
+              </a:defRPr>
+            </a:pPr>
+            <a:r>
+              <a:rPr sz="2025">
+                <a:solidFill>
+                  <a:srgbClr val="28354A"/>
+                </a:solidFill>
+                <a:latin typeface="Arial"/>
+                <a:ea typeface="Arial"/>
+                <a:cs typeface="Arial"/>
+              </a:rPr>
+              <a:t>Built: retrospective research judges and planted-defect tests.</a:t>
+            </a:r>
+          </a:p>
+        </p:txBody>
+      </p:sp>
+      <p:sp>
+        <p:nvSpPr>
+          <p:cNvPr id="9" name="">
+            <a:extLst xmlns:a="http://schemas.openxmlformats.org/drawingml/2006/main">
+              <a:ext uri="{FF2B5EF4-FFF2-40B4-BE49-F238E27FC236}">
+                <a16:creationId xmlns:a16="http://schemas.microsoft.com/office/drawing/2014/main" id="{13CC07B4-74A3-452C-98D3-22937E18096F}"/>
+              </a:ext>
+            </a:extLst>
+          </p:cNvPr>
+          <p:cNvSpPr>
+            <a:spLocks xmlns:a="http://schemas.openxmlformats.org/drawingml/2006/main" noGrp="1"/>
+          </p:cNvSpPr>
+          <p:nvPr/>
+        </p:nvSpPr>
+        <p:spPr>
+          <a:xfrm xmlns:a="http://schemas.openxmlformats.org/drawingml/2006/main">
+            <a:off x="762000" y="3942779"/>
+            <a:ext cx="10382250" cy="351854"/>
+          </a:xfrm>
+          <a:prstGeom xmlns:a="http://schemas.openxmlformats.org/drawingml/2006/main" prst="rect">
+            <a:avLst/>
+          </a:prstGeom>
+          <a:noFill xmlns:a="http://schemas.openxmlformats.org/drawingml/2006/main"/>
+          <a:ln xmlns:a="http://schemas.openxmlformats.org/drawingml/2006/main" w="0">
+            <a:noFill/>
+          </a:ln>
+        </p:spPr>
+        <p:txBody>
+          <a:bodyPr xmlns:a="http://schemas.openxmlformats.org/drawingml/2006/main" wrap="square" lIns="0" tIns="0" rIns="0" bIns="0" anchor="t">
+            <a:noAutofit/>
+          </a:bodyPr>
+          <a:lstStyle xmlns:a="http://schemas.openxmlformats.org/drawingml/2006/main"/>
+          <a:p xmlns:a="http://schemas.openxmlformats.org/drawingml/2006/main">
+            <a:pPr>
+              <a:defRPr sz="2025">
+                <a:solidFill>
+                  <a:srgbClr val="28354A"/>
+                </a:solidFill>
+                <a:latin typeface="Arial"/>
+                <a:ea typeface="Arial"/>
+                <a:cs typeface="Arial"/>
+              </a:defRPr>
+            </a:pPr>
+            <a:r>
+              <a:rPr sz="2025">
+                <a:solidFill>
+                  <a:srgbClr val="28354A"/>
+                </a:solidFill>
+                <a:latin typeface="Arial"/>
+                <a:ea typeface="Arial"/>
+                <a:cs typeface="Arial"/>
+              </a:rPr>
+              <a:t>Next: blinded physician calibration of missed failures and false alarms.</a:t>
+            </a:r>
+          </a:p>
+        </p:txBody>
+      </p:sp>
+      <p:sp>
+        <p:nvSpPr>
+          <p:cNvPr id="10" name="">
+            <a:extLst xmlns:a="http://schemas.openxmlformats.org/drawingml/2006/main">
+              <a:ext uri="{FF2B5EF4-FFF2-40B4-BE49-F238E27FC236}">
+                <a16:creationId xmlns:a16="http://schemas.microsoft.com/office/drawing/2014/main" id="{E4BFAB23-3435-4C43-9DA8-7C73C99397B8}"/>
               </a:ext>
             </a:extLst>
           </p:cNvPr>
@@ -28778,17 +28991,17 @@
                 <a:ea typeface="Arial"/>
                 <a:cs typeface="Arial"/>
               </a:rPr>
-              <a:t>Service context: rapid messaging can begin same-day care. Response deadlines and completed care are unmeasured.</a:t>
+              <a:t>Offline research only. No judge in the live demonstration.</a:t>
             </a:r>
           </a:p>
         </p:txBody>
       </p:sp>
       <p:sp>
         <p:nvSpPr>
-          <p:cNvPr id="6" name="">
+          <p:cNvPr id="11" name="">
             <a:extLst xmlns:a="http://schemas.openxmlformats.org/drawingml/2006/main">
               <a:ext uri="{FF2B5EF4-FFF2-40B4-BE49-F238E27FC236}">
-                <a16:creationId xmlns:a16="http://schemas.microsoft.com/office/drawing/2014/main" id="{E73A82AA-7DCB-48A6-BDBC-D2CE20602BB7}"/>
+                <a16:creationId xmlns:a16="http://schemas.microsoft.com/office/drawing/2014/main" id="{DCB3C94B-45D5-4056-862B-EC75FE9A673E}"/>
               </a:ext>
             </a:extLst>
           </p:cNvPr>
@@ -28843,7 +29056,7 @@
     </p:spTree>
     <p:extLst>
       <p:ext uri="{BB962C8B-B14F-4D97-AF65-F5344CB8AC3E}">
-        <p14:creationId xmlns:p14="http://schemas.microsoft.com/office/powerpoint/2010/main" val="1381492966"/>
+        <p14:creationId xmlns:p14="http://schemas.microsoft.com/office/powerpoint/2010/main" val="1525379022"/>
       </p:ext>
     </p:extLst>
   </p:cSld>
@@ -28871,10 +29084,10 @@
       </p:grpSpPr>
       <p:sp>
         <p:nvSpPr>
-          <p:cNvPr id="9" name="">
+          <p:cNvPr id="14" name="">
             <a:extLst xmlns:a="http://schemas.openxmlformats.org/drawingml/2006/main">
               <a:ext uri="{FF2B5EF4-FFF2-40B4-BE49-F238E27FC236}">
-                <a16:creationId xmlns:a16="http://schemas.microsoft.com/office/drawing/2014/main" id="{6DCD207E-F58C-406E-9734-D08D8B721384}"/>
+                <a16:creationId xmlns:a16="http://schemas.microsoft.com/office/drawing/2014/main" id="{9952D77C-CE1F-4783-B7E5-DE10A321A88D}"/>
               </a:ext>
             </a:extLst>
           </p:cNvPr>
@@ -28921,7 +29134,7 @@
                 <a:ea typeface="Arial"/>
                 <a:cs typeface="Arial"/>
               </a:rPr>
-              <a:t>Live demonstration</a:t>
+              <a:t>Add RAG only for a demonstrated gap</a:t>
             </a:r>
           </a:p>
         </p:txBody>
@@ -28931,7 +29144,7 @@
           <p:cNvPr id="2" name="">
             <a:extLst xmlns:a="http://schemas.openxmlformats.org/drawingml/2006/main">
               <a:ext uri="{FF2B5EF4-FFF2-40B4-BE49-F238E27FC236}">
-                <a16:creationId xmlns:a16="http://schemas.microsoft.com/office/drawing/2014/main" id="{6FFCDF17-F7D1-446A-B8D1-E3A15DC152F7}"/>
+                <a16:creationId xmlns:a16="http://schemas.microsoft.com/office/drawing/2014/main" id="{9713753F-7447-446F-A8D9-28BEE43A77D6}"/>
               </a:ext>
             </a:extLst>
           </p:cNvPr>
@@ -28943,7 +29156,7 @@
         <p:spPr>
           <a:xfrm xmlns:a="http://schemas.openxmlformats.org/drawingml/2006/main">
             <a:off x="762000" y="1619250"/>
-            <a:ext cx="10382250" cy="386715"/>
+            <a:ext cx="2400300" cy="476250"/>
           </a:xfrm>
           <a:prstGeom xmlns:a="http://schemas.openxmlformats.org/drawingml/2006/main" prst="rect">
             <a:avLst/>
@@ -28960,9 +29173,9 @@
           <a:lstStyle xmlns:a="http://schemas.openxmlformats.org/drawingml/2006/main"/>
           <a:p xmlns:a="http://schemas.openxmlformats.org/drawingml/2006/main">
             <a:pPr>
-              <a:defRPr sz="2250">
-                <a:solidFill>
-                  <a:srgbClr val="28354A"/>
+              <a:defRPr sz="2775" b="1">
+                <a:solidFill>
+                  <a:srgbClr val="286B68"/>
                 </a:solidFill>
                 <a:latin typeface="Arial"/>
                 <a:ea typeface="Arial"/>
@@ -28970,15 +29183,15 @@
               </a:defRPr>
             </a:pPr>
             <a:r>
-              <a:rPr sz="2250">
-                <a:solidFill>
-                  <a:srgbClr val="28354A"/>
+              <a:rPr sz="2775" b="1">
+                <a:solidFill>
+                  <a:srgbClr val="286B68"/>
                 </a:solidFill>
                 <a:latin typeface="Arial"/>
                 <a:ea typeface="Arial"/>
                 <a:cs typeface="Arial"/>
               </a:rPr>
-              <a:t>C01: routine symptoms</a:t>
+              <a:t>01</a:t>
             </a:r>
           </a:p>
         </p:txBody>
@@ -28988,7 +29201,7 @@
           <p:cNvPr id="3" name="">
             <a:extLst xmlns:a="http://schemas.openxmlformats.org/drawingml/2006/main">
               <a:ext uri="{FF2B5EF4-FFF2-40B4-BE49-F238E27FC236}">
-                <a16:creationId xmlns:a16="http://schemas.microsoft.com/office/drawing/2014/main" id="{23978266-6C60-4D0E-8588-5967C283D54F}"/>
+                <a16:creationId xmlns:a16="http://schemas.microsoft.com/office/drawing/2014/main" id="{F692CB66-1191-417F-8AD2-08C2679286CE}"/>
               </a:ext>
             </a:extLst>
           </p:cNvPr>
@@ -28999,8 +29212,8 @@
         </p:nvSpPr>
         <p:spPr>
           <a:xfrm xmlns:a="http://schemas.openxmlformats.org/drawingml/2006/main">
-            <a:off x="762000" y="2253615"/>
-            <a:ext cx="10382250" cy="386715"/>
+            <a:off x="762000" y="2190750"/>
+            <a:ext cx="2381250" cy="781050"/>
           </a:xfrm>
           <a:prstGeom xmlns:a="http://schemas.openxmlformats.org/drawingml/2006/main" prst="rect">
             <a:avLst/>
@@ -29017,9 +29230,9 @@
           <a:lstStyle xmlns:a="http://schemas.openxmlformats.org/drawingml/2006/main"/>
           <a:p xmlns:a="http://schemas.openxmlformats.org/drawingml/2006/main">
             <a:pPr>
-              <a:defRPr sz="2250">
-                <a:solidFill>
-                  <a:srgbClr val="28354A"/>
+              <a:defRPr sz="2100" b="1">
+                <a:solidFill>
+                  <a:srgbClr val="243866"/>
                 </a:solidFill>
                 <a:latin typeface="Arial"/>
                 <a:ea typeface="Arial"/>
@@ -29027,15 +29240,38 @@
               </a:defRPr>
             </a:pPr>
             <a:r>
-              <a:rPr sz="2250">
-                <a:solidFill>
-                  <a:srgbClr val="28354A"/>
+              <a:rPr sz="2100" b="1">
+                <a:solidFill>
+                  <a:srgbClr val="243866"/>
                 </a:solidFill>
                 <a:latin typeface="Arial"/>
                 <a:ea typeface="Arial"/>
                 <a:cs typeface="Arial"/>
               </a:rPr>
-              <a:t>C02: symptoms requiring urgent escalation</a:t>
+              <a:t>Retrieve</a:t>
+            </a:r>
+          </a:p>
+          <a:p xmlns:a="http://schemas.openxmlformats.org/drawingml/2006/main">
+            <a:pPr>
+              <a:defRPr sz="2100" b="1">
+                <a:solidFill>
+                  <a:srgbClr val="243866"/>
+                </a:solidFill>
+                <a:latin typeface="Arial"/>
+                <a:ea typeface="Arial"/>
+                <a:cs typeface="Arial"/>
+              </a:defRPr>
+            </a:pPr>
+            <a:r>
+              <a:rPr sz="2100" b="1">
+                <a:solidFill>
+                  <a:srgbClr val="243866"/>
+                </a:solidFill>
+                <a:latin typeface="Arial"/>
+                <a:ea typeface="Arial"/>
+                <a:cs typeface="Arial"/>
+              </a:rPr>
+              <a:t>sources</a:t>
             </a:r>
           </a:p>
         </p:txBody>
@@ -29045,7 +29281,7 @@
           <p:cNvPr id="4" name="">
             <a:extLst xmlns:a="http://schemas.openxmlformats.org/drawingml/2006/main">
               <a:ext uri="{FF2B5EF4-FFF2-40B4-BE49-F238E27FC236}">
-                <a16:creationId xmlns:a16="http://schemas.microsoft.com/office/drawing/2014/main" id="{A681EB1E-7E91-48CA-8728-E63207072E0F}"/>
+                <a16:creationId xmlns:a16="http://schemas.microsoft.com/office/drawing/2014/main" id="{8BB51724-5C28-4E83-9AEF-659CBC0EF9AD}"/>
               </a:ext>
             </a:extLst>
           </p:cNvPr>
@@ -29056,8 +29292,8 @@
         </p:nvSpPr>
         <p:spPr>
           <a:xfrm xmlns:a="http://schemas.openxmlformats.org/drawingml/2006/main">
-            <a:off x="762000" y="2887980"/>
-            <a:ext cx="10382250" cy="386715"/>
+            <a:off x="3429000" y="1619250"/>
+            <a:ext cx="2400300" cy="476250"/>
           </a:xfrm>
           <a:prstGeom xmlns:a="http://schemas.openxmlformats.org/drawingml/2006/main" prst="rect">
             <a:avLst/>
@@ -29074,9 +29310,9 @@
           <a:lstStyle xmlns:a="http://schemas.openxmlformats.org/drawingml/2006/main"/>
           <a:p xmlns:a="http://schemas.openxmlformats.org/drawingml/2006/main">
             <a:pPr>
-              <a:defRPr sz="2250">
-                <a:solidFill>
-                  <a:srgbClr val="28354A"/>
+              <a:defRPr sz="2775" b="1">
+                <a:solidFill>
+                  <a:srgbClr val="286B68"/>
                 </a:solidFill>
                 <a:latin typeface="Arial"/>
                 <a:ea typeface="Arial"/>
@@ -29084,15 +29320,15 @@
               </a:defRPr>
             </a:pPr>
             <a:r>
-              <a:rPr sz="2250">
-                <a:solidFill>
-                  <a:srgbClr val="28354A"/>
+              <a:rPr sz="2775" b="1">
+                <a:solidFill>
+                  <a:srgbClr val="286B68"/>
                 </a:solidFill>
                 <a:latin typeface="Arial"/>
                 <a:ea typeface="Arial"/>
                 <a:cs typeface="Arial"/>
               </a:rPr>
-              <a:t>C06: stable medication refill</a:t>
+              <a:t>02</a:t>
             </a:r>
           </a:p>
         </p:txBody>
@@ -29102,7 +29338,7 @@
           <p:cNvPr id="5" name="">
             <a:extLst xmlns:a="http://schemas.openxmlformats.org/drawingml/2006/main">
               <a:ext uri="{FF2B5EF4-FFF2-40B4-BE49-F238E27FC236}">
-                <a16:creationId xmlns:a16="http://schemas.microsoft.com/office/drawing/2014/main" id="{FCD1CE8E-02F1-4660-8889-4645F903B91A}"/>
+                <a16:creationId xmlns:a16="http://schemas.microsoft.com/office/drawing/2014/main" id="{CAEE1F88-2826-4AEB-95DC-1FD13219BE42}"/>
               </a:ext>
             </a:extLst>
           </p:cNvPr>
@@ -29113,8 +29349,8 @@
         </p:nvSpPr>
         <p:spPr>
           <a:xfrm xmlns:a="http://schemas.openxmlformats.org/drawingml/2006/main">
-            <a:off x="762000" y="3522345"/>
-            <a:ext cx="10382250" cy="386715"/>
+            <a:off x="3429000" y="2190750"/>
+            <a:ext cx="2381250" cy="781050"/>
           </a:xfrm>
           <a:prstGeom xmlns:a="http://schemas.openxmlformats.org/drawingml/2006/main" prst="rect">
             <a:avLst/>
@@ -29131,9 +29367,9 @@
           <a:lstStyle xmlns:a="http://schemas.openxmlformats.org/drawingml/2006/main"/>
           <a:p xmlns:a="http://schemas.openxmlformats.org/drawingml/2006/main">
             <a:pPr>
-              <a:defRPr sz="2250">
-                <a:solidFill>
-                  <a:srgbClr val="28354A"/>
+              <a:defRPr sz="2100" b="1">
+                <a:solidFill>
+                  <a:srgbClr val="243866"/>
                 </a:solidFill>
                 <a:latin typeface="Arial"/>
                 <a:ea typeface="Arial"/>
@@ -29141,15 +29377,38 @@
               </a:defRPr>
             </a:pPr>
             <a:r>
-              <a:rPr sz="2250">
-                <a:solidFill>
-                  <a:srgbClr val="28354A"/>
+              <a:rPr sz="2100" b="1">
+                <a:solidFill>
+                  <a:srgbClr val="243866"/>
                 </a:solidFill>
                 <a:latin typeface="Arial"/>
                 <a:ea typeface="Arial"/>
                 <a:cs typeface="Arial"/>
               </a:rPr>
-              <a:t>Edit C06 to add chest symptoms; inspect the new trace</a:t>
+              <a:t>Check</a:t>
+            </a:r>
+          </a:p>
+          <a:p xmlns:a="http://schemas.openxmlformats.org/drawingml/2006/main">
+            <a:pPr>
+              <a:defRPr sz="2100" b="1">
+                <a:solidFill>
+                  <a:srgbClr val="243866"/>
+                </a:solidFill>
+                <a:latin typeface="Arial"/>
+                <a:ea typeface="Arial"/>
+                <a:cs typeface="Arial"/>
+              </a:defRPr>
+            </a:pPr>
+            <a:r>
+              <a:rPr sz="2100" b="1">
+                <a:solidFill>
+                  <a:srgbClr val="243866"/>
+                </a:solidFill>
+                <a:latin typeface="Arial"/>
+                <a:ea typeface="Arial"/>
+                <a:cs typeface="Arial"/>
+              </a:rPr>
+              <a:t>applicability</a:t>
             </a:r>
           </a:p>
         </p:txBody>
@@ -29159,7 +29418,7 @@
           <p:cNvPr id="6" name="">
             <a:extLst xmlns:a="http://schemas.openxmlformats.org/drawingml/2006/main">
               <a:ext uri="{FF2B5EF4-FFF2-40B4-BE49-F238E27FC236}">
-                <a16:creationId xmlns:a16="http://schemas.microsoft.com/office/drawing/2014/main" id="{37C0F22F-A04E-4F43-9E00-C96FFA8E062D}"/>
+                <a16:creationId xmlns:a16="http://schemas.microsoft.com/office/drawing/2014/main" id="{CBD8E4B8-F0EA-478B-A87C-03E063D618AA}"/>
               </a:ext>
             </a:extLst>
           </p:cNvPr>
@@ -29170,8 +29429,8 @@
         </p:nvSpPr>
         <p:spPr>
           <a:xfrm xmlns:a="http://schemas.openxmlformats.org/drawingml/2006/main">
-            <a:off x="762000" y="5562600"/>
-            <a:ext cx="10382250" cy="590550"/>
+            <a:off x="6096000" y="1619250"/>
+            <a:ext cx="2400300" cy="476250"/>
           </a:xfrm>
           <a:prstGeom xmlns:a="http://schemas.openxmlformats.org/drawingml/2006/main" prst="rect">
             <a:avLst/>
@@ -29188,7 +29447,7 @@
           <a:lstStyle xmlns:a="http://schemas.openxmlformats.org/drawingml/2006/main"/>
           <a:p xmlns:a="http://schemas.openxmlformats.org/drawingml/2006/main">
             <a:pPr>
-              <a:defRPr sz="1875" b="1">
+              <a:defRPr sz="2775" b="1">
                 <a:solidFill>
                   <a:srgbClr val="286B68"/>
                 </a:solidFill>
@@ -29198,7 +29457,7 @@
               </a:defRPr>
             </a:pPr>
             <a:r>
-              <a:rPr sz="1875" b="1">
+              <a:rPr sz="2775" b="1">
                 <a:solidFill>
                   <a:srgbClr val="286B68"/>
                 </a:solidFill>
@@ -29206,7 +29465,7 @@
                 <a:ea typeface="Arial"/>
                 <a:cs typeface="Arial"/>
               </a:rPr>
-              <a:t>Each submission starts one independent provider call.</a:t>
+              <a:t>03</a:t>
             </a:r>
           </a:p>
         </p:txBody>
@@ -29216,7 +29475,7 @@
           <p:cNvPr id="7" name="">
             <a:extLst xmlns:a="http://schemas.openxmlformats.org/drawingml/2006/main">
               <a:ext uri="{FF2B5EF4-FFF2-40B4-BE49-F238E27FC236}">
-                <a16:creationId xmlns:a16="http://schemas.microsoft.com/office/drawing/2014/main" id="{F971A0B7-C1EA-4C80-B967-8CD36191E971}"/>
+                <a16:creationId xmlns:a16="http://schemas.microsoft.com/office/drawing/2014/main" id="{70123D3C-DBEE-4613-86FC-8984CAF95317}"/>
               </a:ext>
             </a:extLst>
           </p:cNvPr>
@@ -29227,8 +29486,8 @@
         </p:nvSpPr>
         <p:spPr>
           <a:xfrm xmlns:a="http://schemas.openxmlformats.org/drawingml/2006/main">
-            <a:off x="762000" y="6229350"/>
-            <a:ext cx="10096500" cy="466725"/>
+            <a:off x="6096000" y="2190750"/>
+            <a:ext cx="2381250" cy="781050"/>
           </a:xfrm>
           <a:prstGeom xmlns:a="http://schemas.openxmlformats.org/drawingml/2006/main" prst="rect">
             <a:avLst/>
@@ -29245,9 +29504,9 @@
           <a:lstStyle xmlns:a="http://schemas.openxmlformats.org/drawingml/2006/main"/>
           <a:p xmlns:a="http://schemas.openxmlformats.org/drawingml/2006/main">
             <a:pPr>
-              <a:defRPr sz="1275">
-                <a:solidFill>
-                  <a:srgbClr val="667084"/>
+              <a:defRPr sz="2100" b="1">
+                <a:solidFill>
+                  <a:srgbClr val="243866"/>
                 </a:solidFill>
                 <a:latin typeface="Arial"/>
                 <a:ea typeface="Arial"/>
@@ -29255,15 +29514,38 @@
               </a:defRPr>
             </a:pPr>
             <a:r>
-              <a:rPr sz="1275">
-                <a:solidFill>
-                  <a:srgbClr val="667084"/>
+              <a:rPr sz="2100" b="1">
+                <a:solidFill>
+                  <a:srgbClr val="243866"/>
                 </a:solidFill>
                 <a:latin typeface="Arial"/>
                 <a:ea typeface="Arial"/>
                 <a:cs typeface="Arial"/>
               </a:rPr>
-              <a:t>Open /stripped. Use a clearly labeled saved record if the live attempt cannot complete. Exact inputs: appendix 23.</a:t>
+              <a:t>Cite the</a:t>
+            </a:r>
+          </a:p>
+          <a:p xmlns:a="http://schemas.openxmlformats.org/drawingml/2006/main">
+            <a:pPr>
+              <a:defRPr sz="2100" b="1">
+                <a:solidFill>
+                  <a:srgbClr val="243866"/>
+                </a:solidFill>
+                <a:latin typeface="Arial"/>
+                <a:ea typeface="Arial"/>
+                <a:cs typeface="Arial"/>
+              </a:defRPr>
+            </a:pPr>
+            <a:r>
+              <a:rPr sz="2100" b="1">
+                <a:solidFill>
+                  <a:srgbClr val="243866"/>
+                </a:solidFill>
+                <a:latin typeface="Arial"/>
+                <a:ea typeface="Arial"/>
+                <a:cs typeface="Arial"/>
+              </a:rPr>
+              <a:t>source</a:t>
             </a:r>
           </a:p>
         </p:txBody>
@@ -29273,7 +29555,315 @@
           <p:cNvPr id="8" name="">
             <a:extLst xmlns:a="http://schemas.openxmlformats.org/drawingml/2006/main">
               <a:ext uri="{FF2B5EF4-FFF2-40B4-BE49-F238E27FC236}">
-                <a16:creationId xmlns:a16="http://schemas.microsoft.com/office/drawing/2014/main" id="{4053926E-FD54-42D8-BCB1-B177F03633BC}"/>
+                <a16:creationId xmlns:a16="http://schemas.microsoft.com/office/drawing/2014/main" id="{CAC71766-6078-40A4-9D21-B11BB8DE3C25}"/>
+              </a:ext>
+            </a:extLst>
+          </p:cNvPr>
+          <p:cNvSpPr>
+            <a:spLocks xmlns:a="http://schemas.openxmlformats.org/drawingml/2006/main" noGrp="1"/>
+          </p:cNvSpPr>
+          <p:nvPr/>
+        </p:nvSpPr>
+        <p:spPr>
+          <a:xfrm xmlns:a="http://schemas.openxmlformats.org/drawingml/2006/main">
+            <a:off x="8763000" y="1619250"/>
+            <a:ext cx="2400300" cy="476250"/>
+          </a:xfrm>
+          <a:prstGeom xmlns:a="http://schemas.openxmlformats.org/drawingml/2006/main" prst="rect">
+            <a:avLst/>
+          </a:prstGeom>
+          <a:noFill xmlns:a="http://schemas.openxmlformats.org/drawingml/2006/main"/>
+          <a:ln xmlns:a="http://schemas.openxmlformats.org/drawingml/2006/main" w="0">
+            <a:noFill/>
+          </a:ln>
+        </p:spPr>
+        <p:txBody>
+          <a:bodyPr xmlns:a="http://schemas.openxmlformats.org/drawingml/2006/main" wrap="square" lIns="0" tIns="0" rIns="0" bIns="0" anchor="t">
+            <a:noAutofit/>
+          </a:bodyPr>
+          <a:lstStyle xmlns:a="http://schemas.openxmlformats.org/drawingml/2006/main"/>
+          <a:p xmlns:a="http://schemas.openxmlformats.org/drawingml/2006/main">
+            <a:pPr>
+              <a:defRPr sz="2775" b="1">
+                <a:solidFill>
+                  <a:srgbClr val="286B68"/>
+                </a:solidFill>
+                <a:latin typeface="Arial"/>
+                <a:ea typeface="Arial"/>
+                <a:cs typeface="Arial"/>
+              </a:defRPr>
+            </a:pPr>
+            <a:r>
+              <a:rPr sz="2775" b="1">
+                <a:solidFill>
+                  <a:srgbClr val="286B68"/>
+                </a:solidFill>
+                <a:latin typeface="Arial"/>
+                <a:ea typeface="Arial"/>
+                <a:cs typeface="Arial"/>
+              </a:rPr>
+              <a:t>04</a:t>
+            </a:r>
+          </a:p>
+        </p:txBody>
+      </p:sp>
+      <p:sp>
+        <p:nvSpPr>
+          <p:cNvPr id="9" name="">
+            <a:extLst xmlns:a="http://schemas.openxmlformats.org/drawingml/2006/main">
+              <a:ext uri="{FF2B5EF4-FFF2-40B4-BE49-F238E27FC236}">
+                <a16:creationId xmlns:a16="http://schemas.microsoft.com/office/drawing/2014/main" id="{C0D9E10C-6671-473A-A099-B997D4159F14}"/>
+              </a:ext>
+            </a:extLst>
+          </p:cNvPr>
+          <p:cNvSpPr>
+            <a:spLocks xmlns:a="http://schemas.openxmlformats.org/drawingml/2006/main" noGrp="1"/>
+          </p:cNvSpPr>
+          <p:nvPr/>
+        </p:nvSpPr>
+        <p:spPr>
+          <a:xfrm xmlns:a="http://schemas.openxmlformats.org/drawingml/2006/main">
+            <a:off x="8763000" y="2190750"/>
+            <a:ext cx="2381250" cy="781050"/>
+          </a:xfrm>
+          <a:prstGeom xmlns:a="http://schemas.openxmlformats.org/drawingml/2006/main" prst="rect">
+            <a:avLst/>
+          </a:prstGeom>
+          <a:noFill xmlns:a="http://schemas.openxmlformats.org/drawingml/2006/main"/>
+          <a:ln xmlns:a="http://schemas.openxmlformats.org/drawingml/2006/main" w="0">
+            <a:noFill/>
+          </a:ln>
+        </p:spPr>
+        <p:txBody>
+          <a:bodyPr xmlns:a="http://schemas.openxmlformats.org/drawingml/2006/main" wrap="square" lIns="0" tIns="0" rIns="0" bIns="0" anchor="t">
+            <a:noAutofit/>
+          </a:bodyPr>
+          <a:lstStyle xmlns:a="http://schemas.openxmlformats.org/drawingml/2006/main"/>
+          <a:p xmlns:a="http://schemas.openxmlformats.org/drawingml/2006/main">
+            <a:pPr>
+              <a:defRPr sz="2100" b="1">
+                <a:solidFill>
+                  <a:srgbClr val="243866"/>
+                </a:solidFill>
+                <a:latin typeface="Arial"/>
+                <a:ea typeface="Arial"/>
+                <a:cs typeface="Arial"/>
+              </a:defRPr>
+            </a:pPr>
+            <a:r>
+              <a:rPr sz="2100" b="1">
+                <a:solidFill>
+                  <a:srgbClr val="243866"/>
+                </a:solidFill>
+                <a:latin typeface="Arial"/>
+                <a:ea typeface="Arial"/>
+                <a:cs typeface="Arial"/>
+              </a:rPr>
+              <a:t>Test against</a:t>
+            </a:r>
+          </a:p>
+          <a:p xmlns:a="http://schemas.openxmlformats.org/drawingml/2006/main">
+            <a:pPr>
+              <a:defRPr sz="2100" b="1">
+                <a:solidFill>
+                  <a:srgbClr val="243866"/>
+                </a:solidFill>
+                <a:latin typeface="Arial"/>
+                <a:ea typeface="Arial"/>
+                <a:cs typeface="Arial"/>
+              </a:defRPr>
+            </a:pPr>
+            <a:r>
+              <a:rPr sz="2100" b="1">
+                <a:solidFill>
+                  <a:srgbClr val="243866"/>
+                </a:solidFill>
+                <a:latin typeface="Arial"/>
+                <a:ea typeface="Arial"/>
+                <a:cs typeface="Arial"/>
+              </a:rPr>
+              <a:t>control</a:t>
+            </a:r>
+          </a:p>
+        </p:txBody>
+      </p:sp>
+      <p:sp>
+        <p:nvSpPr>
+          <p:cNvPr id="10" name="">
+            <a:extLst xmlns:a="http://schemas.openxmlformats.org/drawingml/2006/main">
+              <a:ext uri="{FF2B5EF4-FFF2-40B4-BE49-F238E27FC236}">
+                <a16:creationId xmlns:a16="http://schemas.microsoft.com/office/drawing/2014/main" id="{61C2A3B1-3CED-4817-B854-2F6B406A6A2E}"/>
+              </a:ext>
+            </a:extLst>
+          </p:cNvPr>
+          <p:cNvSpPr>
+            <a:spLocks xmlns:a="http://schemas.openxmlformats.org/drawingml/2006/main" noGrp="1"/>
+          </p:cNvSpPr>
+          <p:nvPr/>
+        </p:nvSpPr>
+        <p:spPr>
+          <a:xfrm xmlns:a="http://schemas.openxmlformats.org/drawingml/2006/main">
+            <a:off x="762000" y="3381375"/>
+            <a:ext cx="10382250" cy="351854"/>
+          </a:xfrm>
+          <a:prstGeom xmlns:a="http://schemas.openxmlformats.org/drawingml/2006/main" prst="rect">
+            <a:avLst/>
+          </a:prstGeom>
+          <a:noFill xmlns:a="http://schemas.openxmlformats.org/drawingml/2006/main"/>
+          <a:ln xmlns:a="http://schemas.openxmlformats.org/drawingml/2006/main" w="0">
+            <a:noFill/>
+          </a:ln>
+        </p:spPr>
+        <p:txBody>
+          <a:bodyPr xmlns:a="http://schemas.openxmlformats.org/drawingml/2006/main" wrap="square" lIns="0" tIns="0" rIns="0" bIns="0" anchor="t">
+            <a:noAutofit/>
+          </a:bodyPr>
+          <a:lstStyle xmlns:a="http://schemas.openxmlformats.org/drawingml/2006/main"/>
+          <a:p xmlns:a="http://schemas.openxmlformats.org/drawingml/2006/main">
+            <a:pPr>
+              <a:defRPr sz="2025">
+                <a:solidFill>
+                  <a:srgbClr val="28354A"/>
+                </a:solidFill>
+                <a:latin typeface="Arial"/>
+                <a:ea typeface="Arial"/>
+                <a:cs typeface="Arial"/>
+              </a:defRPr>
+            </a:pPr>
+            <a:r>
+              <a:rPr sz="2025">
+                <a:solidFill>
+                  <a:srgbClr val="28354A"/>
+                </a:solidFill>
+                <a:latin typeface="Arial"/>
+                <a:ea typeface="Arial"/>
+                <a:cs typeface="Arial"/>
+              </a:rPr>
+              <a:t>Observed: C47 matched the reference; C22 remained missed.</a:t>
+            </a:r>
+          </a:p>
+        </p:txBody>
+      </p:sp>
+      <p:sp>
+        <p:nvSpPr>
+          <p:cNvPr id="11" name="">
+            <a:extLst xmlns:a="http://schemas.openxmlformats.org/drawingml/2006/main">
+              <a:ext uri="{FF2B5EF4-FFF2-40B4-BE49-F238E27FC236}">
+                <a16:creationId xmlns:a16="http://schemas.microsoft.com/office/drawing/2014/main" id="{B2C38A2A-EA77-4879-811F-E03D884BB72A}"/>
+              </a:ext>
+            </a:extLst>
+          </p:cNvPr>
+          <p:cNvSpPr>
+            <a:spLocks xmlns:a="http://schemas.openxmlformats.org/drawingml/2006/main" noGrp="1"/>
+          </p:cNvSpPr>
+          <p:nvPr/>
+        </p:nvSpPr>
+        <p:spPr>
+          <a:xfrm xmlns:a="http://schemas.openxmlformats.org/drawingml/2006/main">
+            <a:off x="762000" y="3942779"/>
+            <a:ext cx="10382250" cy="351854"/>
+          </a:xfrm>
+          <a:prstGeom xmlns:a="http://schemas.openxmlformats.org/drawingml/2006/main" prst="rect">
+            <a:avLst/>
+          </a:prstGeom>
+          <a:noFill xmlns:a="http://schemas.openxmlformats.org/drawingml/2006/main"/>
+          <a:ln xmlns:a="http://schemas.openxmlformats.org/drawingml/2006/main" w="0">
+            <a:noFill/>
+          </a:ln>
+        </p:spPr>
+        <p:txBody>
+          <a:bodyPr xmlns:a="http://schemas.openxmlformats.org/drawingml/2006/main" wrap="square" lIns="0" tIns="0" rIns="0" bIns="0" anchor="t">
+            <a:noAutofit/>
+          </a:bodyPr>
+          <a:lstStyle xmlns:a="http://schemas.openxmlformats.org/drawingml/2006/main"/>
+          <a:p xmlns:a="http://schemas.openxmlformats.org/drawingml/2006/main">
+            <a:pPr>
+              <a:defRPr sz="2025">
+                <a:solidFill>
+                  <a:srgbClr val="28354A"/>
+                </a:solidFill>
+                <a:latin typeface="Arial"/>
+                <a:ea typeface="Arial"/>
+                <a:cs typeface="Arial"/>
+              </a:defRPr>
+            </a:pPr>
+            <a:r>
+              <a:rPr sz="2025">
+                <a:solidFill>
+                  <a:srgbClr val="28354A"/>
+                </a:solidFill>
+                <a:latin typeface="Arial"/>
+                <a:ea typeface="Arial"/>
+                <a:cs typeface="Arial"/>
+              </a:rPr>
+              <a:t>Dense ranking changed selected cards for 0/98 messages.</a:t>
+            </a:r>
+          </a:p>
+        </p:txBody>
+      </p:sp>
+      <p:sp>
+        <p:nvSpPr>
+          <p:cNvPr id="12" name="">
+            <a:extLst xmlns:a="http://schemas.openxmlformats.org/drawingml/2006/main">
+              <a:ext uri="{FF2B5EF4-FFF2-40B4-BE49-F238E27FC236}">
+                <a16:creationId xmlns:a16="http://schemas.microsoft.com/office/drawing/2014/main" id="{66B947D9-D4F7-4CD2-836F-5933E30686EB}"/>
+              </a:ext>
+            </a:extLst>
+          </p:cNvPr>
+          <p:cNvSpPr>
+            <a:spLocks xmlns:a="http://schemas.openxmlformats.org/drawingml/2006/main" noGrp="1"/>
+          </p:cNvSpPr>
+          <p:nvPr/>
+        </p:nvSpPr>
+        <p:spPr>
+          <a:xfrm xmlns:a="http://schemas.openxmlformats.org/drawingml/2006/main">
+            <a:off x="762000" y="5886450"/>
+            <a:ext cx="10096500" cy="514350"/>
+          </a:xfrm>
+          <a:prstGeom xmlns:a="http://schemas.openxmlformats.org/drawingml/2006/main" prst="rect">
+            <a:avLst/>
+          </a:prstGeom>
+          <a:noFill xmlns:a="http://schemas.openxmlformats.org/drawingml/2006/main"/>
+          <a:ln xmlns:a="http://schemas.openxmlformats.org/drawingml/2006/main" w="0">
+            <a:noFill/>
+          </a:ln>
+        </p:spPr>
+        <p:txBody>
+          <a:bodyPr xmlns:a="http://schemas.openxmlformats.org/drawingml/2006/main" wrap="square" lIns="0" tIns="0" rIns="0" bIns="0" anchor="t">
+            <a:noAutofit/>
+          </a:bodyPr>
+          <a:lstStyle xmlns:a="http://schemas.openxmlformats.org/drawingml/2006/main"/>
+          <a:p xmlns:a="http://schemas.openxmlformats.org/drawingml/2006/main">
+            <a:pPr>
+              <a:defRPr sz="1350">
+                <a:solidFill>
+                  <a:srgbClr val="667084"/>
+                </a:solidFill>
+                <a:latin typeface="Arial"/>
+                <a:ea typeface="Arial"/>
+                <a:cs typeface="Arial"/>
+              </a:defRPr>
+            </a:pPr>
+            <a:r>
+              <a:rPr sz="1350">
+                <a:solidFill>
+                  <a:srgbClr val="667084"/>
+                </a:solidFill>
+                <a:latin typeface="Arial"/>
+                <a:ea typeface="Arial"/>
+                <a:cs typeface="Arial"/>
+              </a:rPr>
+              <a:t>Research only. Next: clinically reviewed retrieval cases and an isolated ablation. Evidence cannot replace an examination.</a:t>
+            </a:r>
+          </a:p>
+        </p:txBody>
+      </p:sp>
+      <p:sp>
+        <p:nvSpPr>
+          <p:cNvPr id="13" name="">
+            <a:extLst xmlns:a="http://schemas.openxmlformats.org/drawingml/2006/main">
+              <a:ext uri="{FF2B5EF4-FFF2-40B4-BE49-F238E27FC236}">
+                <a16:creationId xmlns:a16="http://schemas.microsoft.com/office/drawing/2014/main" id="{F5ADFC89-C8F5-4835-B442-C43C24ED4C10}"/>
               </a:ext>
             </a:extLst>
           </p:cNvPr>
@@ -29328,7 +29918,7 @@
     </p:spTree>
     <p:extLst>
       <p:ext uri="{BB962C8B-B14F-4D97-AF65-F5344CB8AC3E}">
-        <p14:creationId xmlns:p14="http://schemas.microsoft.com/office/powerpoint/2010/main" val="404713540"/>
+        <p14:creationId xmlns:p14="http://schemas.microsoft.com/office/powerpoint/2010/main" val="1292699378"/>
       </p:ext>
     </p:extLst>
   </p:cSld>
@@ -29356,10 +29946,10 @@
       </p:grpSpPr>
       <p:sp>
         <p:nvSpPr>
-          <p:cNvPr id="15" name="">
+          <p:cNvPr id="13" name="">
             <a:extLst xmlns:a="http://schemas.openxmlformats.org/drawingml/2006/main">
               <a:ext uri="{FF2B5EF4-FFF2-40B4-BE49-F238E27FC236}">
-                <a16:creationId xmlns:a16="http://schemas.microsoft.com/office/drawing/2014/main" id="{A223A7A4-6C39-490F-AEE6-A211BE523F04}"/>
+                <a16:creationId xmlns:a16="http://schemas.microsoft.com/office/drawing/2014/main" id="{0D5C53F1-6262-47EC-938E-81A960F3CCB4}"/>
               </a:ext>
             </a:extLst>
           </p:cNvPr>
@@ -29406,7 +29996,7 @@
                 <a:ea typeface="Arial"/>
                 <a:cs typeface="Arial"/>
               </a:rPr>
-              <a:t>One call through a visible workflow</a:t>
+              <a:t>Live demo: inspect the decision</a:t>
             </a:r>
           </a:p>
         </p:txBody>
@@ -29416,7 +30006,7 @@
           <p:cNvPr id="2" name="">
             <a:extLst xmlns:a="http://schemas.openxmlformats.org/drawingml/2006/main">
               <a:ext uri="{FF2B5EF4-FFF2-40B4-BE49-F238E27FC236}">
-                <a16:creationId xmlns:a16="http://schemas.microsoft.com/office/drawing/2014/main" id="{90B43B5D-D526-4584-BCF8-E6358B4533AC}"/>
+                <a16:creationId xmlns:a16="http://schemas.microsoft.com/office/drawing/2014/main" id="{21092702-A934-4ABC-B706-E293CD59B4D6}"/>
               </a:ext>
             </a:extLst>
           </p:cNvPr>
@@ -29428,7 +30018,7 @@
         <p:spPr>
           <a:xfrm xmlns:a="http://schemas.openxmlformats.org/drawingml/2006/main">
             <a:off x="762000" y="1619250"/>
-            <a:ext cx="2400300" cy="476250"/>
+            <a:ext cx="3289300" cy="476250"/>
           </a:xfrm>
           <a:prstGeom xmlns:a="http://schemas.openxmlformats.org/drawingml/2006/main" prst="rect">
             <a:avLst/>
@@ -29473,7 +30063,7 @@
           <p:cNvPr id="3" name="">
             <a:extLst xmlns:a="http://schemas.openxmlformats.org/drawingml/2006/main">
               <a:ext uri="{FF2B5EF4-FFF2-40B4-BE49-F238E27FC236}">
-                <a16:creationId xmlns:a16="http://schemas.microsoft.com/office/drawing/2014/main" id="{90CFC6D4-1264-45B9-9710-AE912211BB36}"/>
+                <a16:creationId xmlns:a16="http://schemas.microsoft.com/office/drawing/2014/main" id="{21059694-CD88-4CC5-86F3-13F990362888}"/>
               </a:ext>
             </a:extLst>
           </p:cNvPr>
@@ -29485,7 +30075,7 @@
         <p:spPr>
           <a:xfrm xmlns:a="http://schemas.openxmlformats.org/drawingml/2006/main">
             <a:off x="762000" y="2190750"/>
-            <a:ext cx="2381250" cy="781050"/>
+            <a:ext cx="3270250" cy="781050"/>
           </a:xfrm>
           <a:prstGeom xmlns:a="http://schemas.openxmlformats.org/drawingml/2006/main" prst="rect">
             <a:avLst/>
@@ -29520,7 +30110,7 @@
                 <a:ea typeface="Arial"/>
                 <a:cs typeface="Arial"/>
               </a:rPr>
-              <a:t>Patient message</a:t>
+              <a:t>Run one message</a:t>
             </a:r>
           </a:p>
         </p:txBody>
@@ -29530,7 +30120,7 @@
           <p:cNvPr id="4" name="">
             <a:extLst xmlns:a="http://schemas.openxmlformats.org/drawingml/2006/main">
               <a:ext uri="{FF2B5EF4-FFF2-40B4-BE49-F238E27FC236}">
-                <a16:creationId xmlns:a16="http://schemas.microsoft.com/office/drawing/2014/main" id="{59A95A98-6A41-47E1-914C-34CDF705BC7E}"/>
+                <a16:creationId xmlns:a16="http://schemas.microsoft.com/office/drawing/2014/main" id="{C13F144A-06CC-40EB-A003-C2E851A7A804}"/>
               </a:ext>
             </a:extLst>
           </p:cNvPr>
@@ -29541,8 +30131,8 @@
         </p:nvSpPr>
         <p:spPr>
           <a:xfrm xmlns:a="http://schemas.openxmlformats.org/drawingml/2006/main">
-            <a:off x="3429000" y="1619250"/>
-            <a:ext cx="2400300" cy="476250"/>
+            <a:off x="4318000" y="1619250"/>
+            <a:ext cx="3289300" cy="476250"/>
           </a:xfrm>
           <a:prstGeom xmlns:a="http://schemas.openxmlformats.org/drawingml/2006/main" prst="rect">
             <a:avLst/>
@@ -29587,7 +30177,7 @@
           <p:cNvPr id="5" name="">
             <a:extLst xmlns:a="http://schemas.openxmlformats.org/drawingml/2006/main">
               <a:ext uri="{FF2B5EF4-FFF2-40B4-BE49-F238E27FC236}">
-                <a16:creationId xmlns:a16="http://schemas.microsoft.com/office/drawing/2014/main" id="{6E27BFAA-6F64-4D4B-92FB-DD26105C7FA1}"/>
+                <a16:creationId xmlns:a16="http://schemas.microsoft.com/office/drawing/2014/main" id="{5E3E8BBD-8D04-4053-B515-2527F67A7D9A}"/>
               </a:ext>
             </a:extLst>
           </p:cNvPr>
@@ -29598,8 +30188,8 @@
         </p:nvSpPr>
         <p:spPr>
           <a:xfrm xmlns:a="http://schemas.openxmlformats.org/drawingml/2006/main">
-            <a:off x="3429000" y="2190750"/>
-            <a:ext cx="2381250" cy="781050"/>
+            <a:off x="4318000" y="2190750"/>
+            <a:ext cx="3270250" cy="781050"/>
           </a:xfrm>
           <a:prstGeom xmlns:a="http://schemas.openxmlformats.org/drawingml/2006/main" prst="rect">
             <a:avLst/>
@@ -29634,7 +30224,7 @@
                 <a:ea typeface="Arial"/>
                 <a:cs typeface="Arial"/>
               </a:rPr>
-              <a:t>One Mastra step</a:t>
+              <a:t>Inspect configuration</a:t>
             </a:r>
           </a:p>
         </p:txBody>
@@ -29644,7 +30234,7 @@
           <p:cNvPr id="6" name="">
             <a:extLst xmlns:a="http://schemas.openxmlformats.org/drawingml/2006/main">
               <a:ext uri="{FF2B5EF4-FFF2-40B4-BE49-F238E27FC236}">
-                <a16:creationId xmlns:a16="http://schemas.microsoft.com/office/drawing/2014/main" id="{96759AAD-D6FF-4D8C-A2D9-6C7B584AD608}"/>
+                <a16:creationId xmlns:a16="http://schemas.microsoft.com/office/drawing/2014/main" id="{D17CAA4B-EC0D-4ECA-BF23-6A193080FC68}"/>
               </a:ext>
             </a:extLst>
           </p:cNvPr>
@@ -29655,8 +30245,8 @@
         </p:nvSpPr>
         <p:spPr>
           <a:xfrm xmlns:a="http://schemas.openxmlformats.org/drawingml/2006/main">
-            <a:off x="6096000" y="1619250"/>
-            <a:ext cx="2400300" cy="476250"/>
+            <a:off x="7874000" y="1619250"/>
+            <a:ext cx="3289300" cy="476250"/>
           </a:xfrm>
           <a:prstGeom xmlns:a="http://schemas.openxmlformats.org/drawingml/2006/main" prst="rect">
             <a:avLst/>
@@ -29701,7 +30291,7 @@
           <p:cNvPr id="7" name="">
             <a:extLst xmlns:a="http://schemas.openxmlformats.org/drawingml/2006/main">
               <a:ext uri="{FF2B5EF4-FFF2-40B4-BE49-F238E27FC236}">
-                <a16:creationId xmlns:a16="http://schemas.microsoft.com/office/drawing/2014/main" id="{97DC6AA2-1977-4C8A-8866-BB26CF2CF4DD}"/>
+                <a16:creationId xmlns:a16="http://schemas.microsoft.com/office/drawing/2014/main" id="{26C526E6-31B2-436D-B209-157BB27F202A}"/>
               </a:ext>
             </a:extLst>
           </p:cNvPr>
@@ -29712,8 +30302,8 @@
         </p:nvSpPr>
         <p:spPr>
           <a:xfrm xmlns:a="http://schemas.openxmlformats.org/drawingml/2006/main">
-            <a:off x="6096000" y="2190750"/>
-            <a:ext cx="2381250" cy="781050"/>
+            <a:off x="7874000" y="2190750"/>
+            <a:ext cx="3270250" cy="781050"/>
           </a:xfrm>
           <a:prstGeom xmlns:a="http://schemas.openxmlformats.org/drawingml/2006/main" prst="rect">
             <a:avLst/>
@@ -29748,7 +30338,7 @@
                 <a:ea typeface="Arial"/>
                 <a:cs typeface="Arial"/>
               </a:rPr>
-              <a:t>Native Anthropic call</a:t>
+              <a:t>Review saved failures</a:t>
             </a:r>
           </a:p>
         </p:txBody>
@@ -29758,121 +30348,7 @@
           <p:cNvPr id="8" name="">
             <a:extLst xmlns:a="http://schemas.openxmlformats.org/drawingml/2006/main">
               <a:ext uri="{FF2B5EF4-FFF2-40B4-BE49-F238E27FC236}">
-                <a16:creationId xmlns:a16="http://schemas.microsoft.com/office/drawing/2014/main" id="{C95CDA89-FF24-4DC5-911D-8807EE86705F}"/>
-              </a:ext>
-            </a:extLst>
-          </p:cNvPr>
-          <p:cNvSpPr>
-            <a:spLocks xmlns:a="http://schemas.openxmlformats.org/drawingml/2006/main" noGrp="1"/>
-          </p:cNvSpPr>
-          <p:nvPr/>
-        </p:nvSpPr>
-        <p:spPr>
-          <a:xfrm xmlns:a="http://schemas.openxmlformats.org/drawingml/2006/main">
-            <a:off x="8763000" y="1619250"/>
-            <a:ext cx="2400300" cy="476250"/>
-          </a:xfrm>
-          <a:prstGeom xmlns:a="http://schemas.openxmlformats.org/drawingml/2006/main" prst="rect">
-            <a:avLst/>
-          </a:prstGeom>
-          <a:noFill xmlns:a="http://schemas.openxmlformats.org/drawingml/2006/main"/>
-          <a:ln xmlns:a="http://schemas.openxmlformats.org/drawingml/2006/main" w="0">
-            <a:noFill/>
-          </a:ln>
-        </p:spPr>
-        <p:txBody>
-          <a:bodyPr xmlns:a="http://schemas.openxmlformats.org/drawingml/2006/main" wrap="square" lIns="0" tIns="0" rIns="0" bIns="0" anchor="t">
-            <a:noAutofit/>
-          </a:bodyPr>
-          <a:lstStyle xmlns:a="http://schemas.openxmlformats.org/drawingml/2006/main"/>
-          <a:p xmlns:a="http://schemas.openxmlformats.org/drawingml/2006/main">
-            <a:pPr>
-              <a:defRPr sz="2775" b="1">
-                <a:solidFill>
-                  <a:srgbClr val="286B68"/>
-                </a:solidFill>
-                <a:latin typeface="Arial"/>
-                <a:ea typeface="Arial"/>
-                <a:cs typeface="Arial"/>
-              </a:defRPr>
-            </a:pPr>
-            <a:r>
-              <a:rPr sz="2775" b="1">
-                <a:solidFill>
-                  <a:srgbClr val="286B68"/>
-                </a:solidFill>
-                <a:latin typeface="Arial"/>
-                <a:ea typeface="Arial"/>
-                <a:cs typeface="Arial"/>
-              </a:rPr>
-              <a:t>04</a:t>
-            </a:r>
-          </a:p>
-        </p:txBody>
-      </p:sp>
-      <p:sp>
-        <p:nvSpPr>
-          <p:cNvPr id="9" name="">
-            <a:extLst xmlns:a="http://schemas.openxmlformats.org/drawingml/2006/main">
-              <a:ext uri="{FF2B5EF4-FFF2-40B4-BE49-F238E27FC236}">
-                <a16:creationId xmlns:a16="http://schemas.microsoft.com/office/drawing/2014/main" id="{9680AB8F-2D86-4432-95E1-08394661402F}"/>
-              </a:ext>
-            </a:extLst>
-          </p:cNvPr>
-          <p:cNvSpPr>
-            <a:spLocks xmlns:a="http://schemas.openxmlformats.org/drawingml/2006/main" noGrp="1"/>
-          </p:cNvSpPr>
-          <p:nvPr/>
-        </p:nvSpPr>
-        <p:spPr>
-          <a:xfrm xmlns:a="http://schemas.openxmlformats.org/drawingml/2006/main">
-            <a:off x="8763000" y="2190750"/>
-            <a:ext cx="2381250" cy="781050"/>
-          </a:xfrm>
-          <a:prstGeom xmlns:a="http://schemas.openxmlformats.org/drawingml/2006/main" prst="rect">
-            <a:avLst/>
-          </a:prstGeom>
-          <a:noFill xmlns:a="http://schemas.openxmlformats.org/drawingml/2006/main"/>
-          <a:ln xmlns:a="http://schemas.openxmlformats.org/drawingml/2006/main" w="0">
-            <a:noFill/>
-          </a:ln>
-        </p:spPr>
-        <p:txBody>
-          <a:bodyPr xmlns:a="http://schemas.openxmlformats.org/drawingml/2006/main" wrap="square" lIns="0" tIns="0" rIns="0" bIns="0" anchor="t">
-            <a:noAutofit/>
-          </a:bodyPr>
-          <a:lstStyle xmlns:a="http://schemas.openxmlformats.org/drawingml/2006/main"/>
-          <a:p xmlns:a="http://schemas.openxmlformats.org/drawingml/2006/main">
-            <a:pPr>
-              <a:defRPr sz="2100" b="1">
-                <a:solidFill>
-                  <a:srgbClr val="243866"/>
-                </a:solidFill>
-                <a:latin typeface="Arial"/>
-                <a:ea typeface="Arial"/>
-                <a:cs typeface="Arial"/>
-              </a:defRPr>
-            </a:pPr>
-            <a:r>
-              <a:rPr sz="2100" b="1">
-                <a:solidFill>
-                  <a:srgbClr val="243866"/>
-                </a:solidFill>
-                <a:latin typeface="Arial"/>
-                <a:ea typeface="Arial"/>
-                <a:cs typeface="Arial"/>
-              </a:rPr>
-              <a:t>Disposition and trace</a:t>
-            </a:r>
-          </a:p>
-        </p:txBody>
-      </p:sp>
-      <p:sp>
-        <p:nvSpPr>
-          <p:cNvPr id="10" name="">
-            <a:extLst xmlns:a="http://schemas.openxmlformats.org/drawingml/2006/main">
-              <a:ext uri="{FF2B5EF4-FFF2-40B4-BE49-F238E27FC236}">
-                <a16:creationId xmlns:a16="http://schemas.microsoft.com/office/drawing/2014/main" id="{170B8819-2DD4-48E7-986A-D28285976DE5}"/>
+                <a16:creationId xmlns:a16="http://schemas.microsoft.com/office/drawing/2014/main" id="{D9930CF2-F0DC-4B94-B32D-3AED02C1546E}"/>
               </a:ext>
             </a:extLst>
           </p:cNvPr>
@@ -29919,17 +30395,17 @@
                 <a:ea typeface="Arial"/>
                 <a:cs typeface="Arial"/>
               </a:rPr>
-              <a:t>TypeScript reproduces all 50 frozen Fable request bodies byte for byte.</a:t>
+              <a:t>C01: routine symptoms. C02: urgent symptoms. C06: refill.</a:t>
             </a:r>
           </a:p>
         </p:txBody>
       </p:sp>
       <p:sp>
         <p:nvSpPr>
-          <p:cNvPr id="11" name="">
+          <p:cNvPr id="9" name="">
             <a:extLst xmlns:a="http://schemas.openxmlformats.org/drawingml/2006/main">
               <a:ext uri="{FF2B5EF4-FFF2-40B4-BE49-F238E27FC236}">
-                <a16:creationId xmlns:a16="http://schemas.microsoft.com/office/drawing/2014/main" id="{7455CF31-C4FE-4501-9A27-AED8E3EC20F1}"/>
+                <a16:creationId xmlns:a16="http://schemas.microsoft.com/office/drawing/2014/main" id="{BE1CDD88-999F-4B58-8B39-DF5143BF15A6}"/>
               </a:ext>
             </a:extLst>
           </p:cNvPr>
@@ -29976,17 +30452,17 @@
                 <a:ea typeface="Arial"/>
                 <a:cs typeface="Arial"/>
               </a:rPr>
-              <a:t>The trace exposes final text, request IDs, token counts, and latency.</a:t>
+              <a:t>Edit the message; confirm that the prior answer clears.</a:t>
             </a:r>
           </a:p>
         </p:txBody>
       </p:sp>
       <p:sp>
         <p:nvSpPr>
-          <p:cNvPr id="12" name="">
+          <p:cNvPr id="10" name="">
             <a:extLst xmlns:a="http://schemas.openxmlformats.org/drawingml/2006/main">
               <a:ext uri="{FF2B5EF4-FFF2-40B4-BE49-F238E27FC236}">
-                <a16:creationId xmlns:a16="http://schemas.microsoft.com/office/drawing/2014/main" id="{DC0D0CD4-51C9-4791-ABCF-343F548EBB63}"/>
+                <a16:creationId xmlns:a16="http://schemas.microsoft.com/office/drawing/2014/main" id="{406FB87C-237F-437B-8003-35868B0A7938}"/>
               </a:ext>
             </a:extLst>
           </p:cNvPr>
@@ -29997,8 +30473,8 @@
         </p:nvSpPr>
         <p:spPr>
           <a:xfrm xmlns:a="http://schemas.openxmlformats.org/drawingml/2006/main">
-            <a:off x="762000" y="4504182"/>
-            <a:ext cx="10382250" cy="351854"/>
+            <a:off x="762000" y="5562600"/>
+            <a:ext cx="10382250" cy="590550"/>
           </a:xfrm>
           <a:prstGeom xmlns:a="http://schemas.openxmlformats.org/drawingml/2006/main" prst="rect">
             <a:avLst/>
@@ -30015,9 +30491,9 @@
           <a:lstStyle xmlns:a="http://schemas.openxmlformats.org/drawingml/2006/main"/>
           <a:p xmlns:a="http://schemas.openxmlformats.org/drawingml/2006/main">
             <a:pPr>
-              <a:defRPr sz="2025">
-                <a:solidFill>
-                  <a:srgbClr val="28354A"/>
+              <a:defRPr sz="1875" b="1">
+                <a:solidFill>
+                  <a:srgbClr val="286B68"/>
                 </a:solidFill>
                 <a:latin typeface="Arial"/>
                 <a:ea typeface="Arial"/>
@@ -30025,25 +30501,25 @@
               </a:defRPr>
             </a:pPr>
             <a:r>
-              <a:rPr sz="2025">
-                <a:solidFill>
-                  <a:srgbClr val="28354A"/>
+              <a:rPr sz="1875" b="1">
+                <a:solidFill>
+                  <a:srgbClr val="286B68"/>
                 </a:solidFill>
                 <a:latin typeface="Arial"/>
                 <a:ea typeface="Arial"/>
                 <a:cs typeface="Arial"/>
               </a:rPr>
-              <a:t>Input edits clear results and prevent stale answers from appearing.</a:t>
+              <a:t>One message. One provider call. One bucket and rationale.</a:t>
             </a:r>
           </a:p>
         </p:txBody>
       </p:sp>
       <p:sp>
         <p:nvSpPr>
-          <p:cNvPr id="13" name="">
+          <p:cNvPr id="11" name="">
             <a:extLst xmlns:a="http://schemas.openxmlformats.org/drawingml/2006/main">
               <a:ext uri="{FF2B5EF4-FFF2-40B4-BE49-F238E27FC236}">
-                <a16:creationId xmlns:a16="http://schemas.microsoft.com/office/drawing/2014/main" id="{C802FAEE-AFA2-4BB5-A5BC-4203CBA32C88}"/>
+                <a16:creationId xmlns:a16="http://schemas.microsoft.com/office/drawing/2014/main" id="{E7659AC8-E180-443B-B1E4-52F71A5978A7}"/>
               </a:ext>
             </a:extLst>
           </p:cNvPr>
@@ -30054,8 +30530,8 @@
         </p:nvSpPr>
         <p:spPr>
           <a:xfrm xmlns:a="http://schemas.openxmlformats.org/drawingml/2006/main">
-            <a:off x="762000" y="5886450"/>
-            <a:ext cx="10096500" cy="514350"/>
+            <a:off x="762000" y="6229350"/>
+            <a:ext cx="10096500" cy="466725"/>
           </a:xfrm>
           <a:prstGeom xmlns:a="http://schemas.openxmlformats.org/drawingml/2006/main" prst="rect">
             <a:avLst/>
@@ -30072,7 +30548,7 @@
           <a:lstStyle xmlns:a="http://schemas.openxmlformats.org/drawingml/2006/main"/>
           <a:p xmlns:a="http://schemas.openxmlformats.org/drawingml/2006/main">
             <a:pPr>
-              <a:defRPr sz="1350">
+              <a:defRPr sz="1275">
                 <a:solidFill>
                   <a:srgbClr val="667084"/>
                 </a:solidFill>
@@ -30082,7 +30558,7 @@
               </a:defRPr>
             </a:pPr>
             <a:r>
-              <a:rPr sz="1350">
+              <a:rPr sz="1275">
                 <a:solidFill>
                   <a:srgbClr val="667084"/>
                 </a:solidFill>
@@ -30090,17 +30566,17 @@
                 <a:ea typeface="Arial"/>
                 <a:cs typeface="Arial"/>
               </a:rPr>
-              <a:t>No automatic retry or fallback. Exported traces omit hidden reasoning and credentials.</a:t>
+              <a:t>Live /stripped and saved offline review are separate. Exact inputs: appendix 23.</a:t>
             </a:r>
           </a:p>
         </p:txBody>
       </p:sp>
       <p:sp>
         <p:nvSpPr>
-          <p:cNvPr id="14" name="">
+          <p:cNvPr id="12" name="">
             <a:extLst xmlns:a="http://schemas.openxmlformats.org/drawingml/2006/main">
               <a:ext uri="{FF2B5EF4-FFF2-40B4-BE49-F238E27FC236}">
-                <a16:creationId xmlns:a16="http://schemas.microsoft.com/office/drawing/2014/main" id="{FEE303BA-13D7-4BB5-8589-F8A0E622CA49}"/>
+                <a16:creationId xmlns:a16="http://schemas.microsoft.com/office/drawing/2014/main" id="{76122487-CF88-4253-9EE1-BDC44296DA8A}"/>
               </a:ext>
             </a:extLst>
           </p:cNvPr>
@@ -30155,7 +30631,7 @@
     </p:spTree>
     <p:extLst>
       <p:ext uri="{BB962C8B-B14F-4D97-AF65-F5344CB8AC3E}">
-        <p14:creationId xmlns:p14="http://schemas.microsoft.com/office/powerpoint/2010/main" val="638106072"/>
+        <p14:creationId xmlns:p14="http://schemas.microsoft.com/office/powerpoint/2010/main" val="265312816"/>
       </p:ext>
     </p:extLst>
   </p:cSld>
@@ -30183,10 +30659,10 @@
       </p:grpSpPr>
       <p:sp>
         <p:nvSpPr>
-          <p:cNvPr id="7" name="">
+          <p:cNvPr id="6" name="">
             <a:extLst xmlns:a="http://schemas.openxmlformats.org/drawingml/2006/main">
               <a:ext uri="{FF2B5EF4-FFF2-40B4-BE49-F238E27FC236}">
-                <a16:creationId xmlns:a16="http://schemas.microsoft.com/office/drawing/2014/main" id="{B08CF674-D2EA-4DB8-B3DB-7C50109FD029}"/>
+                <a16:creationId xmlns:a16="http://schemas.microsoft.com/office/drawing/2014/main" id="{195D319D-7D32-4561-AA14-6040D27224E2}"/>
               </a:ext>
             </a:extLst>
           </p:cNvPr>
@@ -30233,14 +30709,14 @@
                 <a:ea typeface="Arial"/>
                 <a:cs typeface="Arial"/>
               </a:rPr>
-              <a:t>Historical outputs: a reference revision</a:t>
+              <a:t>Revised labels changed the historical score</a:t>
             </a:r>
           </a:p>
         </p:txBody>
       </p:sp>
       <p:graphicFrame>
         <p:nvGraphicFramePr>
-          <p:cNvPr id="8" name=""/>
+          <p:cNvPr id="7" name=""/>
           <p:cNvGraphicFramePr/>
           <p:nvPr/>
         </p:nvGraphicFramePr>
@@ -30272,7 +30748,7 @@
                           <a:ea typeface="Arial"/>
                           <a:cs typeface="Arial"/>
                         </a:rPr>
-                        <a:t>Reference view</a:t>
+                        <a:t>Reference</a:t>
                       </a:r>
                     </a:p>
                   </a:txBody>
@@ -30296,7 +30772,7 @@
                           <a:ea typeface="Arial"/>
                           <a:cs typeface="Arial"/>
                         </a:rPr>
-                        <a:t>Fable agreement</a:t>
+                        <a:t>Agreement</a:t>
                       </a:r>
                     </a:p>
                   </a:txBody>
@@ -30320,7 +30796,7 @@
                           <a:ea typeface="Arial"/>
                           <a:cs typeface="Arial"/>
                         </a:rPr>
-                        <a:t>What changed</a:t>
+                        <a:t>Change</a:t>
                       </a:r>
                     </a:p>
                   </a:txBody>
@@ -30346,7 +30822,7 @@
                           <a:ea typeface="Arial"/>
                           <a:cs typeface="Arial"/>
                         </a:rPr>
-                        <a:t>Original physician v2</a:t>
+                        <a:t>Original v2</a:t>
                       </a:r>
                     </a:p>
                   </a:txBody>
@@ -30394,7 +30870,7 @@
                           <a:ea typeface="Arial"/>
                           <a:cs typeface="Arial"/>
                         </a:rPr>
-                        <a:t>C25 excluded; original record preserved</a:t>
+                        <a:t>C25 excluded</a:t>
                       </a:r>
                     </a:p>
                   </a:txBody>
@@ -30420,7 +30896,7 @@
                           <a:ea typeface="Arial"/>
                           <a:cs typeface="Arial"/>
                         </a:rPr>
-                        <a:t>Revised labels, same 49 cases</a:t>
+                        <a:t>Revised, same 49</a:t>
                       </a:r>
                     </a:p>
                   </a:txBody>
@@ -30494,7 +30970,7 @@
                           <a:ea typeface="Arial"/>
                           <a:cs typeface="Arial"/>
                         </a:rPr>
-                        <a:t>Physician v3, all 50 cases</a:t>
+                        <a:t>v3, all 50</a:t>
                       </a:r>
                     </a:p>
                   </a:txBody>
@@ -30542,7 +31018,7 @@
                           <a:ea typeface="Arial"/>
                           <a:cs typeface="Arial"/>
                         </a:rPr>
-                        <a:t>C25 accepted as urgent escalation</a:t>
+                        <a:t>C25 accepted as urgent</a:t>
                       </a:r>
                     </a:p>
                   </a:txBody>
@@ -30562,7 +31038,7 @@
           <p:cNvPr id="3" name="">
             <a:extLst xmlns:a="http://schemas.openxmlformats.org/drawingml/2006/main">
               <a:ext uri="{FF2B5EF4-FFF2-40B4-BE49-F238E27FC236}">
-                <a16:creationId xmlns:a16="http://schemas.microsoft.com/office/drawing/2014/main" id="{6816FF19-C887-43E9-97C0-193FDBB9BA10}"/>
+                <a16:creationId xmlns:a16="http://schemas.microsoft.com/office/drawing/2014/main" id="{C9684EC6-AB6D-43A9-B24B-19BEF49F78CD}"/>
               </a:ext>
             </a:extLst>
           </p:cNvPr>
@@ -30609,7 +31085,7 @@
                 <a:ea typeface="Arial"/>
                 <a:cs typeface="Arial"/>
               </a:rPr>
-              <a:t>C22 and C47 remain ASYNC_PHYSICIAN.</a:t>
+              <a:t>Same model outputs. Revised physician labels.</a:t>
             </a:r>
           </a:p>
         </p:txBody>
@@ -30619,64 +31095,7 @@
           <p:cNvPr id="4" name="">
             <a:extLst xmlns:a="http://schemas.openxmlformats.org/drawingml/2006/main">
               <a:ext uri="{FF2B5EF4-FFF2-40B4-BE49-F238E27FC236}">
-                <a16:creationId xmlns:a16="http://schemas.microsoft.com/office/drawing/2014/main" id="{A9768249-403D-463B-A4D1-187873F22BDE}"/>
-              </a:ext>
-            </a:extLst>
-          </p:cNvPr>
-          <p:cNvSpPr>
-            <a:spLocks xmlns:a="http://schemas.openxmlformats.org/drawingml/2006/main" noGrp="1"/>
-          </p:cNvSpPr>
-          <p:nvPr/>
-        </p:nvSpPr>
-        <p:spPr>
-          <a:xfrm xmlns:a="http://schemas.openxmlformats.org/drawingml/2006/main">
-            <a:off x="762000" y="4090416"/>
-            <a:ext cx="10382250" cy="316992"/>
-          </a:xfrm>
-          <a:prstGeom xmlns:a="http://schemas.openxmlformats.org/drawingml/2006/main" prst="rect">
-            <a:avLst/>
-          </a:prstGeom>
-          <a:noFill xmlns:a="http://schemas.openxmlformats.org/drawingml/2006/main"/>
-          <a:ln xmlns:a="http://schemas.openxmlformats.org/drawingml/2006/main" w="0">
-            <a:noFill/>
-          </a:ln>
-        </p:spPr>
-        <p:txBody>
-          <a:bodyPr xmlns:a="http://schemas.openxmlformats.org/drawingml/2006/main" wrap="square" lIns="0" tIns="0" rIns="0" bIns="0" anchor="t">
-            <a:noAutofit/>
-          </a:bodyPr>
-          <a:lstStyle xmlns:a="http://schemas.openxmlformats.org/drawingml/2006/main"/>
-          <a:p xmlns:a="http://schemas.openxmlformats.org/drawingml/2006/main">
-            <a:pPr>
-              <a:defRPr sz="1800">
-                <a:solidFill>
-                  <a:srgbClr val="28354A"/>
-                </a:solidFill>
-                <a:latin typeface="Arial"/>
-                <a:ea typeface="Arial"/>
-                <a:cs typeface="Arial"/>
-              </a:defRPr>
-            </a:pPr>
-            <a:r>
-              <a:rPr sz="1800">
-                <a:solidFill>
-                  <a:srgbClr val="28354A"/>
-                </a:solidFill>
-                <a:latin typeface="Arial"/>
-                <a:ea typeface="Arial"/>
-                <a:cs typeface="Arial"/>
-              </a:rPr>
-              <a:t>C25 receives a three-bucket label; the review does not specify emergency versus same-day care.</a:t>
-            </a:r>
-          </a:p>
-        </p:txBody>
-      </p:sp>
-      <p:sp>
-        <p:nvSpPr>
-          <p:cNvPr id="5" name="">
-            <a:extLst xmlns:a="http://schemas.openxmlformats.org/drawingml/2006/main">
-              <a:ext uri="{FF2B5EF4-FFF2-40B4-BE49-F238E27FC236}">
-                <a16:creationId xmlns:a16="http://schemas.microsoft.com/office/drawing/2014/main" id="{AE3FE1B4-39F7-4E3E-85CE-20D9F8A57458}"/>
+                <a16:creationId xmlns:a16="http://schemas.microsoft.com/office/drawing/2014/main" id="{68C31CA4-4F5E-4A15-ACA6-3BDB8CA81ABC}"/>
               </a:ext>
             </a:extLst>
           </p:cNvPr>
@@ -30723,17 +31142,17 @@
                 <a:ea typeface="Arial"/>
                 <a:cs typeface="Arial"/>
               </a:rPr>
-              <a:t>Single physician reassessment after viewing outputs; unblinded development evidence. Exact case text: appendices 24–25.</a:t>
+              <a:t>Single physician, post-output review. Independent validation remains pending. Exact messages: appendices 24–25.</a:t>
             </a:r>
           </a:p>
         </p:txBody>
       </p:sp>
       <p:sp>
         <p:nvSpPr>
-          <p:cNvPr id="6" name="">
+          <p:cNvPr id="5" name="">
             <a:extLst xmlns:a="http://schemas.openxmlformats.org/drawingml/2006/main">
               <a:ext uri="{FF2B5EF4-FFF2-40B4-BE49-F238E27FC236}">
-                <a16:creationId xmlns:a16="http://schemas.microsoft.com/office/drawing/2014/main" id="{4EAB5667-6DBC-45C6-84D4-BADC17E76A5E}"/>
+                <a16:creationId xmlns:a16="http://schemas.microsoft.com/office/drawing/2014/main" id="{2D031C12-CDC0-4923-AE28-FCE0497F77E4}"/>
               </a:ext>
             </a:extLst>
           </p:cNvPr>
@@ -30788,7 +31207,7 @@
     </p:spTree>
     <p:extLst>
       <p:ext uri="{BB962C8B-B14F-4D97-AF65-F5344CB8AC3E}">
-        <p14:creationId xmlns:p14="http://schemas.microsoft.com/office/powerpoint/2010/main" val="1051534336"/>
+        <p14:creationId xmlns:p14="http://schemas.microsoft.com/office/powerpoint/2010/main" val="1010955004"/>
       </p:ext>
     </p:extLst>
   </p:cSld>
